--- a/reports/Defi1_Togo_Connectivite_numerique.pptx
+++ b/reports/Defi1_Togo_Connectivite_numerique.pptx
@@ -1,24 +1,24 @@
 
 <file path=ppt/presentation.xml><?xml version="1.0" encoding="utf-8"?>
-<p:presentation xmlns:a="http://schemas.openxmlformats.org/drawingml/2006/main" xmlns:r="http://schemas.openxmlformats.org/officeDocument/2006/relationships" xmlns:p="http://schemas.openxmlformats.org/presentationml/2006/main" saveSubsetFonts="1" autoCompressPictures="0">
+<p:presentation xmlns:a="http://schemas.openxmlformats.org/drawingml/2006/main" xmlns:r="http://schemas.openxmlformats.org/officeDocument/2006/relationships" xmlns:p="http://schemas.openxmlformats.org/presentationml/2006/main" autoCompressPictures="0">
   <p:sldMasterIdLst>
     <p:sldMasterId id="2147483648" r:id="rId1"/>
   </p:sldMasterIdLst>
   <p:sldIdLst>
-    <p:sldId id="256" r:id="rId7"/>
-    <p:sldId id="257" r:id="rId8"/>
-    <p:sldId id="258" r:id="rId9"/>
-    <p:sldId id="259" r:id="rId10"/>
-    <p:sldId id="260" r:id="rId11"/>
-    <p:sldId id="261" r:id="rId12"/>
-    <p:sldId id="262" r:id="rId13"/>
-    <p:sldId id="263" r:id="rId14"/>
-    <p:sldId id="264" r:id="rId15"/>
-    <p:sldId id="265" r:id="rId16"/>
-    <p:sldId id="266" r:id="rId17"/>
-    <p:sldId id="267" r:id="rId18"/>
+    <p:sldId id="256" r:id="rId3"/>
+    <p:sldId id="257" r:id="rId4"/>
+    <p:sldId id="258" r:id="rId5"/>
+    <p:sldId id="259" r:id="rId6"/>
+    <p:sldId id="260" r:id="rId7"/>
+    <p:sldId id="261" r:id="rId8"/>
+    <p:sldId id="262" r:id="rId9"/>
+    <p:sldId id="263" r:id="rId10"/>
+    <p:sldId id="264" r:id="rId11"/>
+    <p:sldId id="265" r:id="rId12"/>
+    <p:sldId id="266" r:id="rId13"/>
+    <p:sldId id="267" r:id="rId14"/>
   </p:sldIdLst>
-  <p:sldSz cx="12191695" cy="6858000" type="screen4x3"/>
+  <p:sldSz cx="12191365" cy="6858000" type="screen4x3"/>
   <p:notesSz cx="6858000" cy="9144000"/>
   <p:defaultTextStyle>
     <a:defPPr>
@@ -115,6 +115,22 @@
       </a:defRPr>
     </a:lvl9pPr>
   </p:defaultTextStyle>
+  <p:extLst>
+    <p:ext uri="{EFAFB233-063F-42B5-8137-9DF3F51BA10A}">
+      <p15:sldGuideLst xmlns:p15="http://schemas.microsoft.com/office/powerpoint/2012/main">
+        <p15:guide id="1" orient="horz" pos="2160" userDrawn="1">
+          <p15:clr>
+            <a:srgbClr val="A4A3A4"/>
+          </p15:clr>
+        </p15:guide>
+        <p15:guide id="2" pos="2880" userDrawn="1">
+          <p15:clr>
+            <a:srgbClr val="A4A3A4"/>
+          </p15:clr>
+        </p15:guide>
+      </p15:sldGuideLst>
+    </p:ext>
+  </p:extLst>
 </p:presentation>
 </file>
 
@@ -299,7 +315,6 @@
           <a:p>
             <a:fld id="{5BCAD085-E8A6-8845-BD4E-CB4CCA059FC4}" type="datetimeFigureOut">
               <a:rPr lang="en-US" smtClean="0"/>
-              <a:t>1/27/13</a:t>
             </a:fld>
             <a:endParaRPr lang="en-US"/>
           </a:p>
@@ -341,18 +356,12 @@
           <a:p>
             <a:fld id="{C1FF6DA9-008F-8B48-92A6-B652298478BF}" type="slidenum">
               <a:rPr lang="en-US" smtClean="0"/>
-              <a:t>‹#›</a:t>
             </a:fld>
             <a:endParaRPr lang="en-US"/>
           </a:p>
         </p:txBody>
       </p:sp>
     </p:spTree>
-    <p:extLst>
-      <p:ext uri="{BB962C8B-B14F-4D97-AF65-F5344CB8AC3E}">
-        <p14:creationId xmlns:p14="http://schemas.microsoft.com/office/powerpoint/2010/main" val="3168075583"/>
-      </p:ext>
-    </p:extLst>
   </p:cSld>
   <p:clrMapOvr>
     <a:masterClrMapping/>
@@ -420,6 +429,7 @@
               <a:rPr lang="en-US" smtClean="0"/>
               <a:t>Click to edit Master text styles</a:t>
             </a:r>
+            <a:endParaRPr lang="en-US" smtClean="0"/>
           </a:p>
           <a:p>
             <a:pPr lvl="1"/>
@@ -427,6 +437,7 @@
               <a:rPr lang="en-US" smtClean="0"/>
               <a:t>Second level</a:t>
             </a:r>
+            <a:endParaRPr lang="en-US" smtClean="0"/>
           </a:p>
           <a:p>
             <a:pPr lvl="2"/>
@@ -434,6 +445,7 @@
               <a:rPr lang="en-US" smtClean="0"/>
               <a:t>Third level</a:t>
             </a:r>
+            <a:endParaRPr lang="en-US" smtClean="0"/>
           </a:p>
           <a:p>
             <a:pPr lvl="3"/>
@@ -441,6 +453,7 @@
               <a:rPr lang="en-US" smtClean="0"/>
               <a:t>Fourth level</a:t>
             </a:r>
+            <a:endParaRPr lang="en-US" smtClean="0"/>
           </a:p>
           <a:p>
             <a:pPr lvl="4"/>
@@ -469,7 +482,6 @@
           <a:p>
             <a:fld id="{5BCAD085-E8A6-8845-BD4E-CB4CCA059FC4}" type="datetimeFigureOut">
               <a:rPr lang="en-US" smtClean="0"/>
-              <a:t>1/27/13</a:t>
             </a:fld>
             <a:endParaRPr lang="en-US"/>
           </a:p>
@@ -511,18 +523,12 @@
           <a:p>
             <a:fld id="{C1FF6DA9-008F-8B48-92A6-B652298478BF}" type="slidenum">
               <a:rPr lang="en-US" smtClean="0"/>
-              <a:t>‹#›</a:t>
             </a:fld>
             <a:endParaRPr lang="en-US"/>
           </a:p>
         </p:txBody>
       </p:sp>
     </p:spTree>
-    <p:extLst>
-      <p:ext uri="{BB962C8B-B14F-4D97-AF65-F5344CB8AC3E}">
-        <p14:creationId xmlns:p14="http://schemas.microsoft.com/office/powerpoint/2010/main" val="2910927964"/>
-      </p:ext>
-    </p:extLst>
   </p:cSld>
   <p:clrMapOvr>
     <a:masterClrMapping/>
@@ -600,6 +606,7 @@
               <a:rPr lang="en-US" smtClean="0"/>
               <a:t>Click to edit Master text styles</a:t>
             </a:r>
+            <a:endParaRPr lang="en-US" smtClean="0"/>
           </a:p>
           <a:p>
             <a:pPr lvl="1"/>
@@ -607,6 +614,7 @@
               <a:rPr lang="en-US" smtClean="0"/>
               <a:t>Second level</a:t>
             </a:r>
+            <a:endParaRPr lang="en-US" smtClean="0"/>
           </a:p>
           <a:p>
             <a:pPr lvl="2"/>
@@ -614,6 +622,7 @@
               <a:rPr lang="en-US" smtClean="0"/>
               <a:t>Third level</a:t>
             </a:r>
+            <a:endParaRPr lang="en-US" smtClean="0"/>
           </a:p>
           <a:p>
             <a:pPr lvl="3"/>
@@ -621,6 +630,7 @@
               <a:rPr lang="en-US" smtClean="0"/>
               <a:t>Fourth level</a:t>
             </a:r>
+            <a:endParaRPr lang="en-US" smtClean="0"/>
           </a:p>
           <a:p>
             <a:pPr lvl="4"/>
@@ -649,7 +659,6 @@
           <a:p>
             <a:fld id="{5BCAD085-E8A6-8845-BD4E-CB4CCA059FC4}" type="datetimeFigureOut">
               <a:rPr lang="en-US" smtClean="0"/>
-              <a:t>1/27/13</a:t>
             </a:fld>
             <a:endParaRPr lang="en-US"/>
           </a:p>
@@ -691,18 +700,12 @@
           <a:p>
             <a:fld id="{C1FF6DA9-008F-8B48-92A6-B652298478BF}" type="slidenum">
               <a:rPr lang="en-US" smtClean="0"/>
-              <a:t>‹#›</a:t>
             </a:fld>
             <a:endParaRPr lang="en-US"/>
           </a:p>
         </p:txBody>
       </p:sp>
     </p:spTree>
-    <p:extLst>
-      <p:ext uri="{BB962C8B-B14F-4D97-AF65-F5344CB8AC3E}">
-        <p14:creationId xmlns:p14="http://schemas.microsoft.com/office/powerpoint/2010/main" val="3612223792"/>
-      </p:ext>
-    </p:extLst>
   </p:cSld>
   <p:clrMapOvr>
     <a:masterClrMapping/>
@@ -770,6 +773,7 @@
               <a:rPr lang="en-US" smtClean="0"/>
               <a:t>Click to edit Master text styles</a:t>
             </a:r>
+            <a:endParaRPr lang="en-US" smtClean="0"/>
           </a:p>
           <a:p>
             <a:pPr lvl="1"/>
@@ -777,6 +781,7 @@
               <a:rPr lang="en-US" smtClean="0"/>
               <a:t>Second level</a:t>
             </a:r>
+            <a:endParaRPr lang="en-US" smtClean="0"/>
           </a:p>
           <a:p>
             <a:pPr lvl="2"/>
@@ -784,6 +789,7 @@
               <a:rPr lang="en-US" smtClean="0"/>
               <a:t>Third level</a:t>
             </a:r>
+            <a:endParaRPr lang="en-US" smtClean="0"/>
           </a:p>
           <a:p>
             <a:pPr lvl="3"/>
@@ -791,6 +797,7 @@
               <a:rPr lang="en-US" smtClean="0"/>
               <a:t>Fourth level</a:t>
             </a:r>
+            <a:endParaRPr lang="en-US" smtClean="0"/>
           </a:p>
           <a:p>
             <a:pPr lvl="4"/>
@@ -819,7 +826,6 @@
           <a:p>
             <a:fld id="{5BCAD085-E8A6-8845-BD4E-CB4CCA059FC4}" type="datetimeFigureOut">
               <a:rPr lang="en-US" smtClean="0"/>
-              <a:t>1/27/13</a:t>
             </a:fld>
             <a:endParaRPr lang="en-US"/>
           </a:p>
@@ -861,18 +867,12 @@
           <a:p>
             <a:fld id="{C1FF6DA9-008F-8B48-92A6-B652298478BF}" type="slidenum">
               <a:rPr lang="en-US" smtClean="0"/>
-              <a:t>‹#›</a:t>
             </a:fld>
             <a:endParaRPr lang="en-US"/>
           </a:p>
         </p:txBody>
       </p:sp>
     </p:spTree>
-    <p:extLst>
-      <p:ext uri="{BB962C8B-B14F-4D97-AF65-F5344CB8AC3E}">
-        <p14:creationId xmlns:p14="http://schemas.microsoft.com/office/powerpoint/2010/main" val="2614314258"/>
-      </p:ext>
-    </p:extLst>
   </p:cSld>
   <p:clrMapOvr>
     <a:masterClrMapping/>
@@ -1045,6 +1045,7 @@
               <a:rPr lang="en-US" smtClean="0"/>
               <a:t>Click to edit Master text styles</a:t>
             </a:r>
+            <a:endParaRPr lang="en-US" smtClean="0"/>
           </a:p>
         </p:txBody>
       </p:sp>
@@ -1065,7 +1066,6 @@
           <a:p>
             <a:fld id="{5BCAD085-E8A6-8845-BD4E-CB4CCA059FC4}" type="datetimeFigureOut">
               <a:rPr lang="en-US" smtClean="0"/>
-              <a:t>1/27/13</a:t>
             </a:fld>
             <a:endParaRPr lang="en-US"/>
           </a:p>
@@ -1107,18 +1107,12 @@
           <a:p>
             <a:fld id="{C1FF6DA9-008F-8B48-92A6-B652298478BF}" type="slidenum">
               <a:rPr lang="en-US" smtClean="0"/>
-              <a:t>‹#›</a:t>
             </a:fld>
             <a:endParaRPr lang="en-US"/>
           </a:p>
         </p:txBody>
       </p:sp>
     </p:spTree>
-    <p:extLst>
-      <p:ext uri="{BB962C8B-B14F-4D97-AF65-F5344CB8AC3E}">
-        <p14:creationId xmlns:p14="http://schemas.microsoft.com/office/powerpoint/2010/main" val="960648375"/>
-      </p:ext>
-    </p:extLst>
   </p:cSld>
   <p:clrMapOvr>
     <a:masterClrMapping/>
@@ -1219,6 +1213,7 @@
               <a:rPr lang="en-US" smtClean="0"/>
               <a:t>Click to edit Master text styles</a:t>
             </a:r>
+            <a:endParaRPr lang="en-US" smtClean="0"/>
           </a:p>
           <a:p>
             <a:pPr lvl="1"/>
@@ -1226,6 +1221,7 @@
               <a:rPr lang="en-US" smtClean="0"/>
               <a:t>Second level</a:t>
             </a:r>
+            <a:endParaRPr lang="en-US" smtClean="0"/>
           </a:p>
           <a:p>
             <a:pPr lvl="2"/>
@@ -1233,6 +1229,7 @@
               <a:rPr lang="en-US" smtClean="0"/>
               <a:t>Third level</a:t>
             </a:r>
+            <a:endParaRPr lang="en-US" smtClean="0"/>
           </a:p>
           <a:p>
             <a:pPr lvl="3"/>
@@ -1240,6 +1237,7 @@
               <a:rPr lang="en-US" smtClean="0"/>
               <a:t>Fourth level</a:t>
             </a:r>
+            <a:endParaRPr lang="en-US" smtClean="0"/>
           </a:p>
           <a:p>
             <a:pPr lvl="4"/>
@@ -1304,6 +1302,7 @@
               <a:rPr lang="en-US" smtClean="0"/>
               <a:t>Click to edit Master text styles</a:t>
             </a:r>
+            <a:endParaRPr lang="en-US" smtClean="0"/>
           </a:p>
           <a:p>
             <a:pPr lvl="1"/>
@@ -1311,6 +1310,7 @@
               <a:rPr lang="en-US" smtClean="0"/>
               <a:t>Second level</a:t>
             </a:r>
+            <a:endParaRPr lang="en-US" smtClean="0"/>
           </a:p>
           <a:p>
             <a:pPr lvl="2"/>
@@ -1318,6 +1318,7 @@
               <a:rPr lang="en-US" smtClean="0"/>
               <a:t>Third level</a:t>
             </a:r>
+            <a:endParaRPr lang="en-US" smtClean="0"/>
           </a:p>
           <a:p>
             <a:pPr lvl="3"/>
@@ -1325,6 +1326,7 @@
               <a:rPr lang="en-US" smtClean="0"/>
               <a:t>Fourth level</a:t>
             </a:r>
+            <a:endParaRPr lang="en-US" smtClean="0"/>
           </a:p>
           <a:p>
             <a:pPr lvl="4"/>
@@ -1353,7 +1355,6 @@
           <a:p>
             <a:fld id="{5BCAD085-E8A6-8845-BD4E-CB4CCA059FC4}" type="datetimeFigureOut">
               <a:rPr lang="en-US" smtClean="0"/>
-              <a:t>1/27/13</a:t>
             </a:fld>
             <a:endParaRPr lang="en-US"/>
           </a:p>
@@ -1395,18 +1396,12 @@
           <a:p>
             <a:fld id="{C1FF6DA9-008F-8B48-92A6-B652298478BF}" type="slidenum">
               <a:rPr lang="en-US" smtClean="0"/>
-              <a:t>‹#›</a:t>
             </a:fld>
             <a:endParaRPr lang="en-US"/>
           </a:p>
         </p:txBody>
       </p:sp>
     </p:spTree>
-    <p:extLst>
-      <p:ext uri="{BB962C8B-B14F-4D97-AF65-F5344CB8AC3E}">
-        <p14:creationId xmlns:p14="http://schemas.microsoft.com/office/powerpoint/2010/main" val="2782244947"/>
-      </p:ext>
-    </p:extLst>
   </p:cSld>
   <p:clrMapOvr>
     <a:masterClrMapping/>
@@ -1520,6 +1515,7 @@
               <a:rPr lang="en-US" smtClean="0"/>
               <a:t>Click to edit Master text styles</a:t>
             </a:r>
+            <a:endParaRPr lang="en-US" smtClean="0"/>
           </a:p>
         </p:txBody>
       </p:sp>
@@ -1576,6 +1572,7 @@
               <a:rPr lang="en-US" smtClean="0"/>
               <a:t>Click to edit Master text styles</a:t>
             </a:r>
+            <a:endParaRPr lang="en-US" smtClean="0"/>
           </a:p>
           <a:p>
             <a:pPr lvl="1"/>
@@ -1583,6 +1580,7 @@
               <a:rPr lang="en-US" smtClean="0"/>
               <a:t>Second level</a:t>
             </a:r>
+            <a:endParaRPr lang="en-US" smtClean="0"/>
           </a:p>
           <a:p>
             <a:pPr lvl="2"/>
@@ -1590,6 +1588,7 @@
               <a:rPr lang="en-US" smtClean="0"/>
               <a:t>Third level</a:t>
             </a:r>
+            <a:endParaRPr lang="en-US" smtClean="0"/>
           </a:p>
           <a:p>
             <a:pPr lvl="3"/>
@@ -1597,6 +1596,7 @@
               <a:rPr lang="en-US" smtClean="0"/>
               <a:t>Fourth level</a:t>
             </a:r>
+            <a:endParaRPr lang="en-US" smtClean="0"/>
           </a:p>
           <a:p>
             <a:pPr lvl="4"/>
@@ -1670,6 +1670,7 @@
               <a:rPr lang="en-US" smtClean="0"/>
               <a:t>Click to edit Master text styles</a:t>
             </a:r>
+            <a:endParaRPr lang="en-US" smtClean="0"/>
           </a:p>
         </p:txBody>
       </p:sp>
@@ -1726,6 +1727,7 @@
               <a:rPr lang="en-US" smtClean="0"/>
               <a:t>Click to edit Master text styles</a:t>
             </a:r>
+            <a:endParaRPr lang="en-US" smtClean="0"/>
           </a:p>
           <a:p>
             <a:pPr lvl="1"/>
@@ -1733,6 +1735,7 @@
               <a:rPr lang="en-US" smtClean="0"/>
               <a:t>Second level</a:t>
             </a:r>
+            <a:endParaRPr lang="en-US" smtClean="0"/>
           </a:p>
           <a:p>
             <a:pPr lvl="2"/>
@@ -1740,6 +1743,7 @@
               <a:rPr lang="en-US" smtClean="0"/>
               <a:t>Third level</a:t>
             </a:r>
+            <a:endParaRPr lang="en-US" smtClean="0"/>
           </a:p>
           <a:p>
             <a:pPr lvl="3"/>
@@ -1747,6 +1751,7 @@
               <a:rPr lang="en-US" smtClean="0"/>
               <a:t>Fourth level</a:t>
             </a:r>
+            <a:endParaRPr lang="en-US" smtClean="0"/>
           </a:p>
           <a:p>
             <a:pPr lvl="4"/>
@@ -1775,7 +1780,6 @@
           <a:p>
             <a:fld id="{5BCAD085-E8A6-8845-BD4E-CB4CCA059FC4}" type="datetimeFigureOut">
               <a:rPr lang="en-US" smtClean="0"/>
-              <a:t>1/27/13</a:t>
             </a:fld>
             <a:endParaRPr lang="en-US"/>
           </a:p>
@@ -1817,18 +1821,12 @@
           <a:p>
             <a:fld id="{C1FF6DA9-008F-8B48-92A6-B652298478BF}" type="slidenum">
               <a:rPr lang="en-US" smtClean="0"/>
-              <a:t>‹#›</a:t>
             </a:fld>
             <a:endParaRPr lang="en-US"/>
           </a:p>
         </p:txBody>
       </p:sp>
     </p:spTree>
-    <p:extLst>
-      <p:ext uri="{BB962C8B-B14F-4D97-AF65-F5344CB8AC3E}">
-        <p14:creationId xmlns:p14="http://schemas.microsoft.com/office/powerpoint/2010/main" val="990158736"/>
-      </p:ext>
-    </p:extLst>
   </p:cSld>
   <p:clrMapOvr>
     <a:masterClrMapping/>
@@ -1893,7 +1891,6 @@
           <a:p>
             <a:fld id="{5BCAD085-E8A6-8845-BD4E-CB4CCA059FC4}" type="datetimeFigureOut">
               <a:rPr lang="en-US" smtClean="0"/>
-              <a:t>1/27/13</a:t>
             </a:fld>
             <a:endParaRPr lang="en-US"/>
           </a:p>
@@ -1935,18 +1932,12 @@
           <a:p>
             <a:fld id="{C1FF6DA9-008F-8B48-92A6-B652298478BF}" type="slidenum">
               <a:rPr lang="en-US" smtClean="0"/>
-              <a:t>‹#›</a:t>
             </a:fld>
             <a:endParaRPr lang="en-US"/>
           </a:p>
         </p:txBody>
       </p:sp>
     </p:spTree>
-    <p:extLst>
-      <p:ext uri="{BB962C8B-B14F-4D97-AF65-F5344CB8AC3E}">
-        <p14:creationId xmlns:p14="http://schemas.microsoft.com/office/powerpoint/2010/main" val="727027711"/>
-      </p:ext>
-    </p:extLst>
   </p:cSld>
   <p:clrMapOvr>
     <a:masterClrMapping/>
@@ -1988,7 +1979,6 @@
           <a:p>
             <a:fld id="{5BCAD085-E8A6-8845-BD4E-CB4CCA059FC4}" type="datetimeFigureOut">
               <a:rPr lang="en-US" smtClean="0"/>
-              <a:t>1/27/13</a:t>
             </a:fld>
             <a:endParaRPr lang="en-US"/>
           </a:p>
@@ -2030,18 +2020,12 @@
           <a:p>
             <a:fld id="{C1FF6DA9-008F-8B48-92A6-B652298478BF}" type="slidenum">
               <a:rPr lang="en-US" smtClean="0"/>
-              <a:t>‹#›</a:t>
             </a:fld>
             <a:endParaRPr lang="en-US"/>
           </a:p>
         </p:txBody>
       </p:sp>
     </p:spTree>
-    <p:extLst>
-      <p:ext uri="{BB962C8B-B14F-4D97-AF65-F5344CB8AC3E}">
-        <p14:creationId xmlns:p14="http://schemas.microsoft.com/office/powerpoint/2010/main" val="1212999818"/>
-      </p:ext>
-    </p:extLst>
   </p:cSld>
   <p:clrMapOvr>
     <a:masterClrMapping/>
@@ -2151,6 +2135,7 @@
               <a:rPr lang="en-US" smtClean="0"/>
               <a:t>Click to edit Master text styles</a:t>
             </a:r>
+            <a:endParaRPr lang="en-US" smtClean="0"/>
           </a:p>
           <a:p>
             <a:pPr lvl="1"/>
@@ -2158,6 +2143,7 @@
               <a:rPr lang="en-US" smtClean="0"/>
               <a:t>Second level</a:t>
             </a:r>
+            <a:endParaRPr lang="en-US" smtClean="0"/>
           </a:p>
           <a:p>
             <a:pPr lvl="2"/>
@@ -2165,6 +2151,7 @@
               <a:rPr lang="en-US" smtClean="0"/>
               <a:t>Third level</a:t>
             </a:r>
+            <a:endParaRPr lang="en-US" smtClean="0"/>
           </a:p>
           <a:p>
             <a:pPr lvl="3"/>
@@ -2172,6 +2159,7 @@
               <a:rPr lang="en-US" smtClean="0"/>
               <a:t>Fourth level</a:t>
             </a:r>
+            <a:endParaRPr lang="en-US" smtClean="0"/>
           </a:p>
           <a:p>
             <a:pPr lvl="4"/>
@@ -2245,6 +2233,7 @@
               <a:rPr lang="en-US" smtClean="0"/>
               <a:t>Click to edit Master text styles</a:t>
             </a:r>
+            <a:endParaRPr lang="en-US" smtClean="0"/>
           </a:p>
         </p:txBody>
       </p:sp>
@@ -2265,7 +2254,6 @@
           <a:p>
             <a:fld id="{5BCAD085-E8A6-8845-BD4E-CB4CCA059FC4}" type="datetimeFigureOut">
               <a:rPr lang="en-US" smtClean="0"/>
-              <a:t>1/27/13</a:t>
             </a:fld>
             <a:endParaRPr lang="en-US"/>
           </a:p>
@@ -2307,18 +2295,12 @@
           <a:p>
             <a:fld id="{C1FF6DA9-008F-8B48-92A6-B652298478BF}" type="slidenum">
               <a:rPr lang="en-US" smtClean="0"/>
-              <a:t>‹#›</a:t>
             </a:fld>
             <a:endParaRPr lang="en-US"/>
           </a:p>
         </p:txBody>
       </p:sp>
     </p:spTree>
-    <p:extLst>
-      <p:ext uri="{BB962C8B-B14F-4D97-AF65-F5344CB8AC3E}">
-        <p14:creationId xmlns:p14="http://schemas.microsoft.com/office/powerpoint/2010/main" val="1840726560"/>
-      </p:ext>
-    </p:extLst>
   </p:cSld>
   <p:clrMapOvr>
     <a:masterClrMapping/>
@@ -2498,6 +2480,7 @@
               <a:rPr lang="en-US" smtClean="0"/>
               <a:t>Click to edit Master text styles</a:t>
             </a:r>
+            <a:endParaRPr lang="en-US" smtClean="0"/>
           </a:p>
         </p:txBody>
       </p:sp>
@@ -2518,7 +2501,6 @@
           <a:p>
             <a:fld id="{5BCAD085-E8A6-8845-BD4E-CB4CCA059FC4}" type="datetimeFigureOut">
               <a:rPr lang="en-US" smtClean="0"/>
-              <a:t>1/27/13</a:t>
             </a:fld>
             <a:endParaRPr lang="en-US"/>
           </a:p>
@@ -2560,18 +2542,12 @@
           <a:p>
             <a:fld id="{C1FF6DA9-008F-8B48-92A6-B652298478BF}" type="slidenum">
               <a:rPr lang="en-US" smtClean="0"/>
-              <a:t>‹#›</a:t>
             </a:fld>
             <a:endParaRPr lang="en-US"/>
           </a:p>
         </p:txBody>
       </p:sp>
     </p:spTree>
-    <p:extLst>
-      <p:ext uri="{BB962C8B-B14F-4D97-AF65-F5344CB8AC3E}">
-        <p14:creationId xmlns:p14="http://schemas.microsoft.com/office/powerpoint/2010/main" val="3889236939"/>
-      </p:ext>
-    </p:extLst>
   </p:cSld>
   <p:clrMapOvr>
     <a:masterClrMapping/>
@@ -2664,6 +2640,7 @@
               <a:rPr lang="en-US" smtClean="0"/>
               <a:t>Click to edit Master text styles</a:t>
             </a:r>
+            <a:endParaRPr lang="en-US" smtClean="0"/>
           </a:p>
           <a:p>
             <a:pPr lvl="1"/>
@@ -2671,6 +2648,7 @@
               <a:rPr lang="en-US" smtClean="0"/>
               <a:t>Second level</a:t>
             </a:r>
+            <a:endParaRPr lang="en-US" smtClean="0"/>
           </a:p>
           <a:p>
             <a:pPr lvl="2"/>
@@ -2678,6 +2656,7 @@
               <a:rPr lang="en-US" smtClean="0"/>
               <a:t>Third level</a:t>
             </a:r>
+            <a:endParaRPr lang="en-US" smtClean="0"/>
           </a:p>
           <a:p>
             <a:pPr lvl="3"/>
@@ -2685,6 +2664,7 @@
               <a:rPr lang="en-US" smtClean="0"/>
               <a:t>Fourth level</a:t>
             </a:r>
+            <a:endParaRPr lang="en-US" smtClean="0"/>
           </a:p>
           <a:p>
             <a:pPr lvl="4"/>
@@ -2731,7 +2711,6 @@
           <a:p>
             <a:fld id="{5BCAD085-E8A6-8845-BD4E-CB4CCA059FC4}" type="datetimeFigureOut">
               <a:rPr lang="en-US" smtClean="0"/>
-              <a:t>1/27/13</a:t>
             </a:fld>
             <a:endParaRPr lang="en-US"/>
           </a:p>
@@ -2809,18 +2788,12 @@
           <a:p>
             <a:fld id="{C1FF6DA9-008F-8B48-92A6-B652298478BF}" type="slidenum">
               <a:rPr lang="en-US" smtClean="0"/>
-              <a:t>‹#›</a:t>
             </a:fld>
             <a:endParaRPr lang="en-US"/>
           </a:p>
         </p:txBody>
       </p:sp>
     </p:spTree>
-    <p:extLst>
-      <p:ext uri="{BB962C8B-B14F-4D97-AF65-F5344CB8AC3E}">
-        <p14:creationId xmlns:p14="http://schemas.microsoft.com/office/powerpoint/2010/main" val="2209977519"/>
-      </p:ext>
-    </p:extLst>
   </p:cSld>
   <p:clrMap bg1="lt1" tx1="dk1" bg2="lt2" tx2="dk2" accent1="accent1" accent2="accent2" accent3="accent3" accent4="accent4" accent5="accent5" accent6="accent6" hlink="hlink" folHlink="folHlink"/>
   <p:sldLayoutIdLst>
@@ -2858,7 +2831,7 @@
         <a:spcBef>
           <a:spcPct val="20000"/>
         </a:spcBef>
-        <a:buFont typeface="Arial"/>
+        <a:buFont typeface="Arial" panose="020B0604020202020204"/>
         <a:buChar char="•"/>
         <a:defRPr sz="3200" kern="1200">
           <a:solidFill>
@@ -2873,7 +2846,7 @@
         <a:spcBef>
           <a:spcPct val="20000"/>
         </a:spcBef>
-        <a:buFont typeface="Arial"/>
+        <a:buFont typeface="Arial" panose="020B0604020202020204"/>
         <a:buChar char="–"/>
         <a:defRPr sz="2800" kern="1200">
           <a:solidFill>
@@ -2888,7 +2861,7 @@
         <a:spcBef>
           <a:spcPct val="20000"/>
         </a:spcBef>
-        <a:buFont typeface="Arial"/>
+        <a:buFont typeface="Arial" panose="020B0604020202020204"/>
         <a:buChar char="•"/>
         <a:defRPr sz="2400" kern="1200">
           <a:solidFill>
@@ -2903,7 +2876,7 @@
         <a:spcBef>
           <a:spcPct val="20000"/>
         </a:spcBef>
-        <a:buFont typeface="Arial"/>
+        <a:buFont typeface="Arial" panose="020B0604020202020204"/>
         <a:buChar char="–"/>
         <a:defRPr sz="2000" kern="1200">
           <a:solidFill>
@@ -2918,7 +2891,7 @@
         <a:spcBef>
           <a:spcPct val="20000"/>
         </a:spcBef>
-        <a:buFont typeface="Arial"/>
+        <a:buFont typeface="Arial" panose="020B0604020202020204"/>
         <a:buChar char="»"/>
         <a:defRPr sz="2000" kern="1200">
           <a:solidFill>
@@ -2933,7 +2906,7 @@
         <a:spcBef>
           <a:spcPct val="20000"/>
         </a:spcBef>
-        <a:buFont typeface="Arial"/>
+        <a:buFont typeface="Arial" panose="020B0604020202020204"/>
         <a:buChar char="•"/>
         <a:defRPr sz="2000" kern="1200">
           <a:solidFill>
@@ -2948,7 +2921,7 @@
         <a:spcBef>
           <a:spcPct val="20000"/>
         </a:spcBef>
-        <a:buFont typeface="Arial"/>
+        <a:buFont typeface="Arial" panose="020B0604020202020204"/>
         <a:buChar char="•"/>
         <a:defRPr sz="2000" kern="1200">
           <a:solidFill>
@@ -2963,7 +2936,7 @@
         <a:spcBef>
           <a:spcPct val="20000"/>
         </a:spcBef>
-        <a:buFont typeface="Arial"/>
+        <a:buFont typeface="Arial" panose="020B0604020202020204"/>
         <a:buChar char="•"/>
         <a:defRPr sz="2000" kern="1200">
           <a:solidFill>
@@ -2978,7 +2951,7 @@
         <a:spcBef>
           <a:spcPct val="20000"/>
         </a:spcBef>
-        <a:buFont typeface="Arial"/>
+        <a:buFont typeface="Arial" panose="020B0604020202020204"/>
         <a:buChar char="•"/>
         <a:defRPr sz="2000" kern="1200">
           <a:solidFill>
@@ -3090,7 +3063,7 @@
 </file>
 
 <file path=ppt/slides/slide1.xml><?xml version="1.0" encoding="utf-8"?>
-<p:sld xmlns:a="http://schemas.openxmlformats.org/drawingml/2006/main" xmlns:p="http://schemas.openxmlformats.org/presentationml/2006/main" xmlns:r="http://schemas.openxmlformats.org/officeDocument/2006/relationships">
+<p:sld xmlns:a="http://schemas.openxmlformats.org/drawingml/2006/main" xmlns:r="http://schemas.openxmlformats.org/officeDocument/2006/relationships" xmlns:p="http://schemas.openxmlformats.org/presentationml/2006/main">
   <p:cSld>
     <p:spTree>
       <p:nvGrpSpPr>
@@ -3292,7 +3265,7 @@
           <a:noFill/>
         </p:spPr>
         <p:txBody>
-          <a:bodyPr wrap="square" lIns="0" rIns="0" tIns="0" bIns="0">
+          <a:bodyPr wrap="square" lIns="0" tIns="0" rIns="0" bIns="0">
             <a:spAutoFit/>
           </a:bodyPr>
           <a:lstStyle/>
@@ -3307,10 +3280,16 @@
                 <a:solidFill>
                   <a:srgbClr val="8EB6A6"/>
                 </a:solidFill>
-                <a:latin typeface="Segoe UI"/>
+                <a:latin typeface="Segoe UI" panose="020B0502040204020203"/>
               </a:rPr>
               <a:t>DÉFI 1 · ÉCONOMIE NUMÉRIQUE · RÉPUBLIQUE TOGOLAISE</a:t>
             </a:r>
+            <a:endParaRPr sz="950" b="1" spc="190">
+              <a:solidFill>
+                <a:srgbClr val="8EB6A6"/>
+              </a:solidFill>
+              <a:latin typeface="Segoe UI" panose="020B0502040204020203"/>
+            </a:endParaRPr>
           </a:p>
         </p:txBody>
       </p:sp>
@@ -3331,7 +3310,7 @@
           <a:noFill/>
         </p:spPr>
         <p:txBody>
-          <a:bodyPr wrap="square" lIns="0" rIns="0" tIns="0" bIns="0">
+          <a:bodyPr wrap="square" lIns="0" tIns="0" rIns="0" bIns="0">
             <a:spAutoFit/>
           </a:bodyPr>
           <a:lstStyle/>
@@ -3346,10 +3325,16 @@
                 <a:solidFill>
                   <a:srgbClr val="FFFFFF"/>
                 </a:solidFill>
-                <a:latin typeface="Segoe UI"/>
+                <a:latin typeface="Segoe UI" panose="020B0502040204020203"/>
               </a:rPr>
               <a:t>Connecter le Togo</a:t>
             </a:r>
+            <a:endParaRPr sz="4300" b="1" spc="-50">
+              <a:solidFill>
+                <a:srgbClr val="FFFFFF"/>
+              </a:solidFill>
+              <a:latin typeface="Segoe UI" panose="020B0502040204020203"/>
+            </a:endParaRPr>
           </a:p>
           <a:p>
             <a:pPr algn="l">
@@ -3362,10 +3347,16 @@
                 <a:solidFill>
                   <a:srgbClr val="FFFFFF"/>
                 </a:solidFill>
-                <a:latin typeface="Segoe UI"/>
+                <a:latin typeface="Segoe UI" panose="020B0502040204020203"/>
               </a:rPr>
               <a:t>là où le manque est prouvé</a:t>
             </a:r>
+            <a:endParaRPr sz="4300" b="1" spc="-50">
+              <a:solidFill>
+                <a:srgbClr val="FFFFFF"/>
+              </a:solidFill>
+              <a:latin typeface="Segoe UI" panose="020B0502040204020203"/>
+            </a:endParaRPr>
           </a:p>
         </p:txBody>
       </p:sp>
@@ -3430,7 +3421,7 @@
           <a:noFill/>
         </p:spPr>
         <p:txBody>
-          <a:bodyPr wrap="square" lIns="0" rIns="0" tIns="0" bIns="0">
+          <a:bodyPr wrap="square" lIns="0" tIns="0" rIns="0" bIns="0">
             <a:spAutoFit/>
           </a:bodyPr>
           <a:lstStyle/>
@@ -3445,10 +3436,16 @@
                 <a:solidFill>
                   <a:srgbClr val="CBDED6"/>
                 </a:solidFill>
-                <a:latin typeface="Segoe UI"/>
+                <a:latin typeface="Segoe UI" panose="020B0502040204020203"/>
               </a:rPr>
               <a:t>Le Togo compte un point de service financier numérique pour 409 habitants. Cette moyenne ne dit rien d'utile : entre la préfecture la mieux dotée et la moins dotée, l'écart est de 1 à 12,7.</a:t>
             </a:r>
+            <a:endParaRPr sz="1400" b="0">
+              <a:solidFill>
+                <a:srgbClr val="CBDED6"/>
+              </a:solidFill>
+              <a:latin typeface="Segoe UI" panose="020B0502040204020203"/>
+            </a:endParaRPr>
           </a:p>
           <a:p>
             <a:pPr algn="l">
@@ -3461,22 +3458,478 @@
                 <a:solidFill>
                   <a:srgbClr val="CBDED6"/>
                 </a:solidFill>
-                <a:latin typeface="Segoe UI"/>
+                <a:latin typeface="Segoe UI" panose="020B0502040204020203"/>
               </a:rPr>
               <a:t>Ce diagnostic désigne les territoires où investir, et publie de quoi contester le classement.</a:t>
             </a:r>
-          </a:p>
-        </p:txBody>
-      </p:sp>
-      <p:sp>
-        <p:nvSpPr>
-          <p:cNvPr id="10" name="Rectangle 9"/>
+            <a:endParaRPr sz="1400" b="0">
+              <a:solidFill>
+                <a:srgbClr val="CBDED6"/>
+              </a:solidFill>
+              <a:latin typeface="Segoe UI" panose="020B0502040204020203"/>
+            </a:endParaRPr>
+          </a:p>
+        </p:txBody>
+      </p:sp>
+      <p:sp>
+        <p:nvSpPr>
+          <p:cNvPr id="11" name="TextBox 10"/>
+          <p:cNvSpPr txBox="1"/>
+          <p:nvPr/>
+        </p:nvSpPr>
+        <p:spPr>
+          <a:xfrm>
+            <a:off x="868680" y="4828032"/>
+            <a:ext cx="2596896" cy="219456"/>
+          </a:xfrm>
+          <a:prstGeom prst="rect">
+            <a:avLst/>
+          </a:prstGeom>
+          <a:noFill/>
+        </p:spPr>
+        <p:txBody>
+          <a:bodyPr wrap="square" lIns="0" tIns="0" rIns="0" bIns="0">
+            <a:spAutoFit/>
+          </a:bodyPr>
+          <a:lstStyle/>
+          <a:p>
+            <a:pPr algn="l">
+              <a:lnSpc>
+                <a:spcPct val="120000"/>
+              </a:lnSpc>
+            </a:pPr>
+            <a:r>
+              <a:rPr sz="850" b="1" spc="130">
+                <a:solidFill>
+                  <a:srgbClr val="8EB6A6"/>
+                </a:solidFill>
+                <a:latin typeface="Segoe UI" panose="020B0502040204020203"/>
+              </a:rPr>
+              <a:t>HABITANTS PAR POINT DE SERVICE</a:t>
+            </a:r>
+            <a:endParaRPr sz="850" b="1" spc="130">
+              <a:solidFill>
+                <a:srgbClr val="8EB6A6"/>
+              </a:solidFill>
+              <a:latin typeface="Segoe UI" panose="020B0502040204020203"/>
+            </a:endParaRPr>
+          </a:p>
+        </p:txBody>
+      </p:sp>
+      <p:sp>
+        <p:nvSpPr>
+          <p:cNvPr id="12" name="TextBox 11"/>
+          <p:cNvSpPr txBox="1"/>
+          <p:nvPr/>
+        </p:nvSpPr>
+        <p:spPr>
+          <a:xfrm>
+            <a:off x="868680" y="5093208"/>
+            <a:ext cx="2596896" cy="457200"/>
+          </a:xfrm>
+          <a:prstGeom prst="rect">
+            <a:avLst/>
+          </a:prstGeom>
+          <a:noFill/>
+        </p:spPr>
+        <p:txBody>
+          <a:bodyPr wrap="square" lIns="0" tIns="0" rIns="0" bIns="0">
+            <a:spAutoFit/>
+          </a:bodyPr>
+          <a:lstStyle/>
+          <a:p>
+            <a:pPr algn="l">
+              <a:lnSpc>
+                <a:spcPct val="120000"/>
+              </a:lnSpc>
+            </a:pPr>
+            <a:r>
+              <a:rPr sz="2700" b="1" spc="-40">
+                <a:solidFill>
+                  <a:srgbClr val="FFFFFF"/>
+                </a:solidFill>
+                <a:latin typeface="Segoe UI" panose="020B0502040204020203"/>
+              </a:rPr>
+              <a:t>409</a:t>
+            </a:r>
+            <a:endParaRPr sz="2700" b="1" spc="-40">
+              <a:solidFill>
+                <a:srgbClr val="FFFFFF"/>
+              </a:solidFill>
+              <a:latin typeface="Segoe UI" panose="020B0502040204020203"/>
+            </a:endParaRPr>
+          </a:p>
+        </p:txBody>
+      </p:sp>
+      <p:sp>
+        <p:nvSpPr>
+          <p:cNvPr id="13" name="TextBox 12"/>
+          <p:cNvSpPr txBox="1"/>
+          <p:nvPr/>
+        </p:nvSpPr>
+        <p:spPr>
+          <a:xfrm>
+            <a:off x="868680" y="5568696"/>
+            <a:ext cx="2596896" cy="219456"/>
+          </a:xfrm>
+          <a:prstGeom prst="rect">
+            <a:avLst/>
+          </a:prstGeom>
+          <a:noFill/>
+        </p:spPr>
+        <p:txBody>
+          <a:bodyPr wrap="square" lIns="0" tIns="0" rIns="0" bIns="0">
+            <a:spAutoFit/>
+          </a:bodyPr>
+          <a:lstStyle/>
+          <a:p>
+            <a:pPr algn="l">
+              <a:lnSpc>
+                <a:spcPct val="130000"/>
+              </a:lnSpc>
+            </a:pPr>
+            <a:r>
+              <a:rPr sz="900" b="0">
+                <a:solidFill>
+                  <a:srgbClr val="6D9A89"/>
+                </a:solidFill>
+                <a:latin typeface="Segoe UI" panose="020B0502040204020203"/>
+              </a:rPr>
+              <a:t>moyenne nationale · 19 788 points géolocalisés</a:t>
+            </a:r>
+            <a:endParaRPr sz="900" b="0">
+              <a:solidFill>
+                <a:srgbClr val="6D9A89"/>
+              </a:solidFill>
+              <a:latin typeface="Segoe UI" panose="020B0502040204020203"/>
+            </a:endParaRPr>
+          </a:p>
+        </p:txBody>
+      </p:sp>
+      <p:sp>
+        <p:nvSpPr>
+          <p:cNvPr id="14" name="TextBox 13"/>
+          <p:cNvSpPr txBox="1"/>
+          <p:nvPr/>
+        </p:nvSpPr>
+        <p:spPr>
+          <a:xfrm>
+            <a:off x="3721608" y="4828032"/>
+            <a:ext cx="2596896" cy="219456"/>
+          </a:xfrm>
+          <a:prstGeom prst="rect">
+            <a:avLst/>
+          </a:prstGeom>
+          <a:noFill/>
+        </p:spPr>
+        <p:txBody>
+          <a:bodyPr wrap="square" lIns="0" tIns="0" rIns="0" bIns="0">
+            <a:spAutoFit/>
+          </a:bodyPr>
+          <a:lstStyle/>
+          <a:p>
+            <a:pPr algn="l">
+              <a:lnSpc>
+                <a:spcPct val="120000"/>
+              </a:lnSpc>
+            </a:pPr>
+            <a:r>
+              <a:rPr sz="850" b="1" spc="130">
+                <a:solidFill>
+                  <a:srgbClr val="8EB6A6"/>
+                </a:solidFill>
+                <a:latin typeface="Segoe UI" panose="020B0502040204020203"/>
+              </a:rPr>
+              <a:t>ÉCART ENTRE PRÉFECTURES</a:t>
+            </a:r>
+            <a:endParaRPr sz="850" b="1" spc="130">
+              <a:solidFill>
+                <a:srgbClr val="8EB6A6"/>
+              </a:solidFill>
+              <a:latin typeface="Segoe UI" panose="020B0502040204020203"/>
+            </a:endParaRPr>
+          </a:p>
+        </p:txBody>
+      </p:sp>
+      <p:sp>
+        <p:nvSpPr>
+          <p:cNvPr id="15" name="TextBox 14"/>
+          <p:cNvSpPr txBox="1"/>
+          <p:nvPr/>
+        </p:nvSpPr>
+        <p:spPr>
+          <a:xfrm>
+            <a:off x="3721608" y="5093208"/>
+            <a:ext cx="2596896" cy="457200"/>
+          </a:xfrm>
+          <a:prstGeom prst="rect">
+            <a:avLst/>
+          </a:prstGeom>
+          <a:noFill/>
+        </p:spPr>
+        <p:txBody>
+          <a:bodyPr wrap="square" lIns="0" tIns="0" rIns="0" bIns="0">
+            <a:spAutoFit/>
+          </a:bodyPr>
+          <a:lstStyle/>
+          <a:p>
+            <a:pPr algn="l">
+              <a:lnSpc>
+                <a:spcPct val="120000"/>
+              </a:lnSpc>
+            </a:pPr>
+            <a:r>
+              <a:rPr sz="2700" b="1" spc="-40">
+                <a:solidFill>
+                  <a:srgbClr val="FFFFFF"/>
+                </a:solidFill>
+                <a:latin typeface="Segoe UI" panose="020B0502040204020203"/>
+              </a:rPr>
+              <a:t>1 à 12,7</a:t>
+            </a:r>
+            <a:endParaRPr sz="2700" b="1" spc="-40">
+              <a:solidFill>
+                <a:srgbClr val="FFFFFF"/>
+              </a:solidFill>
+              <a:latin typeface="Segoe UI" panose="020B0502040204020203"/>
+            </a:endParaRPr>
+          </a:p>
+        </p:txBody>
+      </p:sp>
+      <p:sp>
+        <p:nvSpPr>
+          <p:cNvPr id="16" name="TextBox 15"/>
+          <p:cNvSpPr txBox="1"/>
+          <p:nvPr/>
+        </p:nvSpPr>
+        <p:spPr>
+          <a:xfrm>
+            <a:off x="3721608" y="5568696"/>
+            <a:ext cx="2596896" cy="219456"/>
+          </a:xfrm>
+          <a:prstGeom prst="rect">
+            <a:avLst/>
+          </a:prstGeom>
+          <a:noFill/>
+        </p:spPr>
+        <p:txBody>
+          <a:bodyPr wrap="square" lIns="0" tIns="0" rIns="0" bIns="0">
+            <a:spAutoFit/>
+          </a:bodyPr>
+          <a:lstStyle/>
+          <a:p>
+            <a:pPr algn="l">
+              <a:lnSpc>
+                <a:spcPct val="130000"/>
+              </a:lnSpc>
+            </a:pPr>
+            <a:r>
+              <a:rPr sz="900" b="0">
+                <a:solidFill>
+                  <a:srgbClr val="6D9A89"/>
+                </a:solidFill>
+                <a:latin typeface="Segoe UI" panose="020B0502040204020203"/>
+              </a:rPr>
+              <a:t>Kpendjal contre Tchaoudjo</a:t>
+            </a:r>
+            <a:endParaRPr sz="900" b="0">
+              <a:solidFill>
+                <a:srgbClr val="6D9A89"/>
+              </a:solidFill>
+              <a:latin typeface="Segoe UI" panose="020B0502040204020203"/>
+            </a:endParaRPr>
+          </a:p>
+        </p:txBody>
+      </p:sp>
+      <p:sp>
+        <p:nvSpPr>
+          <p:cNvPr id="17" name="TextBox 16"/>
+          <p:cNvSpPr txBox="1"/>
+          <p:nvPr/>
+        </p:nvSpPr>
+        <p:spPr>
+          <a:xfrm>
+            <a:off x="6574536" y="4828032"/>
+            <a:ext cx="2596896" cy="219456"/>
+          </a:xfrm>
+          <a:prstGeom prst="rect">
+            <a:avLst/>
+          </a:prstGeom>
+          <a:noFill/>
+        </p:spPr>
+        <p:txBody>
+          <a:bodyPr wrap="square" lIns="0" tIns="0" rIns="0" bIns="0">
+            <a:spAutoFit/>
+          </a:bodyPr>
+          <a:lstStyle/>
+          <a:p>
+            <a:pPr algn="l">
+              <a:lnSpc>
+                <a:spcPct val="120000"/>
+              </a:lnSpc>
+            </a:pPr>
+            <a:r>
+              <a:rPr sz="850" b="1" spc="130">
+                <a:solidFill>
+                  <a:srgbClr val="8EB6A6"/>
+                </a:solidFill>
+                <a:latin typeface="Segoe UI" panose="020B0502040204020203"/>
+              </a:rPr>
+              <a:t>PRÉFECTURES SANS AUCUNE AGENCE</a:t>
+            </a:r>
+            <a:endParaRPr sz="850" b="1" spc="130">
+              <a:solidFill>
+                <a:srgbClr val="8EB6A6"/>
+              </a:solidFill>
+              <a:latin typeface="Segoe UI" panose="020B0502040204020203"/>
+            </a:endParaRPr>
+          </a:p>
+        </p:txBody>
+      </p:sp>
+      <p:sp>
+        <p:nvSpPr>
+          <p:cNvPr id="18" name="TextBox 17"/>
+          <p:cNvSpPr txBox="1"/>
+          <p:nvPr/>
+        </p:nvSpPr>
+        <p:spPr>
+          <a:xfrm>
+            <a:off x="6574536" y="5093208"/>
+            <a:ext cx="2596896" cy="457200"/>
+          </a:xfrm>
+          <a:prstGeom prst="rect">
+            <a:avLst/>
+          </a:prstGeom>
+          <a:noFill/>
+        </p:spPr>
+        <p:txBody>
+          <a:bodyPr wrap="square" lIns="0" tIns="0" rIns="0" bIns="0">
+            <a:spAutoFit/>
+          </a:bodyPr>
+          <a:lstStyle/>
+          <a:p>
+            <a:pPr algn="l">
+              <a:lnSpc>
+                <a:spcPct val="120000"/>
+              </a:lnSpc>
+            </a:pPr>
+            <a:r>
+              <a:rPr sz="2700" b="1" spc="-40">
+                <a:solidFill>
+                  <a:srgbClr val="FFFFFF"/>
+                </a:solidFill>
+                <a:latin typeface="Segoe UI" panose="020B0502040204020203"/>
+              </a:rPr>
+              <a:t>13 / 39</a:t>
+            </a:r>
+            <a:endParaRPr sz="2700" b="1" spc="-40">
+              <a:solidFill>
+                <a:srgbClr val="FFFFFF"/>
+              </a:solidFill>
+              <a:latin typeface="Segoe UI" panose="020B0502040204020203"/>
+            </a:endParaRPr>
+          </a:p>
+        </p:txBody>
+      </p:sp>
+      <p:sp>
+        <p:nvSpPr>
+          <p:cNvPr id="19" name="TextBox 18"/>
+          <p:cNvSpPr txBox="1"/>
+          <p:nvPr/>
+        </p:nvSpPr>
+        <p:spPr>
+          <a:xfrm>
+            <a:off x="6574536" y="5568696"/>
+            <a:ext cx="2596896" cy="219456"/>
+          </a:xfrm>
+          <a:prstGeom prst="rect">
+            <a:avLst/>
+          </a:prstGeom>
+          <a:noFill/>
+        </p:spPr>
+        <p:txBody>
+          <a:bodyPr wrap="square" lIns="0" tIns="0" rIns="0" bIns="0">
+            <a:spAutoFit/>
+          </a:bodyPr>
+          <a:lstStyle/>
+          <a:p>
+            <a:pPr algn="l">
+              <a:lnSpc>
+                <a:spcPct val="130000"/>
+              </a:lnSpc>
+            </a:pPr>
+            <a:r>
+              <a:rPr sz="900" b="0">
+                <a:solidFill>
+                  <a:srgbClr val="6D9A89"/>
+                </a:solidFill>
+                <a:latin typeface="Segoe UI" panose="020B0502040204020203"/>
+              </a:rPr>
+              <a:t>1 621 720 habitants concernés</a:t>
+            </a:r>
+            <a:endParaRPr sz="900" b="0">
+              <a:solidFill>
+                <a:srgbClr val="6D9A89"/>
+              </a:solidFill>
+              <a:latin typeface="Segoe UI" panose="020B0502040204020203"/>
+            </a:endParaRPr>
+          </a:p>
+        </p:txBody>
+      </p:sp>
+      <p:sp>
+        <p:nvSpPr>
+          <p:cNvPr id="20" name="TextBox 19"/>
+          <p:cNvSpPr txBox="1"/>
+          <p:nvPr/>
+        </p:nvSpPr>
+        <p:spPr>
+          <a:xfrm>
+            <a:off x="868680" y="5943600"/>
+            <a:ext cx="5669280" cy="274320"/>
+          </a:xfrm>
+          <a:prstGeom prst="rect">
+            <a:avLst/>
+          </a:prstGeom>
+          <a:noFill/>
+        </p:spPr>
+        <p:txBody>
+          <a:bodyPr wrap="square" lIns="0" tIns="0" rIns="0" bIns="0">
+            <a:spAutoFit/>
+          </a:bodyPr>
+          <a:lstStyle/>
+          <a:p>
+            <a:pPr algn="l">
+              <a:lnSpc>
+                <a:spcPct val="120000"/>
+              </a:lnSpc>
+            </a:pPr>
+            <a:r>
+              <a:rPr sz="1450" b="1">
+                <a:solidFill>
+                  <a:srgbClr val="FFFFFF"/>
+                </a:solidFill>
+                <a:latin typeface="Segoe UI" panose="020B0502040204020203"/>
+              </a:rPr>
+              <a:t>KOUTSAVA Kossi Epiphane</a:t>
+            </a:r>
+            <a:endParaRPr sz="1450" b="1">
+              <a:solidFill>
+                <a:srgbClr val="FFFFFF"/>
+              </a:solidFill>
+              <a:latin typeface="Segoe UI" panose="020B0502040204020203"/>
+            </a:endParaRPr>
+          </a:p>
+        </p:txBody>
+      </p:sp>
+      <p:sp>
+        <p:nvSpPr>
+          <p:cNvPr id="22" name="Rectangle 21"/>
           <p:cNvSpPr/>
           <p:nvPr/>
         </p:nvSpPr>
         <p:spPr>
           <a:xfrm>
-            <a:off x="868680" y="4590288"/>
+            <a:off x="868680" y="6483096"/>
             <a:ext cx="8183879" cy="9525"/>
           </a:xfrm>
           <a:prstGeom prst="rect">
@@ -3514,479 +3967,6 @@
       </p:sp>
       <p:sp>
         <p:nvSpPr>
-          <p:cNvPr id="11" name="TextBox 10"/>
-          <p:cNvSpPr txBox="1"/>
-          <p:nvPr/>
-        </p:nvSpPr>
-        <p:spPr>
-          <a:xfrm>
-            <a:off x="868680" y="4828032"/>
-            <a:ext cx="2596896" cy="219456"/>
-          </a:xfrm>
-          <a:prstGeom prst="rect">
-            <a:avLst/>
-          </a:prstGeom>
-          <a:noFill/>
-        </p:spPr>
-        <p:txBody>
-          <a:bodyPr wrap="square" lIns="0" rIns="0" tIns="0" bIns="0">
-            <a:spAutoFit/>
-          </a:bodyPr>
-          <a:lstStyle/>
-          <a:p>
-            <a:pPr algn="l">
-              <a:lnSpc>
-                <a:spcPct val="120000"/>
-              </a:lnSpc>
-            </a:pPr>
-            <a:r>
-              <a:rPr sz="850" b="1" spc="130">
-                <a:solidFill>
-                  <a:srgbClr val="8EB6A6"/>
-                </a:solidFill>
-                <a:latin typeface="Segoe UI"/>
-              </a:rPr>
-              <a:t>HABITANTS PAR POINT DE SERVICE</a:t>
-            </a:r>
-          </a:p>
-        </p:txBody>
-      </p:sp>
-      <p:sp>
-        <p:nvSpPr>
-          <p:cNvPr id="12" name="TextBox 11"/>
-          <p:cNvSpPr txBox="1"/>
-          <p:nvPr/>
-        </p:nvSpPr>
-        <p:spPr>
-          <a:xfrm>
-            <a:off x="868680" y="5093208"/>
-            <a:ext cx="2596896" cy="457200"/>
-          </a:xfrm>
-          <a:prstGeom prst="rect">
-            <a:avLst/>
-          </a:prstGeom>
-          <a:noFill/>
-        </p:spPr>
-        <p:txBody>
-          <a:bodyPr wrap="square" lIns="0" rIns="0" tIns="0" bIns="0">
-            <a:spAutoFit/>
-          </a:bodyPr>
-          <a:lstStyle/>
-          <a:p>
-            <a:pPr algn="l">
-              <a:lnSpc>
-                <a:spcPct val="120000"/>
-              </a:lnSpc>
-            </a:pPr>
-            <a:r>
-              <a:rPr sz="2700" b="1" spc="-40">
-                <a:solidFill>
-                  <a:srgbClr val="FFFFFF"/>
-                </a:solidFill>
-                <a:latin typeface="Segoe UI"/>
-              </a:rPr>
-              <a:t>409</a:t>
-            </a:r>
-          </a:p>
-        </p:txBody>
-      </p:sp>
-      <p:sp>
-        <p:nvSpPr>
-          <p:cNvPr id="13" name="TextBox 12"/>
-          <p:cNvSpPr txBox="1"/>
-          <p:nvPr/>
-        </p:nvSpPr>
-        <p:spPr>
-          <a:xfrm>
-            <a:off x="868680" y="5568696"/>
-            <a:ext cx="2596896" cy="219456"/>
-          </a:xfrm>
-          <a:prstGeom prst="rect">
-            <a:avLst/>
-          </a:prstGeom>
-          <a:noFill/>
-        </p:spPr>
-        <p:txBody>
-          <a:bodyPr wrap="square" lIns="0" rIns="0" tIns="0" bIns="0">
-            <a:spAutoFit/>
-          </a:bodyPr>
-          <a:lstStyle/>
-          <a:p>
-            <a:pPr algn="l">
-              <a:lnSpc>
-                <a:spcPct val="130000"/>
-              </a:lnSpc>
-            </a:pPr>
-            <a:r>
-              <a:rPr sz="900" b="0">
-                <a:solidFill>
-                  <a:srgbClr val="6D9A89"/>
-                </a:solidFill>
-                <a:latin typeface="Segoe UI"/>
-              </a:rPr>
-              <a:t>moyenne nationale · 19 788 points géolocalisés</a:t>
-            </a:r>
-          </a:p>
-        </p:txBody>
-      </p:sp>
-      <p:sp>
-        <p:nvSpPr>
-          <p:cNvPr id="14" name="TextBox 13"/>
-          <p:cNvSpPr txBox="1"/>
-          <p:nvPr/>
-        </p:nvSpPr>
-        <p:spPr>
-          <a:xfrm>
-            <a:off x="3721608" y="4828032"/>
-            <a:ext cx="2596896" cy="219456"/>
-          </a:xfrm>
-          <a:prstGeom prst="rect">
-            <a:avLst/>
-          </a:prstGeom>
-          <a:noFill/>
-        </p:spPr>
-        <p:txBody>
-          <a:bodyPr wrap="square" lIns="0" rIns="0" tIns="0" bIns="0">
-            <a:spAutoFit/>
-          </a:bodyPr>
-          <a:lstStyle/>
-          <a:p>
-            <a:pPr algn="l">
-              <a:lnSpc>
-                <a:spcPct val="120000"/>
-              </a:lnSpc>
-            </a:pPr>
-            <a:r>
-              <a:rPr sz="850" b="1" spc="130">
-                <a:solidFill>
-                  <a:srgbClr val="8EB6A6"/>
-                </a:solidFill>
-                <a:latin typeface="Segoe UI"/>
-              </a:rPr>
-              <a:t>ÉCART ENTRE PRÉFECTURES</a:t>
-            </a:r>
-          </a:p>
-        </p:txBody>
-      </p:sp>
-      <p:sp>
-        <p:nvSpPr>
-          <p:cNvPr id="15" name="TextBox 14"/>
-          <p:cNvSpPr txBox="1"/>
-          <p:nvPr/>
-        </p:nvSpPr>
-        <p:spPr>
-          <a:xfrm>
-            <a:off x="3721608" y="5093208"/>
-            <a:ext cx="2596896" cy="457200"/>
-          </a:xfrm>
-          <a:prstGeom prst="rect">
-            <a:avLst/>
-          </a:prstGeom>
-          <a:noFill/>
-        </p:spPr>
-        <p:txBody>
-          <a:bodyPr wrap="square" lIns="0" rIns="0" tIns="0" bIns="0">
-            <a:spAutoFit/>
-          </a:bodyPr>
-          <a:lstStyle/>
-          <a:p>
-            <a:pPr algn="l">
-              <a:lnSpc>
-                <a:spcPct val="120000"/>
-              </a:lnSpc>
-            </a:pPr>
-            <a:r>
-              <a:rPr sz="2700" b="1" spc="-40">
-                <a:solidFill>
-                  <a:srgbClr val="FFFFFF"/>
-                </a:solidFill>
-                <a:latin typeface="Segoe UI"/>
-              </a:rPr>
-              <a:t>1 à 12,7</a:t>
-            </a:r>
-          </a:p>
-        </p:txBody>
-      </p:sp>
-      <p:sp>
-        <p:nvSpPr>
-          <p:cNvPr id="16" name="TextBox 15"/>
-          <p:cNvSpPr txBox="1"/>
-          <p:nvPr/>
-        </p:nvSpPr>
-        <p:spPr>
-          <a:xfrm>
-            <a:off x="3721608" y="5568696"/>
-            <a:ext cx="2596896" cy="219456"/>
-          </a:xfrm>
-          <a:prstGeom prst="rect">
-            <a:avLst/>
-          </a:prstGeom>
-          <a:noFill/>
-        </p:spPr>
-        <p:txBody>
-          <a:bodyPr wrap="square" lIns="0" rIns="0" tIns="0" bIns="0">
-            <a:spAutoFit/>
-          </a:bodyPr>
-          <a:lstStyle/>
-          <a:p>
-            <a:pPr algn="l">
-              <a:lnSpc>
-                <a:spcPct val="130000"/>
-              </a:lnSpc>
-            </a:pPr>
-            <a:r>
-              <a:rPr sz="900" b="0">
-                <a:solidFill>
-                  <a:srgbClr val="6D9A89"/>
-                </a:solidFill>
-                <a:latin typeface="Segoe UI"/>
-              </a:rPr>
-              <a:t>Kpendjal contre Tchaoudjo</a:t>
-            </a:r>
-          </a:p>
-        </p:txBody>
-      </p:sp>
-      <p:sp>
-        <p:nvSpPr>
-          <p:cNvPr id="17" name="TextBox 16"/>
-          <p:cNvSpPr txBox="1"/>
-          <p:nvPr/>
-        </p:nvSpPr>
-        <p:spPr>
-          <a:xfrm>
-            <a:off x="6574536" y="4828032"/>
-            <a:ext cx="2596896" cy="219456"/>
-          </a:xfrm>
-          <a:prstGeom prst="rect">
-            <a:avLst/>
-          </a:prstGeom>
-          <a:noFill/>
-        </p:spPr>
-        <p:txBody>
-          <a:bodyPr wrap="square" lIns="0" rIns="0" tIns="0" bIns="0">
-            <a:spAutoFit/>
-          </a:bodyPr>
-          <a:lstStyle/>
-          <a:p>
-            <a:pPr algn="l">
-              <a:lnSpc>
-                <a:spcPct val="120000"/>
-              </a:lnSpc>
-            </a:pPr>
-            <a:r>
-              <a:rPr sz="850" b="1" spc="130">
-                <a:solidFill>
-                  <a:srgbClr val="8EB6A6"/>
-                </a:solidFill>
-                <a:latin typeface="Segoe UI"/>
-              </a:rPr>
-              <a:t>PRÉFECTURES SANS AUCUNE AGENCE</a:t>
-            </a:r>
-          </a:p>
-        </p:txBody>
-      </p:sp>
-      <p:sp>
-        <p:nvSpPr>
-          <p:cNvPr id="18" name="TextBox 17"/>
-          <p:cNvSpPr txBox="1"/>
-          <p:nvPr/>
-        </p:nvSpPr>
-        <p:spPr>
-          <a:xfrm>
-            <a:off x="6574536" y="5093208"/>
-            <a:ext cx="2596896" cy="457200"/>
-          </a:xfrm>
-          <a:prstGeom prst="rect">
-            <a:avLst/>
-          </a:prstGeom>
-          <a:noFill/>
-        </p:spPr>
-        <p:txBody>
-          <a:bodyPr wrap="square" lIns="0" rIns="0" tIns="0" bIns="0">
-            <a:spAutoFit/>
-          </a:bodyPr>
-          <a:lstStyle/>
-          <a:p>
-            <a:pPr algn="l">
-              <a:lnSpc>
-                <a:spcPct val="120000"/>
-              </a:lnSpc>
-            </a:pPr>
-            <a:r>
-              <a:rPr sz="2700" b="1" spc="-40">
-                <a:solidFill>
-                  <a:srgbClr val="FFFFFF"/>
-                </a:solidFill>
-                <a:latin typeface="Segoe UI"/>
-              </a:rPr>
-              <a:t>13 / 39</a:t>
-            </a:r>
-          </a:p>
-        </p:txBody>
-      </p:sp>
-      <p:sp>
-        <p:nvSpPr>
-          <p:cNvPr id="19" name="TextBox 18"/>
-          <p:cNvSpPr txBox="1"/>
-          <p:nvPr/>
-        </p:nvSpPr>
-        <p:spPr>
-          <a:xfrm>
-            <a:off x="6574536" y="5568696"/>
-            <a:ext cx="2596896" cy="219456"/>
-          </a:xfrm>
-          <a:prstGeom prst="rect">
-            <a:avLst/>
-          </a:prstGeom>
-          <a:noFill/>
-        </p:spPr>
-        <p:txBody>
-          <a:bodyPr wrap="square" lIns="0" rIns="0" tIns="0" bIns="0">
-            <a:spAutoFit/>
-          </a:bodyPr>
-          <a:lstStyle/>
-          <a:p>
-            <a:pPr algn="l">
-              <a:lnSpc>
-                <a:spcPct val="130000"/>
-              </a:lnSpc>
-            </a:pPr>
-            <a:r>
-              <a:rPr sz="900" b="0">
-                <a:solidFill>
-                  <a:srgbClr val="6D9A89"/>
-                </a:solidFill>
-                <a:latin typeface="Segoe UI"/>
-              </a:rPr>
-              <a:t>1 621 720 habitants concernés</a:t>
-            </a:r>
-          </a:p>
-        </p:txBody>
-      </p:sp>
-      <p:sp>
-        <p:nvSpPr>
-          <p:cNvPr id="20" name="TextBox 19"/>
-          <p:cNvSpPr txBox="1"/>
-          <p:nvPr/>
-        </p:nvSpPr>
-        <p:spPr>
-          <a:xfrm>
-            <a:off x="868680" y="5943600"/>
-            <a:ext cx="5669280" cy="274320"/>
-          </a:xfrm>
-          <a:prstGeom prst="rect">
-            <a:avLst/>
-          </a:prstGeom>
-          <a:noFill/>
-        </p:spPr>
-        <p:txBody>
-          <a:bodyPr wrap="square" lIns="0" rIns="0" tIns="0" bIns="0">
-            <a:spAutoFit/>
-          </a:bodyPr>
-          <a:lstStyle/>
-          <a:p>
-            <a:pPr algn="l">
-              <a:lnSpc>
-                <a:spcPct val="120000"/>
-              </a:lnSpc>
-            </a:pPr>
-            <a:r>
-              <a:rPr sz="1450" b="1">
-                <a:solidFill>
-                  <a:srgbClr val="FFFFFF"/>
-                </a:solidFill>
-                <a:latin typeface="Segoe UI"/>
-              </a:rPr>
-              <a:t>KOUTSAVA Kossi Epiphane</a:t>
-            </a:r>
-          </a:p>
-        </p:txBody>
-      </p:sp>
-      <p:sp>
-        <p:nvSpPr>
-          <p:cNvPr id="21" name="TextBox 20"/>
-          <p:cNvSpPr txBox="1"/>
-          <p:nvPr/>
-        </p:nvSpPr>
-        <p:spPr>
-          <a:xfrm>
-            <a:off x="868680" y="6190488"/>
-            <a:ext cx="5669280" cy="201168"/>
-          </a:xfrm>
-          <a:prstGeom prst="rect">
-            <a:avLst/>
-          </a:prstGeom>
-          <a:noFill/>
-        </p:spPr>
-        <p:txBody>
-          <a:bodyPr wrap="square" lIns="0" rIns="0" tIns="0" bIns="0">
-            <a:spAutoFit/>
-          </a:bodyPr>
-          <a:lstStyle/>
-          <a:p>
-            <a:pPr algn="l">
-              <a:lnSpc>
-                <a:spcPct val="120000"/>
-              </a:lnSpc>
-            </a:pPr>
-            <a:r>
-              <a:rPr sz="850" b="1" spc="130">
-                <a:solidFill>
-                  <a:srgbClr val="8EB6A6"/>
-                </a:solidFill>
-                <a:latin typeface="Segoe UI"/>
-              </a:rPr>
-              <a:t>ANALYSE DE DONNÉES · DÉFI ÉCONOMIE NUMÉRIQUE</a:t>
-            </a:r>
-          </a:p>
-        </p:txBody>
-      </p:sp>
-      <p:sp>
-        <p:nvSpPr>
-          <p:cNvPr id="22" name="Rectangle 21"/>
-          <p:cNvSpPr/>
-          <p:nvPr/>
-        </p:nvSpPr>
-        <p:spPr>
-          <a:xfrm>
-            <a:off x="868680" y="6483096"/>
-            <a:ext cx="8183879" cy="9525"/>
-          </a:xfrm>
-          <a:prstGeom prst="rect">
-            <a:avLst/>
-          </a:prstGeom>
-          <a:solidFill>
-            <a:srgbClr val="1B5E49"/>
-          </a:solidFill>
-          <a:ln>
-            <a:noFill/>
-          </a:ln>
-          <a:effectLst/>
-        </p:spPr>
-        <p:style>
-          <a:lnRef idx="1">
-            <a:schemeClr val="accent1"/>
-          </a:lnRef>
-          <a:fillRef idx="3">
-            <a:schemeClr val="accent1"/>
-          </a:fillRef>
-          <a:effectRef idx="2">
-            <a:schemeClr val="accent1"/>
-          </a:effectRef>
-          <a:fontRef idx="minor">
-            <a:schemeClr val="lt1"/>
-          </a:fontRef>
-        </p:style>
-        <p:txBody>
-          <a:bodyPr rtlCol="0" anchor="ctr"/>
-          <a:lstStyle/>
-          <a:p>
-            <a:pPr algn="ctr"/>
-          </a:p>
-        </p:txBody>
-      </p:sp>
-      <p:sp>
-        <p:nvSpPr>
           <p:cNvPr id="23" name="TextBox 22"/>
           <p:cNvSpPr txBox="1"/>
           <p:nvPr/>
@@ -4002,7 +3982,7 @@
           <a:noFill/>
         </p:spPr>
         <p:txBody>
-          <a:bodyPr wrap="square" lIns="0" rIns="0" tIns="0" bIns="0">
+          <a:bodyPr wrap="square" lIns="0" tIns="0" rIns="0" bIns="0">
             <a:spAutoFit/>
           </a:bodyPr>
           <a:lstStyle/>
@@ -4017,10 +3997,16 @@
                 <a:solidFill>
                   <a:srgbClr val="6D9A89"/>
                 </a:solidFill>
-                <a:latin typeface="Segoe UI"/>
+                <a:latin typeface="Segoe UI" panose="020B0502040204020203"/>
               </a:rPr>
               <a:t>Géoportail national (PRISE 2021-2022) · RGPH-5, INSEED (novembre 2022) · limites COD-AB v02, OCHA (2021) — 25 contrôles arithmétiques publiés</a:t>
             </a:r>
+            <a:endParaRPr sz="800" b="0">
+              <a:solidFill>
+                <a:srgbClr val="6D9A89"/>
+              </a:solidFill>
+              <a:latin typeface="Segoe UI" panose="020B0502040204020203"/>
+            </a:endParaRPr>
           </a:p>
         </p:txBody>
       </p:sp>
@@ -4033,7 +4019,7 @@
           <p:nvPr/>
         </p:nvPicPr>
         <p:blipFill>
-          <a:blip r:embed="rId2"/>
+          <a:blip r:embed="rId1"/>
           <a:stretch>
             <a:fillRect/>
           </a:stretch>
@@ -4057,7 +4043,7 @@
 </file>
 
 <file path=ppt/slides/slide10.xml><?xml version="1.0" encoding="utf-8"?>
-<p:sld xmlns:a="http://schemas.openxmlformats.org/drawingml/2006/main" xmlns:p="http://schemas.openxmlformats.org/presentationml/2006/main" xmlns:r="http://schemas.openxmlformats.org/officeDocument/2006/relationships">
+<p:sld xmlns:a="http://schemas.openxmlformats.org/drawingml/2006/main" xmlns:r="http://schemas.openxmlformats.org/officeDocument/2006/relationships" xmlns:p="http://schemas.openxmlformats.org/presentationml/2006/main">
   <p:cSld>
     <p:spTree>
       <p:nvGrpSpPr>
@@ -4259,7 +4245,7 @@
           <a:noFill/>
         </p:spPr>
         <p:txBody>
-          <a:bodyPr wrap="square" lIns="0" rIns="0" tIns="0" bIns="0">
+          <a:bodyPr wrap="square" lIns="0" tIns="0" rIns="0" bIns="0">
             <a:spAutoFit/>
           </a:bodyPr>
           <a:lstStyle/>
@@ -4274,10 +4260,16 @@
                 <a:solidFill>
                   <a:srgbClr val="8B8A84"/>
                 </a:solidFill>
-                <a:latin typeface="Consolas"/>
+                <a:latin typeface="Consolas" panose="020B0609020204030204"/>
               </a:rPr>
               <a:t>PRÉCAUTIONS</a:t>
             </a:r>
+            <a:endParaRPr sz="900" b="1">
+              <a:solidFill>
+                <a:srgbClr val="8B8A84"/>
+              </a:solidFill>
+              <a:latin typeface="Consolas" panose="020B0609020204030204"/>
+            </a:endParaRPr>
           </a:p>
         </p:txBody>
       </p:sp>
@@ -4298,7 +4290,7 @@
           <a:noFill/>
         </p:spPr>
         <p:txBody>
-          <a:bodyPr wrap="square" lIns="0" rIns="0" tIns="0" bIns="0">
+          <a:bodyPr wrap="square" lIns="0" tIns="0" rIns="0" bIns="0">
             <a:spAutoFit/>
           </a:bodyPr>
           <a:lstStyle/>
@@ -4313,10 +4305,16 @@
                 <a:solidFill>
                   <a:srgbClr val="12120F"/>
                 </a:solidFill>
-                <a:latin typeface="Segoe UI"/>
+                <a:latin typeface="Segoe UI" panose="020B0502040204020203"/>
               </a:rPr>
               <a:t>Limites et précautions d'interprétation</a:t>
             </a:r>
+            <a:endParaRPr sz="2800" b="1">
+              <a:solidFill>
+                <a:srgbClr val="12120F"/>
+              </a:solidFill>
+              <a:latin typeface="Segoe UI" panose="020B0502040204020203"/>
+            </a:endParaRPr>
           </a:p>
         </p:txBody>
       </p:sp>
@@ -4425,7 +4423,7 @@
           <a:noFill/>
         </p:spPr>
         <p:txBody>
-          <a:bodyPr wrap="square" lIns="0" rIns="0" tIns="0" bIns="0">
+          <a:bodyPr wrap="square" lIns="0" tIns="0" rIns="0" bIns="0">
             <a:spAutoFit/>
           </a:bodyPr>
           <a:lstStyle/>
@@ -4440,10 +4438,16 @@
                 <a:solidFill>
                   <a:srgbClr val="0F4D3B"/>
                 </a:solidFill>
-                <a:latin typeface="Segoe UI"/>
+                <a:latin typeface="Segoe UI" panose="020B0502040204020203"/>
               </a:rPr>
               <a:t>Ce diagnostic mesure un déficit d'accès aux services — pas une absence de réseau mobile. La distinction est décisive.</a:t>
             </a:r>
+            <a:endParaRPr sz="1350" b="1">
+              <a:solidFill>
+                <a:srgbClr val="0F4D3B"/>
+              </a:solidFill>
+              <a:latin typeface="Segoe UI" panose="020B0502040204020203"/>
+            </a:endParaRPr>
           </a:p>
         </p:txBody>
       </p:sp>
@@ -4508,7 +4512,7 @@
           <a:noFill/>
         </p:spPr>
         <p:txBody>
-          <a:bodyPr wrap="square" lIns="0" rIns="0" tIns="0" bIns="0">
+          <a:bodyPr wrap="square" lIns="0" tIns="0" rIns="0" bIns="0">
             <a:spAutoFit/>
           </a:bodyPr>
           <a:lstStyle/>
@@ -4523,10 +4527,16 @@
                 <a:solidFill>
                   <a:srgbClr val="8B8A84"/>
                 </a:solidFill>
-                <a:latin typeface="Consolas"/>
+                <a:latin typeface="Consolas" panose="020B0609020204030204"/>
               </a:rPr>
               <a:t>République togolaise · Défi Économie numérique · Données ouvertes PRISE 2021-2022, RGPH-5 2022, COD-AB 2021</a:t>
             </a:r>
+            <a:endParaRPr sz="800" b="0">
+              <a:solidFill>
+                <a:srgbClr val="8B8A84"/>
+              </a:solidFill>
+              <a:latin typeface="Consolas" panose="020B0609020204030204"/>
+            </a:endParaRPr>
           </a:p>
         </p:txBody>
       </p:sp>
@@ -4547,7 +4557,7 @@
           <a:noFill/>
         </p:spPr>
         <p:txBody>
-          <a:bodyPr wrap="square" lIns="0" rIns="0" tIns="0" bIns="0">
+          <a:bodyPr wrap="square" lIns="0" tIns="0" rIns="0" bIns="0">
             <a:spAutoFit/>
           </a:bodyPr>
           <a:lstStyle/>
@@ -4562,10 +4572,16 @@
                 <a:solidFill>
                   <a:srgbClr val="8B8A84"/>
                 </a:solidFill>
-                <a:latin typeface="Consolas"/>
+                <a:latin typeface="Consolas" panose="020B0609020204030204"/>
               </a:rPr>
               <a:t>09 / 10</a:t>
             </a:r>
+            <a:endParaRPr sz="800" b="1">
+              <a:solidFill>
+                <a:srgbClr val="8B8A84"/>
+              </a:solidFill>
+              <a:latin typeface="Consolas" panose="020B0609020204030204"/>
+            </a:endParaRPr>
           </a:p>
         </p:txBody>
       </p:sp>
@@ -4630,7 +4646,7 @@
           <a:noFill/>
         </p:spPr>
         <p:txBody>
-          <a:bodyPr wrap="square" lIns="0" rIns="0" tIns="0" bIns="0">
+          <a:bodyPr wrap="square" lIns="0" tIns="0" rIns="0" bIns="0">
             <a:spAutoFit/>
           </a:bodyPr>
           <a:lstStyle/>
@@ -4645,10 +4661,16 @@
                 <a:solidFill>
                   <a:srgbClr val="12120F"/>
                 </a:solidFill>
-                <a:latin typeface="Segoe UI"/>
+                <a:latin typeface="Segoe UI" panose="020B0502040204020203"/>
               </a:rPr>
               <a:t>La couverture réseau n'est pas mesurée</a:t>
             </a:r>
+            <a:endParaRPr sz="1100" b="1">
+              <a:solidFill>
+                <a:srgbClr val="12120F"/>
+              </a:solidFill>
+              <a:latin typeface="Segoe UI" panose="020B0502040204020203"/>
+            </a:endParaRPr>
           </a:p>
         </p:txBody>
       </p:sp>
@@ -4669,7 +4691,7 @@
           <a:noFill/>
         </p:spPr>
         <p:txBody>
-          <a:bodyPr wrap="square" lIns="0" rIns="0" tIns="0" bIns="0">
+          <a:bodyPr wrap="square" lIns="0" tIns="0" rIns="0" bIns="0">
             <a:spAutoFit/>
           </a:bodyPr>
           <a:lstStyle/>
@@ -4684,10 +4706,16 @@
                 <a:solidFill>
                   <a:srgbClr val="55544F"/>
                 </a:solidFill>
-                <a:latin typeface="Segoe UI"/>
+                <a:latin typeface="Segoe UI" panose="020B0502040204020203"/>
               </a:rPr>
               <a:t>Une zone sans agence ni agent Mobile Money n'est pas nécessairement une zone sans réseau mobile. C'est la limite la plus importante de ce travail.</a:t>
             </a:r>
+            <a:endParaRPr sz="950" b="0">
+              <a:solidFill>
+                <a:srgbClr val="55544F"/>
+              </a:solidFill>
+              <a:latin typeface="Segoe UI" panose="020B0502040204020203"/>
+            </a:endParaRPr>
           </a:p>
         </p:txBody>
       </p:sp>
@@ -4752,7 +4780,7 @@
           <a:noFill/>
         </p:spPr>
         <p:txBody>
-          <a:bodyPr wrap="square" lIns="0" rIns="0" tIns="0" bIns="0">
+          <a:bodyPr wrap="square" lIns="0" tIns="0" rIns="0" bIns="0">
             <a:spAutoFit/>
           </a:bodyPr>
           <a:lstStyle/>
@@ -4767,10 +4795,16 @@
                 <a:solidFill>
                   <a:srgbClr val="12120F"/>
                 </a:solidFill>
-                <a:latin typeface="Segoe UI"/>
+                <a:latin typeface="Segoe UI" panose="020B0502040204020203"/>
               </a:rPr>
               <a:t>Les agences CANAL+ sont absentes</a:t>
             </a:r>
+            <a:endParaRPr sz="1100" b="1">
+              <a:solidFill>
+                <a:srgbClr val="12120F"/>
+              </a:solidFill>
+              <a:latin typeface="Segoe UI" panose="020B0502040204020203"/>
+            </a:endParaRPr>
           </a:p>
         </p:txBody>
       </p:sp>
@@ -4791,7 +4825,7 @@
           <a:noFill/>
         </p:spPr>
         <p:txBody>
-          <a:bodyPr wrap="square" lIns="0" rIns="0" tIns="0" bIns="0">
+          <a:bodyPr wrap="square" lIns="0" tIns="0" rIns="0" bIns="0">
             <a:spAutoFit/>
           </a:bodyPr>
           <a:lstStyle/>
@@ -4806,10 +4840,16 @@
                 <a:solidFill>
                   <a:srgbClr val="55544F"/>
                 </a:solidFill>
-                <a:latin typeface="Segoe UI"/>
+                <a:latin typeface="Segoe UI" panose="020B0502040204020203"/>
               </a:rPr>
               <a:t>Fichier source vide. Le déficit d'agences ne porte que sur Moov et Togocom.</a:t>
             </a:r>
+            <a:endParaRPr sz="950" b="0">
+              <a:solidFill>
+                <a:srgbClr val="55544F"/>
+              </a:solidFill>
+              <a:latin typeface="Segoe UI" panose="020B0502040204020203"/>
+            </a:endParaRPr>
           </a:p>
         </p:txBody>
       </p:sp>
@@ -4874,7 +4914,7 @@
           <a:noFill/>
         </p:spPr>
         <p:txBody>
-          <a:bodyPr wrap="square" lIns="0" rIns="0" tIns="0" bIns="0">
+          <a:bodyPr wrap="square" lIns="0" tIns="0" rIns="0" bIns="0">
             <a:spAutoFit/>
           </a:bodyPr>
           <a:lstStyle/>
@@ -4889,10 +4929,16 @@
                 <a:solidFill>
                   <a:srgbClr val="12120F"/>
                 </a:solidFill>
-                <a:latin typeface="Segoe UI"/>
+                <a:latin typeface="Segoe UI" panose="020B0502040204020203"/>
               </a:rPr>
               <a:t>Le diagnostic décrit 2021-2022</a:t>
             </a:r>
+            <a:endParaRPr sz="1100" b="1">
+              <a:solidFill>
+                <a:srgbClr val="12120F"/>
+              </a:solidFill>
+              <a:latin typeface="Segoe UI" panose="020B0502040204020203"/>
+            </a:endParaRPr>
           </a:p>
         </p:txBody>
       </p:sp>
@@ -4913,7 +4959,7 @@
           <a:noFill/>
         </p:spPr>
         <p:txBody>
-          <a:bodyPr wrap="square" lIns="0" rIns="0" tIns="0" bIns="0">
+          <a:bodyPr wrap="square" lIns="0" tIns="0" rIns="0" bIns="0">
             <a:spAutoFit/>
           </a:bodyPr>
           <a:lstStyle/>
@@ -4928,10 +4974,16 @@
                 <a:solidFill>
                   <a:srgbClr val="55544F"/>
                 </a:solidFill>
-                <a:latin typeface="Segoe UI"/>
+                <a:latin typeface="Segoe UI" panose="020B0502040204020203"/>
               </a:rPr>
               <a:t>Tout déploiement postérieur est invisible. La hiérarchie des besoins reste valable tant que les écarts ne sont pas comblés.</a:t>
             </a:r>
+            <a:endParaRPr sz="950" b="0">
+              <a:solidFill>
+                <a:srgbClr val="55544F"/>
+              </a:solidFill>
+              <a:latin typeface="Segoe UI" panose="020B0502040204020203"/>
+            </a:endParaRPr>
           </a:p>
         </p:txBody>
       </p:sp>
@@ -4996,7 +5048,7 @@
           <a:noFill/>
         </p:spPr>
         <p:txBody>
-          <a:bodyPr wrap="square" lIns="0" rIns="0" tIns="0" bIns="0">
+          <a:bodyPr wrap="square" lIns="0" tIns="0" rIns="0" bIns="0">
             <a:spAutoFit/>
           </a:bodyPr>
           <a:lstStyle/>
@@ -5011,10 +5063,16 @@
                 <a:solidFill>
                   <a:srgbClr val="12120F"/>
                 </a:solidFill>
-                <a:latin typeface="Segoe UI"/>
+                <a:latin typeface="Segoe UI" panose="020B0502040204020203"/>
               </a:rPr>
               <a:t>Les scores communaux et préfectoraux ne sont pas comparables</a:t>
             </a:r>
+            <a:endParaRPr sz="1100" b="1">
+              <a:solidFill>
+                <a:srgbClr val="12120F"/>
+              </a:solidFill>
+              <a:latin typeface="Segoe UI" panose="020B0502040204020203"/>
+            </a:endParaRPr>
           </a:p>
         </p:txBody>
       </p:sp>
@@ -5035,7 +5093,7 @@
           <a:noFill/>
         </p:spPr>
         <p:txBody>
-          <a:bodyPr wrap="square" lIns="0" rIns="0" tIns="0" bIns="0">
+          <a:bodyPr wrap="square" lIns="0" tIns="0" rIns="0" bIns="0">
             <a:spAutoFit/>
           </a:bodyPr>
           <a:lstStyle/>
@@ -5050,10 +5108,16 @@
                 <a:solidFill>
                   <a:srgbClr val="55544F"/>
                 </a:solidFill>
-                <a:latin typeface="Segoe UI"/>
+                <a:latin typeface="Segoe UI" panose="020B0502040204020203"/>
               </a:rPr>
               <a:t>La composante d'éloignement ne repose pas sur la même mesure aux deux niveaux. Les rangs se lisent à l'intérieur de chaque niveau.</a:t>
             </a:r>
+            <a:endParaRPr sz="950" b="0">
+              <a:solidFill>
+                <a:srgbClr val="55544F"/>
+              </a:solidFill>
+              <a:latin typeface="Segoe UI" panose="020B0502040204020203"/>
+            </a:endParaRPr>
           </a:p>
         </p:txBody>
       </p:sp>
@@ -5118,7 +5182,7 @@
           <a:noFill/>
         </p:spPr>
         <p:txBody>
-          <a:bodyPr wrap="square" lIns="0" rIns="0" tIns="0" bIns="0">
+          <a:bodyPr wrap="square" lIns="0" tIns="0" rIns="0" bIns="0">
             <a:spAutoFit/>
           </a:bodyPr>
           <a:lstStyle/>
@@ -5133,10 +5197,16 @@
                 <a:solidFill>
                   <a:srgbClr val="12120F"/>
                 </a:solidFill>
-                <a:latin typeface="Segoe UI"/>
+                <a:latin typeface="Segoe UI" panose="020B0502040204020203"/>
               </a:rPr>
               <a:t>Un score élevé signale un besoin, pas une solution</a:t>
             </a:r>
+            <a:endParaRPr sz="1100" b="1">
+              <a:solidFill>
+                <a:srgbClr val="12120F"/>
+              </a:solidFill>
+              <a:latin typeface="Segoe UI" panose="020B0502040204020203"/>
+            </a:endParaRPr>
           </a:p>
         </p:txBody>
       </p:sp>
@@ -5157,7 +5227,7 @@
           <a:noFill/>
         </p:spPr>
         <p:txBody>
-          <a:bodyPr wrap="square" lIns="0" rIns="0" tIns="0" bIns="0">
+          <a:bodyPr wrap="square" lIns="0" tIns="0" rIns="0" bIns="0">
             <a:spAutoFit/>
           </a:bodyPr>
           <a:lstStyle/>
@@ -5172,10 +5242,16 @@
                 <a:solidFill>
                   <a:srgbClr val="55544F"/>
                 </a:solidFill>
-                <a:latin typeface="Segoe UI"/>
+                <a:latin typeface="Segoe UI" panose="020B0502040204020203"/>
               </a:rPr>
               <a:t>L'indice ne dit rien du coût, de la faisabilité ni de la rentabilité d'une intervention. Il hiérarchise des besoins mesurés — préalable à un arbitrage, jamais son substitut.</a:t>
             </a:r>
+            <a:endParaRPr sz="950" b="0">
+              <a:solidFill>
+                <a:srgbClr val="55544F"/>
+              </a:solidFill>
+              <a:latin typeface="Segoe UI" panose="020B0502040204020203"/>
+            </a:endParaRPr>
           </a:p>
         </p:txBody>
       </p:sp>
@@ -5240,7 +5316,7 @@
           <a:noFill/>
         </p:spPr>
         <p:txBody>
-          <a:bodyPr wrap="square" lIns="0" rIns="0" tIns="0" bIns="0">
+          <a:bodyPr wrap="square" lIns="0" tIns="0" rIns="0" bIns="0">
             <a:spAutoFit/>
           </a:bodyPr>
           <a:lstStyle/>
@@ -5255,10 +5331,16 @@
                 <a:solidFill>
                   <a:srgbClr val="12120F"/>
                 </a:solidFill>
-                <a:latin typeface="Segoe UI"/>
+                <a:latin typeface="Segoe UI" panose="020B0502040204020203"/>
               </a:rPr>
               <a:t>La structure par âge n'est pas prise en compte</a:t>
             </a:r>
+            <a:endParaRPr sz="1100" b="1">
+              <a:solidFill>
+                <a:srgbClr val="12120F"/>
+              </a:solidFill>
+              <a:latin typeface="Segoe UI" panose="020B0502040204020203"/>
+            </a:endParaRPr>
           </a:p>
         </p:txBody>
       </p:sp>
@@ -5279,7 +5361,7 @@
           <a:noFill/>
         </p:spPr>
         <p:txBody>
-          <a:bodyPr wrap="square" lIns="0" rIns="0" tIns="0" bIns="0">
+          <a:bodyPr wrap="square" lIns="0" tIns="0" rIns="0" bIns="0">
             <a:spAutoFit/>
           </a:bodyPr>
           <a:lstStyle/>
@@ -5294,10 +5376,16 @@
                 <a:solidFill>
                   <a:srgbClr val="55544F"/>
                 </a:solidFill>
-                <a:latin typeface="Segoe UI"/>
+                <a:latin typeface="Segoe UI" panose="020B0502040204020203"/>
               </a:rPr>
               <a:t>Un dénominateur « 15 ans et plus » serait plus juste. Les tableaux d'âges n'ont pas pu être extraits avec une garantie arithmétique suffisante : ils ont été écartés plutôt que repris sans contrôle.</a:t>
             </a:r>
+            <a:endParaRPr sz="950" b="0">
+              <a:solidFill>
+                <a:srgbClr val="55544F"/>
+              </a:solidFill>
+              <a:latin typeface="Segoe UI" panose="020B0502040204020203"/>
+            </a:endParaRPr>
           </a:p>
         </p:txBody>
       </p:sp>
@@ -5310,7 +5398,7 @@
 </file>
 
 <file path=ppt/slides/slide11.xml><?xml version="1.0" encoding="utf-8"?>
-<p:sld xmlns:a="http://schemas.openxmlformats.org/drawingml/2006/main" xmlns:p="http://schemas.openxmlformats.org/presentationml/2006/main" xmlns:r="http://schemas.openxmlformats.org/officeDocument/2006/relationships">
+<p:sld xmlns:a="http://schemas.openxmlformats.org/drawingml/2006/main" xmlns:r="http://schemas.openxmlformats.org/officeDocument/2006/relationships" xmlns:p="http://schemas.openxmlformats.org/presentationml/2006/main">
   <p:cSld>
     <p:spTree>
       <p:nvGrpSpPr>
@@ -5512,7 +5600,7 @@
           <a:noFill/>
         </p:spPr>
         <p:txBody>
-          <a:bodyPr wrap="square" lIns="0" rIns="0" tIns="0" bIns="0">
+          <a:bodyPr wrap="square" lIns="0" tIns="0" rIns="0" bIns="0">
             <a:spAutoFit/>
           </a:bodyPr>
           <a:lstStyle/>
@@ -5527,10 +5615,16 @@
                 <a:solidFill>
                   <a:srgbClr val="8B8A84"/>
                 </a:solidFill>
-                <a:latin typeface="Consolas"/>
+                <a:latin typeface="Consolas" panose="020B0609020204030204"/>
               </a:rPr>
               <a:t>CONCLUSION</a:t>
             </a:r>
+            <a:endParaRPr sz="900" b="1">
+              <a:solidFill>
+                <a:srgbClr val="8B8A84"/>
+              </a:solidFill>
+              <a:latin typeface="Consolas" panose="020B0609020204030204"/>
+            </a:endParaRPr>
           </a:p>
         </p:txBody>
       </p:sp>
@@ -5551,7 +5645,7 @@
           <a:noFill/>
         </p:spPr>
         <p:txBody>
-          <a:bodyPr wrap="square" lIns="0" rIns="0" tIns="0" bIns="0">
+          <a:bodyPr wrap="square" lIns="0" tIns="0" rIns="0" bIns="0">
             <a:spAutoFit/>
           </a:bodyPr>
           <a:lstStyle/>
@@ -5566,10 +5660,16 @@
                 <a:solidFill>
                   <a:srgbClr val="12120F"/>
                 </a:solidFill>
-                <a:latin typeface="Segoe UI"/>
+                <a:latin typeface="Segoe UI" panose="020B0502040204020203"/>
               </a:rPr>
               <a:t>Réponse à la problématique</a:t>
             </a:r>
+            <a:endParaRPr sz="2800" b="1">
+              <a:solidFill>
+                <a:srgbClr val="12120F"/>
+              </a:solidFill>
+              <a:latin typeface="Segoe UI" panose="020B0502040204020203"/>
+            </a:endParaRPr>
           </a:p>
         </p:txBody>
       </p:sp>
@@ -5678,7 +5778,7 @@
           <a:noFill/>
         </p:spPr>
         <p:txBody>
-          <a:bodyPr wrap="square" lIns="0" rIns="0" tIns="0" bIns="0">
+          <a:bodyPr wrap="square" lIns="0" tIns="0" rIns="0" bIns="0">
             <a:spAutoFit/>
           </a:bodyPr>
           <a:lstStyle/>
@@ -5693,10 +5793,16 @@
                 <a:solidFill>
                   <a:srgbClr val="0F4D3B"/>
                 </a:solidFill>
-                <a:latin typeface="Segoe UI"/>
+                <a:latin typeface="Segoe UI" panose="020B0502040204020203"/>
               </a:rPr>
               <a:t>9 territoires, 1 080 723 habitants, et un ordre d'intervention qui résiste au changement de méthode.</a:t>
             </a:r>
+            <a:endParaRPr sz="1350" b="1">
+              <a:solidFill>
+                <a:srgbClr val="0F4D3B"/>
+              </a:solidFill>
+              <a:latin typeface="Segoe UI" panose="020B0502040204020203"/>
+            </a:endParaRPr>
           </a:p>
         </p:txBody>
       </p:sp>
@@ -5761,7 +5867,7 @@
           <a:noFill/>
         </p:spPr>
         <p:txBody>
-          <a:bodyPr wrap="square" lIns="0" rIns="0" tIns="0" bIns="0">
+          <a:bodyPr wrap="square" lIns="0" tIns="0" rIns="0" bIns="0">
             <a:spAutoFit/>
           </a:bodyPr>
           <a:lstStyle/>
@@ -5776,10 +5882,16 @@
                 <a:solidFill>
                   <a:srgbClr val="8B8A84"/>
                 </a:solidFill>
-                <a:latin typeface="Consolas"/>
+                <a:latin typeface="Consolas" panose="020B0609020204030204"/>
               </a:rPr>
               <a:t>République togolaise · Défi Économie numérique · Données ouvertes PRISE 2021-2022, RGPH-5 2022, COD-AB 2021</a:t>
             </a:r>
+            <a:endParaRPr sz="800" b="0">
+              <a:solidFill>
+                <a:srgbClr val="8B8A84"/>
+              </a:solidFill>
+              <a:latin typeface="Consolas" panose="020B0609020204030204"/>
+            </a:endParaRPr>
           </a:p>
         </p:txBody>
       </p:sp>
@@ -5800,7 +5912,7 @@
           <a:noFill/>
         </p:spPr>
         <p:txBody>
-          <a:bodyPr wrap="square" lIns="0" rIns="0" tIns="0" bIns="0">
+          <a:bodyPr wrap="square" lIns="0" tIns="0" rIns="0" bIns="0">
             <a:spAutoFit/>
           </a:bodyPr>
           <a:lstStyle/>
@@ -5815,10 +5927,16 @@
                 <a:solidFill>
                   <a:srgbClr val="8B8A84"/>
                 </a:solidFill>
-                <a:latin typeface="Consolas"/>
+                <a:latin typeface="Consolas" panose="020B0609020204030204"/>
               </a:rPr>
               <a:t>10 / 10</a:t>
             </a:r>
+            <a:endParaRPr sz="800" b="1">
+              <a:solidFill>
+                <a:srgbClr val="8B8A84"/>
+              </a:solidFill>
+              <a:latin typeface="Consolas" panose="020B0609020204030204"/>
+            </a:endParaRPr>
           </a:p>
         </p:txBody>
       </p:sp>
@@ -5839,7 +5957,7 @@
           <a:noFill/>
         </p:spPr>
         <p:txBody>
-          <a:bodyPr wrap="square" lIns="0" rIns="0" tIns="0" bIns="0">
+          <a:bodyPr wrap="square" lIns="0" tIns="0" rIns="0" bIns="0">
             <a:spAutoFit/>
           </a:bodyPr>
           <a:lstStyle/>
@@ -5854,10 +5972,16 @@
                 <a:solidFill>
                   <a:srgbClr val="8B8A84"/>
                 </a:solidFill>
-                <a:latin typeface="Consolas"/>
+                <a:latin typeface="Consolas" panose="020B0609020204030204"/>
               </a:rPr>
               <a:t>OÙ INVESTIR EN PRIORITÉ</a:t>
             </a:r>
+            <a:endParaRPr sz="800" b="1">
+              <a:solidFill>
+                <a:srgbClr val="8B8A84"/>
+              </a:solidFill>
+              <a:latin typeface="Consolas" panose="020B0609020204030204"/>
+            </a:endParaRPr>
           </a:p>
         </p:txBody>
       </p:sp>
@@ -5878,7 +6002,7 @@
           <a:noFill/>
         </p:spPr>
         <p:txBody>
-          <a:bodyPr wrap="square" lIns="0" rIns="0" tIns="0" bIns="0">
+          <a:bodyPr wrap="square" lIns="0" tIns="0" rIns="0" bIns="0">
             <a:spAutoFit/>
           </a:bodyPr>
           <a:lstStyle/>
@@ -5893,10 +6017,16 @@
                 <a:solidFill>
                   <a:srgbClr val="12120F"/>
                 </a:solidFill>
-                <a:latin typeface="Segoe UI"/>
+                <a:latin typeface="Segoe UI" panose="020B0502040204020203"/>
               </a:rPr>
               <a:t>Kpendjal, Mô, Est-Mono, Akébou, Yoto, Kpendjal-Ouest, Tandjoaré, Wawa et Blitta.</a:t>
             </a:r>
+            <a:endParaRPr sz="1500" b="1">
+              <a:solidFill>
+                <a:srgbClr val="12120F"/>
+              </a:solidFill>
+              <a:latin typeface="Segoe UI" panose="020B0502040204020203"/>
+            </a:endParaRPr>
           </a:p>
         </p:txBody>
       </p:sp>
@@ -5961,7 +6091,7 @@
           <a:noFill/>
         </p:spPr>
         <p:txBody>
-          <a:bodyPr wrap="square" lIns="0" rIns="0" tIns="0" bIns="0">
+          <a:bodyPr wrap="square" lIns="0" tIns="0" rIns="0" bIns="0">
             <a:spAutoFit/>
           </a:bodyPr>
           <a:lstStyle/>
@@ -5976,10 +6106,16 @@
                 <a:solidFill>
                   <a:srgbClr val="12120F"/>
                 </a:solidFill>
-                <a:latin typeface="Segoe UI"/>
+                <a:latin typeface="Segoe UI" panose="020B0502040204020203"/>
               </a:rPr>
               <a:t>Pourquoi ces territoires</a:t>
             </a:r>
+            <a:endParaRPr sz="1100" b="1">
+              <a:solidFill>
+                <a:srgbClr val="12120F"/>
+              </a:solidFill>
+              <a:latin typeface="Segoe UI" panose="020B0502040204020203"/>
+            </a:endParaRPr>
           </a:p>
         </p:txBody>
       </p:sp>
@@ -6000,7 +6136,7 @@
           <a:noFill/>
         </p:spPr>
         <p:txBody>
-          <a:bodyPr wrap="square" lIns="0" rIns="0" tIns="0" bIns="0">
+          <a:bodyPr wrap="square" lIns="0" tIns="0" rIns="0" bIns="0">
             <a:spAutoFit/>
           </a:bodyPr>
           <a:lstStyle/>
@@ -6015,10 +6151,16 @@
                 <a:solidFill>
                   <a:srgbClr val="55544F"/>
                 </a:solidFill>
-                <a:latin typeface="Segoe UI"/>
+                <a:latin typeface="Segoe UI" panose="020B0502040204020203"/>
               </a:rPr>
               <a:t>Ils cumulent les trois déficits mesurés — desserte, présence d'agences, éloignement — pour une population qui les place au-delà du seuil où l'intervention devient rentable en nombre d'habitants touchés.</a:t>
             </a:r>
+            <a:endParaRPr sz="950" b="0">
+              <a:solidFill>
+                <a:srgbClr val="55544F"/>
+              </a:solidFill>
+              <a:latin typeface="Segoe UI" panose="020B0502040204020203"/>
+            </a:endParaRPr>
           </a:p>
         </p:txBody>
       </p:sp>
@@ -6083,7 +6225,7 @@
           <a:noFill/>
         </p:spPr>
         <p:txBody>
-          <a:bodyPr wrap="square" lIns="0" rIns="0" tIns="0" bIns="0">
+          <a:bodyPr wrap="square" lIns="0" tIns="0" rIns="0" bIns="0">
             <a:spAutoFit/>
           </a:bodyPr>
           <a:lstStyle/>
@@ -6098,10 +6240,16 @@
                 <a:solidFill>
                   <a:srgbClr val="12120F"/>
                 </a:solidFill>
-                <a:latin typeface="Segoe UI"/>
+                <a:latin typeface="Segoe UI" panose="020B0502040204020203"/>
               </a:rPr>
               <a:t>Pourquoi on peut le défendre</a:t>
             </a:r>
+            <a:endParaRPr sz="1100" b="1">
+              <a:solidFill>
+                <a:srgbClr val="12120F"/>
+              </a:solidFill>
+              <a:latin typeface="Segoe UI" panose="020B0502040204020203"/>
+            </a:endParaRPr>
           </a:p>
         </p:txBody>
       </p:sp>
@@ -6122,7 +6270,7 @@
           <a:noFill/>
         </p:spPr>
         <p:txBody>
-          <a:bodyPr wrap="square" lIns="0" rIns="0" tIns="0" bIns="0">
+          <a:bodyPr wrap="square" lIns="0" tIns="0" rIns="0" bIns="0">
             <a:spAutoFit/>
           </a:bodyPr>
           <a:lstStyle/>
@@ -6137,10 +6285,16 @@
                 <a:solidFill>
                   <a:srgbClr val="55544F"/>
                 </a:solidFill>
-                <a:latin typeface="Segoe UI"/>
+                <a:latin typeface="Segoe UI" panose="020B0502040204020203"/>
               </a:rPr>
               <a:t>2 000 pondérations testées, corrélation moyenne 0,971. 23 contrôles arithmétiques au vert. Aucune valeur imputée. Les approches écartées sont documentées avec leurs preuves.</a:t>
             </a:r>
+            <a:endParaRPr sz="950" b="0">
+              <a:solidFill>
+                <a:srgbClr val="55544F"/>
+              </a:solidFill>
+              <a:latin typeface="Segoe UI" panose="020B0502040204020203"/>
+            </a:endParaRPr>
           </a:p>
         </p:txBody>
       </p:sp>
@@ -6251,7 +6405,7 @@
           <a:noFill/>
         </p:spPr>
         <p:txBody>
-          <a:bodyPr wrap="square" lIns="0" rIns="0" tIns="0" bIns="0">
+          <a:bodyPr wrap="square" lIns="0" tIns="0" rIns="0" bIns="0">
             <a:spAutoFit/>
           </a:bodyPr>
           <a:lstStyle/>
@@ -6266,10 +6420,16 @@
                 <a:solidFill>
                   <a:srgbClr val="8B8A84"/>
                 </a:solidFill>
-                <a:latin typeface="Consolas"/>
+                <a:latin typeface="Consolas" panose="020B0609020204030204"/>
               </a:rPr>
               <a:t>TERRITOIRES PRIORITAIRES</a:t>
             </a:r>
+            <a:endParaRPr sz="750" b="1">
+              <a:solidFill>
+                <a:srgbClr val="8B8A84"/>
+              </a:solidFill>
+              <a:latin typeface="Consolas" panose="020B0609020204030204"/>
+            </a:endParaRPr>
           </a:p>
         </p:txBody>
       </p:sp>
@@ -6290,7 +6450,7 @@
           <a:noFill/>
         </p:spPr>
         <p:txBody>
-          <a:bodyPr wrap="square" lIns="0" rIns="0" tIns="0" bIns="0">
+          <a:bodyPr wrap="square" lIns="0" tIns="0" rIns="0" bIns="0">
             <a:spAutoFit/>
           </a:bodyPr>
           <a:lstStyle/>
@@ -6305,10 +6465,16 @@
                 <a:solidFill>
                   <a:srgbClr val="12120F"/>
                 </a:solidFill>
-                <a:latin typeface="Segoe UI"/>
+                <a:latin typeface="Segoe UI" panose="020B0502040204020203"/>
               </a:rPr>
               <a:t>9</a:t>
             </a:r>
+            <a:endParaRPr sz="2300" b="1">
+              <a:solidFill>
+                <a:srgbClr val="12120F"/>
+              </a:solidFill>
+              <a:latin typeface="Segoe UI" panose="020B0502040204020203"/>
+            </a:endParaRPr>
           </a:p>
         </p:txBody>
       </p:sp>
@@ -6329,7 +6495,7 @@
           <a:noFill/>
         </p:spPr>
         <p:txBody>
-          <a:bodyPr wrap="square" lIns="0" rIns="0" tIns="0" bIns="0">
+          <a:bodyPr wrap="square" lIns="0" tIns="0" rIns="0" bIns="0">
             <a:spAutoFit/>
           </a:bodyPr>
           <a:lstStyle/>
@@ -6344,10 +6510,16 @@
                 <a:solidFill>
                   <a:srgbClr val="55544F"/>
                 </a:solidFill>
-                <a:latin typeface="Segoe UI"/>
+                <a:latin typeface="Segoe UI" panose="020B0502040204020203"/>
               </a:rPr>
               <a:t>sur 39 préfectures</a:t>
             </a:r>
+            <a:endParaRPr sz="800" b="0">
+              <a:solidFill>
+                <a:srgbClr val="55544F"/>
+              </a:solidFill>
+              <a:latin typeface="Segoe UI" panose="020B0502040204020203"/>
+            </a:endParaRPr>
           </a:p>
         </p:txBody>
       </p:sp>
@@ -6458,7 +6630,7 @@
           <a:noFill/>
         </p:spPr>
         <p:txBody>
-          <a:bodyPr wrap="square" lIns="0" rIns="0" tIns="0" bIns="0">
+          <a:bodyPr wrap="square" lIns="0" tIns="0" rIns="0" bIns="0">
             <a:spAutoFit/>
           </a:bodyPr>
           <a:lstStyle/>
@@ -6473,10 +6645,16 @@
                 <a:solidFill>
                   <a:srgbClr val="8B8A84"/>
                 </a:solidFill>
-                <a:latin typeface="Consolas"/>
+                <a:latin typeface="Consolas" panose="020B0609020204030204"/>
               </a:rPr>
               <a:t>HABITANTS CONCERNÉS</a:t>
             </a:r>
+            <a:endParaRPr sz="750" b="1">
+              <a:solidFill>
+                <a:srgbClr val="8B8A84"/>
+              </a:solidFill>
+              <a:latin typeface="Consolas" panose="020B0609020204030204"/>
+            </a:endParaRPr>
           </a:p>
         </p:txBody>
       </p:sp>
@@ -6497,7 +6675,7 @@
           <a:noFill/>
         </p:spPr>
         <p:txBody>
-          <a:bodyPr wrap="square" lIns="0" rIns="0" tIns="0" bIns="0">
+          <a:bodyPr wrap="square" lIns="0" tIns="0" rIns="0" bIns="0">
             <a:spAutoFit/>
           </a:bodyPr>
           <a:lstStyle/>
@@ -6512,10 +6690,16 @@
                 <a:solidFill>
                   <a:srgbClr val="12120F"/>
                 </a:solidFill>
-                <a:latin typeface="Segoe UI"/>
+                <a:latin typeface="Segoe UI" panose="020B0502040204020203"/>
               </a:rPr>
               <a:t>1 080 723</a:t>
             </a:r>
+            <a:endParaRPr sz="2300" b="1">
+              <a:solidFill>
+                <a:srgbClr val="12120F"/>
+              </a:solidFill>
+              <a:latin typeface="Segoe UI" panose="020B0502040204020203"/>
+            </a:endParaRPr>
           </a:p>
         </p:txBody>
       </p:sp>
@@ -6536,7 +6720,7 @@
           <a:noFill/>
         </p:spPr>
         <p:txBody>
-          <a:bodyPr wrap="square" lIns="0" rIns="0" tIns="0" bIns="0">
+          <a:bodyPr wrap="square" lIns="0" tIns="0" rIns="0" bIns="0">
             <a:spAutoFit/>
           </a:bodyPr>
           <a:lstStyle/>
@@ -6551,10 +6735,16 @@
                 <a:solidFill>
                   <a:srgbClr val="55544F"/>
                 </a:solidFill>
-                <a:latin typeface="Segoe UI"/>
+                <a:latin typeface="Segoe UI" panose="020B0502040204020203"/>
               </a:rPr>
               <a:t>13% de la population</a:t>
             </a:r>
+            <a:endParaRPr sz="800" b="0">
+              <a:solidFill>
+                <a:srgbClr val="55544F"/>
+              </a:solidFill>
+              <a:latin typeface="Segoe UI" panose="020B0502040204020203"/>
+            </a:endParaRPr>
           </a:p>
         </p:txBody>
       </p:sp>
@@ -6665,7 +6855,7 @@
           <a:noFill/>
         </p:spPr>
         <p:txBody>
-          <a:bodyPr wrap="square" lIns="0" rIns="0" tIns="0" bIns="0">
+          <a:bodyPr wrap="square" lIns="0" tIns="0" rIns="0" bIns="0">
             <a:spAutoFit/>
           </a:bodyPr>
           <a:lstStyle/>
@@ -6680,10 +6870,16 @@
                 <a:solidFill>
                   <a:srgbClr val="8B8A84"/>
                 </a:solidFill>
-                <a:latin typeface="Consolas"/>
+                <a:latin typeface="Consolas" panose="020B0609020204030204"/>
               </a:rPr>
               <a:t>STABILITÉ DU CLASSEMENT</a:t>
             </a:r>
+            <a:endParaRPr sz="750" b="1">
+              <a:solidFill>
+                <a:srgbClr val="8B8A84"/>
+              </a:solidFill>
+              <a:latin typeface="Consolas" panose="020B0609020204030204"/>
+            </a:endParaRPr>
           </a:p>
         </p:txBody>
       </p:sp>
@@ -6704,7 +6900,7 @@
           <a:noFill/>
         </p:spPr>
         <p:txBody>
-          <a:bodyPr wrap="square" lIns="0" rIns="0" tIns="0" bIns="0">
+          <a:bodyPr wrap="square" lIns="0" tIns="0" rIns="0" bIns="0">
             <a:spAutoFit/>
           </a:bodyPr>
           <a:lstStyle/>
@@ -6719,10 +6915,16 @@
                 <a:solidFill>
                   <a:srgbClr val="12120F"/>
                 </a:solidFill>
-                <a:latin typeface="Segoe UI"/>
+                <a:latin typeface="Segoe UI" panose="020B0502040204020203"/>
               </a:rPr>
               <a:t>0,971</a:t>
             </a:r>
+            <a:endParaRPr sz="2300" b="1">
+              <a:solidFill>
+                <a:srgbClr val="12120F"/>
+              </a:solidFill>
+              <a:latin typeface="Segoe UI" panose="020B0502040204020203"/>
+            </a:endParaRPr>
           </a:p>
         </p:txBody>
       </p:sp>
@@ -6743,7 +6945,7 @@
           <a:noFill/>
         </p:spPr>
         <p:txBody>
-          <a:bodyPr wrap="square" lIns="0" rIns="0" tIns="0" bIns="0">
+          <a:bodyPr wrap="square" lIns="0" tIns="0" rIns="0" bIns="0">
             <a:spAutoFit/>
           </a:bodyPr>
           <a:lstStyle/>
@@ -6758,10 +6960,16 @@
                 <a:solidFill>
                   <a:srgbClr val="55544F"/>
                 </a:solidFill>
-                <a:latin typeface="Segoe UI"/>
+                <a:latin typeface="Segoe UI" panose="020B0502040204020203"/>
               </a:rPr>
               <a:t>corrélation sur 2 000 pondérations</a:t>
             </a:r>
+            <a:endParaRPr sz="800" b="0">
+              <a:solidFill>
+                <a:srgbClr val="55544F"/>
+              </a:solidFill>
+              <a:latin typeface="Segoe UI" panose="020B0502040204020203"/>
+            </a:endParaRPr>
           </a:p>
         </p:txBody>
       </p:sp>
@@ -6872,7 +7080,7 @@
           <a:noFill/>
         </p:spPr>
         <p:txBody>
-          <a:bodyPr wrap="square" lIns="0" rIns="0" tIns="0" bIns="0">
+          <a:bodyPr wrap="square" lIns="0" tIns="0" rIns="0" bIns="0">
             <a:spAutoFit/>
           </a:bodyPr>
           <a:lstStyle/>
@@ -6887,10 +7095,16 @@
                 <a:solidFill>
                   <a:srgbClr val="8B8A84"/>
                 </a:solidFill>
-                <a:latin typeface="Consolas"/>
+                <a:latin typeface="Consolas" panose="020B0609020204030204"/>
               </a:rPr>
               <a:t>CONTRÔLES AU VERT</a:t>
             </a:r>
+            <a:endParaRPr sz="750" b="1">
+              <a:solidFill>
+                <a:srgbClr val="8B8A84"/>
+              </a:solidFill>
+              <a:latin typeface="Consolas" panose="020B0609020204030204"/>
+            </a:endParaRPr>
           </a:p>
         </p:txBody>
       </p:sp>
@@ -6911,7 +7125,7 @@
           <a:noFill/>
         </p:spPr>
         <p:txBody>
-          <a:bodyPr wrap="square" lIns="0" rIns="0" tIns="0" bIns="0">
+          <a:bodyPr wrap="square" lIns="0" tIns="0" rIns="0" bIns="0">
             <a:spAutoFit/>
           </a:bodyPr>
           <a:lstStyle/>
@@ -6926,10 +7140,16 @@
                 <a:solidFill>
                   <a:srgbClr val="12120F"/>
                 </a:solidFill>
-                <a:latin typeface="Segoe UI"/>
+                <a:latin typeface="Segoe UI" panose="020B0502040204020203"/>
               </a:rPr>
               <a:t>23 / 23</a:t>
             </a:r>
+            <a:endParaRPr sz="2300" b="1">
+              <a:solidFill>
+                <a:srgbClr val="12120F"/>
+              </a:solidFill>
+              <a:latin typeface="Segoe UI" panose="020B0502040204020203"/>
+            </a:endParaRPr>
           </a:p>
         </p:txBody>
       </p:sp>
@@ -6950,7 +7170,7 @@
           <a:noFill/>
         </p:spPr>
         <p:txBody>
-          <a:bodyPr wrap="square" lIns="0" rIns="0" tIns="0" bIns="0">
+          <a:bodyPr wrap="square" lIns="0" tIns="0" rIns="0" bIns="0">
             <a:spAutoFit/>
           </a:bodyPr>
           <a:lstStyle/>
@@ -6965,10 +7185,16 @@
                 <a:solidFill>
                   <a:srgbClr val="55544F"/>
                 </a:solidFill>
-                <a:latin typeface="Segoe UI"/>
+                <a:latin typeface="Segoe UI" panose="020B0502040204020203"/>
               </a:rPr>
               <a:t>rejoués à chaque exécution</a:t>
             </a:r>
+            <a:endParaRPr sz="800" b="0">
+              <a:solidFill>
+                <a:srgbClr val="55544F"/>
+              </a:solidFill>
+              <a:latin typeface="Segoe UI" panose="020B0502040204020203"/>
+            </a:endParaRPr>
           </a:p>
         </p:txBody>
       </p:sp>
@@ -7079,7 +7305,7 @@
           <a:noFill/>
         </p:spPr>
         <p:txBody>
-          <a:bodyPr wrap="square" lIns="0" rIns="0" tIns="0" bIns="0">
+          <a:bodyPr wrap="square" lIns="0" tIns="0" rIns="0" bIns="0">
             <a:spAutoFit/>
           </a:bodyPr>
           <a:lstStyle/>
@@ -7094,10 +7320,16 @@
                 <a:solidFill>
                   <a:srgbClr val="55544F"/>
                 </a:solidFill>
-                <a:latin typeface="Segoe UI"/>
+                <a:latin typeface="Segoe UI" panose="020B0502040204020203"/>
               </a:rPr>
               <a:t>Ce que ce travail ne prétend pas faire : mesurer la couverture réseau. Compléter ce diagnostic exigerait l'ouverture des couches d'antennes du catalogue national — c'est la première recommandation adressée au producteur de données.</a:t>
             </a:r>
+            <a:endParaRPr sz="1000" b="0">
+              <a:solidFill>
+                <a:srgbClr val="55544F"/>
+              </a:solidFill>
+              <a:latin typeface="Segoe UI" panose="020B0502040204020203"/>
+            </a:endParaRPr>
           </a:p>
         </p:txBody>
       </p:sp>
@@ -7110,7 +7342,7 @@
 </file>
 
 <file path=ppt/slides/slide12.xml><?xml version="1.0" encoding="utf-8"?>
-<p:sld xmlns:a="http://schemas.openxmlformats.org/drawingml/2006/main" xmlns:p="http://schemas.openxmlformats.org/presentationml/2006/main" xmlns:r="http://schemas.openxmlformats.org/officeDocument/2006/relationships">
+<p:sld xmlns:a="http://schemas.openxmlformats.org/drawingml/2006/main" xmlns:r="http://schemas.openxmlformats.org/officeDocument/2006/relationships" xmlns:p="http://schemas.openxmlformats.org/presentationml/2006/main">
   <p:cSld>
     <p:spTree>
       <p:nvGrpSpPr>
@@ -7312,7 +7544,7 @@
           <a:noFill/>
         </p:spPr>
         <p:txBody>
-          <a:bodyPr wrap="square" lIns="0" rIns="0" tIns="0" bIns="0">
+          <a:bodyPr wrap="square" lIns="0" tIns="0" rIns="0" bIns="0">
             <a:spAutoFit/>
           </a:bodyPr>
           <a:lstStyle/>
@@ -7327,10 +7559,16 @@
                 <a:solidFill>
                   <a:srgbClr val="8EB6A6"/>
                 </a:solidFill>
-                <a:latin typeface="Segoe UI"/>
+                <a:latin typeface="Segoe UI" panose="020B0502040204020203"/>
               </a:rPr>
               <a:t>POUR ALLER PLUS LOIN</a:t>
             </a:r>
+            <a:endParaRPr sz="950" b="1" spc="190">
+              <a:solidFill>
+                <a:srgbClr val="8EB6A6"/>
+              </a:solidFill>
+              <a:latin typeface="Segoe UI" panose="020B0502040204020203"/>
+            </a:endParaRPr>
           </a:p>
         </p:txBody>
       </p:sp>
@@ -7351,7 +7589,7 @@
           <a:noFill/>
         </p:spPr>
         <p:txBody>
-          <a:bodyPr wrap="square" lIns="0" rIns="0" tIns="0" bIns="0">
+          <a:bodyPr wrap="square" lIns="0" tIns="0" rIns="0" bIns="0">
             <a:spAutoFit/>
           </a:bodyPr>
           <a:lstStyle/>
@@ -7366,10 +7604,16 @@
                 <a:solidFill>
                   <a:srgbClr val="FFFFFF"/>
                 </a:solidFill>
-                <a:latin typeface="Segoe UI"/>
+                <a:latin typeface="Segoe UI" panose="020B0502040204020203"/>
               </a:rPr>
               <a:t>Le diagnostic ne s'arrête pas</a:t>
             </a:r>
+            <a:endParaRPr sz="3600" b="1" spc="-40">
+              <a:solidFill>
+                <a:srgbClr val="FFFFFF"/>
+              </a:solidFill>
+              <a:latin typeface="Segoe UI" panose="020B0502040204020203"/>
+            </a:endParaRPr>
           </a:p>
           <a:p>
             <a:pPr algn="l">
@@ -7382,10 +7626,16 @@
                 <a:solidFill>
                   <a:srgbClr val="FFFFFF"/>
                 </a:solidFill>
-                <a:latin typeface="Segoe UI"/>
+                <a:latin typeface="Segoe UI" panose="020B0502040204020203"/>
               </a:rPr>
               <a:t>à ces diapositives</a:t>
             </a:r>
+            <a:endParaRPr sz="3600" b="1" spc="-40">
+              <a:solidFill>
+                <a:srgbClr val="FFFFFF"/>
+              </a:solidFill>
+              <a:latin typeface="Segoe UI" panose="020B0502040204020203"/>
+            </a:endParaRPr>
           </a:p>
         </p:txBody>
       </p:sp>
@@ -7450,7 +7700,7 @@
           <a:noFill/>
         </p:spPr>
         <p:txBody>
-          <a:bodyPr wrap="square" lIns="0" rIns="0" tIns="0" bIns="0">
+          <a:bodyPr wrap="square" lIns="0" tIns="0" rIns="0" bIns="0">
             <a:spAutoFit/>
           </a:bodyPr>
           <a:lstStyle/>
@@ -7465,10 +7715,16 @@
                 <a:solidFill>
                   <a:srgbClr val="8EB6A6"/>
                 </a:solidFill>
-                <a:latin typeface="Segoe UI"/>
+                <a:latin typeface="Segoe UI" panose="020B0502040204020203"/>
               </a:rPr>
               <a:t>TABLEAU DE BORD</a:t>
             </a:r>
+            <a:endParaRPr sz="850" b="1" spc="130">
+              <a:solidFill>
+                <a:srgbClr val="8EB6A6"/>
+              </a:solidFill>
+              <a:latin typeface="Segoe UI" panose="020B0502040204020203"/>
+            </a:endParaRPr>
           </a:p>
         </p:txBody>
       </p:sp>
@@ -7489,7 +7745,7 @@
           <a:noFill/>
         </p:spPr>
         <p:txBody>
-          <a:bodyPr wrap="square" lIns="0" rIns="0" tIns="0" bIns="0">
+          <a:bodyPr wrap="square" lIns="0" tIns="0" rIns="0" bIns="0">
             <a:spAutoFit/>
           </a:bodyPr>
           <a:lstStyle/>
@@ -7504,10 +7760,16 @@
                 <a:solidFill>
                   <a:srgbClr val="CBDED6"/>
                 </a:solidFill>
-                <a:latin typeface="Segoe UI"/>
+                <a:latin typeface="Segoe UI" panose="020B0502040204020203"/>
               </a:rPr>
               <a:t>39 préfectures, 117 communes, 19 788 points — cartes, fiches de territoire, repondération de l'indice et simulateur de couverture</a:t>
             </a:r>
+            <a:endParaRPr sz="1250" b="0">
+              <a:solidFill>
+                <a:srgbClr val="CBDED6"/>
+              </a:solidFill>
+              <a:latin typeface="Segoe UI" panose="020B0502040204020203"/>
+            </a:endParaRPr>
           </a:p>
         </p:txBody>
       </p:sp>
@@ -7528,7 +7790,7 @@
           <a:noFill/>
         </p:spPr>
         <p:txBody>
-          <a:bodyPr wrap="square" lIns="0" rIns="0" tIns="0" bIns="0">
+          <a:bodyPr wrap="square" lIns="0" tIns="0" rIns="0" bIns="0">
             <a:spAutoFit/>
           </a:bodyPr>
           <a:lstStyle/>
@@ -7543,10 +7805,16 @@
                 <a:solidFill>
                   <a:srgbClr val="8EB6A6"/>
                 </a:solidFill>
-                <a:latin typeface="Segoe UI"/>
+                <a:latin typeface="Segoe UI" panose="020B0502040204020203"/>
               </a:rPr>
               <a:t>CHAÎNE REPRODUCTIBLE</a:t>
             </a:r>
+            <a:endParaRPr sz="850" b="1" spc="130">
+              <a:solidFill>
+                <a:srgbClr val="8EB6A6"/>
+              </a:solidFill>
+              <a:latin typeface="Segoe UI" panose="020B0502040204020203"/>
+            </a:endParaRPr>
           </a:p>
         </p:txBody>
       </p:sp>
@@ -7567,7 +7835,7 @@
           <a:noFill/>
         </p:spPr>
         <p:txBody>
-          <a:bodyPr wrap="square" lIns="0" rIns="0" tIns="0" bIns="0">
+          <a:bodyPr wrap="square" lIns="0" tIns="0" rIns="0" bIns="0">
             <a:spAutoFit/>
           </a:bodyPr>
           <a:lstStyle/>
@@ -7582,10 +7850,16 @@
                 <a:solidFill>
                   <a:srgbClr val="CBDED6"/>
                 </a:solidFill>
-                <a:latin typeface="Segoe UI"/>
+                <a:latin typeface="Segoe UI" panose="020B0502040204020203"/>
               </a:rPr>
               <a:t>8 scripts, un rapport de contrôle par étape, 25 contrôles arithmétiques rejoués à chaque exécution</a:t>
             </a:r>
+            <a:endParaRPr sz="1250" b="0">
+              <a:solidFill>
+                <a:srgbClr val="CBDED6"/>
+              </a:solidFill>
+              <a:latin typeface="Segoe UI" panose="020B0502040204020203"/>
+            </a:endParaRPr>
           </a:p>
         </p:txBody>
       </p:sp>
@@ -7606,7 +7880,7 @@
           <a:noFill/>
         </p:spPr>
         <p:txBody>
-          <a:bodyPr wrap="square" lIns="0" rIns="0" tIns="0" bIns="0">
+          <a:bodyPr wrap="square" lIns="0" tIns="0" rIns="0" bIns="0">
             <a:spAutoFit/>
           </a:bodyPr>
           <a:lstStyle/>
@@ -7621,10 +7895,16 @@
                 <a:solidFill>
                   <a:srgbClr val="8EB6A6"/>
                 </a:solidFill>
-                <a:latin typeface="Segoe UI"/>
+                <a:latin typeface="Segoe UI" panose="020B0502040204020203"/>
               </a:rPr>
               <a:t>DONNÉES OUVERTES</a:t>
             </a:r>
+            <a:endParaRPr sz="850" b="1" spc="130">
+              <a:solidFill>
+                <a:srgbClr val="8EB6A6"/>
+              </a:solidFill>
+              <a:latin typeface="Segoe UI" panose="020B0502040204020203"/>
+            </a:endParaRPr>
           </a:p>
         </p:txBody>
       </p:sp>
@@ -7645,7 +7925,7 @@
           <a:noFill/>
         </p:spPr>
         <p:txBody>
-          <a:bodyPr wrap="square" lIns="0" rIns="0" tIns="0" bIns="0">
+          <a:bodyPr wrap="square" lIns="0" tIns="0" rIns="0" bIns="0">
             <a:spAutoFit/>
           </a:bodyPr>
           <a:lstStyle/>
@@ -7660,10 +7940,16 @@
                 <a:solidFill>
                   <a:srgbClr val="CBDED6"/>
                 </a:solidFill>
-                <a:latin typeface="Segoe UI"/>
+                <a:latin typeface="Segoe UI" panose="020B0502040204020203"/>
               </a:rPr>
               <a:t>aucune valeur imputée ; les trois pistes écartées sont documentées avec leurs preuves</a:t>
             </a:r>
+            <a:endParaRPr sz="1250" b="0">
+              <a:solidFill>
+                <a:srgbClr val="CBDED6"/>
+              </a:solidFill>
+              <a:latin typeface="Segoe UI" panose="020B0502040204020203"/>
+            </a:endParaRPr>
           </a:p>
         </p:txBody>
       </p:sp>
@@ -7728,7 +8014,7 @@
           <a:noFill/>
         </p:spPr>
         <p:txBody>
-          <a:bodyPr wrap="square" lIns="0" rIns="0" tIns="0" bIns="0">
+          <a:bodyPr wrap="square" lIns="0" tIns="0" rIns="0" bIns="0">
             <a:spAutoFit/>
           </a:bodyPr>
           <a:lstStyle/>
@@ -7743,10 +8029,16 @@
                 <a:solidFill>
                   <a:srgbClr val="FFCE15"/>
                 </a:solidFill>
-                <a:latin typeface="Segoe UI"/>
+                <a:latin typeface="Segoe UI" panose="020B0502040204020203"/>
               </a:rPr>
               <a:t>Tableau de bord en ligne — adresse à renseigner (src/build_deck.py)</a:t>
             </a:r>
+            <a:endParaRPr sz="1500" b="1">
+              <a:solidFill>
+                <a:srgbClr val="FFCE15"/>
+              </a:solidFill>
+              <a:latin typeface="Segoe UI" panose="020B0502040204020203"/>
+            </a:endParaRPr>
           </a:p>
         </p:txBody>
       </p:sp>
@@ -7767,7 +8059,7 @@
           <a:noFill/>
         </p:spPr>
         <p:txBody>
-          <a:bodyPr wrap="square" lIns="0" rIns="0" tIns="0" bIns="0">
+          <a:bodyPr wrap="square" lIns="0" tIns="0" rIns="0" bIns="0">
             <a:spAutoFit/>
           </a:bodyPr>
           <a:lstStyle/>
@@ -7782,10 +8074,16 @@
                 <a:solidFill>
                   <a:srgbClr val="FFFFFF"/>
                 </a:solidFill>
-                <a:latin typeface="Segoe UI"/>
+                <a:latin typeface="Segoe UI" panose="020B0502040204020203"/>
               </a:rPr>
               <a:t>KOUTSAVA Kossi Epiphane</a:t>
             </a:r>
+            <a:endParaRPr sz="1350" b="1">
+              <a:solidFill>
+                <a:srgbClr val="FFFFFF"/>
+              </a:solidFill>
+              <a:latin typeface="Segoe UI" panose="020B0502040204020203"/>
+            </a:endParaRPr>
           </a:p>
         </p:txBody>
       </p:sp>
@@ -7806,7 +8104,7 @@
           <a:noFill/>
         </p:spPr>
         <p:txBody>
-          <a:bodyPr wrap="square" lIns="0" rIns="0" tIns="0" bIns="0">
+          <a:bodyPr wrap="square" lIns="0" tIns="0" rIns="0" bIns="0">
             <a:spAutoFit/>
           </a:bodyPr>
           <a:lstStyle/>
@@ -7821,10 +8119,16 @@
                 <a:solidFill>
                   <a:srgbClr val="6D9A89"/>
                 </a:solidFill>
-                <a:latin typeface="Segoe UI"/>
+                <a:latin typeface="Segoe UI" panose="020B0502040204020203"/>
               </a:rPr>
               <a:t>République togolaise · Défi Économie numérique · Un score élevé signale un besoin mesuré — ni un coût, ni une faisabilité, ni une rentabilité.</a:t>
             </a:r>
+            <a:endParaRPr sz="800" b="0">
+              <a:solidFill>
+                <a:srgbClr val="6D9A89"/>
+              </a:solidFill>
+              <a:latin typeface="Segoe UI" panose="020B0502040204020203"/>
+            </a:endParaRPr>
           </a:p>
         </p:txBody>
       </p:sp>
@@ -7837,7 +8141,7 @@
           <p:nvPr/>
         </p:nvPicPr>
         <p:blipFill>
-          <a:blip r:embed="rId2"/>
+          <a:blip r:embed="rId1"/>
           <a:stretch>
             <a:fillRect/>
           </a:stretch>
@@ -7861,7 +8165,7 @@
 </file>
 
 <file path=ppt/slides/slide2.xml><?xml version="1.0" encoding="utf-8"?>
-<p:sld xmlns:a="http://schemas.openxmlformats.org/drawingml/2006/main" xmlns:p="http://schemas.openxmlformats.org/presentationml/2006/main" xmlns:r="http://schemas.openxmlformats.org/officeDocument/2006/relationships">
+<p:sld xmlns:a="http://schemas.openxmlformats.org/drawingml/2006/main" xmlns:r="http://schemas.openxmlformats.org/officeDocument/2006/relationships" xmlns:p="http://schemas.openxmlformats.org/presentationml/2006/main">
   <p:cSld>
     <p:spTree>
       <p:nvGrpSpPr>
@@ -8063,7 +8367,7 @@
           <a:noFill/>
         </p:spPr>
         <p:txBody>
-          <a:bodyPr wrap="square" lIns="0" rIns="0" tIns="0" bIns="0">
+          <a:bodyPr wrap="square" lIns="0" tIns="0" rIns="0" bIns="0">
             <a:spAutoFit/>
           </a:bodyPr>
           <a:lstStyle/>
@@ -8078,10 +8382,16 @@
                 <a:solidFill>
                   <a:srgbClr val="8B8A84"/>
                 </a:solidFill>
-                <a:latin typeface="Consolas"/>
+                <a:latin typeface="Consolas" panose="020B0609020204030204"/>
               </a:rPr>
               <a:t>DÉFI ÉCONOMIE NUMÉRIQUE · TOGO</a:t>
             </a:r>
+            <a:endParaRPr sz="900" b="1">
+              <a:solidFill>
+                <a:srgbClr val="8B8A84"/>
+              </a:solidFill>
+              <a:latin typeface="Consolas" panose="020B0609020204030204"/>
+            </a:endParaRPr>
           </a:p>
         </p:txBody>
       </p:sp>
@@ -8102,7 +8412,7 @@
           <a:noFill/>
         </p:spPr>
         <p:txBody>
-          <a:bodyPr wrap="square" lIns="0" rIns="0" tIns="0" bIns="0">
+          <a:bodyPr wrap="square" lIns="0" tIns="0" rIns="0" bIns="0">
             <a:spAutoFit/>
           </a:bodyPr>
           <a:lstStyle/>
@@ -8117,10 +8427,16 @@
                 <a:solidFill>
                   <a:srgbClr val="12120F"/>
                 </a:solidFill>
-                <a:latin typeface="Segoe UI"/>
+                <a:latin typeface="Segoe UI" panose="020B0502040204020203"/>
               </a:rPr>
               <a:t>Problématique et enjeux</a:t>
             </a:r>
+            <a:endParaRPr sz="2800" b="1">
+              <a:solidFill>
+                <a:srgbClr val="12120F"/>
+              </a:solidFill>
+              <a:latin typeface="Segoe UI" panose="020B0502040204020203"/>
+            </a:endParaRPr>
           </a:p>
         </p:txBody>
       </p:sp>
@@ -8229,7 +8545,7 @@
           <a:noFill/>
         </p:spPr>
         <p:txBody>
-          <a:bodyPr wrap="square" lIns="0" rIns="0" tIns="0" bIns="0">
+          <a:bodyPr wrap="square" lIns="0" tIns="0" rIns="0" bIns="0">
             <a:spAutoFit/>
           </a:bodyPr>
           <a:lstStyle/>
@@ -8244,10 +8560,16 @@
                 <a:solidFill>
                   <a:srgbClr val="0F4D3B"/>
                 </a:solidFill>
-                <a:latin typeface="Segoe UI"/>
+                <a:latin typeface="Segoe UI" panose="020B0502040204020203"/>
               </a:rPr>
               <a:t>L'accès aux services numériques au Togo n'est pas faible partout : il est très inégal — et l'inégalité se mesure.</a:t>
             </a:r>
+            <a:endParaRPr sz="1350" b="1">
+              <a:solidFill>
+                <a:srgbClr val="0F4D3B"/>
+              </a:solidFill>
+              <a:latin typeface="Segoe UI" panose="020B0502040204020203"/>
+            </a:endParaRPr>
           </a:p>
         </p:txBody>
       </p:sp>
@@ -8312,7 +8634,7 @@
           <a:noFill/>
         </p:spPr>
         <p:txBody>
-          <a:bodyPr wrap="square" lIns="0" rIns="0" tIns="0" bIns="0">
+          <a:bodyPr wrap="square" lIns="0" tIns="0" rIns="0" bIns="0">
             <a:spAutoFit/>
           </a:bodyPr>
           <a:lstStyle/>
@@ -8327,10 +8649,16 @@
                 <a:solidFill>
                   <a:srgbClr val="8B8A84"/>
                 </a:solidFill>
-                <a:latin typeface="Consolas"/>
+                <a:latin typeface="Consolas" panose="020B0609020204030204"/>
               </a:rPr>
               <a:t>République togolaise · Défi Économie numérique · Données ouvertes PRISE 2021-2022, RGPH-5 2022, COD-AB 2021</a:t>
             </a:r>
+            <a:endParaRPr sz="800" b="0">
+              <a:solidFill>
+                <a:srgbClr val="8B8A84"/>
+              </a:solidFill>
+              <a:latin typeface="Consolas" panose="020B0609020204030204"/>
+            </a:endParaRPr>
           </a:p>
         </p:txBody>
       </p:sp>
@@ -8351,7 +8679,7 @@
           <a:noFill/>
         </p:spPr>
         <p:txBody>
-          <a:bodyPr wrap="square" lIns="0" rIns="0" tIns="0" bIns="0">
+          <a:bodyPr wrap="square" lIns="0" tIns="0" rIns="0" bIns="0">
             <a:spAutoFit/>
           </a:bodyPr>
           <a:lstStyle/>
@@ -8366,10 +8694,16 @@
                 <a:solidFill>
                   <a:srgbClr val="8B8A84"/>
                 </a:solidFill>
-                <a:latin typeface="Consolas"/>
+                <a:latin typeface="Consolas" panose="020B0609020204030204"/>
               </a:rPr>
               <a:t>01 / 10</a:t>
             </a:r>
+            <a:endParaRPr sz="800" b="1">
+              <a:solidFill>
+                <a:srgbClr val="8B8A84"/>
+              </a:solidFill>
+              <a:latin typeface="Consolas" panose="020B0609020204030204"/>
+            </a:endParaRPr>
           </a:p>
         </p:txBody>
       </p:sp>
@@ -8390,7 +8724,7 @@
           <a:noFill/>
         </p:spPr>
         <p:txBody>
-          <a:bodyPr wrap="square" lIns="0" rIns="0" tIns="0" bIns="0">
+          <a:bodyPr wrap="square" lIns="0" tIns="0" rIns="0" bIns="0">
             <a:spAutoFit/>
           </a:bodyPr>
           <a:lstStyle/>
@@ -8405,10 +8739,16 @@
                 <a:solidFill>
                   <a:srgbClr val="12120F"/>
                 </a:solidFill>
-                <a:latin typeface="Segoe UI"/>
+                <a:latin typeface="Segoe UI" panose="020B0502040204020203"/>
               </a:rPr>
               <a:t>Où faut-il investir en priorité pour réduire les inégalités d'accès aux télécommunications et aux services numériques au Togo, et pourquoi ?</a:t>
             </a:r>
+            <a:endParaRPr sz="1700" b="1">
+              <a:solidFill>
+                <a:srgbClr val="12120F"/>
+              </a:solidFill>
+              <a:latin typeface="Segoe UI" panose="020B0502040204020203"/>
+            </a:endParaRPr>
           </a:p>
         </p:txBody>
       </p:sp>
@@ -8473,7 +8813,7 @@
           <a:noFill/>
         </p:spPr>
         <p:txBody>
-          <a:bodyPr wrap="square" lIns="0" rIns="0" tIns="0" bIns="0">
+          <a:bodyPr wrap="square" lIns="0" tIns="0" rIns="0" bIns="0">
             <a:spAutoFit/>
           </a:bodyPr>
           <a:lstStyle/>
@@ -8488,10 +8828,16 @@
                 <a:solidFill>
                   <a:srgbClr val="12120F"/>
                 </a:solidFill>
-                <a:latin typeface="Segoe UI"/>
+                <a:latin typeface="Segoe UI" panose="020B0502040204020203"/>
               </a:rPr>
               <a:t>Une moyenne nationale ne suffit pas à décider</a:t>
             </a:r>
+            <a:endParaRPr sz="1100" b="1">
+              <a:solidFill>
+                <a:srgbClr val="12120F"/>
+              </a:solidFill>
+              <a:latin typeface="Segoe UI" panose="020B0502040204020203"/>
+            </a:endParaRPr>
           </a:p>
         </p:txBody>
       </p:sp>
@@ -8512,7 +8858,7 @@
           <a:noFill/>
         </p:spPr>
         <p:txBody>
-          <a:bodyPr wrap="square" lIns="0" rIns="0" tIns="0" bIns="0">
+          <a:bodyPr wrap="square" lIns="0" tIns="0" rIns="0" bIns="0">
             <a:spAutoFit/>
           </a:bodyPr>
           <a:lstStyle/>
@@ -8527,10 +8873,16 @@
                 <a:solidFill>
                   <a:srgbClr val="55544F"/>
                 </a:solidFill>
-                <a:latin typeface="Segoe UI"/>
+                <a:latin typeface="Segoe UI" panose="020B0502040204020203"/>
               </a:rPr>
               <a:t>409 habitants par point Mobile Money en moyenne — mais un rapport de 1 à 12,7 entre préfectures. Agir « partout » revient à n'agir nulle part en priorité.</a:t>
             </a:r>
+            <a:endParaRPr sz="950" b="0">
+              <a:solidFill>
+                <a:srgbClr val="55544F"/>
+              </a:solidFill>
+              <a:latin typeface="Segoe UI" panose="020B0502040204020203"/>
+            </a:endParaRPr>
           </a:p>
         </p:txBody>
       </p:sp>
@@ -8595,7 +8947,7 @@
           <a:noFill/>
         </p:spPr>
         <p:txBody>
-          <a:bodyPr wrap="square" lIns="0" rIns="0" tIns="0" bIns="0">
+          <a:bodyPr wrap="square" lIns="0" tIns="0" rIns="0" bIns="0">
             <a:spAutoFit/>
           </a:bodyPr>
           <a:lstStyle/>
@@ -8610,10 +8962,16 @@
                 <a:solidFill>
                   <a:srgbClr val="12120F"/>
                 </a:solidFill>
-                <a:latin typeface="Segoe UI"/>
+                <a:latin typeface="Segoe UI" panose="020B0502040204020203"/>
               </a:rPr>
               <a:t>Un déficit se prouve, il ne se déclare pas</a:t>
             </a:r>
+            <a:endParaRPr sz="1100" b="1">
+              <a:solidFill>
+                <a:srgbClr val="12120F"/>
+              </a:solidFill>
+              <a:latin typeface="Segoe UI" panose="020B0502040204020203"/>
+            </a:endParaRPr>
           </a:p>
         </p:txBody>
       </p:sp>
@@ -8634,7 +8992,7 @@
           <a:noFill/>
         </p:spPr>
         <p:txBody>
-          <a:bodyPr wrap="square" lIns="0" rIns="0" tIns="0" bIns="0">
+          <a:bodyPr wrap="square" lIns="0" tIns="0" rIns="0" bIns="0">
             <a:spAutoFit/>
           </a:bodyPr>
           <a:lstStyle/>
@@ -8649,10 +9007,16 @@
                 <a:solidFill>
                   <a:srgbClr val="55544F"/>
                 </a:solidFill>
-                <a:latin typeface="Segoe UI"/>
+                <a:latin typeface="Segoe UI" panose="020B0502040204020203"/>
               </a:rPr>
               <a:t>Affirmer qu'un territoire est sous-desservi exige un dénominateur : la population. Sans elle, un faible comptage peut simplement refléter une faible démographie.</a:t>
             </a:r>
+            <a:endParaRPr sz="950" b="0">
+              <a:solidFill>
+                <a:srgbClr val="55544F"/>
+              </a:solidFill>
+              <a:latin typeface="Segoe UI" panose="020B0502040204020203"/>
+            </a:endParaRPr>
           </a:p>
         </p:txBody>
       </p:sp>
@@ -8717,7 +9081,7 @@
           <a:noFill/>
         </p:spPr>
         <p:txBody>
-          <a:bodyPr wrap="square" lIns="0" rIns="0" tIns="0" bIns="0">
+          <a:bodyPr wrap="square" lIns="0" tIns="0" rIns="0" bIns="0">
             <a:spAutoFit/>
           </a:bodyPr>
           <a:lstStyle/>
@@ -8732,10 +9096,16 @@
                 <a:solidFill>
                   <a:srgbClr val="12120F"/>
                 </a:solidFill>
-                <a:latin typeface="Segoe UI"/>
+                <a:latin typeface="Segoe UI" panose="020B0502040204020203"/>
               </a:rPr>
               <a:t>Une priorisation doit résister à la contestation</a:t>
             </a:r>
+            <a:endParaRPr sz="1100" b="1">
+              <a:solidFill>
+                <a:srgbClr val="12120F"/>
+              </a:solidFill>
+              <a:latin typeface="Segoe UI" panose="020B0502040204020203"/>
+            </a:endParaRPr>
           </a:p>
         </p:txBody>
       </p:sp>
@@ -8756,7 +9126,7 @@
           <a:noFill/>
         </p:spPr>
         <p:txBody>
-          <a:bodyPr wrap="square" lIns="0" rIns="0" tIns="0" bIns="0">
+          <a:bodyPr wrap="square" lIns="0" tIns="0" rIns="0" bIns="0">
             <a:spAutoFit/>
           </a:bodyPr>
           <a:lstStyle/>
@@ -8771,10 +9141,16 @@
                 <a:solidFill>
                   <a:srgbClr val="55544F"/>
                 </a:solidFill>
-                <a:latin typeface="Segoe UI"/>
+                <a:latin typeface="Segoe UI" panose="020B0502040204020203"/>
               </a:rPr>
               <a:t>Un classement dépendant de pondérations arbitraires n'est pas défendable. Il doit être testé, et sa stabilité publiée.</a:t>
             </a:r>
+            <a:endParaRPr sz="950" b="0">
+              <a:solidFill>
+                <a:srgbClr val="55544F"/>
+              </a:solidFill>
+              <a:latin typeface="Segoe UI" panose="020B0502040204020203"/>
+            </a:endParaRPr>
           </a:p>
         </p:txBody>
       </p:sp>
@@ -8885,7 +9261,7 @@
           <a:noFill/>
         </p:spPr>
         <p:txBody>
-          <a:bodyPr wrap="square" lIns="0" rIns="0" tIns="0" bIns="0">
+          <a:bodyPr wrap="square" lIns="0" tIns="0" rIns="0" bIns="0">
             <a:spAutoFit/>
           </a:bodyPr>
           <a:lstStyle/>
@@ -8900,10 +9276,16 @@
                 <a:solidFill>
                   <a:srgbClr val="8B8A84"/>
                 </a:solidFill>
-                <a:latin typeface="Consolas"/>
+                <a:latin typeface="Consolas" panose="020B0609020204030204"/>
               </a:rPr>
               <a:t>POPULATION RÉSIDENTE</a:t>
             </a:r>
+            <a:endParaRPr sz="750" b="1">
+              <a:solidFill>
+                <a:srgbClr val="8B8A84"/>
+              </a:solidFill>
+              <a:latin typeface="Consolas" panose="020B0609020204030204"/>
+            </a:endParaRPr>
           </a:p>
         </p:txBody>
       </p:sp>
@@ -8924,7 +9306,7 @@
           <a:noFill/>
         </p:spPr>
         <p:txBody>
-          <a:bodyPr wrap="square" lIns="0" rIns="0" tIns="0" bIns="0">
+          <a:bodyPr wrap="square" lIns="0" tIns="0" rIns="0" bIns="0">
             <a:spAutoFit/>
           </a:bodyPr>
           <a:lstStyle/>
@@ -8939,10 +9321,16 @@
                 <a:solidFill>
                   <a:srgbClr val="12120F"/>
                 </a:solidFill>
-                <a:latin typeface="Segoe UI"/>
+                <a:latin typeface="Segoe UI" panose="020B0502040204020203"/>
               </a:rPr>
               <a:t>8 095 498</a:t>
             </a:r>
+            <a:endParaRPr sz="2300" b="1">
+              <a:solidFill>
+                <a:srgbClr val="12120F"/>
+              </a:solidFill>
+              <a:latin typeface="Segoe UI" panose="020B0502040204020203"/>
+            </a:endParaRPr>
           </a:p>
         </p:txBody>
       </p:sp>
@@ -8963,7 +9351,7 @@
           <a:noFill/>
         </p:spPr>
         <p:txBody>
-          <a:bodyPr wrap="square" lIns="0" rIns="0" tIns="0" bIns="0">
+          <a:bodyPr wrap="square" lIns="0" tIns="0" rIns="0" bIns="0">
             <a:spAutoFit/>
           </a:bodyPr>
           <a:lstStyle/>
@@ -8978,10 +9366,16 @@
                 <a:solidFill>
                   <a:srgbClr val="55544F"/>
                 </a:solidFill>
-                <a:latin typeface="Segoe UI"/>
+                <a:latin typeface="Segoe UI" panose="020B0502040204020203"/>
               </a:rPr>
               <a:t>RGPH-5 · novembre 2022</a:t>
             </a:r>
+            <a:endParaRPr sz="800" b="0">
+              <a:solidFill>
+                <a:srgbClr val="55544F"/>
+              </a:solidFill>
+              <a:latin typeface="Segoe UI" panose="020B0502040204020203"/>
+            </a:endParaRPr>
           </a:p>
         </p:txBody>
       </p:sp>
@@ -9092,7 +9486,7 @@
           <a:noFill/>
         </p:spPr>
         <p:txBody>
-          <a:bodyPr wrap="square" lIns="0" rIns="0" tIns="0" bIns="0">
+          <a:bodyPr wrap="square" lIns="0" tIns="0" rIns="0" bIns="0">
             <a:spAutoFit/>
           </a:bodyPr>
           <a:lstStyle/>
@@ -9107,10 +9501,16 @@
                 <a:solidFill>
                   <a:srgbClr val="8B8A84"/>
                 </a:solidFill>
-                <a:latin typeface="Consolas"/>
+                <a:latin typeface="Consolas" panose="020B0609020204030204"/>
               </a:rPr>
               <a:t>POINTS DE SERVICE RECENSÉS</a:t>
             </a:r>
+            <a:endParaRPr sz="750" b="1">
+              <a:solidFill>
+                <a:srgbClr val="8B8A84"/>
+              </a:solidFill>
+              <a:latin typeface="Consolas" panose="020B0609020204030204"/>
+            </a:endParaRPr>
           </a:p>
         </p:txBody>
       </p:sp>
@@ -9131,7 +9531,7 @@
           <a:noFill/>
         </p:spPr>
         <p:txBody>
-          <a:bodyPr wrap="square" lIns="0" rIns="0" tIns="0" bIns="0">
+          <a:bodyPr wrap="square" lIns="0" tIns="0" rIns="0" bIns="0">
             <a:spAutoFit/>
           </a:bodyPr>
           <a:lstStyle/>
@@ -9146,10 +9546,16 @@
                 <a:solidFill>
                   <a:srgbClr val="12120F"/>
                 </a:solidFill>
-                <a:latin typeface="Segoe UI"/>
+                <a:latin typeface="Segoe UI" panose="020B0502040204020203"/>
               </a:rPr>
               <a:t>19 788</a:t>
             </a:r>
+            <a:endParaRPr sz="2300" b="1">
+              <a:solidFill>
+                <a:srgbClr val="12120F"/>
+              </a:solidFill>
+              <a:latin typeface="Segoe UI" panose="020B0502040204020203"/>
+            </a:endParaRPr>
           </a:p>
         </p:txBody>
       </p:sp>
@@ -9170,7 +9576,7 @@
           <a:noFill/>
         </p:spPr>
         <p:txBody>
-          <a:bodyPr wrap="square" lIns="0" rIns="0" tIns="0" bIns="0">
+          <a:bodyPr wrap="square" lIns="0" tIns="0" rIns="0" bIns="0">
             <a:spAutoFit/>
           </a:bodyPr>
           <a:lstStyle/>
@@ -9185,10 +9591,16 @@
                 <a:solidFill>
                   <a:srgbClr val="55544F"/>
                 </a:solidFill>
-                <a:latin typeface="Segoe UI"/>
+                <a:latin typeface="Segoe UI" panose="020B0502040204020203"/>
               </a:rPr>
               <a:t>tous géolocalisés</a:t>
             </a:r>
+            <a:endParaRPr sz="800" b="0">
+              <a:solidFill>
+                <a:srgbClr val="55544F"/>
+              </a:solidFill>
+              <a:latin typeface="Segoe UI" panose="020B0502040204020203"/>
+            </a:endParaRPr>
           </a:p>
         </p:txBody>
       </p:sp>
@@ -9299,7 +9711,7 @@
           <a:noFill/>
         </p:spPr>
         <p:txBody>
-          <a:bodyPr wrap="square" lIns="0" rIns="0" tIns="0" bIns="0">
+          <a:bodyPr wrap="square" lIns="0" tIns="0" rIns="0" bIns="0">
             <a:spAutoFit/>
           </a:bodyPr>
           <a:lstStyle/>
@@ -9314,10 +9726,16 @@
                 <a:solidFill>
                   <a:srgbClr val="8B8A84"/>
                 </a:solidFill>
-                <a:latin typeface="Consolas"/>
+                <a:latin typeface="Consolas" panose="020B0609020204030204"/>
               </a:rPr>
               <a:t>PRÉFECTURES SANS AUCUNE AGENCE</a:t>
             </a:r>
+            <a:endParaRPr sz="750" b="1">
+              <a:solidFill>
+                <a:srgbClr val="8B8A84"/>
+              </a:solidFill>
+              <a:latin typeface="Consolas" panose="020B0609020204030204"/>
+            </a:endParaRPr>
           </a:p>
         </p:txBody>
       </p:sp>
@@ -9338,7 +9756,7 @@
           <a:noFill/>
         </p:spPr>
         <p:txBody>
-          <a:bodyPr wrap="square" lIns="0" rIns="0" tIns="0" bIns="0">
+          <a:bodyPr wrap="square" lIns="0" tIns="0" rIns="0" bIns="0">
             <a:spAutoFit/>
           </a:bodyPr>
           <a:lstStyle/>
@@ -9353,10 +9771,16 @@
                 <a:solidFill>
                   <a:srgbClr val="12120F"/>
                 </a:solidFill>
-                <a:latin typeface="Segoe UI"/>
+                <a:latin typeface="Segoe UI" panose="020B0502040204020203"/>
               </a:rPr>
               <a:t>13 / 39</a:t>
             </a:r>
+            <a:endParaRPr sz="2300" b="1">
+              <a:solidFill>
+                <a:srgbClr val="12120F"/>
+              </a:solidFill>
+              <a:latin typeface="Segoe UI" panose="020B0502040204020203"/>
+            </a:endParaRPr>
           </a:p>
         </p:txBody>
       </p:sp>
@@ -9377,7 +9801,7 @@
           <a:noFill/>
         </p:spPr>
         <p:txBody>
-          <a:bodyPr wrap="square" lIns="0" rIns="0" tIns="0" bIns="0">
+          <a:bodyPr wrap="square" lIns="0" tIns="0" rIns="0" bIns="0">
             <a:spAutoFit/>
           </a:bodyPr>
           <a:lstStyle/>
@@ -9392,10 +9816,16 @@
                 <a:solidFill>
                   <a:srgbClr val="55544F"/>
                 </a:solidFill>
-                <a:latin typeface="Segoe UI"/>
+                <a:latin typeface="Segoe UI" panose="020B0502040204020203"/>
               </a:rPr>
               <a:t>1 621 720 habitants</a:t>
             </a:r>
+            <a:endParaRPr sz="800" b="0">
+              <a:solidFill>
+                <a:srgbClr val="55544F"/>
+              </a:solidFill>
+              <a:latin typeface="Segoe UI" panose="020B0502040204020203"/>
+            </a:endParaRPr>
           </a:p>
         </p:txBody>
       </p:sp>
@@ -9506,7 +9936,7 @@
           <a:noFill/>
         </p:spPr>
         <p:txBody>
-          <a:bodyPr wrap="square" lIns="0" rIns="0" tIns="0" bIns="0">
+          <a:bodyPr wrap="square" lIns="0" tIns="0" rIns="0" bIns="0">
             <a:spAutoFit/>
           </a:bodyPr>
           <a:lstStyle/>
@@ -9521,10 +9951,16 @@
                 <a:solidFill>
                   <a:srgbClr val="8B8A84"/>
                 </a:solidFill>
-                <a:latin typeface="Consolas"/>
+                <a:latin typeface="Consolas" panose="020B0609020204030204"/>
               </a:rPr>
               <a:t>TERRITOIRES PRIORITAIRES IDENTIFIÉS</a:t>
             </a:r>
+            <a:endParaRPr sz="750" b="1">
+              <a:solidFill>
+                <a:srgbClr val="8B8A84"/>
+              </a:solidFill>
+              <a:latin typeface="Consolas" panose="020B0609020204030204"/>
+            </a:endParaRPr>
           </a:p>
         </p:txBody>
       </p:sp>
@@ -9545,7 +9981,7 @@
           <a:noFill/>
         </p:spPr>
         <p:txBody>
-          <a:bodyPr wrap="square" lIns="0" rIns="0" tIns="0" bIns="0">
+          <a:bodyPr wrap="square" lIns="0" tIns="0" rIns="0" bIns="0">
             <a:spAutoFit/>
           </a:bodyPr>
           <a:lstStyle/>
@@ -9560,10 +9996,16 @@
                 <a:solidFill>
                   <a:srgbClr val="12120F"/>
                 </a:solidFill>
-                <a:latin typeface="Segoe UI"/>
+                <a:latin typeface="Segoe UI" panose="020B0502040204020203"/>
               </a:rPr>
               <a:t>9</a:t>
             </a:r>
+            <a:endParaRPr sz="2300" b="1">
+              <a:solidFill>
+                <a:srgbClr val="12120F"/>
+              </a:solidFill>
+              <a:latin typeface="Segoe UI" panose="020B0502040204020203"/>
+            </a:endParaRPr>
           </a:p>
         </p:txBody>
       </p:sp>
@@ -9584,7 +10026,7 @@
           <a:noFill/>
         </p:spPr>
         <p:txBody>
-          <a:bodyPr wrap="square" lIns="0" rIns="0" tIns="0" bIns="0">
+          <a:bodyPr wrap="square" lIns="0" tIns="0" rIns="0" bIns="0">
             <a:spAutoFit/>
           </a:bodyPr>
           <a:lstStyle/>
@@ -9599,10 +10041,16 @@
                 <a:solidFill>
                   <a:srgbClr val="55544F"/>
                 </a:solidFill>
-                <a:latin typeface="Segoe UI"/>
+                <a:latin typeface="Segoe UI" panose="020B0502040204020203"/>
               </a:rPr>
               <a:t>priorité stable sur 2 000 pondérations</a:t>
             </a:r>
+            <a:endParaRPr sz="800" b="0">
+              <a:solidFill>
+                <a:srgbClr val="55544F"/>
+              </a:solidFill>
+              <a:latin typeface="Segoe UI" panose="020B0502040204020203"/>
+            </a:endParaRPr>
           </a:p>
         </p:txBody>
       </p:sp>
@@ -9615,7 +10063,7 @@
 </file>
 
 <file path=ppt/slides/slide3.xml><?xml version="1.0" encoding="utf-8"?>
-<p:sld xmlns:a="http://schemas.openxmlformats.org/drawingml/2006/main" xmlns:p="http://schemas.openxmlformats.org/presentationml/2006/main" xmlns:r="http://schemas.openxmlformats.org/officeDocument/2006/relationships">
+<p:sld xmlns:a="http://schemas.openxmlformats.org/drawingml/2006/main" xmlns:r="http://schemas.openxmlformats.org/officeDocument/2006/relationships" xmlns:p="http://schemas.openxmlformats.org/presentationml/2006/main">
   <p:cSld>
     <p:spTree>
       <p:nvGrpSpPr>
@@ -9817,7 +10265,7 @@
           <a:noFill/>
         </p:spPr>
         <p:txBody>
-          <a:bodyPr wrap="square" lIns="0" rIns="0" tIns="0" bIns="0">
+          <a:bodyPr wrap="square" lIns="0" tIns="0" rIns="0" bIns="0">
             <a:spAutoFit/>
           </a:bodyPr>
           <a:lstStyle/>
@@ -9832,10 +10280,16 @@
                 <a:solidFill>
                   <a:srgbClr val="8B8A84"/>
                 </a:solidFill>
-                <a:latin typeface="Consolas"/>
+                <a:latin typeface="Consolas" panose="020B0609020204030204"/>
               </a:rPr>
               <a:t>DONNÉES</a:t>
             </a:r>
+            <a:endParaRPr sz="900" b="1">
+              <a:solidFill>
+                <a:srgbClr val="8B8A84"/>
+              </a:solidFill>
+              <a:latin typeface="Consolas" panose="020B0609020204030204"/>
+            </a:endParaRPr>
           </a:p>
         </p:txBody>
       </p:sp>
@@ -9856,7 +10310,7 @@
           <a:noFill/>
         </p:spPr>
         <p:txBody>
-          <a:bodyPr wrap="square" lIns="0" rIns="0" tIns="0" bIns="0">
+          <a:bodyPr wrap="square" lIns="0" tIns="0" rIns="0" bIns="0">
             <a:spAutoFit/>
           </a:bodyPr>
           <a:lstStyle/>
@@ -9871,10 +10325,16 @@
                 <a:solidFill>
                   <a:srgbClr val="12120F"/>
                 </a:solidFill>
-                <a:latin typeface="Segoe UI"/>
+                <a:latin typeface="Segoe UI" panose="020B0502040204020203"/>
               </a:rPr>
               <a:t>Données utilisées et sources</a:t>
             </a:r>
+            <a:endParaRPr sz="2800" b="1">
+              <a:solidFill>
+                <a:srgbClr val="12120F"/>
+              </a:solidFill>
+              <a:latin typeface="Segoe UI" panose="020B0502040204020203"/>
+            </a:endParaRPr>
           </a:p>
         </p:txBody>
       </p:sp>
@@ -9983,7 +10443,7 @@
           <a:noFill/>
         </p:spPr>
         <p:txBody>
-          <a:bodyPr wrap="square" lIns="0" rIns="0" tIns="0" bIns="0">
+          <a:bodyPr wrap="square" lIns="0" tIns="0" rIns="0" bIns="0">
             <a:spAutoFit/>
           </a:bodyPr>
           <a:lstStyle/>
@@ -9998,10 +10458,16 @@
                 <a:solidFill>
                   <a:srgbClr val="0F4D3B"/>
                 </a:solidFill>
-                <a:latin typeface="Segoe UI"/>
+                <a:latin typeface="Segoe UI" panose="020B0502040204020203"/>
               </a:rPr>
               <a:t>Trois sources publiques, trois producteurs, trois millésimes à moins de deux ans d'écart — et une donnée essentielle qui manque.</a:t>
             </a:r>
+            <a:endParaRPr sz="1350" b="1">
+              <a:solidFill>
+                <a:srgbClr val="0F4D3B"/>
+              </a:solidFill>
+              <a:latin typeface="Segoe UI" panose="020B0502040204020203"/>
+            </a:endParaRPr>
           </a:p>
         </p:txBody>
       </p:sp>
@@ -10066,7 +10532,7 @@
           <a:noFill/>
         </p:spPr>
         <p:txBody>
-          <a:bodyPr wrap="square" lIns="0" rIns="0" tIns="0" bIns="0">
+          <a:bodyPr wrap="square" lIns="0" tIns="0" rIns="0" bIns="0">
             <a:spAutoFit/>
           </a:bodyPr>
           <a:lstStyle/>
@@ -10081,10 +10547,16 @@
                 <a:solidFill>
                   <a:srgbClr val="8B8A84"/>
                 </a:solidFill>
-                <a:latin typeface="Consolas"/>
+                <a:latin typeface="Consolas" panose="020B0609020204030204"/>
               </a:rPr>
               <a:t>République togolaise · Défi Économie numérique · Données ouvertes PRISE 2021-2022, RGPH-5 2022, COD-AB 2021</a:t>
             </a:r>
+            <a:endParaRPr sz="800" b="0">
+              <a:solidFill>
+                <a:srgbClr val="8B8A84"/>
+              </a:solidFill>
+              <a:latin typeface="Consolas" panose="020B0609020204030204"/>
+            </a:endParaRPr>
           </a:p>
         </p:txBody>
       </p:sp>
@@ -10105,7 +10577,7 @@
           <a:noFill/>
         </p:spPr>
         <p:txBody>
-          <a:bodyPr wrap="square" lIns="0" rIns="0" tIns="0" bIns="0">
+          <a:bodyPr wrap="square" lIns="0" tIns="0" rIns="0" bIns="0">
             <a:spAutoFit/>
           </a:bodyPr>
           <a:lstStyle/>
@@ -10120,10 +10592,16 @@
                 <a:solidFill>
                   <a:srgbClr val="8B8A84"/>
                 </a:solidFill>
-                <a:latin typeface="Consolas"/>
+                <a:latin typeface="Consolas" panose="020B0609020204030204"/>
               </a:rPr>
               <a:t>02 / 10</a:t>
             </a:r>
+            <a:endParaRPr sz="800" b="1">
+              <a:solidFill>
+                <a:srgbClr val="8B8A84"/>
+              </a:solidFill>
+              <a:latin typeface="Consolas" panose="020B0609020204030204"/>
+            </a:endParaRPr>
           </a:p>
         </p:txBody>
       </p:sp>
@@ -10162,10 +10640,16 @@
                           <a:solidFill>
                             <a:srgbClr val="FFFFFF"/>
                           </a:solidFill>
-                          <a:latin typeface="Segoe UI"/>
+                          <a:latin typeface="Segoe UI" panose="020B0502040204020203"/>
                         </a:rPr>
                         <a:t>Donnée</a:t>
                       </a:r>
+                      <a:endParaRPr sz="950" b="1">
+                        <a:solidFill>
+                          <a:srgbClr val="FFFFFF"/>
+                        </a:solidFill>
+                        <a:latin typeface="Segoe UI" panose="020B0502040204020203"/>
+                      </a:endParaRPr>
                     </a:p>
                   </a:txBody>
                   <a:tcPr anchor="ctr">
@@ -10184,10 +10668,16 @@
                           <a:solidFill>
                             <a:srgbClr val="FFFFFF"/>
                           </a:solidFill>
-                          <a:latin typeface="Segoe UI"/>
+                          <a:latin typeface="Segoe UI" panose="020B0502040204020203"/>
                         </a:rPr>
                         <a:t>Producteur</a:t>
                       </a:r>
+                      <a:endParaRPr sz="950" b="1">
+                        <a:solidFill>
+                          <a:srgbClr val="FFFFFF"/>
+                        </a:solidFill>
+                        <a:latin typeface="Segoe UI" panose="020B0502040204020203"/>
+                      </a:endParaRPr>
                     </a:p>
                   </a:txBody>
                   <a:tcPr anchor="ctr">
@@ -10206,10 +10696,16 @@
                           <a:solidFill>
                             <a:srgbClr val="FFFFFF"/>
                           </a:solidFill>
-                          <a:latin typeface="Segoe UI"/>
+                          <a:latin typeface="Segoe UI" panose="020B0502040204020203"/>
                         </a:rPr>
                         <a:t>Période</a:t>
                       </a:r>
+                      <a:endParaRPr sz="950" b="1">
+                        <a:solidFill>
+                          <a:srgbClr val="FFFFFF"/>
+                        </a:solidFill>
+                        <a:latin typeface="Segoe UI" panose="020B0502040204020203"/>
+                      </a:endParaRPr>
                     </a:p>
                   </a:txBody>
                   <a:tcPr anchor="ctr">
@@ -10228,10 +10724,16 @@
                           <a:solidFill>
                             <a:srgbClr val="FFFFFF"/>
                           </a:solidFill>
-                          <a:latin typeface="Segoe UI"/>
+                          <a:latin typeface="Segoe UI" panose="020B0502040204020203"/>
                         </a:rPr>
                         <a:t>Ce qu'elle apporte</a:t>
                       </a:r>
+                      <a:endParaRPr sz="950" b="1">
+                        <a:solidFill>
+                          <a:srgbClr val="FFFFFF"/>
+                        </a:solidFill>
+                        <a:latin typeface="Segoe UI" panose="020B0502040204020203"/>
+                      </a:endParaRPr>
                     </a:p>
                   </a:txBody>
                   <a:tcPr anchor="ctr">
@@ -10252,10 +10754,16 @@
                           <a:solidFill>
                             <a:srgbClr val="12120F"/>
                           </a:solidFill>
-                          <a:latin typeface="Segoe UI"/>
+                          <a:latin typeface="Segoe UI" panose="020B0502040204020203"/>
                         </a:rPr>
                         <a:t>Agences, agents Mobile Money, data centers</a:t>
                       </a:r>
+                      <a:endParaRPr sz="950" b="1">
+                        <a:solidFill>
+                          <a:srgbClr val="12120F"/>
+                        </a:solidFill>
+                        <a:latin typeface="Segoe UI" panose="020B0502040204020203"/>
+                      </a:endParaRPr>
                     </a:p>
                   </a:txBody>
                   <a:tcPr anchor="ctr">
@@ -10274,10 +10782,16 @@
                           <a:solidFill>
                             <a:srgbClr val="55544F"/>
                           </a:solidFill>
-                          <a:latin typeface="Segoe UI"/>
+                          <a:latin typeface="Segoe UI" panose="020B0502040204020203"/>
                         </a:rPr>
                         <a:t>Géoportail national du Togo</a:t>
                       </a:r>
+                      <a:endParaRPr sz="950" b="0">
+                        <a:solidFill>
+                          <a:srgbClr val="55544F"/>
+                        </a:solidFill>
+                        <a:latin typeface="Segoe UI" panose="020B0502040204020203"/>
+                      </a:endParaRPr>
                     </a:p>
                   </a:txBody>
                   <a:tcPr anchor="ctr">
@@ -10296,10 +10810,16 @@
                           <a:solidFill>
                             <a:srgbClr val="55544F"/>
                           </a:solidFill>
-                          <a:latin typeface="Segoe UI"/>
+                          <a:latin typeface="Segoe UI" panose="020B0502040204020203"/>
                         </a:rPr>
                         <a:t>Collecte 2021-2022</a:t>
                       </a:r>
+                      <a:endParaRPr sz="950" b="0">
+                        <a:solidFill>
+                          <a:srgbClr val="55544F"/>
+                        </a:solidFill>
+                        <a:latin typeface="Segoe UI" panose="020B0502040204020203"/>
+                      </a:endParaRPr>
                     </a:p>
                   </a:txBody>
                   <a:tcPr anchor="ctr">
@@ -10318,10 +10838,16 @@
                           <a:solidFill>
                             <a:srgbClr val="55544F"/>
                           </a:solidFill>
-                          <a:latin typeface="Segoe UI"/>
+                          <a:latin typeface="Segoe UI" panose="020B0502040204020203"/>
                         </a:rPr>
                         <a:t>Localisation de chaque équipement</a:t>
                       </a:r>
+                      <a:endParaRPr sz="950" b="0">
+                        <a:solidFill>
+                          <a:srgbClr val="55544F"/>
+                        </a:solidFill>
+                        <a:latin typeface="Segoe UI" panose="020B0502040204020203"/>
+                      </a:endParaRPr>
                     </a:p>
                   </a:txBody>
                   <a:tcPr anchor="ctr">
@@ -10342,10 +10868,16 @@
                           <a:solidFill>
                             <a:srgbClr val="12120F"/>
                           </a:solidFill>
-                          <a:latin typeface="Segoe UI"/>
+                          <a:latin typeface="Segoe UI" panose="020B0502040204020203"/>
                         </a:rPr>
                         <a:t>Population résidente</a:t>
                       </a:r>
+                      <a:endParaRPr sz="950" b="1">
+                        <a:solidFill>
+                          <a:srgbClr val="12120F"/>
+                        </a:solidFill>
+                        <a:latin typeface="Segoe UI" panose="020B0502040204020203"/>
+                      </a:endParaRPr>
                     </a:p>
                   </a:txBody>
                   <a:tcPr anchor="ctr">
@@ -10364,10 +10896,16 @@
                           <a:solidFill>
                             <a:srgbClr val="55544F"/>
                           </a:solidFill>
-                          <a:latin typeface="Segoe UI"/>
+                          <a:latin typeface="Segoe UI" panose="020B0502040204020203"/>
                         </a:rPr>
                         <a:t>INSEED — 5ᵉ recensement (RGPH-5)</a:t>
                       </a:r>
+                      <a:endParaRPr sz="950" b="0">
+                        <a:solidFill>
+                          <a:srgbClr val="55544F"/>
+                        </a:solidFill>
+                        <a:latin typeface="Segoe UI" panose="020B0502040204020203"/>
+                      </a:endParaRPr>
                     </a:p>
                   </a:txBody>
                   <a:tcPr anchor="ctr">
@@ -10386,10 +10924,16 @@
                           <a:solidFill>
                             <a:srgbClr val="55544F"/>
                           </a:solidFill>
-                          <a:latin typeface="Segoe UI"/>
+                          <a:latin typeface="Segoe UI" panose="020B0502040204020203"/>
                         </a:rPr>
                         <a:t>23 oct. – 16 nov. 2022</a:t>
                       </a:r>
+                      <a:endParaRPr sz="950" b="0">
+                        <a:solidFill>
+                          <a:srgbClr val="55544F"/>
+                        </a:solidFill>
+                        <a:latin typeface="Segoe UI" panose="020B0502040204020203"/>
+                      </a:endParaRPr>
                     </a:p>
                   </a:txBody>
                   <a:tcPr anchor="ctr">
@@ -10408,10 +10952,16 @@
                           <a:solidFill>
                             <a:srgbClr val="55544F"/>
                           </a:solidFill>
-                          <a:latin typeface="Segoe UI"/>
+                          <a:latin typeface="Segoe UI" panose="020B0502040204020203"/>
                         </a:rPr>
                         <a:t>Le dénominateur de tous les ratios</a:t>
                       </a:r>
+                      <a:endParaRPr sz="950" b="0">
+                        <a:solidFill>
+                          <a:srgbClr val="55544F"/>
+                        </a:solidFill>
+                        <a:latin typeface="Segoe UI" panose="020B0502040204020203"/>
+                      </a:endParaRPr>
                     </a:p>
                   </a:txBody>
                   <a:tcPr anchor="ctr">
@@ -10432,10 +10982,16 @@
                           <a:solidFill>
                             <a:srgbClr val="12120F"/>
                           </a:solidFill>
-                          <a:latin typeface="Segoe UI"/>
+                          <a:latin typeface="Segoe UI" panose="020B0502040204020203"/>
                         </a:rPr>
                         <a:t>Limites administratives et superficies</a:t>
                       </a:r>
+                      <a:endParaRPr sz="950" b="1">
+                        <a:solidFill>
+                          <a:srgbClr val="12120F"/>
+                        </a:solidFill>
+                        <a:latin typeface="Segoe UI" panose="020B0502040204020203"/>
+                      </a:endParaRPr>
                     </a:p>
                   </a:txBody>
                   <a:tcPr anchor="ctr">
@@ -10454,10 +11010,16 @@
                           <a:solidFill>
                             <a:srgbClr val="55544F"/>
                           </a:solidFill>
-                          <a:latin typeface="Segoe UI"/>
+                          <a:latin typeface="Segoe UI" panose="020B0502040204020203"/>
                         </a:rPr>
                         <a:t>Common Operational Datasets (OCHA)</a:t>
                       </a:r>
+                      <a:endParaRPr sz="950" b="0">
+                        <a:solidFill>
+                          <a:srgbClr val="55544F"/>
+                        </a:solidFill>
+                        <a:latin typeface="Segoe UI" panose="020B0502040204020203"/>
+                      </a:endParaRPr>
                     </a:p>
                   </a:txBody>
                   <a:tcPr anchor="ctr">
@@ -10476,10 +11038,16 @@
                           <a:solidFill>
                             <a:srgbClr val="55544F"/>
                           </a:solidFill>
-                          <a:latin typeface="Segoe UI"/>
+                          <a:latin typeface="Segoe UI" panose="020B0502040204020203"/>
                         </a:rPr>
                         <a:t>Valides au 07/01/2021</a:t>
                       </a:r>
+                      <a:endParaRPr sz="950" b="0">
+                        <a:solidFill>
+                          <a:srgbClr val="55544F"/>
+                        </a:solidFill>
+                        <a:latin typeface="Segoe UI" panose="020B0502040204020203"/>
+                      </a:endParaRPr>
                     </a:p>
                   </a:txBody>
                   <a:tcPr anchor="ctr">
@@ -10498,10 +11066,16 @@
                           <a:solidFill>
                             <a:srgbClr val="55544F"/>
                           </a:solidFill>
-                          <a:latin typeface="Segoe UI"/>
+                          <a:latin typeface="Segoe UI" panose="020B0502040204020203"/>
                         </a:rPr>
                         <a:t>Contours, densités, distances</a:t>
                       </a:r>
+                      <a:endParaRPr sz="950" b="0">
+                        <a:solidFill>
+                          <a:srgbClr val="55544F"/>
+                        </a:solidFill>
+                        <a:latin typeface="Segoe UI" panose="020B0502040204020203"/>
+                      </a:endParaRPr>
                     </a:p>
                   </a:txBody>
                   <a:tcPr anchor="ctr">
@@ -10576,7 +11150,7 @@
           <a:noFill/>
         </p:spPr>
         <p:txBody>
-          <a:bodyPr wrap="square" lIns="0" rIns="0" tIns="0" bIns="0">
+          <a:bodyPr wrap="square" lIns="0" tIns="0" rIns="0" bIns="0">
             <a:spAutoFit/>
           </a:bodyPr>
           <a:lstStyle/>
@@ -10591,10 +11165,16 @@
                 <a:solidFill>
                   <a:srgbClr val="12120F"/>
                 </a:solidFill>
-                <a:latin typeface="Segoe UI"/>
+                <a:latin typeface="Segoe UI" panose="020B0502040204020203"/>
               </a:rPr>
               <a:t>30 fichiers, 5 formats — un seul fait autorité</a:t>
             </a:r>
+            <a:endParaRPr sz="1100" b="1">
+              <a:solidFill>
+                <a:srgbClr val="12120F"/>
+              </a:solidFill>
+              <a:latin typeface="Segoe UI" panose="020B0502040204020203"/>
+            </a:endParaRPr>
           </a:p>
         </p:txBody>
       </p:sp>
@@ -10615,7 +11195,7 @@
           <a:noFill/>
         </p:spPr>
         <p:txBody>
-          <a:bodyPr wrap="square" lIns="0" rIns="0" tIns="0" bIns="0">
+          <a:bodyPr wrap="square" lIns="0" tIns="0" rIns="0" bIns="0">
             <a:spAutoFit/>
           </a:bodyPr>
           <a:lstStyle/>
@@ -10630,10 +11210,16 @@
                 <a:solidFill>
                   <a:srgbClr val="55544F"/>
                 </a:solidFill>
-                <a:latin typeface="Segoe UI"/>
+                <a:latin typeface="Segoe UI" panose="020B0502040204020203"/>
               </a:rPr>
               <a:t>Les données d'infrastructure sont livrées en CSV, XLSX, KML, GeoJSON et shapefile. Le CSV est le seul à cumuler noms de variables complets et précision maximale des coordonnées.</a:t>
             </a:r>
+            <a:endParaRPr sz="950" b="0">
+              <a:solidFill>
+                <a:srgbClr val="55544F"/>
+              </a:solidFill>
+              <a:latin typeface="Segoe UI" panose="020B0502040204020203"/>
+            </a:endParaRPr>
           </a:p>
         </p:txBody>
       </p:sp>
@@ -10698,7 +11284,7 @@
           <a:noFill/>
         </p:spPr>
         <p:txBody>
-          <a:bodyPr wrap="square" lIns="0" rIns="0" tIns="0" bIns="0">
+          <a:bodyPr wrap="square" lIns="0" tIns="0" rIns="0" bIns="0">
             <a:spAutoFit/>
           </a:bodyPr>
           <a:lstStyle/>
@@ -10713,10 +11299,16 @@
                 <a:solidFill>
                   <a:srgbClr val="12120F"/>
                 </a:solidFill>
-                <a:latin typeface="Segoe UI"/>
+                <a:latin typeface="Segoe UI" panose="020B0502040204020203"/>
               </a:rPr>
               <a:t>La population a dû être extraite d'un PDF de 94 pages</a:t>
             </a:r>
+            <a:endParaRPr sz="1100" b="1">
+              <a:solidFill>
+                <a:srgbClr val="12120F"/>
+              </a:solidFill>
+              <a:latin typeface="Segoe UI" panose="020B0502040204020203"/>
+            </a:endParaRPr>
           </a:p>
         </p:txBody>
       </p:sp>
@@ -10737,7 +11329,7 @@
           <a:noFill/>
         </p:spPr>
         <p:txBody>
-          <a:bodyPr wrap="square" lIns="0" rIns="0" tIns="0" bIns="0">
+          <a:bodyPr wrap="square" lIns="0" tIns="0" rIns="0" bIns="0">
             <a:spAutoFit/>
           </a:bodyPr>
           <a:lstStyle/>
@@ -10752,10 +11344,16 @@
                 <a:solidFill>
                   <a:srgbClr val="55544F"/>
                 </a:solidFill>
-                <a:latin typeface="Segoe UI"/>
+                <a:latin typeface="Segoe UI" panose="020B0502040204020203"/>
               </a:rPr>
               <a:t>Le livret RGPH-5 n'existe pas en format tabulaire. L'extraction est automatisée et validée par les sommes hiérarchiques.</a:t>
             </a:r>
+            <a:endParaRPr sz="950" b="0">
+              <a:solidFill>
+                <a:srgbClr val="55544F"/>
+              </a:solidFill>
+              <a:latin typeface="Segoe UI" panose="020B0502040204020203"/>
+            </a:endParaRPr>
           </a:p>
         </p:txBody>
       </p:sp>
@@ -10866,7 +11464,7 @@
           <a:noFill/>
         </p:spPr>
         <p:txBody>
-          <a:bodyPr wrap="square" lIns="0" rIns="0" tIns="0" bIns="0">
+          <a:bodyPr wrap="square" lIns="0" tIns="0" rIns="0" bIns="0">
             <a:spAutoFit/>
           </a:bodyPr>
           <a:lstStyle/>
@@ -10881,10 +11479,16 @@
                 <a:solidFill>
                   <a:srgbClr val="8B8A84"/>
                 </a:solidFill>
-                <a:latin typeface="Consolas"/>
+                <a:latin typeface="Consolas" panose="020B0609020204030204"/>
               </a:rPr>
               <a:t>LA DONNÉE QUI MANQUE</a:t>
             </a:r>
+            <a:endParaRPr sz="800" b="1">
+              <a:solidFill>
+                <a:srgbClr val="8B8A84"/>
+              </a:solidFill>
+              <a:latin typeface="Consolas" panose="020B0609020204030204"/>
+            </a:endParaRPr>
           </a:p>
         </p:txBody>
       </p:sp>
@@ -10905,7 +11509,7 @@
           <a:noFill/>
         </p:spPr>
         <p:txBody>
-          <a:bodyPr wrap="square" lIns="0" rIns="0" tIns="0" bIns="0">
+          <a:bodyPr wrap="square" lIns="0" tIns="0" rIns="0" bIns="0">
             <a:spAutoFit/>
           </a:bodyPr>
           <a:lstStyle/>
@@ -10920,10 +11524,16 @@
                 <a:solidFill>
                   <a:srgbClr val="55544F"/>
                 </a:solidFill>
-                <a:latin typeface="Segoe UI"/>
+                <a:latin typeface="Segoe UI" panose="020B0502040204020203"/>
               </a:rPr>
               <a:t>Aucune mesure de couverture réseau mobile n'existe dans les sources ouvertes mobilisées, et les couches d'antennes du catalogue national ne sont pas publiques.</a:t>
             </a:r>
+            <a:endParaRPr sz="1050" b="0">
+              <a:solidFill>
+                <a:srgbClr val="55544F"/>
+              </a:solidFill>
+              <a:latin typeface="Segoe UI" panose="020B0502040204020203"/>
+            </a:endParaRPr>
           </a:p>
           <a:p>
             <a:pPr algn="l">
@@ -10931,15 +11541,6 @@
                 <a:spcPct val="135000"/>
               </a:lnSpc>
             </a:pPr>
-            <a:r>
-              <a:rPr sz="1050" b="0">
-                <a:solidFill>
-                  <a:srgbClr val="55544F"/>
-                </a:solidFill>
-                <a:latin typeface="Segoe UI"/>
-              </a:rPr>
-              <a:t/>
-            </a:r>
           </a:p>
           <a:p>
             <a:pPr algn="l">
@@ -10952,10 +11553,16 @@
                 <a:solidFill>
                   <a:srgbClr val="55544F"/>
                 </a:solidFill>
-                <a:latin typeface="Segoe UI"/>
+                <a:latin typeface="Segoe UI" panose="020B0502040204020203"/>
               </a:rPr>
               <a:t>L'objectif « identifier les zones blanches » n'est donc pas traité comme tel. Ce travail mesure un déficit d'accès aux services — pas une absence de réseau. La distinction est maintenue partout.</a:t>
             </a:r>
+            <a:endParaRPr sz="1050" b="0">
+              <a:solidFill>
+                <a:srgbClr val="55544F"/>
+              </a:solidFill>
+              <a:latin typeface="Segoe UI" panose="020B0502040204020203"/>
+            </a:endParaRPr>
           </a:p>
         </p:txBody>
       </p:sp>
@@ -10968,7 +11575,7 @@
 </file>
 
 <file path=ppt/slides/slide4.xml><?xml version="1.0" encoding="utf-8"?>
-<p:sld xmlns:a="http://schemas.openxmlformats.org/drawingml/2006/main" xmlns:p="http://schemas.openxmlformats.org/presentationml/2006/main" xmlns:r="http://schemas.openxmlformats.org/officeDocument/2006/relationships">
+<p:sld xmlns:a="http://schemas.openxmlformats.org/drawingml/2006/main" xmlns:r="http://schemas.openxmlformats.org/officeDocument/2006/relationships" xmlns:p="http://schemas.openxmlformats.org/presentationml/2006/main">
   <p:cSld>
     <p:spTree>
       <p:nvGrpSpPr>
@@ -11170,7 +11777,7 @@
           <a:noFill/>
         </p:spPr>
         <p:txBody>
-          <a:bodyPr wrap="square" lIns="0" rIns="0" tIns="0" bIns="0">
+          <a:bodyPr wrap="square" lIns="0" tIns="0" rIns="0" bIns="0">
             <a:spAutoFit/>
           </a:bodyPr>
           <a:lstStyle/>
@@ -11185,10 +11792,16 @@
                 <a:solidFill>
                   <a:srgbClr val="8B8A84"/>
                 </a:solidFill>
-                <a:latin typeface="Consolas"/>
+                <a:latin typeface="Consolas" panose="020B0609020204030204"/>
               </a:rPr>
               <a:t>PRÉPARATION</a:t>
             </a:r>
+            <a:endParaRPr sz="900" b="1">
+              <a:solidFill>
+                <a:srgbClr val="8B8A84"/>
+              </a:solidFill>
+              <a:latin typeface="Consolas" panose="020B0609020204030204"/>
+            </a:endParaRPr>
           </a:p>
         </p:txBody>
       </p:sp>
@@ -11209,7 +11822,7 @@
           <a:noFill/>
         </p:spPr>
         <p:txBody>
-          <a:bodyPr wrap="square" lIns="0" rIns="0" tIns="0" bIns="0">
+          <a:bodyPr wrap="square" lIns="0" tIns="0" rIns="0" bIns="0">
             <a:spAutoFit/>
           </a:bodyPr>
           <a:lstStyle/>
@@ -11224,10 +11837,16 @@
                 <a:solidFill>
                   <a:srgbClr val="12120F"/>
                 </a:solidFill>
-                <a:latin typeface="Segoe UI"/>
+                <a:latin typeface="Segoe UI" panose="020B0502040204020203"/>
               </a:rPr>
               <a:t>Qualité et préparation des données</a:t>
             </a:r>
+            <a:endParaRPr sz="2800" b="1">
+              <a:solidFill>
+                <a:srgbClr val="12120F"/>
+              </a:solidFill>
+              <a:latin typeface="Segoe UI" panose="020B0502040204020203"/>
+            </a:endParaRPr>
           </a:p>
         </p:txBody>
       </p:sp>
@@ -11336,7 +11955,7 @@
           <a:noFill/>
         </p:spPr>
         <p:txBody>
-          <a:bodyPr wrap="square" lIns="0" rIns="0" tIns="0" bIns="0">
+          <a:bodyPr wrap="square" lIns="0" tIns="0" rIns="0" bIns="0">
             <a:spAutoFit/>
           </a:bodyPr>
           <a:lstStyle/>
@@ -11351,10 +11970,16 @@
                 <a:solidFill>
                   <a:srgbClr val="0F4D3B"/>
                 </a:solidFill>
-                <a:latin typeface="Segoe UI"/>
+                <a:latin typeface="Segoe UI" panose="020B0502040204020203"/>
               </a:rPr>
               <a:t>Deux constats des données corrigent l'énoncé du défi : il y a 2 opérateurs et non 4, et 90 agences et non 141.</a:t>
             </a:r>
+            <a:endParaRPr sz="1350" b="1">
+              <a:solidFill>
+                <a:srgbClr val="0F4D3B"/>
+              </a:solidFill>
+              <a:latin typeface="Segoe UI" panose="020B0502040204020203"/>
+            </a:endParaRPr>
           </a:p>
         </p:txBody>
       </p:sp>
@@ -11419,7 +12044,7 @@
           <a:noFill/>
         </p:spPr>
         <p:txBody>
-          <a:bodyPr wrap="square" lIns="0" rIns="0" tIns="0" bIns="0">
+          <a:bodyPr wrap="square" lIns="0" tIns="0" rIns="0" bIns="0">
             <a:spAutoFit/>
           </a:bodyPr>
           <a:lstStyle/>
@@ -11434,10 +12059,16 @@
                 <a:solidFill>
                   <a:srgbClr val="8B8A84"/>
                 </a:solidFill>
-                <a:latin typeface="Consolas"/>
+                <a:latin typeface="Consolas" panose="020B0609020204030204"/>
               </a:rPr>
               <a:t>République togolaise · Défi Économie numérique · Données ouvertes PRISE 2021-2022, RGPH-5 2022, COD-AB 2021</a:t>
             </a:r>
+            <a:endParaRPr sz="800" b="0">
+              <a:solidFill>
+                <a:srgbClr val="8B8A84"/>
+              </a:solidFill>
+              <a:latin typeface="Consolas" panose="020B0609020204030204"/>
+            </a:endParaRPr>
           </a:p>
         </p:txBody>
       </p:sp>
@@ -11458,7 +12089,7 @@
           <a:noFill/>
         </p:spPr>
         <p:txBody>
-          <a:bodyPr wrap="square" lIns="0" rIns="0" tIns="0" bIns="0">
+          <a:bodyPr wrap="square" lIns="0" tIns="0" rIns="0" bIns="0">
             <a:spAutoFit/>
           </a:bodyPr>
           <a:lstStyle/>
@@ -11473,10 +12104,16 @@
                 <a:solidFill>
                   <a:srgbClr val="8B8A84"/>
                 </a:solidFill>
-                <a:latin typeface="Consolas"/>
+                <a:latin typeface="Consolas" panose="020B0609020204030204"/>
               </a:rPr>
               <a:t>03 / 10</a:t>
             </a:r>
+            <a:endParaRPr sz="800" b="1">
+              <a:solidFill>
+                <a:srgbClr val="8B8A84"/>
+              </a:solidFill>
+              <a:latin typeface="Consolas" panose="020B0609020204030204"/>
+            </a:endParaRPr>
           </a:p>
         </p:txBody>
       </p:sp>
@@ -11541,7 +12178,7 @@
           <a:noFill/>
         </p:spPr>
         <p:txBody>
-          <a:bodyPr wrap="square" lIns="0" rIns="0" tIns="0" bIns="0">
+          <a:bodyPr wrap="square" lIns="0" tIns="0" rIns="0" bIns="0">
             <a:spAutoFit/>
           </a:bodyPr>
           <a:lstStyle/>
@@ -11556,10 +12193,16 @@
                 <a:solidFill>
                   <a:srgbClr val="12120F"/>
                 </a:solidFill>
-                <a:latin typeface="Segoe UI"/>
+                <a:latin typeface="Segoe UI" panose="020B0502040204020203"/>
               </a:rPr>
               <a:t>« Agences – Télécom » n'est pas un quatrième opérateur</a:t>
             </a:r>
+            <a:endParaRPr sz="1100" b="1">
+              <a:solidFill>
+                <a:srgbClr val="12120F"/>
+              </a:solidFill>
+              <a:latin typeface="Segoe UI" panose="020B0502040204020203"/>
+            </a:endParaRPr>
           </a:p>
         </p:txBody>
       </p:sp>
@@ -11580,7 +12223,7 @@
           <a:noFill/>
         </p:spPr>
         <p:txBody>
-          <a:bodyPr wrap="square" lIns="0" rIns="0" tIns="0" bIns="0">
+          <a:bodyPr wrap="square" lIns="0" tIns="0" rIns="0" bIns="0">
             <a:spAutoFit/>
           </a:bodyPr>
           <a:lstStyle/>
@@ -11595,10 +12238,16 @@
                 <a:solidFill>
                   <a:srgbClr val="55544F"/>
                 </a:solidFill>
-                <a:latin typeface="Segoe UI"/>
+                <a:latin typeface="Segoe UI" panose="020B0502040204020203"/>
               </a:rPr>
               <a:t>Ses 51 lignes sont déjà contenues dans Moov ∪ Togocom, sans un seul enregistrement propre. Empiler les quatre fichiers afficherait 141 agences au lieu de 90 — une surestimation de 57 % dès le premier indicateur.</a:t>
             </a:r>
+            <a:endParaRPr sz="950" b="0">
+              <a:solidFill>
+                <a:srgbClr val="55544F"/>
+              </a:solidFill>
+              <a:latin typeface="Segoe UI" panose="020B0502040204020203"/>
+            </a:endParaRPr>
           </a:p>
         </p:txBody>
       </p:sp>
@@ -11663,7 +12312,7 @@
           <a:noFill/>
         </p:spPr>
         <p:txBody>
-          <a:bodyPr wrap="square" lIns="0" rIns="0" tIns="0" bIns="0">
+          <a:bodyPr wrap="square" lIns="0" tIns="0" rIns="0" bIns="0">
             <a:spAutoFit/>
           </a:bodyPr>
           <a:lstStyle/>
@@ -11678,10 +12327,16 @@
                 <a:solidFill>
                   <a:srgbClr val="12120F"/>
                 </a:solidFill>
-                <a:latin typeface="Segoe UI"/>
+                <a:latin typeface="Segoe UI" panose="020B0502040204020203"/>
               </a:rPr>
               <a:t>« Agences – CANAL+ » est vide à la source</a:t>
             </a:r>
+            <a:endParaRPr sz="1100" b="1">
+              <a:solidFill>
+                <a:srgbClr val="12120F"/>
+              </a:solidFill>
+              <a:latin typeface="Segoe UI" panose="020B0502040204020203"/>
+            </a:endParaRPr>
           </a:p>
         </p:txBody>
       </p:sp>
@@ -11702,7 +12357,7 @@
           <a:noFill/>
         </p:spPr>
         <p:txBody>
-          <a:bodyPr wrap="square" lIns="0" rIns="0" tIns="0" bIns="0">
+          <a:bodyPr wrap="square" lIns="0" tIns="0" rIns="0" bIns="0">
             <a:spAutoFit/>
           </a:bodyPr>
           <a:lstStyle/>
@@ -11717,10 +12372,16 @@
                 <a:solidFill>
                   <a:srgbClr val="55544F"/>
                 </a:solidFill>
-                <a:latin typeface="Segoe UI"/>
+                <a:latin typeface="Segoe UI" panose="020B0502040204020203"/>
               </a:rPr>
               <a:t>Le serveur joint lui-même la mention « the query result is empty ». C'est une donnée non disponible, et non une absence d'agences sur le terrain.</a:t>
             </a:r>
+            <a:endParaRPr sz="950" b="0">
+              <a:solidFill>
+                <a:srgbClr val="55544F"/>
+              </a:solidFill>
+              <a:latin typeface="Segoe UI" panose="020B0502040204020203"/>
+            </a:endParaRPr>
           </a:p>
         </p:txBody>
       </p:sp>
@@ -11785,7 +12446,7 @@
           <a:noFill/>
         </p:spPr>
         <p:txBody>
-          <a:bodyPr wrap="square" lIns="0" rIns="0" tIns="0" bIns="0">
+          <a:bodyPr wrap="square" lIns="0" tIns="0" rIns="0" bIns="0">
             <a:spAutoFit/>
           </a:bodyPr>
           <a:lstStyle/>
@@ -11800,10 +12461,16 @@
                 <a:solidFill>
                   <a:srgbClr val="12120F"/>
                 </a:solidFill>
-                <a:latin typeface="Segoe UI"/>
+                <a:latin typeface="Segoe UI" panose="020B0502040204020203"/>
               </a:rPr>
               <a:t>L'identifiant fourni est volatile</a:t>
             </a:r>
+            <a:endParaRPr sz="1100" b="1">
+              <a:solidFill>
+                <a:srgbClr val="12120F"/>
+              </a:solidFill>
+              <a:latin typeface="Segoe UI" panose="020B0502040204020203"/>
+            </a:endParaRPr>
           </a:p>
         </p:txBody>
       </p:sp>
@@ -11824,7 +12491,7 @@
           <a:noFill/>
         </p:spPr>
         <p:txBody>
-          <a:bodyPr wrap="square" lIns="0" rIns="0" tIns="0" bIns="0">
+          <a:bodyPr wrap="square" lIns="0" tIns="0" rIns="0" bIns="0">
             <a:spAutoFit/>
           </a:bodyPr>
           <a:lstStyle/>
@@ -11839,10 +12506,16 @@
                 <a:solidFill>
                   <a:srgbClr val="55544F"/>
                 </a:solidFill>
-                <a:latin typeface="Segoe UI"/>
+                <a:latin typeface="Segoe UI" panose="020B0502040204020203"/>
               </a:rPr>
               <a:t>La même agence porte un identifiant différent dans deux fichiers exportés à trois secondes d'intervalle. La déduplication repose donc sur le nom et les coordonnées, jamais sur cet identifiant.</a:t>
             </a:r>
+            <a:endParaRPr sz="950" b="0">
+              <a:solidFill>
+                <a:srgbClr val="55544F"/>
+              </a:solidFill>
+              <a:latin typeface="Segoe UI" panose="020B0502040204020203"/>
+            </a:endParaRPr>
           </a:p>
         </p:txBody>
       </p:sp>
@@ -11953,7 +12626,7 @@
           <a:noFill/>
         </p:spPr>
         <p:txBody>
-          <a:bodyPr wrap="square" lIns="0" rIns="0" tIns="0" bIns="0">
+          <a:bodyPr wrap="square" lIns="0" tIns="0" rIns="0" bIns="0">
             <a:spAutoFit/>
           </a:bodyPr>
           <a:lstStyle/>
@@ -11968,10 +12641,16 @@
                 <a:solidFill>
                   <a:srgbClr val="8B8A84"/>
                 </a:solidFill>
-                <a:latin typeface="Consolas"/>
+                <a:latin typeface="Consolas" panose="020B0609020204030204"/>
               </a:rPr>
               <a:t>23 CONTRÔLES ARITHMÉTIQUES, REJOUÉS À CHAQUE EXÉCUTION</a:t>
             </a:r>
+            <a:endParaRPr sz="800" b="1">
+              <a:solidFill>
+                <a:srgbClr val="8B8A84"/>
+              </a:solidFill>
+              <a:latin typeface="Consolas" panose="020B0609020204030204"/>
+            </a:endParaRPr>
           </a:p>
         </p:txBody>
       </p:sp>
@@ -11992,7 +12671,7 @@
           <a:noFill/>
         </p:spPr>
         <p:txBody>
-          <a:bodyPr wrap="square" lIns="0" rIns="0" tIns="0" bIns="0">
+          <a:bodyPr wrap="square" lIns="0" tIns="0" rIns="0" bIns="0">
             <a:spAutoFit/>
           </a:bodyPr>
           <a:lstStyle/>
@@ -12007,10 +12686,16 @@
                 <a:solidFill>
                   <a:srgbClr val="55544F"/>
                 </a:solidFill>
-                <a:latin typeface="Segoe UI"/>
+                <a:latin typeface="Segoe UI" panose="020B0502040204020203"/>
               </a:rPr>
               <a:t>La population extraite du PDF somme exactement à 8 095 498 habitants aux trois niveaux — 5 régions, 39 préfectures, 117 communes — sans écart d'une unité.</a:t>
             </a:r>
+            <a:endParaRPr sz="1050" b="0">
+              <a:solidFill>
+                <a:srgbClr val="55544F"/>
+              </a:solidFill>
+              <a:latin typeface="Segoe UI" panose="020B0502040204020203"/>
+            </a:endParaRPr>
           </a:p>
           <a:p>
             <a:pPr algn="l">
@@ -12018,15 +12703,6 @@
                 <a:spcPct val="132000"/>
               </a:lnSpc>
             </a:pPr>
-            <a:r>
-              <a:rPr sz="1050" b="0">
-                <a:solidFill>
-                  <a:srgbClr val="55544F"/>
-                </a:solidFill>
-                <a:latin typeface="Segoe UI"/>
-              </a:rPr>
-              <a:t/>
-            </a:r>
           </a:p>
           <a:p>
             <a:pPr algn="l">
@@ -12039,10 +12715,16 @@
                 <a:solidFill>
                   <a:srgbClr val="55544F"/>
                 </a:solidFill>
-                <a:latin typeface="Segoe UI"/>
+                <a:latin typeface="Segoe UI" panose="020B0502040204020203"/>
               </a:rPr>
               <a:t>Ces contrôles ont réellement servi. Deux échecs ont évité des erreurs graves :</a:t>
             </a:r>
+            <a:endParaRPr sz="1050" b="0">
+              <a:solidFill>
+                <a:srgbClr val="55544F"/>
+              </a:solidFill>
+              <a:latin typeface="Segoe UI" panose="020B0502040204020203"/>
+            </a:endParaRPr>
           </a:p>
           <a:p>
             <a:pPr algn="l">
@@ -12050,15 +12732,6 @@
                 <a:spcPct val="132000"/>
               </a:lnSpc>
             </a:pPr>
-            <a:r>
-              <a:rPr sz="1050" b="0">
-                <a:solidFill>
-                  <a:srgbClr val="55544F"/>
-                </a:solidFill>
-                <a:latin typeface="Segoe UI"/>
-              </a:rPr>
-              <a:t/>
-            </a:r>
           </a:p>
           <a:p>
             <a:pPr algn="l">
@@ -12071,10 +12744,16 @@
                 <a:solidFill>
                   <a:srgbClr val="55544F"/>
                 </a:solidFill>
-                <a:latin typeface="Segoe UI"/>
+                <a:latin typeface="Segoe UI" panose="020B0502040204020203"/>
               </a:rPr>
               <a:t>① Une jointure sur des noms accentués faisait tomber neuf préfectures à zéro point Mobile Money — dont Agoè-Nyivé et ses 882 695 habitants.</a:t>
             </a:r>
+            <a:endParaRPr sz="1050" b="0">
+              <a:solidFill>
+                <a:srgbClr val="55544F"/>
+              </a:solidFill>
+              <a:latin typeface="Segoe UI" panose="020B0502040204020203"/>
+            </a:endParaRPr>
           </a:p>
           <a:p>
             <a:pPr algn="l">
@@ -12082,15 +12761,6 @@
                 <a:spcPct val="132000"/>
               </a:lnSpc>
             </a:pPr>
-            <a:r>
-              <a:rPr sz="1050" b="0">
-                <a:solidFill>
-                  <a:srgbClr val="55544F"/>
-                </a:solidFill>
-                <a:latin typeface="Segoe UI"/>
-              </a:rPr>
-              <a:t/>
-            </a:r>
           </a:p>
           <a:p>
             <a:pPr algn="l">
@@ -12103,10 +12773,16 @@
                 <a:solidFill>
                   <a:srgbClr val="55544F"/>
                 </a:solidFill>
-                <a:latin typeface="Segoe UI"/>
+                <a:latin typeface="Segoe UI" panose="020B0502040204020203"/>
               </a:rPr>
               <a:t>② Une somme régionale à 11 630 489 habitants a révélé un double comptage du Grand Lomé.</a:t>
             </a:r>
+            <a:endParaRPr sz="1050" b="0">
+              <a:solidFill>
+                <a:srgbClr val="55544F"/>
+              </a:solidFill>
+              <a:latin typeface="Segoe UI" panose="020B0502040204020203"/>
+            </a:endParaRPr>
           </a:p>
         </p:txBody>
       </p:sp>
@@ -12119,7 +12795,7 @@
 </file>
 
 <file path=ppt/slides/slide5.xml><?xml version="1.0" encoding="utf-8"?>
-<p:sld xmlns:a="http://schemas.openxmlformats.org/drawingml/2006/main" xmlns:p="http://schemas.openxmlformats.org/presentationml/2006/main" xmlns:r="http://schemas.openxmlformats.org/officeDocument/2006/relationships">
+<p:sld xmlns:a="http://schemas.openxmlformats.org/drawingml/2006/main" xmlns:r="http://schemas.openxmlformats.org/officeDocument/2006/relationships" xmlns:p="http://schemas.openxmlformats.org/presentationml/2006/main">
   <p:cSld>
     <p:spTree>
       <p:nvGrpSpPr>
@@ -12321,7 +12997,7 @@
           <a:noFill/>
         </p:spPr>
         <p:txBody>
-          <a:bodyPr wrap="square" lIns="0" rIns="0" tIns="0" bIns="0">
+          <a:bodyPr wrap="square" lIns="0" tIns="0" rIns="0" bIns="0">
             <a:spAutoFit/>
           </a:bodyPr>
           <a:lstStyle/>
@@ -12336,10 +13012,16 @@
                 <a:solidFill>
                   <a:srgbClr val="8B8A84"/>
                 </a:solidFill>
-                <a:latin typeface="Consolas"/>
+                <a:latin typeface="Consolas" panose="020B0609020204030204"/>
               </a:rPr>
               <a:t>MÉTHODE</a:t>
             </a:r>
+            <a:endParaRPr sz="900" b="1">
+              <a:solidFill>
+                <a:srgbClr val="8B8A84"/>
+              </a:solidFill>
+              <a:latin typeface="Consolas" panose="020B0609020204030204"/>
+            </a:endParaRPr>
           </a:p>
         </p:txBody>
       </p:sp>
@@ -12360,7 +13042,7 @@
           <a:noFill/>
         </p:spPr>
         <p:txBody>
-          <a:bodyPr wrap="square" lIns="0" rIns="0" tIns="0" bIns="0">
+          <a:bodyPr wrap="square" lIns="0" tIns="0" rIns="0" bIns="0">
             <a:spAutoFit/>
           </a:bodyPr>
           <a:lstStyle/>
@@ -12375,10 +13057,16 @@
                 <a:solidFill>
                   <a:srgbClr val="12120F"/>
                 </a:solidFill>
-                <a:latin typeface="Segoe UI"/>
+                <a:latin typeface="Segoe UI" panose="020B0502040204020203"/>
               </a:rPr>
               <a:t>Méthodologie</a:t>
             </a:r>
+            <a:endParaRPr sz="2800" b="1">
+              <a:solidFill>
+                <a:srgbClr val="12120F"/>
+              </a:solidFill>
+              <a:latin typeface="Segoe UI" panose="020B0502040204020203"/>
+            </a:endParaRPr>
           </a:p>
         </p:txBody>
       </p:sp>
@@ -12487,7 +13175,7 @@
           <a:noFill/>
         </p:spPr>
         <p:txBody>
-          <a:bodyPr wrap="square" lIns="0" rIns="0" tIns="0" bIns="0">
+          <a:bodyPr wrap="square" lIns="0" tIns="0" rIns="0" bIns="0">
             <a:spAutoFit/>
           </a:bodyPr>
           <a:lstStyle/>
@@ -12502,10 +13190,16 @@
                 <a:solidFill>
                   <a:srgbClr val="0F4D3B"/>
                 </a:solidFill>
-                <a:latin typeface="Segoe UI"/>
+                <a:latin typeface="Segoe UI" panose="020B0502040204020203"/>
               </a:rPr>
               <a:t>Deux unités d'analyse, chacune utilisée là où sa validité est prouvée — et un indice dont les pondérations sont testées.</a:t>
             </a:r>
+            <a:endParaRPr sz="1350" b="1">
+              <a:solidFill>
+                <a:srgbClr val="0F4D3B"/>
+              </a:solidFill>
+              <a:latin typeface="Segoe UI" panose="020B0502040204020203"/>
+            </a:endParaRPr>
           </a:p>
         </p:txBody>
       </p:sp>
@@ -12570,7 +13264,7 @@
           <a:noFill/>
         </p:spPr>
         <p:txBody>
-          <a:bodyPr wrap="square" lIns="0" rIns="0" tIns="0" bIns="0">
+          <a:bodyPr wrap="square" lIns="0" tIns="0" rIns="0" bIns="0">
             <a:spAutoFit/>
           </a:bodyPr>
           <a:lstStyle/>
@@ -12585,10 +13279,16 @@
                 <a:solidFill>
                   <a:srgbClr val="8B8A84"/>
                 </a:solidFill>
-                <a:latin typeface="Consolas"/>
+                <a:latin typeface="Consolas" panose="020B0609020204030204"/>
               </a:rPr>
               <a:t>République togolaise · Défi Économie numérique · Données ouvertes PRISE 2021-2022, RGPH-5 2022, COD-AB 2021</a:t>
             </a:r>
+            <a:endParaRPr sz="800" b="0">
+              <a:solidFill>
+                <a:srgbClr val="8B8A84"/>
+              </a:solidFill>
+              <a:latin typeface="Consolas" panose="020B0609020204030204"/>
+            </a:endParaRPr>
           </a:p>
         </p:txBody>
       </p:sp>
@@ -12609,7 +13309,7 @@
           <a:noFill/>
         </p:spPr>
         <p:txBody>
-          <a:bodyPr wrap="square" lIns="0" rIns="0" tIns="0" bIns="0">
+          <a:bodyPr wrap="square" lIns="0" tIns="0" rIns="0" bIns="0">
             <a:spAutoFit/>
           </a:bodyPr>
           <a:lstStyle/>
@@ -12624,10 +13324,16 @@
                 <a:solidFill>
                   <a:srgbClr val="8B8A84"/>
                 </a:solidFill>
-                <a:latin typeface="Consolas"/>
+                <a:latin typeface="Consolas" panose="020B0609020204030204"/>
               </a:rPr>
               <a:t>04 / 10</a:t>
             </a:r>
+            <a:endParaRPr sz="800" b="1">
+              <a:solidFill>
+                <a:srgbClr val="8B8A84"/>
+              </a:solidFill>
+              <a:latin typeface="Consolas" panose="020B0609020204030204"/>
+            </a:endParaRPr>
           </a:p>
         </p:txBody>
       </p:sp>
@@ -12648,7 +13354,7 @@
           <a:noFill/>
         </p:spPr>
         <p:txBody>
-          <a:bodyPr wrap="square" lIns="0" rIns="0" tIns="0" bIns="0">
+          <a:bodyPr wrap="square" lIns="0" tIns="0" rIns="0" bIns="0">
             <a:spAutoFit/>
           </a:bodyPr>
           <a:lstStyle/>
@@ -12663,10 +13369,16 @@
                 <a:solidFill>
                   <a:srgbClr val="8B8A84"/>
                 </a:solidFill>
-                <a:latin typeface="Consolas"/>
+                <a:latin typeface="Consolas" panose="020B0609020204030204"/>
               </a:rPr>
               <a:t>LES DEUX UNITÉS D'ANALYSE</a:t>
             </a:r>
+            <a:endParaRPr sz="800" b="1">
+              <a:solidFill>
+                <a:srgbClr val="8B8A84"/>
+              </a:solidFill>
+              <a:latin typeface="Consolas" panose="020B0609020204030204"/>
+            </a:endParaRPr>
           </a:p>
         </p:txBody>
       </p:sp>
@@ -12704,10 +13416,16 @@
                           <a:solidFill>
                             <a:srgbClr val="FFFFFF"/>
                           </a:solidFill>
-                          <a:latin typeface="Segoe UI"/>
+                          <a:latin typeface="Segoe UI" panose="020B0502040204020203"/>
                         </a:rPr>
                         <a:t>Unité</a:t>
                       </a:r>
+                      <a:endParaRPr sz="900" b="1">
+                        <a:solidFill>
+                          <a:srgbClr val="FFFFFF"/>
+                        </a:solidFill>
+                        <a:latin typeface="Segoe UI" panose="020B0502040204020203"/>
+                      </a:endParaRPr>
                     </a:p>
                   </a:txBody>
                   <a:tcPr anchor="ctr">
@@ -12726,10 +13444,16 @@
                           <a:solidFill>
                             <a:srgbClr val="FFFFFF"/>
                           </a:solidFill>
-                          <a:latin typeface="Segoe UI"/>
+                          <a:latin typeface="Segoe UI" panose="020B0502040204020203"/>
                         </a:rPr>
                         <a:t>Rôle</a:t>
                       </a:r>
+                      <a:endParaRPr sz="900" b="1">
+                        <a:solidFill>
+                          <a:srgbClr val="FFFFFF"/>
+                        </a:solidFill>
+                        <a:latin typeface="Segoe UI" panose="020B0502040204020203"/>
+                      </a:endParaRPr>
                     </a:p>
                   </a:txBody>
                   <a:tcPr anchor="ctr">
@@ -12748,10 +13472,16 @@
                           <a:solidFill>
                             <a:srgbClr val="FFFFFF"/>
                           </a:solidFill>
-                          <a:latin typeface="Segoe UI"/>
+                          <a:latin typeface="Segoe UI" panose="020B0502040204020203"/>
                         </a:rPr>
                         <a:t>Justification</a:t>
                       </a:r>
+                      <a:endParaRPr sz="900" b="1">
+                        <a:solidFill>
+                          <a:srgbClr val="FFFFFF"/>
+                        </a:solidFill>
+                        <a:latin typeface="Segoe UI" panose="020B0502040204020203"/>
+                      </a:endParaRPr>
                     </a:p>
                   </a:txBody>
                   <a:tcPr anchor="ctr">
@@ -12772,10 +13502,16 @@
                           <a:solidFill>
                             <a:srgbClr val="12120F"/>
                           </a:solidFill>
-                          <a:latin typeface="Segoe UI"/>
+                          <a:latin typeface="Segoe UI" panose="020B0502040204020203"/>
                         </a:rPr>
                         <a:t>Préfecture (39)</a:t>
                       </a:r>
+                      <a:endParaRPr sz="900" b="1">
+                        <a:solidFill>
+                          <a:srgbClr val="12120F"/>
+                        </a:solidFill>
+                        <a:latin typeface="Segoe UI" panose="020B0502040204020203"/>
+                      </a:endParaRPr>
                     </a:p>
                   </a:txBody>
                   <a:tcPr anchor="ctr">
@@ -12794,10 +13530,16 @@
                           <a:solidFill>
                             <a:srgbClr val="55544F"/>
                           </a:solidFill>
-                          <a:latin typeface="Segoe UI"/>
+                          <a:latin typeface="Segoe UI" panose="020B0502040204020203"/>
                         </a:rPr>
                         <a:t>Cartes, superficies, densités</a:t>
                       </a:r>
+                      <a:endParaRPr sz="900" b="0">
+                        <a:solidFill>
+                          <a:srgbClr val="55544F"/>
+                        </a:solidFill>
+                        <a:latin typeface="Segoe UI" panose="020B0502040204020203"/>
+                      </a:endParaRPr>
                     </a:p>
                   </a:txBody>
                   <a:tcPr anchor="ctr">
@@ -12816,10 +13558,16 @@
                           <a:solidFill>
                             <a:srgbClr val="55544F"/>
                           </a:solidFill>
-                          <a:latin typeface="Segoe UI"/>
+                          <a:latin typeface="Segoe UI" panose="020B0502040204020203"/>
                         </a:rPr>
                         <a:t>concordance spatiale 98,4 %</a:t>
                       </a:r>
+                      <a:endParaRPr sz="900" b="0">
+                        <a:solidFill>
+                          <a:srgbClr val="55544F"/>
+                        </a:solidFill>
+                        <a:latin typeface="Segoe UI" panose="020B0502040204020203"/>
+                      </a:endParaRPr>
                     </a:p>
                   </a:txBody>
                   <a:tcPr anchor="ctr">
@@ -12840,10 +13588,16 @@
                           <a:solidFill>
                             <a:srgbClr val="12120F"/>
                           </a:solidFill>
-                          <a:latin typeface="Segoe UI"/>
+                          <a:latin typeface="Segoe UI" panose="020B0502040204020203"/>
                         </a:rPr>
                         <a:t>Commune (117)</a:t>
                       </a:r>
+                      <a:endParaRPr sz="900" b="1">
+                        <a:solidFill>
+                          <a:srgbClr val="12120F"/>
+                        </a:solidFill>
+                        <a:latin typeface="Segoe UI" panose="020B0502040204020203"/>
+                      </a:endParaRPr>
                     </a:p>
                   </a:txBody>
                   <a:tcPr anchor="ctr">
@@ -12862,10 +13616,16 @@
                           <a:solidFill>
                             <a:srgbClr val="55544F"/>
                           </a:solidFill>
-                          <a:latin typeface="Segoe UI"/>
+                          <a:latin typeface="Segoe UI" panose="020B0502040204020203"/>
                         </a:rPr>
                         <a:t>Ratios par habitant</a:t>
                       </a:r>
+                      <a:endParaRPr sz="900" b="0">
+                        <a:solidFill>
+                          <a:srgbClr val="55544F"/>
+                        </a:solidFill>
+                        <a:latin typeface="Segoe UI" panose="020B0502040204020203"/>
+                      </a:endParaRPr>
                     </a:p>
                   </a:txBody>
                   <a:tcPr anchor="ctr">
@@ -12884,10 +13644,16 @@
                           <a:solidFill>
                             <a:srgbClr val="55544F"/>
                           </a:solidFill>
-                          <a:latin typeface="Segoe UI"/>
+                          <a:latin typeface="Segoe UI" panose="020B0502040204020203"/>
                         </a:rPr>
                         <a:t>population validée à l'unité près</a:t>
                       </a:r>
+                      <a:endParaRPr sz="900" b="0">
+                        <a:solidFill>
+                          <a:srgbClr val="55544F"/>
+                        </a:solidFill>
+                        <a:latin typeface="Segoe UI" panose="020B0502040204020203"/>
+                      </a:endParaRPr>
                     </a:p>
                   </a:txBody>
                   <a:tcPr anchor="ctr">
@@ -12918,7 +13684,7 @@
           <a:noFill/>
         </p:spPr>
         <p:txBody>
-          <a:bodyPr wrap="square" lIns="0" rIns="0" tIns="0" bIns="0">
+          <a:bodyPr wrap="square" lIns="0" tIns="0" rIns="0" bIns="0">
             <a:spAutoFit/>
           </a:bodyPr>
           <a:lstStyle/>
@@ -12933,10 +13699,16 @@
                 <a:solidFill>
                   <a:srgbClr val="55544F"/>
                 </a:solidFill>
-                <a:latin typeface="Segoe UI"/>
+                <a:latin typeface="Segoe UI" panose="020B0502040204020203"/>
               </a:rPr>
               <a:t>Reconstruire les contours des 117 communes a été testé puis rejeté sur preuve : les découpages ne s'emboîtent pas — 65,6 % des points tombent dans une unité à cheval sur plusieurs communes. Publier ces contours aurait produit des densités fausses sans aucune alerte.</a:t>
             </a:r>
+            <a:endParaRPr sz="1000" b="0">
+              <a:solidFill>
+                <a:srgbClr val="55544F"/>
+              </a:solidFill>
+              <a:latin typeface="Segoe UI" panose="020B0502040204020203"/>
+            </a:endParaRPr>
           </a:p>
         </p:txBody>
       </p:sp>
@@ -12957,7 +13729,7 @@
           <a:noFill/>
         </p:spPr>
         <p:txBody>
-          <a:bodyPr wrap="square" lIns="0" rIns="0" tIns="0" bIns="0">
+          <a:bodyPr wrap="square" lIns="0" tIns="0" rIns="0" bIns="0">
             <a:spAutoFit/>
           </a:bodyPr>
           <a:lstStyle/>
@@ -12972,10 +13744,16 @@
                 <a:solidFill>
                   <a:srgbClr val="8B8A84"/>
                 </a:solidFill>
-                <a:latin typeface="Consolas"/>
+                <a:latin typeface="Consolas" panose="020B0609020204030204"/>
               </a:rPr>
               <a:t>L'INDICE DE PRIORITÉ — QUATRE COMPOSANTES</a:t>
             </a:r>
+            <a:endParaRPr sz="800" b="1">
+              <a:solidFill>
+                <a:srgbClr val="8B8A84"/>
+              </a:solidFill>
+              <a:latin typeface="Consolas" panose="020B0609020204030204"/>
+            </a:endParaRPr>
           </a:p>
         </p:txBody>
       </p:sp>
@@ -13013,10 +13791,16 @@
                           <a:solidFill>
                             <a:srgbClr val="FFFFFF"/>
                           </a:solidFill>
-                          <a:latin typeface="Segoe UI"/>
+                          <a:latin typeface="Segoe UI" panose="020B0502040204020203"/>
                         </a:rPr>
                         <a:t>Composante</a:t>
                       </a:r>
+                      <a:endParaRPr sz="900" b="1">
+                        <a:solidFill>
+                          <a:srgbClr val="FFFFFF"/>
+                        </a:solidFill>
+                        <a:latin typeface="Segoe UI" panose="020B0502040204020203"/>
+                      </a:endParaRPr>
                     </a:p>
                   </a:txBody>
                   <a:tcPr anchor="ctr">
@@ -13035,10 +13819,16 @@
                           <a:solidFill>
                             <a:srgbClr val="FFFFFF"/>
                           </a:solidFill>
-                          <a:latin typeface="Segoe UI"/>
+                          <a:latin typeface="Segoe UI" panose="020B0502040204020203"/>
                         </a:rPr>
                         <a:t>Mesure</a:t>
                       </a:r>
+                      <a:endParaRPr sz="900" b="1">
+                        <a:solidFill>
+                          <a:srgbClr val="FFFFFF"/>
+                        </a:solidFill>
+                        <a:latin typeface="Segoe UI" panose="020B0502040204020203"/>
+                      </a:endParaRPr>
                     </a:p>
                   </a:txBody>
                   <a:tcPr anchor="ctr">
@@ -13057,10 +13847,16 @@
                           <a:solidFill>
                             <a:srgbClr val="FFFFFF"/>
                           </a:solidFill>
-                          <a:latin typeface="Segoe UI"/>
+                          <a:latin typeface="Segoe UI" panose="020B0502040204020203"/>
                         </a:rPr>
                         <a:t>Poids</a:t>
                       </a:r>
+                      <a:endParaRPr sz="900" b="1">
+                        <a:solidFill>
+                          <a:srgbClr val="FFFFFF"/>
+                        </a:solidFill>
+                        <a:latin typeface="Segoe UI" panose="020B0502040204020203"/>
+                      </a:endParaRPr>
                     </a:p>
                   </a:txBody>
                   <a:tcPr anchor="ctr">
@@ -13081,10 +13877,16 @@
                           <a:solidFill>
                             <a:srgbClr val="12120F"/>
                           </a:solidFill>
-                          <a:latin typeface="Segoe UI"/>
+                          <a:latin typeface="Segoe UI" panose="020B0502040204020203"/>
                         </a:rPr>
                         <a:t>Déficit Mobile Money</a:t>
                       </a:r>
+                      <a:endParaRPr sz="900" b="1">
+                        <a:solidFill>
+                          <a:srgbClr val="12120F"/>
+                        </a:solidFill>
+                        <a:latin typeface="Segoe UI" panose="020B0502040204020203"/>
+                      </a:endParaRPr>
                     </a:p>
                   </a:txBody>
                   <a:tcPr anchor="ctr">
@@ -13103,10 +13905,16 @@
                           <a:solidFill>
                             <a:srgbClr val="55544F"/>
                           </a:solidFill>
-                          <a:latin typeface="Segoe UI"/>
+                          <a:latin typeface="Segoe UI" panose="020B0502040204020203"/>
                         </a:rPr>
                         <a:t>habitants par point</a:t>
                       </a:r>
+                      <a:endParaRPr sz="900" b="0">
+                        <a:solidFill>
+                          <a:srgbClr val="55544F"/>
+                        </a:solidFill>
+                        <a:latin typeface="Segoe UI" panose="020B0502040204020203"/>
+                      </a:endParaRPr>
                     </a:p>
                   </a:txBody>
                   <a:tcPr anchor="ctr">
@@ -13125,10 +13933,16 @@
                           <a:solidFill>
                             <a:srgbClr val="55544F"/>
                           </a:solidFill>
-                          <a:latin typeface="Segoe UI"/>
+                          <a:latin typeface="Segoe UI" panose="020B0502040204020203"/>
                         </a:rPr>
                         <a:t>30 %</a:t>
                       </a:r>
+                      <a:endParaRPr sz="900" b="0">
+                        <a:solidFill>
+                          <a:srgbClr val="55544F"/>
+                        </a:solidFill>
+                        <a:latin typeface="Segoe UI" panose="020B0502040204020203"/>
+                      </a:endParaRPr>
                     </a:p>
                   </a:txBody>
                   <a:tcPr anchor="ctr">
@@ -13149,10 +13963,16 @@
                           <a:solidFill>
                             <a:srgbClr val="12120F"/>
                           </a:solidFill>
-                          <a:latin typeface="Segoe UI"/>
+                          <a:latin typeface="Segoe UI" panose="020B0502040204020203"/>
                         </a:rPr>
                         <a:t>Déficit d'agences</a:t>
                       </a:r>
+                      <a:endParaRPr sz="900" b="1">
+                        <a:solidFill>
+                          <a:srgbClr val="12120F"/>
+                        </a:solidFill>
+                        <a:latin typeface="Segoe UI" panose="020B0502040204020203"/>
+                      </a:endParaRPr>
                     </a:p>
                   </a:txBody>
                   <a:tcPr anchor="ctr">
@@ -13171,10 +13991,16 @@
                           <a:solidFill>
                             <a:srgbClr val="55544F"/>
                           </a:solidFill>
-                          <a:latin typeface="Segoe UI"/>
+                          <a:latin typeface="Segoe UI" panose="020B0502040204020203"/>
                         </a:rPr>
                         <a:t>agences / 100 000 hab.</a:t>
                       </a:r>
+                      <a:endParaRPr sz="900" b="0">
+                        <a:solidFill>
+                          <a:srgbClr val="55544F"/>
+                        </a:solidFill>
+                        <a:latin typeface="Segoe UI" panose="020B0502040204020203"/>
+                      </a:endParaRPr>
                     </a:p>
                   </a:txBody>
                   <a:tcPr anchor="ctr">
@@ -13193,10 +14019,16 @@
                           <a:solidFill>
                             <a:srgbClr val="55544F"/>
                           </a:solidFill>
-                          <a:latin typeface="Segoe UI"/>
+                          <a:latin typeface="Segoe UI" panose="020B0502040204020203"/>
                         </a:rPr>
                         <a:t>25 %</a:t>
                       </a:r>
+                      <a:endParaRPr sz="900" b="0">
+                        <a:solidFill>
+                          <a:srgbClr val="55544F"/>
+                        </a:solidFill>
+                        <a:latin typeface="Segoe UI" panose="020B0502040204020203"/>
+                      </a:endParaRPr>
                     </a:p>
                   </a:txBody>
                   <a:tcPr anchor="ctr">
@@ -13217,10 +14049,16 @@
                           <a:solidFill>
                             <a:srgbClr val="12120F"/>
                           </a:solidFill>
-                          <a:latin typeface="Segoe UI"/>
+                          <a:latin typeface="Segoe UI" panose="020B0502040204020203"/>
                         </a:rPr>
                         <a:t>Éloignement</a:t>
                       </a:r>
+                      <a:endParaRPr sz="900" b="1">
+                        <a:solidFill>
+                          <a:srgbClr val="12120F"/>
+                        </a:solidFill>
+                        <a:latin typeface="Segoe UI" panose="020B0502040204020203"/>
+                      </a:endParaRPr>
                     </a:p>
                   </a:txBody>
                   <a:tcPr anchor="ctr">
@@ -13239,10 +14077,16 @@
                           <a:solidFill>
                             <a:srgbClr val="55544F"/>
                           </a:solidFill>
-                          <a:latin typeface="Segoe UI"/>
+                          <a:latin typeface="Segoe UI" panose="020B0502040204020203"/>
                         </a:rPr>
                         <a:t>distance médiane à une agence</a:t>
                       </a:r>
+                      <a:endParaRPr sz="900" b="0">
+                        <a:solidFill>
+                          <a:srgbClr val="55544F"/>
+                        </a:solidFill>
+                        <a:latin typeface="Segoe UI" panose="020B0502040204020203"/>
+                      </a:endParaRPr>
                     </a:p>
                   </a:txBody>
                   <a:tcPr anchor="ctr">
@@ -13261,10 +14105,16 @@
                           <a:solidFill>
                             <a:srgbClr val="55544F"/>
                           </a:solidFill>
-                          <a:latin typeface="Segoe UI"/>
+                          <a:latin typeface="Segoe UI" panose="020B0502040204020203"/>
                         </a:rPr>
                         <a:t>25 %</a:t>
                       </a:r>
+                      <a:endParaRPr sz="900" b="0">
+                        <a:solidFill>
+                          <a:srgbClr val="55544F"/>
+                        </a:solidFill>
+                        <a:latin typeface="Segoe UI" panose="020B0502040204020203"/>
+                      </a:endParaRPr>
                     </a:p>
                   </a:txBody>
                   <a:tcPr anchor="ctr">
@@ -13285,10 +14135,16 @@
                           <a:solidFill>
                             <a:srgbClr val="12120F"/>
                           </a:solidFill>
-                          <a:latin typeface="Segoe UI"/>
+                          <a:latin typeface="Segoe UI" panose="020B0502040204020203"/>
                         </a:rPr>
                         <a:t>Enjeu démographique</a:t>
                       </a:r>
+                      <a:endParaRPr sz="900" b="1">
+                        <a:solidFill>
+                          <a:srgbClr val="12120F"/>
+                        </a:solidFill>
+                        <a:latin typeface="Segoe UI" panose="020B0502040204020203"/>
+                      </a:endParaRPr>
                     </a:p>
                   </a:txBody>
                   <a:tcPr anchor="ctr">
@@ -13307,10 +14163,16 @@
                           <a:solidFill>
                             <a:srgbClr val="55544F"/>
                           </a:solidFill>
-                          <a:latin typeface="Segoe UI"/>
+                          <a:latin typeface="Segoe UI" panose="020B0502040204020203"/>
                         </a:rPr>
                         <a:t>population concernée</a:t>
                       </a:r>
+                      <a:endParaRPr sz="900" b="0">
+                        <a:solidFill>
+                          <a:srgbClr val="55544F"/>
+                        </a:solidFill>
+                        <a:latin typeface="Segoe UI" panose="020B0502040204020203"/>
+                      </a:endParaRPr>
                     </a:p>
                   </a:txBody>
                   <a:tcPr anchor="ctr">
@@ -13329,10 +14191,16 @@
                           <a:solidFill>
                             <a:srgbClr val="55544F"/>
                           </a:solidFill>
-                          <a:latin typeface="Segoe UI"/>
+                          <a:latin typeface="Segoe UI" panose="020B0502040204020203"/>
                         </a:rPr>
                         <a:t>20 %</a:t>
                       </a:r>
+                      <a:endParaRPr sz="900" b="0">
+                        <a:solidFill>
+                          <a:srgbClr val="55544F"/>
+                        </a:solidFill>
+                        <a:latin typeface="Segoe UI" panose="020B0502040204020203"/>
+                      </a:endParaRPr>
                     </a:p>
                   </a:txBody>
                   <a:tcPr anchor="ctr">
@@ -13363,7 +14231,7 @@
           <a:noFill/>
         </p:spPr>
         <p:txBody>
-          <a:bodyPr wrap="square" lIns="0" rIns="0" tIns="0" bIns="0">
+          <a:bodyPr wrap="square" lIns="0" tIns="0" rIns="0" bIns="0">
             <a:spAutoFit/>
           </a:bodyPr>
           <a:lstStyle/>
@@ -13378,10 +14246,16 @@
                 <a:solidFill>
                   <a:srgbClr val="55544F"/>
                 </a:solidFill>
-                <a:latin typeface="Segoe UI"/>
+                <a:latin typeface="Segoe UI" panose="020B0502040204020203"/>
               </a:rPr>
               <a:t>Le déficit Mobile Money reprend la définition officielle du géoportail national — « nombre d'habitants par point mobile money ». L'indicateur central n'a pas été inventé pour ce travail.</a:t>
             </a:r>
+            <a:endParaRPr sz="1000" b="0">
+              <a:solidFill>
+                <a:srgbClr val="55544F"/>
+              </a:solidFill>
+              <a:latin typeface="Segoe UI" panose="020B0502040204020203"/>
+            </a:endParaRPr>
           </a:p>
           <a:p>
             <a:pPr algn="l">
@@ -13389,15 +14263,6 @@
                 <a:spcPct val="132000"/>
               </a:lnSpc>
             </a:pPr>
-            <a:r>
-              <a:rPr sz="1000" b="0">
-                <a:solidFill>
-                  <a:srgbClr val="55544F"/>
-                </a:solidFill>
-                <a:latin typeface="Segoe UI"/>
-              </a:rPr>
-              <a:t/>
-            </a:r>
           </a:p>
           <a:p>
             <a:pPr algn="l">
@@ -13410,10 +14275,16 @@
                 <a:solidFill>
                   <a:srgbClr val="55544F"/>
                 </a:solidFill>
-                <a:latin typeface="Segoe UI"/>
+                <a:latin typeface="Segoe UI" panose="020B0502040204020203"/>
               </a:rPr>
               <a:t>Ces pondérations sont un choix assumé. C'est exactement pourquoi 2 000 pondérations alternatives sont testées.</a:t>
             </a:r>
+            <a:endParaRPr sz="1000" b="0">
+              <a:solidFill>
+                <a:srgbClr val="55544F"/>
+              </a:solidFill>
+              <a:latin typeface="Segoe UI" panose="020B0502040204020203"/>
+            </a:endParaRPr>
           </a:p>
         </p:txBody>
       </p:sp>
@@ -13434,7 +14305,7 @@
           <a:noFill/>
         </p:spPr>
         <p:txBody>
-          <a:bodyPr wrap="square" lIns="0" rIns="0" tIns="0" bIns="0">
+          <a:bodyPr wrap="square" lIns="0" tIns="0" rIns="0" bIns="0">
             <a:spAutoFit/>
           </a:bodyPr>
           <a:lstStyle/>
@@ -13449,10 +14320,16 @@
                 <a:solidFill>
                   <a:srgbClr val="55544F"/>
                 </a:solidFill>
-                <a:latin typeface="Segoe UI"/>
+                <a:latin typeface="Segoe UI" panose="020B0502040204020203"/>
               </a:rPr>
               <a:t>Aucune valeur n'est imputée ni estimée. Toute donnée absente est déclarée absente. Aucun écrêtage n'est appliqué aux valeurs extrêmes : elles sont des faits, et leur influence est mesurée par une variante de calcul insensible aux extrêmes.</a:t>
             </a:r>
+            <a:endParaRPr sz="1000" b="0">
+              <a:solidFill>
+                <a:srgbClr val="55544F"/>
+              </a:solidFill>
+              <a:latin typeface="Segoe UI" panose="020B0502040204020203"/>
+            </a:endParaRPr>
           </a:p>
         </p:txBody>
       </p:sp>
@@ -13465,7 +14342,7 @@
 </file>
 
 <file path=ppt/slides/slide6.xml><?xml version="1.0" encoding="utf-8"?>
-<p:sld xmlns:a="http://schemas.openxmlformats.org/drawingml/2006/main" xmlns:p="http://schemas.openxmlformats.org/presentationml/2006/main" xmlns:r="http://schemas.openxmlformats.org/officeDocument/2006/relationships">
+<p:sld xmlns:a="http://schemas.openxmlformats.org/drawingml/2006/main" xmlns:r="http://schemas.openxmlformats.org/officeDocument/2006/relationships" xmlns:p="http://schemas.openxmlformats.org/presentationml/2006/main">
   <p:cSld>
     <p:spTree>
       <p:nvGrpSpPr>
@@ -13667,7 +14544,7 @@
           <a:noFill/>
         </p:spPr>
         <p:txBody>
-          <a:bodyPr wrap="square" lIns="0" rIns="0" tIns="0" bIns="0">
+          <a:bodyPr wrap="square" lIns="0" tIns="0" rIns="0" bIns="0">
             <a:spAutoFit/>
           </a:bodyPr>
           <a:lstStyle/>
@@ -13682,10 +14559,16 @@
                 <a:solidFill>
                   <a:srgbClr val="8B8A84"/>
                 </a:solidFill>
-                <a:latin typeface="Consolas"/>
+                <a:latin typeface="Consolas" panose="020B0609020204030204"/>
               </a:rPr>
               <a:t>DIAGNOSTIC</a:t>
             </a:r>
+            <a:endParaRPr sz="900" b="1">
+              <a:solidFill>
+                <a:srgbClr val="8B8A84"/>
+              </a:solidFill>
+              <a:latin typeface="Consolas" panose="020B0609020204030204"/>
+            </a:endParaRPr>
           </a:p>
         </p:txBody>
       </p:sp>
@@ -13706,7 +14589,7 @@
           <a:noFill/>
         </p:spPr>
         <p:txBody>
-          <a:bodyPr wrap="square" lIns="0" rIns="0" tIns="0" bIns="0">
+          <a:bodyPr wrap="square" lIns="0" tIns="0" rIns="0" bIns="0">
             <a:spAutoFit/>
           </a:bodyPr>
           <a:lstStyle/>
@@ -13721,10 +14604,16 @@
                 <a:solidFill>
                   <a:srgbClr val="12120F"/>
                 </a:solidFill>
-                <a:latin typeface="Segoe UI"/>
+                <a:latin typeface="Segoe UI" panose="020B0502040204020203"/>
               </a:rPr>
               <a:t>Diagnostic national</a:t>
             </a:r>
+            <a:endParaRPr sz="2800" b="1">
+              <a:solidFill>
+                <a:srgbClr val="12120F"/>
+              </a:solidFill>
+              <a:latin typeface="Segoe UI" panose="020B0502040204020203"/>
+            </a:endParaRPr>
           </a:p>
         </p:txBody>
       </p:sp>
@@ -13833,7 +14722,7 @@
           <a:noFill/>
         </p:spPr>
         <p:txBody>
-          <a:bodyPr wrap="square" lIns="0" rIns="0" tIns="0" bIns="0">
+          <a:bodyPr wrap="square" lIns="0" tIns="0" rIns="0" bIns="0">
             <a:spAutoFit/>
           </a:bodyPr>
           <a:lstStyle/>
@@ -13848,10 +14737,16 @@
                 <a:solidFill>
                   <a:srgbClr val="0F4D3B"/>
                 </a:solidFill>
-                <a:latin typeface="Segoe UI"/>
+                <a:latin typeface="Segoe UI" panose="020B0502040204020203"/>
               </a:rPr>
               <a:t>409 habitants par point de service en moyenne — mais un rapport de 1 à 12,7 entre la préfecture la mieux et la moins bien desservie.</a:t>
             </a:r>
+            <a:endParaRPr sz="1350" b="1">
+              <a:solidFill>
+                <a:srgbClr val="0F4D3B"/>
+              </a:solidFill>
+              <a:latin typeface="Segoe UI" panose="020B0502040204020203"/>
+            </a:endParaRPr>
           </a:p>
         </p:txBody>
       </p:sp>
@@ -13916,7 +14811,7 @@
           <a:noFill/>
         </p:spPr>
         <p:txBody>
-          <a:bodyPr wrap="square" lIns="0" rIns="0" tIns="0" bIns="0">
+          <a:bodyPr wrap="square" lIns="0" tIns="0" rIns="0" bIns="0">
             <a:spAutoFit/>
           </a:bodyPr>
           <a:lstStyle/>
@@ -13931,10 +14826,16 @@
                 <a:solidFill>
                   <a:srgbClr val="8B8A84"/>
                 </a:solidFill>
-                <a:latin typeface="Consolas"/>
+                <a:latin typeface="Consolas" panose="020B0609020204030204"/>
               </a:rPr>
               <a:t>République togolaise · Défi Économie numérique · Données ouvertes PRISE 2021-2022, RGPH-5 2022, COD-AB 2021</a:t>
             </a:r>
+            <a:endParaRPr sz="800" b="0">
+              <a:solidFill>
+                <a:srgbClr val="8B8A84"/>
+              </a:solidFill>
+              <a:latin typeface="Consolas" panose="020B0609020204030204"/>
+            </a:endParaRPr>
           </a:p>
         </p:txBody>
       </p:sp>
@@ -13955,7 +14856,7 @@
           <a:noFill/>
         </p:spPr>
         <p:txBody>
-          <a:bodyPr wrap="square" lIns="0" rIns="0" tIns="0" bIns="0">
+          <a:bodyPr wrap="square" lIns="0" tIns="0" rIns="0" bIns="0">
             <a:spAutoFit/>
           </a:bodyPr>
           <a:lstStyle/>
@@ -13970,10 +14871,16 @@
                 <a:solidFill>
                   <a:srgbClr val="8B8A84"/>
                 </a:solidFill>
-                <a:latin typeface="Consolas"/>
+                <a:latin typeface="Consolas" panose="020B0609020204030204"/>
               </a:rPr>
               <a:t>05 / 10</a:t>
             </a:r>
+            <a:endParaRPr sz="800" b="1">
+              <a:solidFill>
+                <a:srgbClr val="8B8A84"/>
+              </a:solidFill>
+              <a:latin typeface="Consolas" panose="020B0609020204030204"/>
+            </a:endParaRPr>
           </a:p>
         </p:txBody>
       </p:sp>
@@ -13986,7 +14893,7 @@
           <p:nvPr/>
         </p:nvPicPr>
         <p:blipFill>
-          <a:blip r:embed="rId2"/>
+          <a:blip r:embed="rId1"/>
           <a:stretch>
             <a:fillRect/>
           </a:stretch>
@@ -14108,7 +15015,7 @@
           <a:noFill/>
         </p:spPr>
         <p:txBody>
-          <a:bodyPr wrap="square" lIns="0" rIns="0" tIns="0" bIns="0">
+          <a:bodyPr wrap="square" lIns="0" tIns="0" rIns="0" bIns="0">
             <a:spAutoFit/>
           </a:bodyPr>
           <a:lstStyle/>
@@ -14123,10 +15030,16 @@
                 <a:solidFill>
                   <a:srgbClr val="8B8A84"/>
                 </a:solidFill>
-                <a:latin typeface="Consolas"/>
+                <a:latin typeface="Consolas" panose="020B0609020204030204"/>
               </a:rPr>
               <a:t>MOYENNE NATIONALE</a:t>
             </a:r>
+            <a:endParaRPr sz="750" b="1">
+              <a:solidFill>
+                <a:srgbClr val="8B8A84"/>
+              </a:solidFill>
+              <a:latin typeface="Consolas" panose="020B0609020204030204"/>
+            </a:endParaRPr>
           </a:p>
         </p:txBody>
       </p:sp>
@@ -14147,7 +15060,7 @@
           <a:noFill/>
         </p:spPr>
         <p:txBody>
-          <a:bodyPr wrap="square" lIns="0" rIns="0" tIns="0" bIns="0">
+          <a:bodyPr wrap="square" lIns="0" tIns="0" rIns="0" bIns="0">
             <a:spAutoFit/>
           </a:bodyPr>
           <a:lstStyle/>
@@ -14162,10 +15075,16 @@
                 <a:solidFill>
                   <a:srgbClr val="12120F"/>
                 </a:solidFill>
-                <a:latin typeface="Segoe UI"/>
+                <a:latin typeface="Segoe UI" panose="020B0502040204020203"/>
               </a:rPr>
               <a:t>409</a:t>
             </a:r>
+            <a:endParaRPr sz="2300" b="1">
+              <a:solidFill>
+                <a:srgbClr val="12120F"/>
+              </a:solidFill>
+              <a:latin typeface="Segoe UI" panose="020B0502040204020203"/>
+            </a:endParaRPr>
           </a:p>
         </p:txBody>
       </p:sp>
@@ -14186,7 +15105,7 @@
           <a:noFill/>
         </p:spPr>
         <p:txBody>
-          <a:bodyPr wrap="square" lIns="0" rIns="0" tIns="0" bIns="0">
+          <a:bodyPr wrap="square" lIns="0" tIns="0" rIns="0" bIns="0">
             <a:spAutoFit/>
           </a:bodyPr>
           <a:lstStyle/>
@@ -14201,10 +15120,16 @@
                 <a:solidFill>
                   <a:srgbClr val="55544F"/>
                 </a:solidFill>
-                <a:latin typeface="Segoe UI"/>
+                <a:latin typeface="Segoe UI" panose="020B0502040204020203"/>
               </a:rPr>
               <a:t>habitants par point Mobile Money</a:t>
             </a:r>
+            <a:endParaRPr sz="800" b="0">
+              <a:solidFill>
+                <a:srgbClr val="55544F"/>
+              </a:solidFill>
+              <a:latin typeface="Segoe UI" panose="020B0502040204020203"/>
+            </a:endParaRPr>
           </a:p>
         </p:txBody>
       </p:sp>
@@ -14315,7 +15240,7 @@
           <a:noFill/>
         </p:spPr>
         <p:txBody>
-          <a:bodyPr wrap="square" lIns="0" rIns="0" tIns="0" bIns="0">
+          <a:bodyPr wrap="square" lIns="0" tIns="0" rIns="0" bIns="0">
             <a:spAutoFit/>
           </a:bodyPr>
           <a:lstStyle/>
@@ -14330,10 +15255,16 @@
                 <a:solidFill>
                   <a:srgbClr val="8B8A84"/>
                 </a:solidFill>
-                <a:latin typeface="Consolas"/>
+                <a:latin typeface="Consolas" panose="020B0609020204030204"/>
               </a:rPr>
               <a:t>PRÉFECTURE LA MOINS DESSERVIE</a:t>
             </a:r>
+            <a:endParaRPr sz="750" b="1">
+              <a:solidFill>
+                <a:srgbClr val="8B8A84"/>
+              </a:solidFill>
+              <a:latin typeface="Consolas" panose="020B0609020204030204"/>
+            </a:endParaRPr>
           </a:p>
         </p:txBody>
       </p:sp>
@@ -14354,7 +15285,7 @@
           <a:noFill/>
         </p:spPr>
         <p:txBody>
-          <a:bodyPr wrap="square" lIns="0" rIns="0" tIns="0" bIns="0">
+          <a:bodyPr wrap="square" lIns="0" tIns="0" rIns="0" bIns="0">
             <a:spAutoFit/>
           </a:bodyPr>
           <a:lstStyle/>
@@ -14369,10 +15300,16 @@
                 <a:solidFill>
                   <a:srgbClr val="12120F"/>
                 </a:solidFill>
-                <a:latin typeface="Segoe UI"/>
+                <a:latin typeface="Segoe UI" panose="020B0502040204020203"/>
               </a:rPr>
               <a:t>2 155</a:t>
             </a:r>
+            <a:endParaRPr sz="2300" b="1">
+              <a:solidFill>
+                <a:srgbClr val="12120F"/>
+              </a:solidFill>
+              <a:latin typeface="Segoe UI" panose="020B0502040204020203"/>
+            </a:endParaRPr>
           </a:p>
         </p:txBody>
       </p:sp>
@@ -14393,7 +15330,7 @@
           <a:noFill/>
         </p:spPr>
         <p:txBody>
-          <a:bodyPr wrap="square" lIns="0" rIns="0" tIns="0" bIns="0">
+          <a:bodyPr wrap="square" lIns="0" tIns="0" rIns="0" bIns="0">
             <a:spAutoFit/>
           </a:bodyPr>
           <a:lstStyle/>
@@ -14408,10 +15345,16 @@
                 <a:solidFill>
                   <a:srgbClr val="55544F"/>
                 </a:solidFill>
-                <a:latin typeface="Segoe UI"/>
+                <a:latin typeface="Segoe UI" panose="020B0502040204020203"/>
               </a:rPr>
               <a:t>Kpendjal · 5,3 × la moyenne</a:t>
             </a:r>
+            <a:endParaRPr sz="800" b="0">
+              <a:solidFill>
+                <a:srgbClr val="55544F"/>
+              </a:solidFill>
+              <a:latin typeface="Segoe UI" panose="020B0502040204020203"/>
+            </a:endParaRPr>
           </a:p>
         </p:txBody>
       </p:sp>
@@ -14522,7 +15465,7 @@
           <a:noFill/>
         </p:spPr>
         <p:txBody>
-          <a:bodyPr wrap="square" lIns="0" rIns="0" tIns="0" bIns="0">
+          <a:bodyPr wrap="square" lIns="0" tIns="0" rIns="0" bIns="0">
             <a:spAutoFit/>
           </a:bodyPr>
           <a:lstStyle/>
@@ -14537,10 +15480,16 @@
                 <a:solidFill>
                   <a:srgbClr val="8B8A84"/>
                 </a:solidFill>
-                <a:latin typeface="Consolas"/>
+                <a:latin typeface="Consolas" panose="020B0609020204030204"/>
               </a:rPr>
               <a:t>PRÉFECTURES AU-DESSUS DE LA MOYENNE</a:t>
             </a:r>
+            <a:endParaRPr sz="750" b="1">
+              <a:solidFill>
+                <a:srgbClr val="8B8A84"/>
+              </a:solidFill>
+              <a:latin typeface="Consolas" panose="020B0609020204030204"/>
+            </a:endParaRPr>
           </a:p>
         </p:txBody>
       </p:sp>
@@ -14561,7 +15510,7 @@
           <a:noFill/>
         </p:spPr>
         <p:txBody>
-          <a:bodyPr wrap="square" lIns="0" rIns="0" tIns="0" bIns="0">
+          <a:bodyPr wrap="square" lIns="0" tIns="0" rIns="0" bIns="0">
             <a:spAutoFit/>
           </a:bodyPr>
           <a:lstStyle/>
@@ -14576,10 +15525,16 @@
                 <a:solidFill>
                   <a:srgbClr val="12120F"/>
                 </a:solidFill>
-                <a:latin typeface="Segoe UI"/>
+                <a:latin typeface="Segoe UI" panose="020B0502040204020203"/>
               </a:rPr>
               <a:t>24 / 39</a:t>
             </a:r>
+            <a:endParaRPr sz="2300" b="1">
+              <a:solidFill>
+                <a:srgbClr val="12120F"/>
+              </a:solidFill>
+              <a:latin typeface="Segoe UI" panose="020B0502040204020203"/>
+            </a:endParaRPr>
           </a:p>
         </p:txBody>
       </p:sp>
@@ -14600,7 +15555,7 @@
           <a:noFill/>
         </p:spPr>
         <p:txBody>
-          <a:bodyPr wrap="square" lIns="0" rIns="0" tIns="0" bIns="0">
+          <a:bodyPr wrap="square" lIns="0" tIns="0" rIns="0" bIns="0">
             <a:spAutoFit/>
           </a:bodyPr>
           <a:lstStyle/>
@@ -14615,10 +15570,16 @@
                 <a:solidFill>
                   <a:srgbClr val="55544F"/>
                 </a:solidFill>
-                <a:latin typeface="Segoe UI"/>
+                <a:latin typeface="Segoe UI" panose="020B0502040204020203"/>
               </a:rPr>
               <a:t>moins bien desservies que le pays</a:t>
             </a:r>
+            <a:endParaRPr sz="800" b="0">
+              <a:solidFill>
+                <a:srgbClr val="55544F"/>
+              </a:solidFill>
+              <a:latin typeface="Segoe UI" panose="020B0502040204020203"/>
+            </a:endParaRPr>
           </a:p>
         </p:txBody>
       </p:sp>
@@ -14729,7 +15690,7 @@
           <a:noFill/>
         </p:spPr>
         <p:txBody>
-          <a:bodyPr wrap="square" lIns="0" rIns="0" tIns="0" bIns="0">
+          <a:bodyPr wrap="square" lIns="0" tIns="0" rIns="0" bIns="0">
             <a:spAutoFit/>
           </a:bodyPr>
           <a:lstStyle/>
@@ -14744,10 +15705,16 @@
                 <a:solidFill>
                   <a:srgbClr val="8B8A84"/>
                 </a:solidFill>
-                <a:latin typeface="Consolas"/>
+                <a:latin typeface="Consolas" panose="020B0609020204030204"/>
               </a:rPr>
               <a:t>COMMUNES SANS AUCUNE AGENCE</a:t>
             </a:r>
+            <a:endParaRPr sz="750" b="1">
+              <a:solidFill>
+                <a:srgbClr val="8B8A84"/>
+              </a:solidFill>
+              <a:latin typeface="Consolas" panose="020B0609020204030204"/>
+            </a:endParaRPr>
           </a:p>
         </p:txBody>
       </p:sp>
@@ -14768,7 +15735,7 @@
           <a:noFill/>
         </p:spPr>
         <p:txBody>
-          <a:bodyPr wrap="square" lIns="0" rIns="0" tIns="0" bIns="0">
+          <a:bodyPr wrap="square" lIns="0" tIns="0" rIns="0" bIns="0">
             <a:spAutoFit/>
           </a:bodyPr>
           <a:lstStyle/>
@@ -14783,10 +15750,16 @@
                 <a:solidFill>
                   <a:srgbClr val="12120F"/>
                 </a:solidFill>
-                <a:latin typeface="Segoe UI"/>
+                <a:latin typeface="Segoe UI" panose="020B0502040204020203"/>
               </a:rPr>
               <a:t>75 / 117</a:t>
             </a:r>
+            <a:endParaRPr sz="2300" b="1">
+              <a:solidFill>
+                <a:srgbClr val="12120F"/>
+              </a:solidFill>
+              <a:latin typeface="Segoe UI" panose="020B0502040204020203"/>
+            </a:endParaRPr>
           </a:p>
         </p:txBody>
       </p:sp>
@@ -14807,7 +15780,7 @@
           <a:noFill/>
         </p:spPr>
         <p:txBody>
-          <a:bodyPr wrap="square" lIns="0" rIns="0" tIns="0" bIns="0">
+          <a:bodyPr wrap="square" lIns="0" tIns="0" rIns="0" bIns="0">
             <a:spAutoFit/>
           </a:bodyPr>
           <a:lstStyle/>
@@ -14822,10 +15795,16 @@
                 <a:solidFill>
                   <a:srgbClr val="55544F"/>
                 </a:solidFill>
-                <a:latin typeface="Segoe UI"/>
+                <a:latin typeface="Segoe UI" panose="020B0502040204020203"/>
               </a:rPr>
               <a:t>3 371 081 habitants</a:t>
             </a:r>
+            <a:endParaRPr sz="800" b="0">
+              <a:solidFill>
+                <a:srgbClr val="55544F"/>
+              </a:solidFill>
+              <a:latin typeface="Segoe UI" panose="020B0502040204020203"/>
+            </a:endParaRPr>
           </a:p>
         </p:txBody>
       </p:sp>
@@ -14846,7 +15825,7 @@
           <a:noFill/>
         </p:spPr>
         <p:txBody>
-          <a:bodyPr wrap="square" lIns="0" rIns="0" tIns="0" bIns="0">
+          <a:bodyPr wrap="square" lIns="0" tIns="0" rIns="0" bIns="0">
             <a:spAutoFit/>
           </a:bodyPr>
           <a:lstStyle/>
@@ -14856,15 +15835,12 @@
                 <a:spcPct val="122000"/>
               </a:lnSpc>
             </a:pPr>
-            <a:r>
-              <a:rPr sz="800" b="0">
-                <a:solidFill>
-                  <a:srgbClr val="55544F"/>
-                </a:solidFill>
-                <a:latin typeface="Segoe UI"/>
-              </a:rPr>
-              <a:t/>
-            </a:r>
+            <a:endParaRPr sz="800" b="0">
+              <a:solidFill>
+                <a:srgbClr val="55544F"/>
+              </a:solidFill>
+              <a:latin typeface="Segoe UI" panose="020B0502040204020203"/>
+            </a:endParaRPr>
           </a:p>
         </p:txBody>
       </p:sp>
@@ -14877,7 +15853,7 @@
 </file>
 
 <file path=ppt/slides/slide7.xml><?xml version="1.0" encoding="utf-8"?>
-<p:sld xmlns:a="http://schemas.openxmlformats.org/drawingml/2006/main" xmlns:p="http://schemas.openxmlformats.org/presentationml/2006/main" xmlns:r="http://schemas.openxmlformats.org/officeDocument/2006/relationships">
+<p:sld xmlns:a="http://schemas.openxmlformats.org/drawingml/2006/main" xmlns:r="http://schemas.openxmlformats.org/officeDocument/2006/relationships" xmlns:p="http://schemas.openxmlformats.org/presentationml/2006/main">
   <p:cSld>
     <p:spTree>
       <p:nvGrpSpPr>
@@ -15079,7 +16055,7 @@
           <a:noFill/>
         </p:spPr>
         <p:txBody>
-          <a:bodyPr wrap="square" lIns="0" rIns="0" tIns="0" bIns="0">
+          <a:bodyPr wrap="square" lIns="0" tIns="0" rIns="0" bIns="0">
             <a:spAutoFit/>
           </a:bodyPr>
           <a:lstStyle/>
@@ -15094,10 +16070,16 @@
                 <a:solidFill>
                   <a:srgbClr val="8B8A84"/>
                 </a:solidFill>
-                <a:latin typeface="Consolas"/>
+                <a:latin typeface="Consolas" panose="020B0609020204030204"/>
               </a:rPr>
               <a:t>GÉOSPATIAL</a:t>
             </a:r>
+            <a:endParaRPr sz="900" b="1">
+              <a:solidFill>
+                <a:srgbClr val="8B8A84"/>
+              </a:solidFill>
+              <a:latin typeface="Consolas" panose="020B0609020204030204"/>
+            </a:endParaRPr>
           </a:p>
         </p:txBody>
       </p:sp>
@@ -15118,7 +16100,7 @@
           <a:noFill/>
         </p:spPr>
         <p:txBody>
-          <a:bodyPr wrap="square" lIns="0" rIns="0" tIns="0" bIns="0">
+          <a:bodyPr wrap="square" lIns="0" tIns="0" rIns="0" bIns="0">
             <a:spAutoFit/>
           </a:bodyPr>
           <a:lstStyle/>
@@ -15133,10 +16115,16 @@
                 <a:solidFill>
                   <a:srgbClr val="12120F"/>
                 </a:solidFill>
-                <a:latin typeface="Segoe UI"/>
+                <a:latin typeface="Segoe UI" panose="020B0502040204020203"/>
               </a:rPr>
               <a:t>Analyse géospatiale et inégalités territoriales</a:t>
             </a:r>
+            <a:endParaRPr sz="2800" b="1">
+              <a:solidFill>
+                <a:srgbClr val="12120F"/>
+              </a:solidFill>
+              <a:latin typeface="Segoe UI" panose="020B0502040204020203"/>
+            </a:endParaRPr>
           </a:p>
         </p:txBody>
       </p:sp>
@@ -15245,7 +16233,7 @@
           <a:noFill/>
         </p:spPr>
         <p:txBody>
-          <a:bodyPr wrap="square" lIns="0" rIns="0" tIns="0" bIns="0">
+          <a:bodyPr wrap="square" lIns="0" tIns="0" rIns="0" bIns="0">
             <a:spAutoFit/>
           </a:bodyPr>
           <a:lstStyle/>
@@ -15260,10 +16248,16 @@
                 <a:solidFill>
                   <a:srgbClr val="0F4D3B"/>
                 </a:solidFill>
-                <a:latin typeface="Segoe UI"/>
+                <a:latin typeface="Segoe UI" panose="020B0502040204020203"/>
               </a:rPr>
               <a:t>La moitié la moins bien desservie de la population ne dispose que de 27 % des points de service.</a:t>
             </a:r>
+            <a:endParaRPr sz="1350" b="1">
+              <a:solidFill>
+                <a:srgbClr val="0F4D3B"/>
+              </a:solidFill>
+              <a:latin typeface="Segoe UI" panose="020B0502040204020203"/>
+            </a:endParaRPr>
           </a:p>
         </p:txBody>
       </p:sp>
@@ -15328,7 +16322,7 @@
           <a:noFill/>
         </p:spPr>
         <p:txBody>
-          <a:bodyPr wrap="square" lIns="0" rIns="0" tIns="0" bIns="0">
+          <a:bodyPr wrap="square" lIns="0" tIns="0" rIns="0" bIns="0">
             <a:spAutoFit/>
           </a:bodyPr>
           <a:lstStyle/>
@@ -15343,10 +16337,16 @@
                 <a:solidFill>
                   <a:srgbClr val="8B8A84"/>
                 </a:solidFill>
-                <a:latin typeface="Consolas"/>
+                <a:latin typeface="Consolas" panose="020B0609020204030204"/>
               </a:rPr>
               <a:t>République togolaise · Défi Économie numérique · Données ouvertes PRISE 2021-2022, RGPH-5 2022, COD-AB 2021</a:t>
             </a:r>
+            <a:endParaRPr sz="800" b="0">
+              <a:solidFill>
+                <a:srgbClr val="8B8A84"/>
+              </a:solidFill>
+              <a:latin typeface="Consolas" panose="020B0609020204030204"/>
+            </a:endParaRPr>
           </a:p>
         </p:txBody>
       </p:sp>
@@ -15367,7 +16367,7 @@
           <a:noFill/>
         </p:spPr>
         <p:txBody>
-          <a:bodyPr wrap="square" lIns="0" rIns="0" tIns="0" bIns="0">
+          <a:bodyPr wrap="square" lIns="0" tIns="0" rIns="0" bIns="0">
             <a:spAutoFit/>
           </a:bodyPr>
           <a:lstStyle/>
@@ -15382,16 +16382,46 @@
                 <a:solidFill>
                   <a:srgbClr val="8B8A84"/>
                 </a:solidFill>
-                <a:latin typeface="Consolas"/>
+                <a:latin typeface="Consolas" panose="020B0609020204030204"/>
               </a:rPr>
               <a:t>06 / 10</a:t>
             </a:r>
+            <a:endParaRPr sz="800" b="1">
+              <a:solidFill>
+                <a:srgbClr val="8B8A84"/>
+              </a:solidFill>
+              <a:latin typeface="Consolas" panose="020B0609020204030204"/>
+            </a:endParaRPr>
           </a:p>
         </p:txBody>
       </p:sp>
       <p:pic>
         <p:nvPicPr>
           <p:cNvPr id="14" name="Picture 13" descr="quadrant.png"/>
+          <p:cNvPicPr>
+            <a:picLocks noChangeAspect="1"/>
+          </p:cNvPicPr>
+          <p:nvPr/>
+        </p:nvPicPr>
+        <p:blipFill>
+          <a:blip r:embed="rId1"/>
+          <a:stretch>
+            <a:fillRect/>
+          </a:stretch>
+        </p:blipFill>
+        <p:spPr>
+          <a:xfrm>
+            <a:off x="502920" y="1920240"/>
+            <a:ext cx="5015010" cy="3931920"/>
+          </a:xfrm>
+          <a:prstGeom prst="rect">
+            <a:avLst/>
+          </a:prstGeom>
+        </p:spPr>
+      </p:pic>
+      <p:pic>
+        <p:nvPicPr>
+          <p:cNvPr id="15" name="Picture 14" descr="concentration.png"/>
           <p:cNvPicPr>
             <a:picLocks noChangeAspect="1"/>
           </p:cNvPicPr>
@@ -15405,30 +16435,6 @@
         </p:blipFill>
         <p:spPr>
           <a:xfrm>
-            <a:off x="502920" y="1920240"/>
-            <a:ext cx="5015010" cy="3931920"/>
-          </a:xfrm>
-          <a:prstGeom prst="rect">
-            <a:avLst/>
-          </a:prstGeom>
-        </p:spPr>
-      </p:pic>
-      <p:pic>
-        <p:nvPicPr>
-          <p:cNvPr id="15" name="Picture 14" descr="concentration.png"/>
-          <p:cNvPicPr>
-            <a:picLocks noChangeAspect="1"/>
-          </p:cNvPicPr>
-          <p:nvPr/>
-        </p:nvPicPr>
-        <p:blipFill>
-          <a:blip r:embed="rId3"/>
-          <a:stretch>
-            <a:fillRect/>
-          </a:stretch>
-        </p:blipFill>
-        <p:spPr>
-          <a:xfrm>
             <a:off x="6400800" y="1920240"/>
             <a:ext cx="4779520" cy="3931920"/>
           </a:xfrm>
@@ -15454,7 +16460,7 @@
           <a:noFill/>
         </p:spPr>
         <p:txBody>
-          <a:bodyPr wrap="square" lIns="0" rIns="0" tIns="0" bIns="0">
+          <a:bodyPr wrap="square" lIns="0" tIns="0" rIns="0" bIns="0">
             <a:spAutoFit/>
           </a:bodyPr>
           <a:lstStyle/>
@@ -15469,10 +16475,16 @@
                 <a:solidFill>
                   <a:srgbClr val="55544F"/>
                 </a:solidFill>
-                <a:latin typeface="Segoe UI"/>
+                <a:latin typeface="Segoe UI" panose="020B0502040204020203"/>
               </a:rPr>
               <a:t>12 préfectures sont à la fois plus peuplées que la médiane nationale et moins bien desservies que la moyenne : c'est là qu'un investissement touche le plus d'habitants.</a:t>
             </a:r>
+            <a:endParaRPr sz="1000" b="0">
+              <a:solidFill>
+                <a:srgbClr val="55544F"/>
+              </a:solidFill>
+              <a:latin typeface="Segoe UI" panose="020B0502040204020203"/>
+            </a:endParaRPr>
           </a:p>
         </p:txBody>
       </p:sp>
@@ -15493,7 +16505,7 @@
           <a:noFill/>
         </p:spPr>
         <p:txBody>
-          <a:bodyPr wrap="square" lIns="0" rIns="0" tIns="0" bIns="0">
+          <a:bodyPr wrap="square" lIns="0" tIns="0" rIns="0" bIns="0">
             <a:spAutoFit/>
           </a:bodyPr>
           <a:lstStyle/>
@@ -15508,10 +16520,16 @@
                 <a:solidFill>
                   <a:srgbClr val="55544F"/>
                 </a:solidFill>
-                <a:latin typeface="Segoe UI"/>
+                <a:latin typeface="Segoe UI" panose="020B0502040204020203"/>
               </a:rPr>
               <a:t>L'écart à la diagonale mesure la concentration. Les distances sont calculées après reprojection métrique — en degrés, elles seraient fausses.</a:t>
             </a:r>
+            <a:endParaRPr sz="1000" b="0">
+              <a:solidFill>
+                <a:srgbClr val="55544F"/>
+              </a:solidFill>
+              <a:latin typeface="Segoe UI" panose="020B0502040204020203"/>
+            </a:endParaRPr>
           </a:p>
         </p:txBody>
       </p:sp>
@@ -15524,7 +16542,7 @@
 </file>
 
 <file path=ppt/slides/slide8.xml><?xml version="1.0" encoding="utf-8"?>
-<p:sld xmlns:a="http://schemas.openxmlformats.org/drawingml/2006/main" xmlns:p="http://schemas.openxmlformats.org/presentationml/2006/main" xmlns:r="http://schemas.openxmlformats.org/officeDocument/2006/relationships">
+<p:sld xmlns:a="http://schemas.openxmlformats.org/drawingml/2006/main" xmlns:r="http://schemas.openxmlformats.org/officeDocument/2006/relationships" xmlns:p="http://schemas.openxmlformats.org/presentationml/2006/main">
   <p:cSld>
     <p:spTree>
       <p:nvGrpSpPr>
@@ -15726,7 +16744,7 @@
           <a:noFill/>
         </p:spPr>
         <p:txBody>
-          <a:bodyPr wrap="square" lIns="0" rIns="0" tIns="0" bIns="0">
+          <a:bodyPr wrap="square" lIns="0" tIns="0" rIns="0" bIns="0">
             <a:spAutoFit/>
           </a:bodyPr>
           <a:lstStyle/>
@@ -15741,10 +16759,16 @@
                 <a:solidFill>
                   <a:srgbClr val="8B8A84"/>
                 </a:solidFill>
-                <a:latin typeface="Consolas"/>
+                <a:latin typeface="Consolas" panose="020B0609020204030204"/>
               </a:rPr>
               <a:t>PRIORISATION</a:t>
             </a:r>
+            <a:endParaRPr sz="900" b="1">
+              <a:solidFill>
+                <a:srgbClr val="8B8A84"/>
+              </a:solidFill>
+              <a:latin typeface="Consolas" panose="020B0609020204030204"/>
+            </a:endParaRPr>
           </a:p>
         </p:txBody>
       </p:sp>
@@ -15765,7 +16789,7 @@
           <a:noFill/>
         </p:spPr>
         <p:txBody>
-          <a:bodyPr wrap="square" lIns="0" rIns="0" tIns="0" bIns="0">
+          <a:bodyPr wrap="square" lIns="0" tIns="0" rIns="0" bIns="0">
             <a:spAutoFit/>
           </a:bodyPr>
           <a:lstStyle/>
@@ -15780,10 +16804,16 @@
                 <a:solidFill>
                   <a:srgbClr val="12120F"/>
                 </a:solidFill>
-                <a:latin typeface="Segoe UI"/>
+                <a:latin typeface="Segoe UI" panose="020B0502040204020203"/>
               </a:rPr>
               <a:t>Zones prioritaires · indice DCPI</a:t>
             </a:r>
+            <a:endParaRPr sz="2800" b="1">
+              <a:solidFill>
+                <a:srgbClr val="12120F"/>
+              </a:solidFill>
+              <a:latin typeface="Segoe UI" panose="020B0502040204020203"/>
+            </a:endParaRPr>
           </a:p>
         </p:txBody>
       </p:sp>
@@ -15892,7 +16922,7 @@
           <a:noFill/>
         </p:spPr>
         <p:txBody>
-          <a:bodyPr wrap="square" lIns="0" rIns="0" tIns="0" bIns="0">
+          <a:bodyPr wrap="square" lIns="0" tIns="0" rIns="0" bIns="0">
             <a:spAutoFit/>
           </a:bodyPr>
           <a:lstStyle/>
@@ -15907,10 +16937,16 @@
                 <a:solidFill>
                   <a:srgbClr val="0F4D3B"/>
                 </a:solidFill>
-                <a:latin typeface="Segoe UI"/>
+                <a:latin typeface="Segoe UI" panose="020B0502040204020203"/>
               </a:rPr>
               <a:t>Neuf préfectures restent dans le top 10 pour au moins 90 % de 2 000 pondérations testées : leur priorité ne dépend pas de la méthode.</a:t>
             </a:r>
+            <a:endParaRPr sz="1350" b="1">
+              <a:solidFill>
+                <a:srgbClr val="0F4D3B"/>
+              </a:solidFill>
+              <a:latin typeface="Segoe UI" panose="020B0502040204020203"/>
+            </a:endParaRPr>
           </a:p>
         </p:txBody>
       </p:sp>
@@ -15975,7 +17011,7 @@
           <a:noFill/>
         </p:spPr>
         <p:txBody>
-          <a:bodyPr wrap="square" lIns="0" rIns="0" tIns="0" bIns="0">
+          <a:bodyPr wrap="square" lIns="0" tIns="0" rIns="0" bIns="0">
             <a:spAutoFit/>
           </a:bodyPr>
           <a:lstStyle/>
@@ -15990,10 +17026,16 @@
                 <a:solidFill>
                   <a:srgbClr val="8B8A84"/>
                 </a:solidFill>
-                <a:latin typeface="Consolas"/>
+                <a:latin typeface="Consolas" panose="020B0609020204030204"/>
               </a:rPr>
               <a:t>République togolaise · Défi Économie numérique · Données ouvertes PRISE 2021-2022, RGPH-5 2022, COD-AB 2021</a:t>
             </a:r>
+            <a:endParaRPr sz="800" b="0">
+              <a:solidFill>
+                <a:srgbClr val="8B8A84"/>
+              </a:solidFill>
+              <a:latin typeface="Consolas" panose="020B0609020204030204"/>
+            </a:endParaRPr>
           </a:p>
         </p:txBody>
       </p:sp>
@@ -16014,7 +17056,7 @@
           <a:noFill/>
         </p:spPr>
         <p:txBody>
-          <a:bodyPr wrap="square" lIns="0" rIns="0" tIns="0" bIns="0">
+          <a:bodyPr wrap="square" lIns="0" tIns="0" rIns="0" bIns="0">
             <a:spAutoFit/>
           </a:bodyPr>
           <a:lstStyle/>
@@ -16029,10 +17071,16 @@
                 <a:solidFill>
                   <a:srgbClr val="8B8A84"/>
                 </a:solidFill>
-                <a:latin typeface="Consolas"/>
+                <a:latin typeface="Consolas" panose="020B0609020204030204"/>
               </a:rPr>
               <a:t>07 / 10</a:t>
             </a:r>
+            <a:endParaRPr sz="800" b="1">
+              <a:solidFill>
+                <a:srgbClr val="8B8A84"/>
+              </a:solidFill>
+              <a:latin typeface="Consolas" panose="020B0609020204030204"/>
+            </a:endParaRPr>
           </a:p>
         </p:txBody>
       </p:sp>
@@ -16045,7 +17093,7 @@
           <p:nvPr/>
         </p:nvPicPr>
         <p:blipFill>
-          <a:blip r:embed="rId2"/>
+          <a:blip r:embed="rId1"/>
           <a:stretch>
             <a:fillRect/>
           </a:stretch>
@@ -16069,7 +17117,7 @@
           <p:nvPr/>
         </p:nvPicPr>
         <p:blipFill>
-          <a:blip r:embed="rId3"/>
+          <a:blip r:embed="rId2"/>
           <a:stretch>
             <a:fillRect/>
           </a:stretch>
@@ -16121,10 +17169,16 @@
                           <a:solidFill>
                             <a:srgbClr val="FFFFFF"/>
                           </a:solidFill>
-                          <a:latin typeface="Segoe UI"/>
+                          <a:latin typeface="Segoe UI" panose="020B0502040204020203"/>
                         </a:rPr>
                         <a:t>#</a:t>
                       </a:r>
+                      <a:endParaRPr sz="850" b="1">
+                        <a:solidFill>
+                          <a:srgbClr val="FFFFFF"/>
+                        </a:solidFill>
+                        <a:latin typeface="Segoe UI" panose="020B0502040204020203"/>
+                      </a:endParaRPr>
                     </a:p>
                   </a:txBody>
                   <a:tcPr anchor="ctr">
@@ -16143,10 +17197,16 @@
                           <a:solidFill>
                             <a:srgbClr val="FFFFFF"/>
                           </a:solidFill>
-                          <a:latin typeface="Segoe UI"/>
+                          <a:latin typeface="Segoe UI" panose="020B0502040204020203"/>
                         </a:rPr>
                         <a:t>Préfecture</a:t>
                       </a:r>
+                      <a:endParaRPr sz="850" b="1">
+                        <a:solidFill>
+                          <a:srgbClr val="FFFFFF"/>
+                        </a:solidFill>
+                        <a:latin typeface="Segoe UI" panose="020B0502040204020203"/>
+                      </a:endParaRPr>
                     </a:p>
                   </a:txBody>
                   <a:tcPr anchor="ctr">
@@ -16165,10 +17225,16 @@
                           <a:solidFill>
                             <a:srgbClr val="FFFFFF"/>
                           </a:solidFill>
-                          <a:latin typeface="Segoe UI"/>
+                          <a:latin typeface="Segoe UI" panose="020B0502040204020203"/>
                         </a:rPr>
                         <a:t>Hab.</a:t>
                       </a:r>
+                      <a:endParaRPr sz="850" b="1">
+                        <a:solidFill>
+                          <a:srgbClr val="FFFFFF"/>
+                        </a:solidFill>
+                        <a:latin typeface="Segoe UI" panose="020B0502040204020203"/>
+                      </a:endParaRPr>
                     </a:p>
                   </a:txBody>
                   <a:tcPr anchor="ctr">
@@ -16187,10 +17253,16 @@
                           <a:solidFill>
                             <a:srgbClr val="FFFFFF"/>
                           </a:solidFill>
-                          <a:latin typeface="Segoe UI"/>
+                          <a:latin typeface="Segoe UI" panose="020B0502040204020203"/>
                         </a:rPr>
                         <a:t>Hab./pt</a:t>
                       </a:r>
+                      <a:endParaRPr sz="850" b="1">
+                        <a:solidFill>
+                          <a:srgbClr val="FFFFFF"/>
+                        </a:solidFill>
+                        <a:latin typeface="Segoe UI" panose="020B0502040204020203"/>
+                      </a:endParaRPr>
                     </a:p>
                   </a:txBody>
                   <a:tcPr anchor="ctr">
@@ -16209,10 +17281,16 @@
                           <a:solidFill>
                             <a:srgbClr val="FFFFFF"/>
                           </a:solidFill>
-                          <a:latin typeface="Segoe UI"/>
+                          <a:latin typeface="Segoe UI" panose="020B0502040204020203"/>
                         </a:rPr>
                         <a:t>Ag.</a:t>
                       </a:r>
+                      <a:endParaRPr sz="850" b="1">
+                        <a:solidFill>
+                          <a:srgbClr val="FFFFFF"/>
+                        </a:solidFill>
+                        <a:latin typeface="Segoe UI" panose="020B0502040204020203"/>
+                      </a:endParaRPr>
                     </a:p>
                   </a:txBody>
                   <a:tcPr anchor="ctr">
@@ -16231,10 +17309,16 @@
                           <a:solidFill>
                             <a:srgbClr val="FFFFFF"/>
                           </a:solidFill>
-                          <a:latin typeface="Segoe UI"/>
+                          <a:latin typeface="Segoe UI" panose="020B0502040204020203"/>
                         </a:rPr>
                         <a:t>Dist.</a:t>
                       </a:r>
+                      <a:endParaRPr sz="850" b="1">
+                        <a:solidFill>
+                          <a:srgbClr val="FFFFFF"/>
+                        </a:solidFill>
+                        <a:latin typeface="Segoe UI" panose="020B0502040204020203"/>
+                      </a:endParaRPr>
                     </a:p>
                   </a:txBody>
                   <a:tcPr anchor="ctr">
@@ -16255,10 +17339,16 @@
                           <a:solidFill>
                             <a:srgbClr val="12120F"/>
                           </a:solidFill>
-                          <a:latin typeface="Segoe UI"/>
+                          <a:latin typeface="Segoe UI" panose="020B0502040204020203"/>
                         </a:rPr>
                         <a:t>1</a:t>
                       </a:r>
+                      <a:endParaRPr sz="850" b="1">
+                        <a:solidFill>
+                          <a:srgbClr val="12120F"/>
+                        </a:solidFill>
+                        <a:latin typeface="Segoe UI" panose="020B0502040204020203"/>
+                      </a:endParaRPr>
                     </a:p>
                   </a:txBody>
                   <a:tcPr anchor="ctr">
@@ -16277,10 +17367,16 @@
                           <a:solidFill>
                             <a:srgbClr val="55544F"/>
                           </a:solidFill>
-                          <a:latin typeface="Segoe UI"/>
+                          <a:latin typeface="Segoe UI" panose="020B0502040204020203"/>
                         </a:rPr>
                         <a:t>Kpendjal</a:t>
                       </a:r>
+                      <a:endParaRPr sz="850" b="0">
+                        <a:solidFill>
+                          <a:srgbClr val="55544F"/>
+                        </a:solidFill>
+                        <a:latin typeface="Segoe UI" panose="020B0502040204020203"/>
+                      </a:endParaRPr>
                     </a:p>
                   </a:txBody>
                   <a:tcPr anchor="ctr">
@@ -16299,10 +17395,16 @@
                           <a:solidFill>
                             <a:srgbClr val="55544F"/>
                           </a:solidFill>
-                          <a:latin typeface="Segoe UI"/>
+                          <a:latin typeface="Segoe UI" panose="020B0502040204020203"/>
                         </a:rPr>
                         <a:t>88 365</a:t>
                       </a:r>
+                      <a:endParaRPr sz="850" b="0">
+                        <a:solidFill>
+                          <a:srgbClr val="55544F"/>
+                        </a:solidFill>
+                        <a:latin typeface="Segoe UI" panose="020B0502040204020203"/>
+                      </a:endParaRPr>
                     </a:p>
                   </a:txBody>
                   <a:tcPr anchor="ctr">
@@ -16321,10 +17423,16 @@
                           <a:solidFill>
                             <a:srgbClr val="55544F"/>
                           </a:solidFill>
-                          <a:latin typeface="Segoe UI"/>
+                          <a:latin typeface="Segoe UI" panose="020B0502040204020203"/>
                         </a:rPr>
                         <a:t>2 155</a:t>
                       </a:r>
+                      <a:endParaRPr sz="850" b="0">
+                        <a:solidFill>
+                          <a:srgbClr val="55544F"/>
+                        </a:solidFill>
+                        <a:latin typeface="Segoe UI" panose="020B0502040204020203"/>
+                      </a:endParaRPr>
                     </a:p>
                   </a:txBody>
                   <a:tcPr anchor="ctr">
@@ -16343,10 +17451,16 @@
                           <a:solidFill>
                             <a:srgbClr val="55544F"/>
                           </a:solidFill>
-                          <a:latin typeface="Segoe UI"/>
+                          <a:latin typeface="Segoe UI" panose="020B0502040204020203"/>
                         </a:rPr>
                         <a:t>0</a:t>
                       </a:r>
+                      <a:endParaRPr sz="850" b="0">
+                        <a:solidFill>
+                          <a:srgbClr val="55544F"/>
+                        </a:solidFill>
+                        <a:latin typeface="Segoe UI" panose="020B0502040204020203"/>
+                      </a:endParaRPr>
                     </a:p>
                   </a:txBody>
                   <a:tcPr anchor="ctr">
@@ -16365,10 +17479,16 @@
                           <a:solidFill>
                             <a:srgbClr val="55544F"/>
                           </a:solidFill>
-                          <a:latin typeface="Segoe UI"/>
+                          <a:latin typeface="Segoe UI" panose="020B0502040204020203"/>
                         </a:rPr>
                         <a:t>47 km</a:t>
                       </a:r>
+                      <a:endParaRPr sz="850" b="0">
+                        <a:solidFill>
+                          <a:srgbClr val="55544F"/>
+                        </a:solidFill>
+                        <a:latin typeface="Segoe UI" panose="020B0502040204020203"/>
+                      </a:endParaRPr>
                     </a:p>
                   </a:txBody>
                   <a:tcPr anchor="ctr">
@@ -16389,10 +17509,16 @@
                           <a:solidFill>
                             <a:srgbClr val="12120F"/>
                           </a:solidFill>
-                          <a:latin typeface="Segoe UI"/>
+                          <a:latin typeface="Segoe UI" panose="020B0502040204020203"/>
                         </a:rPr>
                         <a:t>2</a:t>
                       </a:r>
+                      <a:endParaRPr sz="850" b="1">
+                        <a:solidFill>
+                          <a:srgbClr val="12120F"/>
+                        </a:solidFill>
+                        <a:latin typeface="Segoe UI" panose="020B0502040204020203"/>
+                      </a:endParaRPr>
                     </a:p>
                   </a:txBody>
                   <a:tcPr anchor="ctr">
@@ -16411,10 +17537,16 @@
                           <a:solidFill>
                             <a:srgbClr val="55544F"/>
                           </a:solidFill>
-                          <a:latin typeface="Segoe UI"/>
+                          <a:latin typeface="Segoe UI" panose="020B0502040204020203"/>
                         </a:rPr>
                         <a:t>Mô</a:t>
                       </a:r>
+                      <a:endParaRPr sz="850" b="0">
+                        <a:solidFill>
+                          <a:srgbClr val="55544F"/>
+                        </a:solidFill>
+                        <a:latin typeface="Segoe UI" panose="020B0502040204020203"/>
+                      </a:endParaRPr>
                     </a:p>
                   </a:txBody>
                   <a:tcPr anchor="ctr">
@@ -16433,10 +17565,16 @@
                           <a:solidFill>
                             <a:srgbClr val="55544F"/>
                           </a:solidFill>
-                          <a:latin typeface="Segoe UI"/>
+                          <a:latin typeface="Segoe UI" panose="020B0502040204020203"/>
                         </a:rPr>
                         <a:t>52 448</a:t>
                       </a:r>
+                      <a:endParaRPr sz="850" b="0">
+                        <a:solidFill>
+                          <a:srgbClr val="55544F"/>
+                        </a:solidFill>
+                        <a:latin typeface="Segoe UI" panose="020B0502040204020203"/>
+                      </a:endParaRPr>
                     </a:p>
                   </a:txBody>
                   <a:tcPr anchor="ctr">
@@ -16455,10 +17593,16 @@
                           <a:solidFill>
                             <a:srgbClr val="55544F"/>
                           </a:solidFill>
-                          <a:latin typeface="Segoe UI"/>
+                          <a:latin typeface="Segoe UI" panose="020B0502040204020203"/>
                         </a:rPr>
                         <a:t>1 639</a:t>
                       </a:r>
+                      <a:endParaRPr sz="850" b="0">
+                        <a:solidFill>
+                          <a:srgbClr val="55544F"/>
+                        </a:solidFill>
+                        <a:latin typeface="Segoe UI" panose="020B0502040204020203"/>
+                      </a:endParaRPr>
                     </a:p>
                   </a:txBody>
                   <a:tcPr anchor="ctr">
@@ -16477,10 +17621,16 @@
                           <a:solidFill>
                             <a:srgbClr val="55544F"/>
                           </a:solidFill>
-                          <a:latin typeface="Segoe UI"/>
+                          <a:latin typeface="Segoe UI" panose="020B0502040204020203"/>
                         </a:rPr>
                         <a:t>0</a:t>
                       </a:r>
+                      <a:endParaRPr sz="850" b="0">
+                        <a:solidFill>
+                          <a:srgbClr val="55544F"/>
+                        </a:solidFill>
+                        <a:latin typeface="Segoe UI" panose="020B0502040204020203"/>
+                      </a:endParaRPr>
                     </a:p>
                   </a:txBody>
                   <a:tcPr anchor="ctr">
@@ -16499,10 +17649,16 @@
                           <a:solidFill>
                             <a:srgbClr val="55544F"/>
                           </a:solidFill>
-                          <a:latin typeface="Segoe UI"/>
+                          <a:latin typeface="Segoe UI" panose="020B0502040204020203"/>
                         </a:rPr>
                         <a:t>45 km</a:t>
                       </a:r>
+                      <a:endParaRPr sz="850" b="0">
+                        <a:solidFill>
+                          <a:srgbClr val="55544F"/>
+                        </a:solidFill>
+                        <a:latin typeface="Segoe UI" panose="020B0502040204020203"/>
+                      </a:endParaRPr>
                     </a:p>
                   </a:txBody>
                   <a:tcPr anchor="ctr">
@@ -16523,10 +17679,16 @@
                           <a:solidFill>
                             <a:srgbClr val="12120F"/>
                           </a:solidFill>
-                          <a:latin typeface="Segoe UI"/>
+                          <a:latin typeface="Segoe UI" panose="020B0502040204020203"/>
                         </a:rPr>
                         <a:t>3</a:t>
                       </a:r>
+                      <a:endParaRPr sz="850" b="1">
+                        <a:solidFill>
+                          <a:srgbClr val="12120F"/>
+                        </a:solidFill>
+                        <a:latin typeface="Segoe UI" panose="020B0502040204020203"/>
+                      </a:endParaRPr>
                     </a:p>
                   </a:txBody>
                   <a:tcPr anchor="ctr">
@@ -16545,10 +17707,16 @@
                           <a:solidFill>
                             <a:srgbClr val="55544F"/>
                           </a:solidFill>
-                          <a:latin typeface="Segoe UI"/>
+                          <a:latin typeface="Segoe UI" panose="020B0502040204020203"/>
                         </a:rPr>
                         <a:t>Est-Mono</a:t>
                       </a:r>
+                      <a:endParaRPr sz="850" b="0">
+                        <a:solidFill>
+                          <a:srgbClr val="55544F"/>
+                        </a:solidFill>
+                        <a:latin typeface="Segoe UI" panose="020B0502040204020203"/>
+                      </a:endParaRPr>
                     </a:p>
                   </a:txBody>
                   <a:tcPr anchor="ctr">
@@ -16567,10 +17735,16 @@
                           <a:solidFill>
                             <a:srgbClr val="55544F"/>
                           </a:solidFill>
-                          <a:latin typeface="Segoe UI"/>
+                          <a:latin typeface="Segoe UI" panose="020B0502040204020203"/>
                         </a:rPr>
                         <a:t>164 460</a:t>
                       </a:r>
+                      <a:endParaRPr sz="850" b="0">
+                        <a:solidFill>
+                          <a:srgbClr val="55544F"/>
+                        </a:solidFill>
+                        <a:latin typeface="Segoe UI" panose="020B0502040204020203"/>
+                      </a:endParaRPr>
                     </a:p>
                   </a:txBody>
                   <a:tcPr anchor="ctr">
@@ -16589,10 +17763,16 @@
                           <a:solidFill>
                             <a:srgbClr val="55544F"/>
                           </a:solidFill>
-                          <a:latin typeface="Segoe UI"/>
+                          <a:latin typeface="Segoe UI" panose="020B0502040204020203"/>
                         </a:rPr>
                         <a:t>787</a:t>
                       </a:r>
+                      <a:endParaRPr sz="850" b="0">
+                        <a:solidFill>
+                          <a:srgbClr val="55544F"/>
+                        </a:solidFill>
+                        <a:latin typeface="Segoe UI" panose="020B0502040204020203"/>
+                      </a:endParaRPr>
                     </a:p>
                   </a:txBody>
                   <a:tcPr anchor="ctr">
@@ -16611,10 +17791,16 @@
                           <a:solidFill>
                             <a:srgbClr val="55544F"/>
                           </a:solidFill>
-                          <a:latin typeface="Segoe UI"/>
+                          <a:latin typeface="Segoe UI" panose="020B0502040204020203"/>
                         </a:rPr>
                         <a:t>0</a:t>
                       </a:r>
+                      <a:endParaRPr sz="850" b="0">
+                        <a:solidFill>
+                          <a:srgbClr val="55544F"/>
+                        </a:solidFill>
+                        <a:latin typeface="Segoe UI" panose="020B0502040204020203"/>
+                      </a:endParaRPr>
                     </a:p>
                   </a:txBody>
                   <a:tcPr anchor="ctr">
@@ -16633,10 +17819,16 @@
                           <a:solidFill>
                             <a:srgbClr val="55544F"/>
                           </a:solidFill>
-                          <a:latin typeface="Segoe UI"/>
+                          <a:latin typeface="Segoe UI" panose="020B0502040204020203"/>
                         </a:rPr>
                         <a:t>46 km</a:t>
                       </a:r>
+                      <a:endParaRPr sz="850" b="0">
+                        <a:solidFill>
+                          <a:srgbClr val="55544F"/>
+                        </a:solidFill>
+                        <a:latin typeface="Segoe UI" panose="020B0502040204020203"/>
+                      </a:endParaRPr>
                     </a:p>
                   </a:txBody>
                   <a:tcPr anchor="ctr">
@@ -16657,10 +17849,16 @@
                           <a:solidFill>
                             <a:srgbClr val="12120F"/>
                           </a:solidFill>
-                          <a:latin typeface="Segoe UI"/>
+                          <a:latin typeface="Segoe UI" panose="020B0502040204020203"/>
                         </a:rPr>
                         <a:t>4</a:t>
                       </a:r>
+                      <a:endParaRPr sz="850" b="1">
+                        <a:solidFill>
+                          <a:srgbClr val="12120F"/>
+                        </a:solidFill>
+                        <a:latin typeface="Segoe UI" panose="020B0502040204020203"/>
+                      </a:endParaRPr>
                     </a:p>
                   </a:txBody>
                   <a:tcPr anchor="ctr">
@@ -16679,10 +17877,16 @@
                           <a:solidFill>
                             <a:srgbClr val="55544F"/>
                           </a:solidFill>
-                          <a:latin typeface="Segoe UI"/>
+                          <a:latin typeface="Segoe UI" panose="020B0502040204020203"/>
                         </a:rPr>
                         <a:t>Akébou</a:t>
                       </a:r>
+                      <a:endParaRPr sz="850" b="0">
+                        <a:solidFill>
+                          <a:srgbClr val="55544F"/>
+                        </a:solidFill>
+                        <a:latin typeface="Segoe UI" panose="020B0502040204020203"/>
+                      </a:endParaRPr>
                     </a:p>
                   </a:txBody>
                   <a:tcPr anchor="ctr">
@@ -16701,10 +17905,16 @@
                           <a:solidFill>
                             <a:srgbClr val="55544F"/>
                           </a:solidFill>
-                          <a:latin typeface="Segoe UI"/>
+                          <a:latin typeface="Segoe UI" panose="020B0502040204020203"/>
                         </a:rPr>
                         <a:t>73 830</a:t>
                       </a:r>
+                      <a:endParaRPr sz="850" b="0">
+                        <a:solidFill>
+                          <a:srgbClr val="55544F"/>
+                        </a:solidFill>
+                        <a:latin typeface="Segoe UI" panose="020B0502040204020203"/>
+                      </a:endParaRPr>
                     </a:p>
                   </a:txBody>
                   <a:tcPr anchor="ctr">
@@ -16723,10 +17933,16 @@
                           <a:solidFill>
                             <a:srgbClr val="55544F"/>
                           </a:solidFill>
-                          <a:latin typeface="Segoe UI"/>
+                          <a:latin typeface="Segoe UI" panose="020B0502040204020203"/>
                         </a:rPr>
                         <a:t>849</a:t>
                       </a:r>
+                      <a:endParaRPr sz="850" b="0">
+                        <a:solidFill>
+                          <a:srgbClr val="55544F"/>
+                        </a:solidFill>
+                        <a:latin typeface="Segoe UI" panose="020B0502040204020203"/>
+                      </a:endParaRPr>
                     </a:p>
                   </a:txBody>
                   <a:tcPr anchor="ctr">
@@ -16745,10 +17961,16 @@
                           <a:solidFill>
                             <a:srgbClr val="55544F"/>
                           </a:solidFill>
-                          <a:latin typeface="Segoe UI"/>
+                          <a:latin typeface="Segoe UI" panose="020B0502040204020203"/>
                         </a:rPr>
                         <a:t>0</a:t>
                       </a:r>
+                      <a:endParaRPr sz="850" b="0">
+                        <a:solidFill>
+                          <a:srgbClr val="55544F"/>
+                        </a:solidFill>
+                        <a:latin typeface="Segoe UI" panose="020B0502040204020203"/>
+                      </a:endParaRPr>
                     </a:p>
                   </a:txBody>
                   <a:tcPr anchor="ctr">
@@ -16767,10 +17989,16 @@
                           <a:solidFill>
                             <a:srgbClr val="55544F"/>
                           </a:solidFill>
-                          <a:latin typeface="Segoe UI"/>
+                          <a:latin typeface="Segoe UI" panose="020B0502040204020203"/>
                         </a:rPr>
                         <a:t>43 km</a:t>
                       </a:r>
+                      <a:endParaRPr sz="850" b="0">
+                        <a:solidFill>
+                          <a:srgbClr val="55544F"/>
+                        </a:solidFill>
+                        <a:latin typeface="Segoe UI" panose="020B0502040204020203"/>
+                      </a:endParaRPr>
                     </a:p>
                   </a:txBody>
                   <a:tcPr anchor="ctr">
@@ -16791,10 +18019,16 @@
                           <a:solidFill>
                             <a:srgbClr val="12120F"/>
                           </a:solidFill>
-                          <a:latin typeface="Segoe UI"/>
+                          <a:latin typeface="Segoe UI" panose="020B0502040204020203"/>
                         </a:rPr>
                         <a:t>5</a:t>
                       </a:r>
+                      <a:endParaRPr sz="850" b="1">
+                        <a:solidFill>
+                          <a:srgbClr val="12120F"/>
+                        </a:solidFill>
+                        <a:latin typeface="Segoe UI" panose="020B0502040204020203"/>
+                      </a:endParaRPr>
                     </a:p>
                   </a:txBody>
                   <a:tcPr anchor="ctr">
@@ -16813,10 +18047,16 @@
                           <a:solidFill>
                             <a:srgbClr val="55544F"/>
                           </a:solidFill>
-                          <a:latin typeface="Segoe UI"/>
+                          <a:latin typeface="Segoe UI" panose="020B0502040204020203"/>
                         </a:rPr>
                         <a:t>Blitta</a:t>
                       </a:r>
+                      <a:endParaRPr sz="850" b="0">
+                        <a:solidFill>
+                          <a:srgbClr val="55544F"/>
+                        </a:solidFill>
+                        <a:latin typeface="Segoe UI" panose="020B0502040204020203"/>
+                      </a:endParaRPr>
                     </a:p>
                   </a:txBody>
                   <a:tcPr anchor="ctr">
@@ -16835,10 +18075,16 @@
                           <a:solidFill>
                             <a:srgbClr val="55544F"/>
                           </a:solidFill>
-                          <a:latin typeface="Segoe UI"/>
+                          <a:latin typeface="Segoe UI" panose="020B0502040204020203"/>
                         </a:rPr>
                         <a:t>163 272</a:t>
                       </a:r>
+                      <a:endParaRPr sz="850" b="0">
+                        <a:solidFill>
+                          <a:srgbClr val="55544F"/>
+                        </a:solidFill>
+                        <a:latin typeface="Segoe UI" panose="020B0502040204020203"/>
+                      </a:endParaRPr>
                     </a:p>
                   </a:txBody>
                   <a:tcPr anchor="ctr">
@@ -16857,10 +18103,16 @@
                           <a:solidFill>
                             <a:srgbClr val="55544F"/>
                           </a:solidFill>
-                          <a:latin typeface="Segoe UI"/>
+                          <a:latin typeface="Segoe UI" panose="020B0502040204020203"/>
                         </a:rPr>
                         <a:t>1 814</a:t>
                       </a:r>
+                      <a:endParaRPr sz="850" b="0">
+                        <a:solidFill>
+                          <a:srgbClr val="55544F"/>
+                        </a:solidFill>
+                        <a:latin typeface="Segoe UI" panose="020B0502040204020203"/>
+                      </a:endParaRPr>
                     </a:p>
                   </a:txBody>
                   <a:tcPr anchor="ctr">
@@ -16879,10 +18131,16 @@
                           <a:solidFill>
                             <a:srgbClr val="55544F"/>
                           </a:solidFill>
-                          <a:latin typeface="Segoe UI"/>
+                          <a:latin typeface="Segoe UI" panose="020B0502040204020203"/>
                         </a:rPr>
                         <a:t>2</a:t>
                       </a:r>
+                      <a:endParaRPr sz="850" b="0">
+                        <a:solidFill>
+                          <a:srgbClr val="55544F"/>
+                        </a:solidFill>
+                        <a:latin typeface="Segoe UI" panose="020B0502040204020203"/>
+                      </a:endParaRPr>
                     </a:p>
                   </a:txBody>
                   <a:tcPr anchor="ctr">
@@ -16901,10 +18159,16 @@
                           <a:solidFill>
                             <a:srgbClr val="55544F"/>
                           </a:solidFill>
-                          <a:latin typeface="Segoe UI"/>
+                          <a:latin typeface="Segoe UI" panose="020B0502040204020203"/>
                         </a:rPr>
                         <a:t>28 km</a:t>
                       </a:r>
+                      <a:endParaRPr sz="850" b="0">
+                        <a:solidFill>
+                          <a:srgbClr val="55544F"/>
+                        </a:solidFill>
+                        <a:latin typeface="Segoe UI" panose="020B0502040204020203"/>
+                      </a:endParaRPr>
                     </a:p>
                   </a:txBody>
                   <a:tcPr anchor="ctr">
@@ -16925,10 +18189,16 @@
                           <a:solidFill>
                             <a:srgbClr val="12120F"/>
                           </a:solidFill>
-                          <a:latin typeface="Segoe UI"/>
+                          <a:latin typeface="Segoe UI" panose="020B0502040204020203"/>
                         </a:rPr>
                         <a:t>6</a:t>
                       </a:r>
+                      <a:endParaRPr sz="850" b="1">
+                        <a:solidFill>
+                          <a:srgbClr val="12120F"/>
+                        </a:solidFill>
+                        <a:latin typeface="Segoe UI" panose="020B0502040204020203"/>
+                      </a:endParaRPr>
                     </a:p>
                   </a:txBody>
                   <a:tcPr anchor="ctr">
@@ -16947,10 +18217,16 @@
                           <a:solidFill>
                             <a:srgbClr val="55544F"/>
                           </a:solidFill>
-                          <a:latin typeface="Segoe UI"/>
+                          <a:latin typeface="Segoe UI" panose="020B0502040204020203"/>
                         </a:rPr>
                         <a:t>Wawa</a:t>
                       </a:r>
+                      <a:endParaRPr sz="850" b="0">
+                        <a:solidFill>
+                          <a:srgbClr val="55544F"/>
+                        </a:solidFill>
+                        <a:latin typeface="Segoe UI" panose="020B0502040204020203"/>
+                      </a:endParaRPr>
                     </a:p>
                   </a:txBody>
                   <a:tcPr anchor="ctr">
@@ -16969,10 +18245,16 @@
                           <a:solidFill>
                             <a:srgbClr val="55544F"/>
                           </a:solidFill>
-                          <a:latin typeface="Segoe UI"/>
+                          <a:latin typeface="Segoe UI" panose="020B0502040204020203"/>
                         </a:rPr>
                         <a:t>101 300</a:t>
                       </a:r>
+                      <a:endParaRPr sz="850" b="0">
+                        <a:solidFill>
+                          <a:srgbClr val="55544F"/>
+                        </a:solidFill>
+                        <a:latin typeface="Segoe UI" panose="020B0502040204020203"/>
+                      </a:endParaRPr>
                     </a:p>
                   </a:txBody>
                   <a:tcPr anchor="ctr">
@@ -16991,10 +18273,16 @@
                           <a:solidFill>
                             <a:srgbClr val="55544F"/>
                           </a:solidFill>
-                          <a:latin typeface="Segoe UI"/>
+                          <a:latin typeface="Segoe UI" panose="020B0502040204020203"/>
                         </a:rPr>
                         <a:t>415</a:t>
                       </a:r>
+                      <a:endParaRPr sz="850" b="0">
+                        <a:solidFill>
+                          <a:srgbClr val="55544F"/>
+                        </a:solidFill>
+                        <a:latin typeface="Segoe UI" panose="020B0502040204020203"/>
+                      </a:endParaRPr>
                     </a:p>
                   </a:txBody>
                   <a:tcPr anchor="ctr">
@@ -17013,10 +18301,16 @@
                           <a:solidFill>
                             <a:srgbClr val="55544F"/>
                           </a:solidFill>
-                          <a:latin typeface="Segoe UI"/>
+                          <a:latin typeface="Segoe UI" panose="020B0502040204020203"/>
                         </a:rPr>
                         <a:t>0</a:t>
                       </a:r>
+                      <a:endParaRPr sz="850" b="0">
+                        <a:solidFill>
+                          <a:srgbClr val="55544F"/>
+                        </a:solidFill>
+                        <a:latin typeface="Segoe UI" panose="020B0502040204020203"/>
+                      </a:endParaRPr>
                     </a:p>
                   </a:txBody>
                   <a:tcPr anchor="ctr">
@@ -17035,10 +18329,16 @@
                           <a:solidFill>
                             <a:srgbClr val="55544F"/>
                           </a:solidFill>
-                          <a:latin typeface="Segoe UI"/>
+                          <a:latin typeface="Segoe UI" panose="020B0502040204020203"/>
                         </a:rPr>
                         <a:t>44 km</a:t>
                       </a:r>
+                      <a:endParaRPr sz="850" b="0">
+                        <a:solidFill>
+                          <a:srgbClr val="55544F"/>
+                        </a:solidFill>
+                        <a:latin typeface="Segoe UI" panose="020B0502040204020203"/>
+                      </a:endParaRPr>
                     </a:p>
                   </a:txBody>
                   <a:tcPr anchor="ctr">
@@ -17069,7 +18369,7 @@
           <a:noFill/>
         </p:spPr>
         <p:txBody>
-          <a:bodyPr wrap="square" lIns="0" rIns="0" tIns="0" bIns="0">
+          <a:bodyPr wrap="square" lIns="0" tIns="0" rIns="0" bIns="0">
             <a:spAutoFit/>
           </a:bodyPr>
           <a:lstStyle/>
@@ -17084,10 +18384,16 @@
                 <a:solidFill>
                   <a:srgbClr val="55544F"/>
                 </a:solidFill>
-                <a:latin typeface="Segoe UI"/>
+                <a:latin typeface="Segoe UI" panose="020B0502040204020203"/>
               </a:rPr>
               <a:t>Corrélation de Spearman moyenne avec le classement de référence : 0,971 sur 2 000 pondérations aléatoires, plus huit variantes structurelles (retrait de chaque composante, poids égaux, normalisation par rang).</a:t>
             </a:r>
+            <a:endParaRPr sz="1000" b="0">
+              <a:solidFill>
+                <a:srgbClr val="55544F"/>
+              </a:solidFill>
+              <a:latin typeface="Segoe UI" panose="020B0502040204020203"/>
+            </a:endParaRPr>
           </a:p>
           <a:p>
             <a:pPr algn="l">
@@ -17095,15 +18401,6 @@
                 <a:spcPct val="132000"/>
               </a:lnSpc>
             </a:pPr>
-            <a:r>
-              <a:rPr sz="1000" b="0">
-                <a:solidFill>
-                  <a:srgbClr val="55544F"/>
-                </a:solidFill>
-                <a:latin typeface="Segoe UI"/>
-              </a:rPr>
-              <a:t/>
-            </a:r>
           </a:p>
           <a:p>
             <a:pPr algn="l">
@@ -17116,10 +18413,16 @@
                 <a:solidFill>
                   <a:srgbClr val="55544F"/>
                 </a:solidFill>
-                <a:latin typeface="Segoe UI"/>
+                <a:latin typeface="Segoe UI" panose="020B0502040204020203"/>
               </a:rPr>
               <a:t>Les territoires dont le rang dépend des pondérations ne sont pas présentés comme prioritaires.</a:t>
             </a:r>
+            <a:endParaRPr sz="1000" b="0">
+              <a:solidFill>
+                <a:srgbClr val="55544F"/>
+              </a:solidFill>
+              <a:latin typeface="Segoe UI" panose="020B0502040204020203"/>
+            </a:endParaRPr>
           </a:p>
         </p:txBody>
       </p:sp>
@@ -17132,7 +18435,7 @@
 </file>
 
 <file path=ppt/slides/slide9.xml><?xml version="1.0" encoding="utf-8"?>
-<p:sld xmlns:a="http://schemas.openxmlformats.org/drawingml/2006/main" xmlns:p="http://schemas.openxmlformats.org/presentationml/2006/main" xmlns:r="http://schemas.openxmlformats.org/officeDocument/2006/relationships">
+<p:sld xmlns:a="http://schemas.openxmlformats.org/drawingml/2006/main" xmlns:r="http://schemas.openxmlformats.org/officeDocument/2006/relationships" xmlns:p="http://schemas.openxmlformats.org/presentationml/2006/main">
   <p:cSld>
     <p:spTree>
       <p:nvGrpSpPr>
@@ -17334,7 +18637,7 @@
           <a:noFill/>
         </p:spPr>
         <p:txBody>
-          <a:bodyPr wrap="square" lIns="0" rIns="0" tIns="0" bIns="0">
+          <a:bodyPr wrap="square" lIns="0" tIns="0" rIns="0" bIns="0">
             <a:spAutoFit/>
           </a:bodyPr>
           <a:lstStyle/>
@@ -17349,10 +18652,16 @@
                 <a:solidFill>
                   <a:srgbClr val="8B8A84"/>
                 </a:solidFill>
-                <a:latin typeface="Consolas"/>
+                <a:latin typeface="Consolas" panose="020B0609020204030204"/>
               </a:rPr>
               <a:t>DÉCISION</a:t>
             </a:r>
+            <a:endParaRPr sz="900" b="1">
+              <a:solidFill>
+                <a:srgbClr val="8B8A84"/>
+              </a:solidFill>
+              <a:latin typeface="Consolas" panose="020B0609020204030204"/>
+            </a:endParaRPr>
           </a:p>
         </p:txBody>
       </p:sp>
@@ -17373,7 +18682,7 @@
           <a:noFill/>
         </p:spPr>
         <p:txBody>
-          <a:bodyPr wrap="square" lIns="0" rIns="0" tIns="0" bIns="0">
+          <a:bodyPr wrap="square" lIns="0" tIns="0" rIns="0" bIns="0">
             <a:spAutoFit/>
           </a:bodyPr>
           <a:lstStyle/>
@@ -17388,10 +18697,16 @@
                 <a:solidFill>
                   <a:srgbClr val="12120F"/>
                 </a:solidFill>
-                <a:latin typeface="Segoe UI"/>
+                <a:latin typeface="Segoe UI" panose="020B0502040204020203"/>
               </a:rPr>
               <a:t>Recommandations stratégiques</a:t>
             </a:r>
+            <a:endParaRPr sz="2800" b="1">
+              <a:solidFill>
+                <a:srgbClr val="12120F"/>
+              </a:solidFill>
+              <a:latin typeface="Segoe UI" panose="020B0502040204020203"/>
+            </a:endParaRPr>
           </a:p>
         </p:txBody>
       </p:sp>
@@ -17500,7 +18815,7 @@
           <a:noFill/>
         </p:spPr>
         <p:txBody>
-          <a:bodyPr wrap="square" lIns="0" rIns="0" tIns="0" bIns="0">
+          <a:bodyPr wrap="square" lIns="0" tIns="0" rIns="0" bIns="0">
             <a:spAutoFit/>
           </a:bodyPr>
           <a:lstStyle/>
@@ -17515,10 +18830,16 @@
                 <a:solidFill>
                   <a:srgbClr val="0F4D3B"/>
                 </a:solidFill>
-                <a:latin typeface="Segoe UI"/>
+                <a:latin typeface="Segoe UI" panose="020B0502040204020203"/>
               </a:rPr>
               <a:t>Cinq leviers, chacun déclenché par un seuil mesuré — aucune recommandation sans le chiffre qui la justifie.</a:t>
             </a:r>
+            <a:endParaRPr sz="1350" b="1">
+              <a:solidFill>
+                <a:srgbClr val="0F4D3B"/>
+              </a:solidFill>
+              <a:latin typeface="Segoe UI" panose="020B0502040204020203"/>
+            </a:endParaRPr>
           </a:p>
         </p:txBody>
       </p:sp>
@@ -17583,7 +18904,7 @@
           <a:noFill/>
         </p:spPr>
         <p:txBody>
-          <a:bodyPr wrap="square" lIns="0" rIns="0" tIns="0" bIns="0">
+          <a:bodyPr wrap="square" lIns="0" tIns="0" rIns="0" bIns="0">
             <a:spAutoFit/>
           </a:bodyPr>
           <a:lstStyle/>
@@ -17598,10 +18919,16 @@
                 <a:solidFill>
                   <a:srgbClr val="8B8A84"/>
                 </a:solidFill>
-                <a:latin typeface="Consolas"/>
+                <a:latin typeface="Consolas" panose="020B0609020204030204"/>
               </a:rPr>
               <a:t>République togolaise · Défi Économie numérique · Données ouvertes PRISE 2021-2022, RGPH-5 2022, COD-AB 2021</a:t>
             </a:r>
+            <a:endParaRPr sz="800" b="0">
+              <a:solidFill>
+                <a:srgbClr val="8B8A84"/>
+              </a:solidFill>
+              <a:latin typeface="Consolas" panose="020B0609020204030204"/>
+            </a:endParaRPr>
           </a:p>
         </p:txBody>
       </p:sp>
@@ -17622,7 +18949,7 @@
           <a:noFill/>
         </p:spPr>
         <p:txBody>
-          <a:bodyPr wrap="square" lIns="0" rIns="0" tIns="0" bIns="0">
+          <a:bodyPr wrap="square" lIns="0" tIns="0" rIns="0" bIns="0">
             <a:spAutoFit/>
           </a:bodyPr>
           <a:lstStyle/>
@@ -17637,10 +18964,16 @@
                 <a:solidFill>
                   <a:srgbClr val="8B8A84"/>
                 </a:solidFill>
-                <a:latin typeface="Consolas"/>
+                <a:latin typeface="Consolas" panose="020B0609020204030204"/>
               </a:rPr>
               <a:t>08 / 10</a:t>
             </a:r>
+            <a:endParaRPr sz="800" b="1">
+              <a:solidFill>
+                <a:srgbClr val="8B8A84"/>
+              </a:solidFill>
+              <a:latin typeface="Consolas" panose="020B0609020204030204"/>
+            </a:endParaRPr>
           </a:p>
         </p:txBody>
       </p:sp>
@@ -17653,7 +18986,7 @@
           <p:nvPr/>
         </p:nvPicPr>
         <p:blipFill>
-          <a:blip r:embed="rId2"/>
+          <a:blip r:embed="rId1"/>
           <a:stretch>
             <a:fillRect/>
           </a:stretch>
@@ -17729,7 +19062,7 @@
           <a:noFill/>
         </p:spPr>
         <p:txBody>
-          <a:bodyPr wrap="square" lIns="0" rIns="0" tIns="0" bIns="0">
+          <a:bodyPr wrap="square" lIns="0" tIns="0" rIns="0" bIns="0">
             <a:spAutoFit/>
           </a:bodyPr>
           <a:lstStyle/>
@@ -17744,10 +19077,16 @@
                 <a:solidFill>
                   <a:srgbClr val="12120F"/>
                 </a:solidFill>
-                <a:latin typeface="Segoe UI"/>
+                <a:latin typeface="Segoe UI" panose="020B0502040204020203"/>
               </a:rPr>
               <a:t>Densifier le réseau d'agents Mobile Money — levier rapide</a:t>
             </a:r>
+            <a:endParaRPr sz="1100" b="1">
+              <a:solidFill>
+                <a:srgbClr val="12120F"/>
+              </a:solidFill>
+              <a:latin typeface="Segoe UI" panose="020B0502040204020203"/>
+            </a:endParaRPr>
           </a:p>
         </p:txBody>
       </p:sp>
@@ -17768,7 +19107,7 @@
           <a:noFill/>
         </p:spPr>
         <p:txBody>
-          <a:bodyPr wrap="square" lIns="0" rIns="0" tIns="0" bIns="0">
+          <a:bodyPr wrap="square" lIns="0" tIns="0" rIns="0" bIns="0">
             <a:spAutoFit/>
           </a:bodyPr>
           <a:lstStyle/>
@@ -17783,10 +19122,16 @@
                 <a:solidFill>
                   <a:srgbClr val="55544F"/>
                 </a:solidFill>
-                <a:latin typeface="Segoe UI"/>
+                <a:latin typeface="Segoe UI" panose="020B0502040204020203"/>
               </a:rPr>
               <a:t>Déclencheur : plus de 800 habitants par point. S'appuie sur des commerces existants, sans construction.</a:t>
             </a:r>
+            <a:endParaRPr sz="950" b="0">
+              <a:solidFill>
+                <a:srgbClr val="55544F"/>
+              </a:solidFill>
+              <a:latin typeface="Segoe UI" panose="020B0502040204020203"/>
+            </a:endParaRPr>
           </a:p>
         </p:txBody>
       </p:sp>
@@ -17851,7 +19196,7 @@
           <a:noFill/>
         </p:spPr>
         <p:txBody>
-          <a:bodyPr wrap="square" lIns="0" rIns="0" tIns="0" bIns="0">
+          <a:bodyPr wrap="square" lIns="0" tIns="0" rIns="0" bIns="0">
             <a:spAutoFit/>
           </a:bodyPr>
           <a:lstStyle/>
@@ -17866,10 +19211,16 @@
                 <a:solidFill>
                   <a:srgbClr val="12120F"/>
                 </a:solidFill>
-                <a:latin typeface="Segoe UI"/>
+                <a:latin typeface="Segoe UI" panose="020B0502040204020203"/>
               </a:rPr>
               <a:t>Implanter un point de présence opérateur — levier structurel</a:t>
             </a:r>
+            <a:endParaRPr sz="1100" b="1">
+              <a:solidFill>
+                <a:srgbClr val="12120F"/>
+              </a:solidFill>
+              <a:latin typeface="Segoe UI" panose="020B0502040204020203"/>
+            </a:endParaRPr>
           </a:p>
         </p:txBody>
       </p:sp>
@@ -17890,7 +19241,7 @@
           <a:noFill/>
         </p:spPr>
         <p:txBody>
-          <a:bodyPr wrap="square" lIns="0" rIns="0" tIns="0" bIns="0">
+          <a:bodyPr wrap="square" lIns="0" tIns="0" rIns="0" bIns="0">
             <a:spAutoFit/>
           </a:bodyPr>
           <a:lstStyle/>
@@ -17905,10 +19256,16 @@
                 <a:solidFill>
                   <a:srgbClr val="55544F"/>
                 </a:solidFill>
-                <a:latin typeface="Segoe UI"/>
+                <a:latin typeface="Segoe UI" panose="020B0502040204020203"/>
               </a:rPr>
               <a:t>Déclencheur : aucune agence active. Seul levier créant un guichet là où il n'en existe aucun.</a:t>
             </a:r>
+            <a:endParaRPr sz="950" b="0">
+              <a:solidFill>
+                <a:srgbClr val="55544F"/>
+              </a:solidFill>
+              <a:latin typeface="Segoe UI" panose="020B0502040204020203"/>
+            </a:endParaRPr>
           </a:p>
         </p:txBody>
       </p:sp>
@@ -17973,7 +19330,7 @@
           <a:noFill/>
         </p:spPr>
         <p:txBody>
-          <a:bodyPr wrap="square" lIns="0" rIns="0" tIns="0" bIns="0">
+          <a:bodyPr wrap="square" lIns="0" tIns="0" rIns="0" bIns="0">
             <a:spAutoFit/>
           </a:bodyPr>
           <a:lstStyle/>
@@ -17988,10 +19345,16 @@
                 <a:solidFill>
                   <a:srgbClr val="12120F"/>
                 </a:solidFill>
-                <a:latin typeface="Segoe UI"/>
+                <a:latin typeface="Segoe UI" panose="020B0502040204020203"/>
               </a:rPr>
               <a:t>Répartir le maillage plutôt qu'un point unique</a:t>
             </a:r>
+            <a:endParaRPr sz="1100" b="1">
+              <a:solidFill>
+                <a:srgbClr val="12120F"/>
+              </a:solidFill>
+              <a:latin typeface="Segoe UI" panose="020B0502040204020203"/>
+            </a:endParaRPr>
           </a:p>
         </p:txBody>
       </p:sp>
@@ -18012,7 +19375,7 @@
           <a:noFill/>
         </p:spPr>
         <p:txBody>
-          <a:bodyPr wrap="square" lIns="0" rIns="0" tIns="0" bIns="0">
+          <a:bodyPr wrap="square" lIns="0" tIns="0" rIns="0" bIns="0">
             <a:spAutoFit/>
           </a:bodyPr>
           <a:lstStyle/>
@@ -18027,10 +19390,16 @@
                 <a:solidFill>
                   <a:srgbClr val="55544F"/>
                 </a:solidFill>
-                <a:latin typeface="Segoe UI"/>
+                <a:latin typeface="Segoe UI" panose="020B0502040204020203"/>
               </a:rPr>
               <a:t>Déclencheur : 25 km ou plus jusqu'à une agence. Quand l'éloignement domine, un guichet au chef-lieu ne règle rien.</a:t>
             </a:r>
+            <a:endParaRPr sz="950" b="0">
+              <a:solidFill>
+                <a:srgbClr val="55544F"/>
+              </a:solidFill>
+              <a:latin typeface="Segoe UI" panose="020B0502040204020203"/>
+            </a:endParaRPr>
           </a:p>
         </p:txBody>
       </p:sp>
@@ -18095,7 +19464,7 @@
           <a:noFill/>
         </p:spPr>
         <p:txBody>
-          <a:bodyPr wrap="square" lIns="0" rIns="0" tIns="0" bIns="0">
+          <a:bodyPr wrap="square" lIns="0" tIns="0" rIns="0" bIns="0">
             <a:spAutoFit/>
           </a:bodyPr>
           <a:lstStyle/>
@@ -18110,10 +19479,16 @@
                 <a:solidFill>
                   <a:srgbClr val="12120F"/>
                 </a:solidFill>
-                <a:latin typeface="Segoe UI"/>
+                <a:latin typeface="Segoe UI" panose="020B0502040204020203"/>
               </a:rPr>
               <a:t>Ouvrir la concurrence entre opérateurs</a:t>
             </a:r>
+            <a:endParaRPr sz="1100" b="1">
+              <a:solidFill>
+                <a:srgbClr val="12120F"/>
+              </a:solidFill>
+              <a:latin typeface="Segoe UI" panose="020B0502040204020203"/>
+            </a:endParaRPr>
           </a:p>
         </p:txBody>
       </p:sp>
@@ -18134,7 +19509,7 @@
           <a:noFill/>
         </p:spPr>
         <p:txBody>
-          <a:bodyPr wrap="square" lIns="0" rIns="0" tIns="0" bIns="0">
+          <a:bodyPr wrap="square" lIns="0" tIns="0" rIns="0" bIns="0">
             <a:spAutoFit/>
           </a:bodyPr>
           <a:lstStyle/>
@@ -18149,10 +19524,16 @@
                 <a:solidFill>
                   <a:srgbClr val="55544F"/>
                 </a:solidFill>
-                <a:latin typeface="Segoe UI"/>
+                <a:latin typeface="Segoe UI" panose="020B0502040204020203"/>
               </a:rPr>
               <a:t>Déclencheur : un seul opérateur présent. 4 773 points ne servent que Togocom contre 1 018 pour Moov seul.</a:t>
             </a:r>
+            <a:endParaRPr sz="950" b="0">
+              <a:solidFill>
+                <a:srgbClr val="55544F"/>
+              </a:solidFill>
+              <a:latin typeface="Segoe UI" panose="020B0502040204020203"/>
+            </a:endParaRPr>
           </a:p>
         </p:txBody>
       </p:sp>
@@ -18263,7 +19644,7 @@
           <a:noFill/>
         </p:spPr>
         <p:txBody>
-          <a:bodyPr wrap="square" lIns="0" rIns="0" tIns="0" bIns="0">
+          <a:bodyPr wrap="square" lIns="0" tIns="0" rIns="0" bIns="0">
             <a:spAutoFit/>
           </a:bodyPr>
           <a:lstStyle/>
@@ -18278,10 +19659,16 @@
                 <a:solidFill>
                   <a:srgbClr val="55544F"/>
                 </a:solidFill>
-                <a:latin typeface="Segoe UI"/>
+                <a:latin typeface="Segoe UI" panose="020B0502040204020203"/>
               </a:rPr>
               <a:t>Les 9 territoires prioritaires représentent 1 080 723 habitants, soit 13% de la population nationale.</a:t>
             </a:r>
+            <a:endParaRPr sz="1000" b="0">
+              <a:solidFill>
+                <a:srgbClr val="55544F"/>
+              </a:solidFill>
+              <a:latin typeface="Segoe UI" panose="020B0502040204020203"/>
+            </a:endParaRPr>
           </a:p>
           <a:p>
             <a:pPr algn="l">
@@ -18294,10 +19681,16 @@
                 <a:solidFill>
                   <a:srgbClr val="55544F"/>
                 </a:solidFill>
-                <a:latin typeface="Segoe UI"/>
+                <a:latin typeface="Segoe UI" panose="020B0502040204020203"/>
               </a:rPr>
               <a:t>Un même territoire peut relever de plusieurs leviers : les populations ne s'additionnent pas d'un levier à l'autre.</a:t>
             </a:r>
+            <a:endParaRPr sz="1000" b="0">
+              <a:solidFill>
+                <a:srgbClr val="55544F"/>
+              </a:solidFill>
+              <a:latin typeface="Segoe UI" panose="020B0502040204020203"/>
+            </a:endParaRPr>
           </a:p>
         </p:txBody>
       </p:sp>
@@ -18625,6 +20018,10 @@
       </a:style>
     </a:lnDef>
   </a:objectDefaults>
-  <a:extraClrSchemeLst/>
+  <a:extLst>
+    <a:ext uri="{05A4C25C-085E-4340-85A3-A5531E510DB2}">
+      <thm15:themeFamily xmlns:thm15="http://schemas.microsoft.com/office/thememl/2012/main" name="Office Theme" id="{62F939B6-93AF-4DB8-9C6B-D6C7DFDC589F}" vid="{4A3C46E8-61CC-4603-A589-7422A47A8E4A}"/>
+    </a:ext>
+  </a:extLst>
 </a:theme>
 </file>
--- a/reports/Defi1_Togo_Connectivite_numerique.pptx
+++ b/reports/Defi1_Togo_Connectivite_numerique.pptx
@@ -1,22 +1,22 @@
 
 <file path=ppt/presentation.xml><?xml version="1.0" encoding="utf-8"?>
-<p:presentation xmlns:a="http://schemas.openxmlformats.org/drawingml/2006/main" xmlns:r="http://schemas.openxmlformats.org/officeDocument/2006/relationships" xmlns:p="http://schemas.openxmlformats.org/presentationml/2006/main" saveSubsetFonts="1" autoCompressPictures="0">
+<p:presentation xmlns:a="http://schemas.openxmlformats.org/drawingml/2006/main" xmlns:r="http://schemas.openxmlformats.org/officeDocument/2006/relationships" xmlns:p="http://schemas.openxmlformats.org/presentationml/2006/main" autoCompressPictures="0">
   <p:sldMasterIdLst>
     <p:sldMasterId id="2147483648" r:id="rId1"/>
   </p:sldMasterIdLst>
   <p:sldIdLst>
-    <p:sldId id="256" r:id="rId7"/>
-    <p:sldId id="257" r:id="rId8"/>
-    <p:sldId id="258" r:id="rId9"/>
-    <p:sldId id="259" r:id="rId10"/>
-    <p:sldId id="260" r:id="rId11"/>
-    <p:sldId id="261" r:id="rId12"/>
-    <p:sldId id="262" r:id="rId13"/>
-    <p:sldId id="263" r:id="rId14"/>
-    <p:sldId id="264" r:id="rId15"/>
-    <p:sldId id="265" r:id="rId16"/>
+    <p:sldId id="256" r:id="rId3"/>
+    <p:sldId id="257" r:id="rId4"/>
+    <p:sldId id="258" r:id="rId5"/>
+    <p:sldId id="259" r:id="rId6"/>
+    <p:sldId id="260" r:id="rId7"/>
+    <p:sldId id="261" r:id="rId8"/>
+    <p:sldId id="262" r:id="rId9"/>
+    <p:sldId id="263" r:id="rId10"/>
+    <p:sldId id="264" r:id="rId11"/>
+    <p:sldId id="265" r:id="rId12"/>
   </p:sldIdLst>
-  <p:sldSz cx="12191695" cy="6858000" type="screen4x3"/>
+  <p:sldSz cx="12191365" cy="6858000" type="screen4x3"/>
   <p:notesSz cx="6858000" cy="9144000"/>
   <p:defaultTextStyle>
     <a:defPPr>
@@ -113,6 +113,22 @@
       </a:defRPr>
     </a:lvl9pPr>
   </p:defaultTextStyle>
+  <p:extLst>
+    <p:ext uri="{EFAFB233-063F-42B5-8137-9DF3F51BA10A}">
+      <p15:sldGuideLst xmlns:p15="http://schemas.microsoft.com/office/powerpoint/2012/main">
+        <p15:guide id="1" orient="horz" pos="2160" userDrawn="1">
+          <p15:clr>
+            <a:srgbClr val="A4A3A4"/>
+          </p15:clr>
+        </p15:guide>
+        <p15:guide id="2" pos="2880" userDrawn="1">
+          <p15:clr>
+            <a:srgbClr val="A4A3A4"/>
+          </p15:clr>
+        </p15:guide>
+      </p15:sldGuideLst>
+    </p:ext>
+  </p:extLst>
 </p:presentation>
 </file>
 
@@ -297,7 +313,6 @@
           <a:p>
             <a:fld id="{5BCAD085-E8A6-8845-BD4E-CB4CCA059FC4}" type="datetimeFigureOut">
               <a:rPr lang="en-US" smtClean="0"/>
-              <a:t>1/27/13</a:t>
             </a:fld>
             <a:endParaRPr lang="en-US"/>
           </a:p>
@@ -339,18 +354,12 @@
           <a:p>
             <a:fld id="{C1FF6DA9-008F-8B48-92A6-B652298478BF}" type="slidenum">
               <a:rPr lang="en-US" smtClean="0"/>
-              <a:t>‹#›</a:t>
             </a:fld>
             <a:endParaRPr lang="en-US"/>
           </a:p>
         </p:txBody>
       </p:sp>
     </p:spTree>
-    <p:extLst>
-      <p:ext uri="{BB962C8B-B14F-4D97-AF65-F5344CB8AC3E}">
-        <p14:creationId xmlns:p14="http://schemas.microsoft.com/office/powerpoint/2010/main" val="3168075583"/>
-      </p:ext>
-    </p:extLst>
   </p:cSld>
   <p:clrMapOvr>
     <a:masterClrMapping/>
@@ -418,6 +427,7 @@
               <a:rPr lang="en-US" smtClean="0"/>
               <a:t>Click to edit Master text styles</a:t>
             </a:r>
+            <a:endParaRPr lang="en-US" smtClean="0"/>
           </a:p>
           <a:p>
             <a:pPr lvl="1"/>
@@ -425,6 +435,7 @@
               <a:rPr lang="en-US" smtClean="0"/>
               <a:t>Second level</a:t>
             </a:r>
+            <a:endParaRPr lang="en-US" smtClean="0"/>
           </a:p>
           <a:p>
             <a:pPr lvl="2"/>
@@ -432,6 +443,7 @@
               <a:rPr lang="en-US" smtClean="0"/>
               <a:t>Third level</a:t>
             </a:r>
+            <a:endParaRPr lang="en-US" smtClean="0"/>
           </a:p>
           <a:p>
             <a:pPr lvl="3"/>
@@ -439,6 +451,7 @@
               <a:rPr lang="en-US" smtClean="0"/>
               <a:t>Fourth level</a:t>
             </a:r>
+            <a:endParaRPr lang="en-US" smtClean="0"/>
           </a:p>
           <a:p>
             <a:pPr lvl="4"/>
@@ -467,7 +480,6 @@
           <a:p>
             <a:fld id="{5BCAD085-E8A6-8845-BD4E-CB4CCA059FC4}" type="datetimeFigureOut">
               <a:rPr lang="en-US" smtClean="0"/>
-              <a:t>1/27/13</a:t>
             </a:fld>
             <a:endParaRPr lang="en-US"/>
           </a:p>
@@ -509,18 +521,12 @@
           <a:p>
             <a:fld id="{C1FF6DA9-008F-8B48-92A6-B652298478BF}" type="slidenum">
               <a:rPr lang="en-US" smtClean="0"/>
-              <a:t>‹#›</a:t>
             </a:fld>
             <a:endParaRPr lang="en-US"/>
           </a:p>
         </p:txBody>
       </p:sp>
     </p:spTree>
-    <p:extLst>
-      <p:ext uri="{BB962C8B-B14F-4D97-AF65-F5344CB8AC3E}">
-        <p14:creationId xmlns:p14="http://schemas.microsoft.com/office/powerpoint/2010/main" val="2910927964"/>
-      </p:ext>
-    </p:extLst>
   </p:cSld>
   <p:clrMapOvr>
     <a:masterClrMapping/>
@@ -598,6 +604,7 @@
               <a:rPr lang="en-US" smtClean="0"/>
               <a:t>Click to edit Master text styles</a:t>
             </a:r>
+            <a:endParaRPr lang="en-US" smtClean="0"/>
           </a:p>
           <a:p>
             <a:pPr lvl="1"/>
@@ -605,6 +612,7 @@
               <a:rPr lang="en-US" smtClean="0"/>
               <a:t>Second level</a:t>
             </a:r>
+            <a:endParaRPr lang="en-US" smtClean="0"/>
           </a:p>
           <a:p>
             <a:pPr lvl="2"/>
@@ -612,6 +620,7 @@
               <a:rPr lang="en-US" smtClean="0"/>
               <a:t>Third level</a:t>
             </a:r>
+            <a:endParaRPr lang="en-US" smtClean="0"/>
           </a:p>
           <a:p>
             <a:pPr lvl="3"/>
@@ -619,6 +628,7 @@
               <a:rPr lang="en-US" smtClean="0"/>
               <a:t>Fourth level</a:t>
             </a:r>
+            <a:endParaRPr lang="en-US" smtClean="0"/>
           </a:p>
           <a:p>
             <a:pPr lvl="4"/>
@@ -647,7 +657,6 @@
           <a:p>
             <a:fld id="{5BCAD085-E8A6-8845-BD4E-CB4CCA059FC4}" type="datetimeFigureOut">
               <a:rPr lang="en-US" smtClean="0"/>
-              <a:t>1/27/13</a:t>
             </a:fld>
             <a:endParaRPr lang="en-US"/>
           </a:p>
@@ -689,18 +698,12 @@
           <a:p>
             <a:fld id="{C1FF6DA9-008F-8B48-92A6-B652298478BF}" type="slidenum">
               <a:rPr lang="en-US" smtClean="0"/>
-              <a:t>‹#›</a:t>
             </a:fld>
             <a:endParaRPr lang="en-US"/>
           </a:p>
         </p:txBody>
       </p:sp>
     </p:spTree>
-    <p:extLst>
-      <p:ext uri="{BB962C8B-B14F-4D97-AF65-F5344CB8AC3E}">
-        <p14:creationId xmlns:p14="http://schemas.microsoft.com/office/powerpoint/2010/main" val="3612223792"/>
-      </p:ext>
-    </p:extLst>
   </p:cSld>
   <p:clrMapOvr>
     <a:masterClrMapping/>
@@ -768,6 +771,7 @@
               <a:rPr lang="en-US" smtClean="0"/>
               <a:t>Click to edit Master text styles</a:t>
             </a:r>
+            <a:endParaRPr lang="en-US" smtClean="0"/>
           </a:p>
           <a:p>
             <a:pPr lvl="1"/>
@@ -775,6 +779,7 @@
               <a:rPr lang="en-US" smtClean="0"/>
               <a:t>Second level</a:t>
             </a:r>
+            <a:endParaRPr lang="en-US" smtClean="0"/>
           </a:p>
           <a:p>
             <a:pPr lvl="2"/>
@@ -782,6 +787,7 @@
               <a:rPr lang="en-US" smtClean="0"/>
               <a:t>Third level</a:t>
             </a:r>
+            <a:endParaRPr lang="en-US" smtClean="0"/>
           </a:p>
           <a:p>
             <a:pPr lvl="3"/>
@@ -789,6 +795,7 @@
               <a:rPr lang="en-US" smtClean="0"/>
               <a:t>Fourth level</a:t>
             </a:r>
+            <a:endParaRPr lang="en-US" smtClean="0"/>
           </a:p>
           <a:p>
             <a:pPr lvl="4"/>
@@ -817,7 +824,6 @@
           <a:p>
             <a:fld id="{5BCAD085-E8A6-8845-BD4E-CB4CCA059FC4}" type="datetimeFigureOut">
               <a:rPr lang="en-US" smtClean="0"/>
-              <a:t>1/27/13</a:t>
             </a:fld>
             <a:endParaRPr lang="en-US"/>
           </a:p>
@@ -859,18 +865,12 @@
           <a:p>
             <a:fld id="{C1FF6DA9-008F-8B48-92A6-B652298478BF}" type="slidenum">
               <a:rPr lang="en-US" smtClean="0"/>
-              <a:t>‹#›</a:t>
             </a:fld>
             <a:endParaRPr lang="en-US"/>
           </a:p>
         </p:txBody>
       </p:sp>
     </p:spTree>
-    <p:extLst>
-      <p:ext uri="{BB962C8B-B14F-4D97-AF65-F5344CB8AC3E}">
-        <p14:creationId xmlns:p14="http://schemas.microsoft.com/office/powerpoint/2010/main" val="2614314258"/>
-      </p:ext>
-    </p:extLst>
   </p:cSld>
   <p:clrMapOvr>
     <a:masterClrMapping/>
@@ -1043,6 +1043,7 @@
               <a:rPr lang="en-US" smtClean="0"/>
               <a:t>Click to edit Master text styles</a:t>
             </a:r>
+            <a:endParaRPr lang="en-US" smtClean="0"/>
           </a:p>
         </p:txBody>
       </p:sp>
@@ -1063,7 +1064,6 @@
           <a:p>
             <a:fld id="{5BCAD085-E8A6-8845-BD4E-CB4CCA059FC4}" type="datetimeFigureOut">
               <a:rPr lang="en-US" smtClean="0"/>
-              <a:t>1/27/13</a:t>
             </a:fld>
             <a:endParaRPr lang="en-US"/>
           </a:p>
@@ -1105,18 +1105,12 @@
           <a:p>
             <a:fld id="{C1FF6DA9-008F-8B48-92A6-B652298478BF}" type="slidenum">
               <a:rPr lang="en-US" smtClean="0"/>
-              <a:t>‹#›</a:t>
             </a:fld>
             <a:endParaRPr lang="en-US"/>
           </a:p>
         </p:txBody>
       </p:sp>
     </p:spTree>
-    <p:extLst>
-      <p:ext uri="{BB962C8B-B14F-4D97-AF65-F5344CB8AC3E}">
-        <p14:creationId xmlns:p14="http://schemas.microsoft.com/office/powerpoint/2010/main" val="960648375"/>
-      </p:ext>
-    </p:extLst>
   </p:cSld>
   <p:clrMapOvr>
     <a:masterClrMapping/>
@@ -1217,6 +1211,7 @@
               <a:rPr lang="en-US" smtClean="0"/>
               <a:t>Click to edit Master text styles</a:t>
             </a:r>
+            <a:endParaRPr lang="en-US" smtClean="0"/>
           </a:p>
           <a:p>
             <a:pPr lvl="1"/>
@@ -1224,6 +1219,7 @@
               <a:rPr lang="en-US" smtClean="0"/>
               <a:t>Second level</a:t>
             </a:r>
+            <a:endParaRPr lang="en-US" smtClean="0"/>
           </a:p>
           <a:p>
             <a:pPr lvl="2"/>
@@ -1231,6 +1227,7 @@
               <a:rPr lang="en-US" smtClean="0"/>
               <a:t>Third level</a:t>
             </a:r>
+            <a:endParaRPr lang="en-US" smtClean="0"/>
           </a:p>
           <a:p>
             <a:pPr lvl="3"/>
@@ -1238,6 +1235,7 @@
               <a:rPr lang="en-US" smtClean="0"/>
               <a:t>Fourth level</a:t>
             </a:r>
+            <a:endParaRPr lang="en-US" smtClean="0"/>
           </a:p>
           <a:p>
             <a:pPr lvl="4"/>
@@ -1302,6 +1300,7 @@
               <a:rPr lang="en-US" smtClean="0"/>
               <a:t>Click to edit Master text styles</a:t>
             </a:r>
+            <a:endParaRPr lang="en-US" smtClean="0"/>
           </a:p>
           <a:p>
             <a:pPr lvl="1"/>
@@ -1309,6 +1308,7 @@
               <a:rPr lang="en-US" smtClean="0"/>
               <a:t>Second level</a:t>
             </a:r>
+            <a:endParaRPr lang="en-US" smtClean="0"/>
           </a:p>
           <a:p>
             <a:pPr lvl="2"/>
@@ -1316,6 +1316,7 @@
               <a:rPr lang="en-US" smtClean="0"/>
               <a:t>Third level</a:t>
             </a:r>
+            <a:endParaRPr lang="en-US" smtClean="0"/>
           </a:p>
           <a:p>
             <a:pPr lvl="3"/>
@@ -1323,6 +1324,7 @@
               <a:rPr lang="en-US" smtClean="0"/>
               <a:t>Fourth level</a:t>
             </a:r>
+            <a:endParaRPr lang="en-US" smtClean="0"/>
           </a:p>
           <a:p>
             <a:pPr lvl="4"/>
@@ -1351,7 +1353,6 @@
           <a:p>
             <a:fld id="{5BCAD085-E8A6-8845-BD4E-CB4CCA059FC4}" type="datetimeFigureOut">
               <a:rPr lang="en-US" smtClean="0"/>
-              <a:t>1/27/13</a:t>
             </a:fld>
             <a:endParaRPr lang="en-US"/>
           </a:p>
@@ -1393,18 +1394,12 @@
           <a:p>
             <a:fld id="{C1FF6DA9-008F-8B48-92A6-B652298478BF}" type="slidenum">
               <a:rPr lang="en-US" smtClean="0"/>
-              <a:t>‹#›</a:t>
             </a:fld>
             <a:endParaRPr lang="en-US"/>
           </a:p>
         </p:txBody>
       </p:sp>
     </p:spTree>
-    <p:extLst>
-      <p:ext uri="{BB962C8B-B14F-4D97-AF65-F5344CB8AC3E}">
-        <p14:creationId xmlns:p14="http://schemas.microsoft.com/office/powerpoint/2010/main" val="2782244947"/>
-      </p:ext>
-    </p:extLst>
   </p:cSld>
   <p:clrMapOvr>
     <a:masterClrMapping/>
@@ -1518,6 +1513,7 @@
               <a:rPr lang="en-US" smtClean="0"/>
               <a:t>Click to edit Master text styles</a:t>
             </a:r>
+            <a:endParaRPr lang="en-US" smtClean="0"/>
           </a:p>
         </p:txBody>
       </p:sp>
@@ -1574,6 +1570,7 @@
               <a:rPr lang="en-US" smtClean="0"/>
               <a:t>Click to edit Master text styles</a:t>
             </a:r>
+            <a:endParaRPr lang="en-US" smtClean="0"/>
           </a:p>
           <a:p>
             <a:pPr lvl="1"/>
@@ -1581,6 +1578,7 @@
               <a:rPr lang="en-US" smtClean="0"/>
               <a:t>Second level</a:t>
             </a:r>
+            <a:endParaRPr lang="en-US" smtClean="0"/>
           </a:p>
           <a:p>
             <a:pPr lvl="2"/>
@@ -1588,6 +1586,7 @@
               <a:rPr lang="en-US" smtClean="0"/>
               <a:t>Third level</a:t>
             </a:r>
+            <a:endParaRPr lang="en-US" smtClean="0"/>
           </a:p>
           <a:p>
             <a:pPr lvl="3"/>
@@ -1595,6 +1594,7 @@
               <a:rPr lang="en-US" smtClean="0"/>
               <a:t>Fourth level</a:t>
             </a:r>
+            <a:endParaRPr lang="en-US" smtClean="0"/>
           </a:p>
           <a:p>
             <a:pPr lvl="4"/>
@@ -1668,6 +1668,7 @@
               <a:rPr lang="en-US" smtClean="0"/>
               <a:t>Click to edit Master text styles</a:t>
             </a:r>
+            <a:endParaRPr lang="en-US" smtClean="0"/>
           </a:p>
         </p:txBody>
       </p:sp>
@@ -1724,6 +1725,7 @@
               <a:rPr lang="en-US" smtClean="0"/>
               <a:t>Click to edit Master text styles</a:t>
             </a:r>
+            <a:endParaRPr lang="en-US" smtClean="0"/>
           </a:p>
           <a:p>
             <a:pPr lvl="1"/>
@@ -1731,6 +1733,7 @@
               <a:rPr lang="en-US" smtClean="0"/>
               <a:t>Second level</a:t>
             </a:r>
+            <a:endParaRPr lang="en-US" smtClean="0"/>
           </a:p>
           <a:p>
             <a:pPr lvl="2"/>
@@ -1738,6 +1741,7 @@
               <a:rPr lang="en-US" smtClean="0"/>
               <a:t>Third level</a:t>
             </a:r>
+            <a:endParaRPr lang="en-US" smtClean="0"/>
           </a:p>
           <a:p>
             <a:pPr lvl="3"/>
@@ -1745,6 +1749,7 @@
               <a:rPr lang="en-US" smtClean="0"/>
               <a:t>Fourth level</a:t>
             </a:r>
+            <a:endParaRPr lang="en-US" smtClean="0"/>
           </a:p>
           <a:p>
             <a:pPr lvl="4"/>
@@ -1773,7 +1778,6 @@
           <a:p>
             <a:fld id="{5BCAD085-E8A6-8845-BD4E-CB4CCA059FC4}" type="datetimeFigureOut">
               <a:rPr lang="en-US" smtClean="0"/>
-              <a:t>1/27/13</a:t>
             </a:fld>
             <a:endParaRPr lang="en-US"/>
           </a:p>
@@ -1815,18 +1819,12 @@
           <a:p>
             <a:fld id="{C1FF6DA9-008F-8B48-92A6-B652298478BF}" type="slidenum">
               <a:rPr lang="en-US" smtClean="0"/>
-              <a:t>‹#›</a:t>
             </a:fld>
             <a:endParaRPr lang="en-US"/>
           </a:p>
         </p:txBody>
       </p:sp>
     </p:spTree>
-    <p:extLst>
-      <p:ext uri="{BB962C8B-B14F-4D97-AF65-F5344CB8AC3E}">
-        <p14:creationId xmlns:p14="http://schemas.microsoft.com/office/powerpoint/2010/main" val="990158736"/>
-      </p:ext>
-    </p:extLst>
   </p:cSld>
   <p:clrMapOvr>
     <a:masterClrMapping/>
@@ -1891,7 +1889,6 @@
           <a:p>
             <a:fld id="{5BCAD085-E8A6-8845-BD4E-CB4CCA059FC4}" type="datetimeFigureOut">
               <a:rPr lang="en-US" smtClean="0"/>
-              <a:t>1/27/13</a:t>
             </a:fld>
             <a:endParaRPr lang="en-US"/>
           </a:p>
@@ -1933,18 +1930,12 @@
           <a:p>
             <a:fld id="{C1FF6DA9-008F-8B48-92A6-B652298478BF}" type="slidenum">
               <a:rPr lang="en-US" smtClean="0"/>
-              <a:t>‹#›</a:t>
             </a:fld>
             <a:endParaRPr lang="en-US"/>
           </a:p>
         </p:txBody>
       </p:sp>
     </p:spTree>
-    <p:extLst>
-      <p:ext uri="{BB962C8B-B14F-4D97-AF65-F5344CB8AC3E}">
-        <p14:creationId xmlns:p14="http://schemas.microsoft.com/office/powerpoint/2010/main" val="727027711"/>
-      </p:ext>
-    </p:extLst>
   </p:cSld>
   <p:clrMapOvr>
     <a:masterClrMapping/>
@@ -1986,7 +1977,6 @@
           <a:p>
             <a:fld id="{5BCAD085-E8A6-8845-BD4E-CB4CCA059FC4}" type="datetimeFigureOut">
               <a:rPr lang="en-US" smtClean="0"/>
-              <a:t>1/27/13</a:t>
             </a:fld>
             <a:endParaRPr lang="en-US"/>
           </a:p>
@@ -2028,18 +2018,12 @@
           <a:p>
             <a:fld id="{C1FF6DA9-008F-8B48-92A6-B652298478BF}" type="slidenum">
               <a:rPr lang="en-US" smtClean="0"/>
-              <a:t>‹#›</a:t>
             </a:fld>
             <a:endParaRPr lang="en-US"/>
           </a:p>
         </p:txBody>
       </p:sp>
     </p:spTree>
-    <p:extLst>
-      <p:ext uri="{BB962C8B-B14F-4D97-AF65-F5344CB8AC3E}">
-        <p14:creationId xmlns:p14="http://schemas.microsoft.com/office/powerpoint/2010/main" val="1212999818"/>
-      </p:ext>
-    </p:extLst>
   </p:cSld>
   <p:clrMapOvr>
     <a:masterClrMapping/>
@@ -2149,6 +2133,7 @@
               <a:rPr lang="en-US" smtClean="0"/>
               <a:t>Click to edit Master text styles</a:t>
             </a:r>
+            <a:endParaRPr lang="en-US" smtClean="0"/>
           </a:p>
           <a:p>
             <a:pPr lvl="1"/>
@@ -2156,6 +2141,7 @@
               <a:rPr lang="en-US" smtClean="0"/>
               <a:t>Second level</a:t>
             </a:r>
+            <a:endParaRPr lang="en-US" smtClean="0"/>
           </a:p>
           <a:p>
             <a:pPr lvl="2"/>
@@ -2163,6 +2149,7 @@
               <a:rPr lang="en-US" smtClean="0"/>
               <a:t>Third level</a:t>
             </a:r>
+            <a:endParaRPr lang="en-US" smtClean="0"/>
           </a:p>
           <a:p>
             <a:pPr lvl="3"/>
@@ -2170,6 +2157,7 @@
               <a:rPr lang="en-US" smtClean="0"/>
               <a:t>Fourth level</a:t>
             </a:r>
+            <a:endParaRPr lang="en-US" smtClean="0"/>
           </a:p>
           <a:p>
             <a:pPr lvl="4"/>
@@ -2243,6 +2231,7 @@
               <a:rPr lang="en-US" smtClean="0"/>
               <a:t>Click to edit Master text styles</a:t>
             </a:r>
+            <a:endParaRPr lang="en-US" smtClean="0"/>
           </a:p>
         </p:txBody>
       </p:sp>
@@ -2263,7 +2252,6 @@
           <a:p>
             <a:fld id="{5BCAD085-E8A6-8845-BD4E-CB4CCA059FC4}" type="datetimeFigureOut">
               <a:rPr lang="en-US" smtClean="0"/>
-              <a:t>1/27/13</a:t>
             </a:fld>
             <a:endParaRPr lang="en-US"/>
           </a:p>
@@ -2305,18 +2293,12 @@
           <a:p>
             <a:fld id="{C1FF6DA9-008F-8B48-92A6-B652298478BF}" type="slidenum">
               <a:rPr lang="en-US" smtClean="0"/>
-              <a:t>‹#›</a:t>
             </a:fld>
             <a:endParaRPr lang="en-US"/>
           </a:p>
         </p:txBody>
       </p:sp>
     </p:spTree>
-    <p:extLst>
-      <p:ext uri="{BB962C8B-B14F-4D97-AF65-F5344CB8AC3E}">
-        <p14:creationId xmlns:p14="http://schemas.microsoft.com/office/powerpoint/2010/main" val="1840726560"/>
-      </p:ext>
-    </p:extLst>
   </p:cSld>
   <p:clrMapOvr>
     <a:masterClrMapping/>
@@ -2496,6 +2478,7 @@
               <a:rPr lang="en-US" smtClean="0"/>
               <a:t>Click to edit Master text styles</a:t>
             </a:r>
+            <a:endParaRPr lang="en-US" smtClean="0"/>
           </a:p>
         </p:txBody>
       </p:sp>
@@ -2516,7 +2499,6 @@
           <a:p>
             <a:fld id="{5BCAD085-E8A6-8845-BD4E-CB4CCA059FC4}" type="datetimeFigureOut">
               <a:rPr lang="en-US" smtClean="0"/>
-              <a:t>1/27/13</a:t>
             </a:fld>
             <a:endParaRPr lang="en-US"/>
           </a:p>
@@ -2558,18 +2540,12 @@
           <a:p>
             <a:fld id="{C1FF6DA9-008F-8B48-92A6-B652298478BF}" type="slidenum">
               <a:rPr lang="en-US" smtClean="0"/>
-              <a:t>‹#›</a:t>
             </a:fld>
             <a:endParaRPr lang="en-US"/>
           </a:p>
         </p:txBody>
       </p:sp>
     </p:spTree>
-    <p:extLst>
-      <p:ext uri="{BB962C8B-B14F-4D97-AF65-F5344CB8AC3E}">
-        <p14:creationId xmlns:p14="http://schemas.microsoft.com/office/powerpoint/2010/main" val="3889236939"/>
-      </p:ext>
-    </p:extLst>
   </p:cSld>
   <p:clrMapOvr>
     <a:masterClrMapping/>
@@ -2662,6 +2638,7 @@
               <a:rPr lang="en-US" smtClean="0"/>
               <a:t>Click to edit Master text styles</a:t>
             </a:r>
+            <a:endParaRPr lang="en-US" smtClean="0"/>
           </a:p>
           <a:p>
             <a:pPr lvl="1"/>
@@ -2669,6 +2646,7 @@
               <a:rPr lang="en-US" smtClean="0"/>
               <a:t>Second level</a:t>
             </a:r>
+            <a:endParaRPr lang="en-US" smtClean="0"/>
           </a:p>
           <a:p>
             <a:pPr lvl="2"/>
@@ -2676,6 +2654,7 @@
               <a:rPr lang="en-US" smtClean="0"/>
               <a:t>Third level</a:t>
             </a:r>
+            <a:endParaRPr lang="en-US" smtClean="0"/>
           </a:p>
           <a:p>
             <a:pPr lvl="3"/>
@@ -2683,6 +2662,7 @@
               <a:rPr lang="en-US" smtClean="0"/>
               <a:t>Fourth level</a:t>
             </a:r>
+            <a:endParaRPr lang="en-US" smtClean="0"/>
           </a:p>
           <a:p>
             <a:pPr lvl="4"/>
@@ -2729,7 +2709,6 @@
           <a:p>
             <a:fld id="{5BCAD085-E8A6-8845-BD4E-CB4CCA059FC4}" type="datetimeFigureOut">
               <a:rPr lang="en-US" smtClean="0"/>
-              <a:t>1/27/13</a:t>
             </a:fld>
             <a:endParaRPr lang="en-US"/>
           </a:p>
@@ -2807,18 +2786,12 @@
           <a:p>
             <a:fld id="{C1FF6DA9-008F-8B48-92A6-B652298478BF}" type="slidenum">
               <a:rPr lang="en-US" smtClean="0"/>
-              <a:t>‹#›</a:t>
             </a:fld>
             <a:endParaRPr lang="en-US"/>
           </a:p>
         </p:txBody>
       </p:sp>
     </p:spTree>
-    <p:extLst>
-      <p:ext uri="{BB962C8B-B14F-4D97-AF65-F5344CB8AC3E}">
-        <p14:creationId xmlns:p14="http://schemas.microsoft.com/office/powerpoint/2010/main" val="2209977519"/>
-      </p:ext>
-    </p:extLst>
   </p:cSld>
   <p:clrMap bg1="lt1" tx1="dk1" bg2="lt2" tx2="dk2" accent1="accent1" accent2="accent2" accent3="accent3" accent4="accent4" accent5="accent5" accent6="accent6" hlink="hlink" folHlink="folHlink"/>
   <p:sldLayoutIdLst>
@@ -2856,7 +2829,7 @@
         <a:spcBef>
           <a:spcPct val="20000"/>
         </a:spcBef>
-        <a:buFont typeface="Arial"/>
+        <a:buFont typeface="Arial" panose="020B0604020202020204"/>
         <a:buChar char="•"/>
         <a:defRPr sz="3200" kern="1200">
           <a:solidFill>
@@ -2871,7 +2844,7 @@
         <a:spcBef>
           <a:spcPct val="20000"/>
         </a:spcBef>
-        <a:buFont typeface="Arial"/>
+        <a:buFont typeface="Arial" panose="020B0604020202020204"/>
         <a:buChar char="–"/>
         <a:defRPr sz="2800" kern="1200">
           <a:solidFill>
@@ -2886,7 +2859,7 @@
         <a:spcBef>
           <a:spcPct val="20000"/>
         </a:spcBef>
-        <a:buFont typeface="Arial"/>
+        <a:buFont typeface="Arial" panose="020B0604020202020204"/>
         <a:buChar char="•"/>
         <a:defRPr sz="2400" kern="1200">
           <a:solidFill>
@@ -2901,7 +2874,7 @@
         <a:spcBef>
           <a:spcPct val="20000"/>
         </a:spcBef>
-        <a:buFont typeface="Arial"/>
+        <a:buFont typeface="Arial" panose="020B0604020202020204"/>
         <a:buChar char="–"/>
         <a:defRPr sz="2000" kern="1200">
           <a:solidFill>
@@ -2916,7 +2889,7 @@
         <a:spcBef>
           <a:spcPct val="20000"/>
         </a:spcBef>
-        <a:buFont typeface="Arial"/>
+        <a:buFont typeface="Arial" panose="020B0604020202020204"/>
         <a:buChar char="»"/>
         <a:defRPr sz="2000" kern="1200">
           <a:solidFill>
@@ -2931,7 +2904,7 @@
         <a:spcBef>
           <a:spcPct val="20000"/>
         </a:spcBef>
-        <a:buFont typeface="Arial"/>
+        <a:buFont typeface="Arial" panose="020B0604020202020204"/>
         <a:buChar char="•"/>
         <a:defRPr sz="2000" kern="1200">
           <a:solidFill>
@@ -2946,7 +2919,7 @@
         <a:spcBef>
           <a:spcPct val="20000"/>
         </a:spcBef>
-        <a:buFont typeface="Arial"/>
+        <a:buFont typeface="Arial" panose="020B0604020202020204"/>
         <a:buChar char="•"/>
         <a:defRPr sz="2000" kern="1200">
           <a:solidFill>
@@ -2961,7 +2934,7 @@
         <a:spcBef>
           <a:spcPct val="20000"/>
         </a:spcBef>
-        <a:buFont typeface="Arial"/>
+        <a:buFont typeface="Arial" panose="020B0604020202020204"/>
         <a:buChar char="•"/>
         <a:defRPr sz="2000" kern="1200">
           <a:solidFill>
@@ -2976,7 +2949,7 @@
         <a:spcBef>
           <a:spcPct val="20000"/>
         </a:spcBef>
-        <a:buFont typeface="Arial"/>
+        <a:buFont typeface="Arial" panose="020B0604020202020204"/>
         <a:buChar char="•"/>
         <a:defRPr sz="2000" kern="1200">
           <a:solidFill>
@@ -3088,7 +3061,7 @@
 </file>
 
 <file path=ppt/slides/slide1.xml><?xml version="1.0" encoding="utf-8"?>
-<p:sld xmlns:a="http://schemas.openxmlformats.org/drawingml/2006/main" xmlns:p="http://schemas.openxmlformats.org/presentationml/2006/main" xmlns:r="http://schemas.openxmlformats.org/officeDocument/2006/relationships">
+<p:sld xmlns:a="http://schemas.openxmlformats.org/drawingml/2006/main" xmlns:r="http://schemas.openxmlformats.org/officeDocument/2006/relationships" xmlns:p="http://schemas.openxmlformats.org/presentationml/2006/main">
   <p:cSld>
     <p:spTree>
       <p:nvGrpSpPr>
@@ -3290,7 +3263,7 @@
           <a:noFill/>
         </p:spPr>
         <p:txBody>
-          <a:bodyPr wrap="square" lIns="0" rIns="0" tIns="0" bIns="0">
+          <a:bodyPr wrap="square" lIns="0" tIns="0" rIns="0" bIns="0">
             <a:spAutoFit/>
           </a:bodyPr>
           <a:lstStyle/>
@@ -3305,10 +3278,16 @@
                 <a:solidFill>
                   <a:srgbClr val="8EB6A6"/>
                 </a:solidFill>
-                <a:latin typeface="Segoe UI"/>
+                <a:latin typeface="Segoe UI" panose="020B0502040204020203"/>
               </a:rPr>
               <a:t>DÉFI 1 · ÉCONOMIE NUMÉRIQUE · RÉPUBLIQUE TOGOLAISE</a:t>
             </a:r>
+            <a:endParaRPr sz="950" b="1" spc="190">
+              <a:solidFill>
+                <a:srgbClr val="8EB6A6"/>
+              </a:solidFill>
+              <a:latin typeface="Segoe UI" panose="020B0502040204020203"/>
+            </a:endParaRPr>
           </a:p>
         </p:txBody>
       </p:sp>
@@ -3329,7 +3308,7 @@
           <a:noFill/>
         </p:spPr>
         <p:txBody>
-          <a:bodyPr wrap="square" lIns="0" rIns="0" tIns="0" bIns="0">
+          <a:bodyPr wrap="square" lIns="0" tIns="0" rIns="0" bIns="0">
             <a:spAutoFit/>
           </a:bodyPr>
           <a:lstStyle/>
@@ -3344,10 +3323,16 @@
                 <a:solidFill>
                   <a:srgbClr val="FFFFFF"/>
                 </a:solidFill>
-                <a:latin typeface="Segoe UI"/>
+                <a:latin typeface="Segoe UI" panose="020B0502040204020203"/>
               </a:rPr>
               <a:t>Connecter le Togo</a:t>
             </a:r>
+            <a:endParaRPr sz="4300" b="1" spc="-50">
+              <a:solidFill>
+                <a:srgbClr val="FFFFFF"/>
+              </a:solidFill>
+              <a:latin typeface="Segoe UI" panose="020B0502040204020203"/>
+            </a:endParaRPr>
           </a:p>
           <a:p>
             <a:pPr algn="l">
@@ -3360,10 +3345,16 @@
                 <a:solidFill>
                   <a:srgbClr val="FFFFFF"/>
                 </a:solidFill>
-                <a:latin typeface="Segoe UI"/>
+                <a:latin typeface="Segoe UI" panose="020B0502040204020203"/>
               </a:rPr>
               <a:t>là où le manque est prouvé</a:t>
             </a:r>
+            <a:endParaRPr sz="4300" b="1" spc="-50">
+              <a:solidFill>
+                <a:srgbClr val="FFFFFF"/>
+              </a:solidFill>
+              <a:latin typeface="Segoe UI" panose="020B0502040204020203"/>
+            </a:endParaRPr>
           </a:p>
         </p:txBody>
       </p:sp>
@@ -3419,7 +3410,7 @@
         </p:nvSpPr>
         <p:spPr>
           <a:xfrm>
-            <a:off x="868680" y="3456432"/>
+            <a:off x="868680" y="3383407"/>
             <a:ext cx="7223760" cy="1005840"/>
           </a:xfrm>
           <a:prstGeom prst="rect">
@@ -3428,7 +3419,7 @@
           <a:noFill/>
         </p:spPr>
         <p:txBody>
-          <a:bodyPr wrap="square" lIns="0" rIns="0" tIns="0" bIns="0">
+          <a:bodyPr wrap="square" lIns="0" tIns="0" rIns="0" bIns="0">
             <a:spAutoFit/>
           </a:bodyPr>
           <a:lstStyle/>
@@ -3443,10 +3434,16 @@
                 <a:solidFill>
                   <a:srgbClr val="CBDED6"/>
                 </a:solidFill>
-                <a:latin typeface="Segoe UI"/>
+                <a:latin typeface="Segoe UI" panose="020B0502040204020203"/>
               </a:rPr>
               <a:t>Le Togo compte un point de service financier numérique pour 409 habitants. Cette moyenne ne dit rien d'utile : entre la préfecture la mieux dotée et la moins dotée, l'écart est de 1 à 12,7.</a:t>
             </a:r>
+            <a:endParaRPr sz="1400" b="0">
+              <a:solidFill>
+                <a:srgbClr val="CBDED6"/>
+              </a:solidFill>
+              <a:latin typeface="Segoe UI" panose="020B0502040204020203"/>
+            </a:endParaRPr>
           </a:p>
           <a:p>
             <a:pPr algn="l">
@@ -3459,22 +3456,478 @@
                 <a:solidFill>
                   <a:srgbClr val="CBDED6"/>
                 </a:solidFill>
-                <a:latin typeface="Segoe UI"/>
+                <a:latin typeface="Segoe UI" panose="020B0502040204020203"/>
               </a:rPr>
               <a:t>Ce diagnostic désigne les territoires où investir, et publie de quoi contester le classement.</a:t>
             </a:r>
-          </a:p>
-        </p:txBody>
-      </p:sp>
-      <p:sp>
-        <p:nvSpPr>
-          <p:cNvPr id="10" name="Rectangle 9"/>
+            <a:endParaRPr sz="1400" b="0">
+              <a:solidFill>
+                <a:srgbClr val="CBDED6"/>
+              </a:solidFill>
+              <a:latin typeface="Segoe UI" panose="020B0502040204020203"/>
+            </a:endParaRPr>
+          </a:p>
+        </p:txBody>
+      </p:sp>
+      <p:sp>
+        <p:nvSpPr>
+          <p:cNvPr id="11" name="TextBox 10"/>
+          <p:cNvSpPr txBox="1"/>
+          <p:nvPr/>
+        </p:nvSpPr>
+        <p:spPr>
+          <a:xfrm>
+            <a:off x="868680" y="4828032"/>
+            <a:ext cx="2596896" cy="219456"/>
+          </a:xfrm>
+          <a:prstGeom prst="rect">
+            <a:avLst/>
+          </a:prstGeom>
+          <a:noFill/>
+        </p:spPr>
+        <p:txBody>
+          <a:bodyPr wrap="square" lIns="0" tIns="0" rIns="0" bIns="0">
+            <a:spAutoFit/>
+          </a:bodyPr>
+          <a:lstStyle/>
+          <a:p>
+            <a:pPr algn="l">
+              <a:lnSpc>
+                <a:spcPct val="120000"/>
+              </a:lnSpc>
+            </a:pPr>
+            <a:r>
+              <a:rPr sz="850" b="1" spc="130">
+                <a:solidFill>
+                  <a:srgbClr val="8EB6A6"/>
+                </a:solidFill>
+                <a:latin typeface="Segoe UI" panose="020B0502040204020203"/>
+              </a:rPr>
+              <a:t>HABITANTS PAR POINT DE SERVICE</a:t>
+            </a:r>
+            <a:endParaRPr sz="850" b="1" spc="130">
+              <a:solidFill>
+                <a:srgbClr val="8EB6A6"/>
+              </a:solidFill>
+              <a:latin typeface="Segoe UI" panose="020B0502040204020203"/>
+            </a:endParaRPr>
+          </a:p>
+        </p:txBody>
+      </p:sp>
+      <p:sp>
+        <p:nvSpPr>
+          <p:cNvPr id="12" name="TextBox 11"/>
+          <p:cNvSpPr txBox="1"/>
+          <p:nvPr/>
+        </p:nvSpPr>
+        <p:spPr>
+          <a:xfrm>
+            <a:off x="868680" y="5093208"/>
+            <a:ext cx="2596896" cy="457200"/>
+          </a:xfrm>
+          <a:prstGeom prst="rect">
+            <a:avLst/>
+          </a:prstGeom>
+          <a:noFill/>
+        </p:spPr>
+        <p:txBody>
+          <a:bodyPr wrap="square" lIns="0" tIns="0" rIns="0" bIns="0">
+            <a:spAutoFit/>
+          </a:bodyPr>
+          <a:lstStyle/>
+          <a:p>
+            <a:pPr algn="l">
+              <a:lnSpc>
+                <a:spcPct val="120000"/>
+              </a:lnSpc>
+            </a:pPr>
+            <a:r>
+              <a:rPr sz="2700" b="1" spc="-40">
+                <a:solidFill>
+                  <a:srgbClr val="FFFFFF"/>
+                </a:solidFill>
+                <a:latin typeface="Segoe UI" panose="020B0502040204020203"/>
+              </a:rPr>
+              <a:t>409</a:t>
+            </a:r>
+            <a:endParaRPr sz="2700" b="1" spc="-40">
+              <a:solidFill>
+                <a:srgbClr val="FFFFFF"/>
+              </a:solidFill>
+              <a:latin typeface="Segoe UI" panose="020B0502040204020203"/>
+            </a:endParaRPr>
+          </a:p>
+        </p:txBody>
+      </p:sp>
+      <p:sp>
+        <p:nvSpPr>
+          <p:cNvPr id="13" name="TextBox 12"/>
+          <p:cNvSpPr txBox="1"/>
+          <p:nvPr/>
+        </p:nvSpPr>
+        <p:spPr>
+          <a:xfrm>
+            <a:off x="868680" y="5568696"/>
+            <a:ext cx="2596896" cy="219456"/>
+          </a:xfrm>
+          <a:prstGeom prst="rect">
+            <a:avLst/>
+          </a:prstGeom>
+          <a:noFill/>
+        </p:spPr>
+        <p:txBody>
+          <a:bodyPr wrap="square" lIns="0" tIns="0" rIns="0" bIns="0">
+            <a:spAutoFit/>
+          </a:bodyPr>
+          <a:lstStyle/>
+          <a:p>
+            <a:pPr algn="l">
+              <a:lnSpc>
+                <a:spcPct val="130000"/>
+              </a:lnSpc>
+            </a:pPr>
+            <a:r>
+              <a:rPr sz="900" b="0">
+                <a:solidFill>
+                  <a:srgbClr val="6D9A89"/>
+                </a:solidFill>
+                <a:latin typeface="Segoe UI" panose="020B0502040204020203"/>
+              </a:rPr>
+              <a:t>moyenne nationale · 19 788 points géolocalisés</a:t>
+            </a:r>
+            <a:endParaRPr sz="900" b="0">
+              <a:solidFill>
+                <a:srgbClr val="6D9A89"/>
+              </a:solidFill>
+              <a:latin typeface="Segoe UI" panose="020B0502040204020203"/>
+            </a:endParaRPr>
+          </a:p>
+        </p:txBody>
+      </p:sp>
+      <p:sp>
+        <p:nvSpPr>
+          <p:cNvPr id="14" name="TextBox 13"/>
+          <p:cNvSpPr txBox="1"/>
+          <p:nvPr/>
+        </p:nvSpPr>
+        <p:spPr>
+          <a:xfrm>
+            <a:off x="3721608" y="4828032"/>
+            <a:ext cx="2596896" cy="219456"/>
+          </a:xfrm>
+          <a:prstGeom prst="rect">
+            <a:avLst/>
+          </a:prstGeom>
+          <a:noFill/>
+        </p:spPr>
+        <p:txBody>
+          <a:bodyPr wrap="square" lIns="0" tIns="0" rIns="0" bIns="0">
+            <a:spAutoFit/>
+          </a:bodyPr>
+          <a:lstStyle/>
+          <a:p>
+            <a:pPr algn="l">
+              <a:lnSpc>
+                <a:spcPct val="120000"/>
+              </a:lnSpc>
+            </a:pPr>
+            <a:r>
+              <a:rPr sz="850" b="1" spc="130">
+                <a:solidFill>
+                  <a:srgbClr val="8EB6A6"/>
+                </a:solidFill>
+                <a:latin typeface="Segoe UI" panose="020B0502040204020203"/>
+              </a:rPr>
+              <a:t>ÉCART ENTRE PRÉFECTURES</a:t>
+            </a:r>
+            <a:endParaRPr sz="850" b="1" spc="130">
+              <a:solidFill>
+                <a:srgbClr val="8EB6A6"/>
+              </a:solidFill>
+              <a:latin typeface="Segoe UI" panose="020B0502040204020203"/>
+            </a:endParaRPr>
+          </a:p>
+        </p:txBody>
+      </p:sp>
+      <p:sp>
+        <p:nvSpPr>
+          <p:cNvPr id="15" name="TextBox 14"/>
+          <p:cNvSpPr txBox="1"/>
+          <p:nvPr/>
+        </p:nvSpPr>
+        <p:spPr>
+          <a:xfrm>
+            <a:off x="3721608" y="5093208"/>
+            <a:ext cx="2596896" cy="457200"/>
+          </a:xfrm>
+          <a:prstGeom prst="rect">
+            <a:avLst/>
+          </a:prstGeom>
+          <a:noFill/>
+        </p:spPr>
+        <p:txBody>
+          <a:bodyPr wrap="square" lIns="0" tIns="0" rIns="0" bIns="0">
+            <a:spAutoFit/>
+          </a:bodyPr>
+          <a:lstStyle/>
+          <a:p>
+            <a:pPr algn="l">
+              <a:lnSpc>
+                <a:spcPct val="120000"/>
+              </a:lnSpc>
+            </a:pPr>
+            <a:r>
+              <a:rPr sz="2700" b="1" spc="-40">
+                <a:solidFill>
+                  <a:srgbClr val="FFFFFF"/>
+                </a:solidFill>
+                <a:latin typeface="Segoe UI" panose="020B0502040204020203"/>
+              </a:rPr>
+              <a:t>1 à 12,7</a:t>
+            </a:r>
+            <a:endParaRPr sz="2700" b="1" spc="-40">
+              <a:solidFill>
+                <a:srgbClr val="FFFFFF"/>
+              </a:solidFill>
+              <a:latin typeface="Segoe UI" panose="020B0502040204020203"/>
+            </a:endParaRPr>
+          </a:p>
+        </p:txBody>
+      </p:sp>
+      <p:sp>
+        <p:nvSpPr>
+          <p:cNvPr id="16" name="TextBox 15"/>
+          <p:cNvSpPr txBox="1"/>
+          <p:nvPr/>
+        </p:nvSpPr>
+        <p:spPr>
+          <a:xfrm>
+            <a:off x="3721608" y="5568696"/>
+            <a:ext cx="2596896" cy="219456"/>
+          </a:xfrm>
+          <a:prstGeom prst="rect">
+            <a:avLst/>
+          </a:prstGeom>
+          <a:noFill/>
+        </p:spPr>
+        <p:txBody>
+          <a:bodyPr wrap="square" lIns="0" tIns="0" rIns="0" bIns="0">
+            <a:spAutoFit/>
+          </a:bodyPr>
+          <a:lstStyle/>
+          <a:p>
+            <a:pPr algn="l">
+              <a:lnSpc>
+                <a:spcPct val="130000"/>
+              </a:lnSpc>
+            </a:pPr>
+            <a:r>
+              <a:rPr sz="900" b="0">
+                <a:solidFill>
+                  <a:srgbClr val="6D9A89"/>
+                </a:solidFill>
+                <a:latin typeface="Segoe UI" panose="020B0502040204020203"/>
+              </a:rPr>
+              <a:t>Kpendjal contre Tchaoudjo</a:t>
+            </a:r>
+            <a:endParaRPr sz="900" b="0">
+              <a:solidFill>
+                <a:srgbClr val="6D9A89"/>
+              </a:solidFill>
+              <a:latin typeface="Segoe UI" panose="020B0502040204020203"/>
+            </a:endParaRPr>
+          </a:p>
+        </p:txBody>
+      </p:sp>
+      <p:sp>
+        <p:nvSpPr>
+          <p:cNvPr id="17" name="TextBox 16"/>
+          <p:cNvSpPr txBox="1"/>
+          <p:nvPr/>
+        </p:nvSpPr>
+        <p:spPr>
+          <a:xfrm>
+            <a:off x="6574536" y="4828032"/>
+            <a:ext cx="2596896" cy="219456"/>
+          </a:xfrm>
+          <a:prstGeom prst="rect">
+            <a:avLst/>
+          </a:prstGeom>
+          <a:noFill/>
+        </p:spPr>
+        <p:txBody>
+          <a:bodyPr wrap="square" lIns="0" tIns="0" rIns="0" bIns="0">
+            <a:spAutoFit/>
+          </a:bodyPr>
+          <a:lstStyle/>
+          <a:p>
+            <a:pPr algn="l">
+              <a:lnSpc>
+                <a:spcPct val="120000"/>
+              </a:lnSpc>
+            </a:pPr>
+            <a:r>
+              <a:rPr sz="850" b="1" spc="130">
+                <a:solidFill>
+                  <a:srgbClr val="8EB6A6"/>
+                </a:solidFill>
+                <a:latin typeface="Segoe UI" panose="020B0502040204020203"/>
+              </a:rPr>
+              <a:t>PRÉFECTURES SANS AUCUNE AGENCE</a:t>
+            </a:r>
+            <a:endParaRPr sz="850" b="1" spc="130">
+              <a:solidFill>
+                <a:srgbClr val="8EB6A6"/>
+              </a:solidFill>
+              <a:latin typeface="Segoe UI" panose="020B0502040204020203"/>
+            </a:endParaRPr>
+          </a:p>
+        </p:txBody>
+      </p:sp>
+      <p:sp>
+        <p:nvSpPr>
+          <p:cNvPr id="18" name="TextBox 17"/>
+          <p:cNvSpPr txBox="1"/>
+          <p:nvPr/>
+        </p:nvSpPr>
+        <p:spPr>
+          <a:xfrm>
+            <a:off x="6574536" y="5093208"/>
+            <a:ext cx="2596896" cy="457200"/>
+          </a:xfrm>
+          <a:prstGeom prst="rect">
+            <a:avLst/>
+          </a:prstGeom>
+          <a:noFill/>
+        </p:spPr>
+        <p:txBody>
+          <a:bodyPr wrap="square" lIns="0" tIns="0" rIns="0" bIns="0">
+            <a:spAutoFit/>
+          </a:bodyPr>
+          <a:lstStyle/>
+          <a:p>
+            <a:pPr algn="l">
+              <a:lnSpc>
+                <a:spcPct val="120000"/>
+              </a:lnSpc>
+            </a:pPr>
+            <a:r>
+              <a:rPr sz="2700" b="1" spc="-40">
+                <a:solidFill>
+                  <a:srgbClr val="FFFFFF"/>
+                </a:solidFill>
+                <a:latin typeface="Segoe UI" panose="020B0502040204020203"/>
+              </a:rPr>
+              <a:t>13 / 39</a:t>
+            </a:r>
+            <a:endParaRPr sz="2700" b="1" spc="-40">
+              <a:solidFill>
+                <a:srgbClr val="FFFFFF"/>
+              </a:solidFill>
+              <a:latin typeface="Segoe UI" panose="020B0502040204020203"/>
+            </a:endParaRPr>
+          </a:p>
+        </p:txBody>
+      </p:sp>
+      <p:sp>
+        <p:nvSpPr>
+          <p:cNvPr id="19" name="TextBox 18"/>
+          <p:cNvSpPr txBox="1"/>
+          <p:nvPr/>
+        </p:nvSpPr>
+        <p:spPr>
+          <a:xfrm>
+            <a:off x="6574536" y="5568696"/>
+            <a:ext cx="2596896" cy="219456"/>
+          </a:xfrm>
+          <a:prstGeom prst="rect">
+            <a:avLst/>
+          </a:prstGeom>
+          <a:noFill/>
+        </p:spPr>
+        <p:txBody>
+          <a:bodyPr wrap="square" lIns="0" tIns="0" rIns="0" bIns="0">
+            <a:spAutoFit/>
+          </a:bodyPr>
+          <a:lstStyle/>
+          <a:p>
+            <a:pPr algn="l">
+              <a:lnSpc>
+                <a:spcPct val="130000"/>
+              </a:lnSpc>
+            </a:pPr>
+            <a:r>
+              <a:rPr sz="900" b="0">
+                <a:solidFill>
+                  <a:srgbClr val="6D9A89"/>
+                </a:solidFill>
+                <a:latin typeface="Segoe UI" panose="020B0502040204020203"/>
+              </a:rPr>
+              <a:t>1 621 720 habitants concernés</a:t>
+            </a:r>
+            <a:endParaRPr sz="900" b="0">
+              <a:solidFill>
+                <a:srgbClr val="6D9A89"/>
+              </a:solidFill>
+              <a:latin typeface="Segoe UI" panose="020B0502040204020203"/>
+            </a:endParaRPr>
+          </a:p>
+        </p:txBody>
+      </p:sp>
+      <p:sp>
+        <p:nvSpPr>
+          <p:cNvPr id="20" name="TextBox 19"/>
+          <p:cNvSpPr txBox="1"/>
+          <p:nvPr/>
+        </p:nvSpPr>
+        <p:spPr>
+          <a:xfrm>
+            <a:off x="868680" y="5943600"/>
+            <a:ext cx="5669280" cy="274320"/>
+          </a:xfrm>
+          <a:prstGeom prst="rect">
+            <a:avLst/>
+          </a:prstGeom>
+          <a:noFill/>
+        </p:spPr>
+        <p:txBody>
+          <a:bodyPr wrap="square" lIns="0" tIns="0" rIns="0" bIns="0">
+            <a:spAutoFit/>
+          </a:bodyPr>
+          <a:lstStyle/>
+          <a:p>
+            <a:pPr algn="l">
+              <a:lnSpc>
+                <a:spcPct val="120000"/>
+              </a:lnSpc>
+            </a:pPr>
+            <a:r>
+              <a:rPr sz="1450" b="1">
+                <a:solidFill>
+                  <a:srgbClr val="FFFFFF"/>
+                </a:solidFill>
+                <a:latin typeface="Segoe UI" panose="020B0502040204020203"/>
+              </a:rPr>
+              <a:t>KOUTSAVA Kossi Epiphane</a:t>
+            </a:r>
+            <a:endParaRPr sz="1450" b="1">
+              <a:solidFill>
+                <a:srgbClr val="FFFFFF"/>
+              </a:solidFill>
+              <a:latin typeface="Segoe UI" panose="020B0502040204020203"/>
+            </a:endParaRPr>
+          </a:p>
+        </p:txBody>
+      </p:sp>
+      <p:sp>
+        <p:nvSpPr>
+          <p:cNvPr id="22" name="Rectangle 21"/>
           <p:cNvSpPr/>
           <p:nvPr/>
         </p:nvSpPr>
         <p:spPr>
           <a:xfrm>
-            <a:off x="868680" y="4590288"/>
+            <a:off x="868680" y="6483096"/>
             <a:ext cx="8183879" cy="9525"/>
           </a:xfrm>
           <a:prstGeom prst="rect">
@@ -3512,479 +3965,6 @@
       </p:sp>
       <p:sp>
         <p:nvSpPr>
-          <p:cNvPr id="11" name="TextBox 10"/>
-          <p:cNvSpPr txBox="1"/>
-          <p:nvPr/>
-        </p:nvSpPr>
-        <p:spPr>
-          <a:xfrm>
-            <a:off x="868680" y="4828032"/>
-            <a:ext cx="2596896" cy="219456"/>
-          </a:xfrm>
-          <a:prstGeom prst="rect">
-            <a:avLst/>
-          </a:prstGeom>
-          <a:noFill/>
-        </p:spPr>
-        <p:txBody>
-          <a:bodyPr wrap="square" lIns="0" rIns="0" tIns="0" bIns="0">
-            <a:spAutoFit/>
-          </a:bodyPr>
-          <a:lstStyle/>
-          <a:p>
-            <a:pPr algn="l">
-              <a:lnSpc>
-                <a:spcPct val="120000"/>
-              </a:lnSpc>
-            </a:pPr>
-            <a:r>
-              <a:rPr sz="850" b="1" spc="130">
-                <a:solidFill>
-                  <a:srgbClr val="8EB6A6"/>
-                </a:solidFill>
-                <a:latin typeface="Segoe UI"/>
-              </a:rPr>
-              <a:t>HABITANTS PAR POINT DE SERVICE</a:t>
-            </a:r>
-          </a:p>
-        </p:txBody>
-      </p:sp>
-      <p:sp>
-        <p:nvSpPr>
-          <p:cNvPr id="12" name="TextBox 11"/>
-          <p:cNvSpPr txBox="1"/>
-          <p:nvPr/>
-        </p:nvSpPr>
-        <p:spPr>
-          <a:xfrm>
-            <a:off x="868680" y="5093208"/>
-            <a:ext cx="2596896" cy="457200"/>
-          </a:xfrm>
-          <a:prstGeom prst="rect">
-            <a:avLst/>
-          </a:prstGeom>
-          <a:noFill/>
-        </p:spPr>
-        <p:txBody>
-          <a:bodyPr wrap="square" lIns="0" rIns="0" tIns="0" bIns="0">
-            <a:spAutoFit/>
-          </a:bodyPr>
-          <a:lstStyle/>
-          <a:p>
-            <a:pPr algn="l">
-              <a:lnSpc>
-                <a:spcPct val="120000"/>
-              </a:lnSpc>
-            </a:pPr>
-            <a:r>
-              <a:rPr sz="2700" b="1" spc="-40">
-                <a:solidFill>
-                  <a:srgbClr val="FFFFFF"/>
-                </a:solidFill>
-                <a:latin typeface="Segoe UI"/>
-              </a:rPr>
-              <a:t>409</a:t>
-            </a:r>
-          </a:p>
-        </p:txBody>
-      </p:sp>
-      <p:sp>
-        <p:nvSpPr>
-          <p:cNvPr id="13" name="TextBox 12"/>
-          <p:cNvSpPr txBox="1"/>
-          <p:nvPr/>
-        </p:nvSpPr>
-        <p:spPr>
-          <a:xfrm>
-            <a:off x="868680" y="5568696"/>
-            <a:ext cx="2596896" cy="219456"/>
-          </a:xfrm>
-          <a:prstGeom prst="rect">
-            <a:avLst/>
-          </a:prstGeom>
-          <a:noFill/>
-        </p:spPr>
-        <p:txBody>
-          <a:bodyPr wrap="square" lIns="0" rIns="0" tIns="0" bIns="0">
-            <a:spAutoFit/>
-          </a:bodyPr>
-          <a:lstStyle/>
-          <a:p>
-            <a:pPr algn="l">
-              <a:lnSpc>
-                <a:spcPct val="130000"/>
-              </a:lnSpc>
-            </a:pPr>
-            <a:r>
-              <a:rPr sz="900" b="0">
-                <a:solidFill>
-                  <a:srgbClr val="6D9A89"/>
-                </a:solidFill>
-                <a:latin typeface="Segoe UI"/>
-              </a:rPr>
-              <a:t>moyenne nationale · 19 788 points géolocalisés</a:t>
-            </a:r>
-          </a:p>
-        </p:txBody>
-      </p:sp>
-      <p:sp>
-        <p:nvSpPr>
-          <p:cNvPr id="14" name="TextBox 13"/>
-          <p:cNvSpPr txBox="1"/>
-          <p:nvPr/>
-        </p:nvSpPr>
-        <p:spPr>
-          <a:xfrm>
-            <a:off x="3721608" y="4828032"/>
-            <a:ext cx="2596896" cy="219456"/>
-          </a:xfrm>
-          <a:prstGeom prst="rect">
-            <a:avLst/>
-          </a:prstGeom>
-          <a:noFill/>
-        </p:spPr>
-        <p:txBody>
-          <a:bodyPr wrap="square" lIns="0" rIns="0" tIns="0" bIns="0">
-            <a:spAutoFit/>
-          </a:bodyPr>
-          <a:lstStyle/>
-          <a:p>
-            <a:pPr algn="l">
-              <a:lnSpc>
-                <a:spcPct val="120000"/>
-              </a:lnSpc>
-            </a:pPr>
-            <a:r>
-              <a:rPr sz="850" b="1" spc="130">
-                <a:solidFill>
-                  <a:srgbClr val="8EB6A6"/>
-                </a:solidFill>
-                <a:latin typeface="Segoe UI"/>
-              </a:rPr>
-              <a:t>ÉCART ENTRE PRÉFECTURES</a:t>
-            </a:r>
-          </a:p>
-        </p:txBody>
-      </p:sp>
-      <p:sp>
-        <p:nvSpPr>
-          <p:cNvPr id="15" name="TextBox 14"/>
-          <p:cNvSpPr txBox="1"/>
-          <p:nvPr/>
-        </p:nvSpPr>
-        <p:spPr>
-          <a:xfrm>
-            <a:off x="3721608" y="5093208"/>
-            <a:ext cx="2596896" cy="457200"/>
-          </a:xfrm>
-          <a:prstGeom prst="rect">
-            <a:avLst/>
-          </a:prstGeom>
-          <a:noFill/>
-        </p:spPr>
-        <p:txBody>
-          <a:bodyPr wrap="square" lIns="0" rIns="0" tIns="0" bIns="0">
-            <a:spAutoFit/>
-          </a:bodyPr>
-          <a:lstStyle/>
-          <a:p>
-            <a:pPr algn="l">
-              <a:lnSpc>
-                <a:spcPct val="120000"/>
-              </a:lnSpc>
-            </a:pPr>
-            <a:r>
-              <a:rPr sz="2700" b="1" spc="-40">
-                <a:solidFill>
-                  <a:srgbClr val="FFFFFF"/>
-                </a:solidFill>
-                <a:latin typeface="Segoe UI"/>
-              </a:rPr>
-              <a:t>1 à 12,7</a:t>
-            </a:r>
-          </a:p>
-        </p:txBody>
-      </p:sp>
-      <p:sp>
-        <p:nvSpPr>
-          <p:cNvPr id="16" name="TextBox 15"/>
-          <p:cNvSpPr txBox="1"/>
-          <p:nvPr/>
-        </p:nvSpPr>
-        <p:spPr>
-          <a:xfrm>
-            <a:off x="3721608" y="5568696"/>
-            <a:ext cx="2596896" cy="219456"/>
-          </a:xfrm>
-          <a:prstGeom prst="rect">
-            <a:avLst/>
-          </a:prstGeom>
-          <a:noFill/>
-        </p:spPr>
-        <p:txBody>
-          <a:bodyPr wrap="square" lIns="0" rIns="0" tIns="0" bIns="0">
-            <a:spAutoFit/>
-          </a:bodyPr>
-          <a:lstStyle/>
-          <a:p>
-            <a:pPr algn="l">
-              <a:lnSpc>
-                <a:spcPct val="130000"/>
-              </a:lnSpc>
-            </a:pPr>
-            <a:r>
-              <a:rPr sz="900" b="0">
-                <a:solidFill>
-                  <a:srgbClr val="6D9A89"/>
-                </a:solidFill>
-                <a:latin typeface="Segoe UI"/>
-              </a:rPr>
-              <a:t>Kpendjal contre Tchaoudjo</a:t>
-            </a:r>
-          </a:p>
-        </p:txBody>
-      </p:sp>
-      <p:sp>
-        <p:nvSpPr>
-          <p:cNvPr id="17" name="TextBox 16"/>
-          <p:cNvSpPr txBox="1"/>
-          <p:nvPr/>
-        </p:nvSpPr>
-        <p:spPr>
-          <a:xfrm>
-            <a:off x="6574536" y="4828032"/>
-            <a:ext cx="2596896" cy="219456"/>
-          </a:xfrm>
-          <a:prstGeom prst="rect">
-            <a:avLst/>
-          </a:prstGeom>
-          <a:noFill/>
-        </p:spPr>
-        <p:txBody>
-          <a:bodyPr wrap="square" lIns="0" rIns="0" tIns="0" bIns="0">
-            <a:spAutoFit/>
-          </a:bodyPr>
-          <a:lstStyle/>
-          <a:p>
-            <a:pPr algn="l">
-              <a:lnSpc>
-                <a:spcPct val="120000"/>
-              </a:lnSpc>
-            </a:pPr>
-            <a:r>
-              <a:rPr sz="850" b="1" spc="130">
-                <a:solidFill>
-                  <a:srgbClr val="8EB6A6"/>
-                </a:solidFill>
-                <a:latin typeface="Segoe UI"/>
-              </a:rPr>
-              <a:t>PRÉFECTURES SANS AUCUNE AGENCE</a:t>
-            </a:r>
-          </a:p>
-        </p:txBody>
-      </p:sp>
-      <p:sp>
-        <p:nvSpPr>
-          <p:cNvPr id="18" name="TextBox 17"/>
-          <p:cNvSpPr txBox="1"/>
-          <p:nvPr/>
-        </p:nvSpPr>
-        <p:spPr>
-          <a:xfrm>
-            <a:off x="6574536" y="5093208"/>
-            <a:ext cx="2596896" cy="457200"/>
-          </a:xfrm>
-          <a:prstGeom prst="rect">
-            <a:avLst/>
-          </a:prstGeom>
-          <a:noFill/>
-        </p:spPr>
-        <p:txBody>
-          <a:bodyPr wrap="square" lIns="0" rIns="0" tIns="0" bIns="0">
-            <a:spAutoFit/>
-          </a:bodyPr>
-          <a:lstStyle/>
-          <a:p>
-            <a:pPr algn="l">
-              <a:lnSpc>
-                <a:spcPct val="120000"/>
-              </a:lnSpc>
-            </a:pPr>
-            <a:r>
-              <a:rPr sz="2700" b="1" spc="-40">
-                <a:solidFill>
-                  <a:srgbClr val="FFFFFF"/>
-                </a:solidFill>
-                <a:latin typeface="Segoe UI"/>
-              </a:rPr>
-              <a:t>13 / 39</a:t>
-            </a:r>
-          </a:p>
-        </p:txBody>
-      </p:sp>
-      <p:sp>
-        <p:nvSpPr>
-          <p:cNvPr id="19" name="TextBox 18"/>
-          <p:cNvSpPr txBox="1"/>
-          <p:nvPr/>
-        </p:nvSpPr>
-        <p:spPr>
-          <a:xfrm>
-            <a:off x="6574536" y="5568696"/>
-            <a:ext cx="2596896" cy="219456"/>
-          </a:xfrm>
-          <a:prstGeom prst="rect">
-            <a:avLst/>
-          </a:prstGeom>
-          <a:noFill/>
-        </p:spPr>
-        <p:txBody>
-          <a:bodyPr wrap="square" lIns="0" rIns="0" tIns="0" bIns="0">
-            <a:spAutoFit/>
-          </a:bodyPr>
-          <a:lstStyle/>
-          <a:p>
-            <a:pPr algn="l">
-              <a:lnSpc>
-                <a:spcPct val="130000"/>
-              </a:lnSpc>
-            </a:pPr>
-            <a:r>
-              <a:rPr sz="900" b="0">
-                <a:solidFill>
-                  <a:srgbClr val="6D9A89"/>
-                </a:solidFill>
-                <a:latin typeface="Segoe UI"/>
-              </a:rPr>
-              <a:t>1 621 720 habitants concernés</a:t>
-            </a:r>
-          </a:p>
-        </p:txBody>
-      </p:sp>
-      <p:sp>
-        <p:nvSpPr>
-          <p:cNvPr id="20" name="TextBox 19"/>
-          <p:cNvSpPr txBox="1"/>
-          <p:nvPr/>
-        </p:nvSpPr>
-        <p:spPr>
-          <a:xfrm>
-            <a:off x="868680" y="5943600"/>
-            <a:ext cx="5669280" cy="274320"/>
-          </a:xfrm>
-          <a:prstGeom prst="rect">
-            <a:avLst/>
-          </a:prstGeom>
-          <a:noFill/>
-        </p:spPr>
-        <p:txBody>
-          <a:bodyPr wrap="square" lIns="0" rIns="0" tIns="0" bIns="0">
-            <a:spAutoFit/>
-          </a:bodyPr>
-          <a:lstStyle/>
-          <a:p>
-            <a:pPr algn="l">
-              <a:lnSpc>
-                <a:spcPct val="120000"/>
-              </a:lnSpc>
-            </a:pPr>
-            <a:r>
-              <a:rPr sz="1450" b="1">
-                <a:solidFill>
-                  <a:srgbClr val="FFFFFF"/>
-                </a:solidFill>
-                <a:latin typeface="Segoe UI"/>
-              </a:rPr>
-              <a:t>KOUTSAVA Kossi Epiphane</a:t>
-            </a:r>
-          </a:p>
-        </p:txBody>
-      </p:sp>
-      <p:sp>
-        <p:nvSpPr>
-          <p:cNvPr id="21" name="TextBox 20"/>
-          <p:cNvSpPr txBox="1"/>
-          <p:nvPr/>
-        </p:nvSpPr>
-        <p:spPr>
-          <a:xfrm>
-            <a:off x="868680" y="6190488"/>
-            <a:ext cx="5669280" cy="201168"/>
-          </a:xfrm>
-          <a:prstGeom prst="rect">
-            <a:avLst/>
-          </a:prstGeom>
-          <a:noFill/>
-        </p:spPr>
-        <p:txBody>
-          <a:bodyPr wrap="square" lIns="0" rIns="0" tIns="0" bIns="0">
-            <a:spAutoFit/>
-          </a:bodyPr>
-          <a:lstStyle/>
-          <a:p>
-            <a:pPr algn="l">
-              <a:lnSpc>
-                <a:spcPct val="120000"/>
-              </a:lnSpc>
-            </a:pPr>
-            <a:r>
-              <a:rPr sz="850" b="1" spc="130">
-                <a:solidFill>
-                  <a:srgbClr val="8EB6A6"/>
-                </a:solidFill>
-                <a:latin typeface="Segoe UI"/>
-              </a:rPr>
-              <a:t>ANALYSE DE DONNÉES · DÉFI ÉCONOMIE NUMÉRIQUE</a:t>
-            </a:r>
-          </a:p>
-        </p:txBody>
-      </p:sp>
-      <p:sp>
-        <p:nvSpPr>
-          <p:cNvPr id="22" name="Rectangle 21"/>
-          <p:cNvSpPr/>
-          <p:nvPr/>
-        </p:nvSpPr>
-        <p:spPr>
-          <a:xfrm>
-            <a:off x="868680" y="6483096"/>
-            <a:ext cx="8183879" cy="9525"/>
-          </a:xfrm>
-          <a:prstGeom prst="rect">
-            <a:avLst/>
-          </a:prstGeom>
-          <a:solidFill>
-            <a:srgbClr val="1B5E49"/>
-          </a:solidFill>
-          <a:ln>
-            <a:noFill/>
-          </a:ln>
-          <a:effectLst/>
-        </p:spPr>
-        <p:style>
-          <a:lnRef idx="1">
-            <a:schemeClr val="accent1"/>
-          </a:lnRef>
-          <a:fillRef idx="3">
-            <a:schemeClr val="accent1"/>
-          </a:fillRef>
-          <a:effectRef idx="2">
-            <a:schemeClr val="accent1"/>
-          </a:effectRef>
-          <a:fontRef idx="minor">
-            <a:schemeClr val="lt1"/>
-          </a:fontRef>
-        </p:style>
-        <p:txBody>
-          <a:bodyPr rtlCol="0" anchor="ctr"/>
-          <a:lstStyle/>
-          <a:p>
-            <a:pPr algn="ctr"/>
-          </a:p>
-        </p:txBody>
-      </p:sp>
-      <p:sp>
-        <p:nvSpPr>
           <p:cNvPr id="23" name="TextBox 22"/>
           <p:cNvSpPr txBox="1"/>
           <p:nvPr/>
@@ -4000,7 +3980,7 @@
           <a:noFill/>
         </p:spPr>
         <p:txBody>
-          <a:bodyPr wrap="square" lIns="0" rIns="0" tIns="0" bIns="0">
+          <a:bodyPr wrap="square" lIns="0" tIns="0" rIns="0" bIns="0">
             <a:spAutoFit/>
           </a:bodyPr>
           <a:lstStyle/>
@@ -4015,10 +3995,16 @@
                 <a:solidFill>
                   <a:srgbClr val="6D9A89"/>
                 </a:solidFill>
-                <a:latin typeface="Segoe UI"/>
+                <a:latin typeface="Segoe UI" panose="020B0502040204020203"/>
               </a:rPr>
               <a:t>Géoportail national (PRISE 2021-2022) · RGPH-5, INSEED (novembre 2022) · limites COD-AB v02, OCHA (2021) — 25 contrôles arithmétiques publiés</a:t>
             </a:r>
+            <a:endParaRPr sz="800" b="0">
+              <a:solidFill>
+                <a:srgbClr val="6D9A89"/>
+              </a:solidFill>
+              <a:latin typeface="Segoe UI" panose="020B0502040204020203"/>
+            </a:endParaRPr>
           </a:p>
         </p:txBody>
       </p:sp>
@@ -4031,7 +4017,7 @@
           <p:nvPr/>
         </p:nvPicPr>
         <p:blipFill>
-          <a:blip r:embed="rId2"/>
+          <a:blip r:embed="rId1"/>
           <a:stretch>
             <a:fillRect/>
           </a:stretch>
@@ -4055,7 +4041,7 @@
 </file>
 
 <file path=ppt/slides/slide10.xml><?xml version="1.0" encoding="utf-8"?>
-<p:sld xmlns:a="http://schemas.openxmlformats.org/drawingml/2006/main" xmlns:p="http://schemas.openxmlformats.org/presentationml/2006/main" xmlns:r="http://schemas.openxmlformats.org/officeDocument/2006/relationships">
+<p:sld xmlns:a="http://schemas.openxmlformats.org/drawingml/2006/main" xmlns:r="http://schemas.openxmlformats.org/officeDocument/2006/relationships" xmlns:p="http://schemas.openxmlformats.org/presentationml/2006/main">
   <p:cSld>
     <p:spTree>
       <p:nvGrpSpPr>
@@ -4257,7 +4243,7 @@
           <a:noFill/>
         </p:spPr>
         <p:txBody>
-          <a:bodyPr wrap="square" lIns="0" rIns="0" tIns="0" bIns="0">
+          <a:bodyPr wrap="square" lIns="0" tIns="0" rIns="0" bIns="0">
             <a:spAutoFit/>
           </a:bodyPr>
           <a:lstStyle/>
@@ -4272,10 +4258,16 @@
                 <a:solidFill>
                   <a:srgbClr val="8B8A84"/>
                 </a:solidFill>
-                <a:latin typeface="Consolas"/>
+                <a:latin typeface="Consolas" panose="020B0609020204030204"/>
               </a:rPr>
               <a:t>CONCLUSION</a:t>
             </a:r>
+            <a:endParaRPr sz="900" b="1">
+              <a:solidFill>
+                <a:srgbClr val="8B8A84"/>
+              </a:solidFill>
+              <a:latin typeface="Consolas" panose="020B0609020204030204"/>
+            </a:endParaRPr>
           </a:p>
         </p:txBody>
       </p:sp>
@@ -4296,7 +4288,7 @@
           <a:noFill/>
         </p:spPr>
         <p:txBody>
-          <a:bodyPr wrap="square" lIns="0" rIns="0" tIns="0" bIns="0">
+          <a:bodyPr wrap="square" lIns="0" tIns="0" rIns="0" bIns="0">
             <a:spAutoFit/>
           </a:bodyPr>
           <a:lstStyle/>
@@ -4311,10 +4303,16 @@
                 <a:solidFill>
                   <a:srgbClr val="12120F"/>
                 </a:solidFill>
-                <a:latin typeface="Segoe UI"/>
+                <a:latin typeface="Segoe UI" panose="020B0502040204020203"/>
               </a:rPr>
               <a:t>Réponse à la problématique</a:t>
             </a:r>
+            <a:endParaRPr sz="2800" b="1">
+              <a:solidFill>
+                <a:srgbClr val="12120F"/>
+              </a:solidFill>
+              <a:latin typeface="Segoe UI" panose="020B0502040204020203"/>
+            </a:endParaRPr>
           </a:p>
         </p:txBody>
       </p:sp>
@@ -4423,7 +4421,7 @@
           <a:noFill/>
         </p:spPr>
         <p:txBody>
-          <a:bodyPr wrap="square" lIns="0" rIns="0" tIns="0" bIns="0">
+          <a:bodyPr wrap="square" lIns="0" tIns="0" rIns="0" bIns="0">
             <a:spAutoFit/>
           </a:bodyPr>
           <a:lstStyle/>
@@ -4438,10 +4436,16 @@
                 <a:solidFill>
                   <a:srgbClr val="0F4D3B"/>
                 </a:solidFill>
-                <a:latin typeface="Segoe UI"/>
+                <a:latin typeface="Segoe UI" panose="020B0502040204020203"/>
               </a:rPr>
               <a:t>9 territoires, 1 080 723 habitants, et un ordre d'intervention qui résiste au changement de méthode.</a:t>
             </a:r>
+            <a:endParaRPr sz="1350" b="1">
+              <a:solidFill>
+                <a:srgbClr val="0F4D3B"/>
+              </a:solidFill>
+              <a:latin typeface="Segoe UI" panose="020B0502040204020203"/>
+            </a:endParaRPr>
           </a:p>
         </p:txBody>
       </p:sp>
@@ -4506,7 +4510,7 @@
           <a:noFill/>
         </p:spPr>
         <p:txBody>
-          <a:bodyPr wrap="square" lIns="0" rIns="0" tIns="0" bIns="0">
+          <a:bodyPr wrap="square" lIns="0" tIns="0" rIns="0" bIns="0">
             <a:spAutoFit/>
           </a:bodyPr>
           <a:lstStyle/>
@@ -4521,10 +4525,16 @@
                 <a:solidFill>
                   <a:srgbClr val="8B8A84"/>
                 </a:solidFill>
-                <a:latin typeface="Consolas"/>
+                <a:latin typeface="Consolas" panose="020B0609020204030204"/>
               </a:rPr>
               <a:t>République togolaise · Défi Économie numérique · Données ouvertes PRISE 2021-2022, RGPH-5 2022, COD-AB 2021</a:t>
             </a:r>
+            <a:endParaRPr sz="800" b="0">
+              <a:solidFill>
+                <a:srgbClr val="8B8A84"/>
+              </a:solidFill>
+              <a:latin typeface="Consolas" panose="020B0609020204030204"/>
+            </a:endParaRPr>
           </a:p>
         </p:txBody>
       </p:sp>
@@ -4545,7 +4555,7 @@
           <a:noFill/>
         </p:spPr>
         <p:txBody>
-          <a:bodyPr wrap="square" lIns="0" rIns="0" tIns="0" bIns="0">
+          <a:bodyPr wrap="square" lIns="0" tIns="0" rIns="0" bIns="0">
             <a:spAutoFit/>
           </a:bodyPr>
           <a:lstStyle/>
@@ -4560,10 +4570,16 @@
                 <a:solidFill>
                   <a:srgbClr val="8B8A84"/>
                 </a:solidFill>
-                <a:latin typeface="Consolas"/>
+                <a:latin typeface="Consolas" panose="020B0609020204030204"/>
               </a:rPr>
               <a:t>09 / 9</a:t>
             </a:r>
+            <a:endParaRPr sz="800" b="1">
+              <a:solidFill>
+                <a:srgbClr val="8B8A84"/>
+              </a:solidFill>
+              <a:latin typeface="Consolas" panose="020B0609020204030204"/>
+            </a:endParaRPr>
           </a:p>
         </p:txBody>
       </p:sp>
@@ -4584,7 +4600,7 @@
           <a:noFill/>
         </p:spPr>
         <p:txBody>
-          <a:bodyPr wrap="square" lIns="0" rIns="0" tIns="0" bIns="0">
+          <a:bodyPr wrap="square" lIns="0" tIns="0" rIns="0" bIns="0">
             <a:spAutoFit/>
           </a:bodyPr>
           <a:lstStyle/>
@@ -4599,10 +4615,16 @@
                 <a:solidFill>
                   <a:srgbClr val="8B8A84"/>
                 </a:solidFill>
-                <a:latin typeface="Consolas"/>
+                <a:latin typeface="Consolas" panose="020B0609020204030204"/>
               </a:rPr>
               <a:t>OÙ INVESTIR EN PRIORITÉ</a:t>
             </a:r>
+            <a:endParaRPr sz="800" b="1">
+              <a:solidFill>
+                <a:srgbClr val="8B8A84"/>
+              </a:solidFill>
+              <a:latin typeface="Consolas" panose="020B0609020204030204"/>
+            </a:endParaRPr>
           </a:p>
         </p:txBody>
       </p:sp>
@@ -4623,7 +4645,7 @@
           <a:noFill/>
         </p:spPr>
         <p:txBody>
-          <a:bodyPr wrap="square" lIns="0" rIns="0" tIns="0" bIns="0">
+          <a:bodyPr wrap="square" lIns="0" tIns="0" rIns="0" bIns="0">
             <a:spAutoFit/>
           </a:bodyPr>
           <a:lstStyle/>
@@ -4638,10 +4660,16 @@
                 <a:solidFill>
                   <a:srgbClr val="12120F"/>
                 </a:solidFill>
-                <a:latin typeface="Segoe UI"/>
+                <a:latin typeface="Segoe UI" panose="020B0502040204020203"/>
               </a:rPr>
               <a:t>Kpendjal, Mô, Est-Mono, Akébou, Yoto, Kpendjal-Ouest, Tandjoaré, Wawa et Blitta.</a:t>
             </a:r>
+            <a:endParaRPr sz="1500" b="1">
+              <a:solidFill>
+                <a:srgbClr val="12120F"/>
+              </a:solidFill>
+              <a:latin typeface="Segoe UI" panose="020B0502040204020203"/>
+            </a:endParaRPr>
           </a:p>
         </p:txBody>
       </p:sp>
@@ -4706,7 +4734,7 @@
           <a:noFill/>
         </p:spPr>
         <p:txBody>
-          <a:bodyPr wrap="square" lIns="0" rIns="0" tIns="0" bIns="0">
+          <a:bodyPr wrap="square" lIns="0" tIns="0" rIns="0" bIns="0">
             <a:spAutoFit/>
           </a:bodyPr>
           <a:lstStyle/>
@@ -4721,10 +4749,16 @@
                 <a:solidFill>
                   <a:srgbClr val="12120F"/>
                 </a:solidFill>
-                <a:latin typeface="Segoe UI"/>
+                <a:latin typeface="Segoe UI" panose="020B0502040204020203"/>
               </a:rPr>
               <a:t>Pourquoi ces territoires</a:t>
             </a:r>
+            <a:endParaRPr sz="1100" b="1">
+              <a:solidFill>
+                <a:srgbClr val="12120F"/>
+              </a:solidFill>
+              <a:latin typeface="Segoe UI" panose="020B0502040204020203"/>
+            </a:endParaRPr>
           </a:p>
         </p:txBody>
       </p:sp>
@@ -4745,7 +4779,7 @@
           <a:noFill/>
         </p:spPr>
         <p:txBody>
-          <a:bodyPr wrap="square" lIns="0" rIns="0" tIns="0" bIns="0">
+          <a:bodyPr wrap="square" lIns="0" tIns="0" rIns="0" bIns="0">
             <a:spAutoFit/>
           </a:bodyPr>
           <a:lstStyle/>
@@ -4760,10 +4794,16 @@
                 <a:solidFill>
                   <a:srgbClr val="55544F"/>
                 </a:solidFill>
-                <a:latin typeface="Segoe UI"/>
+                <a:latin typeface="Segoe UI" panose="020B0502040204020203"/>
               </a:rPr>
               <a:t>Ils cumulent les trois déficits mesurés — desserte, présence d'agences, éloignement — pour une population qui les place au-delà du seuil où l'intervention devient rentable en nombre d'habitants touchés.</a:t>
             </a:r>
+            <a:endParaRPr sz="950" b="0">
+              <a:solidFill>
+                <a:srgbClr val="55544F"/>
+              </a:solidFill>
+              <a:latin typeface="Segoe UI" panose="020B0502040204020203"/>
+            </a:endParaRPr>
           </a:p>
         </p:txBody>
       </p:sp>
@@ -4828,7 +4868,7 @@
           <a:noFill/>
         </p:spPr>
         <p:txBody>
-          <a:bodyPr wrap="square" lIns="0" rIns="0" tIns="0" bIns="0">
+          <a:bodyPr wrap="square" lIns="0" tIns="0" rIns="0" bIns="0">
             <a:spAutoFit/>
           </a:bodyPr>
           <a:lstStyle/>
@@ -4843,10 +4883,16 @@
                 <a:solidFill>
                   <a:srgbClr val="12120F"/>
                 </a:solidFill>
-                <a:latin typeface="Segoe UI"/>
+                <a:latin typeface="Segoe UI" panose="020B0502040204020203"/>
               </a:rPr>
               <a:t>Pourquoi on peut le défendre</a:t>
             </a:r>
+            <a:endParaRPr sz="1100" b="1">
+              <a:solidFill>
+                <a:srgbClr val="12120F"/>
+              </a:solidFill>
+              <a:latin typeface="Segoe UI" panose="020B0502040204020203"/>
+            </a:endParaRPr>
           </a:p>
         </p:txBody>
       </p:sp>
@@ -4867,7 +4913,7 @@
           <a:noFill/>
         </p:spPr>
         <p:txBody>
-          <a:bodyPr wrap="square" lIns="0" rIns="0" tIns="0" bIns="0">
+          <a:bodyPr wrap="square" lIns="0" tIns="0" rIns="0" bIns="0">
             <a:spAutoFit/>
           </a:bodyPr>
           <a:lstStyle/>
@@ -4882,10 +4928,16 @@
                 <a:solidFill>
                   <a:srgbClr val="55544F"/>
                 </a:solidFill>
-                <a:latin typeface="Segoe UI"/>
+                <a:latin typeface="Segoe UI" panose="020B0502040204020203"/>
               </a:rPr>
               <a:t>2 000 pondérations testées, corrélation moyenne 0,971. 25 contrôles arithmétiques au vert. Aucune valeur imputée. Les approches écartées sont documentées avec leurs preuves.</a:t>
             </a:r>
+            <a:endParaRPr sz="950" b="0">
+              <a:solidFill>
+                <a:srgbClr val="55544F"/>
+              </a:solidFill>
+              <a:latin typeface="Segoe UI" panose="020B0502040204020203"/>
+            </a:endParaRPr>
           </a:p>
         </p:txBody>
       </p:sp>
@@ -4996,7 +5048,7 @@
           <a:noFill/>
         </p:spPr>
         <p:txBody>
-          <a:bodyPr wrap="square" lIns="0" rIns="0" tIns="0" bIns="0">
+          <a:bodyPr wrap="square" lIns="0" tIns="0" rIns="0" bIns="0">
             <a:spAutoFit/>
           </a:bodyPr>
           <a:lstStyle/>
@@ -5011,10 +5063,16 @@
                 <a:solidFill>
                   <a:srgbClr val="8B8A84"/>
                 </a:solidFill>
-                <a:latin typeface="Consolas"/>
+                <a:latin typeface="Consolas" panose="020B0609020204030204"/>
               </a:rPr>
               <a:t>TERRITOIRES PRIORITAIRES</a:t>
             </a:r>
+            <a:endParaRPr sz="750" b="1">
+              <a:solidFill>
+                <a:srgbClr val="8B8A84"/>
+              </a:solidFill>
+              <a:latin typeface="Consolas" panose="020B0609020204030204"/>
+            </a:endParaRPr>
           </a:p>
         </p:txBody>
       </p:sp>
@@ -5035,7 +5093,7 @@
           <a:noFill/>
         </p:spPr>
         <p:txBody>
-          <a:bodyPr wrap="square" lIns="0" rIns="0" tIns="0" bIns="0">
+          <a:bodyPr wrap="square" lIns="0" tIns="0" rIns="0" bIns="0">
             <a:spAutoFit/>
           </a:bodyPr>
           <a:lstStyle/>
@@ -5050,10 +5108,16 @@
                 <a:solidFill>
                   <a:srgbClr val="12120F"/>
                 </a:solidFill>
-                <a:latin typeface="Segoe UI"/>
+                <a:latin typeface="Segoe UI" panose="020B0502040204020203"/>
               </a:rPr>
               <a:t>9</a:t>
             </a:r>
+            <a:endParaRPr sz="2300" b="1">
+              <a:solidFill>
+                <a:srgbClr val="12120F"/>
+              </a:solidFill>
+              <a:latin typeface="Segoe UI" panose="020B0502040204020203"/>
+            </a:endParaRPr>
           </a:p>
         </p:txBody>
       </p:sp>
@@ -5074,7 +5138,7 @@
           <a:noFill/>
         </p:spPr>
         <p:txBody>
-          <a:bodyPr wrap="square" lIns="0" rIns="0" tIns="0" bIns="0">
+          <a:bodyPr wrap="square" lIns="0" tIns="0" rIns="0" bIns="0">
             <a:spAutoFit/>
           </a:bodyPr>
           <a:lstStyle/>
@@ -5089,10 +5153,16 @@
                 <a:solidFill>
                   <a:srgbClr val="55544F"/>
                 </a:solidFill>
-                <a:latin typeface="Segoe UI"/>
+                <a:latin typeface="Segoe UI" panose="020B0502040204020203"/>
               </a:rPr>
               <a:t>sur 39 préfectures</a:t>
             </a:r>
+            <a:endParaRPr sz="800" b="0">
+              <a:solidFill>
+                <a:srgbClr val="55544F"/>
+              </a:solidFill>
+              <a:latin typeface="Segoe UI" panose="020B0502040204020203"/>
+            </a:endParaRPr>
           </a:p>
         </p:txBody>
       </p:sp>
@@ -5203,7 +5273,7 @@
           <a:noFill/>
         </p:spPr>
         <p:txBody>
-          <a:bodyPr wrap="square" lIns="0" rIns="0" tIns="0" bIns="0">
+          <a:bodyPr wrap="square" lIns="0" tIns="0" rIns="0" bIns="0">
             <a:spAutoFit/>
           </a:bodyPr>
           <a:lstStyle/>
@@ -5218,10 +5288,16 @@
                 <a:solidFill>
                   <a:srgbClr val="8B8A84"/>
                 </a:solidFill>
-                <a:latin typeface="Consolas"/>
+                <a:latin typeface="Consolas" panose="020B0609020204030204"/>
               </a:rPr>
               <a:t>HABITANTS CONCERNÉS</a:t>
             </a:r>
+            <a:endParaRPr sz="750" b="1">
+              <a:solidFill>
+                <a:srgbClr val="8B8A84"/>
+              </a:solidFill>
+              <a:latin typeface="Consolas" panose="020B0609020204030204"/>
+            </a:endParaRPr>
           </a:p>
         </p:txBody>
       </p:sp>
@@ -5242,7 +5318,7 @@
           <a:noFill/>
         </p:spPr>
         <p:txBody>
-          <a:bodyPr wrap="square" lIns="0" rIns="0" tIns="0" bIns="0">
+          <a:bodyPr wrap="square" lIns="0" tIns="0" rIns="0" bIns="0">
             <a:spAutoFit/>
           </a:bodyPr>
           <a:lstStyle/>
@@ -5257,10 +5333,16 @@
                 <a:solidFill>
                   <a:srgbClr val="12120F"/>
                 </a:solidFill>
-                <a:latin typeface="Segoe UI"/>
+                <a:latin typeface="Segoe UI" panose="020B0502040204020203"/>
               </a:rPr>
               <a:t>1 080 723</a:t>
             </a:r>
+            <a:endParaRPr sz="2300" b="1">
+              <a:solidFill>
+                <a:srgbClr val="12120F"/>
+              </a:solidFill>
+              <a:latin typeface="Segoe UI" panose="020B0502040204020203"/>
+            </a:endParaRPr>
           </a:p>
         </p:txBody>
       </p:sp>
@@ -5281,7 +5363,7 @@
           <a:noFill/>
         </p:spPr>
         <p:txBody>
-          <a:bodyPr wrap="square" lIns="0" rIns="0" tIns="0" bIns="0">
+          <a:bodyPr wrap="square" lIns="0" tIns="0" rIns="0" bIns="0">
             <a:spAutoFit/>
           </a:bodyPr>
           <a:lstStyle/>
@@ -5296,10 +5378,16 @@
                 <a:solidFill>
                   <a:srgbClr val="55544F"/>
                 </a:solidFill>
-                <a:latin typeface="Segoe UI"/>
+                <a:latin typeface="Segoe UI" panose="020B0502040204020203"/>
               </a:rPr>
               <a:t>13% de la population</a:t>
             </a:r>
+            <a:endParaRPr sz="800" b="0">
+              <a:solidFill>
+                <a:srgbClr val="55544F"/>
+              </a:solidFill>
+              <a:latin typeface="Segoe UI" panose="020B0502040204020203"/>
+            </a:endParaRPr>
           </a:p>
         </p:txBody>
       </p:sp>
@@ -5410,7 +5498,7 @@
           <a:noFill/>
         </p:spPr>
         <p:txBody>
-          <a:bodyPr wrap="square" lIns="0" rIns="0" tIns="0" bIns="0">
+          <a:bodyPr wrap="square" lIns="0" tIns="0" rIns="0" bIns="0">
             <a:spAutoFit/>
           </a:bodyPr>
           <a:lstStyle/>
@@ -5425,10 +5513,16 @@
                 <a:solidFill>
                   <a:srgbClr val="8B8A84"/>
                 </a:solidFill>
-                <a:latin typeface="Consolas"/>
+                <a:latin typeface="Consolas" panose="020B0609020204030204"/>
               </a:rPr>
               <a:t>STABILITÉ DU CLASSEMENT</a:t>
             </a:r>
+            <a:endParaRPr sz="750" b="1">
+              <a:solidFill>
+                <a:srgbClr val="8B8A84"/>
+              </a:solidFill>
+              <a:latin typeface="Consolas" panose="020B0609020204030204"/>
+            </a:endParaRPr>
           </a:p>
         </p:txBody>
       </p:sp>
@@ -5449,7 +5543,7 @@
           <a:noFill/>
         </p:spPr>
         <p:txBody>
-          <a:bodyPr wrap="square" lIns="0" rIns="0" tIns="0" bIns="0">
+          <a:bodyPr wrap="square" lIns="0" tIns="0" rIns="0" bIns="0">
             <a:spAutoFit/>
           </a:bodyPr>
           <a:lstStyle/>
@@ -5464,10 +5558,16 @@
                 <a:solidFill>
                   <a:srgbClr val="12120F"/>
                 </a:solidFill>
-                <a:latin typeface="Segoe UI"/>
+                <a:latin typeface="Segoe UI" panose="020B0502040204020203"/>
               </a:rPr>
               <a:t>0,971</a:t>
             </a:r>
+            <a:endParaRPr sz="2300" b="1">
+              <a:solidFill>
+                <a:srgbClr val="12120F"/>
+              </a:solidFill>
+              <a:latin typeface="Segoe UI" panose="020B0502040204020203"/>
+            </a:endParaRPr>
           </a:p>
         </p:txBody>
       </p:sp>
@@ -5488,7 +5588,7 @@
           <a:noFill/>
         </p:spPr>
         <p:txBody>
-          <a:bodyPr wrap="square" lIns="0" rIns="0" tIns="0" bIns="0">
+          <a:bodyPr wrap="square" lIns="0" tIns="0" rIns="0" bIns="0">
             <a:spAutoFit/>
           </a:bodyPr>
           <a:lstStyle/>
@@ -5503,10 +5603,16 @@
                 <a:solidFill>
                   <a:srgbClr val="55544F"/>
                 </a:solidFill>
-                <a:latin typeface="Segoe UI"/>
+                <a:latin typeface="Segoe UI" panose="020B0502040204020203"/>
               </a:rPr>
               <a:t>corrélation sur 2 000 pondérations</a:t>
             </a:r>
+            <a:endParaRPr sz="800" b="0">
+              <a:solidFill>
+                <a:srgbClr val="55544F"/>
+              </a:solidFill>
+              <a:latin typeface="Segoe UI" panose="020B0502040204020203"/>
+            </a:endParaRPr>
           </a:p>
         </p:txBody>
       </p:sp>
@@ -5617,7 +5723,7 @@
           <a:noFill/>
         </p:spPr>
         <p:txBody>
-          <a:bodyPr wrap="square" lIns="0" rIns="0" tIns="0" bIns="0">
+          <a:bodyPr wrap="square" lIns="0" tIns="0" rIns="0" bIns="0">
             <a:spAutoFit/>
           </a:bodyPr>
           <a:lstStyle/>
@@ -5632,10 +5738,16 @@
                 <a:solidFill>
                   <a:srgbClr val="8B8A84"/>
                 </a:solidFill>
-                <a:latin typeface="Consolas"/>
+                <a:latin typeface="Consolas" panose="020B0609020204030204"/>
               </a:rPr>
               <a:t>CONTRÔLES AU VERT</a:t>
             </a:r>
+            <a:endParaRPr sz="750" b="1">
+              <a:solidFill>
+                <a:srgbClr val="8B8A84"/>
+              </a:solidFill>
+              <a:latin typeface="Consolas" panose="020B0609020204030204"/>
+            </a:endParaRPr>
           </a:p>
         </p:txBody>
       </p:sp>
@@ -5656,7 +5768,7 @@
           <a:noFill/>
         </p:spPr>
         <p:txBody>
-          <a:bodyPr wrap="square" lIns="0" rIns="0" tIns="0" bIns="0">
+          <a:bodyPr wrap="square" lIns="0" tIns="0" rIns="0" bIns="0">
             <a:spAutoFit/>
           </a:bodyPr>
           <a:lstStyle/>
@@ -5671,10 +5783,16 @@
                 <a:solidFill>
                   <a:srgbClr val="12120F"/>
                 </a:solidFill>
-                <a:latin typeface="Segoe UI"/>
+                <a:latin typeface="Segoe UI" panose="020B0502040204020203"/>
               </a:rPr>
               <a:t>25 / 25</a:t>
             </a:r>
+            <a:endParaRPr sz="2300" b="1">
+              <a:solidFill>
+                <a:srgbClr val="12120F"/>
+              </a:solidFill>
+              <a:latin typeface="Segoe UI" panose="020B0502040204020203"/>
+            </a:endParaRPr>
           </a:p>
         </p:txBody>
       </p:sp>
@@ -5695,7 +5813,7 @@
           <a:noFill/>
         </p:spPr>
         <p:txBody>
-          <a:bodyPr wrap="square" lIns="0" rIns="0" tIns="0" bIns="0">
+          <a:bodyPr wrap="square" lIns="0" tIns="0" rIns="0" bIns="0">
             <a:spAutoFit/>
           </a:bodyPr>
           <a:lstStyle/>
@@ -5710,10 +5828,16 @@
                 <a:solidFill>
                   <a:srgbClr val="55544F"/>
                 </a:solidFill>
-                <a:latin typeface="Segoe UI"/>
+                <a:latin typeface="Segoe UI" panose="020B0502040204020203"/>
               </a:rPr>
               <a:t>rejoués à chaque exécution</a:t>
             </a:r>
+            <a:endParaRPr sz="800" b="0">
+              <a:solidFill>
+                <a:srgbClr val="55544F"/>
+              </a:solidFill>
+              <a:latin typeface="Segoe UI" panose="020B0502040204020203"/>
+            </a:endParaRPr>
           </a:p>
         </p:txBody>
       </p:sp>
@@ -5824,7 +5948,7 @@
           <a:noFill/>
         </p:spPr>
         <p:txBody>
-          <a:bodyPr wrap="square" lIns="0" rIns="0" tIns="0" bIns="0">
+          <a:bodyPr wrap="square" lIns="0" tIns="0" rIns="0" bIns="0">
             <a:spAutoFit/>
           </a:bodyPr>
           <a:lstStyle/>
@@ -5839,10 +5963,16 @@
                 <a:solidFill>
                   <a:srgbClr val="55544F"/>
                 </a:solidFill>
-                <a:latin typeface="Segoe UI"/>
+                <a:latin typeface="Segoe UI" panose="020B0502040204020203"/>
               </a:rPr>
               <a:t>Ce que ce travail ne prétend pas faire : mesurer la couverture réseau. Compléter ce diagnostic exigerait l'ouverture des couches d'antennes du catalogue national — c'est la première recommandation adressée au producteur de données.</a:t>
             </a:r>
+            <a:endParaRPr sz="1000" b="0">
+              <a:solidFill>
+                <a:srgbClr val="55544F"/>
+              </a:solidFill>
+              <a:latin typeface="Segoe UI" panose="020B0502040204020203"/>
+            </a:endParaRPr>
           </a:p>
         </p:txBody>
       </p:sp>
@@ -5855,7 +5985,7 @@
 </file>
 
 <file path=ppt/slides/slide2.xml><?xml version="1.0" encoding="utf-8"?>
-<p:sld xmlns:a="http://schemas.openxmlformats.org/drawingml/2006/main" xmlns:p="http://schemas.openxmlformats.org/presentationml/2006/main" xmlns:r="http://schemas.openxmlformats.org/officeDocument/2006/relationships">
+<p:sld xmlns:a="http://schemas.openxmlformats.org/drawingml/2006/main" xmlns:r="http://schemas.openxmlformats.org/officeDocument/2006/relationships" xmlns:p="http://schemas.openxmlformats.org/presentationml/2006/main">
   <p:cSld>
     <p:spTree>
       <p:nvGrpSpPr>
@@ -6057,7 +6187,7 @@
           <a:noFill/>
         </p:spPr>
         <p:txBody>
-          <a:bodyPr wrap="square" lIns="0" rIns="0" tIns="0" bIns="0">
+          <a:bodyPr wrap="square" lIns="0" tIns="0" rIns="0" bIns="0">
             <a:spAutoFit/>
           </a:bodyPr>
           <a:lstStyle/>
@@ -6072,10 +6202,16 @@
                 <a:solidFill>
                   <a:srgbClr val="8B8A84"/>
                 </a:solidFill>
-                <a:latin typeface="Consolas"/>
+                <a:latin typeface="Consolas" panose="020B0609020204030204"/>
               </a:rPr>
               <a:t>DÉFI ÉCONOMIE NUMÉRIQUE · TOGO</a:t>
             </a:r>
+            <a:endParaRPr sz="900" b="1">
+              <a:solidFill>
+                <a:srgbClr val="8B8A84"/>
+              </a:solidFill>
+              <a:latin typeface="Consolas" panose="020B0609020204030204"/>
+            </a:endParaRPr>
           </a:p>
         </p:txBody>
       </p:sp>
@@ -6096,7 +6232,7 @@
           <a:noFill/>
         </p:spPr>
         <p:txBody>
-          <a:bodyPr wrap="square" lIns="0" rIns="0" tIns="0" bIns="0">
+          <a:bodyPr wrap="square" lIns="0" tIns="0" rIns="0" bIns="0">
             <a:spAutoFit/>
           </a:bodyPr>
           <a:lstStyle/>
@@ -6111,10 +6247,16 @@
                 <a:solidFill>
                   <a:srgbClr val="12120F"/>
                 </a:solidFill>
-                <a:latin typeface="Segoe UI"/>
+                <a:latin typeface="Segoe UI" panose="020B0502040204020203"/>
               </a:rPr>
               <a:t>Problématique et enjeux</a:t>
             </a:r>
+            <a:endParaRPr sz="2800" b="1">
+              <a:solidFill>
+                <a:srgbClr val="12120F"/>
+              </a:solidFill>
+              <a:latin typeface="Segoe UI" panose="020B0502040204020203"/>
+            </a:endParaRPr>
           </a:p>
         </p:txBody>
       </p:sp>
@@ -6223,7 +6365,7 @@
           <a:noFill/>
         </p:spPr>
         <p:txBody>
-          <a:bodyPr wrap="square" lIns="0" rIns="0" tIns="0" bIns="0">
+          <a:bodyPr wrap="square" lIns="0" tIns="0" rIns="0" bIns="0">
             <a:spAutoFit/>
           </a:bodyPr>
           <a:lstStyle/>
@@ -6238,10 +6380,16 @@
                 <a:solidFill>
                   <a:srgbClr val="0F4D3B"/>
                 </a:solidFill>
-                <a:latin typeface="Segoe UI"/>
+                <a:latin typeface="Segoe UI" panose="020B0502040204020203"/>
               </a:rPr>
               <a:t>L'accès aux services numériques au Togo n'est pas faible partout : il est très inégal — et l'inégalité se mesure.</a:t>
             </a:r>
+            <a:endParaRPr sz="1350" b="1">
+              <a:solidFill>
+                <a:srgbClr val="0F4D3B"/>
+              </a:solidFill>
+              <a:latin typeface="Segoe UI" panose="020B0502040204020203"/>
+            </a:endParaRPr>
           </a:p>
         </p:txBody>
       </p:sp>
@@ -6306,7 +6454,7 @@
           <a:noFill/>
         </p:spPr>
         <p:txBody>
-          <a:bodyPr wrap="square" lIns="0" rIns="0" tIns="0" bIns="0">
+          <a:bodyPr wrap="square" lIns="0" tIns="0" rIns="0" bIns="0">
             <a:spAutoFit/>
           </a:bodyPr>
           <a:lstStyle/>
@@ -6321,10 +6469,16 @@
                 <a:solidFill>
                   <a:srgbClr val="8B8A84"/>
                 </a:solidFill>
-                <a:latin typeface="Consolas"/>
+                <a:latin typeface="Consolas" panose="020B0609020204030204"/>
               </a:rPr>
               <a:t>République togolaise · Défi Économie numérique · Données ouvertes PRISE 2021-2022, RGPH-5 2022, COD-AB 2021</a:t>
             </a:r>
+            <a:endParaRPr sz="800" b="0">
+              <a:solidFill>
+                <a:srgbClr val="8B8A84"/>
+              </a:solidFill>
+              <a:latin typeface="Consolas" panose="020B0609020204030204"/>
+            </a:endParaRPr>
           </a:p>
         </p:txBody>
       </p:sp>
@@ -6345,7 +6499,7 @@
           <a:noFill/>
         </p:spPr>
         <p:txBody>
-          <a:bodyPr wrap="square" lIns="0" rIns="0" tIns="0" bIns="0">
+          <a:bodyPr wrap="square" lIns="0" tIns="0" rIns="0" bIns="0">
             <a:spAutoFit/>
           </a:bodyPr>
           <a:lstStyle/>
@@ -6360,10 +6514,16 @@
                 <a:solidFill>
                   <a:srgbClr val="8B8A84"/>
                 </a:solidFill>
-                <a:latin typeface="Consolas"/>
+                <a:latin typeface="Consolas" panose="020B0609020204030204"/>
               </a:rPr>
               <a:t>01 / 9</a:t>
             </a:r>
+            <a:endParaRPr sz="800" b="1">
+              <a:solidFill>
+                <a:srgbClr val="8B8A84"/>
+              </a:solidFill>
+              <a:latin typeface="Consolas" panose="020B0609020204030204"/>
+            </a:endParaRPr>
           </a:p>
         </p:txBody>
       </p:sp>
@@ -6384,7 +6544,7 @@
           <a:noFill/>
         </p:spPr>
         <p:txBody>
-          <a:bodyPr wrap="square" lIns="0" rIns="0" tIns="0" bIns="0">
+          <a:bodyPr wrap="square" lIns="0" tIns="0" rIns="0" bIns="0">
             <a:spAutoFit/>
           </a:bodyPr>
           <a:lstStyle/>
@@ -6399,10 +6559,16 @@
                 <a:solidFill>
                   <a:srgbClr val="12120F"/>
                 </a:solidFill>
-                <a:latin typeface="Segoe UI"/>
+                <a:latin typeface="Segoe UI" panose="020B0502040204020203"/>
               </a:rPr>
               <a:t>Où faut-il investir en priorité pour réduire les inégalités d'accès aux télécommunications et aux services numériques au Togo, et pourquoi ?</a:t>
             </a:r>
+            <a:endParaRPr sz="1700" b="1">
+              <a:solidFill>
+                <a:srgbClr val="12120F"/>
+              </a:solidFill>
+              <a:latin typeface="Segoe UI" panose="020B0502040204020203"/>
+            </a:endParaRPr>
           </a:p>
         </p:txBody>
       </p:sp>
@@ -6467,7 +6633,7 @@
           <a:noFill/>
         </p:spPr>
         <p:txBody>
-          <a:bodyPr wrap="square" lIns="0" rIns="0" tIns="0" bIns="0">
+          <a:bodyPr wrap="square" lIns="0" tIns="0" rIns="0" bIns="0">
             <a:spAutoFit/>
           </a:bodyPr>
           <a:lstStyle/>
@@ -6482,10 +6648,16 @@
                 <a:solidFill>
                   <a:srgbClr val="12120F"/>
                 </a:solidFill>
-                <a:latin typeface="Segoe UI"/>
+                <a:latin typeface="Segoe UI" panose="020B0502040204020203"/>
               </a:rPr>
               <a:t>Une moyenne nationale ne suffit pas à décider</a:t>
             </a:r>
+            <a:endParaRPr sz="1100" b="1">
+              <a:solidFill>
+                <a:srgbClr val="12120F"/>
+              </a:solidFill>
+              <a:latin typeface="Segoe UI" panose="020B0502040204020203"/>
+            </a:endParaRPr>
           </a:p>
         </p:txBody>
       </p:sp>
@@ -6506,7 +6678,7 @@
           <a:noFill/>
         </p:spPr>
         <p:txBody>
-          <a:bodyPr wrap="square" lIns="0" rIns="0" tIns="0" bIns="0">
+          <a:bodyPr wrap="square" lIns="0" tIns="0" rIns="0" bIns="0">
             <a:spAutoFit/>
           </a:bodyPr>
           <a:lstStyle/>
@@ -6521,10 +6693,16 @@
                 <a:solidFill>
                   <a:srgbClr val="55544F"/>
                 </a:solidFill>
-                <a:latin typeface="Segoe UI"/>
+                <a:latin typeface="Segoe UI" panose="020B0502040204020203"/>
               </a:rPr>
               <a:t>409 habitants par point Mobile Money en moyenne — mais un rapport de 1 à 12,7 entre préfectures. Agir « partout » revient à n'agir nulle part en priorité.</a:t>
             </a:r>
+            <a:endParaRPr sz="950" b="0">
+              <a:solidFill>
+                <a:srgbClr val="55544F"/>
+              </a:solidFill>
+              <a:latin typeface="Segoe UI" panose="020B0502040204020203"/>
+            </a:endParaRPr>
           </a:p>
         </p:txBody>
       </p:sp>
@@ -6589,7 +6767,7 @@
           <a:noFill/>
         </p:spPr>
         <p:txBody>
-          <a:bodyPr wrap="square" lIns="0" rIns="0" tIns="0" bIns="0">
+          <a:bodyPr wrap="square" lIns="0" tIns="0" rIns="0" bIns="0">
             <a:spAutoFit/>
           </a:bodyPr>
           <a:lstStyle/>
@@ -6604,10 +6782,16 @@
                 <a:solidFill>
                   <a:srgbClr val="12120F"/>
                 </a:solidFill>
-                <a:latin typeface="Segoe UI"/>
+                <a:latin typeface="Segoe UI" panose="020B0502040204020203"/>
               </a:rPr>
               <a:t>Un déficit se prouve, il ne se déclare pas</a:t>
             </a:r>
+            <a:endParaRPr sz="1100" b="1">
+              <a:solidFill>
+                <a:srgbClr val="12120F"/>
+              </a:solidFill>
+              <a:latin typeface="Segoe UI" panose="020B0502040204020203"/>
+            </a:endParaRPr>
           </a:p>
         </p:txBody>
       </p:sp>
@@ -6628,7 +6812,7 @@
           <a:noFill/>
         </p:spPr>
         <p:txBody>
-          <a:bodyPr wrap="square" lIns="0" rIns="0" tIns="0" bIns="0">
+          <a:bodyPr wrap="square" lIns="0" tIns="0" rIns="0" bIns="0">
             <a:spAutoFit/>
           </a:bodyPr>
           <a:lstStyle/>
@@ -6643,10 +6827,16 @@
                 <a:solidFill>
                   <a:srgbClr val="55544F"/>
                 </a:solidFill>
-                <a:latin typeface="Segoe UI"/>
+                <a:latin typeface="Segoe UI" panose="020B0502040204020203"/>
               </a:rPr>
               <a:t>Affirmer qu'un territoire est sous-desservi exige un dénominateur : la population. Sans elle, un faible comptage peut simplement refléter une faible démographie.</a:t>
             </a:r>
+            <a:endParaRPr sz="950" b="0">
+              <a:solidFill>
+                <a:srgbClr val="55544F"/>
+              </a:solidFill>
+              <a:latin typeface="Segoe UI" panose="020B0502040204020203"/>
+            </a:endParaRPr>
           </a:p>
         </p:txBody>
       </p:sp>
@@ -6711,7 +6901,7 @@
           <a:noFill/>
         </p:spPr>
         <p:txBody>
-          <a:bodyPr wrap="square" lIns="0" rIns="0" tIns="0" bIns="0">
+          <a:bodyPr wrap="square" lIns="0" tIns="0" rIns="0" bIns="0">
             <a:spAutoFit/>
           </a:bodyPr>
           <a:lstStyle/>
@@ -6726,10 +6916,16 @@
                 <a:solidFill>
                   <a:srgbClr val="12120F"/>
                 </a:solidFill>
-                <a:latin typeface="Segoe UI"/>
+                <a:latin typeface="Segoe UI" panose="020B0502040204020203"/>
               </a:rPr>
               <a:t>Une priorisation doit résister à la contestation</a:t>
             </a:r>
+            <a:endParaRPr sz="1100" b="1">
+              <a:solidFill>
+                <a:srgbClr val="12120F"/>
+              </a:solidFill>
+              <a:latin typeface="Segoe UI" panose="020B0502040204020203"/>
+            </a:endParaRPr>
           </a:p>
         </p:txBody>
       </p:sp>
@@ -6750,7 +6946,7 @@
           <a:noFill/>
         </p:spPr>
         <p:txBody>
-          <a:bodyPr wrap="square" lIns="0" rIns="0" tIns="0" bIns="0">
+          <a:bodyPr wrap="square" lIns="0" tIns="0" rIns="0" bIns="0">
             <a:spAutoFit/>
           </a:bodyPr>
           <a:lstStyle/>
@@ -6765,10 +6961,16 @@
                 <a:solidFill>
                   <a:srgbClr val="55544F"/>
                 </a:solidFill>
-                <a:latin typeface="Segoe UI"/>
+                <a:latin typeface="Segoe UI" panose="020B0502040204020203"/>
               </a:rPr>
               <a:t>Un classement dépendant de pondérations arbitraires n'est pas défendable. Il doit être testé, et sa stabilité publiée.</a:t>
             </a:r>
+            <a:endParaRPr sz="950" b="0">
+              <a:solidFill>
+                <a:srgbClr val="55544F"/>
+              </a:solidFill>
+              <a:latin typeface="Segoe UI" panose="020B0502040204020203"/>
+            </a:endParaRPr>
           </a:p>
         </p:txBody>
       </p:sp>
@@ -6879,7 +7081,7 @@
           <a:noFill/>
         </p:spPr>
         <p:txBody>
-          <a:bodyPr wrap="square" lIns="0" rIns="0" tIns="0" bIns="0">
+          <a:bodyPr wrap="square" lIns="0" tIns="0" rIns="0" bIns="0">
             <a:spAutoFit/>
           </a:bodyPr>
           <a:lstStyle/>
@@ -6894,10 +7096,16 @@
                 <a:solidFill>
                   <a:srgbClr val="8B8A84"/>
                 </a:solidFill>
-                <a:latin typeface="Consolas"/>
+                <a:latin typeface="Consolas" panose="020B0609020204030204"/>
               </a:rPr>
               <a:t>POPULATION RÉSIDENTE</a:t>
             </a:r>
+            <a:endParaRPr sz="750" b="1">
+              <a:solidFill>
+                <a:srgbClr val="8B8A84"/>
+              </a:solidFill>
+              <a:latin typeface="Consolas" panose="020B0609020204030204"/>
+            </a:endParaRPr>
           </a:p>
         </p:txBody>
       </p:sp>
@@ -6918,7 +7126,7 @@
           <a:noFill/>
         </p:spPr>
         <p:txBody>
-          <a:bodyPr wrap="square" lIns="0" rIns="0" tIns="0" bIns="0">
+          <a:bodyPr wrap="square" lIns="0" tIns="0" rIns="0" bIns="0">
             <a:spAutoFit/>
           </a:bodyPr>
           <a:lstStyle/>
@@ -6933,10 +7141,16 @@
                 <a:solidFill>
                   <a:srgbClr val="12120F"/>
                 </a:solidFill>
-                <a:latin typeface="Segoe UI"/>
+                <a:latin typeface="Segoe UI" panose="020B0502040204020203"/>
               </a:rPr>
               <a:t>8 095 498</a:t>
             </a:r>
+            <a:endParaRPr sz="2300" b="1">
+              <a:solidFill>
+                <a:srgbClr val="12120F"/>
+              </a:solidFill>
+              <a:latin typeface="Segoe UI" panose="020B0502040204020203"/>
+            </a:endParaRPr>
           </a:p>
         </p:txBody>
       </p:sp>
@@ -6957,7 +7171,7 @@
           <a:noFill/>
         </p:spPr>
         <p:txBody>
-          <a:bodyPr wrap="square" lIns="0" rIns="0" tIns="0" bIns="0">
+          <a:bodyPr wrap="square" lIns="0" tIns="0" rIns="0" bIns="0">
             <a:spAutoFit/>
           </a:bodyPr>
           <a:lstStyle/>
@@ -6972,10 +7186,16 @@
                 <a:solidFill>
                   <a:srgbClr val="55544F"/>
                 </a:solidFill>
-                <a:latin typeface="Segoe UI"/>
+                <a:latin typeface="Segoe UI" panose="020B0502040204020203"/>
               </a:rPr>
               <a:t>RGPH-5 · novembre 2022</a:t>
             </a:r>
+            <a:endParaRPr sz="800" b="0">
+              <a:solidFill>
+                <a:srgbClr val="55544F"/>
+              </a:solidFill>
+              <a:latin typeface="Segoe UI" panose="020B0502040204020203"/>
+            </a:endParaRPr>
           </a:p>
         </p:txBody>
       </p:sp>
@@ -7086,7 +7306,7 @@
           <a:noFill/>
         </p:spPr>
         <p:txBody>
-          <a:bodyPr wrap="square" lIns="0" rIns="0" tIns="0" bIns="0">
+          <a:bodyPr wrap="square" lIns="0" tIns="0" rIns="0" bIns="0">
             <a:spAutoFit/>
           </a:bodyPr>
           <a:lstStyle/>
@@ -7101,10 +7321,16 @@
                 <a:solidFill>
                   <a:srgbClr val="8B8A84"/>
                 </a:solidFill>
-                <a:latin typeface="Consolas"/>
+                <a:latin typeface="Consolas" panose="020B0609020204030204"/>
               </a:rPr>
               <a:t>POINTS DE SERVICE RECENSÉS</a:t>
             </a:r>
+            <a:endParaRPr sz="750" b="1">
+              <a:solidFill>
+                <a:srgbClr val="8B8A84"/>
+              </a:solidFill>
+              <a:latin typeface="Consolas" panose="020B0609020204030204"/>
+            </a:endParaRPr>
           </a:p>
         </p:txBody>
       </p:sp>
@@ -7125,7 +7351,7 @@
           <a:noFill/>
         </p:spPr>
         <p:txBody>
-          <a:bodyPr wrap="square" lIns="0" rIns="0" tIns="0" bIns="0">
+          <a:bodyPr wrap="square" lIns="0" tIns="0" rIns="0" bIns="0">
             <a:spAutoFit/>
           </a:bodyPr>
           <a:lstStyle/>
@@ -7140,10 +7366,16 @@
                 <a:solidFill>
                   <a:srgbClr val="12120F"/>
                 </a:solidFill>
-                <a:latin typeface="Segoe UI"/>
+                <a:latin typeface="Segoe UI" panose="020B0502040204020203"/>
               </a:rPr>
               <a:t>19 788</a:t>
             </a:r>
+            <a:endParaRPr sz="2300" b="1">
+              <a:solidFill>
+                <a:srgbClr val="12120F"/>
+              </a:solidFill>
+              <a:latin typeface="Segoe UI" panose="020B0502040204020203"/>
+            </a:endParaRPr>
           </a:p>
         </p:txBody>
       </p:sp>
@@ -7164,7 +7396,7 @@
           <a:noFill/>
         </p:spPr>
         <p:txBody>
-          <a:bodyPr wrap="square" lIns="0" rIns="0" tIns="0" bIns="0">
+          <a:bodyPr wrap="square" lIns="0" tIns="0" rIns="0" bIns="0">
             <a:spAutoFit/>
           </a:bodyPr>
           <a:lstStyle/>
@@ -7179,10 +7411,16 @@
                 <a:solidFill>
                   <a:srgbClr val="55544F"/>
                 </a:solidFill>
-                <a:latin typeface="Segoe UI"/>
+                <a:latin typeface="Segoe UI" panose="020B0502040204020203"/>
               </a:rPr>
               <a:t>tous géolocalisés</a:t>
             </a:r>
+            <a:endParaRPr sz="800" b="0">
+              <a:solidFill>
+                <a:srgbClr val="55544F"/>
+              </a:solidFill>
+              <a:latin typeface="Segoe UI" panose="020B0502040204020203"/>
+            </a:endParaRPr>
           </a:p>
         </p:txBody>
       </p:sp>
@@ -7293,7 +7531,7 @@
           <a:noFill/>
         </p:spPr>
         <p:txBody>
-          <a:bodyPr wrap="square" lIns="0" rIns="0" tIns="0" bIns="0">
+          <a:bodyPr wrap="square" lIns="0" tIns="0" rIns="0" bIns="0">
             <a:spAutoFit/>
           </a:bodyPr>
           <a:lstStyle/>
@@ -7308,10 +7546,16 @@
                 <a:solidFill>
                   <a:srgbClr val="8B8A84"/>
                 </a:solidFill>
-                <a:latin typeface="Consolas"/>
+                <a:latin typeface="Consolas" panose="020B0609020204030204"/>
               </a:rPr>
               <a:t>PRÉFECTURES SANS AUCUNE AGENCE</a:t>
             </a:r>
+            <a:endParaRPr sz="750" b="1">
+              <a:solidFill>
+                <a:srgbClr val="8B8A84"/>
+              </a:solidFill>
+              <a:latin typeface="Consolas" panose="020B0609020204030204"/>
+            </a:endParaRPr>
           </a:p>
         </p:txBody>
       </p:sp>
@@ -7332,7 +7576,7 @@
           <a:noFill/>
         </p:spPr>
         <p:txBody>
-          <a:bodyPr wrap="square" lIns="0" rIns="0" tIns="0" bIns="0">
+          <a:bodyPr wrap="square" lIns="0" tIns="0" rIns="0" bIns="0">
             <a:spAutoFit/>
           </a:bodyPr>
           <a:lstStyle/>
@@ -7347,10 +7591,16 @@
                 <a:solidFill>
                   <a:srgbClr val="12120F"/>
                 </a:solidFill>
-                <a:latin typeface="Segoe UI"/>
+                <a:latin typeface="Segoe UI" panose="020B0502040204020203"/>
               </a:rPr>
               <a:t>13 / 39</a:t>
             </a:r>
+            <a:endParaRPr sz="2300" b="1">
+              <a:solidFill>
+                <a:srgbClr val="12120F"/>
+              </a:solidFill>
+              <a:latin typeface="Segoe UI" panose="020B0502040204020203"/>
+            </a:endParaRPr>
           </a:p>
         </p:txBody>
       </p:sp>
@@ -7371,7 +7621,7 @@
           <a:noFill/>
         </p:spPr>
         <p:txBody>
-          <a:bodyPr wrap="square" lIns="0" rIns="0" tIns="0" bIns="0">
+          <a:bodyPr wrap="square" lIns="0" tIns="0" rIns="0" bIns="0">
             <a:spAutoFit/>
           </a:bodyPr>
           <a:lstStyle/>
@@ -7386,10 +7636,16 @@
                 <a:solidFill>
                   <a:srgbClr val="55544F"/>
                 </a:solidFill>
-                <a:latin typeface="Segoe UI"/>
+                <a:latin typeface="Segoe UI" panose="020B0502040204020203"/>
               </a:rPr>
               <a:t>1 621 720 habitants</a:t>
             </a:r>
+            <a:endParaRPr sz="800" b="0">
+              <a:solidFill>
+                <a:srgbClr val="55544F"/>
+              </a:solidFill>
+              <a:latin typeface="Segoe UI" panose="020B0502040204020203"/>
+            </a:endParaRPr>
           </a:p>
         </p:txBody>
       </p:sp>
@@ -7500,7 +7756,7 @@
           <a:noFill/>
         </p:spPr>
         <p:txBody>
-          <a:bodyPr wrap="square" lIns="0" rIns="0" tIns="0" bIns="0">
+          <a:bodyPr wrap="square" lIns="0" tIns="0" rIns="0" bIns="0">
             <a:spAutoFit/>
           </a:bodyPr>
           <a:lstStyle/>
@@ -7515,10 +7771,16 @@
                 <a:solidFill>
                   <a:srgbClr val="8B8A84"/>
                 </a:solidFill>
-                <a:latin typeface="Consolas"/>
+                <a:latin typeface="Consolas" panose="020B0609020204030204"/>
               </a:rPr>
               <a:t>TERRITOIRES PRIORITAIRES IDENTIFIÉS</a:t>
             </a:r>
+            <a:endParaRPr sz="750" b="1">
+              <a:solidFill>
+                <a:srgbClr val="8B8A84"/>
+              </a:solidFill>
+              <a:latin typeface="Consolas" panose="020B0609020204030204"/>
+            </a:endParaRPr>
           </a:p>
         </p:txBody>
       </p:sp>
@@ -7539,7 +7801,7 @@
           <a:noFill/>
         </p:spPr>
         <p:txBody>
-          <a:bodyPr wrap="square" lIns="0" rIns="0" tIns="0" bIns="0">
+          <a:bodyPr wrap="square" lIns="0" tIns="0" rIns="0" bIns="0">
             <a:spAutoFit/>
           </a:bodyPr>
           <a:lstStyle/>
@@ -7554,10 +7816,16 @@
                 <a:solidFill>
                   <a:srgbClr val="12120F"/>
                 </a:solidFill>
-                <a:latin typeface="Segoe UI"/>
+                <a:latin typeface="Segoe UI" panose="020B0502040204020203"/>
               </a:rPr>
               <a:t>9</a:t>
             </a:r>
+            <a:endParaRPr sz="2300" b="1">
+              <a:solidFill>
+                <a:srgbClr val="12120F"/>
+              </a:solidFill>
+              <a:latin typeface="Segoe UI" panose="020B0502040204020203"/>
+            </a:endParaRPr>
           </a:p>
         </p:txBody>
       </p:sp>
@@ -7578,7 +7846,7 @@
           <a:noFill/>
         </p:spPr>
         <p:txBody>
-          <a:bodyPr wrap="square" lIns="0" rIns="0" tIns="0" bIns="0">
+          <a:bodyPr wrap="square" lIns="0" tIns="0" rIns="0" bIns="0">
             <a:spAutoFit/>
           </a:bodyPr>
           <a:lstStyle/>
@@ -7593,10 +7861,16 @@
                 <a:solidFill>
                   <a:srgbClr val="55544F"/>
                 </a:solidFill>
-                <a:latin typeface="Segoe UI"/>
+                <a:latin typeface="Segoe UI" panose="020B0502040204020203"/>
               </a:rPr>
               <a:t>priorité stable sur 2 000 pondérations</a:t>
             </a:r>
+            <a:endParaRPr sz="800" b="0">
+              <a:solidFill>
+                <a:srgbClr val="55544F"/>
+              </a:solidFill>
+              <a:latin typeface="Segoe UI" panose="020B0502040204020203"/>
+            </a:endParaRPr>
           </a:p>
         </p:txBody>
       </p:sp>
@@ -7609,7 +7883,7 @@
 </file>
 
 <file path=ppt/slides/slide3.xml><?xml version="1.0" encoding="utf-8"?>
-<p:sld xmlns:a="http://schemas.openxmlformats.org/drawingml/2006/main" xmlns:p="http://schemas.openxmlformats.org/presentationml/2006/main" xmlns:r="http://schemas.openxmlformats.org/officeDocument/2006/relationships">
+<p:sld xmlns:a="http://schemas.openxmlformats.org/drawingml/2006/main" xmlns:r="http://schemas.openxmlformats.org/officeDocument/2006/relationships" xmlns:p="http://schemas.openxmlformats.org/presentationml/2006/main">
   <p:cSld>
     <p:spTree>
       <p:nvGrpSpPr>
@@ -7811,7 +8085,7 @@
           <a:noFill/>
         </p:spPr>
         <p:txBody>
-          <a:bodyPr wrap="square" lIns="0" rIns="0" tIns="0" bIns="0">
+          <a:bodyPr wrap="square" lIns="0" tIns="0" rIns="0" bIns="0">
             <a:spAutoFit/>
           </a:bodyPr>
           <a:lstStyle/>
@@ -7826,10 +8100,16 @@
                 <a:solidFill>
                   <a:srgbClr val="8B8A84"/>
                 </a:solidFill>
-                <a:latin typeface="Consolas"/>
+                <a:latin typeface="Consolas" panose="020B0609020204030204"/>
               </a:rPr>
               <a:t>DONNÉES</a:t>
             </a:r>
+            <a:endParaRPr sz="900" b="1">
+              <a:solidFill>
+                <a:srgbClr val="8B8A84"/>
+              </a:solidFill>
+              <a:latin typeface="Consolas" panose="020B0609020204030204"/>
+            </a:endParaRPr>
           </a:p>
         </p:txBody>
       </p:sp>
@@ -7850,7 +8130,7 @@
           <a:noFill/>
         </p:spPr>
         <p:txBody>
-          <a:bodyPr wrap="square" lIns="0" rIns="0" tIns="0" bIns="0">
+          <a:bodyPr wrap="square" lIns="0" tIns="0" rIns="0" bIns="0">
             <a:spAutoFit/>
           </a:bodyPr>
           <a:lstStyle/>
@@ -7865,10 +8145,16 @@
                 <a:solidFill>
                   <a:srgbClr val="12120F"/>
                 </a:solidFill>
-                <a:latin typeface="Segoe UI"/>
+                <a:latin typeface="Segoe UI" panose="020B0502040204020203"/>
               </a:rPr>
               <a:t>Données, sources et qualité</a:t>
             </a:r>
+            <a:endParaRPr sz="2800" b="1">
+              <a:solidFill>
+                <a:srgbClr val="12120F"/>
+              </a:solidFill>
+              <a:latin typeface="Segoe UI" panose="020B0502040204020203"/>
+            </a:endParaRPr>
           </a:p>
         </p:txBody>
       </p:sp>
@@ -7977,7 +8263,7 @@
           <a:noFill/>
         </p:spPr>
         <p:txBody>
-          <a:bodyPr wrap="square" lIns="0" rIns="0" tIns="0" bIns="0">
+          <a:bodyPr wrap="square" lIns="0" tIns="0" rIns="0" bIns="0">
             <a:spAutoFit/>
           </a:bodyPr>
           <a:lstStyle/>
@@ -7992,10 +8278,16 @@
                 <a:solidFill>
                   <a:srgbClr val="0F4D3B"/>
                 </a:solidFill>
-                <a:latin typeface="Segoe UI"/>
+                <a:latin typeface="Segoe UI" panose="020B0502040204020203"/>
               </a:rPr>
               <a:t>Trois sources publiques, trois producteurs — et deux constats qui corrigent l'énoncé du défi : 2 opérateurs et non 4, 90 agences et non 141.</a:t>
             </a:r>
+            <a:endParaRPr sz="1350" b="1">
+              <a:solidFill>
+                <a:srgbClr val="0F4D3B"/>
+              </a:solidFill>
+              <a:latin typeface="Segoe UI" panose="020B0502040204020203"/>
+            </a:endParaRPr>
           </a:p>
         </p:txBody>
       </p:sp>
@@ -8060,7 +8352,7 @@
           <a:noFill/>
         </p:spPr>
         <p:txBody>
-          <a:bodyPr wrap="square" lIns="0" rIns="0" tIns="0" bIns="0">
+          <a:bodyPr wrap="square" lIns="0" tIns="0" rIns="0" bIns="0">
             <a:spAutoFit/>
           </a:bodyPr>
           <a:lstStyle/>
@@ -8075,10 +8367,16 @@
                 <a:solidFill>
                   <a:srgbClr val="8B8A84"/>
                 </a:solidFill>
-                <a:latin typeface="Consolas"/>
+                <a:latin typeface="Consolas" panose="020B0609020204030204"/>
               </a:rPr>
               <a:t>République togolaise · Défi Économie numérique · Données ouvertes PRISE 2021-2022, RGPH-5 2022, COD-AB 2021</a:t>
             </a:r>
+            <a:endParaRPr sz="800" b="0">
+              <a:solidFill>
+                <a:srgbClr val="8B8A84"/>
+              </a:solidFill>
+              <a:latin typeface="Consolas" panose="020B0609020204030204"/>
+            </a:endParaRPr>
           </a:p>
         </p:txBody>
       </p:sp>
@@ -8099,7 +8397,7 @@
           <a:noFill/>
         </p:spPr>
         <p:txBody>
-          <a:bodyPr wrap="square" lIns="0" rIns="0" tIns="0" bIns="0">
+          <a:bodyPr wrap="square" lIns="0" tIns="0" rIns="0" bIns="0">
             <a:spAutoFit/>
           </a:bodyPr>
           <a:lstStyle/>
@@ -8114,10 +8412,16 @@
                 <a:solidFill>
                   <a:srgbClr val="8B8A84"/>
                 </a:solidFill>
-                <a:latin typeface="Consolas"/>
+                <a:latin typeface="Consolas" panose="020B0609020204030204"/>
               </a:rPr>
               <a:t>02 / 9</a:t>
             </a:r>
+            <a:endParaRPr sz="800" b="1">
+              <a:solidFill>
+                <a:srgbClr val="8B8A84"/>
+              </a:solidFill>
+              <a:latin typeface="Consolas" panose="020B0609020204030204"/>
+            </a:endParaRPr>
           </a:p>
         </p:txBody>
       </p:sp>
@@ -8156,10 +8460,16 @@
                           <a:solidFill>
                             <a:srgbClr val="FFFFFF"/>
                           </a:solidFill>
-                          <a:latin typeface="Segoe UI"/>
+                          <a:latin typeface="Segoe UI" panose="020B0502040204020203"/>
                         </a:rPr>
                         <a:t>Donnée</a:t>
                       </a:r>
+                      <a:endParaRPr sz="950" b="1">
+                        <a:solidFill>
+                          <a:srgbClr val="FFFFFF"/>
+                        </a:solidFill>
+                        <a:latin typeface="Segoe UI" panose="020B0502040204020203"/>
+                      </a:endParaRPr>
                     </a:p>
                   </a:txBody>
                   <a:tcPr anchor="ctr">
@@ -8178,10 +8488,16 @@
                           <a:solidFill>
                             <a:srgbClr val="FFFFFF"/>
                           </a:solidFill>
-                          <a:latin typeface="Segoe UI"/>
+                          <a:latin typeface="Segoe UI" panose="020B0502040204020203"/>
                         </a:rPr>
                         <a:t>Producteur</a:t>
                       </a:r>
+                      <a:endParaRPr sz="950" b="1">
+                        <a:solidFill>
+                          <a:srgbClr val="FFFFFF"/>
+                        </a:solidFill>
+                        <a:latin typeface="Segoe UI" panose="020B0502040204020203"/>
+                      </a:endParaRPr>
                     </a:p>
                   </a:txBody>
                   <a:tcPr anchor="ctr">
@@ -8200,10 +8516,16 @@
                           <a:solidFill>
                             <a:srgbClr val="FFFFFF"/>
                           </a:solidFill>
-                          <a:latin typeface="Segoe UI"/>
+                          <a:latin typeface="Segoe UI" panose="020B0502040204020203"/>
                         </a:rPr>
                         <a:t>Période</a:t>
                       </a:r>
+                      <a:endParaRPr sz="950" b="1">
+                        <a:solidFill>
+                          <a:srgbClr val="FFFFFF"/>
+                        </a:solidFill>
+                        <a:latin typeface="Segoe UI" panose="020B0502040204020203"/>
+                      </a:endParaRPr>
                     </a:p>
                   </a:txBody>
                   <a:tcPr anchor="ctr">
@@ -8222,10 +8544,16 @@
                           <a:solidFill>
                             <a:srgbClr val="FFFFFF"/>
                           </a:solidFill>
-                          <a:latin typeface="Segoe UI"/>
+                          <a:latin typeface="Segoe UI" panose="020B0502040204020203"/>
                         </a:rPr>
                         <a:t>Ce qu'elle apporte</a:t>
                       </a:r>
+                      <a:endParaRPr sz="950" b="1">
+                        <a:solidFill>
+                          <a:srgbClr val="FFFFFF"/>
+                        </a:solidFill>
+                        <a:latin typeface="Segoe UI" panose="020B0502040204020203"/>
+                      </a:endParaRPr>
                     </a:p>
                   </a:txBody>
                   <a:tcPr anchor="ctr">
@@ -8246,10 +8574,16 @@
                           <a:solidFill>
                             <a:srgbClr val="12120F"/>
                           </a:solidFill>
-                          <a:latin typeface="Segoe UI"/>
+                          <a:latin typeface="Segoe UI" panose="020B0502040204020203"/>
                         </a:rPr>
                         <a:t>Agences, agents Mobile Money, data centers</a:t>
                       </a:r>
+                      <a:endParaRPr sz="950" b="1">
+                        <a:solidFill>
+                          <a:srgbClr val="12120F"/>
+                        </a:solidFill>
+                        <a:latin typeface="Segoe UI" panose="020B0502040204020203"/>
+                      </a:endParaRPr>
                     </a:p>
                   </a:txBody>
                   <a:tcPr anchor="ctr">
@@ -8268,10 +8602,16 @@
                           <a:solidFill>
                             <a:srgbClr val="55544F"/>
                           </a:solidFill>
-                          <a:latin typeface="Segoe UI"/>
+                          <a:latin typeface="Segoe UI" panose="020B0502040204020203"/>
                         </a:rPr>
                         <a:t>Géoportail national du Togo</a:t>
                       </a:r>
+                      <a:endParaRPr sz="950" b="0">
+                        <a:solidFill>
+                          <a:srgbClr val="55544F"/>
+                        </a:solidFill>
+                        <a:latin typeface="Segoe UI" panose="020B0502040204020203"/>
+                      </a:endParaRPr>
                     </a:p>
                   </a:txBody>
                   <a:tcPr anchor="ctr">
@@ -8290,10 +8630,16 @@
                           <a:solidFill>
                             <a:srgbClr val="55544F"/>
                           </a:solidFill>
-                          <a:latin typeface="Segoe UI"/>
+                          <a:latin typeface="Segoe UI" panose="020B0502040204020203"/>
                         </a:rPr>
                         <a:t>Collecte 2021-2022</a:t>
                       </a:r>
+                      <a:endParaRPr sz="950" b="0">
+                        <a:solidFill>
+                          <a:srgbClr val="55544F"/>
+                        </a:solidFill>
+                        <a:latin typeface="Segoe UI" panose="020B0502040204020203"/>
+                      </a:endParaRPr>
                     </a:p>
                   </a:txBody>
                   <a:tcPr anchor="ctr">
@@ -8312,10 +8658,16 @@
                           <a:solidFill>
                             <a:srgbClr val="55544F"/>
                           </a:solidFill>
-                          <a:latin typeface="Segoe UI"/>
+                          <a:latin typeface="Segoe UI" panose="020B0502040204020203"/>
                         </a:rPr>
                         <a:t>Localisation de chaque équipement</a:t>
                       </a:r>
+                      <a:endParaRPr sz="950" b="0">
+                        <a:solidFill>
+                          <a:srgbClr val="55544F"/>
+                        </a:solidFill>
+                        <a:latin typeface="Segoe UI" panose="020B0502040204020203"/>
+                      </a:endParaRPr>
                     </a:p>
                   </a:txBody>
                   <a:tcPr anchor="ctr">
@@ -8336,10 +8688,16 @@
                           <a:solidFill>
                             <a:srgbClr val="12120F"/>
                           </a:solidFill>
-                          <a:latin typeface="Segoe UI"/>
+                          <a:latin typeface="Segoe UI" panose="020B0502040204020203"/>
                         </a:rPr>
                         <a:t>Population résidente</a:t>
                       </a:r>
+                      <a:endParaRPr sz="950" b="1">
+                        <a:solidFill>
+                          <a:srgbClr val="12120F"/>
+                        </a:solidFill>
+                        <a:latin typeface="Segoe UI" panose="020B0502040204020203"/>
+                      </a:endParaRPr>
                     </a:p>
                   </a:txBody>
                   <a:tcPr anchor="ctr">
@@ -8358,10 +8716,16 @@
                           <a:solidFill>
                             <a:srgbClr val="55544F"/>
                           </a:solidFill>
-                          <a:latin typeface="Segoe UI"/>
+                          <a:latin typeface="Segoe UI" panose="020B0502040204020203"/>
                         </a:rPr>
                         <a:t>INSEED — 5ᵉ recensement (RGPH-5)</a:t>
                       </a:r>
+                      <a:endParaRPr sz="950" b="0">
+                        <a:solidFill>
+                          <a:srgbClr val="55544F"/>
+                        </a:solidFill>
+                        <a:latin typeface="Segoe UI" panose="020B0502040204020203"/>
+                      </a:endParaRPr>
                     </a:p>
                   </a:txBody>
                   <a:tcPr anchor="ctr">
@@ -8380,10 +8744,16 @@
                           <a:solidFill>
                             <a:srgbClr val="55544F"/>
                           </a:solidFill>
-                          <a:latin typeface="Segoe UI"/>
+                          <a:latin typeface="Segoe UI" panose="020B0502040204020203"/>
                         </a:rPr>
                         <a:t>23 oct. – 16 nov. 2022</a:t>
                       </a:r>
+                      <a:endParaRPr sz="950" b="0">
+                        <a:solidFill>
+                          <a:srgbClr val="55544F"/>
+                        </a:solidFill>
+                        <a:latin typeface="Segoe UI" panose="020B0502040204020203"/>
+                      </a:endParaRPr>
                     </a:p>
                   </a:txBody>
                   <a:tcPr anchor="ctr">
@@ -8402,10 +8772,16 @@
                           <a:solidFill>
                             <a:srgbClr val="55544F"/>
                           </a:solidFill>
-                          <a:latin typeface="Segoe UI"/>
+                          <a:latin typeface="Segoe UI" panose="020B0502040204020203"/>
                         </a:rPr>
                         <a:t>Le dénominateur de tous les ratios</a:t>
                       </a:r>
+                      <a:endParaRPr sz="950" b="0">
+                        <a:solidFill>
+                          <a:srgbClr val="55544F"/>
+                        </a:solidFill>
+                        <a:latin typeface="Segoe UI" panose="020B0502040204020203"/>
+                      </a:endParaRPr>
                     </a:p>
                   </a:txBody>
                   <a:tcPr anchor="ctr">
@@ -8426,10 +8802,16 @@
                           <a:solidFill>
                             <a:srgbClr val="12120F"/>
                           </a:solidFill>
-                          <a:latin typeface="Segoe UI"/>
+                          <a:latin typeface="Segoe UI" panose="020B0502040204020203"/>
                         </a:rPr>
                         <a:t>Limites administratives et superficies</a:t>
                       </a:r>
+                      <a:endParaRPr sz="950" b="1">
+                        <a:solidFill>
+                          <a:srgbClr val="12120F"/>
+                        </a:solidFill>
+                        <a:latin typeface="Segoe UI" panose="020B0502040204020203"/>
+                      </a:endParaRPr>
                     </a:p>
                   </a:txBody>
                   <a:tcPr anchor="ctr">
@@ -8448,10 +8830,16 @@
                           <a:solidFill>
                             <a:srgbClr val="55544F"/>
                           </a:solidFill>
-                          <a:latin typeface="Segoe UI"/>
+                          <a:latin typeface="Segoe UI" panose="020B0502040204020203"/>
                         </a:rPr>
                         <a:t>Common Operational Datasets (OCHA)</a:t>
                       </a:r>
+                      <a:endParaRPr sz="950" b="0">
+                        <a:solidFill>
+                          <a:srgbClr val="55544F"/>
+                        </a:solidFill>
+                        <a:latin typeface="Segoe UI" panose="020B0502040204020203"/>
+                      </a:endParaRPr>
                     </a:p>
                   </a:txBody>
                   <a:tcPr anchor="ctr">
@@ -8470,10 +8858,16 @@
                           <a:solidFill>
                             <a:srgbClr val="55544F"/>
                           </a:solidFill>
-                          <a:latin typeface="Segoe UI"/>
+                          <a:latin typeface="Segoe UI" panose="020B0502040204020203"/>
                         </a:rPr>
                         <a:t>Valides au 07/01/2021</a:t>
                       </a:r>
+                      <a:endParaRPr sz="950" b="0">
+                        <a:solidFill>
+                          <a:srgbClr val="55544F"/>
+                        </a:solidFill>
+                        <a:latin typeface="Segoe UI" panose="020B0502040204020203"/>
+                      </a:endParaRPr>
                     </a:p>
                   </a:txBody>
                   <a:tcPr anchor="ctr">
@@ -8492,10 +8886,16 @@
                           <a:solidFill>
                             <a:srgbClr val="55544F"/>
                           </a:solidFill>
-                          <a:latin typeface="Segoe UI"/>
+                          <a:latin typeface="Segoe UI" panose="020B0502040204020203"/>
                         </a:rPr>
                         <a:t>Contours, densités, distances</a:t>
                       </a:r>
+                      <a:endParaRPr sz="950" b="0">
+                        <a:solidFill>
+                          <a:srgbClr val="55544F"/>
+                        </a:solidFill>
+                        <a:latin typeface="Segoe UI" panose="020B0502040204020203"/>
+                      </a:endParaRPr>
                     </a:p>
                   </a:txBody>
                   <a:tcPr anchor="ctr">
@@ -8616,7 +9016,7 @@
           <a:noFill/>
         </p:spPr>
         <p:txBody>
-          <a:bodyPr wrap="square" lIns="0" rIns="0" tIns="0" bIns="0">
+          <a:bodyPr wrap="square" lIns="0" tIns="0" rIns="0" bIns="0">
             <a:spAutoFit/>
           </a:bodyPr>
           <a:lstStyle/>
@@ -8631,10 +9031,16 @@
                 <a:solidFill>
                   <a:srgbClr val="8B8A84"/>
                 </a:solidFill>
-                <a:latin typeface="Consolas"/>
+                <a:latin typeface="Consolas" panose="020B0609020204030204"/>
               </a:rPr>
               <a:t>LA DONNÉE QUI MANQUE</a:t>
             </a:r>
+            <a:endParaRPr sz="800" b="1">
+              <a:solidFill>
+                <a:srgbClr val="8B8A84"/>
+              </a:solidFill>
+              <a:latin typeface="Consolas" panose="020B0609020204030204"/>
+            </a:endParaRPr>
           </a:p>
         </p:txBody>
       </p:sp>
@@ -8655,7 +9061,7 @@
           <a:noFill/>
         </p:spPr>
         <p:txBody>
-          <a:bodyPr wrap="square" lIns="0" rIns="0" tIns="0" bIns="0">
+          <a:bodyPr wrap="square" lIns="0" tIns="0" rIns="0" bIns="0">
             <a:spAutoFit/>
           </a:bodyPr>
           <a:lstStyle/>
@@ -8670,10 +9076,16 @@
                 <a:solidFill>
                   <a:srgbClr val="55544F"/>
                 </a:solidFill>
-                <a:latin typeface="Segoe UI"/>
+                <a:latin typeface="Segoe UI" panose="020B0502040204020203"/>
               </a:rPr>
               <a:t>Aucune mesure de couverture réseau mobile n'existe dans les sources ouvertes mobilisées. Ce travail mesure un déficit d'accès aux services — pas une absence de réseau.</a:t>
             </a:r>
+            <a:endParaRPr sz="1050" b="0">
+              <a:solidFill>
+                <a:srgbClr val="55544F"/>
+              </a:solidFill>
+              <a:latin typeface="Segoe UI" panose="020B0502040204020203"/>
+            </a:endParaRPr>
           </a:p>
         </p:txBody>
       </p:sp>
@@ -8738,7 +9150,7 @@
           <a:noFill/>
         </p:spPr>
         <p:txBody>
-          <a:bodyPr wrap="square" lIns="0" rIns="0" tIns="0" bIns="0">
+          <a:bodyPr wrap="square" lIns="0" tIns="0" rIns="0" bIns="0">
             <a:spAutoFit/>
           </a:bodyPr>
           <a:lstStyle/>
@@ -8753,10 +9165,16 @@
                 <a:solidFill>
                   <a:srgbClr val="12120F"/>
                 </a:solidFill>
-                <a:latin typeface="Segoe UI"/>
+                <a:latin typeface="Segoe UI" panose="020B0502040204020203"/>
               </a:rPr>
               <a:t>« Agences – Télécom » n'est pas un quatrième opérateur</a:t>
             </a:r>
+            <a:endParaRPr sz="1100" b="1">
+              <a:solidFill>
+                <a:srgbClr val="12120F"/>
+              </a:solidFill>
+              <a:latin typeface="Segoe UI" panose="020B0502040204020203"/>
+            </a:endParaRPr>
           </a:p>
         </p:txBody>
       </p:sp>
@@ -8777,7 +9195,7 @@
           <a:noFill/>
         </p:spPr>
         <p:txBody>
-          <a:bodyPr wrap="square" lIns="0" rIns="0" tIns="0" bIns="0">
+          <a:bodyPr wrap="square" lIns="0" tIns="0" rIns="0" bIns="0">
             <a:spAutoFit/>
           </a:bodyPr>
           <a:lstStyle/>
@@ -8792,10 +9210,16 @@
                 <a:solidFill>
                   <a:srgbClr val="55544F"/>
                 </a:solidFill>
-                <a:latin typeface="Segoe UI"/>
+                <a:latin typeface="Segoe UI" panose="020B0502040204020203"/>
               </a:rPr>
               <a:t>Ses 51 lignes sont déjà contenues dans les fichiers Moov et Togocom réunis, sans un seul enregistrement propre. Empiler les quatre fichiers afficherait 141 agences au lieu de 90 — 57 % de surestimation dès le premier indicateur.</a:t>
             </a:r>
+            <a:endParaRPr sz="950" b="0">
+              <a:solidFill>
+                <a:srgbClr val="55544F"/>
+              </a:solidFill>
+              <a:latin typeface="Segoe UI" panose="020B0502040204020203"/>
+            </a:endParaRPr>
           </a:p>
         </p:txBody>
       </p:sp>
@@ -8860,7 +9284,7 @@
           <a:noFill/>
         </p:spPr>
         <p:txBody>
-          <a:bodyPr wrap="square" lIns="0" rIns="0" tIns="0" bIns="0">
+          <a:bodyPr wrap="square" lIns="0" tIns="0" rIns="0" bIns="0">
             <a:spAutoFit/>
           </a:bodyPr>
           <a:lstStyle/>
@@ -8875,10 +9299,16 @@
                 <a:solidFill>
                   <a:srgbClr val="12120F"/>
                 </a:solidFill>
-                <a:latin typeface="Segoe UI"/>
+                <a:latin typeface="Segoe UI" panose="020B0502040204020203"/>
               </a:rPr>
               <a:t>« Agences – CANAL+ » est vide à la source</a:t>
             </a:r>
+            <a:endParaRPr sz="1100" b="1">
+              <a:solidFill>
+                <a:srgbClr val="12120F"/>
+              </a:solidFill>
+              <a:latin typeface="Segoe UI" panose="020B0502040204020203"/>
+            </a:endParaRPr>
           </a:p>
         </p:txBody>
       </p:sp>
@@ -8899,7 +9329,7 @@
           <a:noFill/>
         </p:spPr>
         <p:txBody>
-          <a:bodyPr wrap="square" lIns="0" rIns="0" tIns="0" bIns="0">
+          <a:bodyPr wrap="square" lIns="0" tIns="0" rIns="0" bIns="0">
             <a:spAutoFit/>
           </a:bodyPr>
           <a:lstStyle/>
@@ -8914,10 +9344,16 @@
                 <a:solidFill>
                   <a:srgbClr val="55544F"/>
                 </a:solidFill>
-                <a:latin typeface="Segoe UI"/>
+                <a:latin typeface="Segoe UI" panose="020B0502040204020203"/>
               </a:rPr>
               <a:t>Le serveur joint lui-même la mention « the query result is empty » : c'est une donnée non disponible, et non une absence d'agences sur le terrain.</a:t>
             </a:r>
+            <a:endParaRPr sz="950" b="0">
+              <a:solidFill>
+                <a:srgbClr val="55544F"/>
+              </a:solidFill>
+              <a:latin typeface="Segoe UI" panose="020B0502040204020203"/>
+            </a:endParaRPr>
           </a:p>
         </p:txBody>
       </p:sp>
@@ -8982,7 +9418,7 @@
           <a:noFill/>
         </p:spPr>
         <p:txBody>
-          <a:bodyPr wrap="square" lIns="0" rIns="0" tIns="0" bIns="0">
+          <a:bodyPr wrap="square" lIns="0" tIns="0" rIns="0" bIns="0">
             <a:spAutoFit/>
           </a:bodyPr>
           <a:lstStyle/>
@@ -8997,10 +9433,16 @@
                 <a:solidFill>
                   <a:srgbClr val="12120F"/>
                 </a:solidFill>
-                <a:latin typeface="Segoe UI"/>
+                <a:latin typeface="Segoe UI" panose="020B0502040204020203"/>
               </a:rPr>
               <a:t>L'identifiant fourni est volatile</a:t>
             </a:r>
+            <a:endParaRPr sz="1100" b="1">
+              <a:solidFill>
+                <a:srgbClr val="12120F"/>
+              </a:solidFill>
+              <a:latin typeface="Segoe UI" panose="020B0502040204020203"/>
+            </a:endParaRPr>
           </a:p>
         </p:txBody>
       </p:sp>
@@ -9021,7 +9463,7 @@
           <a:noFill/>
         </p:spPr>
         <p:txBody>
-          <a:bodyPr wrap="square" lIns="0" rIns="0" tIns="0" bIns="0">
+          <a:bodyPr wrap="square" lIns="0" tIns="0" rIns="0" bIns="0">
             <a:spAutoFit/>
           </a:bodyPr>
           <a:lstStyle/>
@@ -9036,10 +9478,16 @@
                 <a:solidFill>
                   <a:srgbClr val="55544F"/>
                 </a:solidFill>
-                <a:latin typeface="Segoe UI"/>
+                <a:latin typeface="Segoe UI" panose="020B0502040204020203"/>
               </a:rPr>
               <a:t>La même agence porte un identifiant différent dans deux fichiers exportés à trois secondes d'intervalle. La déduplication repose sur le nom et les coordonnées.</a:t>
             </a:r>
+            <a:endParaRPr sz="950" b="0">
+              <a:solidFill>
+                <a:srgbClr val="55544F"/>
+              </a:solidFill>
+              <a:latin typeface="Segoe UI" panose="020B0502040204020203"/>
+            </a:endParaRPr>
           </a:p>
         </p:txBody>
       </p:sp>
@@ -9150,7 +9598,7 @@
           <a:noFill/>
         </p:spPr>
         <p:txBody>
-          <a:bodyPr wrap="square" lIns="0" rIns="0" tIns="0" bIns="0">
+          <a:bodyPr wrap="square" lIns="0" tIns="0" rIns="0" bIns="0">
             <a:spAutoFit/>
           </a:bodyPr>
           <a:lstStyle/>
@@ -9165,10 +9613,16 @@
                 <a:solidFill>
                   <a:srgbClr val="8B8A84"/>
                 </a:solidFill>
-                <a:latin typeface="Consolas"/>
+                <a:latin typeface="Consolas" panose="020B0609020204030204"/>
               </a:rPr>
               <a:t>25 CONTRÔLES ARITHMÉTIQUES, REJOUÉS À CHAQUE EXÉCUTION</a:t>
             </a:r>
+            <a:endParaRPr sz="800" b="1">
+              <a:solidFill>
+                <a:srgbClr val="8B8A84"/>
+              </a:solidFill>
+              <a:latin typeface="Consolas" panose="020B0609020204030204"/>
+            </a:endParaRPr>
           </a:p>
         </p:txBody>
       </p:sp>
@@ -9189,7 +9643,7 @@
           <a:noFill/>
         </p:spPr>
         <p:txBody>
-          <a:bodyPr wrap="square" lIns="0" rIns="0" tIns="0" bIns="0">
+          <a:bodyPr wrap="square" lIns="0" tIns="0" rIns="0" bIns="0">
             <a:spAutoFit/>
           </a:bodyPr>
           <a:lstStyle/>
@@ -9204,10 +9658,16 @@
                 <a:solidFill>
                   <a:srgbClr val="55544F"/>
                 </a:solidFill>
-                <a:latin typeface="Segoe UI"/>
+                <a:latin typeface="Segoe UI" panose="020B0502040204020203"/>
               </a:rPr>
               <a:t>La population extraite du PDF de l'INSEED somme exactement à 8 095 498 habitants aux trois niveaux — 5 régions, 39 préfectures, 117 communes — sans écart d'une unité.</a:t>
             </a:r>
+            <a:endParaRPr sz="1000" b="0">
+              <a:solidFill>
+                <a:srgbClr val="55544F"/>
+              </a:solidFill>
+              <a:latin typeface="Segoe UI" panose="020B0502040204020203"/>
+            </a:endParaRPr>
           </a:p>
           <a:p>
             <a:pPr algn="l">
@@ -9215,15 +9675,6 @@
                 <a:spcPct val="130000"/>
               </a:lnSpc>
             </a:pPr>
-            <a:r>
-              <a:rPr sz="1000" b="0">
-                <a:solidFill>
-                  <a:srgbClr val="55544F"/>
-                </a:solidFill>
-                <a:latin typeface="Segoe UI"/>
-              </a:rPr>
-              <a:t/>
-            </a:r>
           </a:p>
           <a:p>
             <a:pPr algn="l">
@@ -9236,10 +9687,16 @@
                 <a:solidFill>
                   <a:srgbClr val="55544F"/>
                 </a:solidFill>
-                <a:latin typeface="Segoe UI"/>
+                <a:latin typeface="Segoe UI" panose="020B0502040204020203"/>
               </a:rPr>
               <a:t>Ces contrôles ont servi : une jointure sur des noms accentués faisait tomber neuf préfectures à zéro point Mobile Money, et une somme régionale à 11 630 489 a révélé un double comptage du Grand Lomé.</a:t>
             </a:r>
+            <a:endParaRPr sz="1000" b="0">
+              <a:solidFill>
+                <a:srgbClr val="55544F"/>
+              </a:solidFill>
+              <a:latin typeface="Segoe UI" panose="020B0502040204020203"/>
+            </a:endParaRPr>
           </a:p>
         </p:txBody>
       </p:sp>
@@ -9252,7 +9709,7 @@
 </file>
 
 <file path=ppt/slides/slide4.xml><?xml version="1.0" encoding="utf-8"?>
-<p:sld xmlns:a="http://schemas.openxmlformats.org/drawingml/2006/main" xmlns:p="http://schemas.openxmlformats.org/presentationml/2006/main" xmlns:r="http://schemas.openxmlformats.org/officeDocument/2006/relationships">
+<p:sld xmlns:a="http://schemas.openxmlformats.org/drawingml/2006/main" xmlns:r="http://schemas.openxmlformats.org/officeDocument/2006/relationships" xmlns:p="http://schemas.openxmlformats.org/presentationml/2006/main">
   <p:cSld>
     <p:spTree>
       <p:nvGrpSpPr>
@@ -9454,7 +9911,7 @@
           <a:noFill/>
         </p:spPr>
         <p:txBody>
-          <a:bodyPr wrap="square" lIns="0" rIns="0" tIns="0" bIns="0">
+          <a:bodyPr wrap="square" lIns="0" tIns="0" rIns="0" bIns="0">
             <a:spAutoFit/>
           </a:bodyPr>
           <a:lstStyle/>
@@ -9469,10 +9926,16 @@
                 <a:solidFill>
                   <a:srgbClr val="8B8A84"/>
                 </a:solidFill>
-                <a:latin typeface="Consolas"/>
+                <a:latin typeface="Consolas" panose="020B0609020204030204"/>
               </a:rPr>
               <a:t>MÉTHODE</a:t>
             </a:r>
+            <a:endParaRPr sz="900" b="1">
+              <a:solidFill>
+                <a:srgbClr val="8B8A84"/>
+              </a:solidFill>
+              <a:latin typeface="Consolas" panose="020B0609020204030204"/>
+            </a:endParaRPr>
           </a:p>
         </p:txBody>
       </p:sp>
@@ -9493,7 +9956,7 @@
           <a:noFill/>
         </p:spPr>
         <p:txBody>
-          <a:bodyPr wrap="square" lIns="0" rIns="0" tIns="0" bIns="0">
+          <a:bodyPr wrap="square" lIns="0" tIns="0" rIns="0" bIns="0">
             <a:spAutoFit/>
           </a:bodyPr>
           <a:lstStyle/>
@@ -9508,10 +9971,16 @@
                 <a:solidFill>
                   <a:srgbClr val="12120F"/>
                 </a:solidFill>
-                <a:latin typeface="Segoe UI"/>
+                <a:latin typeface="Segoe UI" panose="020B0502040204020203"/>
               </a:rPr>
               <a:t>Méthodologie</a:t>
             </a:r>
+            <a:endParaRPr sz="2800" b="1">
+              <a:solidFill>
+                <a:srgbClr val="12120F"/>
+              </a:solidFill>
+              <a:latin typeface="Segoe UI" panose="020B0502040204020203"/>
+            </a:endParaRPr>
           </a:p>
         </p:txBody>
       </p:sp>
@@ -9620,7 +10089,7 @@
           <a:noFill/>
         </p:spPr>
         <p:txBody>
-          <a:bodyPr wrap="square" lIns="0" rIns="0" tIns="0" bIns="0">
+          <a:bodyPr wrap="square" lIns="0" tIns="0" rIns="0" bIns="0">
             <a:spAutoFit/>
           </a:bodyPr>
           <a:lstStyle/>
@@ -9635,10 +10104,16 @@
                 <a:solidFill>
                   <a:srgbClr val="0F4D3B"/>
                 </a:solidFill>
-                <a:latin typeface="Segoe UI"/>
+                <a:latin typeface="Segoe UI" panose="020B0502040204020203"/>
               </a:rPr>
               <a:t>Deux unités d'analyse, chacune utilisée là où sa validité est prouvée — et un indice dont les pondérations sont testées.</a:t>
             </a:r>
+            <a:endParaRPr sz="1350" b="1">
+              <a:solidFill>
+                <a:srgbClr val="0F4D3B"/>
+              </a:solidFill>
+              <a:latin typeface="Segoe UI" panose="020B0502040204020203"/>
+            </a:endParaRPr>
           </a:p>
         </p:txBody>
       </p:sp>
@@ -9703,7 +10178,7 @@
           <a:noFill/>
         </p:spPr>
         <p:txBody>
-          <a:bodyPr wrap="square" lIns="0" rIns="0" tIns="0" bIns="0">
+          <a:bodyPr wrap="square" lIns="0" tIns="0" rIns="0" bIns="0">
             <a:spAutoFit/>
           </a:bodyPr>
           <a:lstStyle/>
@@ -9718,10 +10193,16 @@
                 <a:solidFill>
                   <a:srgbClr val="8B8A84"/>
                 </a:solidFill>
-                <a:latin typeface="Consolas"/>
+                <a:latin typeface="Consolas" panose="020B0609020204030204"/>
               </a:rPr>
               <a:t>République togolaise · Défi Économie numérique · Données ouvertes PRISE 2021-2022, RGPH-5 2022, COD-AB 2021</a:t>
             </a:r>
+            <a:endParaRPr sz="800" b="0">
+              <a:solidFill>
+                <a:srgbClr val="8B8A84"/>
+              </a:solidFill>
+              <a:latin typeface="Consolas" panose="020B0609020204030204"/>
+            </a:endParaRPr>
           </a:p>
         </p:txBody>
       </p:sp>
@@ -9742,7 +10223,7 @@
           <a:noFill/>
         </p:spPr>
         <p:txBody>
-          <a:bodyPr wrap="square" lIns="0" rIns="0" tIns="0" bIns="0">
+          <a:bodyPr wrap="square" lIns="0" tIns="0" rIns="0" bIns="0">
             <a:spAutoFit/>
           </a:bodyPr>
           <a:lstStyle/>
@@ -9757,10 +10238,16 @@
                 <a:solidFill>
                   <a:srgbClr val="8B8A84"/>
                 </a:solidFill>
-                <a:latin typeface="Consolas"/>
+                <a:latin typeface="Consolas" panose="020B0609020204030204"/>
               </a:rPr>
               <a:t>03 / 9</a:t>
             </a:r>
+            <a:endParaRPr sz="800" b="1">
+              <a:solidFill>
+                <a:srgbClr val="8B8A84"/>
+              </a:solidFill>
+              <a:latin typeface="Consolas" panose="020B0609020204030204"/>
+            </a:endParaRPr>
           </a:p>
         </p:txBody>
       </p:sp>
@@ -9781,7 +10268,7 @@
           <a:noFill/>
         </p:spPr>
         <p:txBody>
-          <a:bodyPr wrap="square" lIns="0" rIns="0" tIns="0" bIns="0">
+          <a:bodyPr wrap="square" lIns="0" tIns="0" rIns="0" bIns="0">
             <a:spAutoFit/>
           </a:bodyPr>
           <a:lstStyle/>
@@ -9796,10 +10283,16 @@
                 <a:solidFill>
                   <a:srgbClr val="8B8A84"/>
                 </a:solidFill>
-                <a:latin typeface="Consolas"/>
+                <a:latin typeface="Consolas" panose="020B0609020204030204"/>
               </a:rPr>
               <a:t>LES DEUX UNITÉS D'ANALYSE</a:t>
             </a:r>
+            <a:endParaRPr sz="800" b="1">
+              <a:solidFill>
+                <a:srgbClr val="8B8A84"/>
+              </a:solidFill>
+              <a:latin typeface="Consolas" panose="020B0609020204030204"/>
+            </a:endParaRPr>
           </a:p>
         </p:txBody>
       </p:sp>
@@ -9837,10 +10330,16 @@
                           <a:solidFill>
                             <a:srgbClr val="FFFFFF"/>
                           </a:solidFill>
-                          <a:latin typeface="Segoe UI"/>
+                          <a:latin typeface="Segoe UI" panose="020B0502040204020203"/>
                         </a:rPr>
                         <a:t>Unité</a:t>
                       </a:r>
+                      <a:endParaRPr sz="900" b="1">
+                        <a:solidFill>
+                          <a:srgbClr val="FFFFFF"/>
+                        </a:solidFill>
+                        <a:latin typeface="Segoe UI" panose="020B0502040204020203"/>
+                      </a:endParaRPr>
                     </a:p>
                   </a:txBody>
                   <a:tcPr anchor="ctr">
@@ -9859,10 +10358,16 @@
                           <a:solidFill>
                             <a:srgbClr val="FFFFFF"/>
                           </a:solidFill>
-                          <a:latin typeface="Segoe UI"/>
+                          <a:latin typeface="Segoe UI" panose="020B0502040204020203"/>
                         </a:rPr>
                         <a:t>Rôle</a:t>
                       </a:r>
+                      <a:endParaRPr sz="900" b="1">
+                        <a:solidFill>
+                          <a:srgbClr val="FFFFFF"/>
+                        </a:solidFill>
+                        <a:latin typeface="Segoe UI" panose="020B0502040204020203"/>
+                      </a:endParaRPr>
                     </a:p>
                   </a:txBody>
                   <a:tcPr anchor="ctr">
@@ -9881,10 +10386,16 @@
                           <a:solidFill>
                             <a:srgbClr val="FFFFFF"/>
                           </a:solidFill>
-                          <a:latin typeface="Segoe UI"/>
+                          <a:latin typeface="Segoe UI" panose="020B0502040204020203"/>
                         </a:rPr>
                         <a:t>Justification</a:t>
                       </a:r>
+                      <a:endParaRPr sz="900" b="1">
+                        <a:solidFill>
+                          <a:srgbClr val="FFFFFF"/>
+                        </a:solidFill>
+                        <a:latin typeface="Segoe UI" panose="020B0502040204020203"/>
+                      </a:endParaRPr>
                     </a:p>
                   </a:txBody>
                   <a:tcPr anchor="ctr">
@@ -9905,10 +10416,16 @@
                           <a:solidFill>
                             <a:srgbClr val="12120F"/>
                           </a:solidFill>
-                          <a:latin typeface="Segoe UI"/>
+                          <a:latin typeface="Segoe UI" panose="020B0502040204020203"/>
                         </a:rPr>
                         <a:t>Préfecture (39)</a:t>
                       </a:r>
+                      <a:endParaRPr sz="900" b="1">
+                        <a:solidFill>
+                          <a:srgbClr val="12120F"/>
+                        </a:solidFill>
+                        <a:latin typeface="Segoe UI" panose="020B0502040204020203"/>
+                      </a:endParaRPr>
                     </a:p>
                   </a:txBody>
                   <a:tcPr anchor="ctr">
@@ -9927,10 +10444,16 @@
                           <a:solidFill>
                             <a:srgbClr val="55544F"/>
                           </a:solidFill>
-                          <a:latin typeface="Segoe UI"/>
+                          <a:latin typeface="Segoe UI" panose="020B0502040204020203"/>
                         </a:rPr>
                         <a:t>Cartes, superficies, densités</a:t>
                       </a:r>
+                      <a:endParaRPr sz="900" b="0">
+                        <a:solidFill>
+                          <a:srgbClr val="55544F"/>
+                        </a:solidFill>
+                        <a:latin typeface="Segoe UI" panose="020B0502040204020203"/>
+                      </a:endParaRPr>
                     </a:p>
                   </a:txBody>
                   <a:tcPr anchor="ctr">
@@ -9949,10 +10472,16 @@
                           <a:solidFill>
                             <a:srgbClr val="55544F"/>
                           </a:solidFill>
-                          <a:latin typeface="Segoe UI"/>
+                          <a:latin typeface="Segoe UI" panose="020B0502040204020203"/>
                         </a:rPr>
                         <a:t>concordance spatiale 98,4 %</a:t>
                       </a:r>
+                      <a:endParaRPr sz="900" b="0">
+                        <a:solidFill>
+                          <a:srgbClr val="55544F"/>
+                        </a:solidFill>
+                        <a:latin typeface="Segoe UI" panose="020B0502040204020203"/>
+                      </a:endParaRPr>
                     </a:p>
                   </a:txBody>
                   <a:tcPr anchor="ctr">
@@ -9973,10 +10502,16 @@
                           <a:solidFill>
                             <a:srgbClr val="12120F"/>
                           </a:solidFill>
-                          <a:latin typeface="Segoe UI"/>
+                          <a:latin typeface="Segoe UI" panose="020B0502040204020203"/>
                         </a:rPr>
                         <a:t>Commune (117)</a:t>
                       </a:r>
+                      <a:endParaRPr sz="900" b="1">
+                        <a:solidFill>
+                          <a:srgbClr val="12120F"/>
+                        </a:solidFill>
+                        <a:latin typeface="Segoe UI" panose="020B0502040204020203"/>
+                      </a:endParaRPr>
                     </a:p>
                   </a:txBody>
                   <a:tcPr anchor="ctr">
@@ -9995,10 +10530,16 @@
                           <a:solidFill>
                             <a:srgbClr val="55544F"/>
                           </a:solidFill>
-                          <a:latin typeface="Segoe UI"/>
+                          <a:latin typeface="Segoe UI" panose="020B0502040204020203"/>
                         </a:rPr>
                         <a:t>Ratios par habitant</a:t>
                       </a:r>
+                      <a:endParaRPr sz="900" b="0">
+                        <a:solidFill>
+                          <a:srgbClr val="55544F"/>
+                        </a:solidFill>
+                        <a:latin typeface="Segoe UI" panose="020B0502040204020203"/>
+                      </a:endParaRPr>
                     </a:p>
                   </a:txBody>
                   <a:tcPr anchor="ctr">
@@ -10017,10 +10558,16 @@
                           <a:solidFill>
                             <a:srgbClr val="55544F"/>
                           </a:solidFill>
-                          <a:latin typeface="Segoe UI"/>
+                          <a:latin typeface="Segoe UI" panose="020B0502040204020203"/>
                         </a:rPr>
                         <a:t>population validée à l'unité près</a:t>
                       </a:r>
+                      <a:endParaRPr sz="900" b="0">
+                        <a:solidFill>
+                          <a:srgbClr val="55544F"/>
+                        </a:solidFill>
+                        <a:latin typeface="Segoe UI" panose="020B0502040204020203"/>
+                      </a:endParaRPr>
                     </a:p>
                   </a:txBody>
                   <a:tcPr anchor="ctr">
@@ -10051,7 +10598,7 @@
           <a:noFill/>
         </p:spPr>
         <p:txBody>
-          <a:bodyPr wrap="square" lIns="0" rIns="0" tIns="0" bIns="0">
+          <a:bodyPr wrap="square" lIns="0" tIns="0" rIns="0" bIns="0">
             <a:spAutoFit/>
           </a:bodyPr>
           <a:lstStyle/>
@@ -10066,10 +10613,16 @@
                 <a:solidFill>
                   <a:srgbClr val="55544F"/>
                 </a:solidFill>
-                <a:latin typeface="Segoe UI"/>
+                <a:latin typeface="Segoe UI" panose="020B0502040204020203"/>
               </a:rPr>
               <a:t>Reconstruire les contours des 117 communes a été testé puis rejeté sur preuve : les découpages ne s'emboîtent pas — 65,6 % des points tombent dans une unité à cheval sur plusieurs communes. Publier ces contours aurait produit des densités fausses sans aucune alerte.</a:t>
             </a:r>
+            <a:endParaRPr sz="1000" b="0">
+              <a:solidFill>
+                <a:srgbClr val="55544F"/>
+              </a:solidFill>
+              <a:latin typeface="Segoe UI" panose="020B0502040204020203"/>
+            </a:endParaRPr>
           </a:p>
         </p:txBody>
       </p:sp>
@@ -10090,7 +10643,7 @@
           <a:noFill/>
         </p:spPr>
         <p:txBody>
-          <a:bodyPr wrap="square" lIns="0" rIns="0" tIns="0" bIns="0">
+          <a:bodyPr wrap="square" lIns="0" tIns="0" rIns="0" bIns="0">
             <a:spAutoFit/>
           </a:bodyPr>
           <a:lstStyle/>
@@ -10105,10 +10658,16 @@
                 <a:solidFill>
                   <a:srgbClr val="8B8A84"/>
                 </a:solidFill>
-                <a:latin typeface="Consolas"/>
+                <a:latin typeface="Consolas" panose="020B0609020204030204"/>
               </a:rPr>
               <a:t>L'INDICE DE PRIORITÉ — QUATRE COMPOSANTES</a:t>
             </a:r>
+            <a:endParaRPr sz="800" b="1">
+              <a:solidFill>
+                <a:srgbClr val="8B8A84"/>
+              </a:solidFill>
+              <a:latin typeface="Consolas" panose="020B0609020204030204"/>
+            </a:endParaRPr>
           </a:p>
         </p:txBody>
       </p:sp>
@@ -10146,10 +10705,16 @@
                           <a:solidFill>
                             <a:srgbClr val="FFFFFF"/>
                           </a:solidFill>
-                          <a:latin typeface="Segoe UI"/>
+                          <a:latin typeface="Segoe UI" panose="020B0502040204020203"/>
                         </a:rPr>
                         <a:t>Composante</a:t>
                       </a:r>
+                      <a:endParaRPr sz="900" b="1">
+                        <a:solidFill>
+                          <a:srgbClr val="FFFFFF"/>
+                        </a:solidFill>
+                        <a:latin typeface="Segoe UI" panose="020B0502040204020203"/>
+                      </a:endParaRPr>
                     </a:p>
                   </a:txBody>
                   <a:tcPr anchor="ctr">
@@ -10168,10 +10733,16 @@
                           <a:solidFill>
                             <a:srgbClr val="FFFFFF"/>
                           </a:solidFill>
-                          <a:latin typeface="Segoe UI"/>
+                          <a:latin typeface="Segoe UI" panose="020B0502040204020203"/>
                         </a:rPr>
                         <a:t>Mesure</a:t>
                       </a:r>
+                      <a:endParaRPr sz="900" b="1">
+                        <a:solidFill>
+                          <a:srgbClr val="FFFFFF"/>
+                        </a:solidFill>
+                        <a:latin typeface="Segoe UI" panose="020B0502040204020203"/>
+                      </a:endParaRPr>
                     </a:p>
                   </a:txBody>
                   <a:tcPr anchor="ctr">
@@ -10190,10 +10761,16 @@
                           <a:solidFill>
                             <a:srgbClr val="FFFFFF"/>
                           </a:solidFill>
-                          <a:latin typeface="Segoe UI"/>
+                          <a:latin typeface="Segoe UI" panose="020B0502040204020203"/>
                         </a:rPr>
                         <a:t>Poids</a:t>
                       </a:r>
+                      <a:endParaRPr sz="900" b="1">
+                        <a:solidFill>
+                          <a:srgbClr val="FFFFFF"/>
+                        </a:solidFill>
+                        <a:latin typeface="Segoe UI" panose="020B0502040204020203"/>
+                      </a:endParaRPr>
                     </a:p>
                   </a:txBody>
                   <a:tcPr anchor="ctr">
@@ -10214,10 +10791,16 @@
                           <a:solidFill>
                             <a:srgbClr val="12120F"/>
                           </a:solidFill>
-                          <a:latin typeface="Segoe UI"/>
+                          <a:latin typeface="Segoe UI" panose="020B0502040204020203"/>
                         </a:rPr>
                         <a:t>Déficit Mobile Money</a:t>
                       </a:r>
+                      <a:endParaRPr sz="900" b="1">
+                        <a:solidFill>
+                          <a:srgbClr val="12120F"/>
+                        </a:solidFill>
+                        <a:latin typeface="Segoe UI" panose="020B0502040204020203"/>
+                      </a:endParaRPr>
                     </a:p>
                   </a:txBody>
                   <a:tcPr anchor="ctr">
@@ -10236,10 +10819,16 @@
                           <a:solidFill>
                             <a:srgbClr val="55544F"/>
                           </a:solidFill>
-                          <a:latin typeface="Segoe UI"/>
+                          <a:latin typeface="Segoe UI" panose="020B0502040204020203"/>
                         </a:rPr>
                         <a:t>habitants par point</a:t>
                       </a:r>
+                      <a:endParaRPr sz="900" b="0">
+                        <a:solidFill>
+                          <a:srgbClr val="55544F"/>
+                        </a:solidFill>
+                        <a:latin typeface="Segoe UI" panose="020B0502040204020203"/>
+                      </a:endParaRPr>
                     </a:p>
                   </a:txBody>
                   <a:tcPr anchor="ctr">
@@ -10258,10 +10847,16 @@
                           <a:solidFill>
                             <a:srgbClr val="55544F"/>
                           </a:solidFill>
-                          <a:latin typeface="Segoe UI"/>
+                          <a:latin typeface="Segoe UI" panose="020B0502040204020203"/>
                         </a:rPr>
                         <a:t>30 %</a:t>
                       </a:r>
+                      <a:endParaRPr sz="900" b="0">
+                        <a:solidFill>
+                          <a:srgbClr val="55544F"/>
+                        </a:solidFill>
+                        <a:latin typeface="Segoe UI" panose="020B0502040204020203"/>
+                      </a:endParaRPr>
                     </a:p>
                   </a:txBody>
                   <a:tcPr anchor="ctr">
@@ -10282,10 +10877,16 @@
                           <a:solidFill>
                             <a:srgbClr val="12120F"/>
                           </a:solidFill>
-                          <a:latin typeface="Segoe UI"/>
+                          <a:latin typeface="Segoe UI" panose="020B0502040204020203"/>
                         </a:rPr>
                         <a:t>Déficit d'agences</a:t>
                       </a:r>
+                      <a:endParaRPr sz="900" b="1">
+                        <a:solidFill>
+                          <a:srgbClr val="12120F"/>
+                        </a:solidFill>
+                        <a:latin typeface="Segoe UI" panose="020B0502040204020203"/>
+                      </a:endParaRPr>
                     </a:p>
                   </a:txBody>
                   <a:tcPr anchor="ctr">
@@ -10304,10 +10905,16 @@
                           <a:solidFill>
                             <a:srgbClr val="55544F"/>
                           </a:solidFill>
-                          <a:latin typeface="Segoe UI"/>
+                          <a:latin typeface="Segoe UI" panose="020B0502040204020203"/>
                         </a:rPr>
                         <a:t>agences / 100 000 hab.</a:t>
                       </a:r>
+                      <a:endParaRPr sz="900" b="0">
+                        <a:solidFill>
+                          <a:srgbClr val="55544F"/>
+                        </a:solidFill>
+                        <a:latin typeface="Segoe UI" panose="020B0502040204020203"/>
+                      </a:endParaRPr>
                     </a:p>
                   </a:txBody>
                   <a:tcPr anchor="ctr">
@@ -10326,10 +10933,16 @@
                           <a:solidFill>
                             <a:srgbClr val="55544F"/>
                           </a:solidFill>
-                          <a:latin typeface="Segoe UI"/>
+                          <a:latin typeface="Segoe UI" panose="020B0502040204020203"/>
                         </a:rPr>
                         <a:t>25 %</a:t>
                       </a:r>
+                      <a:endParaRPr sz="900" b="0">
+                        <a:solidFill>
+                          <a:srgbClr val="55544F"/>
+                        </a:solidFill>
+                        <a:latin typeface="Segoe UI" panose="020B0502040204020203"/>
+                      </a:endParaRPr>
                     </a:p>
                   </a:txBody>
                   <a:tcPr anchor="ctr">
@@ -10350,10 +10963,16 @@
                           <a:solidFill>
                             <a:srgbClr val="12120F"/>
                           </a:solidFill>
-                          <a:latin typeface="Segoe UI"/>
+                          <a:latin typeface="Segoe UI" panose="020B0502040204020203"/>
                         </a:rPr>
                         <a:t>Éloignement</a:t>
                       </a:r>
+                      <a:endParaRPr sz="900" b="1">
+                        <a:solidFill>
+                          <a:srgbClr val="12120F"/>
+                        </a:solidFill>
+                        <a:latin typeface="Segoe UI" panose="020B0502040204020203"/>
+                      </a:endParaRPr>
                     </a:p>
                   </a:txBody>
                   <a:tcPr anchor="ctr">
@@ -10372,10 +10991,16 @@
                           <a:solidFill>
                             <a:srgbClr val="55544F"/>
                           </a:solidFill>
-                          <a:latin typeface="Segoe UI"/>
+                          <a:latin typeface="Segoe UI" panose="020B0502040204020203"/>
                         </a:rPr>
                         <a:t>distance médiane à une agence</a:t>
                       </a:r>
+                      <a:endParaRPr sz="900" b="0">
+                        <a:solidFill>
+                          <a:srgbClr val="55544F"/>
+                        </a:solidFill>
+                        <a:latin typeface="Segoe UI" panose="020B0502040204020203"/>
+                      </a:endParaRPr>
                     </a:p>
                   </a:txBody>
                   <a:tcPr anchor="ctr">
@@ -10394,10 +11019,16 @@
                           <a:solidFill>
                             <a:srgbClr val="55544F"/>
                           </a:solidFill>
-                          <a:latin typeface="Segoe UI"/>
+                          <a:latin typeface="Segoe UI" panose="020B0502040204020203"/>
                         </a:rPr>
                         <a:t>25 %</a:t>
                       </a:r>
+                      <a:endParaRPr sz="900" b="0">
+                        <a:solidFill>
+                          <a:srgbClr val="55544F"/>
+                        </a:solidFill>
+                        <a:latin typeface="Segoe UI" panose="020B0502040204020203"/>
+                      </a:endParaRPr>
                     </a:p>
                   </a:txBody>
                   <a:tcPr anchor="ctr">
@@ -10418,10 +11049,16 @@
                           <a:solidFill>
                             <a:srgbClr val="12120F"/>
                           </a:solidFill>
-                          <a:latin typeface="Segoe UI"/>
+                          <a:latin typeface="Segoe UI" panose="020B0502040204020203"/>
                         </a:rPr>
                         <a:t>Enjeu démographique</a:t>
                       </a:r>
+                      <a:endParaRPr sz="900" b="1">
+                        <a:solidFill>
+                          <a:srgbClr val="12120F"/>
+                        </a:solidFill>
+                        <a:latin typeface="Segoe UI" panose="020B0502040204020203"/>
+                      </a:endParaRPr>
                     </a:p>
                   </a:txBody>
                   <a:tcPr anchor="ctr">
@@ -10440,10 +11077,16 @@
                           <a:solidFill>
                             <a:srgbClr val="55544F"/>
                           </a:solidFill>
-                          <a:latin typeface="Segoe UI"/>
+                          <a:latin typeface="Segoe UI" panose="020B0502040204020203"/>
                         </a:rPr>
                         <a:t>population concernée</a:t>
                       </a:r>
+                      <a:endParaRPr sz="900" b="0">
+                        <a:solidFill>
+                          <a:srgbClr val="55544F"/>
+                        </a:solidFill>
+                        <a:latin typeface="Segoe UI" panose="020B0502040204020203"/>
+                      </a:endParaRPr>
                     </a:p>
                   </a:txBody>
                   <a:tcPr anchor="ctr">
@@ -10462,10 +11105,16 @@
                           <a:solidFill>
                             <a:srgbClr val="55544F"/>
                           </a:solidFill>
-                          <a:latin typeface="Segoe UI"/>
+                          <a:latin typeface="Segoe UI" panose="020B0502040204020203"/>
                         </a:rPr>
                         <a:t>20 %</a:t>
                       </a:r>
+                      <a:endParaRPr sz="900" b="0">
+                        <a:solidFill>
+                          <a:srgbClr val="55544F"/>
+                        </a:solidFill>
+                        <a:latin typeface="Segoe UI" panose="020B0502040204020203"/>
+                      </a:endParaRPr>
                     </a:p>
                   </a:txBody>
                   <a:tcPr anchor="ctr">
@@ -10496,7 +11145,7 @@
           <a:noFill/>
         </p:spPr>
         <p:txBody>
-          <a:bodyPr wrap="square" lIns="0" rIns="0" tIns="0" bIns="0">
+          <a:bodyPr wrap="square" lIns="0" tIns="0" rIns="0" bIns="0">
             <a:spAutoFit/>
           </a:bodyPr>
           <a:lstStyle/>
@@ -10511,10 +11160,16 @@
                 <a:solidFill>
                   <a:srgbClr val="55544F"/>
                 </a:solidFill>
-                <a:latin typeface="Segoe UI"/>
+                <a:latin typeface="Segoe UI" panose="020B0502040204020203"/>
               </a:rPr>
               <a:t>Le déficit Mobile Money reprend la définition officielle du géoportail national — « nombre d'habitants par point mobile money ». L'indicateur central n'a pas été inventé pour ce travail.</a:t>
             </a:r>
+            <a:endParaRPr sz="1000" b="0">
+              <a:solidFill>
+                <a:srgbClr val="55544F"/>
+              </a:solidFill>
+              <a:latin typeface="Segoe UI" panose="020B0502040204020203"/>
+            </a:endParaRPr>
           </a:p>
           <a:p>
             <a:pPr algn="l">
@@ -10522,15 +11177,6 @@
                 <a:spcPct val="132000"/>
               </a:lnSpc>
             </a:pPr>
-            <a:r>
-              <a:rPr sz="1000" b="0">
-                <a:solidFill>
-                  <a:srgbClr val="55544F"/>
-                </a:solidFill>
-                <a:latin typeface="Segoe UI"/>
-              </a:rPr>
-              <a:t/>
-            </a:r>
           </a:p>
           <a:p>
             <a:pPr algn="l">
@@ -10543,10 +11189,16 @@
                 <a:solidFill>
                   <a:srgbClr val="55544F"/>
                 </a:solidFill>
-                <a:latin typeface="Segoe UI"/>
+                <a:latin typeface="Segoe UI" panose="020B0502040204020203"/>
               </a:rPr>
               <a:t>Ces pondérations sont un choix assumé. C'est exactement pourquoi 2 000 pondérations alternatives sont testées.</a:t>
             </a:r>
+            <a:endParaRPr sz="1000" b="0">
+              <a:solidFill>
+                <a:srgbClr val="55544F"/>
+              </a:solidFill>
+              <a:latin typeface="Segoe UI" panose="020B0502040204020203"/>
+            </a:endParaRPr>
           </a:p>
         </p:txBody>
       </p:sp>
@@ -10567,7 +11219,7 @@
           <a:noFill/>
         </p:spPr>
         <p:txBody>
-          <a:bodyPr wrap="square" lIns="0" rIns="0" tIns="0" bIns="0">
+          <a:bodyPr wrap="square" lIns="0" tIns="0" rIns="0" bIns="0">
             <a:spAutoFit/>
           </a:bodyPr>
           <a:lstStyle/>
@@ -10582,10 +11234,16 @@
                 <a:solidFill>
                   <a:srgbClr val="55544F"/>
                 </a:solidFill>
-                <a:latin typeface="Segoe UI"/>
+                <a:latin typeface="Segoe UI" panose="020B0502040204020203"/>
               </a:rPr>
               <a:t>Aucune valeur n'est imputée ni estimée. Toute donnée absente est déclarée absente. Aucun écrêtage n'est appliqué aux valeurs extrêmes : elles sont des faits, et leur influence est mesurée par une variante de calcul insensible aux extrêmes.</a:t>
             </a:r>
+            <a:endParaRPr sz="1000" b="0">
+              <a:solidFill>
+                <a:srgbClr val="55544F"/>
+              </a:solidFill>
+              <a:latin typeface="Segoe UI" panose="020B0502040204020203"/>
+            </a:endParaRPr>
           </a:p>
         </p:txBody>
       </p:sp>
@@ -10598,7 +11256,7 @@
 </file>
 
 <file path=ppt/slides/slide5.xml><?xml version="1.0" encoding="utf-8"?>
-<p:sld xmlns:a="http://schemas.openxmlformats.org/drawingml/2006/main" xmlns:p="http://schemas.openxmlformats.org/presentationml/2006/main" xmlns:r="http://schemas.openxmlformats.org/officeDocument/2006/relationships">
+<p:sld xmlns:a="http://schemas.openxmlformats.org/drawingml/2006/main" xmlns:r="http://schemas.openxmlformats.org/officeDocument/2006/relationships" xmlns:p="http://schemas.openxmlformats.org/presentationml/2006/main">
   <p:cSld>
     <p:spTree>
       <p:nvGrpSpPr>
@@ -10800,7 +11458,7 @@
           <a:noFill/>
         </p:spPr>
         <p:txBody>
-          <a:bodyPr wrap="square" lIns="0" rIns="0" tIns="0" bIns="0">
+          <a:bodyPr wrap="square" lIns="0" tIns="0" rIns="0" bIns="0">
             <a:spAutoFit/>
           </a:bodyPr>
           <a:lstStyle/>
@@ -10815,10 +11473,16 @@
                 <a:solidFill>
                   <a:srgbClr val="8B8A84"/>
                 </a:solidFill>
-                <a:latin typeface="Consolas"/>
+                <a:latin typeface="Consolas" panose="020B0609020204030204"/>
               </a:rPr>
               <a:t>DIAGNOSTIC</a:t>
             </a:r>
+            <a:endParaRPr sz="900" b="1">
+              <a:solidFill>
+                <a:srgbClr val="8B8A84"/>
+              </a:solidFill>
+              <a:latin typeface="Consolas" panose="020B0609020204030204"/>
+            </a:endParaRPr>
           </a:p>
         </p:txBody>
       </p:sp>
@@ -10839,7 +11503,7 @@
           <a:noFill/>
         </p:spPr>
         <p:txBody>
-          <a:bodyPr wrap="square" lIns="0" rIns="0" tIns="0" bIns="0">
+          <a:bodyPr wrap="square" lIns="0" tIns="0" rIns="0" bIns="0">
             <a:spAutoFit/>
           </a:bodyPr>
           <a:lstStyle/>
@@ -10854,10 +11518,16 @@
                 <a:solidFill>
                   <a:srgbClr val="12120F"/>
                 </a:solidFill>
-                <a:latin typeface="Segoe UI"/>
+                <a:latin typeface="Segoe UI" panose="020B0502040204020203"/>
               </a:rPr>
               <a:t>Diagnostic national</a:t>
             </a:r>
+            <a:endParaRPr sz="2800" b="1">
+              <a:solidFill>
+                <a:srgbClr val="12120F"/>
+              </a:solidFill>
+              <a:latin typeface="Segoe UI" panose="020B0502040204020203"/>
+            </a:endParaRPr>
           </a:p>
         </p:txBody>
       </p:sp>
@@ -10966,7 +11636,7 @@
           <a:noFill/>
         </p:spPr>
         <p:txBody>
-          <a:bodyPr wrap="square" lIns="0" rIns="0" tIns="0" bIns="0">
+          <a:bodyPr wrap="square" lIns="0" tIns="0" rIns="0" bIns="0">
             <a:spAutoFit/>
           </a:bodyPr>
           <a:lstStyle/>
@@ -10981,10 +11651,16 @@
                 <a:solidFill>
                   <a:srgbClr val="0F4D3B"/>
                 </a:solidFill>
-                <a:latin typeface="Segoe UI"/>
+                <a:latin typeface="Segoe UI" panose="020B0502040204020203"/>
               </a:rPr>
               <a:t>409 habitants par point de service en moyenne — mais un rapport de 1 à 12,7 entre la préfecture la mieux et la moins bien desservie.</a:t>
             </a:r>
+            <a:endParaRPr sz="1350" b="1">
+              <a:solidFill>
+                <a:srgbClr val="0F4D3B"/>
+              </a:solidFill>
+              <a:latin typeface="Segoe UI" panose="020B0502040204020203"/>
+            </a:endParaRPr>
           </a:p>
         </p:txBody>
       </p:sp>
@@ -11049,7 +11725,7 @@
           <a:noFill/>
         </p:spPr>
         <p:txBody>
-          <a:bodyPr wrap="square" lIns="0" rIns="0" tIns="0" bIns="0">
+          <a:bodyPr wrap="square" lIns="0" tIns="0" rIns="0" bIns="0">
             <a:spAutoFit/>
           </a:bodyPr>
           <a:lstStyle/>
@@ -11064,10 +11740,16 @@
                 <a:solidFill>
                   <a:srgbClr val="8B8A84"/>
                 </a:solidFill>
-                <a:latin typeface="Consolas"/>
+                <a:latin typeface="Consolas" panose="020B0609020204030204"/>
               </a:rPr>
               <a:t>République togolaise · Défi Économie numérique · Données ouvertes PRISE 2021-2022, RGPH-5 2022, COD-AB 2021</a:t>
             </a:r>
+            <a:endParaRPr sz="800" b="0">
+              <a:solidFill>
+                <a:srgbClr val="8B8A84"/>
+              </a:solidFill>
+              <a:latin typeface="Consolas" panose="020B0609020204030204"/>
+            </a:endParaRPr>
           </a:p>
         </p:txBody>
       </p:sp>
@@ -11088,7 +11770,7 @@
           <a:noFill/>
         </p:spPr>
         <p:txBody>
-          <a:bodyPr wrap="square" lIns="0" rIns="0" tIns="0" bIns="0">
+          <a:bodyPr wrap="square" lIns="0" tIns="0" rIns="0" bIns="0">
             <a:spAutoFit/>
           </a:bodyPr>
           <a:lstStyle/>
@@ -11103,10 +11785,16 @@
                 <a:solidFill>
                   <a:srgbClr val="8B8A84"/>
                 </a:solidFill>
-                <a:latin typeface="Consolas"/>
+                <a:latin typeface="Consolas" panose="020B0609020204030204"/>
               </a:rPr>
               <a:t>04 / 9</a:t>
             </a:r>
+            <a:endParaRPr sz="800" b="1">
+              <a:solidFill>
+                <a:srgbClr val="8B8A84"/>
+              </a:solidFill>
+              <a:latin typeface="Consolas" panose="020B0609020204030204"/>
+            </a:endParaRPr>
           </a:p>
         </p:txBody>
       </p:sp>
@@ -11119,7 +11807,7 @@
           <p:nvPr/>
         </p:nvPicPr>
         <p:blipFill>
-          <a:blip r:embed="rId2"/>
+          <a:blip r:embed="rId1"/>
           <a:stretch>
             <a:fillRect/>
           </a:stretch>
@@ -11241,7 +11929,7 @@
           <a:noFill/>
         </p:spPr>
         <p:txBody>
-          <a:bodyPr wrap="square" lIns="0" rIns="0" tIns="0" bIns="0">
+          <a:bodyPr wrap="square" lIns="0" tIns="0" rIns="0" bIns="0">
             <a:spAutoFit/>
           </a:bodyPr>
           <a:lstStyle/>
@@ -11256,10 +11944,16 @@
                 <a:solidFill>
                   <a:srgbClr val="8B8A84"/>
                 </a:solidFill>
-                <a:latin typeface="Consolas"/>
+                <a:latin typeface="Consolas" panose="020B0609020204030204"/>
               </a:rPr>
               <a:t>MOYENNE NATIONALE</a:t>
             </a:r>
+            <a:endParaRPr sz="750" b="1">
+              <a:solidFill>
+                <a:srgbClr val="8B8A84"/>
+              </a:solidFill>
+              <a:latin typeface="Consolas" panose="020B0609020204030204"/>
+            </a:endParaRPr>
           </a:p>
         </p:txBody>
       </p:sp>
@@ -11280,7 +11974,7 @@
           <a:noFill/>
         </p:spPr>
         <p:txBody>
-          <a:bodyPr wrap="square" lIns="0" rIns="0" tIns="0" bIns="0">
+          <a:bodyPr wrap="square" lIns="0" tIns="0" rIns="0" bIns="0">
             <a:spAutoFit/>
           </a:bodyPr>
           <a:lstStyle/>
@@ -11295,10 +11989,16 @@
                 <a:solidFill>
                   <a:srgbClr val="12120F"/>
                 </a:solidFill>
-                <a:latin typeface="Segoe UI"/>
+                <a:latin typeface="Segoe UI" panose="020B0502040204020203"/>
               </a:rPr>
               <a:t>409</a:t>
             </a:r>
+            <a:endParaRPr sz="2300" b="1">
+              <a:solidFill>
+                <a:srgbClr val="12120F"/>
+              </a:solidFill>
+              <a:latin typeface="Segoe UI" panose="020B0502040204020203"/>
+            </a:endParaRPr>
           </a:p>
         </p:txBody>
       </p:sp>
@@ -11319,7 +12019,7 @@
           <a:noFill/>
         </p:spPr>
         <p:txBody>
-          <a:bodyPr wrap="square" lIns="0" rIns="0" tIns="0" bIns="0">
+          <a:bodyPr wrap="square" lIns="0" tIns="0" rIns="0" bIns="0">
             <a:spAutoFit/>
           </a:bodyPr>
           <a:lstStyle/>
@@ -11334,10 +12034,16 @@
                 <a:solidFill>
                   <a:srgbClr val="55544F"/>
                 </a:solidFill>
-                <a:latin typeface="Segoe UI"/>
+                <a:latin typeface="Segoe UI" panose="020B0502040204020203"/>
               </a:rPr>
               <a:t>habitants par point Mobile Money</a:t>
             </a:r>
+            <a:endParaRPr sz="800" b="0">
+              <a:solidFill>
+                <a:srgbClr val="55544F"/>
+              </a:solidFill>
+              <a:latin typeface="Segoe UI" panose="020B0502040204020203"/>
+            </a:endParaRPr>
           </a:p>
         </p:txBody>
       </p:sp>
@@ -11448,7 +12154,7 @@
           <a:noFill/>
         </p:spPr>
         <p:txBody>
-          <a:bodyPr wrap="square" lIns="0" rIns="0" tIns="0" bIns="0">
+          <a:bodyPr wrap="square" lIns="0" tIns="0" rIns="0" bIns="0">
             <a:spAutoFit/>
           </a:bodyPr>
           <a:lstStyle/>
@@ -11463,10 +12169,16 @@
                 <a:solidFill>
                   <a:srgbClr val="8B8A84"/>
                 </a:solidFill>
-                <a:latin typeface="Consolas"/>
+                <a:latin typeface="Consolas" panose="020B0609020204030204"/>
               </a:rPr>
               <a:t>PRÉFECTURE LA MOINS DESSERVIE</a:t>
             </a:r>
+            <a:endParaRPr sz="750" b="1">
+              <a:solidFill>
+                <a:srgbClr val="8B8A84"/>
+              </a:solidFill>
+              <a:latin typeface="Consolas" panose="020B0609020204030204"/>
+            </a:endParaRPr>
           </a:p>
         </p:txBody>
       </p:sp>
@@ -11487,7 +12199,7 @@
           <a:noFill/>
         </p:spPr>
         <p:txBody>
-          <a:bodyPr wrap="square" lIns="0" rIns="0" tIns="0" bIns="0">
+          <a:bodyPr wrap="square" lIns="0" tIns="0" rIns="0" bIns="0">
             <a:spAutoFit/>
           </a:bodyPr>
           <a:lstStyle/>
@@ -11502,10 +12214,16 @@
                 <a:solidFill>
                   <a:srgbClr val="12120F"/>
                 </a:solidFill>
-                <a:latin typeface="Segoe UI"/>
+                <a:latin typeface="Segoe UI" panose="020B0502040204020203"/>
               </a:rPr>
               <a:t>2 155</a:t>
             </a:r>
+            <a:endParaRPr sz="2300" b="1">
+              <a:solidFill>
+                <a:srgbClr val="12120F"/>
+              </a:solidFill>
+              <a:latin typeface="Segoe UI" panose="020B0502040204020203"/>
+            </a:endParaRPr>
           </a:p>
         </p:txBody>
       </p:sp>
@@ -11526,7 +12244,7 @@
           <a:noFill/>
         </p:spPr>
         <p:txBody>
-          <a:bodyPr wrap="square" lIns="0" rIns="0" tIns="0" bIns="0">
+          <a:bodyPr wrap="square" lIns="0" tIns="0" rIns="0" bIns="0">
             <a:spAutoFit/>
           </a:bodyPr>
           <a:lstStyle/>
@@ -11541,10 +12259,16 @@
                 <a:solidFill>
                   <a:srgbClr val="55544F"/>
                 </a:solidFill>
-                <a:latin typeface="Segoe UI"/>
+                <a:latin typeface="Segoe UI" panose="020B0502040204020203"/>
               </a:rPr>
               <a:t>Kpendjal · 5,3 × la moyenne</a:t>
             </a:r>
+            <a:endParaRPr sz="800" b="0">
+              <a:solidFill>
+                <a:srgbClr val="55544F"/>
+              </a:solidFill>
+              <a:latin typeface="Segoe UI" panose="020B0502040204020203"/>
+            </a:endParaRPr>
           </a:p>
         </p:txBody>
       </p:sp>
@@ -11655,7 +12379,7 @@
           <a:noFill/>
         </p:spPr>
         <p:txBody>
-          <a:bodyPr wrap="square" lIns="0" rIns="0" tIns="0" bIns="0">
+          <a:bodyPr wrap="square" lIns="0" tIns="0" rIns="0" bIns="0">
             <a:spAutoFit/>
           </a:bodyPr>
           <a:lstStyle/>
@@ -11670,10 +12394,16 @@
                 <a:solidFill>
                   <a:srgbClr val="8B8A84"/>
                 </a:solidFill>
-                <a:latin typeface="Consolas"/>
+                <a:latin typeface="Consolas" panose="020B0609020204030204"/>
               </a:rPr>
               <a:t>PRÉFECTURES AU-DESSUS DE LA MOYENNE</a:t>
             </a:r>
+            <a:endParaRPr sz="750" b="1">
+              <a:solidFill>
+                <a:srgbClr val="8B8A84"/>
+              </a:solidFill>
+              <a:latin typeface="Consolas" panose="020B0609020204030204"/>
+            </a:endParaRPr>
           </a:p>
         </p:txBody>
       </p:sp>
@@ -11694,7 +12424,7 @@
           <a:noFill/>
         </p:spPr>
         <p:txBody>
-          <a:bodyPr wrap="square" lIns="0" rIns="0" tIns="0" bIns="0">
+          <a:bodyPr wrap="square" lIns="0" tIns="0" rIns="0" bIns="0">
             <a:spAutoFit/>
           </a:bodyPr>
           <a:lstStyle/>
@@ -11709,10 +12439,16 @@
                 <a:solidFill>
                   <a:srgbClr val="12120F"/>
                 </a:solidFill>
-                <a:latin typeface="Segoe UI"/>
+                <a:latin typeface="Segoe UI" panose="020B0502040204020203"/>
               </a:rPr>
               <a:t>24 / 39</a:t>
             </a:r>
+            <a:endParaRPr sz="2300" b="1">
+              <a:solidFill>
+                <a:srgbClr val="12120F"/>
+              </a:solidFill>
+              <a:latin typeface="Segoe UI" panose="020B0502040204020203"/>
+            </a:endParaRPr>
           </a:p>
         </p:txBody>
       </p:sp>
@@ -11733,7 +12469,7 @@
           <a:noFill/>
         </p:spPr>
         <p:txBody>
-          <a:bodyPr wrap="square" lIns="0" rIns="0" tIns="0" bIns="0">
+          <a:bodyPr wrap="square" lIns="0" tIns="0" rIns="0" bIns="0">
             <a:spAutoFit/>
           </a:bodyPr>
           <a:lstStyle/>
@@ -11748,10 +12484,16 @@
                 <a:solidFill>
                   <a:srgbClr val="55544F"/>
                 </a:solidFill>
-                <a:latin typeface="Segoe UI"/>
+                <a:latin typeface="Segoe UI" panose="020B0502040204020203"/>
               </a:rPr>
               <a:t>moins bien desservies que le pays</a:t>
             </a:r>
+            <a:endParaRPr sz="800" b="0">
+              <a:solidFill>
+                <a:srgbClr val="55544F"/>
+              </a:solidFill>
+              <a:latin typeface="Segoe UI" panose="020B0502040204020203"/>
+            </a:endParaRPr>
           </a:p>
         </p:txBody>
       </p:sp>
@@ -11862,7 +12604,7 @@
           <a:noFill/>
         </p:spPr>
         <p:txBody>
-          <a:bodyPr wrap="square" lIns="0" rIns="0" tIns="0" bIns="0">
+          <a:bodyPr wrap="square" lIns="0" tIns="0" rIns="0" bIns="0">
             <a:spAutoFit/>
           </a:bodyPr>
           <a:lstStyle/>
@@ -11877,10 +12619,16 @@
                 <a:solidFill>
                   <a:srgbClr val="8B8A84"/>
                 </a:solidFill>
-                <a:latin typeface="Consolas"/>
+                <a:latin typeface="Consolas" panose="020B0609020204030204"/>
               </a:rPr>
               <a:t>COMMUNES SANS AUCUNE AGENCE</a:t>
             </a:r>
+            <a:endParaRPr sz="750" b="1">
+              <a:solidFill>
+                <a:srgbClr val="8B8A84"/>
+              </a:solidFill>
+              <a:latin typeface="Consolas" panose="020B0609020204030204"/>
+            </a:endParaRPr>
           </a:p>
         </p:txBody>
       </p:sp>
@@ -11901,7 +12649,7 @@
           <a:noFill/>
         </p:spPr>
         <p:txBody>
-          <a:bodyPr wrap="square" lIns="0" rIns="0" tIns="0" bIns="0">
+          <a:bodyPr wrap="square" lIns="0" tIns="0" rIns="0" bIns="0">
             <a:spAutoFit/>
           </a:bodyPr>
           <a:lstStyle/>
@@ -11916,10 +12664,16 @@
                 <a:solidFill>
                   <a:srgbClr val="12120F"/>
                 </a:solidFill>
-                <a:latin typeface="Segoe UI"/>
+                <a:latin typeface="Segoe UI" panose="020B0502040204020203"/>
               </a:rPr>
               <a:t>75 / 117</a:t>
             </a:r>
+            <a:endParaRPr sz="2300" b="1">
+              <a:solidFill>
+                <a:srgbClr val="12120F"/>
+              </a:solidFill>
+              <a:latin typeface="Segoe UI" panose="020B0502040204020203"/>
+            </a:endParaRPr>
           </a:p>
         </p:txBody>
       </p:sp>
@@ -11940,7 +12694,7 @@
           <a:noFill/>
         </p:spPr>
         <p:txBody>
-          <a:bodyPr wrap="square" lIns="0" rIns="0" tIns="0" bIns="0">
+          <a:bodyPr wrap="square" lIns="0" tIns="0" rIns="0" bIns="0">
             <a:spAutoFit/>
           </a:bodyPr>
           <a:lstStyle/>
@@ -11955,10 +12709,16 @@
                 <a:solidFill>
                   <a:srgbClr val="55544F"/>
                 </a:solidFill>
-                <a:latin typeface="Segoe UI"/>
+                <a:latin typeface="Segoe UI" panose="020B0502040204020203"/>
               </a:rPr>
               <a:t>3 371 081 habitants</a:t>
             </a:r>
+            <a:endParaRPr sz="800" b="0">
+              <a:solidFill>
+                <a:srgbClr val="55544F"/>
+              </a:solidFill>
+              <a:latin typeface="Segoe UI" panose="020B0502040204020203"/>
+            </a:endParaRPr>
           </a:p>
         </p:txBody>
       </p:sp>
@@ -11979,7 +12739,7 @@
           <a:noFill/>
         </p:spPr>
         <p:txBody>
-          <a:bodyPr wrap="square" lIns="0" rIns="0" tIns="0" bIns="0">
+          <a:bodyPr wrap="square" lIns="0" tIns="0" rIns="0" bIns="0">
             <a:spAutoFit/>
           </a:bodyPr>
           <a:lstStyle/>
@@ -11989,15 +12749,12 @@
                 <a:spcPct val="122000"/>
               </a:lnSpc>
             </a:pPr>
-            <a:r>
-              <a:rPr sz="800" b="0">
-                <a:solidFill>
-                  <a:srgbClr val="55544F"/>
-                </a:solidFill>
-                <a:latin typeface="Segoe UI"/>
-              </a:rPr>
-              <a:t/>
-            </a:r>
+            <a:endParaRPr sz="800" b="0">
+              <a:solidFill>
+                <a:srgbClr val="55544F"/>
+              </a:solidFill>
+              <a:latin typeface="Segoe UI" panose="020B0502040204020203"/>
+            </a:endParaRPr>
           </a:p>
         </p:txBody>
       </p:sp>
@@ -12010,7 +12767,7 @@
 </file>
 
 <file path=ppt/slides/slide6.xml><?xml version="1.0" encoding="utf-8"?>
-<p:sld xmlns:a="http://schemas.openxmlformats.org/drawingml/2006/main" xmlns:p="http://schemas.openxmlformats.org/presentationml/2006/main" xmlns:r="http://schemas.openxmlformats.org/officeDocument/2006/relationships">
+<p:sld xmlns:a="http://schemas.openxmlformats.org/drawingml/2006/main" xmlns:r="http://schemas.openxmlformats.org/officeDocument/2006/relationships" xmlns:p="http://schemas.openxmlformats.org/presentationml/2006/main">
   <p:cSld>
     <p:spTree>
       <p:nvGrpSpPr>
@@ -12212,7 +12969,7 @@
           <a:noFill/>
         </p:spPr>
         <p:txBody>
-          <a:bodyPr wrap="square" lIns="0" rIns="0" tIns="0" bIns="0">
+          <a:bodyPr wrap="square" lIns="0" tIns="0" rIns="0" bIns="0">
             <a:spAutoFit/>
           </a:bodyPr>
           <a:lstStyle/>
@@ -12227,10 +12984,16 @@
                 <a:solidFill>
                   <a:srgbClr val="8B8A84"/>
                 </a:solidFill>
-                <a:latin typeface="Consolas"/>
+                <a:latin typeface="Consolas" panose="020B0609020204030204"/>
               </a:rPr>
               <a:t>GÉOSPATIAL</a:t>
             </a:r>
+            <a:endParaRPr sz="900" b="1">
+              <a:solidFill>
+                <a:srgbClr val="8B8A84"/>
+              </a:solidFill>
+              <a:latin typeface="Consolas" panose="020B0609020204030204"/>
+            </a:endParaRPr>
           </a:p>
         </p:txBody>
       </p:sp>
@@ -12251,7 +13014,7 @@
           <a:noFill/>
         </p:spPr>
         <p:txBody>
-          <a:bodyPr wrap="square" lIns="0" rIns="0" tIns="0" bIns="0">
+          <a:bodyPr wrap="square" lIns="0" tIns="0" rIns="0" bIns="0">
             <a:spAutoFit/>
           </a:bodyPr>
           <a:lstStyle/>
@@ -12266,10 +13029,16 @@
                 <a:solidFill>
                   <a:srgbClr val="12120F"/>
                 </a:solidFill>
-                <a:latin typeface="Segoe UI"/>
+                <a:latin typeface="Segoe UI" panose="020B0502040204020203"/>
               </a:rPr>
               <a:t>Analyse géospatiale et inégalités territoriales</a:t>
             </a:r>
+            <a:endParaRPr sz="2800" b="1">
+              <a:solidFill>
+                <a:srgbClr val="12120F"/>
+              </a:solidFill>
+              <a:latin typeface="Segoe UI" panose="020B0502040204020203"/>
+            </a:endParaRPr>
           </a:p>
         </p:txBody>
       </p:sp>
@@ -12378,7 +13147,7 @@
           <a:noFill/>
         </p:spPr>
         <p:txBody>
-          <a:bodyPr wrap="square" lIns="0" rIns="0" tIns="0" bIns="0">
+          <a:bodyPr wrap="square" lIns="0" tIns="0" rIns="0" bIns="0">
             <a:spAutoFit/>
           </a:bodyPr>
           <a:lstStyle/>
@@ -12393,10 +13162,16 @@
                 <a:solidFill>
                   <a:srgbClr val="0F4D3B"/>
                 </a:solidFill>
-                <a:latin typeface="Segoe UI"/>
+                <a:latin typeface="Segoe UI" panose="020B0502040204020203"/>
               </a:rPr>
               <a:t>La moitié la moins bien desservie de la population ne dispose que de 27 % des points de service.</a:t>
             </a:r>
+            <a:endParaRPr sz="1350" b="1">
+              <a:solidFill>
+                <a:srgbClr val="0F4D3B"/>
+              </a:solidFill>
+              <a:latin typeface="Segoe UI" panose="020B0502040204020203"/>
+            </a:endParaRPr>
           </a:p>
         </p:txBody>
       </p:sp>
@@ -12461,7 +13236,7 @@
           <a:noFill/>
         </p:spPr>
         <p:txBody>
-          <a:bodyPr wrap="square" lIns="0" rIns="0" tIns="0" bIns="0">
+          <a:bodyPr wrap="square" lIns="0" tIns="0" rIns="0" bIns="0">
             <a:spAutoFit/>
           </a:bodyPr>
           <a:lstStyle/>
@@ -12476,10 +13251,16 @@
                 <a:solidFill>
                   <a:srgbClr val="8B8A84"/>
                 </a:solidFill>
-                <a:latin typeface="Consolas"/>
+                <a:latin typeface="Consolas" panose="020B0609020204030204"/>
               </a:rPr>
               <a:t>République togolaise · Défi Économie numérique · Données ouvertes PRISE 2021-2022, RGPH-5 2022, COD-AB 2021</a:t>
             </a:r>
+            <a:endParaRPr sz="800" b="0">
+              <a:solidFill>
+                <a:srgbClr val="8B8A84"/>
+              </a:solidFill>
+              <a:latin typeface="Consolas" panose="020B0609020204030204"/>
+            </a:endParaRPr>
           </a:p>
         </p:txBody>
       </p:sp>
@@ -12500,7 +13281,7 @@
           <a:noFill/>
         </p:spPr>
         <p:txBody>
-          <a:bodyPr wrap="square" lIns="0" rIns="0" tIns="0" bIns="0">
+          <a:bodyPr wrap="square" lIns="0" tIns="0" rIns="0" bIns="0">
             <a:spAutoFit/>
           </a:bodyPr>
           <a:lstStyle/>
@@ -12515,16 +13296,46 @@
                 <a:solidFill>
                   <a:srgbClr val="8B8A84"/>
                 </a:solidFill>
-                <a:latin typeface="Consolas"/>
+                <a:latin typeface="Consolas" panose="020B0609020204030204"/>
               </a:rPr>
               <a:t>05 / 9</a:t>
             </a:r>
+            <a:endParaRPr sz="800" b="1">
+              <a:solidFill>
+                <a:srgbClr val="8B8A84"/>
+              </a:solidFill>
+              <a:latin typeface="Consolas" panose="020B0609020204030204"/>
+            </a:endParaRPr>
           </a:p>
         </p:txBody>
       </p:sp>
       <p:pic>
         <p:nvPicPr>
           <p:cNvPr id="14" name="Picture 13" descr="quadrant.png"/>
+          <p:cNvPicPr>
+            <a:picLocks noChangeAspect="1"/>
+          </p:cNvPicPr>
+          <p:nvPr/>
+        </p:nvPicPr>
+        <p:blipFill>
+          <a:blip r:embed="rId1"/>
+          <a:stretch>
+            <a:fillRect/>
+          </a:stretch>
+        </p:blipFill>
+        <p:spPr>
+          <a:xfrm>
+            <a:off x="502920" y="1920240"/>
+            <a:ext cx="5015010" cy="3931920"/>
+          </a:xfrm>
+          <a:prstGeom prst="rect">
+            <a:avLst/>
+          </a:prstGeom>
+        </p:spPr>
+      </p:pic>
+      <p:pic>
+        <p:nvPicPr>
+          <p:cNvPr id="15" name="Picture 14" descr="concentration.png"/>
           <p:cNvPicPr>
             <a:picLocks noChangeAspect="1"/>
           </p:cNvPicPr>
@@ -12538,30 +13349,6 @@
         </p:blipFill>
         <p:spPr>
           <a:xfrm>
-            <a:off x="502920" y="1920240"/>
-            <a:ext cx="5015010" cy="3931920"/>
-          </a:xfrm>
-          <a:prstGeom prst="rect">
-            <a:avLst/>
-          </a:prstGeom>
-        </p:spPr>
-      </p:pic>
-      <p:pic>
-        <p:nvPicPr>
-          <p:cNvPr id="15" name="Picture 14" descr="concentration.png"/>
-          <p:cNvPicPr>
-            <a:picLocks noChangeAspect="1"/>
-          </p:cNvPicPr>
-          <p:nvPr/>
-        </p:nvPicPr>
-        <p:blipFill>
-          <a:blip r:embed="rId3"/>
-          <a:stretch>
-            <a:fillRect/>
-          </a:stretch>
-        </p:blipFill>
-        <p:spPr>
-          <a:xfrm>
             <a:off x="6400800" y="1920240"/>
             <a:ext cx="4779520" cy="3931920"/>
           </a:xfrm>
@@ -12587,7 +13374,7 @@
           <a:noFill/>
         </p:spPr>
         <p:txBody>
-          <a:bodyPr wrap="square" lIns="0" rIns="0" tIns="0" bIns="0">
+          <a:bodyPr wrap="square" lIns="0" tIns="0" rIns="0" bIns="0">
             <a:spAutoFit/>
           </a:bodyPr>
           <a:lstStyle/>
@@ -12602,10 +13389,16 @@
                 <a:solidFill>
                   <a:srgbClr val="55544F"/>
                 </a:solidFill>
-                <a:latin typeface="Segoe UI"/>
+                <a:latin typeface="Segoe UI" panose="020B0502040204020203"/>
               </a:rPr>
               <a:t>12 préfectures sont à la fois plus peuplées que la médiane nationale et moins bien desservies que la moyenne : c'est là qu'un investissement touche le plus d'habitants.</a:t>
             </a:r>
+            <a:endParaRPr sz="1000" b="0">
+              <a:solidFill>
+                <a:srgbClr val="55544F"/>
+              </a:solidFill>
+              <a:latin typeface="Segoe UI" panose="020B0502040204020203"/>
+            </a:endParaRPr>
           </a:p>
         </p:txBody>
       </p:sp>
@@ -12626,7 +13419,7 @@
           <a:noFill/>
         </p:spPr>
         <p:txBody>
-          <a:bodyPr wrap="square" lIns="0" rIns="0" tIns="0" bIns="0">
+          <a:bodyPr wrap="square" lIns="0" tIns="0" rIns="0" bIns="0">
             <a:spAutoFit/>
           </a:bodyPr>
           <a:lstStyle/>
@@ -12641,10 +13434,16 @@
                 <a:solidFill>
                   <a:srgbClr val="55544F"/>
                 </a:solidFill>
-                <a:latin typeface="Segoe UI"/>
+                <a:latin typeface="Segoe UI" panose="020B0502040204020203"/>
               </a:rPr>
               <a:t>L'écart à la diagonale mesure la concentration. Les distances sont calculées après reprojection métrique — en degrés, elles seraient fausses.</a:t>
             </a:r>
+            <a:endParaRPr sz="1000" b="0">
+              <a:solidFill>
+                <a:srgbClr val="55544F"/>
+              </a:solidFill>
+              <a:latin typeface="Segoe UI" panose="020B0502040204020203"/>
+            </a:endParaRPr>
           </a:p>
         </p:txBody>
       </p:sp>
@@ -12657,7 +13456,7 @@
 </file>
 
 <file path=ppt/slides/slide7.xml><?xml version="1.0" encoding="utf-8"?>
-<p:sld xmlns:a="http://schemas.openxmlformats.org/drawingml/2006/main" xmlns:p="http://schemas.openxmlformats.org/presentationml/2006/main" xmlns:r="http://schemas.openxmlformats.org/officeDocument/2006/relationships">
+<p:sld xmlns:a="http://schemas.openxmlformats.org/drawingml/2006/main" xmlns:r="http://schemas.openxmlformats.org/officeDocument/2006/relationships" xmlns:p="http://schemas.openxmlformats.org/presentationml/2006/main">
   <p:cSld>
     <p:spTree>
       <p:nvGrpSpPr>
@@ -12859,7 +13658,7 @@
           <a:noFill/>
         </p:spPr>
         <p:txBody>
-          <a:bodyPr wrap="square" lIns="0" rIns="0" tIns="0" bIns="0">
+          <a:bodyPr wrap="square" lIns="0" tIns="0" rIns="0" bIns="0">
             <a:spAutoFit/>
           </a:bodyPr>
           <a:lstStyle/>
@@ -12874,10 +13673,16 @@
                 <a:solidFill>
                   <a:srgbClr val="8B8A84"/>
                 </a:solidFill>
-                <a:latin typeface="Consolas"/>
+                <a:latin typeface="Consolas" panose="020B0609020204030204"/>
               </a:rPr>
               <a:t>PRIORISATION</a:t>
             </a:r>
+            <a:endParaRPr sz="900" b="1">
+              <a:solidFill>
+                <a:srgbClr val="8B8A84"/>
+              </a:solidFill>
+              <a:latin typeface="Consolas" panose="020B0609020204030204"/>
+            </a:endParaRPr>
           </a:p>
         </p:txBody>
       </p:sp>
@@ -12898,7 +13703,7 @@
           <a:noFill/>
         </p:spPr>
         <p:txBody>
-          <a:bodyPr wrap="square" lIns="0" rIns="0" tIns="0" bIns="0">
+          <a:bodyPr wrap="square" lIns="0" tIns="0" rIns="0" bIns="0">
             <a:spAutoFit/>
           </a:bodyPr>
           <a:lstStyle/>
@@ -12913,10 +13718,16 @@
                 <a:solidFill>
                   <a:srgbClr val="12120F"/>
                 </a:solidFill>
-                <a:latin typeface="Segoe UI"/>
+                <a:latin typeface="Segoe UI" panose="020B0502040204020203"/>
               </a:rPr>
               <a:t>Zones prioritaires · indice DCPI</a:t>
             </a:r>
+            <a:endParaRPr sz="2800" b="1">
+              <a:solidFill>
+                <a:srgbClr val="12120F"/>
+              </a:solidFill>
+              <a:latin typeface="Segoe UI" panose="020B0502040204020203"/>
+            </a:endParaRPr>
           </a:p>
         </p:txBody>
       </p:sp>
@@ -13025,7 +13836,7 @@
           <a:noFill/>
         </p:spPr>
         <p:txBody>
-          <a:bodyPr wrap="square" lIns="0" rIns="0" tIns="0" bIns="0">
+          <a:bodyPr wrap="square" lIns="0" tIns="0" rIns="0" bIns="0">
             <a:spAutoFit/>
           </a:bodyPr>
           <a:lstStyle/>
@@ -13040,10 +13851,16 @@
                 <a:solidFill>
                   <a:srgbClr val="0F4D3B"/>
                 </a:solidFill>
-                <a:latin typeface="Segoe UI"/>
+                <a:latin typeface="Segoe UI" panose="020B0502040204020203"/>
               </a:rPr>
               <a:t>Neuf préfectures restent dans le top 10 pour au moins 90 % de 2 000 pondérations testées : leur priorité ne dépend pas de la méthode.</a:t>
             </a:r>
+            <a:endParaRPr sz="1350" b="1">
+              <a:solidFill>
+                <a:srgbClr val="0F4D3B"/>
+              </a:solidFill>
+              <a:latin typeface="Segoe UI" panose="020B0502040204020203"/>
+            </a:endParaRPr>
           </a:p>
         </p:txBody>
       </p:sp>
@@ -13108,7 +13925,7 @@
           <a:noFill/>
         </p:spPr>
         <p:txBody>
-          <a:bodyPr wrap="square" lIns="0" rIns="0" tIns="0" bIns="0">
+          <a:bodyPr wrap="square" lIns="0" tIns="0" rIns="0" bIns="0">
             <a:spAutoFit/>
           </a:bodyPr>
           <a:lstStyle/>
@@ -13123,10 +13940,16 @@
                 <a:solidFill>
                   <a:srgbClr val="8B8A84"/>
                 </a:solidFill>
-                <a:latin typeface="Consolas"/>
+                <a:latin typeface="Consolas" panose="020B0609020204030204"/>
               </a:rPr>
               <a:t>République togolaise · Défi Économie numérique · Données ouvertes PRISE 2021-2022, RGPH-5 2022, COD-AB 2021</a:t>
             </a:r>
+            <a:endParaRPr sz="800" b="0">
+              <a:solidFill>
+                <a:srgbClr val="8B8A84"/>
+              </a:solidFill>
+              <a:latin typeface="Consolas" panose="020B0609020204030204"/>
+            </a:endParaRPr>
           </a:p>
         </p:txBody>
       </p:sp>
@@ -13147,7 +13970,7 @@
           <a:noFill/>
         </p:spPr>
         <p:txBody>
-          <a:bodyPr wrap="square" lIns="0" rIns="0" tIns="0" bIns="0">
+          <a:bodyPr wrap="square" lIns="0" tIns="0" rIns="0" bIns="0">
             <a:spAutoFit/>
           </a:bodyPr>
           <a:lstStyle/>
@@ -13162,10 +13985,16 @@
                 <a:solidFill>
                   <a:srgbClr val="8B8A84"/>
                 </a:solidFill>
-                <a:latin typeface="Consolas"/>
+                <a:latin typeface="Consolas" panose="020B0609020204030204"/>
               </a:rPr>
               <a:t>06 / 9</a:t>
             </a:r>
+            <a:endParaRPr sz="800" b="1">
+              <a:solidFill>
+                <a:srgbClr val="8B8A84"/>
+              </a:solidFill>
+              <a:latin typeface="Consolas" panose="020B0609020204030204"/>
+            </a:endParaRPr>
           </a:p>
         </p:txBody>
       </p:sp>
@@ -13178,7 +14007,7 @@
           <p:nvPr/>
         </p:nvPicPr>
         <p:blipFill>
-          <a:blip r:embed="rId2"/>
+          <a:blip r:embed="rId1"/>
           <a:stretch>
             <a:fillRect/>
           </a:stretch>
@@ -13202,7 +14031,7 @@
           <p:nvPr/>
         </p:nvPicPr>
         <p:blipFill>
-          <a:blip r:embed="rId3"/>
+          <a:blip r:embed="rId2"/>
           <a:stretch>
             <a:fillRect/>
           </a:stretch>
@@ -13254,10 +14083,16 @@
                           <a:solidFill>
                             <a:srgbClr val="FFFFFF"/>
                           </a:solidFill>
-                          <a:latin typeface="Segoe UI"/>
+                          <a:latin typeface="Segoe UI" panose="020B0502040204020203"/>
                         </a:rPr>
                         <a:t>#</a:t>
                       </a:r>
+                      <a:endParaRPr sz="850" b="1">
+                        <a:solidFill>
+                          <a:srgbClr val="FFFFFF"/>
+                        </a:solidFill>
+                        <a:latin typeface="Segoe UI" panose="020B0502040204020203"/>
+                      </a:endParaRPr>
                     </a:p>
                   </a:txBody>
                   <a:tcPr anchor="ctr">
@@ -13276,10 +14111,16 @@
                           <a:solidFill>
                             <a:srgbClr val="FFFFFF"/>
                           </a:solidFill>
-                          <a:latin typeface="Segoe UI"/>
+                          <a:latin typeface="Segoe UI" panose="020B0502040204020203"/>
                         </a:rPr>
                         <a:t>Préfecture</a:t>
                       </a:r>
+                      <a:endParaRPr sz="850" b="1">
+                        <a:solidFill>
+                          <a:srgbClr val="FFFFFF"/>
+                        </a:solidFill>
+                        <a:latin typeface="Segoe UI" panose="020B0502040204020203"/>
+                      </a:endParaRPr>
                     </a:p>
                   </a:txBody>
                   <a:tcPr anchor="ctr">
@@ -13298,10 +14139,16 @@
                           <a:solidFill>
                             <a:srgbClr val="FFFFFF"/>
                           </a:solidFill>
-                          <a:latin typeface="Segoe UI"/>
+                          <a:latin typeface="Segoe UI" panose="020B0502040204020203"/>
                         </a:rPr>
                         <a:t>Hab.</a:t>
                       </a:r>
+                      <a:endParaRPr sz="850" b="1">
+                        <a:solidFill>
+                          <a:srgbClr val="FFFFFF"/>
+                        </a:solidFill>
+                        <a:latin typeface="Segoe UI" panose="020B0502040204020203"/>
+                      </a:endParaRPr>
                     </a:p>
                   </a:txBody>
                   <a:tcPr anchor="ctr">
@@ -13320,10 +14167,16 @@
                           <a:solidFill>
                             <a:srgbClr val="FFFFFF"/>
                           </a:solidFill>
-                          <a:latin typeface="Segoe UI"/>
+                          <a:latin typeface="Segoe UI" panose="020B0502040204020203"/>
                         </a:rPr>
                         <a:t>Hab./pt</a:t>
                       </a:r>
+                      <a:endParaRPr sz="850" b="1">
+                        <a:solidFill>
+                          <a:srgbClr val="FFFFFF"/>
+                        </a:solidFill>
+                        <a:latin typeface="Segoe UI" panose="020B0502040204020203"/>
+                      </a:endParaRPr>
                     </a:p>
                   </a:txBody>
                   <a:tcPr anchor="ctr">
@@ -13342,10 +14195,16 @@
                           <a:solidFill>
                             <a:srgbClr val="FFFFFF"/>
                           </a:solidFill>
-                          <a:latin typeface="Segoe UI"/>
+                          <a:latin typeface="Segoe UI" panose="020B0502040204020203"/>
                         </a:rPr>
                         <a:t>Ag.</a:t>
                       </a:r>
+                      <a:endParaRPr sz="850" b="1">
+                        <a:solidFill>
+                          <a:srgbClr val="FFFFFF"/>
+                        </a:solidFill>
+                        <a:latin typeface="Segoe UI" panose="020B0502040204020203"/>
+                      </a:endParaRPr>
                     </a:p>
                   </a:txBody>
                   <a:tcPr anchor="ctr">
@@ -13364,10 +14223,16 @@
                           <a:solidFill>
                             <a:srgbClr val="FFFFFF"/>
                           </a:solidFill>
-                          <a:latin typeface="Segoe UI"/>
+                          <a:latin typeface="Segoe UI" panose="020B0502040204020203"/>
                         </a:rPr>
                         <a:t>Dist.</a:t>
                       </a:r>
+                      <a:endParaRPr sz="850" b="1">
+                        <a:solidFill>
+                          <a:srgbClr val="FFFFFF"/>
+                        </a:solidFill>
+                        <a:latin typeface="Segoe UI" panose="020B0502040204020203"/>
+                      </a:endParaRPr>
                     </a:p>
                   </a:txBody>
                   <a:tcPr anchor="ctr">
@@ -13388,10 +14253,16 @@
                           <a:solidFill>
                             <a:srgbClr val="12120F"/>
                           </a:solidFill>
-                          <a:latin typeface="Segoe UI"/>
+                          <a:latin typeface="Segoe UI" panose="020B0502040204020203"/>
                         </a:rPr>
                         <a:t>1</a:t>
                       </a:r>
+                      <a:endParaRPr sz="850" b="1">
+                        <a:solidFill>
+                          <a:srgbClr val="12120F"/>
+                        </a:solidFill>
+                        <a:latin typeface="Segoe UI" panose="020B0502040204020203"/>
+                      </a:endParaRPr>
                     </a:p>
                   </a:txBody>
                   <a:tcPr anchor="ctr">
@@ -13410,10 +14281,16 @@
                           <a:solidFill>
                             <a:srgbClr val="55544F"/>
                           </a:solidFill>
-                          <a:latin typeface="Segoe UI"/>
+                          <a:latin typeface="Segoe UI" panose="020B0502040204020203"/>
                         </a:rPr>
                         <a:t>Kpendjal</a:t>
                       </a:r>
+                      <a:endParaRPr sz="850" b="0">
+                        <a:solidFill>
+                          <a:srgbClr val="55544F"/>
+                        </a:solidFill>
+                        <a:latin typeface="Segoe UI" panose="020B0502040204020203"/>
+                      </a:endParaRPr>
                     </a:p>
                   </a:txBody>
                   <a:tcPr anchor="ctr">
@@ -13432,10 +14309,16 @@
                           <a:solidFill>
                             <a:srgbClr val="55544F"/>
                           </a:solidFill>
-                          <a:latin typeface="Segoe UI"/>
+                          <a:latin typeface="Segoe UI" panose="020B0502040204020203"/>
                         </a:rPr>
                         <a:t>88 365</a:t>
                       </a:r>
+                      <a:endParaRPr sz="850" b="0">
+                        <a:solidFill>
+                          <a:srgbClr val="55544F"/>
+                        </a:solidFill>
+                        <a:latin typeface="Segoe UI" panose="020B0502040204020203"/>
+                      </a:endParaRPr>
                     </a:p>
                   </a:txBody>
                   <a:tcPr anchor="ctr">
@@ -13454,10 +14337,16 @@
                           <a:solidFill>
                             <a:srgbClr val="55544F"/>
                           </a:solidFill>
-                          <a:latin typeface="Segoe UI"/>
+                          <a:latin typeface="Segoe UI" panose="020B0502040204020203"/>
                         </a:rPr>
                         <a:t>2 155</a:t>
                       </a:r>
+                      <a:endParaRPr sz="850" b="0">
+                        <a:solidFill>
+                          <a:srgbClr val="55544F"/>
+                        </a:solidFill>
+                        <a:latin typeface="Segoe UI" panose="020B0502040204020203"/>
+                      </a:endParaRPr>
                     </a:p>
                   </a:txBody>
                   <a:tcPr anchor="ctr">
@@ -13476,10 +14365,16 @@
                           <a:solidFill>
                             <a:srgbClr val="55544F"/>
                           </a:solidFill>
-                          <a:latin typeface="Segoe UI"/>
+                          <a:latin typeface="Segoe UI" panose="020B0502040204020203"/>
                         </a:rPr>
                         <a:t>0</a:t>
                       </a:r>
+                      <a:endParaRPr sz="850" b="0">
+                        <a:solidFill>
+                          <a:srgbClr val="55544F"/>
+                        </a:solidFill>
+                        <a:latin typeface="Segoe UI" panose="020B0502040204020203"/>
+                      </a:endParaRPr>
                     </a:p>
                   </a:txBody>
                   <a:tcPr anchor="ctr">
@@ -13498,10 +14393,16 @@
                           <a:solidFill>
                             <a:srgbClr val="55544F"/>
                           </a:solidFill>
-                          <a:latin typeface="Segoe UI"/>
+                          <a:latin typeface="Segoe UI" panose="020B0502040204020203"/>
                         </a:rPr>
                         <a:t>47 km</a:t>
                       </a:r>
+                      <a:endParaRPr sz="850" b="0">
+                        <a:solidFill>
+                          <a:srgbClr val="55544F"/>
+                        </a:solidFill>
+                        <a:latin typeface="Segoe UI" panose="020B0502040204020203"/>
+                      </a:endParaRPr>
                     </a:p>
                   </a:txBody>
                   <a:tcPr anchor="ctr">
@@ -13522,10 +14423,16 @@
                           <a:solidFill>
                             <a:srgbClr val="12120F"/>
                           </a:solidFill>
-                          <a:latin typeface="Segoe UI"/>
+                          <a:latin typeface="Segoe UI" panose="020B0502040204020203"/>
                         </a:rPr>
                         <a:t>2</a:t>
                       </a:r>
+                      <a:endParaRPr sz="850" b="1">
+                        <a:solidFill>
+                          <a:srgbClr val="12120F"/>
+                        </a:solidFill>
+                        <a:latin typeface="Segoe UI" panose="020B0502040204020203"/>
+                      </a:endParaRPr>
                     </a:p>
                   </a:txBody>
                   <a:tcPr anchor="ctr">
@@ -13544,10 +14451,16 @@
                           <a:solidFill>
                             <a:srgbClr val="55544F"/>
                           </a:solidFill>
-                          <a:latin typeface="Segoe UI"/>
+                          <a:latin typeface="Segoe UI" panose="020B0502040204020203"/>
                         </a:rPr>
                         <a:t>Mô</a:t>
                       </a:r>
+                      <a:endParaRPr sz="850" b="0">
+                        <a:solidFill>
+                          <a:srgbClr val="55544F"/>
+                        </a:solidFill>
+                        <a:latin typeface="Segoe UI" panose="020B0502040204020203"/>
+                      </a:endParaRPr>
                     </a:p>
                   </a:txBody>
                   <a:tcPr anchor="ctr">
@@ -13566,10 +14479,16 @@
                           <a:solidFill>
                             <a:srgbClr val="55544F"/>
                           </a:solidFill>
-                          <a:latin typeface="Segoe UI"/>
+                          <a:latin typeface="Segoe UI" panose="020B0502040204020203"/>
                         </a:rPr>
                         <a:t>52 448</a:t>
                       </a:r>
+                      <a:endParaRPr sz="850" b="0">
+                        <a:solidFill>
+                          <a:srgbClr val="55544F"/>
+                        </a:solidFill>
+                        <a:latin typeface="Segoe UI" panose="020B0502040204020203"/>
+                      </a:endParaRPr>
                     </a:p>
                   </a:txBody>
                   <a:tcPr anchor="ctr">
@@ -13588,10 +14507,16 @@
                           <a:solidFill>
                             <a:srgbClr val="55544F"/>
                           </a:solidFill>
-                          <a:latin typeface="Segoe UI"/>
+                          <a:latin typeface="Segoe UI" panose="020B0502040204020203"/>
                         </a:rPr>
                         <a:t>1 639</a:t>
                       </a:r>
+                      <a:endParaRPr sz="850" b="0">
+                        <a:solidFill>
+                          <a:srgbClr val="55544F"/>
+                        </a:solidFill>
+                        <a:latin typeface="Segoe UI" panose="020B0502040204020203"/>
+                      </a:endParaRPr>
                     </a:p>
                   </a:txBody>
                   <a:tcPr anchor="ctr">
@@ -13610,10 +14535,16 @@
                           <a:solidFill>
                             <a:srgbClr val="55544F"/>
                           </a:solidFill>
-                          <a:latin typeface="Segoe UI"/>
+                          <a:latin typeface="Segoe UI" panose="020B0502040204020203"/>
                         </a:rPr>
                         <a:t>0</a:t>
                       </a:r>
+                      <a:endParaRPr sz="850" b="0">
+                        <a:solidFill>
+                          <a:srgbClr val="55544F"/>
+                        </a:solidFill>
+                        <a:latin typeface="Segoe UI" panose="020B0502040204020203"/>
+                      </a:endParaRPr>
                     </a:p>
                   </a:txBody>
                   <a:tcPr anchor="ctr">
@@ -13632,10 +14563,16 @@
                           <a:solidFill>
                             <a:srgbClr val="55544F"/>
                           </a:solidFill>
-                          <a:latin typeface="Segoe UI"/>
+                          <a:latin typeface="Segoe UI" panose="020B0502040204020203"/>
                         </a:rPr>
                         <a:t>45 km</a:t>
                       </a:r>
+                      <a:endParaRPr sz="850" b="0">
+                        <a:solidFill>
+                          <a:srgbClr val="55544F"/>
+                        </a:solidFill>
+                        <a:latin typeface="Segoe UI" panose="020B0502040204020203"/>
+                      </a:endParaRPr>
                     </a:p>
                   </a:txBody>
                   <a:tcPr anchor="ctr">
@@ -13656,10 +14593,16 @@
                           <a:solidFill>
                             <a:srgbClr val="12120F"/>
                           </a:solidFill>
-                          <a:latin typeface="Segoe UI"/>
+                          <a:latin typeface="Segoe UI" panose="020B0502040204020203"/>
                         </a:rPr>
                         <a:t>3</a:t>
                       </a:r>
+                      <a:endParaRPr sz="850" b="1">
+                        <a:solidFill>
+                          <a:srgbClr val="12120F"/>
+                        </a:solidFill>
+                        <a:latin typeface="Segoe UI" panose="020B0502040204020203"/>
+                      </a:endParaRPr>
                     </a:p>
                   </a:txBody>
                   <a:tcPr anchor="ctr">
@@ -13678,10 +14621,16 @@
                           <a:solidFill>
                             <a:srgbClr val="55544F"/>
                           </a:solidFill>
-                          <a:latin typeface="Segoe UI"/>
+                          <a:latin typeface="Segoe UI" panose="020B0502040204020203"/>
                         </a:rPr>
                         <a:t>Est-Mono</a:t>
                       </a:r>
+                      <a:endParaRPr sz="850" b="0">
+                        <a:solidFill>
+                          <a:srgbClr val="55544F"/>
+                        </a:solidFill>
+                        <a:latin typeface="Segoe UI" panose="020B0502040204020203"/>
+                      </a:endParaRPr>
                     </a:p>
                   </a:txBody>
                   <a:tcPr anchor="ctr">
@@ -13700,10 +14649,16 @@
                           <a:solidFill>
                             <a:srgbClr val="55544F"/>
                           </a:solidFill>
-                          <a:latin typeface="Segoe UI"/>
+                          <a:latin typeface="Segoe UI" panose="020B0502040204020203"/>
                         </a:rPr>
                         <a:t>164 460</a:t>
                       </a:r>
+                      <a:endParaRPr sz="850" b="0">
+                        <a:solidFill>
+                          <a:srgbClr val="55544F"/>
+                        </a:solidFill>
+                        <a:latin typeface="Segoe UI" panose="020B0502040204020203"/>
+                      </a:endParaRPr>
                     </a:p>
                   </a:txBody>
                   <a:tcPr anchor="ctr">
@@ -13722,10 +14677,16 @@
                           <a:solidFill>
                             <a:srgbClr val="55544F"/>
                           </a:solidFill>
-                          <a:latin typeface="Segoe UI"/>
+                          <a:latin typeface="Segoe UI" panose="020B0502040204020203"/>
                         </a:rPr>
                         <a:t>787</a:t>
                       </a:r>
+                      <a:endParaRPr sz="850" b="0">
+                        <a:solidFill>
+                          <a:srgbClr val="55544F"/>
+                        </a:solidFill>
+                        <a:latin typeface="Segoe UI" panose="020B0502040204020203"/>
+                      </a:endParaRPr>
                     </a:p>
                   </a:txBody>
                   <a:tcPr anchor="ctr">
@@ -13744,10 +14705,16 @@
                           <a:solidFill>
                             <a:srgbClr val="55544F"/>
                           </a:solidFill>
-                          <a:latin typeface="Segoe UI"/>
+                          <a:latin typeface="Segoe UI" panose="020B0502040204020203"/>
                         </a:rPr>
                         <a:t>0</a:t>
                       </a:r>
+                      <a:endParaRPr sz="850" b="0">
+                        <a:solidFill>
+                          <a:srgbClr val="55544F"/>
+                        </a:solidFill>
+                        <a:latin typeface="Segoe UI" panose="020B0502040204020203"/>
+                      </a:endParaRPr>
                     </a:p>
                   </a:txBody>
                   <a:tcPr anchor="ctr">
@@ -13766,10 +14733,16 @@
                           <a:solidFill>
                             <a:srgbClr val="55544F"/>
                           </a:solidFill>
-                          <a:latin typeface="Segoe UI"/>
+                          <a:latin typeface="Segoe UI" panose="020B0502040204020203"/>
                         </a:rPr>
                         <a:t>46 km</a:t>
                       </a:r>
+                      <a:endParaRPr sz="850" b="0">
+                        <a:solidFill>
+                          <a:srgbClr val="55544F"/>
+                        </a:solidFill>
+                        <a:latin typeface="Segoe UI" panose="020B0502040204020203"/>
+                      </a:endParaRPr>
                     </a:p>
                   </a:txBody>
                   <a:tcPr anchor="ctr">
@@ -13790,10 +14763,16 @@
                           <a:solidFill>
                             <a:srgbClr val="12120F"/>
                           </a:solidFill>
-                          <a:latin typeface="Segoe UI"/>
+                          <a:latin typeface="Segoe UI" panose="020B0502040204020203"/>
                         </a:rPr>
                         <a:t>4</a:t>
                       </a:r>
+                      <a:endParaRPr sz="850" b="1">
+                        <a:solidFill>
+                          <a:srgbClr val="12120F"/>
+                        </a:solidFill>
+                        <a:latin typeface="Segoe UI" panose="020B0502040204020203"/>
+                      </a:endParaRPr>
                     </a:p>
                   </a:txBody>
                   <a:tcPr anchor="ctr">
@@ -13812,10 +14791,16 @@
                           <a:solidFill>
                             <a:srgbClr val="55544F"/>
                           </a:solidFill>
-                          <a:latin typeface="Segoe UI"/>
+                          <a:latin typeface="Segoe UI" panose="020B0502040204020203"/>
                         </a:rPr>
                         <a:t>Akébou</a:t>
                       </a:r>
+                      <a:endParaRPr sz="850" b="0">
+                        <a:solidFill>
+                          <a:srgbClr val="55544F"/>
+                        </a:solidFill>
+                        <a:latin typeface="Segoe UI" panose="020B0502040204020203"/>
+                      </a:endParaRPr>
                     </a:p>
                   </a:txBody>
                   <a:tcPr anchor="ctr">
@@ -13834,10 +14819,16 @@
                           <a:solidFill>
                             <a:srgbClr val="55544F"/>
                           </a:solidFill>
-                          <a:latin typeface="Segoe UI"/>
+                          <a:latin typeface="Segoe UI" panose="020B0502040204020203"/>
                         </a:rPr>
                         <a:t>73 830</a:t>
                       </a:r>
+                      <a:endParaRPr sz="850" b="0">
+                        <a:solidFill>
+                          <a:srgbClr val="55544F"/>
+                        </a:solidFill>
+                        <a:latin typeface="Segoe UI" panose="020B0502040204020203"/>
+                      </a:endParaRPr>
                     </a:p>
                   </a:txBody>
                   <a:tcPr anchor="ctr">
@@ -13856,10 +14847,16 @@
                           <a:solidFill>
                             <a:srgbClr val="55544F"/>
                           </a:solidFill>
-                          <a:latin typeface="Segoe UI"/>
+                          <a:latin typeface="Segoe UI" panose="020B0502040204020203"/>
                         </a:rPr>
                         <a:t>849</a:t>
                       </a:r>
+                      <a:endParaRPr sz="850" b="0">
+                        <a:solidFill>
+                          <a:srgbClr val="55544F"/>
+                        </a:solidFill>
+                        <a:latin typeface="Segoe UI" panose="020B0502040204020203"/>
+                      </a:endParaRPr>
                     </a:p>
                   </a:txBody>
                   <a:tcPr anchor="ctr">
@@ -13878,10 +14875,16 @@
                           <a:solidFill>
                             <a:srgbClr val="55544F"/>
                           </a:solidFill>
-                          <a:latin typeface="Segoe UI"/>
+                          <a:latin typeface="Segoe UI" panose="020B0502040204020203"/>
                         </a:rPr>
                         <a:t>0</a:t>
                       </a:r>
+                      <a:endParaRPr sz="850" b="0">
+                        <a:solidFill>
+                          <a:srgbClr val="55544F"/>
+                        </a:solidFill>
+                        <a:latin typeface="Segoe UI" panose="020B0502040204020203"/>
+                      </a:endParaRPr>
                     </a:p>
                   </a:txBody>
                   <a:tcPr anchor="ctr">
@@ -13900,10 +14903,16 @@
                           <a:solidFill>
                             <a:srgbClr val="55544F"/>
                           </a:solidFill>
-                          <a:latin typeface="Segoe UI"/>
+                          <a:latin typeface="Segoe UI" panose="020B0502040204020203"/>
                         </a:rPr>
                         <a:t>43 km</a:t>
                       </a:r>
+                      <a:endParaRPr sz="850" b="0">
+                        <a:solidFill>
+                          <a:srgbClr val="55544F"/>
+                        </a:solidFill>
+                        <a:latin typeface="Segoe UI" panose="020B0502040204020203"/>
+                      </a:endParaRPr>
                     </a:p>
                   </a:txBody>
                   <a:tcPr anchor="ctr">
@@ -13924,10 +14933,16 @@
                           <a:solidFill>
                             <a:srgbClr val="12120F"/>
                           </a:solidFill>
-                          <a:latin typeface="Segoe UI"/>
+                          <a:latin typeface="Segoe UI" panose="020B0502040204020203"/>
                         </a:rPr>
                         <a:t>5</a:t>
                       </a:r>
+                      <a:endParaRPr sz="850" b="1">
+                        <a:solidFill>
+                          <a:srgbClr val="12120F"/>
+                        </a:solidFill>
+                        <a:latin typeface="Segoe UI" panose="020B0502040204020203"/>
+                      </a:endParaRPr>
                     </a:p>
                   </a:txBody>
                   <a:tcPr anchor="ctr">
@@ -13946,10 +14961,16 @@
                           <a:solidFill>
                             <a:srgbClr val="55544F"/>
                           </a:solidFill>
-                          <a:latin typeface="Segoe UI"/>
+                          <a:latin typeface="Segoe UI" panose="020B0502040204020203"/>
                         </a:rPr>
                         <a:t>Blitta</a:t>
                       </a:r>
+                      <a:endParaRPr sz="850" b="0">
+                        <a:solidFill>
+                          <a:srgbClr val="55544F"/>
+                        </a:solidFill>
+                        <a:latin typeface="Segoe UI" panose="020B0502040204020203"/>
+                      </a:endParaRPr>
                     </a:p>
                   </a:txBody>
                   <a:tcPr anchor="ctr">
@@ -13968,10 +14989,16 @@
                           <a:solidFill>
                             <a:srgbClr val="55544F"/>
                           </a:solidFill>
-                          <a:latin typeface="Segoe UI"/>
+                          <a:latin typeface="Segoe UI" panose="020B0502040204020203"/>
                         </a:rPr>
                         <a:t>163 272</a:t>
                       </a:r>
+                      <a:endParaRPr sz="850" b="0">
+                        <a:solidFill>
+                          <a:srgbClr val="55544F"/>
+                        </a:solidFill>
+                        <a:latin typeface="Segoe UI" panose="020B0502040204020203"/>
+                      </a:endParaRPr>
                     </a:p>
                   </a:txBody>
                   <a:tcPr anchor="ctr">
@@ -13990,10 +15017,16 @@
                           <a:solidFill>
                             <a:srgbClr val="55544F"/>
                           </a:solidFill>
-                          <a:latin typeface="Segoe UI"/>
+                          <a:latin typeface="Segoe UI" panose="020B0502040204020203"/>
                         </a:rPr>
                         <a:t>1 814</a:t>
                       </a:r>
+                      <a:endParaRPr sz="850" b="0">
+                        <a:solidFill>
+                          <a:srgbClr val="55544F"/>
+                        </a:solidFill>
+                        <a:latin typeface="Segoe UI" panose="020B0502040204020203"/>
+                      </a:endParaRPr>
                     </a:p>
                   </a:txBody>
                   <a:tcPr anchor="ctr">
@@ -14012,10 +15045,16 @@
                           <a:solidFill>
                             <a:srgbClr val="55544F"/>
                           </a:solidFill>
-                          <a:latin typeface="Segoe UI"/>
+                          <a:latin typeface="Segoe UI" panose="020B0502040204020203"/>
                         </a:rPr>
                         <a:t>2</a:t>
                       </a:r>
+                      <a:endParaRPr sz="850" b="0">
+                        <a:solidFill>
+                          <a:srgbClr val="55544F"/>
+                        </a:solidFill>
+                        <a:latin typeface="Segoe UI" panose="020B0502040204020203"/>
+                      </a:endParaRPr>
                     </a:p>
                   </a:txBody>
                   <a:tcPr anchor="ctr">
@@ -14034,10 +15073,16 @@
                           <a:solidFill>
                             <a:srgbClr val="55544F"/>
                           </a:solidFill>
-                          <a:latin typeface="Segoe UI"/>
+                          <a:latin typeface="Segoe UI" panose="020B0502040204020203"/>
                         </a:rPr>
                         <a:t>28 km</a:t>
                       </a:r>
+                      <a:endParaRPr sz="850" b="0">
+                        <a:solidFill>
+                          <a:srgbClr val="55544F"/>
+                        </a:solidFill>
+                        <a:latin typeface="Segoe UI" panose="020B0502040204020203"/>
+                      </a:endParaRPr>
                     </a:p>
                   </a:txBody>
                   <a:tcPr anchor="ctr">
@@ -14058,10 +15103,16 @@
                           <a:solidFill>
                             <a:srgbClr val="12120F"/>
                           </a:solidFill>
-                          <a:latin typeface="Segoe UI"/>
+                          <a:latin typeface="Segoe UI" panose="020B0502040204020203"/>
                         </a:rPr>
                         <a:t>6</a:t>
                       </a:r>
+                      <a:endParaRPr sz="850" b="1">
+                        <a:solidFill>
+                          <a:srgbClr val="12120F"/>
+                        </a:solidFill>
+                        <a:latin typeface="Segoe UI" panose="020B0502040204020203"/>
+                      </a:endParaRPr>
                     </a:p>
                   </a:txBody>
                   <a:tcPr anchor="ctr">
@@ -14080,10 +15131,16 @@
                           <a:solidFill>
                             <a:srgbClr val="55544F"/>
                           </a:solidFill>
-                          <a:latin typeface="Segoe UI"/>
+                          <a:latin typeface="Segoe UI" panose="020B0502040204020203"/>
                         </a:rPr>
                         <a:t>Wawa</a:t>
                       </a:r>
+                      <a:endParaRPr sz="850" b="0">
+                        <a:solidFill>
+                          <a:srgbClr val="55544F"/>
+                        </a:solidFill>
+                        <a:latin typeface="Segoe UI" panose="020B0502040204020203"/>
+                      </a:endParaRPr>
                     </a:p>
                   </a:txBody>
                   <a:tcPr anchor="ctr">
@@ -14102,10 +15159,16 @@
                           <a:solidFill>
                             <a:srgbClr val="55544F"/>
                           </a:solidFill>
-                          <a:latin typeface="Segoe UI"/>
+                          <a:latin typeface="Segoe UI" panose="020B0502040204020203"/>
                         </a:rPr>
                         <a:t>101 300</a:t>
                       </a:r>
+                      <a:endParaRPr sz="850" b="0">
+                        <a:solidFill>
+                          <a:srgbClr val="55544F"/>
+                        </a:solidFill>
+                        <a:latin typeface="Segoe UI" panose="020B0502040204020203"/>
+                      </a:endParaRPr>
                     </a:p>
                   </a:txBody>
                   <a:tcPr anchor="ctr">
@@ -14124,10 +15187,16 @@
                           <a:solidFill>
                             <a:srgbClr val="55544F"/>
                           </a:solidFill>
-                          <a:latin typeface="Segoe UI"/>
+                          <a:latin typeface="Segoe UI" panose="020B0502040204020203"/>
                         </a:rPr>
                         <a:t>415</a:t>
                       </a:r>
+                      <a:endParaRPr sz="850" b="0">
+                        <a:solidFill>
+                          <a:srgbClr val="55544F"/>
+                        </a:solidFill>
+                        <a:latin typeface="Segoe UI" panose="020B0502040204020203"/>
+                      </a:endParaRPr>
                     </a:p>
                   </a:txBody>
                   <a:tcPr anchor="ctr">
@@ -14146,10 +15215,16 @@
                           <a:solidFill>
                             <a:srgbClr val="55544F"/>
                           </a:solidFill>
-                          <a:latin typeface="Segoe UI"/>
+                          <a:latin typeface="Segoe UI" panose="020B0502040204020203"/>
                         </a:rPr>
                         <a:t>0</a:t>
                       </a:r>
+                      <a:endParaRPr sz="850" b="0">
+                        <a:solidFill>
+                          <a:srgbClr val="55544F"/>
+                        </a:solidFill>
+                        <a:latin typeface="Segoe UI" panose="020B0502040204020203"/>
+                      </a:endParaRPr>
                     </a:p>
                   </a:txBody>
                   <a:tcPr anchor="ctr">
@@ -14168,10 +15243,16 @@
                           <a:solidFill>
                             <a:srgbClr val="55544F"/>
                           </a:solidFill>
-                          <a:latin typeface="Segoe UI"/>
+                          <a:latin typeface="Segoe UI" panose="020B0502040204020203"/>
                         </a:rPr>
                         <a:t>44 km</a:t>
                       </a:r>
+                      <a:endParaRPr sz="850" b="0">
+                        <a:solidFill>
+                          <a:srgbClr val="55544F"/>
+                        </a:solidFill>
+                        <a:latin typeface="Segoe UI" panose="020B0502040204020203"/>
+                      </a:endParaRPr>
                     </a:p>
                   </a:txBody>
                   <a:tcPr anchor="ctr">
@@ -14202,7 +15283,7 @@
           <a:noFill/>
         </p:spPr>
         <p:txBody>
-          <a:bodyPr wrap="square" lIns="0" rIns="0" tIns="0" bIns="0">
+          <a:bodyPr wrap="square" lIns="0" tIns="0" rIns="0" bIns="0">
             <a:spAutoFit/>
           </a:bodyPr>
           <a:lstStyle/>
@@ -14217,10 +15298,16 @@
                 <a:solidFill>
                   <a:srgbClr val="55544F"/>
                 </a:solidFill>
-                <a:latin typeface="Segoe UI"/>
+                <a:latin typeface="Segoe UI" panose="020B0502040204020203"/>
               </a:rPr>
               <a:t>Corrélation de Spearman moyenne avec le classement de référence : 0,971 sur 2 000 pondérations aléatoires, plus huit variantes structurelles (retrait de chaque composante, poids égaux, normalisation par rang).</a:t>
             </a:r>
+            <a:endParaRPr sz="1000" b="0">
+              <a:solidFill>
+                <a:srgbClr val="55544F"/>
+              </a:solidFill>
+              <a:latin typeface="Segoe UI" panose="020B0502040204020203"/>
+            </a:endParaRPr>
           </a:p>
           <a:p>
             <a:pPr algn="l">
@@ -14228,15 +15315,6 @@
                 <a:spcPct val="132000"/>
               </a:lnSpc>
             </a:pPr>
-            <a:r>
-              <a:rPr sz="1000" b="0">
-                <a:solidFill>
-                  <a:srgbClr val="55544F"/>
-                </a:solidFill>
-                <a:latin typeface="Segoe UI"/>
-              </a:rPr>
-              <a:t/>
-            </a:r>
           </a:p>
           <a:p>
             <a:pPr algn="l">
@@ -14249,10 +15327,16 @@
                 <a:solidFill>
                   <a:srgbClr val="55544F"/>
                 </a:solidFill>
-                <a:latin typeface="Segoe UI"/>
+                <a:latin typeface="Segoe UI" panose="020B0502040204020203"/>
               </a:rPr>
               <a:t>Les territoires dont le rang dépend des pondérations ne sont pas présentés comme prioritaires.</a:t>
             </a:r>
+            <a:endParaRPr sz="1000" b="0">
+              <a:solidFill>
+                <a:srgbClr val="55544F"/>
+              </a:solidFill>
+              <a:latin typeface="Segoe UI" panose="020B0502040204020203"/>
+            </a:endParaRPr>
           </a:p>
         </p:txBody>
       </p:sp>
@@ -14265,7 +15349,7 @@
 </file>
 
 <file path=ppt/slides/slide8.xml><?xml version="1.0" encoding="utf-8"?>
-<p:sld xmlns:a="http://schemas.openxmlformats.org/drawingml/2006/main" xmlns:p="http://schemas.openxmlformats.org/presentationml/2006/main" xmlns:r="http://schemas.openxmlformats.org/officeDocument/2006/relationships">
+<p:sld xmlns:a="http://schemas.openxmlformats.org/drawingml/2006/main" xmlns:r="http://schemas.openxmlformats.org/officeDocument/2006/relationships" xmlns:p="http://schemas.openxmlformats.org/presentationml/2006/main">
   <p:cSld>
     <p:spTree>
       <p:nvGrpSpPr>
@@ -14467,7 +15551,7 @@
           <a:noFill/>
         </p:spPr>
         <p:txBody>
-          <a:bodyPr wrap="square" lIns="0" rIns="0" tIns="0" bIns="0">
+          <a:bodyPr wrap="square" lIns="0" tIns="0" rIns="0" bIns="0">
             <a:spAutoFit/>
           </a:bodyPr>
           <a:lstStyle/>
@@ -14482,10 +15566,16 @@
                 <a:solidFill>
                   <a:srgbClr val="8B8A84"/>
                 </a:solidFill>
-                <a:latin typeface="Consolas"/>
+                <a:latin typeface="Consolas" panose="020B0609020204030204"/>
               </a:rPr>
               <a:t>DÉCISION</a:t>
             </a:r>
+            <a:endParaRPr sz="900" b="1">
+              <a:solidFill>
+                <a:srgbClr val="8B8A84"/>
+              </a:solidFill>
+              <a:latin typeface="Consolas" panose="020B0609020204030204"/>
+            </a:endParaRPr>
           </a:p>
         </p:txBody>
       </p:sp>
@@ -14506,7 +15596,7 @@
           <a:noFill/>
         </p:spPr>
         <p:txBody>
-          <a:bodyPr wrap="square" lIns="0" rIns="0" tIns="0" bIns="0">
+          <a:bodyPr wrap="square" lIns="0" tIns="0" rIns="0" bIns="0">
             <a:spAutoFit/>
           </a:bodyPr>
           <a:lstStyle/>
@@ -14521,10 +15611,16 @@
                 <a:solidFill>
                   <a:srgbClr val="12120F"/>
                 </a:solidFill>
-                <a:latin typeface="Segoe UI"/>
+                <a:latin typeface="Segoe UI" panose="020B0502040204020203"/>
               </a:rPr>
               <a:t>Recommandations stratégiques</a:t>
             </a:r>
+            <a:endParaRPr sz="2800" b="1">
+              <a:solidFill>
+                <a:srgbClr val="12120F"/>
+              </a:solidFill>
+              <a:latin typeface="Segoe UI" panose="020B0502040204020203"/>
+            </a:endParaRPr>
           </a:p>
         </p:txBody>
       </p:sp>
@@ -14633,7 +15729,7 @@
           <a:noFill/>
         </p:spPr>
         <p:txBody>
-          <a:bodyPr wrap="square" lIns="0" rIns="0" tIns="0" bIns="0">
+          <a:bodyPr wrap="square" lIns="0" tIns="0" rIns="0" bIns="0">
             <a:spAutoFit/>
           </a:bodyPr>
           <a:lstStyle/>
@@ -14648,10 +15744,16 @@
                 <a:solidFill>
                   <a:srgbClr val="0F4D3B"/>
                 </a:solidFill>
-                <a:latin typeface="Segoe UI"/>
+                <a:latin typeface="Segoe UI" panose="020B0502040204020203"/>
               </a:rPr>
               <a:t>Cinq leviers, chacun déclenché par un seuil mesuré — aucune recommandation sans le chiffre qui la justifie.</a:t>
             </a:r>
+            <a:endParaRPr sz="1350" b="1">
+              <a:solidFill>
+                <a:srgbClr val="0F4D3B"/>
+              </a:solidFill>
+              <a:latin typeface="Segoe UI" panose="020B0502040204020203"/>
+            </a:endParaRPr>
           </a:p>
         </p:txBody>
       </p:sp>
@@ -14716,7 +15818,7 @@
           <a:noFill/>
         </p:spPr>
         <p:txBody>
-          <a:bodyPr wrap="square" lIns="0" rIns="0" tIns="0" bIns="0">
+          <a:bodyPr wrap="square" lIns="0" tIns="0" rIns="0" bIns="0">
             <a:spAutoFit/>
           </a:bodyPr>
           <a:lstStyle/>
@@ -14731,10 +15833,16 @@
                 <a:solidFill>
                   <a:srgbClr val="8B8A84"/>
                 </a:solidFill>
-                <a:latin typeface="Consolas"/>
+                <a:latin typeface="Consolas" panose="020B0609020204030204"/>
               </a:rPr>
               <a:t>République togolaise · Défi Économie numérique · Données ouvertes PRISE 2021-2022, RGPH-5 2022, COD-AB 2021</a:t>
             </a:r>
+            <a:endParaRPr sz="800" b="0">
+              <a:solidFill>
+                <a:srgbClr val="8B8A84"/>
+              </a:solidFill>
+              <a:latin typeface="Consolas" panose="020B0609020204030204"/>
+            </a:endParaRPr>
           </a:p>
         </p:txBody>
       </p:sp>
@@ -14755,7 +15863,7 @@
           <a:noFill/>
         </p:spPr>
         <p:txBody>
-          <a:bodyPr wrap="square" lIns="0" rIns="0" tIns="0" bIns="0">
+          <a:bodyPr wrap="square" lIns="0" tIns="0" rIns="0" bIns="0">
             <a:spAutoFit/>
           </a:bodyPr>
           <a:lstStyle/>
@@ -14770,10 +15878,16 @@
                 <a:solidFill>
                   <a:srgbClr val="8B8A84"/>
                 </a:solidFill>
-                <a:latin typeface="Consolas"/>
+                <a:latin typeface="Consolas" panose="020B0609020204030204"/>
               </a:rPr>
               <a:t>07 / 9</a:t>
             </a:r>
+            <a:endParaRPr sz="800" b="1">
+              <a:solidFill>
+                <a:srgbClr val="8B8A84"/>
+              </a:solidFill>
+              <a:latin typeface="Consolas" panose="020B0609020204030204"/>
+            </a:endParaRPr>
           </a:p>
         </p:txBody>
       </p:sp>
@@ -14786,7 +15900,7 @@
           <p:nvPr/>
         </p:nvPicPr>
         <p:blipFill>
-          <a:blip r:embed="rId2"/>
+          <a:blip r:embed="rId1"/>
           <a:stretch>
             <a:fillRect/>
           </a:stretch>
@@ -14862,7 +15976,7 @@
           <a:noFill/>
         </p:spPr>
         <p:txBody>
-          <a:bodyPr wrap="square" lIns="0" rIns="0" tIns="0" bIns="0">
+          <a:bodyPr wrap="square" lIns="0" tIns="0" rIns="0" bIns="0">
             <a:spAutoFit/>
           </a:bodyPr>
           <a:lstStyle/>
@@ -14877,10 +15991,16 @@
                 <a:solidFill>
                   <a:srgbClr val="12120F"/>
                 </a:solidFill>
-                <a:latin typeface="Segoe UI"/>
+                <a:latin typeface="Segoe UI" panose="020B0502040204020203"/>
               </a:rPr>
               <a:t>Densifier le réseau d'agents Mobile Money — levier rapide</a:t>
             </a:r>
+            <a:endParaRPr sz="1100" b="1">
+              <a:solidFill>
+                <a:srgbClr val="12120F"/>
+              </a:solidFill>
+              <a:latin typeface="Segoe UI" panose="020B0502040204020203"/>
+            </a:endParaRPr>
           </a:p>
         </p:txBody>
       </p:sp>
@@ -14901,7 +16021,7 @@
           <a:noFill/>
         </p:spPr>
         <p:txBody>
-          <a:bodyPr wrap="square" lIns="0" rIns="0" tIns="0" bIns="0">
+          <a:bodyPr wrap="square" lIns="0" tIns="0" rIns="0" bIns="0">
             <a:spAutoFit/>
           </a:bodyPr>
           <a:lstStyle/>
@@ -14916,10 +16036,16 @@
                 <a:solidFill>
                   <a:srgbClr val="55544F"/>
                 </a:solidFill>
-                <a:latin typeface="Segoe UI"/>
+                <a:latin typeface="Segoe UI" panose="020B0502040204020203"/>
               </a:rPr>
               <a:t>Déclencheur : plus de 800 habitants par point. S'appuie sur des commerces existants, sans construction.</a:t>
             </a:r>
+            <a:endParaRPr sz="950" b="0">
+              <a:solidFill>
+                <a:srgbClr val="55544F"/>
+              </a:solidFill>
+              <a:latin typeface="Segoe UI" panose="020B0502040204020203"/>
+            </a:endParaRPr>
           </a:p>
         </p:txBody>
       </p:sp>
@@ -14984,7 +16110,7 @@
           <a:noFill/>
         </p:spPr>
         <p:txBody>
-          <a:bodyPr wrap="square" lIns="0" rIns="0" tIns="0" bIns="0">
+          <a:bodyPr wrap="square" lIns="0" tIns="0" rIns="0" bIns="0">
             <a:spAutoFit/>
           </a:bodyPr>
           <a:lstStyle/>
@@ -14999,10 +16125,16 @@
                 <a:solidFill>
                   <a:srgbClr val="12120F"/>
                 </a:solidFill>
-                <a:latin typeface="Segoe UI"/>
+                <a:latin typeface="Segoe UI" panose="020B0502040204020203"/>
               </a:rPr>
               <a:t>Implanter un point de présence opérateur — levier structurel</a:t>
             </a:r>
+            <a:endParaRPr sz="1100" b="1">
+              <a:solidFill>
+                <a:srgbClr val="12120F"/>
+              </a:solidFill>
+              <a:latin typeface="Segoe UI" panose="020B0502040204020203"/>
+            </a:endParaRPr>
           </a:p>
         </p:txBody>
       </p:sp>
@@ -15023,7 +16155,7 @@
           <a:noFill/>
         </p:spPr>
         <p:txBody>
-          <a:bodyPr wrap="square" lIns="0" rIns="0" tIns="0" bIns="0">
+          <a:bodyPr wrap="square" lIns="0" tIns="0" rIns="0" bIns="0">
             <a:spAutoFit/>
           </a:bodyPr>
           <a:lstStyle/>
@@ -15038,10 +16170,16 @@
                 <a:solidFill>
                   <a:srgbClr val="55544F"/>
                 </a:solidFill>
-                <a:latin typeface="Segoe UI"/>
+                <a:latin typeface="Segoe UI" panose="020B0502040204020203"/>
               </a:rPr>
               <a:t>Déclencheur : aucune agence active. Seul levier créant un guichet là où il n'en existe aucun.</a:t>
             </a:r>
+            <a:endParaRPr sz="950" b="0">
+              <a:solidFill>
+                <a:srgbClr val="55544F"/>
+              </a:solidFill>
+              <a:latin typeface="Segoe UI" panose="020B0502040204020203"/>
+            </a:endParaRPr>
           </a:p>
         </p:txBody>
       </p:sp>
@@ -15106,7 +16244,7 @@
           <a:noFill/>
         </p:spPr>
         <p:txBody>
-          <a:bodyPr wrap="square" lIns="0" rIns="0" tIns="0" bIns="0">
+          <a:bodyPr wrap="square" lIns="0" tIns="0" rIns="0" bIns="0">
             <a:spAutoFit/>
           </a:bodyPr>
           <a:lstStyle/>
@@ -15121,10 +16259,16 @@
                 <a:solidFill>
                   <a:srgbClr val="12120F"/>
                 </a:solidFill>
-                <a:latin typeface="Segoe UI"/>
+                <a:latin typeface="Segoe UI" panose="020B0502040204020203"/>
               </a:rPr>
               <a:t>Répartir le maillage plutôt qu'un point unique</a:t>
             </a:r>
+            <a:endParaRPr sz="1100" b="1">
+              <a:solidFill>
+                <a:srgbClr val="12120F"/>
+              </a:solidFill>
+              <a:latin typeface="Segoe UI" panose="020B0502040204020203"/>
+            </a:endParaRPr>
           </a:p>
         </p:txBody>
       </p:sp>
@@ -15145,7 +16289,7 @@
           <a:noFill/>
         </p:spPr>
         <p:txBody>
-          <a:bodyPr wrap="square" lIns="0" rIns="0" tIns="0" bIns="0">
+          <a:bodyPr wrap="square" lIns="0" tIns="0" rIns="0" bIns="0">
             <a:spAutoFit/>
           </a:bodyPr>
           <a:lstStyle/>
@@ -15160,10 +16304,16 @@
                 <a:solidFill>
                   <a:srgbClr val="55544F"/>
                 </a:solidFill>
-                <a:latin typeface="Segoe UI"/>
+                <a:latin typeface="Segoe UI" panose="020B0502040204020203"/>
               </a:rPr>
               <a:t>Déclencheur : 25 km ou plus jusqu'à une agence. Quand l'éloignement domine, un guichet au chef-lieu ne règle rien.</a:t>
             </a:r>
+            <a:endParaRPr sz="950" b="0">
+              <a:solidFill>
+                <a:srgbClr val="55544F"/>
+              </a:solidFill>
+              <a:latin typeface="Segoe UI" panose="020B0502040204020203"/>
+            </a:endParaRPr>
           </a:p>
         </p:txBody>
       </p:sp>
@@ -15228,7 +16378,7 @@
           <a:noFill/>
         </p:spPr>
         <p:txBody>
-          <a:bodyPr wrap="square" lIns="0" rIns="0" tIns="0" bIns="0">
+          <a:bodyPr wrap="square" lIns="0" tIns="0" rIns="0" bIns="0">
             <a:spAutoFit/>
           </a:bodyPr>
           <a:lstStyle/>
@@ -15243,10 +16393,16 @@
                 <a:solidFill>
                   <a:srgbClr val="12120F"/>
                 </a:solidFill>
-                <a:latin typeface="Segoe UI"/>
+                <a:latin typeface="Segoe UI" panose="020B0502040204020203"/>
               </a:rPr>
               <a:t>Ouvrir la concurrence entre opérateurs</a:t>
             </a:r>
+            <a:endParaRPr sz="1100" b="1">
+              <a:solidFill>
+                <a:srgbClr val="12120F"/>
+              </a:solidFill>
+              <a:latin typeface="Segoe UI" panose="020B0502040204020203"/>
+            </a:endParaRPr>
           </a:p>
         </p:txBody>
       </p:sp>
@@ -15267,7 +16423,7 @@
           <a:noFill/>
         </p:spPr>
         <p:txBody>
-          <a:bodyPr wrap="square" lIns="0" rIns="0" tIns="0" bIns="0">
+          <a:bodyPr wrap="square" lIns="0" tIns="0" rIns="0" bIns="0">
             <a:spAutoFit/>
           </a:bodyPr>
           <a:lstStyle/>
@@ -15282,10 +16438,16 @@
                 <a:solidFill>
                   <a:srgbClr val="55544F"/>
                 </a:solidFill>
-                <a:latin typeface="Segoe UI"/>
+                <a:latin typeface="Segoe UI" panose="020B0502040204020203"/>
               </a:rPr>
               <a:t>Déclencheur : un seul opérateur présent. 4 773 points ne servent que Togocom contre 1 018 pour Moov seul.</a:t>
             </a:r>
+            <a:endParaRPr sz="950" b="0">
+              <a:solidFill>
+                <a:srgbClr val="55544F"/>
+              </a:solidFill>
+              <a:latin typeface="Segoe UI" panose="020B0502040204020203"/>
+            </a:endParaRPr>
           </a:p>
         </p:txBody>
       </p:sp>
@@ -15396,7 +16558,7 @@
           <a:noFill/>
         </p:spPr>
         <p:txBody>
-          <a:bodyPr wrap="square" lIns="0" rIns="0" tIns="0" bIns="0">
+          <a:bodyPr wrap="square" lIns="0" tIns="0" rIns="0" bIns="0">
             <a:spAutoFit/>
           </a:bodyPr>
           <a:lstStyle/>
@@ -15411,10 +16573,16 @@
                 <a:solidFill>
                   <a:srgbClr val="55544F"/>
                 </a:solidFill>
-                <a:latin typeface="Segoe UI"/>
+                <a:latin typeface="Segoe UI" panose="020B0502040204020203"/>
               </a:rPr>
               <a:t>Les 9 territoires prioritaires représentent 1 080 723 habitants, soit 13% de la population nationale.</a:t>
             </a:r>
+            <a:endParaRPr sz="1000" b="0">
+              <a:solidFill>
+                <a:srgbClr val="55544F"/>
+              </a:solidFill>
+              <a:latin typeface="Segoe UI" panose="020B0502040204020203"/>
+            </a:endParaRPr>
           </a:p>
           <a:p>
             <a:pPr algn="l">
@@ -15427,10 +16595,16 @@
                 <a:solidFill>
                   <a:srgbClr val="55544F"/>
                 </a:solidFill>
-                <a:latin typeface="Segoe UI"/>
+                <a:latin typeface="Segoe UI" panose="020B0502040204020203"/>
               </a:rPr>
               <a:t>Un même territoire peut relever de plusieurs leviers : les populations ne s'additionnent pas d'un levier à l'autre.</a:t>
             </a:r>
+            <a:endParaRPr sz="1000" b="0">
+              <a:solidFill>
+                <a:srgbClr val="55544F"/>
+              </a:solidFill>
+              <a:latin typeface="Segoe UI" panose="020B0502040204020203"/>
+            </a:endParaRPr>
           </a:p>
         </p:txBody>
       </p:sp>
@@ -15443,7 +16617,7 @@
 </file>
 
 <file path=ppt/slides/slide9.xml><?xml version="1.0" encoding="utf-8"?>
-<p:sld xmlns:a="http://schemas.openxmlformats.org/drawingml/2006/main" xmlns:p="http://schemas.openxmlformats.org/presentationml/2006/main" xmlns:r="http://schemas.openxmlformats.org/officeDocument/2006/relationships">
+<p:sld xmlns:a="http://schemas.openxmlformats.org/drawingml/2006/main" xmlns:r="http://schemas.openxmlformats.org/officeDocument/2006/relationships" xmlns:p="http://schemas.openxmlformats.org/presentationml/2006/main">
   <p:cSld>
     <p:spTree>
       <p:nvGrpSpPr>
@@ -15645,7 +16819,7 @@
           <a:noFill/>
         </p:spPr>
         <p:txBody>
-          <a:bodyPr wrap="square" lIns="0" rIns="0" tIns="0" bIns="0">
+          <a:bodyPr wrap="square" lIns="0" tIns="0" rIns="0" bIns="0">
             <a:spAutoFit/>
           </a:bodyPr>
           <a:lstStyle/>
@@ -15660,10 +16834,16 @@
                 <a:solidFill>
                   <a:srgbClr val="8B8A84"/>
                 </a:solidFill>
-                <a:latin typeface="Consolas"/>
+                <a:latin typeface="Consolas" panose="020B0609020204030204"/>
               </a:rPr>
               <a:t>PRÉCAUTIONS</a:t>
             </a:r>
+            <a:endParaRPr sz="900" b="1">
+              <a:solidFill>
+                <a:srgbClr val="8B8A84"/>
+              </a:solidFill>
+              <a:latin typeface="Consolas" panose="020B0609020204030204"/>
+            </a:endParaRPr>
           </a:p>
         </p:txBody>
       </p:sp>
@@ -15684,7 +16864,7 @@
           <a:noFill/>
         </p:spPr>
         <p:txBody>
-          <a:bodyPr wrap="square" lIns="0" rIns="0" tIns="0" bIns="0">
+          <a:bodyPr wrap="square" lIns="0" tIns="0" rIns="0" bIns="0">
             <a:spAutoFit/>
           </a:bodyPr>
           <a:lstStyle/>
@@ -15699,10 +16879,16 @@
                 <a:solidFill>
                   <a:srgbClr val="12120F"/>
                 </a:solidFill>
-                <a:latin typeface="Segoe UI"/>
+                <a:latin typeface="Segoe UI" panose="020B0502040204020203"/>
               </a:rPr>
               <a:t>Limites et précautions d'interprétation</a:t>
             </a:r>
+            <a:endParaRPr sz="2800" b="1">
+              <a:solidFill>
+                <a:srgbClr val="12120F"/>
+              </a:solidFill>
+              <a:latin typeface="Segoe UI" panose="020B0502040204020203"/>
+            </a:endParaRPr>
           </a:p>
         </p:txBody>
       </p:sp>
@@ -15811,7 +16997,7 @@
           <a:noFill/>
         </p:spPr>
         <p:txBody>
-          <a:bodyPr wrap="square" lIns="0" rIns="0" tIns="0" bIns="0">
+          <a:bodyPr wrap="square" lIns="0" tIns="0" rIns="0" bIns="0">
             <a:spAutoFit/>
           </a:bodyPr>
           <a:lstStyle/>
@@ -15826,10 +17012,16 @@
                 <a:solidFill>
                   <a:srgbClr val="0F4D3B"/>
                 </a:solidFill>
-                <a:latin typeface="Segoe UI"/>
+                <a:latin typeface="Segoe UI" panose="020B0502040204020203"/>
               </a:rPr>
               <a:t>Ce diagnostic mesure un déficit d'accès aux services — pas une absence de réseau mobile. La distinction est décisive.</a:t>
             </a:r>
+            <a:endParaRPr sz="1350" b="1">
+              <a:solidFill>
+                <a:srgbClr val="0F4D3B"/>
+              </a:solidFill>
+              <a:latin typeface="Segoe UI" panose="020B0502040204020203"/>
+            </a:endParaRPr>
           </a:p>
         </p:txBody>
       </p:sp>
@@ -15894,7 +17086,7 @@
           <a:noFill/>
         </p:spPr>
         <p:txBody>
-          <a:bodyPr wrap="square" lIns="0" rIns="0" tIns="0" bIns="0">
+          <a:bodyPr wrap="square" lIns="0" tIns="0" rIns="0" bIns="0">
             <a:spAutoFit/>
           </a:bodyPr>
           <a:lstStyle/>
@@ -15909,10 +17101,16 @@
                 <a:solidFill>
                   <a:srgbClr val="8B8A84"/>
                 </a:solidFill>
-                <a:latin typeface="Consolas"/>
+                <a:latin typeface="Consolas" panose="020B0609020204030204"/>
               </a:rPr>
               <a:t>République togolaise · Défi Économie numérique · Données ouvertes PRISE 2021-2022, RGPH-5 2022, COD-AB 2021</a:t>
             </a:r>
+            <a:endParaRPr sz="800" b="0">
+              <a:solidFill>
+                <a:srgbClr val="8B8A84"/>
+              </a:solidFill>
+              <a:latin typeface="Consolas" panose="020B0609020204030204"/>
+            </a:endParaRPr>
           </a:p>
         </p:txBody>
       </p:sp>
@@ -15933,7 +17131,7 @@
           <a:noFill/>
         </p:spPr>
         <p:txBody>
-          <a:bodyPr wrap="square" lIns="0" rIns="0" tIns="0" bIns="0">
+          <a:bodyPr wrap="square" lIns="0" tIns="0" rIns="0" bIns="0">
             <a:spAutoFit/>
           </a:bodyPr>
           <a:lstStyle/>
@@ -15948,10 +17146,16 @@
                 <a:solidFill>
                   <a:srgbClr val="8B8A84"/>
                 </a:solidFill>
-                <a:latin typeface="Consolas"/>
+                <a:latin typeface="Consolas" panose="020B0609020204030204"/>
               </a:rPr>
               <a:t>08 / 9</a:t>
             </a:r>
+            <a:endParaRPr sz="800" b="1">
+              <a:solidFill>
+                <a:srgbClr val="8B8A84"/>
+              </a:solidFill>
+              <a:latin typeface="Consolas" panose="020B0609020204030204"/>
+            </a:endParaRPr>
           </a:p>
         </p:txBody>
       </p:sp>
@@ -16016,7 +17220,7 @@
           <a:noFill/>
         </p:spPr>
         <p:txBody>
-          <a:bodyPr wrap="square" lIns="0" rIns="0" tIns="0" bIns="0">
+          <a:bodyPr wrap="square" lIns="0" tIns="0" rIns="0" bIns="0">
             <a:spAutoFit/>
           </a:bodyPr>
           <a:lstStyle/>
@@ -16031,10 +17235,16 @@
                 <a:solidFill>
                   <a:srgbClr val="12120F"/>
                 </a:solidFill>
-                <a:latin typeface="Segoe UI"/>
+                <a:latin typeface="Segoe UI" panose="020B0502040204020203"/>
               </a:rPr>
               <a:t>La couverture réseau n'est pas mesurée</a:t>
             </a:r>
+            <a:endParaRPr sz="1100" b="1">
+              <a:solidFill>
+                <a:srgbClr val="12120F"/>
+              </a:solidFill>
+              <a:latin typeface="Segoe UI" panose="020B0502040204020203"/>
+            </a:endParaRPr>
           </a:p>
         </p:txBody>
       </p:sp>
@@ -16055,7 +17265,7 @@
           <a:noFill/>
         </p:spPr>
         <p:txBody>
-          <a:bodyPr wrap="square" lIns="0" rIns="0" tIns="0" bIns="0">
+          <a:bodyPr wrap="square" lIns="0" tIns="0" rIns="0" bIns="0">
             <a:spAutoFit/>
           </a:bodyPr>
           <a:lstStyle/>
@@ -16070,10 +17280,16 @@
                 <a:solidFill>
                   <a:srgbClr val="55544F"/>
                 </a:solidFill>
-                <a:latin typeface="Segoe UI"/>
+                <a:latin typeface="Segoe UI" panose="020B0502040204020203"/>
               </a:rPr>
               <a:t>Une zone sans agence ni agent Mobile Money n'est pas nécessairement une zone sans réseau mobile. C'est la limite la plus importante de ce travail.</a:t>
             </a:r>
+            <a:endParaRPr sz="950" b="0">
+              <a:solidFill>
+                <a:srgbClr val="55544F"/>
+              </a:solidFill>
+              <a:latin typeface="Segoe UI" panose="020B0502040204020203"/>
+            </a:endParaRPr>
           </a:p>
         </p:txBody>
       </p:sp>
@@ -16138,7 +17354,7 @@
           <a:noFill/>
         </p:spPr>
         <p:txBody>
-          <a:bodyPr wrap="square" lIns="0" rIns="0" tIns="0" bIns="0">
+          <a:bodyPr wrap="square" lIns="0" tIns="0" rIns="0" bIns="0">
             <a:spAutoFit/>
           </a:bodyPr>
           <a:lstStyle/>
@@ -16153,10 +17369,16 @@
                 <a:solidFill>
                   <a:srgbClr val="12120F"/>
                 </a:solidFill>
-                <a:latin typeface="Segoe UI"/>
+                <a:latin typeface="Segoe UI" panose="020B0502040204020203"/>
               </a:rPr>
               <a:t>Les agences CANAL+ sont absentes</a:t>
             </a:r>
+            <a:endParaRPr sz="1100" b="1">
+              <a:solidFill>
+                <a:srgbClr val="12120F"/>
+              </a:solidFill>
+              <a:latin typeface="Segoe UI" panose="020B0502040204020203"/>
+            </a:endParaRPr>
           </a:p>
         </p:txBody>
       </p:sp>
@@ -16177,7 +17399,7 @@
           <a:noFill/>
         </p:spPr>
         <p:txBody>
-          <a:bodyPr wrap="square" lIns="0" rIns="0" tIns="0" bIns="0">
+          <a:bodyPr wrap="square" lIns="0" tIns="0" rIns="0" bIns="0">
             <a:spAutoFit/>
           </a:bodyPr>
           <a:lstStyle/>
@@ -16192,10 +17414,16 @@
                 <a:solidFill>
                   <a:srgbClr val="55544F"/>
                 </a:solidFill>
-                <a:latin typeface="Segoe UI"/>
+                <a:latin typeface="Segoe UI" panose="020B0502040204020203"/>
               </a:rPr>
               <a:t>Fichier source vide. Le déficit d'agences ne porte que sur Moov et Togocom.</a:t>
             </a:r>
+            <a:endParaRPr sz="950" b="0">
+              <a:solidFill>
+                <a:srgbClr val="55544F"/>
+              </a:solidFill>
+              <a:latin typeface="Segoe UI" panose="020B0502040204020203"/>
+            </a:endParaRPr>
           </a:p>
         </p:txBody>
       </p:sp>
@@ -16260,7 +17488,7 @@
           <a:noFill/>
         </p:spPr>
         <p:txBody>
-          <a:bodyPr wrap="square" lIns="0" rIns="0" tIns="0" bIns="0">
+          <a:bodyPr wrap="square" lIns="0" tIns="0" rIns="0" bIns="0">
             <a:spAutoFit/>
           </a:bodyPr>
           <a:lstStyle/>
@@ -16275,10 +17503,16 @@
                 <a:solidFill>
                   <a:srgbClr val="12120F"/>
                 </a:solidFill>
-                <a:latin typeface="Segoe UI"/>
+                <a:latin typeface="Segoe UI" panose="020B0502040204020203"/>
               </a:rPr>
               <a:t>Le diagnostic décrit 2021-2022</a:t>
             </a:r>
+            <a:endParaRPr sz="1100" b="1">
+              <a:solidFill>
+                <a:srgbClr val="12120F"/>
+              </a:solidFill>
+              <a:latin typeface="Segoe UI" panose="020B0502040204020203"/>
+            </a:endParaRPr>
           </a:p>
         </p:txBody>
       </p:sp>
@@ -16299,7 +17533,7 @@
           <a:noFill/>
         </p:spPr>
         <p:txBody>
-          <a:bodyPr wrap="square" lIns="0" rIns="0" tIns="0" bIns="0">
+          <a:bodyPr wrap="square" lIns="0" tIns="0" rIns="0" bIns="0">
             <a:spAutoFit/>
           </a:bodyPr>
           <a:lstStyle/>
@@ -16314,10 +17548,16 @@
                 <a:solidFill>
                   <a:srgbClr val="55544F"/>
                 </a:solidFill>
-                <a:latin typeface="Segoe UI"/>
+                <a:latin typeface="Segoe UI" panose="020B0502040204020203"/>
               </a:rPr>
               <a:t>Tout déploiement postérieur est invisible. La hiérarchie des besoins reste valable tant que les écarts ne sont pas comblés.</a:t>
             </a:r>
+            <a:endParaRPr sz="950" b="0">
+              <a:solidFill>
+                <a:srgbClr val="55544F"/>
+              </a:solidFill>
+              <a:latin typeface="Segoe UI" panose="020B0502040204020203"/>
+            </a:endParaRPr>
           </a:p>
         </p:txBody>
       </p:sp>
@@ -16382,7 +17622,7 @@
           <a:noFill/>
         </p:spPr>
         <p:txBody>
-          <a:bodyPr wrap="square" lIns="0" rIns="0" tIns="0" bIns="0">
+          <a:bodyPr wrap="square" lIns="0" tIns="0" rIns="0" bIns="0">
             <a:spAutoFit/>
           </a:bodyPr>
           <a:lstStyle/>
@@ -16397,10 +17637,16 @@
                 <a:solidFill>
                   <a:srgbClr val="12120F"/>
                 </a:solidFill>
-                <a:latin typeface="Segoe UI"/>
+                <a:latin typeface="Segoe UI" panose="020B0502040204020203"/>
               </a:rPr>
               <a:t>Les scores communaux et préfectoraux ne sont pas comparables</a:t>
             </a:r>
+            <a:endParaRPr sz="1100" b="1">
+              <a:solidFill>
+                <a:srgbClr val="12120F"/>
+              </a:solidFill>
+              <a:latin typeface="Segoe UI" panose="020B0502040204020203"/>
+            </a:endParaRPr>
           </a:p>
         </p:txBody>
       </p:sp>
@@ -16421,7 +17667,7 @@
           <a:noFill/>
         </p:spPr>
         <p:txBody>
-          <a:bodyPr wrap="square" lIns="0" rIns="0" tIns="0" bIns="0">
+          <a:bodyPr wrap="square" lIns="0" tIns="0" rIns="0" bIns="0">
             <a:spAutoFit/>
           </a:bodyPr>
           <a:lstStyle/>
@@ -16436,10 +17682,16 @@
                 <a:solidFill>
                   <a:srgbClr val="55544F"/>
                 </a:solidFill>
-                <a:latin typeface="Segoe UI"/>
+                <a:latin typeface="Segoe UI" panose="020B0502040204020203"/>
               </a:rPr>
               <a:t>La composante d'éloignement ne repose pas sur la même mesure aux deux niveaux. Les rangs se lisent à l'intérieur de chaque niveau.</a:t>
             </a:r>
+            <a:endParaRPr sz="950" b="0">
+              <a:solidFill>
+                <a:srgbClr val="55544F"/>
+              </a:solidFill>
+              <a:latin typeface="Segoe UI" panose="020B0502040204020203"/>
+            </a:endParaRPr>
           </a:p>
         </p:txBody>
       </p:sp>
@@ -16504,7 +17756,7 @@
           <a:noFill/>
         </p:spPr>
         <p:txBody>
-          <a:bodyPr wrap="square" lIns="0" rIns="0" tIns="0" bIns="0">
+          <a:bodyPr wrap="square" lIns="0" tIns="0" rIns="0" bIns="0">
             <a:spAutoFit/>
           </a:bodyPr>
           <a:lstStyle/>
@@ -16519,10 +17771,16 @@
                 <a:solidFill>
                   <a:srgbClr val="12120F"/>
                 </a:solidFill>
-                <a:latin typeface="Segoe UI"/>
+                <a:latin typeface="Segoe UI" panose="020B0502040204020203"/>
               </a:rPr>
               <a:t>Un score élevé signale un besoin, pas une solution</a:t>
             </a:r>
+            <a:endParaRPr sz="1100" b="1">
+              <a:solidFill>
+                <a:srgbClr val="12120F"/>
+              </a:solidFill>
+              <a:latin typeface="Segoe UI" panose="020B0502040204020203"/>
+            </a:endParaRPr>
           </a:p>
         </p:txBody>
       </p:sp>
@@ -16543,7 +17801,7 @@
           <a:noFill/>
         </p:spPr>
         <p:txBody>
-          <a:bodyPr wrap="square" lIns="0" rIns="0" tIns="0" bIns="0">
+          <a:bodyPr wrap="square" lIns="0" tIns="0" rIns="0" bIns="0">
             <a:spAutoFit/>
           </a:bodyPr>
           <a:lstStyle/>
@@ -16558,10 +17816,16 @@
                 <a:solidFill>
                   <a:srgbClr val="55544F"/>
                 </a:solidFill>
-                <a:latin typeface="Segoe UI"/>
+                <a:latin typeface="Segoe UI" panose="020B0502040204020203"/>
               </a:rPr>
               <a:t>L'indice ne dit rien du coût, de la faisabilité ni de la rentabilité d'une intervention. Il hiérarchise des besoins mesurés — préalable à un arbitrage, jamais son substitut.</a:t>
             </a:r>
+            <a:endParaRPr sz="950" b="0">
+              <a:solidFill>
+                <a:srgbClr val="55544F"/>
+              </a:solidFill>
+              <a:latin typeface="Segoe UI" panose="020B0502040204020203"/>
+            </a:endParaRPr>
           </a:p>
         </p:txBody>
       </p:sp>
@@ -16626,7 +17890,7 @@
           <a:noFill/>
         </p:spPr>
         <p:txBody>
-          <a:bodyPr wrap="square" lIns="0" rIns="0" tIns="0" bIns="0">
+          <a:bodyPr wrap="square" lIns="0" tIns="0" rIns="0" bIns="0">
             <a:spAutoFit/>
           </a:bodyPr>
           <a:lstStyle/>
@@ -16641,10 +17905,16 @@
                 <a:solidFill>
                   <a:srgbClr val="12120F"/>
                 </a:solidFill>
-                <a:latin typeface="Segoe UI"/>
+                <a:latin typeface="Segoe UI" panose="020B0502040204020203"/>
               </a:rPr>
               <a:t>La structure par âge n'est pas prise en compte</a:t>
             </a:r>
+            <a:endParaRPr sz="1100" b="1">
+              <a:solidFill>
+                <a:srgbClr val="12120F"/>
+              </a:solidFill>
+              <a:latin typeface="Segoe UI" panose="020B0502040204020203"/>
+            </a:endParaRPr>
           </a:p>
         </p:txBody>
       </p:sp>
@@ -16665,7 +17935,7 @@
           <a:noFill/>
         </p:spPr>
         <p:txBody>
-          <a:bodyPr wrap="square" lIns="0" rIns="0" tIns="0" bIns="0">
+          <a:bodyPr wrap="square" lIns="0" tIns="0" rIns="0" bIns="0">
             <a:spAutoFit/>
           </a:bodyPr>
           <a:lstStyle/>
@@ -16680,10 +17950,16 @@
                 <a:solidFill>
                   <a:srgbClr val="55544F"/>
                 </a:solidFill>
-                <a:latin typeface="Segoe UI"/>
+                <a:latin typeface="Segoe UI" panose="020B0502040204020203"/>
               </a:rPr>
               <a:t>Un dénominateur « 15 ans et plus » serait plus juste. Les tableaux d'âges n'ont pas pu être extraits avec une garantie arithmétique suffisante : ils ont été écartés plutôt que repris sans contrôle.</a:t>
             </a:r>
+            <a:endParaRPr sz="950" b="0">
+              <a:solidFill>
+                <a:srgbClr val="55544F"/>
+              </a:solidFill>
+              <a:latin typeface="Segoe UI" panose="020B0502040204020203"/>
+            </a:endParaRPr>
           </a:p>
         </p:txBody>
       </p:sp>
@@ -17011,6 +18287,10 @@
       </a:style>
     </a:lnDef>
   </a:objectDefaults>
-  <a:extraClrSchemeLst/>
+  <a:extLst>
+    <a:ext uri="{05A4C25C-085E-4340-85A3-A5531E510DB2}">
+      <thm15:themeFamily xmlns:thm15="http://schemas.microsoft.com/office/thememl/2012/main" name="Office Theme" id="{62F939B6-93AF-4DB8-9C6B-D6C7DFDC589F}" vid="{4A3C46E8-61CC-4603-A589-7422A47A8E4A}"/>
+    </a:ext>
+  </a:extLst>
 </a:theme>
 </file>
--- a/reports/Defi1_Togo_Connectivite_numerique.pptx
+++ b/reports/Defi1_Togo_Connectivite_numerique.pptx
@@ -3778,7 +3778,7 @@
                 </a:solidFill>
                 <a:latin typeface="Segoe UI"/>
               </a:rPr>
-              <a:t>PRÉFECTURES SANS AUCUNE AGENCE</a:t>
+              <a:t>PRÉFECTURES SANS AGENCE ACTIVE</a:t>
             </a:r>
           </a:p>
         </p:txBody>
@@ -4017,7 +4017,7 @@
                 </a:solidFill>
                 <a:latin typeface="Segoe UI"/>
               </a:rPr>
-              <a:t>Géoportail national (PRISE 2021-2022) · RGPH-5, INSEED (novembre 2022) · limites COD-AB v02, OCHA (2021) — 25 contrôles arithmétiques publiés</a:t>
+              <a:t>Géoportail national (PRISE 2021-2022) · RGPH-5, INSEED (novembre 2022) · limites COD-AB v02, OCHA (2021) — 35 contrôles arithmétiques publiés</a:t>
             </a:r>
           </a:p>
         </p:txBody>
@@ -4562,7 +4562,7 @@
                 </a:solidFill>
                 <a:latin typeface="Consolas"/>
               </a:rPr>
-              <a:t>09 / 9</a:t>
+              <a:t>10 / 10</a:t>
             </a:r>
           </a:p>
         </p:txBody>
@@ -4769,7 +4769,7 @@
                 </a:solidFill>
                 <a:latin typeface="Segoe UI"/>
               </a:rPr>
-              <a:t>90 agences d'opérateur (28 Moov, 62 Togocom) et 3 centres de données, tous à Lomé. « Télécom » est un doublon intégral ; CANAL+ est vide à la source.</a:t>
+              <a:t>90 agences recensées après dédoublonnage (28 Moov, 62 Togocom), dont 88 actives, et 3 centres de données, tous à Lomé. « Télécom » est un doublon ; CANAL+ est vide à la source.</a:t>
             </a:r>
           </a:p>
         </p:txBody>
@@ -6572,7 +6572,7 @@
                 </a:solidFill>
                 <a:latin typeface="Consolas"/>
               </a:rPr>
-              <a:t>01 / 9</a:t>
+              <a:t>02 / 10</a:t>
             </a:r>
           </a:p>
         </p:txBody>
@@ -7520,7 +7520,7 @@
                 </a:solidFill>
                 <a:latin typeface="Consolas"/>
               </a:rPr>
-              <a:t>PRÉFECTURES SANS AUCUNE AGENCE</a:t>
+              <a:t>PRÉFECTURES SANS AGENCE ACTIVE</a:t>
             </a:r>
           </a:p>
         </p:txBody>
@@ -8204,7 +8204,7 @@
                 </a:solidFill>
                 <a:latin typeface="Segoe UI"/>
               </a:rPr>
-              <a:t>Trois sources publiques, trois producteurs — et deux constats qui corrigent l'énoncé du défi : 2 opérateurs et non 4, 90 agences et non 141.</a:t>
+              <a:t>Trois sources publiques, deux corrections de l'énoncé : 2 opérateurs et non 4, 90 agences recensées et non 141.</a:t>
             </a:r>
           </a:p>
         </p:txBody>
@@ -8326,7 +8326,7 @@
                 </a:solidFill>
                 <a:latin typeface="Consolas"/>
               </a:rPr>
-              <a:t>02 / 9</a:t>
+              <a:t>03 / 10</a:t>
             </a:r>
           </a:p>
         </p:txBody>
@@ -8979,7 +8979,7 @@
         <p:spPr>
           <a:xfrm>
             <a:off x="740664" y="4297680"/>
-            <a:ext cx="5449824" cy="477774"/>
+            <a:ext cx="5449824" cy="637032"/>
           </a:xfrm>
           <a:prstGeom prst="rect">
             <a:avLst/>
@@ -9004,7 +9004,7 @@
                 </a:solidFill>
                 <a:latin typeface="Segoe UI"/>
               </a:rPr>
-              <a:t>Ses 51 lignes sont déjà contenues dans les fichiers Moov et Togocom réunis, sans un seul enregistrement propre. Empiler les quatre fichiers afficherait 141 agences au lieu de 90 — 57 % de surestimation dès le premier indicateur.</a:t>
+              <a:t>Ses 51 lignes sont déjà contenues dans les fichiers Moov et Togocom réunis, sans un seul enregistrement propre. Empiler les fichiers afficherait 141 agences au lieu de 90 recensées après dédoublonnage (28 Moov, 62 Togocom), dont 88 actives : 2 agences Togocom déclarées fermées sont exclues des calculs.</a:t>
             </a:r>
           </a:p>
         </p:txBody>
@@ -9017,7 +9017,7 @@
         </p:nvSpPr>
         <p:spPr>
           <a:xfrm>
-            <a:off x="566928" y="4958334"/>
+            <a:off x="566928" y="5117592"/>
             <a:ext cx="68580" cy="68580"/>
           </a:xfrm>
           <a:prstGeom prst="rect">
@@ -9061,7 +9061,7 @@
         </p:nvSpPr>
         <p:spPr>
           <a:xfrm>
-            <a:off x="740664" y="4908042"/>
+            <a:off x="740664" y="5067300"/>
             <a:ext cx="5449824" cy="219456"/>
           </a:xfrm>
           <a:prstGeom prst="rect">
@@ -9100,7 +9100,7 @@
         </p:nvSpPr>
         <p:spPr>
           <a:xfrm>
-            <a:off x="740664" y="5136642"/>
+            <a:off x="740664" y="5295900"/>
             <a:ext cx="5449824" cy="318516"/>
           </a:xfrm>
           <a:prstGeom prst="rect">
@@ -9139,7 +9139,7 @@
         </p:nvSpPr>
         <p:spPr>
           <a:xfrm>
-            <a:off x="566928" y="5638038"/>
+            <a:off x="566928" y="5797296"/>
             <a:ext cx="68580" cy="68580"/>
           </a:xfrm>
           <a:prstGeom prst="rect">
@@ -9183,7 +9183,7 @@
         </p:nvSpPr>
         <p:spPr>
           <a:xfrm>
-            <a:off x="740664" y="5587746"/>
+            <a:off x="740664" y="5747004"/>
             <a:ext cx="5449824" cy="219456"/>
           </a:xfrm>
           <a:prstGeom prst="rect">
@@ -9222,7 +9222,7 @@
         </p:nvSpPr>
         <p:spPr>
           <a:xfrm>
-            <a:off x="740664" y="5816346"/>
+            <a:off x="740664" y="5975604"/>
             <a:ext cx="5449824" cy="477774"/>
           </a:xfrm>
           <a:prstGeom prst="rect">
@@ -9377,7 +9377,7 @@
                 </a:solidFill>
                 <a:latin typeface="Consolas"/>
               </a:rPr>
-              <a:t>25 CONTRÔLES ARITHMÉTIQUES, REJOUÉS À CHAQUE EXÉCUTION</a:t>
+              <a:t>35 CONTRÔLES ARITHMÉTIQUES, REJOUÉS À CHAQUE EXÉCUTION</a:t>
             </a:r>
           </a:p>
         </p:txBody>
@@ -9969,7 +9969,7 @@
                 </a:solidFill>
                 <a:latin typeface="Consolas"/>
               </a:rPr>
-              <a:t>03 / 9</a:t>
+              <a:t>04 / 10</a:t>
             </a:r>
           </a:p>
         </p:txBody>
@@ -10516,7 +10516,7 @@
                           </a:solidFill>
                           <a:latin typeface="Segoe UI"/>
                         </a:rPr>
-                        <a:t>agences / 100 000 hab.</a:t>
+                        <a:t>agences actives / 100 000 hab.</a:t>
                       </a:r>
                     </a:p>
                   </a:txBody>
@@ -10584,7 +10584,7 @@
                           </a:solidFill>
                           <a:latin typeface="Segoe UI"/>
                         </a:rPr>
-                        <a:t>distance médiane à une agence</a:t>
+                        <a:t>distance à l'agence active</a:t>
                       </a:r>
                     </a:p>
                   </a:txBody>
@@ -11193,7 +11193,7 @@
                 </a:solidFill>
                 <a:latin typeface="Segoe UI"/>
               </a:rPr>
-              <a:t>409 habitants par point de service en moyenne — mais un rapport de 1 à 12,7 entre la préfecture la mieux et la moins bien desservie.</a:t>
+              <a:t>409 habitants par point de service en moyenne, mais un rapport de 1 à 12,7 entre préfectures.</a:t>
             </a:r>
           </a:p>
         </p:txBody>
@@ -11315,7 +11315,7 @@
                 </a:solidFill>
                 <a:latin typeface="Consolas"/>
               </a:rPr>
-              <a:t>04 / 9</a:t>
+              <a:t>05 / 10</a:t>
             </a:r>
           </a:p>
         </p:txBody>
@@ -12089,7 +12089,7 @@
                 </a:solidFill>
                 <a:latin typeface="Consolas"/>
               </a:rPr>
-              <a:t>COMMUNES SANS AUCUNE AGENCE</a:t>
+              <a:t>COMMUNES SANS AGENCE ACTIVE</a:t>
             </a:r>
           </a:p>
         </p:txBody>
@@ -12727,7 +12727,7 @@
                 </a:solidFill>
                 <a:latin typeface="Consolas"/>
               </a:rPr>
-              <a:t>05 / 9</a:t>
+              <a:t>06 / 10</a:t>
             </a:r>
           </a:p>
         </p:txBody>
@@ -13374,7 +13374,7 @@
                 </a:solidFill>
                 <a:latin typeface="Consolas"/>
               </a:rPr>
-              <a:t>06 / 9</a:t>
+              <a:t>07 / 10</a:t>
             </a:r>
           </a:p>
         </p:txBody>
@@ -13554,7 +13554,7 @@
                           </a:solidFill>
                           <a:latin typeface="Segoe UI"/>
                         </a:rPr>
-                        <a:t>Ag.</a:t>
+                        <a:t>Ag. act.</a:t>
                       </a:r>
                     </a:p>
                   </a:txBody>
@@ -14982,7 +14982,7 @@
                 </a:solidFill>
                 <a:latin typeface="Consolas"/>
               </a:rPr>
-              <a:t>07 / 9</a:t>
+              <a:t>08 / 10</a:t>
             </a:r>
           </a:p>
         </p:txBody>
@@ -15372,7 +15372,7 @@
                 </a:solidFill>
                 <a:latin typeface="Segoe UI"/>
               </a:rPr>
-              <a:t>Déclencheur : 25 km ou plus jusqu'à une agence. Quand l'éloignement domine, un guichet au chef-lieu ne règle rien.</a:t>
+              <a:t>Déclencheur : 25 km ou plus jusqu'à une agence active. Quand l'éloignement domine, un guichet au chef-lieu ne règle rien.</a:t>
             </a:r>
           </a:p>
         </p:txBody>
@@ -16160,7 +16160,7 @@
                 </a:solidFill>
                 <a:latin typeface="Consolas"/>
               </a:rPr>
-              <a:t>08 / 9</a:t>
+              <a:t>09 / 10</a:t>
             </a:r>
           </a:p>
         </p:txBody>
@@ -16379,7 +16379,7 @@
         <p:spPr>
           <a:xfrm>
             <a:off x="740664" y="3033522"/>
-            <a:ext cx="5404104" cy="159258"/>
+            <a:ext cx="5404104" cy="318516"/>
           </a:xfrm>
           <a:prstGeom prst="rect">
             <a:avLst/>
@@ -16404,7 +16404,7 @@
                 </a:solidFill>
                 <a:latin typeface="Segoe UI"/>
               </a:rPr>
-              <a:t>Fichier source vide. Le déficit d'agences ne porte que sur Moov et Togocom.</a:t>
+              <a:t>Fichier source vide. Le déficit porte sur les 88 agences actives Moov et Togocom (2 fermées exclues sur 90 recensées).</a:t>
             </a:r>
           </a:p>
         </p:txBody>
@@ -16417,7 +16417,7 @@
         </p:nvSpPr>
         <p:spPr>
           <a:xfrm>
-            <a:off x="566928" y="3375660"/>
+            <a:off x="566928" y="3534918"/>
             <a:ext cx="68580" cy="68580"/>
           </a:xfrm>
           <a:prstGeom prst="rect">
@@ -16461,7 +16461,7 @@
         </p:nvSpPr>
         <p:spPr>
           <a:xfrm>
-            <a:off x="740664" y="3325368"/>
+            <a:off x="740664" y="3484626"/>
             <a:ext cx="5404104" cy="219456"/>
           </a:xfrm>
           <a:prstGeom prst="rect">
@@ -16500,7 +16500,7 @@
         </p:nvSpPr>
         <p:spPr>
           <a:xfrm>
-            <a:off x="740664" y="3553968"/>
+            <a:off x="740664" y="3713226"/>
             <a:ext cx="5404104" cy="318516"/>
           </a:xfrm>
           <a:prstGeom prst="rect">

--- a/reports/Defi1_Togo_Connectivite_numerique.pptx
+++ b/reports/Defi1_Togo_Connectivite_numerique.pptx
@@ -4769,7 +4769,7 @@
                 </a:solidFill>
                 <a:latin typeface="Segoe UI"/>
               </a:rPr>
-              <a:t>90 agences recensées après dédoublonnage (28 Moov, 62 Togocom), dont 88 actives, et 3 centres de données, tous à Lomé. « Télécom » est un doublon ; CANAL+ est vide à la source.</a:t>
+              <a:t>90 agences recensées après dédoublonnage, dont 88 actives : 28 Moov et 60 Togocom actives — et 3 centres de données, tous à Lomé. « Télécom » est un doublon ; CANAL+ est vide à la source.</a:t>
             </a:r>
           </a:p>
         </p:txBody>
@@ -12773,7 +12773,7 @@
         <p:spPr>
           <a:xfrm>
             <a:off x="6400800" y="1920240"/>
-            <a:ext cx="4779520" cy="3931920"/>
+            <a:ext cx="4842305" cy="3931920"/>
           </a:xfrm>
           <a:prstGeom prst="rect">
             <a:avLst/>
@@ -13420,7 +13420,7 @@
         <p:spPr>
           <a:xfrm>
             <a:off x="4114800" y="1874519"/>
-            <a:ext cx="4752345" cy="3703320"/>
+            <a:ext cx="3637598" cy="2834640"/>
           </a:xfrm>
           <a:prstGeom prst="rect">
             <a:avLst/>
@@ -13437,7 +13437,7 @@
         </p:nvGraphicFramePr>
         <p:xfrm>
           <a:off x="7863840" y="1874519"/>
-          <a:ext cx="3794758" cy="2048256"/>
+          <a:ext cx="3794756" cy="2048256"/>
         </p:xfrm>
         <a:graphic>
           <a:graphicData uri="http://schemas.openxmlformats.org/drawingml/2006/table">
@@ -13447,11 +13447,11 @@
               </a:tblPr>
               <a:tblGrid>
                 <a:gridCol w="303580"/>
-                <a:gridCol w="1138428"/>
-                <a:gridCol w="721004"/>
-                <a:gridCol w="645109"/>
-                <a:gridCol w="379476"/>
+                <a:gridCol w="1062532"/>
                 <a:gridCol w="607161"/>
+                <a:gridCol w="607161"/>
+                <a:gridCol w="531266"/>
+                <a:gridCol w="683056"/>
               </a:tblGrid>
               <a:tr h="292608">
                 <a:tc>
@@ -13554,7 +13554,7 @@
                           </a:solidFill>
                           <a:latin typeface="Segoe UI"/>
                         </a:rPr>
-                        <a:t>Ag. act.</a:t>
+                        <a:t>Ag.</a:t>
                       </a:r>
                     </a:p>
                   </a:txBody>
@@ -15623,7 +15623,7 @@
                 </a:solidFill>
                 <a:latin typeface="Segoe UI"/>
               </a:rPr>
-              <a:t>Les 9 territoires prioritaires représentent 1 080 723 habitants, soit 13% de la population nationale.</a:t>
+              <a:t>Les 9 territoires prioritaires représentent 1 080 723 habitants, soit 13 % de la population nationale. Les porter à 409 hab./point demanderait 1 497 points Mobile Money supplémentaires.</a:t>
             </a:r>
           </a:p>
           <a:p>

--- a/reports/Defi1_Togo_Connectivite_numerique.pptx
+++ b/reports/Defi1_Togo_Connectivite_numerique.pptx
@@ -1,22 +1,22 @@
 
 <file path=ppt/presentation.xml><?xml version="1.0" encoding="utf-8"?>
-<p:presentation xmlns:a="http://schemas.openxmlformats.org/drawingml/2006/main" xmlns:r="http://schemas.openxmlformats.org/officeDocument/2006/relationships" xmlns:p="http://schemas.openxmlformats.org/presentationml/2006/main" saveSubsetFonts="1" autoCompressPictures="0">
+<p:presentation xmlns:a="http://schemas.openxmlformats.org/drawingml/2006/main" xmlns:r="http://schemas.openxmlformats.org/officeDocument/2006/relationships" xmlns:p="http://schemas.openxmlformats.org/presentationml/2006/main" autoCompressPictures="0">
   <p:sldMasterIdLst>
     <p:sldMasterId id="2147483648" r:id="rId1"/>
   </p:sldMasterIdLst>
   <p:sldIdLst>
-    <p:sldId id="256" r:id="rId7"/>
-    <p:sldId id="257" r:id="rId8"/>
-    <p:sldId id="258" r:id="rId9"/>
-    <p:sldId id="259" r:id="rId10"/>
-    <p:sldId id="260" r:id="rId11"/>
-    <p:sldId id="261" r:id="rId12"/>
-    <p:sldId id="262" r:id="rId13"/>
-    <p:sldId id="263" r:id="rId14"/>
-    <p:sldId id="264" r:id="rId15"/>
-    <p:sldId id="265" r:id="rId16"/>
+    <p:sldId id="256" r:id="rId3"/>
+    <p:sldId id="257" r:id="rId4"/>
+    <p:sldId id="258" r:id="rId5"/>
+    <p:sldId id="259" r:id="rId6"/>
+    <p:sldId id="260" r:id="rId7"/>
+    <p:sldId id="261" r:id="rId8"/>
+    <p:sldId id="262" r:id="rId9"/>
+    <p:sldId id="263" r:id="rId10"/>
+    <p:sldId id="264" r:id="rId11"/>
+    <p:sldId id="265" r:id="rId12"/>
   </p:sldIdLst>
-  <p:sldSz cx="12191695" cy="6858000" type="screen4x3"/>
+  <p:sldSz cx="12191365" cy="6858000" type="screen4x3"/>
   <p:notesSz cx="6858000" cy="9144000"/>
   <p:defaultTextStyle>
     <a:defPPr>
@@ -113,6 +113,22 @@
       </a:defRPr>
     </a:lvl9pPr>
   </p:defaultTextStyle>
+  <p:extLst>
+    <p:ext uri="{EFAFB233-063F-42B5-8137-9DF3F51BA10A}">
+      <p15:sldGuideLst xmlns:p15="http://schemas.microsoft.com/office/powerpoint/2012/main">
+        <p15:guide id="1" orient="horz" pos="2160" userDrawn="1">
+          <p15:clr>
+            <a:srgbClr val="A4A3A4"/>
+          </p15:clr>
+        </p15:guide>
+        <p15:guide id="2" pos="2880" userDrawn="1">
+          <p15:clr>
+            <a:srgbClr val="A4A3A4"/>
+          </p15:clr>
+        </p15:guide>
+      </p15:sldGuideLst>
+    </p:ext>
+  </p:extLst>
 </p:presentation>
 </file>
 
@@ -297,7 +313,6 @@
           <a:p>
             <a:fld id="{5BCAD085-E8A6-8845-BD4E-CB4CCA059FC4}" type="datetimeFigureOut">
               <a:rPr lang="en-US" smtClean="0"/>
-              <a:t>1/27/13</a:t>
             </a:fld>
             <a:endParaRPr lang="en-US"/>
           </a:p>
@@ -339,18 +354,12 @@
           <a:p>
             <a:fld id="{C1FF6DA9-008F-8B48-92A6-B652298478BF}" type="slidenum">
               <a:rPr lang="en-US" smtClean="0"/>
-              <a:t>‹#›</a:t>
             </a:fld>
             <a:endParaRPr lang="en-US"/>
           </a:p>
         </p:txBody>
       </p:sp>
     </p:spTree>
-    <p:extLst>
-      <p:ext uri="{BB962C8B-B14F-4D97-AF65-F5344CB8AC3E}">
-        <p14:creationId xmlns:p14="http://schemas.microsoft.com/office/powerpoint/2010/main" val="3168075583"/>
-      </p:ext>
-    </p:extLst>
   </p:cSld>
   <p:clrMapOvr>
     <a:masterClrMapping/>
@@ -418,6 +427,7 @@
               <a:rPr lang="en-US" smtClean="0"/>
               <a:t>Click to edit Master text styles</a:t>
             </a:r>
+            <a:endParaRPr lang="en-US" smtClean="0"/>
           </a:p>
           <a:p>
             <a:pPr lvl="1"/>
@@ -425,6 +435,7 @@
               <a:rPr lang="en-US" smtClean="0"/>
               <a:t>Second level</a:t>
             </a:r>
+            <a:endParaRPr lang="en-US" smtClean="0"/>
           </a:p>
           <a:p>
             <a:pPr lvl="2"/>
@@ -432,6 +443,7 @@
               <a:rPr lang="en-US" smtClean="0"/>
               <a:t>Third level</a:t>
             </a:r>
+            <a:endParaRPr lang="en-US" smtClean="0"/>
           </a:p>
           <a:p>
             <a:pPr lvl="3"/>
@@ -439,6 +451,7 @@
               <a:rPr lang="en-US" smtClean="0"/>
               <a:t>Fourth level</a:t>
             </a:r>
+            <a:endParaRPr lang="en-US" smtClean="0"/>
           </a:p>
           <a:p>
             <a:pPr lvl="4"/>
@@ -467,7 +480,6 @@
           <a:p>
             <a:fld id="{5BCAD085-E8A6-8845-BD4E-CB4CCA059FC4}" type="datetimeFigureOut">
               <a:rPr lang="en-US" smtClean="0"/>
-              <a:t>1/27/13</a:t>
             </a:fld>
             <a:endParaRPr lang="en-US"/>
           </a:p>
@@ -509,18 +521,12 @@
           <a:p>
             <a:fld id="{C1FF6DA9-008F-8B48-92A6-B652298478BF}" type="slidenum">
               <a:rPr lang="en-US" smtClean="0"/>
-              <a:t>‹#›</a:t>
             </a:fld>
             <a:endParaRPr lang="en-US"/>
           </a:p>
         </p:txBody>
       </p:sp>
     </p:spTree>
-    <p:extLst>
-      <p:ext uri="{BB962C8B-B14F-4D97-AF65-F5344CB8AC3E}">
-        <p14:creationId xmlns:p14="http://schemas.microsoft.com/office/powerpoint/2010/main" val="2910927964"/>
-      </p:ext>
-    </p:extLst>
   </p:cSld>
   <p:clrMapOvr>
     <a:masterClrMapping/>
@@ -598,6 +604,7 @@
               <a:rPr lang="en-US" smtClean="0"/>
               <a:t>Click to edit Master text styles</a:t>
             </a:r>
+            <a:endParaRPr lang="en-US" smtClean="0"/>
           </a:p>
           <a:p>
             <a:pPr lvl="1"/>
@@ -605,6 +612,7 @@
               <a:rPr lang="en-US" smtClean="0"/>
               <a:t>Second level</a:t>
             </a:r>
+            <a:endParaRPr lang="en-US" smtClean="0"/>
           </a:p>
           <a:p>
             <a:pPr lvl="2"/>
@@ -612,6 +620,7 @@
               <a:rPr lang="en-US" smtClean="0"/>
               <a:t>Third level</a:t>
             </a:r>
+            <a:endParaRPr lang="en-US" smtClean="0"/>
           </a:p>
           <a:p>
             <a:pPr lvl="3"/>
@@ -619,6 +628,7 @@
               <a:rPr lang="en-US" smtClean="0"/>
               <a:t>Fourth level</a:t>
             </a:r>
+            <a:endParaRPr lang="en-US" smtClean="0"/>
           </a:p>
           <a:p>
             <a:pPr lvl="4"/>
@@ -647,7 +657,6 @@
           <a:p>
             <a:fld id="{5BCAD085-E8A6-8845-BD4E-CB4CCA059FC4}" type="datetimeFigureOut">
               <a:rPr lang="en-US" smtClean="0"/>
-              <a:t>1/27/13</a:t>
             </a:fld>
             <a:endParaRPr lang="en-US"/>
           </a:p>
@@ -689,18 +698,12 @@
           <a:p>
             <a:fld id="{C1FF6DA9-008F-8B48-92A6-B652298478BF}" type="slidenum">
               <a:rPr lang="en-US" smtClean="0"/>
-              <a:t>‹#›</a:t>
             </a:fld>
             <a:endParaRPr lang="en-US"/>
           </a:p>
         </p:txBody>
       </p:sp>
     </p:spTree>
-    <p:extLst>
-      <p:ext uri="{BB962C8B-B14F-4D97-AF65-F5344CB8AC3E}">
-        <p14:creationId xmlns:p14="http://schemas.microsoft.com/office/powerpoint/2010/main" val="3612223792"/>
-      </p:ext>
-    </p:extLst>
   </p:cSld>
   <p:clrMapOvr>
     <a:masterClrMapping/>
@@ -768,6 +771,7 @@
               <a:rPr lang="en-US" smtClean="0"/>
               <a:t>Click to edit Master text styles</a:t>
             </a:r>
+            <a:endParaRPr lang="en-US" smtClean="0"/>
           </a:p>
           <a:p>
             <a:pPr lvl="1"/>
@@ -775,6 +779,7 @@
               <a:rPr lang="en-US" smtClean="0"/>
               <a:t>Second level</a:t>
             </a:r>
+            <a:endParaRPr lang="en-US" smtClean="0"/>
           </a:p>
           <a:p>
             <a:pPr lvl="2"/>
@@ -782,6 +787,7 @@
               <a:rPr lang="en-US" smtClean="0"/>
               <a:t>Third level</a:t>
             </a:r>
+            <a:endParaRPr lang="en-US" smtClean="0"/>
           </a:p>
           <a:p>
             <a:pPr lvl="3"/>
@@ -789,6 +795,7 @@
               <a:rPr lang="en-US" smtClean="0"/>
               <a:t>Fourth level</a:t>
             </a:r>
+            <a:endParaRPr lang="en-US" smtClean="0"/>
           </a:p>
           <a:p>
             <a:pPr lvl="4"/>
@@ -817,7 +824,6 @@
           <a:p>
             <a:fld id="{5BCAD085-E8A6-8845-BD4E-CB4CCA059FC4}" type="datetimeFigureOut">
               <a:rPr lang="en-US" smtClean="0"/>
-              <a:t>1/27/13</a:t>
             </a:fld>
             <a:endParaRPr lang="en-US"/>
           </a:p>
@@ -859,18 +865,12 @@
           <a:p>
             <a:fld id="{C1FF6DA9-008F-8B48-92A6-B652298478BF}" type="slidenum">
               <a:rPr lang="en-US" smtClean="0"/>
-              <a:t>‹#›</a:t>
             </a:fld>
             <a:endParaRPr lang="en-US"/>
           </a:p>
         </p:txBody>
       </p:sp>
     </p:spTree>
-    <p:extLst>
-      <p:ext uri="{BB962C8B-B14F-4D97-AF65-F5344CB8AC3E}">
-        <p14:creationId xmlns:p14="http://schemas.microsoft.com/office/powerpoint/2010/main" val="2614314258"/>
-      </p:ext>
-    </p:extLst>
   </p:cSld>
   <p:clrMapOvr>
     <a:masterClrMapping/>
@@ -1043,6 +1043,7 @@
               <a:rPr lang="en-US" smtClean="0"/>
               <a:t>Click to edit Master text styles</a:t>
             </a:r>
+            <a:endParaRPr lang="en-US" smtClean="0"/>
           </a:p>
         </p:txBody>
       </p:sp>
@@ -1063,7 +1064,6 @@
           <a:p>
             <a:fld id="{5BCAD085-E8A6-8845-BD4E-CB4CCA059FC4}" type="datetimeFigureOut">
               <a:rPr lang="en-US" smtClean="0"/>
-              <a:t>1/27/13</a:t>
             </a:fld>
             <a:endParaRPr lang="en-US"/>
           </a:p>
@@ -1105,18 +1105,12 @@
           <a:p>
             <a:fld id="{C1FF6DA9-008F-8B48-92A6-B652298478BF}" type="slidenum">
               <a:rPr lang="en-US" smtClean="0"/>
-              <a:t>‹#›</a:t>
             </a:fld>
             <a:endParaRPr lang="en-US"/>
           </a:p>
         </p:txBody>
       </p:sp>
     </p:spTree>
-    <p:extLst>
-      <p:ext uri="{BB962C8B-B14F-4D97-AF65-F5344CB8AC3E}">
-        <p14:creationId xmlns:p14="http://schemas.microsoft.com/office/powerpoint/2010/main" val="960648375"/>
-      </p:ext>
-    </p:extLst>
   </p:cSld>
   <p:clrMapOvr>
     <a:masterClrMapping/>
@@ -1217,6 +1211,7 @@
               <a:rPr lang="en-US" smtClean="0"/>
               <a:t>Click to edit Master text styles</a:t>
             </a:r>
+            <a:endParaRPr lang="en-US" smtClean="0"/>
           </a:p>
           <a:p>
             <a:pPr lvl="1"/>
@@ -1224,6 +1219,7 @@
               <a:rPr lang="en-US" smtClean="0"/>
               <a:t>Second level</a:t>
             </a:r>
+            <a:endParaRPr lang="en-US" smtClean="0"/>
           </a:p>
           <a:p>
             <a:pPr lvl="2"/>
@@ -1231,6 +1227,7 @@
               <a:rPr lang="en-US" smtClean="0"/>
               <a:t>Third level</a:t>
             </a:r>
+            <a:endParaRPr lang="en-US" smtClean="0"/>
           </a:p>
           <a:p>
             <a:pPr lvl="3"/>
@@ -1238,6 +1235,7 @@
               <a:rPr lang="en-US" smtClean="0"/>
               <a:t>Fourth level</a:t>
             </a:r>
+            <a:endParaRPr lang="en-US" smtClean="0"/>
           </a:p>
           <a:p>
             <a:pPr lvl="4"/>
@@ -1302,6 +1300,7 @@
               <a:rPr lang="en-US" smtClean="0"/>
               <a:t>Click to edit Master text styles</a:t>
             </a:r>
+            <a:endParaRPr lang="en-US" smtClean="0"/>
           </a:p>
           <a:p>
             <a:pPr lvl="1"/>
@@ -1309,6 +1308,7 @@
               <a:rPr lang="en-US" smtClean="0"/>
               <a:t>Second level</a:t>
             </a:r>
+            <a:endParaRPr lang="en-US" smtClean="0"/>
           </a:p>
           <a:p>
             <a:pPr lvl="2"/>
@@ -1316,6 +1316,7 @@
               <a:rPr lang="en-US" smtClean="0"/>
               <a:t>Third level</a:t>
             </a:r>
+            <a:endParaRPr lang="en-US" smtClean="0"/>
           </a:p>
           <a:p>
             <a:pPr lvl="3"/>
@@ -1323,6 +1324,7 @@
               <a:rPr lang="en-US" smtClean="0"/>
               <a:t>Fourth level</a:t>
             </a:r>
+            <a:endParaRPr lang="en-US" smtClean="0"/>
           </a:p>
           <a:p>
             <a:pPr lvl="4"/>
@@ -1351,7 +1353,6 @@
           <a:p>
             <a:fld id="{5BCAD085-E8A6-8845-BD4E-CB4CCA059FC4}" type="datetimeFigureOut">
               <a:rPr lang="en-US" smtClean="0"/>
-              <a:t>1/27/13</a:t>
             </a:fld>
             <a:endParaRPr lang="en-US"/>
           </a:p>
@@ -1393,18 +1394,12 @@
           <a:p>
             <a:fld id="{C1FF6DA9-008F-8B48-92A6-B652298478BF}" type="slidenum">
               <a:rPr lang="en-US" smtClean="0"/>
-              <a:t>‹#›</a:t>
             </a:fld>
             <a:endParaRPr lang="en-US"/>
           </a:p>
         </p:txBody>
       </p:sp>
     </p:spTree>
-    <p:extLst>
-      <p:ext uri="{BB962C8B-B14F-4D97-AF65-F5344CB8AC3E}">
-        <p14:creationId xmlns:p14="http://schemas.microsoft.com/office/powerpoint/2010/main" val="2782244947"/>
-      </p:ext>
-    </p:extLst>
   </p:cSld>
   <p:clrMapOvr>
     <a:masterClrMapping/>
@@ -1518,6 +1513,7 @@
               <a:rPr lang="en-US" smtClean="0"/>
               <a:t>Click to edit Master text styles</a:t>
             </a:r>
+            <a:endParaRPr lang="en-US" smtClean="0"/>
           </a:p>
         </p:txBody>
       </p:sp>
@@ -1574,6 +1570,7 @@
               <a:rPr lang="en-US" smtClean="0"/>
               <a:t>Click to edit Master text styles</a:t>
             </a:r>
+            <a:endParaRPr lang="en-US" smtClean="0"/>
           </a:p>
           <a:p>
             <a:pPr lvl="1"/>
@@ -1581,6 +1578,7 @@
               <a:rPr lang="en-US" smtClean="0"/>
               <a:t>Second level</a:t>
             </a:r>
+            <a:endParaRPr lang="en-US" smtClean="0"/>
           </a:p>
           <a:p>
             <a:pPr lvl="2"/>
@@ -1588,6 +1586,7 @@
               <a:rPr lang="en-US" smtClean="0"/>
               <a:t>Third level</a:t>
             </a:r>
+            <a:endParaRPr lang="en-US" smtClean="0"/>
           </a:p>
           <a:p>
             <a:pPr lvl="3"/>
@@ -1595,6 +1594,7 @@
               <a:rPr lang="en-US" smtClean="0"/>
               <a:t>Fourth level</a:t>
             </a:r>
+            <a:endParaRPr lang="en-US" smtClean="0"/>
           </a:p>
           <a:p>
             <a:pPr lvl="4"/>
@@ -1668,6 +1668,7 @@
               <a:rPr lang="en-US" smtClean="0"/>
               <a:t>Click to edit Master text styles</a:t>
             </a:r>
+            <a:endParaRPr lang="en-US" smtClean="0"/>
           </a:p>
         </p:txBody>
       </p:sp>
@@ -1724,6 +1725,7 @@
               <a:rPr lang="en-US" smtClean="0"/>
               <a:t>Click to edit Master text styles</a:t>
             </a:r>
+            <a:endParaRPr lang="en-US" smtClean="0"/>
           </a:p>
           <a:p>
             <a:pPr lvl="1"/>
@@ -1731,6 +1733,7 @@
               <a:rPr lang="en-US" smtClean="0"/>
               <a:t>Second level</a:t>
             </a:r>
+            <a:endParaRPr lang="en-US" smtClean="0"/>
           </a:p>
           <a:p>
             <a:pPr lvl="2"/>
@@ -1738,6 +1741,7 @@
               <a:rPr lang="en-US" smtClean="0"/>
               <a:t>Third level</a:t>
             </a:r>
+            <a:endParaRPr lang="en-US" smtClean="0"/>
           </a:p>
           <a:p>
             <a:pPr lvl="3"/>
@@ -1745,6 +1749,7 @@
               <a:rPr lang="en-US" smtClean="0"/>
               <a:t>Fourth level</a:t>
             </a:r>
+            <a:endParaRPr lang="en-US" smtClean="0"/>
           </a:p>
           <a:p>
             <a:pPr lvl="4"/>
@@ -1773,7 +1778,6 @@
           <a:p>
             <a:fld id="{5BCAD085-E8A6-8845-BD4E-CB4CCA059FC4}" type="datetimeFigureOut">
               <a:rPr lang="en-US" smtClean="0"/>
-              <a:t>1/27/13</a:t>
             </a:fld>
             <a:endParaRPr lang="en-US"/>
           </a:p>
@@ -1815,18 +1819,12 @@
           <a:p>
             <a:fld id="{C1FF6DA9-008F-8B48-92A6-B652298478BF}" type="slidenum">
               <a:rPr lang="en-US" smtClean="0"/>
-              <a:t>‹#›</a:t>
             </a:fld>
             <a:endParaRPr lang="en-US"/>
           </a:p>
         </p:txBody>
       </p:sp>
     </p:spTree>
-    <p:extLst>
-      <p:ext uri="{BB962C8B-B14F-4D97-AF65-F5344CB8AC3E}">
-        <p14:creationId xmlns:p14="http://schemas.microsoft.com/office/powerpoint/2010/main" val="990158736"/>
-      </p:ext>
-    </p:extLst>
   </p:cSld>
   <p:clrMapOvr>
     <a:masterClrMapping/>
@@ -1891,7 +1889,6 @@
           <a:p>
             <a:fld id="{5BCAD085-E8A6-8845-BD4E-CB4CCA059FC4}" type="datetimeFigureOut">
               <a:rPr lang="en-US" smtClean="0"/>
-              <a:t>1/27/13</a:t>
             </a:fld>
             <a:endParaRPr lang="en-US"/>
           </a:p>
@@ -1933,18 +1930,12 @@
           <a:p>
             <a:fld id="{C1FF6DA9-008F-8B48-92A6-B652298478BF}" type="slidenum">
               <a:rPr lang="en-US" smtClean="0"/>
-              <a:t>‹#›</a:t>
             </a:fld>
             <a:endParaRPr lang="en-US"/>
           </a:p>
         </p:txBody>
       </p:sp>
     </p:spTree>
-    <p:extLst>
-      <p:ext uri="{BB962C8B-B14F-4D97-AF65-F5344CB8AC3E}">
-        <p14:creationId xmlns:p14="http://schemas.microsoft.com/office/powerpoint/2010/main" val="727027711"/>
-      </p:ext>
-    </p:extLst>
   </p:cSld>
   <p:clrMapOvr>
     <a:masterClrMapping/>
@@ -1986,7 +1977,6 @@
           <a:p>
             <a:fld id="{5BCAD085-E8A6-8845-BD4E-CB4CCA059FC4}" type="datetimeFigureOut">
               <a:rPr lang="en-US" smtClean="0"/>
-              <a:t>1/27/13</a:t>
             </a:fld>
             <a:endParaRPr lang="en-US"/>
           </a:p>
@@ -2028,18 +2018,12 @@
           <a:p>
             <a:fld id="{C1FF6DA9-008F-8B48-92A6-B652298478BF}" type="slidenum">
               <a:rPr lang="en-US" smtClean="0"/>
-              <a:t>‹#›</a:t>
             </a:fld>
             <a:endParaRPr lang="en-US"/>
           </a:p>
         </p:txBody>
       </p:sp>
     </p:spTree>
-    <p:extLst>
-      <p:ext uri="{BB962C8B-B14F-4D97-AF65-F5344CB8AC3E}">
-        <p14:creationId xmlns:p14="http://schemas.microsoft.com/office/powerpoint/2010/main" val="1212999818"/>
-      </p:ext>
-    </p:extLst>
   </p:cSld>
   <p:clrMapOvr>
     <a:masterClrMapping/>
@@ -2149,6 +2133,7 @@
               <a:rPr lang="en-US" smtClean="0"/>
               <a:t>Click to edit Master text styles</a:t>
             </a:r>
+            <a:endParaRPr lang="en-US" smtClean="0"/>
           </a:p>
           <a:p>
             <a:pPr lvl="1"/>
@@ -2156,6 +2141,7 @@
               <a:rPr lang="en-US" smtClean="0"/>
               <a:t>Second level</a:t>
             </a:r>
+            <a:endParaRPr lang="en-US" smtClean="0"/>
           </a:p>
           <a:p>
             <a:pPr lvl="2"/>
@@ -2163,6 +2149,7 @@
               <a:rPr lang="en-US" smtClean="0"/>
               <a:t>Third level</a:t>
             </a:r>
+            <a:endParaRPr lang="en-US" smtClean="0"/>
           </a:p>
           <a:p>
             <a:pPr lvl="3"/>
@@ -2170,6 +2157,7 @@
               <a:rPr lang="en-US" smtClean="0"/>
               <a:t>Fourth level</a:t>
             </a:r>
+            <a:endParaRPr lang="en-US" smtClean="0"/>
           </a:p>
           <a:p>
             <a:pPr lvl="4"/>
@@ -2243,6 +2231,7 @@
               <a:rPr lang="en-US" smtClean="0"/>
               <a:t>Click to edit Master text styles</a:t>
             </a:r>
+            <a:endParaRPr lang="en-US" smtClean="0"/>
           </a:p>
         </p:txBody>
       </p:sp>
@@ -2263,7 +2252,6 @@
           <a:p>
             <a:fld id="{5BCAD085-E8A6-8845-BD4E-CB4CCA059FC4}" type="datetimeFigureOut">
               <a:rPr lang="en-US" smtClean="0"/>
-              <a:t>1/27/13</a:t>
             </a:fld>
             <a:endParaRPr lang="en-US"/>
           </a:p>
@@ -2305,18 +2293,12 @@
           <a:p>
             <a:fld id="{C1FF6DA9-008F-8B48-92A6-B652298478BF}" type="slidenum">
               <a:rPr lang="en-US" smtClean="0"/>
-              <a:t>‹#›</a:t>
             </a:fld>
             <a:endParaRPr lang="en-US"/>
           </a:p>
         </p:txBody>
       </p:sp>
     </p:spTree>
-    <p:extLst>
-      <p:ext uri="{BB962C8B-B14F-4D97-AF65-F5344CB8AC3E}">
-        <p14:creationId xmlns:p14="http://schemas.microsoft.com/office/powerpoint/2010/main" val="1840726560"/>
-      </p:ext>
-    </p:extLst>
   </p:cSld>
   <p:clrMapOvr>
     <a:masterClrMapping/>
@@ -2496,6 +2478,7 @@
               <a:rPr lang="en-US" smtClean="0"/>
               <a:t>Click to edit Master text styles</a:t>
             </a:r>
+            <a:endParaRPr lang="en-US" smtClean="0"/>
           </a:p>
         </p:txBody>
       </p:sp>
@@ -2516,7 +2499,6 @@
           <a:p>
             <a:fld id="{5BCAD085-E8A6-8845-BD4E-CB4CCA059FC4}" type="datetimeFigureOut">
               <a:rPr lang="en-US" smtClean="0"/>
-              <a:t>1/27/13</a:t>
             </a:fld>
             <a:endParaRPr lang="en-US"/>
           </a:p>
@@ -2558,18 +2540,12 @@
           <a:p>
             <a:fld id="{C1FF6DA9-008F-8B48-92A6-B652298478BF}" type="slidenum">
               <a:rPr lang="en-US" smtClean="0"/>
-              <a:t>‹#›</a:t>
             </a:fld>
             <a:endParaRPr lang="en-US"/>
           </a:p>
         </p:txBody>
       </p:sp>
     </p:spTree>
-    <p:extLst>
-      <p:ext uri="{BB962C8B-B14F-4D97-AF65-F5344CB8AC3E}">
-        <p14:creationId xmlns:p14="http://schemas.microsoft.com/office/powerpoint/2010/main" val="3889236939"/>
-      </p:ext>
-    </p:extLst>
   </p:cSld>
   <p:clrMapOvr>
     <a:masterClrMapping/>
@@ -2662,6 +2638,7 @@
               <a:rPr lang="en-US" smtClean="0"/>
               <a:t>Click to edit Master text styles</a:t>
             </a:r>
+            <a:endParaRPr lang="en-US" smtClean="0"/>
           </a:p>
           <a:p>
             <a:pPr lvl="1"/>
@@ -2669,6 +2646,7 @@
               <a:rPr lang="en-US" smtClean="0"/>
               <a:t>Second level</a:t>
             </a:r>
+            <a:endParaRPr lang="en-US" smtClean="0"/>
           </a:p>
           <a:p>
             <a:pPr lvl="2"/>
@@ -2676,6 +2654,7 @@
               <a:rPr lang="en-US" smtClean="0"/>
               <a:t>Third level</a:t>
             </a:r>
+            <a:endParaRPr lang="en-US" smtClean="0"/>
           </a:p>
           <a:p>
             <a:pPr lvl="3"/>
@@ -2683,6 +2662,7 @@
               <a:rPr lang="en-US" smtClean="0"/>
               <a:t>Fourth level</a:t>
             </a:r>
+            <a:endParaRPr lang="en-US" smtClean="0"/>
           </a:p>
           <a:p>
             <a:pPr lvl="4"/>
@@ -2729,7 +2709,6 @@
           <a:p>
             <a:fld id="{5BCAD085-E8A6-8845-BD4E-CB4CCA059FC4}" type="datetimeFigureOut">
               <a:rPr lang="en-US" smtClean="0"/>
-              <a:t>1/27/13</a:t>
             </a:fld>
             <a:endParaRPr lang="en-US"/>
           </a:p>
@@ -2807,18 +2786,12 @@
           <a:p>
             <a:fld id="{C1FF6DA9-008F-8B48-92A6-B652298478BF}" type="slidenum">
               <a:rPr lang="en-US" smtClean="0"/>
-              <a:t>‹#›</a:t>
             </a:fld>
             <a:endParaRPr lang="en-US"/>
           </a:p>
         </p:txBody>
       </p:sp>
     </p:spTree>
-    <p:extLst>
-      <p:ext uri="{BB962C8B-B14F-4D97-AF65-F5344CB8AC3E}">
-        <p14:creationId xmlns:p14="http://schemas.microsoft.com/office/powerpoint/2010/main" val="2209977519"/>
-      </p:ext>
-    </p:extLst>
   </p:cSld>
   <p:clrMap bg1="lt1" tx1="dk1" bg2="lt2" tx2="dk2" accent1="accent1" accent2="accent2" accent3="accent3" accent4="accent4" accent5="accent5" accent6="accent6" hlink="hlink" folHlink="folHlink"/>
   <p:sldLayoutIdLst>
@@ -2856,7 +2829,7 @@
         <a:spcBef>
           <a:spcPct val="20000"/>
         </a:spcBef>
-        <a:buFont typeface="Arial"/>
+        <a:buFont typeface="Arial" panose="020B0604020202020204"/>
         <a:buChar char="•"/>
         <a:defRPr sz="3200" kern="1200">
           <a:solidFill>
@@ -2871,7 +2844,7 @@
         <a:spcBef>
           <a:spcPct val="20000"/>
         </a:spcBef>
-        <a:buFont typeface="Arial"/>
+        <a:buFont typeface="Arial" panose="020B0604020202020204"/>
         <a:buChar char="–"/>
         <a:defRPr sz="2800" kern="1200">
           <a:solidFill>
@@ -2886,7 +2859,7 @@
         <a:spcBef>
           <a:spcPct val="20000"/>
         </a:spcBef>
-        <a:buFont typeface="Arial"/>
+        <a:buFont typeface="Arial" panose="020B0604020202020204"/>
         <a:buChar char="•"/>
         <a:defRPr sz="2400" kern="1200">
           <a:solidFill>
@@ -2901,7 +2874,7 @@
         <a:spcBef>
           <a:spcPct val="20000"/>
         </a:spcBef>
-        <a:buFont typeface="Arial"/>
+        <a:buFont typeface="Arial" panose="020B0604020202020204"/>
         <a:buChar char="–"/>
         <a:defRPr sz="2000" kern="1200">
           <a:solidFill>
@@ -2916,7 +2889,7 @@
         <a:spcBef>
           <a:spcPct val="20000"/>
         </a:spcBef>
-        <a:buFont typeface="Arial"/>
+        <a:buFont typeface="Arial" panose="020B0604020202020204"/>
         <a:buChar char="»"/>
         <a:defRPr sz="2000" kern="1200">
           <a:solidFill>
@@ -2931,7 +2904,7 @@
         <a:spcBef>
           <a:spcPct val="20000"/>
         </a:spcBef>
-        <a:buFont typeface="Arial"/>
+        <a:buFont typeface="Arial" panose="020B0604020202020204"/>
         <a:buChar char="•"/>
         <a:defRPr sz="2000" kern="1200">
           <a:solidFill>
@@ -2946,7 +2919,7 @@
         <a:spcBef>
           <a:spcPct val="20000"/>
         </a:spcBef>
-        <a:buFont typeface="Arial"/>
+        <a:buFont typeface="Arial" panose="020B0604020202020204"/>
         <a:buChar char="•"/>
         <a:defRPr sz="2000" kern="1200">
           <a:solidFill>
@@ -2961,7 +2934,7 @@
         <a:spcBef>
           <a:spcPct val="20000"/>
         </a:spcBef>
-        <a:buFont typeface="Arial"/>
+        <a:buFont typeface="Arial" panose="020B0604020202020204"/>
         <a:buChar char="•"/>
         <a:defRPr sz="2000" kern="1200">
           <a:solidFill>
@@ -2976,7 +2949,7 @@
         <a:spcBef>
           <a:spcPct val="20000"/>
         </a:spcBef>
-        <a:buFont typeface="Arial"/>
+        <a:buFont typeface="Arial" panose="020B0604020202020204"/>
         <a:buChar char="•"/>
         <a:defRPr sz="2000" kern="1200">
           <a:solidFill>
@@ -3088,7 +3061,7 @@
 </file>
 
 <file path=ppt/slides/slide1.xml><?xml version="1.0" encoding="utf-8"?>
-<p:sld xmlns:a="http://schemas.openxmlformats.org/drawingml/2006/main" xmlns:p="http://schemas.openxmlformats.org/presentationml/2006/main" xmlns:r="http://schemas.openxmlformats.org/officeDocument/2006/relationships">
+<p:sld xmlns:a="http://schemas.openxmlformats.org/drawingml/2006/main" xmlns:r="http://schemas.openxmlformats.org/officeDocument/2006/relationships" xmlns:p="http://schemas.openxmlformats.org/presentationml/2006/main">
   <p:cSld>
     <p:spTree>
       <p:nvGrpSpPr>
@@ -3290,7 +3263,7 @@
           <a:noFill/>
         </p:spPr>
         <p:txBody>
-          <a:bodyPr wrap="square" lIns="0" rIns="0" tIns="0" bIns="0">
+          <a:bodyPr wrap="square" lIns="0" tIns="0" rIns="0" bIns="0">
             <a:spAutoFit/>
           </a:bodyPr>
           <a:lstStyle/>
@@ -3305,10 +3278,16 @@
                 <a:solidFill>
                   <a:srgbClr val="8EB6A6"/>
                 </a:solidFill>
-                <a:latin typeface="Segoe UI"/>
+                <a:latin typeface="Segoe UI" panose="020B0502040204020203"/>
               </a:rPr>
               <a:t>DÉFI 1 · ÉCONOMIE NUMÉRIQUE · RÉPUBLIQUE TOGOLAISE</a:t>
             </a:r>
+            <a:endParaRPr sz="950" b="1" spc="190">
+              <a:solidFill>
+                <a:srgbClr val="8EB6A6"/>
+              </a:solidFill>
+              <a:latin typeface="Segoe UI" panose="020B0502040204020203"/>
+            </a:endParaRPr>
           </a:p>
         </p:txBody>
       </p:sp>
@@ -3329,7 +3308,7 @@
           <a:noFill/>
         </p:spPr>
         <p:txBody>
-          <a:bodyPr wrap="square" lIns="0" rIns="0" tIns="0" bIns="0">
+          <a:bodyPr wrap="square" lIns="0" tIns="0" rIns="0" bIns="0">
             <a:spAutoFit/>
           </a:bodyPr>
           <a:lstStyle/>
@@ -3344,10 +3323,16 @@
                 <a:solidFill>
                   <a:srgbClr val="FFFFFF"/>
                 </a:solidFill>
-                <a:latin typeface="Segoe UI"/>
+                <a:latin typeface="Segoe UI" panose="020B0502040204020203"/>
               </a:rPr>
               <a:t>Connecter le Togo</a:t>
             </a:r>
+            <a:endParaRPr sz="4300" b="1" spc="-50">
+              <a:solidFill>
+                <a:srgbClr val="FFFFFF"/>
+              </a:solidFill>
+              <a:latin typeface="Segoe UI" panose="020B0502040204020203"/>
+            </a:endParaRPr>
           </a:p>
           <a:p>
             <a:pPr algn="l">
@@ -3360,10 +3345,16 @@
                 <a:solidFill>
                   <a:srgbClr val="FFFFFF"/>
                 </a:solidFill>
-                <a:latin typeface="Segoe UI"/>
+                <a:latin typeface="Segoe UI" panose="020B0502040204020203"/>
               </a:rPr>
               <a:t>là où le manque est prouvé</a:t>
             </a:r>
+            <a:endParaRPr sz="4300" b="1" spc="-50">
+              <a:solidFill>
+                <a:srgbClr val="FFFFFF"/>
+              </a:solidFill>
+              <a:latin typeface="Segoe UI" panose="020B0502040204020203"/>
+            </a:endParaRPr>
           </a:p>
         </p:txBody>
       </p:sp>
@@ -3428,7 +3419,7 @@
           <a:noFill/>
         </p:spPr>
         <p:txBody>
-          <a:bodyPr wrap="square" lIns="0" rIns="0" tIns="0" bIns="0">
+          <a:bodyPr wrap="square" lIns="0" tIns="0" rIns="0" bIns="0">
             <a:spAutoFit/>
           </a:bodyPr>
           <a:lstStyle/>
@@ -3443,10 +3434,16 @@
                 <a:solidFill>
                   <a:srgbClr val="CBDED6"/>
                 </a:solidFill>
-                <a:latin typeface="Segoe UI"/>
+                <a:latin typeface="Segoe UI" panose="020B0502040204020203"/>
               </a:rPr>
               <a:t>Le Togo compte un point de service financier numérique pour 409 habitants. Cette moyenne ne dit rien d'utile : entre la préfecture la mieux dotée et la moins dotée, l'écart est de 1 à 12,7.</a:t>
             </a:r>
+            <a:endParaRPr sz="1400" b="0">
+              <a:solidFill>
+                <a:srgbClr val="CBDED6"/>
+              </a:solidFill>
+              <a:latin typeface="Segoe UI" panose="020B0502040204020203"/>
+            </a:endParaRPr>
           </a:p>
           <a:p>
             <a:pPr algn="l">
@@ -3459,10 +3456,16 @@
                 <a:solidFill>
                   <a:srgbClr val="CBDED6"/>
                 </a:solidFill>
-                <a:latin typeface="Segoe UI"/>
+                <a:latin typeface="Segoe UI" panose="020B0502040204020203"/>
               </a:rPr>
               <a:t>Ce diagnostic désigne les territoires où investir, et publie de quoi contester le classement.</a:t>
             </a:r>
+            <a:endParaRPr sz="1400" b="0">
+              <a:solidFill>
+                <a:srgbClr val="CBDED6"/>
+              </a:solidFill>
+              <a:latin typeface="Segoe UI" panose="020B0502040204020203"/>
+            </a:endParaRPr>
           </a:p>
         </p:txBody>
       </p:sp>
@@ -3527,7 +3530,7 @@
           <a:noFill/>
         </p:spPr>
         <p:txBody>
-          <a:bodyPr wrap="square" lIns="0" rIns="0" tIns="0" bIns="0">
+          <a:bodyPr wrap="square" lIns="0" tIns="0" rIns="0" bIns="0">
             <a:spAutoFit/>
           </a:bodyPr>
           <a:lstStyle/>
@@ -3542,10 +3545,16 @@
                 <a:solidFill>
                   <a:srgbClr val="8EB6A6"/>
                 </a:solidFill>
-                <a:latin typeface="Segoe UI"/>
+                <a:latin typeface="Segoe UI" panose="020B0502040204020203"/>
               </a:rPr>
               <a:t>HABITANTS PAR POINT DE SERVICE</a:t>
             </a:r>
+            <a:endParaRPr sz="850" b="1" spc="130">
+              <a:solidFill>
+                <a:srgbClr val="8EB6A6"/>
+              </a:solidFill>
+              <a:latin typeface="Segoe UI" panose="020B0502040204020203"/>
+            </a:endParaRPr>
           </a:p>
         </p:txBody>
       </p:sp>
@@ -3566,7 +3575,7 @@
           <a:noFill/>
         </p:spPr>
         <p:txBody>
-          <a:bodyPr wrap="square" lIns="0" rIns="0" tIns="0" bIns="0">
+          <a:bodyPr wrap="square" lIns="0" tIns="0" rIns="0" bIns="0">
             <a:spAutoFit/>
           </a:bodyPr>
           <a:lstStyle/>
@@ -3581,10 +3590,16 @@
                 <a:solidFill>
                   <a:srgbClr val="FFFFFF"/>
                 </a:solidFill>
-                <a:latin typeface="Segoe UI"/>
+                <a:latin typeface="Segoe UI" panose="020B0502040204020203"/>
               </a:rPr>
               <a:t>409</a:t>
             </a:r>
+            <a:endParaRPr sz="2700" b="1" spc="-40">
+              <a:solidFill>
+                <a:srgbClr val="FFFFFF"/>
+              </a:solidFill>
+              <a:latin typeface="Segoe UI" panose="020B0502040204020203"/>
+            </a:endParaRPr>
           </a:p>
         </p:txBody>
       </p:sp>
@@ -3605,7 +3620,7 @@
           <a:noFill/>
         </p:spPr>
         <p:txBody>
-          <a:bodyPr wrap="square" lIns="0" rIns="0" tIns="0" bIns="0">
+          <a:bodyPr wrap="square" lIns="0" tIns="0" rIns="0" bIns="0">
             <a:spAutoFit/>
           </a:bodyPr>
           <a:lstStyle/>
@@ -3620,10 +3635,16 @@
                 <a:solidFill>
                   <a:srgbClr val="6D9A89"/>
                 </a:solidFill>
-                <a:latin typeface="Segoe UI"/>
+                <a:latin typeface="Segoe UI" panose="020B0502040204020203"/>
               </a:rPr>
               <a:t>moyenne nationale · 19 788 points géolocalisés</a:t>
             </a:r>
+            <a:endParaRPr sz="900" b="0">
+              <a:solidFill>
+                <a:srgbClr val="6D9A89"/>
+              </a:solidFill>
+              <a:latin typeface="Segoe UI" panose="020B0502040204020203"/>
+            </a:endParaRPr>
           </a:p>
         </p:txBody>
       </p:sp>
@@ -3644,7 +3665,7 @@
           <a:noFill/>
         </p:spPr>
         <p:txBody>
-          <a:bodyPr wrap="square" lIns="0" rIns="0" tIns="0" bIns="0">
+          <a:bodyPr wrap="square" lIns="0" tIns="0" rIns="0" bIns="0">
             <a:spAutoFit/>
           </a:bodyPr>
           <a:lstStyle/>
@@ -3659,10 +3680,16 @@
                 <a:solidFill>
                   <a:srgbClr val="8EB6A6"/>
                 </a:solidFill>
-                <a:latin typeface="Segoe UI"/>
+                <a:latin typeface="Segoe UI" panose="020B0502040204020203"/>
               </a:rPr>
               <a:t>ÉCART ENTRE PRÉFECTURES</a:t>
             </a:r>
+            <a:endParaRPr sz="850" b="1" spc="130">
+              <a:solidFill>
+                <a:srgbClr val="8EB6A6"/>
+              </a:solidFill>
+              <a:latin typeface="Segoe UI" panose="020B0502040204020203"/>
+            </a:endParaRPr>
           </a:p>
         </p:txBody>
       </p:sp>
@@ -3683,7 +3710,7 @@
           <a:noFill/>
         </p:spPr>
         <p:txBody>
-          <a:bodyPr wrap="square" lIns="0" rIns="0" tIns="0" bIns="0">
+          <a:bodyPr wrap="square" lIns="0" tIns="0" rIns="0" bIns="0">
             <a:spAutoFit/>
           </a:bodyPr>
           <a:lstStyle/>
@@ -3698,10 +3725,16 @@
                 <a:solidFill>
                   <a:srgbClr val="FFFFFF"/>
                 </a:solidFill>
-                <a:latin typeface="Segoe UI"/>
+                <a:latin typeface="Segoe UI" panose="020B0502040204020203"/>
               </a:rPr>
               <a:t>1 à 12,7</a:t>
             </a:r>
+            <a:endParaRPr sz="2700" b="1" spc="-40">
+              <a:solidFill>
+                <a:srgbClr val="FFFFFF"/>
+              </a:solidFill>
+              <a:latin typeface="Segoe UI" panose="020B0502040204020203"/>
+            </a:endParaRPr>
           </a:p>
         </p:txBody>
       </p:sp>
@@ -3722,7 +3755,7 @@
           <a:noFill/>
         </p:spPr>
         <p:txBody>
-          <a:bodyPr wrap="square" lIns="0" rIns="0" tIns="0" bIns="0">
+          <a:bodyPr wrap="square" lIns="0" tIns="0" rIns="0" bIns="0">
             <a:spAutoFit/>
           </a:bodyPr>
           <a:lstStyle/>
@@ -3737,10 +3770,16 @@
                 <a:solidFill>
                   <a:srgbClr val="6D9A89"/>
                 </a:solidFill>
-                <a:latin typeface="Segoe UI"/>
+                <a:latin typeface="Segoe UI" panose="020B0502040204020203"/>
               </a:rPr>
               <a:t>Kpendjal contre Tchaoudjo</a:t>
             </a:r>
+            <a:endParaRPr sz="900" b="0">
+              <a:solidFill>
+                <a:srgbClr val="6D9A89"/>
+              </a:solidFill>
+              <a:latin typeface="Segoe UI" panose="020B0502040204020203"/>
+            </a:endParaRPr>
           </a:p>
         </p:txBody>
       </p:sp>
@@ -3761,7 +3800,7 @@
           <a:noFill/>
         </p:spPr>
         <p:txBody>
-          <a:bodyPr wrap="square" lIns="0" rIns="0" tIns="0" bIns="0">
+          <a:bodyPr wrap="square" lIns="0" tIns="0" rIns="0" bIns="0">
             <a:spAutoFit/>
           </a:bodyPr>
           <a:lstStyle/>
@@ -3776,10 +3815,16 @@
                 <a:solidFill>
                   <a:srgbClr val="8EB6A6"/>
                 </a:solidFill>
-                <a:latin typeface="Segoe UI"/>
+                <a:latin typeface="Segoe UI" panose="020B0502040204020203"/>
               </a:rPr>
               <a:t>PRÉFECTURES SANS AGENCE ACTIVE</a:t>
             </a:r>
+            <a:endParaRPr sz="850" b="1" spc="130">
+              <a:solidFill>
+                <a:srgbClr val="8EB6A6"/>
+              </a:solidFill>
+              <a:latin typeface="Segoe UI" panose="020B0502040204020203"/>
+            </a:endParaRPr>
           </a:p>
         </p:txBody>
       </p:sp>
@@ -3800,7 +3845,7 @@
           <a:noFill/>
         </p:spPr>
         <p:txBody>
-          <a:bodyPr wrap="square" lIns="0" rIns="0" tIns="0" bIns="0">
+          <a:bodyPr wrap="square" lIns="0" tIns="0" rIns="0" bIns="0">
             <a:spAutoFit/>
           </a:bodyPr>
           <a:lstStyle/>
@@ -3815,10 +3860,16 @@
                 <a:solidFill>
                   <a:srgbClr val="FFFFFF"/>
                 </a:solidFill>
-                <a:latin typeface="Segoe UI"/>
+                <a:latin typeface="Segoe UI" panose="020B0502040204020203"/>
               </a:rPr>
               <a:t>13 / 39</a:t>
             </a:r>
+            <a:endParaRPr sz="2700" b="1" spc="-40">
+              <a:solidFill>
+                <a:srgbClr val="FFFFFF"/>
+              </a:solidFill>
+              <a:latin typeface="Segoe UI" panose="020B0502040204020203"/>
+            </a:endParaRPr>
           </a:p>
         </p:txBody>
       </p:sp>
@@ -3839,7 +3890,7 @@
           <a:noFill/>
         </p:spPr>
         <p:txBody>
-          <a:bodyPr wrap="square" lIns="0" rIns="0" tIns="0" bIns="0">
+          <a:bodyPr wrap="square" lIns="0" tIns="0" rIns="0" bIns="0">
             <a:spAutoFit/>
           </a:bodyPr>
           <a:lstStyle/>
@@ -3854,10 +3905,16 @@
                 <a:solidFill>
                   <a:srgbClr val="6D9A89"/>
                 </a:solidFill>
-                <a:latin typeface="Segoe UI"/>
+                <a:latin typeface="Segoe UI" panose="020B0502040204020203"/>
               </a:rPr>
               <a:t>1 621 720 habitants concernés</a:t>
             </a:r>
+            <a:endParaRPr sz="900" b="0">
+              <a:solidFill>
+                <a:srgbClr val="6D9A89"/>
+              </a:solidFill>
+              <a:latin typeface="Segoe UI" panose="020B0502040204020203"/>
+            </a:endParaRPr>
           </a:p>
         </p:txBody>
       </p:sp>
@@ -3878,7 +3935,7 @@
           <a:noFill/>
         </p:spPr>
         <p:txBody>
-          <a:bodyPr wrap="square" lIns="0" rIns="0" tIns="0" bIns="0">
+          <a:bodyPr wrap="square" lIns="0" tIns="0" rIns="0" bIns="0">
             <a:spAutoFit/>
           </a:bodyPr>
           <a:lstStyle/>
@@ -3893,49 +3950,16 @@
                 <a:solidFill>
                   <a:srgbClr val="FFFFFF"/>
                 </a:solidFill>
-                <a:latin typeface="Segoe UI"/>
+                <a:latin typeface="Segoe UI" panose="020B0502040204020203"/>
               </a:rPr>
               <a:t>KOUTSAVA Kossi Epiphane</a:t>
             </a:r>
-          </a:p>
-        </p:txBody>
-      </p:sp>
-      <p:sp>
-        <p:nvSpPr>
-          <p:cNvPr id="21" name="TextBox 20"/>
-          <p:cNvSpPr txBox="1"/>
-          <p:nvPr/>
-        </p:nvSpPr>
-        <p:spPr>
-          <a:xfrm>
-            <a:off x="868680" y="6190488"/>
-            <a:ext cx="5669280" cy="201168"/>
-          </a:xfrm>
-          <a:prstGeom prst="rect">
-            <a:avLst/>
-          </a:prstGeom>
-          <a:noFill/>
-        </p:spPr>
-        <p:txBody>
-          <a:bodyPr wrap="square" lIns="0" rIns="0" tIns="0" bIns="0">
-            <a:spAutoFit/>
-          </a:bodyPr>
-          <a:lstStyle/>
-          <a:p>
-            <a:pPr algn="l">
-              <a:lnSpc>
-                <a:spcPct val="120000"/>
-              </a:lnSpc>
-            </a:pPr>
-            <a:r>
-              <a:rPr sz="850" b="1" spc="130">
-                <a:solidFill>
-                  <a:srgbClr val="8EB6A6"/>
-                </a:solidFill>
-                <a:latin typeface="Segoe UI"/>
-              </a:rPr>
-              <a:t>ANALYSE DE DONNÉES · DÉFI ÉCONOMIE NUMÉRIQUE</a:t>
-            </a:r>
+            <a:endParaRPr sz="1450" b="1">
+              <a:solidFill>
+                <a:srgbClr val="FFFFFF"/>
+              </a:solidFill>
+              <a:latin typeface="Segoe UI" panose="020B0502040204020203"/>
+            </a:endParaRPr>
           </a:p>
         </p:txBody>
       </p:sp>
@@ -4000,7 +4024,7 @@
           <a:noFill/>
         </p:spPr>
         <p:txBody>
-          <a:bodyPr wrap="square" lIns="0" rIns="0" tIns="0" bIns="0">
+          <a:bodyPr wrap="square" lIns="0" tIns="0" rIns="0" bIns="0">
             <a:spAutoFit/>
           </a:bodyPr>
           <a:lstStyle/>
@@ -4015,10 +4039,16 @@
                 <a:solidFill>
                   <a:srgbClr val="6D9A89"/>
                 </a:solidFill>
-                <a:latin typeface="Segoe UI"/>
+                <a:latin typeface="Segoe UI" panose="020B0502040204020203"/>
               </a:rPr>
               <a:t>Géoportail national (PRISE 2021-2022) · RGPH-5, INSEED (novembre 2022) · limites COD-AB v02, OCHA (2021) — 35 contrôles arithmétiques publiés</a:t>
             </a:r>
+            <a:endParaRPr sz="800" b="0">
+              <a:solidFill>
+                <a:srgbClr val="6D9A89"/>
+              </a:solidFill>
+              <a:latin typeface="Segoe UI" panose="020B0502040204020203"/>
+            </a:endParaRPr>
           </a:p>
         </p:txBody>
       </p:sp>
@@ -4031,7 +4061,7 @@
           <p:nvPr/>
         </p:nvPicPr>
         <p:blipFill>
-          <a:blip r:embed="rId2"/>
+          <a:blip r:embed="rId1"/>
           <a:stretch>
             <a:fillRect/>
           </a:stretch>
@@ -4055,7 +4085,7 @@
 </file>
 
 <file path=ppt/slides/slide10.xml><?xml version="1.0" encoding="utf-8"?>
-<p:sld xmlns:a="http://schemas.openxmlformats.org/drawingml/2006/main" xmlns:p="http://schemas.openxmlformats.org/presentationml/2006/main" xmlns:r="http://schemas.openxmlformats.org/officeDocument/2006/relationships">
+<p:sld xmlns:a="http://schemas.openxmlformats.org/drawingml/2006/main" xmlns:r="http://schemas.openxmlformats.org/officeDocument/2006/relationships" xmlns:p="http://schemas.openxmlformats.org/presentationml/2006/main">
   <p:cSld>
     <p:spTree>
       <p:nvGrpSpPr>
@@ -4257,7 +4287,7 @@
           <a:noFill/>
         </p:spPr>
         <p:txBody>
-          <a:bodyPr wrap="square" lIns="0" rIns="0" tIns="0" bIns="0">
+          <a:bodyPr wrap="square" lIns="0" tIns="0" rIns="0" bIns="0">
             <a:spAutoFit/>
           </a:bodyPr>
           <a:lstStyle/>
@@ -4272,10 +4302,16 @@
                 <a:solidFill>
                   <a:srgbClr val="8B8A84"/>
                 </a:solidFill>
-                <a:latin typeface="Consolas"/>
+                <a:latin typeface="Consolas" panose="020B0609020204030204"/>
               </a:rPr>
               <a:t>CONCLUSION</a:t>
             </a:r>
+            <a:endParaRPr sz="900" b="1">
+              <a:solidFill>
+                <a:srgbClr val="8B8A84"/>
+              </a:solidFill>
+              <a:latin typeface="Consolas" panose="020B0609020204030204"/>
+            </a:endParaRPr>
           </a:p>
         </p:txBody>
       </p:sp>
@@ -4296,7 +4332,7 @@
           <a:noFill/>
         </p:spPr>
         <p:txBody>
-          <a:bodyPr wrap="square" lIns="0" rIns="0" tIns="0" bIns="0">
+          <a:bodyPr wrap="square" lIns="0" tIns="0" rIns="0" bIns="0">
             <a:spAutoFit/>
           </a:bodyPr>
           <a:lstStyle/>
@@ -4311,10 +4347,16 @@
                 <a:solidFill>
                   <a:srgbClr val="12120F"/>
                 </a:solidFill>
-                <a:latin typeface="Segoe UI"/>
+                <a:latin typeface="Segoe UI" panose="020B0502040204020203"/>
               </a:rPr>
               <a:t>Objectifs du sujet → réponses fournies</a:t>
             </a:r>
+            <a:endParaRPr sz="2800" b="1">
+              <a:solidFill>
+                <a:srgbClr val="12120F"/>
+              </a:solidFill>
+              <a:latin typeface="Segoe UI" panose="020B0502040204020203"/>
+            </a:endParaRPr>
           </a:p>
         </p:txBody>
       </p:sp>
@@ -4423,7 +4465,7 @@
           <a:noFill/>
         </p:spPr>
         <p:txBody>
-          <a:bodyPr wrap="square" lIns="0" rIns="0" tIns="0" bIns="0">
+          <a:bodyPr wrap="square" lIns="0" tIns="0" rIns="0" bIns="0">
             <a:spAutoFit/>
           </a:bodyPr>
           <a:lstStyle/>
@@ -4438,10 +4480,16 @@
                 <a:solidFill>
                   <a:srgbClr val="0F4D3B"/>
                 </a:solidFill>
-                <a:latin typeface="Segoe UI"/>
+                <a:latin typeface="Segoe UI" panose="020B0502040204020203"/>
               </a:rPr>
               <a:t>Quatre objectifs traités ; la couverture mobile, non mesurable en open data, devient une limite critique.</a:t>
             </a:r>
+            <a:endParaRPr sz="1350" b="1">
+              <a:solidFill>
+                <a:srgbClr val="0F4D3B"/>
+              </a:solidFill>
+              <a:latin typeface="Segoe UI" panose="020B0502040204020203"/>
+            </a:endParaRPr>
           </a:p>
         </p:txBody>
       </p:sp>
@@ -4506,7 +4554,7 @@
           <a:noFill/>
         </p:spPr>
         <p:txBody>
-          <a:bodyPr wrap="square" lIns="0" rIns="0" tIns="0" bIns="0">
+          <a:bodyPr wrap="square" lIns="0" tIns="0" rIns="0" bIns="0">
             <a:spAutoFit/>
           </a:bodyPr>
           <a:lstStyle/>
@@ -4521,10 +4569,16 @@
                 <a:solidFill>
                   <a:srgbClr val="8B8A84"/>
                 </a:solidFill>
-                <a:latin typeface="Consolas"/>
+                <a:latin typeface="Consolas" panose="020B0609020204030204"/>
               </a:rPr>
               <a:t>République togolaise · Défi Économie numérique · Données ouvertes PRISE 2021-2022, RGPH-5 2022, COD-AB 2021</a:t>
             </a:r>
+            <a:endParaRPr sz="800" b="0">
+              <a:solidFill>
+                <a:srgbClr val="8B8A84"/>
+              </a:solidFill>
+              <a:latin typeface="Consolas" panose="020B0609020204030204"/>
+            </a:endParaRPr>
           </a:p>
         </p:txBody>
       </p:sp>
@@ -4545,7 +4599,7 @@
           <a:noFill/>
         </p:spPr>
         <p:txBody>
-          <a:bodyPr wrap="square" lIns="0" rIns="0" tIns="0" bIns="0">
+          <a:bodyPr wrap="square" lIns="0" tIns="0" rIns="0" bIns="0">
             <a:spAutoFit/>
           </a:bodyPr>
           <a:lstStyle/>
@@ -4560,10 +4614,16 @@
                 <a:solidFill>
                   <a:srgbClr val="8B8A84"/>
                 </a:solidFill>
-                <a:latin typeface="Consolas"/>
+                <a:latin typeface="Consolas" panose="020B0609020204030204"/>
               </a:rPr>
               <a:t>10 / 10</a:t>
             </a:r>
+            <a:endParaRPr sz="800" b="1">
+              <a:solidFill>
+                <a:srgbClr val="8B8A84"/>
+              </a:solidFill>
+              <a:latin typeface="Consolas" panose="020B0609020204030204"/>
+            </a:endParaRPr>
           </a:p>
         </p:txBody>
       </p:sp>
@@ -4674,7 +4734,7 @@
           <a:noFill/>
         </p:spPr>
         <p:txBody>
-          <a:bodyPr wrap="square" lIns="0" rIns="0" tIns="0" bIns="0">
+          <a:bodyPr wrap="square" lIns="0" tIns="0" rIns="0" bIns="0">
             <a:spAutoFit/>
           </a:bodyPr>
           <a:lstStyle/>
@@ -4689,10 +4749,16 @@
                 <a:solidFill>
                   <a:srgbClr val="12120F"/>
                 </a:solidFill>
-                <a:latin typeface="Segoe UI"/>
+                <a:latin typeface="Segoe UI" panose="020B0502040204020203"/>
               </a:rPr>
               <a:t>1 · Cartographier agences et centres de données</a:t>
             </a:r>
+            <a:endParaRPr sz="1100" b="1">
+              <a:solidFill>
+                <a:srgbClr val="12120F"/>
+              </a:solidFill>
+              <a:latin typeface="Segoe UI" panose="020B0502040204020203"/>
+            </a:endParaRPr>
           </a:p>
         </p:txBody>
       </p:sp>
@@ -4713,7 +4779,7 @@
           <a:noFill/>
         </p:spPr>
         <p:txBody>
-          <a:bodyPr wrap="square" lIns="0" rIns="0" tIns="0" bIns="0">
+          <a:bodyPr wrap="square" lIns="0" tIns="0" rIns="0" bIns="0">
             <a:spAutoFit/>
           </a:bodyPr>
           <a:lstStyle/>
@@ -4728,10 +4794,16 @@
                 <a:solidFill>
                   <a:srgbClr val="8B8A84"/>
                 </a:solidFill>
-                <a:latin typeface="Segoe UI"/>
+                <a:latin typeface="Segoe UI" panose="020B0502040204020203"/>
               </a:rPr>
               <a:t>→</a:t>
             </a:r>
+            <a:endParaRPr sz="1600" b="1">
+              <a:solidFill>
+                <a:srgbClr val="8B8A84"/>
+              </a:solidFill>
+              <a:latin typeface="Segoe UI" panose="020B0502040204020203"/>
+            </a:endParaRPr>
           </a:p>
         </p:txBody>
       </p:sp>
@@ -4744,7 +4816,7 @@
         <p:spPr>
           <a:xfrm>
             <a:off x="4224528" y="2029968"/>
-            <a:ext cx="5806440" cy="548640"/>
+            <a:ext cx="5806440" cy="548005"/>
           </a:xfrm>
           <a:prstGeom prst="rect">
             <a:avLst/>
@@ -4752,7 +4824,7 @@
           <a:noFill/>
         </p:spPr>
         <p:txBody>
-          <a:bodyPr wrap="square" lIns="0" rIns="0" tIns="0" bIns="0">
+          <a:bodyPr wrap="square" lIns="0" tIns="0" rIns="0" bIns="0">
             <a:spAutoFit/>
           </a:bodyPr>
           <a:lstStyle/>
@@ -4767,10 +4839,79 @@
                 <a:solidFill>
                   <a:srgbClr val="55544F"/>
                 </a:solidFill>
-                <a:latin typeface="Segoe UI"/>
+                <a:latin typeface="Segoe UI" panose="020B0502040204020203"/>
               </a:rPr>
-              <a:t>90 agences recensées après dédoublonnage, dont 88 actives : 28 Moov et 60 Togocom actives — et 3 centres de données, tous à Lomé. « Télécom » est un doublon ; CANAL+ est vide à la source.</a:t>
-            </a:r>
+              <a:t>90 agences recensées après dédoublonnage, dont 88 actives : 28 Moov et 60 Togocom actives — et 3 centres de données, concentrés dans le Grand Lomé. « Télécom » est un doublon ; CANAL+ est vide à la source.</a:t>
+            </a:r>
+            <a:r>
+              <a:rPr lang="en-US" altLang="fr-FR" sz="950" b="0">
+                <a:solidFill>
+                  <a:srgbClr val="55544F"/>
+                </a:solidFill>
+                <a:latin typeface="Segoe UI" panose="020B0502040204020203"/>
+              </a:rPr>
+              <a:t/>
+            </a:r>
+            <a:r>
+              <a:rPr lang="en-US" altLang="en-US" sz="950" b="0">
+                <a:solidFill>
+                  <a:srgbClr val="55544F"/>
+                </a:solidFill>
+                <a:latin typeface="Segoe UI" panose="020B0502040204020203"/>
+              </a:rPr>
+              <a:t/>
+            </a:r>
+            <a:r>
+              <a:rPr lang="en-US" altLang="fr-FR" sz="950" b="0">
+                <a:solidFill>
+                  <a:srgbClr val="55544F"/>
+                </a:solidFill>
+                <a:latin typeface="Segoe UI" panose="020B0502040204020203"/>
+              </a:rPr>
+              <a:t/>
+            </a:r>
+            <a:r>
+              <a:rPr lang="en-US" altLang="en-US" sz="950" b="0">
+                <a:solidFill>
+                  <a:srgbClr val="55544F"/>
+                </a:solidFill>
+                <a:latin typeface="Segoe UI" panose="020B0502040204020203"/>
+              </a:rPr>
+              <a:t/>
+            </a:r>
+            <a:r>
+              <a:rPr lang="en-US" altLang="fr-FR" sz="950" b="0">
+                <a:solidFill>
+                  <a:srgbClr val="55544F"/>
+                </a:solidFill>
+                <a:latin typeface="Segoe UI" panose="020B0502040204020203"/>
+              </a:rPr>
+              <a:t/>
+            </a:r>
+            <a:r>
+              <a:rPr lang="en-US" altLang="en-US" sz="950" b="0">
+                <a:solidFill>
+                  <a:srgbClr val="55544F"/>
+                </a:solidFill>
+                <a:latin typeface="Segoe UI" panose="020B0502040204020203"/>
+              </a:rPr>
+              <a:t/>
+            </a:r>
+            <a:r>
+              <a:rPr sz="950" b="0">
+                <a:solidFill>
+                  <a:srgbClr val="55544F"/>
+                </a:solidFill>
+                <a:latin typeface="Segoe UI" panose="020B0502040204020203"/>
+              </a:rPr>
+              <a:t/>
+            </a:r>
+            <a:endParaRPr sz="950" b="0">
+              <a:solidFill>
+                <a:srgbClr val="55544F"/>
+              </a:solidFill>
+              <a:latin typeface="Segoe UI" panose="020B0502040204020203"/>
+            </a:endParaRPr>
           </a:p>
         </p:txBody>
       </p:sp>
@@ -4835,7 +4976,7 @@
           <a:noFill/>
         </p:spPr>
         <p:txBody>
-          <a:bodyPr wrap="square" lIns="0" rIns="0" tIns="0" bIns="0">
+          <a:bodyPr wrap="square" lIns="0" tIns="0" rIns="0" bIns="0">
             <a:spAutoFit/>
           </a:bodyPr>
           <a:lstStyle/>
@@ -4850,10 +4991,16 @@
                 <a:solidFill>
                   <a:srgbClr val="FFFFFF"/>
                 </a:solidFill>
-                <a:latin typeface="Consolas"/>
+                <a:latin typeface="Consolas" panose="020B0609020204030204"/>
               </a:rPr>
               <a:t>TRAITÉ</a:t>
             </a:r>
+            <a:endParaRPr sz="800" b="1">
+              <a:solidFill>
+                <a:srgbClr val="FFFFFF"/>
+              </a:solidFill>
+              <a:latin typeface="Consolas" panose="020B0609020204030204"/>
+            </a:endParaRPr>
           </a:p>
         </p:txBody>
       </p:sp>
@@ -4964,7 +5111,7 @@
           <a:noFill/>
         </p:spPr>
         <p:txBody>
-          <a:bodyPr wrap="square" lIns="0" rIns="0" tIns="0" bIns="0">
+          <a:bodyPr wrap="square" lIns="0" tIns="0" rIns="0" bIns="0">
             <a:spAutoFit/>
           </a:bodyPr>
           <a:lstStyle/>
@@ -4979,10 +5126,16 @@
                 <a:solidFill>
                   <a:srgbClr val="12120F"/>
                 </a:solidFill>
-                <a:latin typeface="Segoe UI"/>
+                <a:latin typeface="Segoe UI" panose="020B0502040204020203"/>
               </a:rPr>
               <a:t>2 · Mobile Money au regard de la population</a:t>
             </a:r>
+            <a:endParaRPr sz="1100" b="1">
+              <a:solidFill>
+                <a:srgbClr val="12120F"/>
+              </a:solidFill>
+              <a:latin typeface="Segoe UI" panose="020B0502040204020203"/>
+            </a:endParaRPr>
           </a:p>
         </p:txBody>
       </p:sp>
@@ -5003,7 +5156,7 @@
           <a:noFill/>
         </p:spPr>
         <p:txBody>
-          <a:bodyPr wrap="square" lIns="0" rIns="0" tIns="0" bIns="0">
+          <a:bodyPr wrap="square" lIns="0" tIns="0" rIns="0" bIns="0">
             <a:spAutoFit/>
           </a:bodyPr>
           <a:lstStyle/>
@@ -5018,10 +5171,16 @@
                 <a:solidFill>
                   <a:srgbClr val="8B8A84"/>
                 </a:solidFill>
-                <a:latin typeface="Segoe UI"/>
+                <a:latin typeface="Segoe UI" panose="020B0502040204020203"/>
               </a:rPr>
               <a:t>→</a:t>
             </a:r>
+            <a:endParaRPr sz="1600" b="1">
+              <a:solidFill>
+                <a:srgbClr val="8B8A84"/>
+              </a:solidFill>
+              <a:latin typeface="Segoe UI" panose="020B0502040204020203"/>
+            </a:endParaRPr>
           </a:p>
         </p:txBody>
       </p:sp>
@@ -5042,7 +5201,7 @@
           <a:noFill/>
         </p:spPr>
         <p:txBody>
-          <a:bodyPr wrap="square" lIns="0" rIns="0" tIns="0" bIns="0">
+          <a:bodyPr wrap="square" lIns="0" tIns="0" rIns="0" bIns="0">
             <a:spAutoFit/>
           </a:bodyPr>
           <a:lstStyle/>
@@ -5057,10 +5216,16 @@
                 <a:solidFill>
                   <a:srgbClr val="55544F"/>
                 </a:solidFill>
-                <a:latin typeface="Segoe UI"/>
+                <a:latin typeface="Segoe UI" panose="020B0502040204020203"/>
               </a:rPr>
               <a:t>409 habitants par point en moyenne, de 1 à 12,7 entre préfectures ; la moitié la moins desservie de la population ne dispose que de 27 % des points.</a:t>
             </a:r>
+            <a:endParaRPr sz="950" b="0">
+              <a:solidFill>
+                <a:srgbClr val="55544F"/>
+              </a:solidFill>
+              <a:latin typeface="Segoe UI" panose="020B0502040204020203"/>
+            </a:endParaRPr>
           </a:p>
         </p:txBody>
       </p:sp>
@@ -5125,7 +5290,7 @@
           <a:noFill/>
         </p:spPr>
         <p:txBody>
-          <a:bodyPr wrap="square" lIns="0" rIns="0" tIns="0" bIns="0">
+          <a:bodyPr wrap="square" lIns="0" tIns="0" rIns="0" bIns="0">
             <a:spAutoFit/>
           </a:bodyPr>
           <a:lstStyle/>
@@ -5140,10 +5305,16 @@
                 <a:solidFill>
                   <a:srgbClr val="FFFFFF"/>
                 </a:solidFill>
-                <a:latin typeface="Consolas"/>
+                <a:latin typeface="Consolas" panose="020B0609020204030204"/>
               </a:rPr>
               <a:t>TRAITÉ</a:t>
             </a:r>
+            <a:endParaRPr sz="800" b="1">
+              <a:solidFill>
+                <a:srgbClr val="FFFFFF"/>
+              </a:solidFill>
+              <a:latin typeface="Consolas" panose="020B0609020204030204"/>
+            </a:endParaRPr>
           </a:p>
         </p:txBody>
       </p:sp>
@@ -5254,7 +5425,7 @@
           <a:noFill/>
         </p:spPr>
         <p:txBody>
-          <a:bodyPr wrap="square" lIns="0" rIns="0" tIns="0" bIns="0">
+          <a:bodyPr wrap="square" lIns="0" tIns="0" rIns="0" bIns="0">
             <a:spAutoFit/>
           </a:bodyPr>
           <a:lstStyle/>
@@ -5269,10 +5440,16 @@
                 <a:solidFill>
                   <a:srgbClr val="12120F"/>
                 </a:solidFill>
-                <a:latin typeface="Segoe UI"/>
+                <a:latin typeface="Segoe UI" panose="020B0502040204020203"/>
               </a:rPr>
               <a:t>3 · Infrastructures et densité démographique</a:t>
             </a:r>
+            <a:endParaRPr sz="1100" b="1">
+              <a:solidFill>
+                <a:srgbClr val="12120F"/>
+              </a:solidFill>
+              <a:latin typeface="Segoe UI" panose="020B0502040204020203"/>
+            </a:endParaRPr>
           </a:p>
         </p:txBody>
       </p:sp>
@@ -5293,7 +5470,7 @@
           <a:noFill/>
         </p:spPr>
         <p:txBody>
-          <a:bodyPr wrap="square" lIns="0" rIns="0" tIns="0" bIns="0">
+          <a:bodyPr wrap="square" lIns="0" tIns="0" rIns="0" bIns="0">
             <a:spAutoFit/>
           </a:bodyPr>
           <a:lstStyle/>
@@ -5308,10 +5485,16 @@
                 <a:solidFill>
                   <a:srgbClr val="8B8A84"/>
                 </a:solidFill>
-                <a:latin typeface="Segoe UI"/>
+                <a:latin typeface="Segoe UI" panose="020B0502040204020203"/>
               </a:rPr>
               <a:t>→</a:t>
             </a:r>
+            <a:endParaRPr sz="1600" b="1">
+              <a:solidFill>
+                <a:srgbClr val="8B8A84"/>
+              </a:solidFill>
+              <a:latin typeface="Segoe UI" panose="020B0502040204020203"/>
+            </a:endParaRPr>
           </a:p>
         </p:txBody>
       </p:sp>
@@ -5332,7 +5515,7 @@
           <a:noFill/>
         </p:spPr>
         <p:txBody>
-          <a:bodyPr wrap="square" lIns="0" rIns="0" tIns="0" bIns="0">
+          <a:bodyPr wrap="square" lIns="0" tIns="0" rIns="0" bIns="0">
             <a:spAutoFit/>
           </a:bodyPr>
           <a:lstStyle/>
@@ -5347,10 +5530,16 @@
                 <a:solidFill>
                   <a:srgbClr val="55544F"/>
                 </a:solidFill>
-                <a:latin typeface="Segoe UI"/>
+                <a:latin typeface="Segoe UI" panose="020B0502040204020203"/>
               </a:rPr>
               <a:t>12 préfectures peuplées et sous-desservies. La densité n'explique que 12 % des écarts d'équipement : le déficit n'est pas la fatalité d'un territoire rural.</a:t>
             </a:r>
+            <a:endParaRPr sz="950" b="0">
+              <a:solidFill>
+                <a:srgbClr val="55544F"/>
+              </a:solidFill>
+              <a:latin typeface="Segoe UI" panose="020B0502040204020203"/>
+            </a:endParaRPr>
           </a:p>
         </p:txBody>
       </p:sp>
@@ -5415,7 +5604,7 @@
           <a:noFill/>
         </p:spPr>
         <p:txBody>
-          <a:bodyPr wrap="square" lIns="0" rIns="0" tIns="0" bIns="0">
+          <a:bodyPr wrap="square" lIns="0" tIns="0" rIns="0" bIns="0">
             <a:spAutoFit/>
           </a:bodyPr>
           <a:lstStyle/>
@@ -5430,10 +5619,16 @@
                 <a:solidFill>
                   <a:srgbClr val="FFFFFF"/>
                 </a:solidFill>
-                <a:latin typeface="Consolas"/>
+                <a:latin typeface="Consolas" panose="020B0609020204030204"/>
               </a:rPr>
               <a:t>TRAITÉ</a:t>
             </a:r>
+            <a:endParaRPr sz="800" b="1">
+              <a:solidFill>
+                <a:srgbClr val="FFFFFF"/>
+              </a:solidFill>
+              <a:latin typeface="Consolas" panose="020B0609020204030204"/>
+            </a:endParaRPr>
           </a:p>
         </p:txBody>
       </p:sp>
@@ -5544,7 +5739,7 @@
           <a:noFill/>
         </p:spPr>
         <p:txBody>
-          <a:bodyPr wrap="square" lIns="0" rIns="0" tIns="0" bIns="0">
+          <a:bodyPr wrap="square" lIns="0" tIns="0" rIns="0" bIns="0">
             <a:spAutoFit/>
           </a:bodyPr>
           <a:lstStyle/>
@@ -5559,10 +5754,16 @@
                 <a:solidFill>
                   <a:srgbClr val="12120F"/>
                 </a:solidFill>
-                <a:latin typeface="Segoe UI"/>
+                <a:latin typeface="Segoe UI" panose="020B0502040204020203"/>
               </a:rPr>
               <a:t>4 · Couverture réseau et zones blanches</a:t>
             </a:r>
+            <a:endParaRPr sz="1100" b="1">
+              <a:solidFill>
+                <a:srgbClr val="12120F"/>
+              </a:solidFill>
+              <a:latin typeface="Segoe UI" panose="020B0502040204020203"/>
+            </a:endParaRPr>
           </a:p>
         </p:txBody>
       </p:sp>
@@ -5583,7 +5784,7 @@
           <a:noFill/>
         </p:spPr>
         <p:txBody>
-          <a:bodyPr wrap="square" lIns="0" rIns="0" tIns="0" bIns="0">
+          <a:bodyPr wrap="square" lIns="0" tIns="0" rIns="0" bIns="0">
             <a:spAutoFit/>
           </a:bodyPr>
           <a:lstStyle/>
@@ -5598,10 +5799,16 @@
                 <a:solidFill>
                   <a:srgbClr val="8B8A84"/>
                 </a:solidFill>
-                <a:latin typeface="Segoe UI"/>
+                <a:latin typeface="Segoe UI" panose="020B0502040204020203"/>
               </a:rPr>
               <a:t>→</a:t>
             </a:r>
+            <a:endParaRPr sz="1600" b="1">
+              <a:solidFill>
+                <a:srgbClr val="8B8A84"/>
+              </a:solidFill>
+              <a:latin typeface="Segoe UI" panose="020B0502040204020203"/>
+            </a:endParaRPr>
           </a:p>
         </p:txBody>
       </p:sp>
@@ -5622,7 +5829,7 @@
           <a:noFill/>
         </p:spPr>
         <p:txBody>
-          <a:bodyPr wrap="square" lIns="0" rIns="0" tIns="0" bIns="0">
+          <a:bodyPr wrap="square" lIns="0" tIns="0" rIns="0" bIns="0">
             <a:spAutoFit/>
           </a:bodyPr>
           <a:lstStyle/>
@@ -5637,10 +5844,16 @@
                 <a:solidFill>
                   <a:srgbClr val="12120F"/>
                 </a:solidFill>
-                <a:latin typeface="Segoe UI"/>
+                <a:latin typeface="Segoe UI" panose="020B0502040204020203"/>
               </a:rPr>
               <a:t>Non mesurable avec les données ouvertes disponibles — couches antennes hors open data. Traitée comme limite critique et besoin prioritaire de données. Proxy déclaré : 41 cantons à investiguer, dont 22 sans aucun agent Mobile Money.</a:t>
             </a:r>
+            <a:endParaRPr sz="950" b="1">
+              <a:solidFill>
+                <a:srgbClr val="12120F"/>
+              </a:solidFill>
+              <a:latin typeface="Segoe UI" panose="020B0502040204020203"/>
+            </a:endParaRPr>
           </a:p>
         </p:txBody>
       </p:sp>
@@ -5705,7 +5918,7 @@
           <a:noFill/>
         </p:spPr>
         <p:txBody>
-          <a:bodyPr wrap="square" lIns="0" rIns="0" tIns="0" bIns="0">
+          <a:bodyPr wrap="square" lIns="0" tIns="0" rIns="0" bIns="0">
             <a:spAutoFit/>
           </a:bodyPr>
           <a:lstStyle/>
@@ -5720,10 +5933,16 @@
                 <a:solidFill>
                   <a:srgbClr val="FFFFFF"/>
                 </a:solidFill>
-                <a:latin typeface="Consolas"/>
+                <a:latin typeface="Consolas" panose="020B0609020204030204"/>
               </a:rPr>
               <a:t>LIMITE CRITIQUE</a:t>
             </a:r>
+            <a:endParaRPr sz="800" b="1">
+              <a:solidFill>
+                <a:srgbClr val="FFFFFF"/>
+              </a:solidFill>
+              <a:latin typeface="Consolas" panose="020B0609020204030204"/>
+            </a:endParaRPr>
           </a:p>
         </p:txBody>
       </p:sp>
@@ -5834,7 +6053,7 @@
           <a:noFill/>
         </p:spPr>
         <p:txBody>
-          <a:bodyPr wrap="square" lIns="0" rIns="0" tIns="0" bIns="0">
+          <a:bodyPr wrap="square" lIns="0" tIns="0" rIns="0" bIns="0">
             <a:spAutoFit/>
           </a:bodyPr>
           <a:lstStyle/>
@@ -5849,10 +6068,16 @@
                 <a:solidFill>
                   <a:srgbClr val="12120F"/>
                 </a:solidFill>
-                <a:latin typeface="Segoe UI"/>
+                <a:latin typeface="Segoe UI" panose="020B0502040204020203"/>
               </a:rPr>
               <a:t>5 · Prioriser les investissements</a:t>
             </a:r>
+            <a:endParaRPr sz="1100" b="1">
+              <a:solidFill>
+                <a:srgbClr val="12120F"/>
+              </a:solidFill>
+              <a:latin typeface="Segoe UI" panose="020B0502040204020203"/>
+            </a:endParaRPr>
           </a:p>
         </p:txBody>
       </p:sp>
@@ -5873,7 +6098,7 @@
           <a:noFill/>
         </p:spPr>
         <p:txBody>
-          <a:bodyPr wrap="square" lIns="0" rIns="0" tIns="0" bIns="0">
+          <a:bodyPr wrap="square" lIns="0" tIns="0" rIns="0" bIns="0">
             <a:spAutoFit/>
           </a:bodyPr>
           <a:lstStyle/>
@@ -5888,10 +6113,16 @@
                 <a:solidFill>
                   <a:srgbClr val="8B8A84"/>
                 </a:solidFill>
-                <a:latin typeface="Segoe UI"/>
+                <a:latin typeface="Segoe UI" panose="020B0502040204020203"/>
               </a:rPr>
               <a:t>→</a:t>
             </a:r>
+            <a:endParaRPr sz="1600" b="1">
+              <a:solidFill>
+                <a:srgbClr val="8B8A84"/>
+              </a:solidFill>
+              <a:latin typeface="Segoe UI" panose="020B0502040204020203"/>
+            </a:endParaRPr>
           </a:p>
         </p:txBody>
       </p:sp>
@@ -5912,7 +6143,7 @@
           <a:noFill/>
         </p:spPr>
         <p:txBody>
-          <a:bodyPr wrap="square" lIns="0" rIns="0" tIns="0" bIns="0">
+          <a:bodyPr wrap="square" lIns="0" tIns="0" rIns="0" bIns="0">
             <a:spAutoFit/>
           </a:bodyPr>
           <a:lstStyle/>
@@ -5927,10 +6158,16 @@
                 <a:solidFill>
                   <a:srgbClr val="55544F"/>
                 </a:solidFill>
-                <a:latin typeface="Segoe UI"/>
+                <a:latin typeface="Segoe UI" panose="020B0502040204020203"/>
               </a:rPr>
               <a:t>9 préfectures stables sur 2 000 pondérations (corrélation 0,971), 1 080 723 habitants : Kpendjal, Mô, Est-Mono, Akébou, Yoto…</a:t>
             </a:r>
+            <a:endParaRPr sz="950" b="0">
+              <a:solidFill>
+                <a:srgbClr val="55544F"/>
+              </a:solidFill>
+              <a:latin typeface="Segoe UI" panose="020B0502040204020203"/>
+            </a:endParaRPr>
           </a:p>
         </p:txBody>
       </p:sp>
@@ -5995,7 +6232,7 @@
           <a:noFill/>
         </p:spPr>
         <p:txBody>
-          <a:bodyPr wrap="square" lIns="0" rIns="0" tIns="0" bIns="0">
+          <a:bodyPr wrap="square" lIns="0" tIns="0" rIns="0" bIns="0">
             <a:spAutoFit/>
           </a:bodyPr>
           <a:lstStyle/>
@@ -6010,10 +6247,16 @@
                 <a:solidFill>
                   <a:srgbClr val="FFFFFF"/>
                 </a:solidFill>
-                <a:latin typeface="Consolas"/>
+                <a:latin typeface="Consolas" panose="020B0609020204030204"/>
               </a:rPr>
               <a:t>TRAITÉ</a:t>
             </a:r>
+            <a:endParaRPr sz="800" b="1">
+              <a:solidFill>
+                <a:srgbClr val="FFFFFF"/>
+              </a:solidFill>
+              <a:latin typeface="Consolas" panose="020B0609020204030204"/>
+            </a:endParaRPr>
           </a:p>
         </p:txBody>
       </p:sp>
@@ -6034,7 +6277,7 @@
           <a:noFill/>
         </p:spPr>
         <p:txBody>
-          <a:bodyPr wrap="square" lIns="0" rIns="0" tIns="0" bIns="0">
+          <a:bodyPr wrap="square" lIns="0" tIns="0" rIns="0" bIns="0">
             <a:spAutoFit/>
           </a:bodyPr>
           <a:lstStyle/>
@@ -6049,10 +6292,16 @@
                 <a:solidFill>
                   <a:srgbClr val="0F4D3B"/>
                 </a:solidFill>
-                <a:latin typeface="Segoe UI"/>
+                <a:latin typeface="Segoe UI" panose="020B0502040204020203"/>
               </a:rPr>
               <a:t>Première recommandation au producteur de données : ouvrir les couches « Tours télécoms » du catalogue national, pour transformer les zones suspectes en zones blanches confirmées ou écartées.</a:t>
             </a:r>
+            <a:endParaRPr sz="1000" b="1">
+              <a:solidFill>
+                <a:srgbClr val="0F4D3B"/>
+              </a:solidFill>
+              <a:latin typeface="Segoe UI" panose="020B0502040204020203"/>
+            </a:endParaRPr>
           </a:p>
         </p:txBody>
       </p:sp>
@@ -6065,7 +6314,7 @@
 </file>
 
 <file path=ppt/slides/slide2.xml><?xml version="1.0" encoding="utf-8"?>
-<p:sld xmlns:a="http://schemas.openxmlformats.org/drawingml/2006/main" xmlns:p="http://schemas.openxmlformats.org/presentationml/2006/main" xmlns:r="http://schemas.openxmlformats.org/officeDocument/2006/relationships">
+<p:sld xmlns:a="http://schemas.openxmlformats.org/drawingml/2006/main" xmlns:r="http://schemas.openxmlformats.org/officeDocument/2006/relationships" xmlns:p="http://schemas.openxmlformats.org/presentationml/2006/main">
   <p:cSld>
     <p:spTree>
       <p:nvGrpSpPr>
@@ -6267,7 +6516,7 @@
           <a:noFill/>
         </p:spPr>
         <p:txBody>
-          <a:bodyPr wrap="square" lIns="0" rIns="0" tIns="0" bIns="0">
+          <a:bodyPr wrap="square" lIns="0" tIns="0" rIns="0" bIns="0">
             <a:spAutoFit/>
           </a:bodyPr>
           <a:lstStyle/>
@@ -6282,10 +6531,16 @@
                 <a:solidFill>
                   <a:srgbClr val="8B8A84"/>
                 </a:solidFill>
-                <a:latin typeface="Consolas"/>
+                <a:latin typeface="Consolas" panose="020B0609020204030204"/>
               </a:rPr>
               <a:t>DÉFI ÉCONOMIE NUMÉRIQUE · TOGO</a:t>
             </a:r>
+            <a:endParaRPr sz="900" b="1">
+              <a:solidFill>
+                <a:srgbClr val="8B8A84"/>
+              </a:solidFill>
+              <a:latin typeface="Consolas" panose="020B0609020204030204"/>
+            </a:endParaRPr>
           </a:p>
         </p:txBody>
       </p:sp>
@@ -6306,7 +6561,7 @@
           <a:noFill/>
         </p:spPr>
         <p:txBody>
-          <a:bodyPr wrap="square" lIns="0" rIns="0" tIns="0" bIns="0">
+          <a:bodyPr wrap="square" lIns="0" tIns="0" rIns="0" bIns="0">
             <a:spAutoFit/>
           </a:bodyPr>
           <a:lstStyle/>
@@ -6321,10 +6576,16 @@
                 <a:solidFill>
                   <a:srgbClr val="12120F"/>
                 </a:solidFill>
-                <a:latin typeface="Segoe UI"/>
+                <a:latin typeface="Segoe UI" panose="020B0502040204020203"/>
               </a:rPr>
               <a:t>Problématique et enjeux</a:t>
             </a:r>
+            <a:endParaRPr sz="2800" b="1">
+              <a:solidFill>
+                <a:srgbClr val="12120F"/>
+              </a:solidFill>
+              <a:latin typeface="Segoe UI" panose="020B0502040204020203"/>
+            </a:endParaRPr>
           </a:p>
         </p:txBody>
       </p:sp>
@@ -6433,7 +6694,7 @@
           <a:noFill/>
         </p:spPr>
         <p:txBody>
-          <a:bodyPr wrap="square" lIns="0" rIns="0" tIns="0" bIns="0">
+          <a:bodyPr wrap="square" lIns="0" tIns="0" rIns="0" bIns="0">
             <a:spAutoFit/>
           </a:bodyPr>
           <a:lstStyle/>
@@ -6448,10 +6709,16 @@
                 <a:solidFill>
                   <a:srgbClr val="0F4D3B"/>
                 </a:solidFill>
-                <a:latin typeface="Segoe UI"/>
+                <a:latin typeface="Segoe UI" panose="020B0502040204020203"/>
               </a:rPr>
               <a:t>L'accès aux services numériques au Togo n'est pas faible partout : il est très inégal — et l'inégalité se mesure.</a:t>
             </a:r>
+            <a:endParaRPr sz="1350" b="1">
+              <a:solidFill>
+                <a:srgbClr val="0F4D3B"/>
+              </a:solidFill>
+              <a:latin typeface="Segoe UI" panose="020B0502040204020203"/>
+            </a:endParaRPr>
           </a:p>
         </p:txBody>
       </p:sp>
@@ -6516,7 +6783,7 @@
           <a:noFill/>
         </p:spPr>
         <p:txBody>
-          <a:bodyPr wrap="square" lIns="0" rIns="0" tIns="0" bIns="0">
+          <a:bodyPr wrap="square" lIns="0" tIns="0" rIns="0" bIns="0">
             <a:spAutoFit/>
           </a:bodyPr>
           <a:lstStyle/>
@@ -6531,10 +6798,16 @@
                 <a:solidFill>
                   <a:srgbClr val="8B8A84"/>
                 </a:solidFill>
-                <a:latin typeface="Consolas"/>
+                <a:latin typeface="Consolas" panose="020B0609020204030204"/>
               </a:rPr>
               <a:t>République togolaise · Défi Économie numérique · Données ouvertes PRISE 2021-2022, RGPH-5 2022, COD-AB 2021</a:t>
             </a:r>
+            <a:endParaRPr sz="800" b="0">
+              <a:solidFill>
+                <a:srgbClr val="8B8A84"/>
+              </a:solidFill>
+              <a:latin typeface="Consolas" panose="020B0609020204030204"/>
+            </a:endParaRPr>
           </a:p>
         </p:txBody>
       </p:sp>
@@ -6555,7 +6828,7 @@
           <a:noFill/>
         </p:spPr>
         <p:txBody>
-          <a:bodyPr wrap="square" lIns="0" rIns="0" tIns="0" bIns="0">
+          <a:bodyPr wrap="square" lIns="0" tIns="0" rIns="0" bIns="0">
             <a:spAutoFit/>
           </a:bodyPr>
           <a:lstStyle/>
@@ -6570,10 +6843,16 @@
                 <a:solidFill>
                   <a:srgbClr val="8B8A84"/>
                 </a:solidFill>
-                <a:latin typeface="Consolas"/>
+                <a:latin typeface="Consolas" panose="020B0609020204030204"/>
               </a:rPr>
               <a:t>02 / 10</a:t>
             </a:r>
+            <a:endParaRPr sz="800" b="1">
+              <a:solidFill>
+                <a:srgbClr val="8B8A84"/>
+              </a:solidFill>
+              <a:latin typeface="Consolas" panose="020B0609020204030204"/>
+            </a:endParaRPr>
           </a:p>
         </p:txBody>
       </p:sp>
@@ -6594,7 +6873,7 @@
           <a:noFill/>
         </p:spPr>
         <p:txBody>
-          <a:bodyPr wrap="square" lIns="0" rIns="0" tIns="0" bIns="0">
+          <a:bodyPr wrap="square" lIns="0" tIns="0" rIns="0" bIns="0">
             <a:spAutoFit/>
           </a:bodyPr>
           <a:lstStyle/>
@@ -6609,10 +6888,16 @@
                 <a:solidFill>
                   <a:srgbClr val="12120F"/>
                 </a:solidFill>
-                <a:latin typeface="Segoe UI"/>
+                <a:latin typeface="Segoe UI" panose="020B0502040204020203"/>
               </a:rPr>
               <a:t>Où faut-il investir en priorité pour réduire les inégalités d'accès aux télécommunications et aux services numériques au Togo, et pourquoi ?</a:t>
             </a:r>
+            <a:endParaRPr sz="1700" b="1">
+              <a:solidFill>
+                <a:srgbClr val="12120F"/>
+              </a:solidFill>
+              <a:latin typeface="Segoe UI" panose="020B0502040204020203"/>
+            </a:endParaRPr>
           </a:p>
         </p:txBody>
       </p:sp>
@@ -6677,7 +6962,7 @@
           <a:noFill/>
         </p:spPr>
         <p:txBody>
-          <a:bodyPr wrap="square" lIns="0" rIns="0" tIns="0" bIns="0">
+          <a:bodyPr wrap="square" lIns="0" tIns="0" rIns="0" bIns="0">
             <a:spAutoFit/>
           </a:bodyPr>
           <a:lstStyle/>
@@ -6692,10 +6977,16 @@
                 <a:solidFill>
                   <a:srgbClr val="12120F"/>
                 </a:solidFill>
-                <a:latin typeface="Segoe UI"/>
+                <a:latin typeface="Segoe UI" panose="020B0502040204020203"/>
               </a:rPr>
               <a:t>Une moyenne nationale ne suffit pas à décider</a:t>
             </a:r>
+            <a:endParaRPr sz="1100" b="1">
+              <a:solidFill>
+                <a:srgbClr val="12120F"/>
+              </a:solidFill>
+              <a:latin typeface="Segoe UI" panose="020B0502040204020203"/>
+            </a:endParaRPr>
           </a:p>
         </p:txBody>
       </p:sp>
@@ -6716,7 +7007,7 @@
           <a:noFill/>
         </p:spPr>
         <p:txBody>
-          <a:bodyPr wrap="square" lIns="0" rIns="0" tIns="0" bIns="0">
+          <a:bodyPr wrap="square" lIns="0" tIns="0" rIns="0" bIns="0">
             <a:spAutoFit/>
           </a:bodyPr>
           <a:lstStyle/>
@@ -6731,10 +7022,16 @@
                 <a:solidFill>
                   <a:srgbClr val="55544F"/>
                 </a:solidFill>
-                <a:latin typeface="Segoe UI"/>
+                <a:latin typeface="Segoe UI" panose="020B0502040204020203"/>
               </a:rPr>
               <a:t>409 habitants par point Mobile Money en moyenne — mais un rapport de 1 à 12,7 entre préfectures. Agir « partout » revient à n'agir nulle part en priorité.</a:t>
             </a:r>
+            <a:endParaRPr sz="950" b="0">
+              <a:solidFill>
+                <a:srgbClr val="55544F"/>
+              </a:solidFill>
+              <a:latin typeface="Segoe UI" panose="020B0502040204020203"/>
+            </a:endParaRPr>
           </a:p>
         </p:txBody>
       </p:sp>
@@ -6799,7 +7096,7 @@
           <a:noFill/>
         </p:spPr>
         <p:txBody>
-          <a:bodyPr wrap="square" lIns="0" rIns="0" tIns="0" bIns="0">
+          <a:bodyPr wrap="square" lIns="0" tIns="0" rIns="0" bIns="0">
             <a:spAutoFit/>
           </a:bodyPr>
           <a:lstStyle/>
@@ -6814,10 +7111,16 @@
                 <a:solidFill>
                   <a:srgbClr val="12120F"/>
                 </a:solidFill>
-                <a:latin typeface="Segoe UI"/>
+                <a:latin typeface="Segoe UI" panose="020B0502040204020203"/>
               </a:rPr>
               <a:t>Un déficit se prouve, il ne se déclare pas</a:t>
             </a:r>
+            <a:endParaRPr sz="1100" b="1">
+              <a:solidFill>
+                <a:srgbClr val="12120F"/>
+              </a:solidFill>
+              <a:latin typeface="Segoe UI" panose="020B0502040204020203"/>
+            </a:endParaRPr>
           </a:p>
         </p:txBody>
       </p:sp>
@@ -6838,7 +7141,7 @@
           <a:noFill/>
         </p:spPr>
         <p:txBody>
-          <a:bodyPr wrap="square" lIns="0" rIns="0" tIns="0" bIns="0">
+          <a:bodyPr wrap="square" lIns="0" tIns="0" rIns="0" bIns="0">
             <a:spAutoFit/>
           </a:bodyPr>
           <a:lstStyle/>
@@ -6853,10 +7156,16 @@
                 <a:solidFill>
                   <a:srgbClr val="55544F"/>
                 </a:solidFill>
-                <a:latin typeface="Segoe UI"/>
+                <a:latin typeface="Segoe UI" panose="020B0502040204020203"/>
               </a:rPr>
               <a:t>Affirmer qu'un territoire est sous-desservi exige un dénominateur : la population. Sans elle, un faible comptage peut simplement refléter une faible démographie.</a:t>
             </a:r>
+            <a:endParaRPr sz="950" b="0">
+              <a:solidFill>
+                <a:srgbClr val="55544F"/>
+              </a:solidFill>
+              <a:latin typeface="Segoe UI" panose="020B0502040204020203"/>
+            </a:endParaRPr>
           </a:p>
         </p:txBody>
       </p:sp>
@@ -6921,7 +7230,7 @@
           <a:noFill/>
         </p:spPr>
         <p:txBody>
-          <a:bodyPr wrap="square" lIns="0" rIns="0" tIns="0" bIns="0">
+          <a:bodyPr wrap="square" lIns="0" tIns="0" rIns="0" bIns="0">
             <a:spAutoFit/>
           </a:bodyPr>
           <a:lstStyle/>
@@ -6936,10 +7245,16 @@
                 <a:solidFill>
                   <a:srgbClr val="12120F"/>
                 </a:solidFill>
-                <a:latin typeface="Segoe UI"/>
+                <a:latin typeface="Segoe UI" panose="020B0502040204020203"/>
               </a:rPr>
               <a:t>Une priorisation doit résister à la contestation</a:t>
             </a:r>
+            <a:endParaRPr sz="1100" b="1">
+              <a:solidFill>
+                <a:srgbClr val="12120F"/>
+              </a:solidFill>
+              <a:latin typeface="Segoe UI" panose="020B0502040204020203"/>
+            </a:endParaRPr>
           </a:p>
         </p:txBody>
       </p:sp>
@@ -6960,7 +7275,7 @@
           <a:noFill/>
         </p:spPr>
         <p:txBody>
-          <a:bodyPr wrap="square" lIns="0" rIns="0" tIns="0" bIns="0">
+          <a:bodyPr wrap="square" lIns="0" tIns="0" rIns="0" bIns="0">
             <a:spAutoFit/>
           </a:bodyPr>
           <a:lstStyle/>
@@ -6975,10 +7290,16 @@
                 <a:solidFill>
                   <a:srgbClr val="55544F"/>
                 </a:solidFill>
-                <a:latin typeface="Segoe UI"/>
+                <a:latin typeface="Segoe UI" panose="020B0502040204020203"/>
               </a:rPr>
               <a:t>Un classement dépendant de pondérations arbitraires n'est pas défendable. Il doit être testé, et sa stabilité publiée.</a:t>
             </a:r>
+            <a:endParaRPr sz="950" b="0">
+              <a:solidFill>
+                <a:srgbClr val="55544F"/>
+              </a:solidFill>
+              <a:latin typeface="Segoe UI" panose="020B0502040204020203"/>
+            </a:endParaRPr>
           </a:p>
         </p:txBody>
       </p:sp>
@@ -7089,7 +7410,7 @@
           <a:noFill/>
         </p:spPr>
         <p:txBody>
-          <a:bodyPr wrap="square" lIns="0" rIns="0" tIns="0" bIns="0">
+          <a:bodyPr wrap="square" lIns="0" tIns="0" rIns="0" bIns="0">
             <a:spAutoFit/>
           </a:bodyPr>
           <a:lstStyle/>
@@ -7104,10 +7425,16 @@
                 <a:solidFill>
                   <a:srgbClr val="8B8A84"/>
                 </a:solidFill>
-                <a:latin typeface="Consolas"/>
+                <a:latin typeface="Consolas" panose="020B0609020204030204"/>
               </a:rPr>
               <a:t>POPULATION RÉSIDENTE</a:t>
             </a:r>
+            <a:endParaRPr sz="750" b="1">
+              <a:solidFill>
+                <a:srgbClr val="8B8A84"/>
+              </a:solidFill>
+              <a:latin typeface="Consolas" panose="020B0609020204030204"/>
+            </a:endParaRPr>
           </a:p>
         </p:txBody>
       </p:sp>
@@ -7128,7 +7455,7 @@
           <a:noFill/>
         </p:spPr>
         <p:txBody>
-          <a:bodyPr wrap="square" lIns="0" rIns="0" tIns="0" bIns="0">
+          <a:bodyPr wrap="square" lIns="0" tIns="0" rIns="0" bIns="0">
             <a:spAutoFit/>
           </a:bodyPr>
           <a:lstStyle/>
@@ -7143,10 +7470,16 @@
                 <a:solidFill>
                   <a:srgbClr val="12120F"/>
                 </a:solidFill>
-                <a:latin typeface="Segoe UI"/>
+                <a:latin typeface="Segoe UI" panose="020B0502040204020203"/>
               </a:rPr>
               <a:t>8 095 498</a:t>
             </a:r>
+            <a:endParaRPr sz="2300" b="1">
+              <a:solidFill>
+                <a:srgbClr val="12120F"/>
+              </a:solidFill>
+              <a:latin typeface="Segoe UI" panose="020B0502040204020203"/>
+            </a:endParaRPr>
           </a:p>
         </p:txBody>
       </p:sp>
@@ -7167,7 +7500,7 @@
           <a:noFill/>
         </p:spPr>
         <p:txBody>
-          <a:bodyPr wrap="square" lIns="0" rIns="0" tIns="0" bIns="0">
+          <a:bodyPr wrap="square" lIns="0" tIns="0" rIns="0" bIns="0">
             <a:spAutoFit/>
           </a:bodyPr>
           <a:lstStyle/>
@@ -7182,10 +7515,16 @@
                 <a:solidFill>
                   <a:srgbClr val="55544F"/>
                 </a:solidFill>
-                <a:latin typeface="Segoe UI"/>
+                <a:latin typeface="Segoe UI" panose="020B0502040204020203"/>
               </a:rPr>
               <a:t>RGPH-5 · novembre 2022</a:t>
             </a:r>
+            <a:endParaRPr sz="800" b="0">
+              <a:solidFill>
+                <a:srgbClr val="55544F"/>
+              </a:solidFill>
+              <a:latin typeface="Segoe UI" panose="020B0502040204020203"/>
+            </a:endParaRPr>
           </a:p>
         </p:txBody>
       </p:sp>
@@ -7296,7 +7635,7 @@
           <a:noFill/>
         </p:spPr>
         <p:txBody>
-          <a:bodyPr wrap="square" lIns="0" rIns="0" tIns="0" bIns="0">
+          <a:bodyPr wrap="square" lIns="0" tIns="0" rIns="0" bIns="0">
             <a:spAutoFit/>
           </a:bodyPr>
           <a:lstStyle/>
@@ -7311,10 +7650,16 @@
                 <a:solidFill>
                   <a:srgbClr val="8B8A84"/>
                 </a:solidFill>
-                <a:latin typeface="Consolas"/>
+                <a:latin typeface="Consolas" panose="020B0609020204030204"/>
               </a:rPr>
               <a:t>POINTS DE SERVICE RECENSÉS</a:t>
             </a:r>
+            <a:endParaRPr sz="750" b="1">
+              <a:solidFill>
+                <a:srgbClr val="8B8A84"/>
+              </a:solidFill>
+              <a:latin typeface="Consolas" panose="020B0609020204030204"/>
+            </a:endParaRPr>
           </a:p>
         </p:txBody>
       </p:sp>
@@ -7335,7 +7680,7 @@
           <a:noFill/>
         </p:spPr>
         <p:txBody>
-          <a:bodyPr wrap="square" lIns="0" rIns="0" tIns="0" bIns="0">
+          <a:bodyPr wrap="square" lIns="0" tIns="0" rIns="0" bIns="0">
             <a:spAutoFit/>
           </a:bodyPr>
           <a:lstStyle/>
@@ -7350,10 +7695,16 @@
                 <a:solidFill>
                   <a:srgbClr val="12120F"/>
                 </a:solidFill>
-                <a:latin typeface="Segoe UI"/>
+                <a:latin typeface="Segoe UI" panose="020B0502040204020203"/>
               </a:rPr>
               <a:t>19 788</a:t>
             </a:r>
+            <a:endParaRPr sz="2300" b="1">
+              <a:solidFill>
+                <a:srgbClr val="12120F"/>
+              </a:solidFill>
+              <a:latin typeface="Segoe UI" panose="020B0502040204020203"/>
+            </a:endParaRPr>
           </a:p>
         </p:txBody>
       </p:sp>
@@ -7374,7 +7725,7 @@
           <a:noFill/>
         </p:spPr>
         <p:txBody>
-          <a:bodyPr wrap="square" lIns="0" rIns="0" tIns="0" bIns="0">
+          <a:bodyPr wrap="square" lIns="0" tIns="0" rIns="0" bIns="0">
             <a:spAutoFit/>
           </a:bodyPr>
           <a:lstStyle/>
@@ -7389,10 +7740,16 @@
                 <a:solidFill>
                   <a:srgbClr val="55544F"/>
                 </a:solidFill>
-                <a:latin typeface="Segoe UI"/>
+                <a:latin typeface="Segoe UI" panose="020B0502040204020203"/>
               </a:rPr>
               <a:t>tous géolocalisés</a:t>
             </a:r>
+            <a:endParaRPr sz="800" b="0">
+              <a:solidFill>
+                <a:srgbClr val="55544F"/>
+              </a:solidFill>
+              <a:latin typeface="Segoe UI" panose="020B0502040204020203"/>
+            </a:endParaRPr>
           </a:p>
         </p:txBody>
       </p:sp>
@@ -7503,7 +7860,7 @@
           <a:noFill/>
         </p:spPr>
         <p:txBody>
-          <a:bodyPr wrap="square" lIns="0" rIns="0" tIns="0" bIns="0">
+          <a:bodyPr wrap="square" lIns="0" tIns="0" rIns="0" bIns="0">
             <a:spAutoFit/>
           </a:bodyPr>
           <a:lstStyle/>
@@ -7518,10 +7875,16 @@
                 <a:solidFill>
                   <a:srgbClr val="8B8A84"/>
                 </a:solidFill>
-                <a:latin typeface="Consolas"/>
+                <a:latin typeface="Consolas" panose="020B0609020204030204"/>
               </a:rPr>
               <a:t>PRÉFECTURES SANS AGENCE ACTIVE</a:t>
             </a:r>
+            <a:endParaRPr sz="750" b="1">
+              <a:solidFill>
+                <a:srgbClr val="8B8A84"/>
+              </a:solidFill>
+              <a:latin typeface="Consolas" panose="020B0609020204030204"/>
+            </a:endParaRPr>
           </a:p>
         </p:txBody>
       </p:sp>
@@ -7542,7 +7905,7 @@
           <a:noFill/>
         </p:spPr>
         <p:txBody>
-          <a:bodyPr wrap="square" lIns="0" rIns="0" tIns="0" bIns="0">
+          <a:bodyPr wrap="square" lIns="0" tIns="0" rIns="0" bIns="0">
             <a:spAutoFit/>
           </a:bodyPr>
           <a:lstStyle/>
@@ -7557,10 +7920,16 @@
                 <a:solidFill>
                   <a:srgbClr val="12120F"/>
                 </a:solidFill>
-                <a:latin typeface="Segoe UI"/>
+                <a:latin typeface="Segoe UI" panose="020B0502040204020203"/>
               </a:rPr>
               <a:t>13 / 39</a:t>
             </a:r>
+            <a:endParaRPr sz="2300" b="1">
+              <a:solidFill>
+                <a:srgbClr val="12120F"/>
+              </a:solidFill>
+              <a:latin typeface="Segoe UI" panose="020B0502040204020203"/>
+            </a:endParaRPr>
           </a:p>
         </p:txBody>
       </p:sp>
@@ -7581,7 +7950,7 @@
           <a:noFill/>
         </p:spPr>
         <p:txBody>
-          <a:bodyPr wrap="square" lIns="0" rIns="0" tIns="0" bIns="0">
+          <a:bodyPr wrap="square" lIns="0" tIns="0" rIns="0" bIns="0">
             <a:spAutoFit/>
           </a:bodyPr>
           <a:lstStyle/>
@@ -7596,10 +7965,16 @@
                 <a:solidFill>
                   <a:srgbClr val="55544F"/>
                 </a:solidFill>
-                <a:latin typeface="Segoe UI"/>
+                <a:latin typeface="Segoe UI" panose="020B0502040204020203"/>
               </a:rPr>
               <a:t>1 621 720 habitants</a:t>
             </a:r>
+            <a:endParaRPr sz="800" b="0">
+              <a:solidFill>
+                <a:srgbClr val="55544F"/>
+              </a:solidFill>
+              <a:latin typeface="Segoe UI" panose="020B0502040204020203"/>
+            </a:endParaRPr>
           </a:p>
         </p:txBody>
       </p:sp>
@@ -7710,7 +8085,7 @@
           <a:noFill/>
         </p:spPr>
         <p:txBody>
-          <a:bodyPr wrap="square" lIns="0" rIns="0" tIns="0" bIns="0">
+          <a:bodyPr wrap="square" lIns="0" tIns="0" rIns="0" bIns="0">
             <a:spAutoFit/>
           </a:bodyPr>
           <a:lstStyle/>
@@ -7725,10 +8100,16 @@
                 <a:solidFill>
                   <a:srgbClr val="8B8A84"/>
                 </a:solidFill>
-                <a:latin typeface="Consolas"/>
+                <a:latin typeface="Consolas" panose="020B0609020204030204"/>
               </a:rPr>
               <a:t>TERRITOIRES PRIORITAIRES IDENTIFIÉS</a:t>
             </a:r>
+            <a:endParaRPr sz="750" b="1">
+              <a:solidFill>
+                <a:srgbClr val="8B8A84"/>
+              </a:solidFill>
+              <a:latin typeface="Consolas" panose="020B0609020204030204"/>
+            </a:endParaRPr>
           </a:p>
         </p:txBody>
       </p:sp>
@@ -7749,7 +8130,7 @@
           <a:noFill/>
         </p:spPr>
         <p:txBody>
-          <a:bodyPr wrap="square" lIns="0" rIns="0" tIns="0" bIns="0">
+          <a:bodyPr wrap="square" lIns="0" tIns="0" rIns="0" bIns="0">
             <a:spAutoFit/>
           </a:bodyPr>
           <a:lstStyle/>
@@ -7764,10 +8145,16 @@
                 <a:solidFill>
                   <a:srgbClr val="12120F"/>
                 </a:solidFill>
-                <a:latin typeface="Segoe UI"/>
+                <a:latin typeface="Segoe UI" panose="020B0502040204020203"/>
               </a:rPr>
               <a:t>9</a:t>
             </a:r>
+            <a:endParaRPr sz="2300" b="1">
+              <a:solidFill>
+                <a:srgbClr val="12120F"/>
+              </a:solidFill>
+              <a:latin typeface="Segoe UI" panose="020B0502040204020203"/>
+            </a:endParaRPr>
           </a:p>
         </p:txBody>
       </p:sp>
@@ -7788,7 +8175,7 @@
           <a:noFill/>
         </p:spPr>
         <p:txBody>
-          <a:bodyPr wrap="square" lIns="0" rIns="0" tIns="0" bIns="0">
+          <a:bodyPr wrap="square" lIns="0" tIns="0" rIns="0" bIns="0">
             <a:spAutoFit/>
           </a:bodyPr>
           <a:lstStyle/>
@@ -7803,10 +8190,16 @@
                 <a:solidFill>
                   <a:srgbClr val="55544F"/>
                 </a:solidFill>
-                <a:latin typeface="Segoe UI"/>
+                <a:latin typeface="Segoe UI" panose="020B0502040204020203"/>
               </a:rPr>
               <a:t>priorité stable sur 2 000 pondérations</a:t>
             </a:r>
+            <a:endParaRPr sz="800" b="0">
+              <a:solidFill>
+                <a:srgbClr val="55544F"/>
+              </a:solidFill>
+              <a:latin typeface="Segoe UI" panose="020B0502040204020203"/>
+            </a:endParaRPr>
           </a:p>
         </p:txBody>
       </p:sp>
@@ -7819,7 +8212,7 @@
 </file>
 
 <file path=ppt/slides/slide3.xml><?xml version="1.0" encoding="utf-8"?>
-<p:sld xmlns:a="http://schemas.openxmlformats.org/drawingml/2006/main" xmlns:p="http://schemas.openxmlformats.org/presentationml/2006/main" xmlns:r="http://schemas.openxmlformats.org/officeDocument/2006/relationships">
+<p:sld xmlns:a="http://schemas.openxmlformats.org/drawingml/2006/main" xmlns:r="http://schemas.openxmlformats.org/officeDocument/2006/relationships" xmlns:p="http://schemas.openxmlformats.org/presentationml/2006/main">
   <p:cSld>
     <p:spTree>
       <p:nvGrpSpPr>
@@ -8021,7 +8414,7 @@
           <a:noFill/>
         </p:spPr>
         <p:txBody>
-          <a:bodyPr wrap="square" lIns="0" rIns="0" tIns="0" bIns="0">
+          <a:bodyPr wrap="square" lIns="0" tIns="0" rIns="0" bIns="0">
             <a:spAutoFit/>
           </a:bodyPr>
           <a:lstStyle/>
@@ -8036,10 +8429,16 @@
                 <a:solidFill>
                   <a:srgbClr val="8B8A84"/>
                 </a:solidFill>
-                <a:latin typeface="Consolas"/>
+                <a:latin typeface="Consolas" panose="020B0609020204030204"/>
               </a:rPr>
               <a:t>DONNÉES</a:t>
             </a:r>
+            <a:endParaRPr sz="900" b="1">
+              <a:solidFill>
+                <a:srgbClr val="8B8A84"/>
+              </a:solidFill>
+              <a:latin typeface="Consolas" panose="020B0609020204030204"/>
+            </a:endParaRPr>
           </a:p>
         </p:txBody>
       </p:sp>
@@ -8060,7 +8459,7 @@
           <a:noFill/>
         </p:spPr>
         <p:txBody>
-          <a:bodyPr wrap="square" lIns="0" rIns="0" tIns="0" bIns="0">
+          <a:bodyPr wrap="square" lIns="0" tIns="0" rIns="0" bIns="0">
             <a:spAutoFit/>
           </a:bodyPr>
           <a:lstStyle/>
@@ -8075,10 +8474,16 @@
                 <a:solidFill>
                   <a:srgbClr val="12120F"/>
                 </a:solidFill>
-                <a:latin typeface="Segoe UI"/>
+                <a:latin typeface="Segoe UI" panose="020B0502040204020203"/>
               </a:rPr>
               <a:t>Données, sources et qualité</a:t>
             </a:r>
+            <a:endParaRPr sz="2800" b="1">
+              <a:solidFill>
+                <a:srgbClr val="12120F"/>
+              </a:solidFill>
+              <a:latin typeface="Segoe UI" panose="020B0502040204020203"/>
+            </a:endParaRPr>
           </a:p>
         </p:txBody>
       </p:sp>
@@ -8187,7 +8592,7 @@
           <a:noFill/>
         </p:spPr>
         <p:txBody>
-          <a:bodyPr wrap="square" lIns="0" rIns="0" tIns="0" bIns="0">
+          <a:bodyPr wrap="square" lIns="0" tIns="0" rIns="0" bIns="0">
             <a:spAutoFit/>
           </a:bodyPr>
           <a:lstStyle/>
@@ -8202,10 +8607,16 @@
                 <a:solidFill>
                   <a:srgbClr val="0F4D3B"/>
                 </a:solidFill>
-                <a:latin typeface="Segoe UI"/>
+                <a:latin typeface="Segoe UI" panose="020B0502040204020203"/>
               </a:rPr>
               <a:t>Trois sources publiques, deux corrections de l'énoncé : 2 opérateurs et non 4, 90 agences recensées et non 141.</a:t>
             </a:r>
+            <a:endParaRPr sz="1350" b="1">
+              <a:solidFill>
+                <a:srgbClr val="0F4D3B"/>
+              </a:solidFill>
+              <a:latin typeface="Segoe UI" panose="020B0502040204020203"/>
+            </a:endParaRPr>
           </a:p>
         </p:txBody>
       </p:sp>
@@ -8270,7 +8681,7 @@
           <a:noFill/>
         </p:spPr>
         <p:txBody>
-          <a:bodyPr wrap="square" lIns="0" rIns="0" tIns="0" bIns="0">
+          <a:bodyPr wrap="square" lIns="0" tIns="0" rIns="0" bIns="0">
             <a:spAutoFit/>
           </a:bodyPr>
           <a:lstStyle/>
@@ -8285,10 +8696,16 @@
                 <a:solidFill>
                   <a:srgbClr val="8B8A84"/>
                 </a:solidFill>
-                <a:latin typeface="Consolas"/>
+                <a:latin typeface="Consolas" panose="020B0609020204030204"/>
               </a:rPr>
               <a:t>République togolaise · Défi Économie numérique · Données ouvertes PRISE 2021-2022, RGPH-5 2022, COD-AB 2021</a:t>
             </a:r>
+            <a:endParaRPr sz="800" b="0">
+              <a:solidFill>
+                <a:srgbClr val="8B8A84"/>
+              </a:solidFill>
+              <a:latin typeface="Consolas" panose="020B0609020204030204"/>
+            </a:endParaRPr>
           </a:p>
         </p:txBody>
       </p:sp>
@@ -8309,7 +8726,7 @@
           <a:noFill/>
         </p:spPr>
         <p:txBody>
-          <a:bodyPr wrap="square" lIns="0" rIns="0" tIns="0" bIns="0">
+          <a:bodyPr wrap="square" lIns="0" tIns="0" rIns="0" bIns="0">
             <a:spAutoFit/>
           </a:bodyPr>
           <a:lstStyle/>
@@ -8324,10 +8741,16 @@
                 <a:solidFill>
                   <a:srgbClr val="8B8A84"/>
                 </a:solidFill>
-                <a:latin typeface="Consolas"/>
+                <a:latin typeface="Consolas" panose="020B0609020204030204"/>
               </a:rPr>
               <a:t>03 / 10</a:t>
             </a:r>
+            <a:endParaRPr sz="800" b="1">
+              <a:solidFill>
+                <a:srgbClr val="8B8A84"/>
+              </a:solidFill>
+              <a:latin typeface="Consolas" panose="020B0609020204030204"/>
+            </a:endParaRPr>
           </a:p>
         </p:txBody>
       </p:sp>
@@ -8366,10 +8789,16 @@
                           <a:solidFill>
                             <a:srgbClr val="FFFFFF"/>
                           </a:solidFill>
-                          <a:latin typeface="Segoe UI"/>
+                          <a:latin typeface="Segoe UI" panose="020B0502040204020203"/>
                         </a:rPr>
                         <a:t>Donnée</a:t>
                       </a:r>
+                      <a:endParaRPr sz="950" b="1">
+                        <a:solidFill>
+                          <a:srgbClr val="FFFFFF"/>
+                        </a:solidFill>
+                        <a:latin typeface="Segoe UI" panose="020B0502040204020203"/>
+                      </a:endParaRPr>
                     </a:p>
                   </a:txBody>
                   <a:tcPr anchor="ctr">
@@ -8388,10 +8817,16 @@
                           <a:solidFill>
                             <a:srgbClr val="FFFFFF"/>
                           </a:solidFill>
-                          <a:latin typeface="Segoe UI"/>
+                          <a:latin typeface="Segoe UI" panose="020B0502040204020203"/>
                         </a:rPr>
                         <a:t>Producteur</a:t>
                       </a:r>
+                      <a:endParaRPr sz="950" b="1">
+                        <a:solidFill>
+                          <a:srgbClr val="FFFFFF"/>
+                        </a:solidFill>
+                        <a:latin typeface="Segoe UI" panose="020B0502040204020203"/>
+                      </a:endParaRPr>
                     </a:p>
                   </a:txBody>
                   <a:tcPr anchor="ctr">
@@ -8410,10 +8845,16 @@
                           <a:solidFill>
                             <a:srgbClr val="FFFFFF"/>
                           </a:solidFill>
-                          <a:latin typeface="Segoe UI"/>
+                          <a:latin typeface="Segoe UI" panose="020B0502040204020203"/>
                         </a:rPr>
                         <a:t>Période</a:t>
                       </a:r>
+                      <a:endParaRPr sz="950" b="1">
+                        <a:solidFill>
+                          <a:srgbClr val="FFFFFF"/>
+                        </a:solidFill>
+                        <a:latin typeface="Segoe UI" panose="020B0502040204020203"/>
+                      </a:endParaRPr>
                     </a:p>
                   </a:txBody>
                   <a:tcPr anchor="ctr">
@@ -8432,10 +8873,16 @@
                           <a:solidFill>
                             <a:srgbClr val="FFFFFF"/>
                           </a:solidFill>
-                          <a:latin typeface="Segoe UI"/>
+                          <a:latin typeface="Segoe UI" panose="020B0502040204020203"/>
                         </a:rPr>
                         <a:t>Ce qu'elle apporte</a:t>
                       </a:r>
+                      <a:endParaRPr sz="950" b="1">
+                        <a:solidFill>
+                          <a:srgbClr val="FFFFFF"/>
+                        </a:solidFill>
+                        <a:latin typeface="Segoe UI" panose="020B0502040204020203"/>
+                      </a:endParaRPr>
                     </a:p>
                   </a:txBody>
                   <a:tcPr anchor="ctr">
@@ -8456,10 +8903,16 @@
                           <a:solidFill>
                             <a:srgbClr val="12120F"/>
                           </a:solidFill>
-                          <a:latin typeface="Segoe UI"/>
+                          <a:latin typeface="Segoe UI" panose="020B0502040204020203"/>
                         </a:rPr>
                         <a:t>Agences, agents Mobile Money, data centers</a:t>
                       </a:r>
+                      <a:endParaRPr sz="950" b="1">
+                        <a:solidFill>
+                          <a:srgbClr val="12120F"/>
+                        </a:solidFill>
+                        <a:latin typeface="Segoe UI" panose="020B0502040204020203"/>
+                      </a:endParaRPr>
                     </a:p>
                   </a:txBody>
                   <a:tcPr anchor="ctr">
@@ -8478,10 +8931,16 @@
                           <a:solidFill>
                             <a:srgbClr val="55544F"/>
                           </a:solidFill>
-                          <a:latin typeface="Segoe UI"/>
+                          <a:latin typeface="Segoe UI" panose="020B0502040204020203"/>
                         </a:rPr>
                         <a:t>Géoportail national du Togo</a:t>
                       </a:r>
+                      <a:endParaRPr sz="950" b="0">
+                        <a:solidFill>
+                          <a:srgbClr val="55544F"/>
+                        </a:solidFill>
+                        <a:latin typeface="Segoe UI" panose="020B0502040204020203"/>
+                      </a:endParaRPr>
                     </a:p>
                   </a:txBody>
                   <a:tcPr anchor="ctr">
@@ -8500,10 +8959,16 @@
                           <a:solidFill>
                             <a:srgbClr val="55544F"/>
                           </a:solidFill>
-                          <a:latin typeface="Segoe UI"/>
+                          <a:latin typeface="Segoe UI" panose="020B0502040204020203"/>
                         </a:rPr>
                         <a:t>Collecte 2021-2022</a:t>
                       </a:r>
+                      <a:endParaRPr sz="950" b="0">
+                        <a:solidFill>
+                          <a:srgbClr val="55544F"/>
+                        </a:solidFill>
+                        <a:latin typeface="Segoe UI" panose="020B0502040204020203"/>
+                      </a:endParaRPr>
                     </a:p>
                   </a:txBody>
                   <a:tcPr anchor="ctr">
@@ -8522,10 +8987,16 @@
                           <a:solidFill>
                             <a:srgbClr val="55544F"/>
                           </a:solidFill>
-                          <a:latin typeface="Segoe UI"/>
+                          <a:latin typeface="Segoe UI" panose="020B0502040204020203"/>
                         </a:rPr>
                         <a:t>Localisation de chaque équipement</a:t>
                       </a:r>
+                      <a:endParaRPr sz="950" b="0">
+                        <a:solidFill>
+                          <a:srgbClr val="55544F"/>
+                        </a:solidFill>
+                        <a:latin typeface="Segoe UI" panose="020B0502040204020203"/>
+                      </a:endParaRPr>
                     </a:p>
                   </a:txBody>
                   <a:tcPr anchor="ctr">
@@ -8546,10 +9017,16 @@
                           <a:solidFill>
                             <a:srgbClr val="12120F"/>
                           </a:solidFill>
-                          <a:latin typeface="Segoe UI"/>
+                          <a:latin typeface="Segoe UI" panose="020B0502040204020203"/>
                         </a:rPr>
                         <a:t>Population résidente</a:t>
                       </a:r>
+                      <a:endParaRPr sz="950" b="1">
+                        <a:solidFill>
+                          <a:srgbClr val="12120F"/>
+                        </a:solidFill>
+                        <a:latin typeface="Segoe UI" panose="020B0502040204020203"/>
+                      </a:endParaRPr>
                     </a:p>
                   </a:txBody>
                   <a:tcPr anchor="ctr">
@@ -8568,10 +9045,16 @@
                           <a:solidFill>
                             <a:srgbClr val="55544F"/>
                           </a:solidFill>
-                          <a:latin typeface="Segoe UI"/>
+                          <a:latin typeface="Segoe UI" panose="020B0502040204020203"/>
                         </a:rPr>
                         <a:t>INSEED — 5ᵉ recensement (RGPH-5)</a:t>
                       </a:r>
+                      <a:endParaRPr sz="950" b="0">
+                        <a:solidFill>
+                          <a:srgbClr val="55544F"/>
+                        </a:solidFill>
+                        <a:latin typeface="Segoe UI" panose="020B0502040204020203"/>
+                      </a:endParaRPr>
                     </a:p>
                   </a:txBody>
                   <a:tcPr anchor="ctr">
@@ -8590,10 +9073,16 @@
                           <a:solidFill>
                             <a:srgbClr val="55544F"/>
                           </a:solidFill>
-                          <a:latin typeface="Segoe UI"/>
+                          <a:latin typeface="Segoe UI" panose="020B0502040204020203"/>
                         </a:rPr>
                         <a:t>23 oct. – 16 nov. 2022</a:t>
                       </a:r>
+                      <a:endParaRPr sz="950" b="0">
+                        <a:solidFill>
+                          <a:srgbClr val="55544F"/>
+                        </a:solidFill>
+                        <a:latin typeface="Segoe UI" panose="020B0502040204020203"/>
+                      </a:endParaRPr>
                     </a:p>
                   </a:txBody>
                   <a:tcPr anchor="ctr">
@@ -8612,10 +9101,16 @@
                           <a:solidFill>
                             <a:srgbClr val="55544F"/>
                           </a:solidFill>
-                          <a:latin typeface="Segoe UI"/>
+                          <a:latin typeface="Segoe UI" panose="020B0502040204020203"/>
                         </a:rPr>
                         <a:t>Le dénominateur de tous les ratios</a:t>
                       </a:r>
+                      <a:endParaRPr sz="950" b="0">
+                        <a:solidFill>
+                          <a:srgbClr val="55544F"/>
+                        </a:solidFill>
+                        <a:latin typeface="Segoe UI" panose="020B0502040204020203"/>
+                      </a:endParaRPr>
                     </a:p>
                   </a:txBody>
                   <a:tcPr anchor="ctr">
@@ -8636,10 +9131,16 @@
                           <a:solidFill>
                             <a:srgbClr val="12120F"/>
                           </a:solidFill>
-                          <a:latin typeface="Segoe UI"/>
+                          <a:latin typeface="Segoe UI" panose="020B0502040204020203"/>
                         </a:rPr>
                         <a:t>Limites administratives et superficies</a:t>
                       </a:r>
+                      <a:endParaRPr sz="950" b="1">
+                        <a:solidFill>
+                          <a:srgbClr val="12120F"/>
+                        </a:solidFill>
+                        <a:latin typeface="Segoe UI" panose="020B0502040204020203"/>
+                      </a:endParaRPr>
                     </a:p>
                   </a:txBody>
                   <a:tcPr anchor="ctr">
@@ -8658,10 +9159,16 @@
                           <a:solidFill>
                             <a:srgbClr val="55544F"/>
                           </a:solidFill>
-                          <a:latin typeface="Segoe UI"/>
+                          <a:latin typeface="Segoe UI" panose="020B0502040204020203"/>
                         </a:rPr>
                         <a:t>Common Operational Datasets (OCHA)</a:t>
                       </a:r>
+                      <a:endParaRPr sz="950" b="0">
+                        <a:solidFill>
+                          <a:srgbClr val="55544F"/>
+                        </a:solidFill>
+                        <a:latin typeface="Segoe UI" panose="020B0502040204020203"/>
+                      </a:endParaRPr>
                     </a:p>
                   </a:txBody>
                   <a:tcPr anchor="ctr">
@@ -8680,10 +9187,16 @@
                           <a:solidFill>
                             <a:srgbClr val="55544F"/>
                           </a:solidFill>
-                          <a:latin typeface="Segoe UI"/>
+                          <a:latin typeface="Segoe UI" panose="020B0502040204020203"/>
                         </a:rPr>
                         <a:t>Valides au 07/01/2021</a:t>
                       </a:r>
+                      <a:endParaRPr sz="950" b="0">
+                        <a:solidFill>
+                          <a:srgbClr val="55544F"/>
+                        </a:solidFill>
+                        <a:latin typeface="Segoe UI" panose="020B0502040204020203"/>
+                      </a:endParaRPr>
                     </a:p>
                   </a:txBody>
                   <a:tcPr anchor="ctr">
@@ -8702,10 +9215,16 @@
                           <a:solidFill>
                             <a:srgbClr val="55544F"/>
                           </a:solidFill>
-                          <a:latin typeface="Segoe UI"/>
+                          <a:latin typeface="Segoe UI" panose="020B0502040204020203"/>
                         </a:rPr>
                         <a:t>Contours, densités, distances</a:t>
                       </a:r>
+                      <a:endParaRPr sz="950" b="0">
+                        <a:solidFill>
+                          <a:srgbClr val="55544F"/>
+                        </a:solidFill>
+                        <a:latin typeface="Segoe UI" panose="020B0502040204020203"/>
+                      </a:endParaRPr>
                     </a:p>
                   </a:txBody>
                   <a:tcPr anchor="ctr">
@@ -8826,7 +9345,7 @@
           <a:noFill/>
         </p:spPr>
         <p:txBody>
-          <a:bodyPr wrap="square" lIns="0" rIns="0" tIns="0" bIns="0">
+          <a:bodyPr wrap="square" lIns="0" tIns="0" rIns="0" bIns="0">
             <a:spAutoFit/>
           </a:bodyPr>
           <a:lstStyle/>
@@ -8841,10 +9360,16 @@
                 <a:solidFill>
                   <a:srgbClr val="8B8A84"/>
                 </a:solidFill>
-                <a:latin typeface="Consolas"/>
+                <a:latin typeface="Consolas" panose="020B0609020204030204"/>
               </a:rPr>
               <a:t>LA DONNÉE QUI MANQUE</a:t>
             </a:r>
+            <a:endParaRPr sz="800" b="1">
+              <a:solidFill>
+                <a:srgbClr val="8B8A84"/>
+              </a:solidFill>
+              <a:latin typeface="Consolas" panose="020B0609020204030204"/>
+            </a:endParaRPr>
           </a:p>
         </p:txBody>
       </p:sp>
@@ -8865,7 +9390,7 @@
           <a:noFill/>
         </p:spPr>
         <p:txBody>
-          <a:bodyPr wrap="square" lIns="0" rIns="0" tIns="0" bIns="0">
+          <a:bodyPr wrap="square" lIns="0" tIns="0" rIns="0" bIns="0">
             <a:spAutoFit/>
           </a:bodyPr>
           <a:lstStyle/>
@@ -8880,10 +9405,16 @@
                 <a:solidFill>
                   <a:srgbClr val="55544F"/>
                 </a:solidFill>
-                <a:latin typeface="Segoe UI"/>
+                <a:latin typeface="Segoe UI" panose="020B0502040204020203"/>
               </a:rPr>
               <a:t>Aucune mesure de couverture réseau mobile n'existe dans les sources ouvertes mobilisées. Ce travail mesure un déficit d'accès aux services — pas une absence de réseau.</a:t>
             </a:r>
+            <a:endParaRPr sz="1050" b="0">
+              <a:solidFill>
+                <a:srgbClr val="55544F"/>
+              </a:solidFill>
+              <a:latin typeface="Segoe UI" panose="020B0502040204020203"/>
+            </a:endParaRPr>
           </a:p>
         </p:txBody>
       </p:sp>
@@ -8948,7 +9479,7 @@
           <a:noFill/>
         </p:spPr>
         <p:txBody>
-          <a:bodyPr wrap="square" lIns="0" rIns="0" tIns="0" bIns="0">
+          <a:bodyPr wrap="square" lIns="0" tIns="0" rIns="0" bIns="0">
             <a:spAutoFit/>
           </a:bodyPr>
           <a:lstStyle/>
@@ -8963,10 +9494,16 @@
                 <a:solidFill>
                   <a:srgbClr val="12120F"/>
                 </a:solidFill>
-                <a:latin typeface="Segoe UI"/>
+                <a:latin typeface="Segoe UI" panose="020B0502040204020203"/>
               </a:rPr>
               <a:t>« Agences – Télécom » n'est pas un quatrième opérateur</a:t>
             </a:r>
+            <a:endParaRPr sz="1100" b="1">
+              <a:solidFill>
+                <a:srgbClr val="12120F"/>
+              </a:solidFill>
+              <a:latin typeface="Segoe UI" panose="020B0502040204020203"/>
+            </a:endParaRPr>
           </a:p>
         </p:txBody>
       </p:sp>
@@ -8987,7 +9524,7 @@
           <a:noFill/>
         </p:spPr>
         <p:txBody>
-          <a:bodyPr wrap="square" lIns="0" rIns="0" tIns="0" bIns="0">
+          <a:bodyPr wrap="square" lIns="0" tIns="0" rIns="0" bIns="0">
             <a:spAutoFit/>
           </a:bodyPr>
           <a:lstStyle/>
@@ -9002,10 +9539,16 @@
                 <a:solidFill>
                   <a:srgbClr val="55544F"/>
                 </a:solidFill>
-                <a:latin typeface="Segoe UI"/>
+                <a:latin typeface="Segoe UI" panose="020B0502040204020203"/>
               </a:rPr>
               <a:t>Ses 51 lignes sont déjà contenues dans les fichiers Moov et Togocom réunis, sans un seul enregistrement propre. Empiler les fichiers afficherait 141 agences au lieu de 90 recensées après dédoublonnage (28 Moov, 62 Togocom), dont 88 actives : 2 agences Togocom déclarées fermées sont exclues des calculs.</a:t>
             </a:r>
+            <a:endParaRPr sz="950" b="0">
+              <a:solidFill>
+                <a:srgbClr val="55544F"/>
+              </a:solidFill>
+              <a:latin typeface="Segoe UI" panose="020B0502040204020203"/>
+            </a:endParaRPr>
           </a:p>
         </p:txBody>
       </p:sp>
@@ -9070,7 +9613,7 @@
           <a:noFill/>
         </p:spPr>
         <p:txBody>
-          <a:bodyPr wrap="square" lIns="0" rIns="0" tIns="0" bIns="0">
+          <a:bodyPr wrap="square" lIns="0" tIns="0" rIns="0" bIns="0">
             <a:spAutoFit/>
           </a:bodyPr>
           <a:lstStyle/>
@@ -9085,10 +9628,16 @@
                 <a:solidFill>
                   <a:srgbClr val="12120F"/>
                 </a:solidFill>
-                <a:latin typeface="Segoe UI"/>
+                <a:latin typeface="Segoe UI" panose="020B0502040204020203"/>
               </a:rPr>
               <a:t>« Agences – CANAL+ » est vide à la source</a:t>
             </a:r>
+            <a:endParaRPr sz="1100" b="1">
+              <a:solidFill>
+                <a:srgbClr val="12120F"/>
+              </a:solidFill>
+              <a:latin typeface="Segoe UI" panose="020B0502040204020203"/>
+            </a:endParaRPr>
           </a:p>
         </p:txBody>
       </p:sp>
@@ -9109,7 +9658,7 @@
           <a:noFill/>
         </p:spPr>
         <p:txBody>
-          <a:bodyPr wrap="square" lIns="0" rIns="0" tIns="0" bIns="0">
+          <a:bodyPr wrap="square" lIns="0" tIns="0" rIns="0" bIns="0">
             <a:spAutoFit/>
           </a:bodyPr>
           <a:lstStyle/>
@@ -9124,10 +9673,16 @@
                 <a:solidFill>
                   <a:srgbClr val="55544F"/>
                 </a:solidFill>
-                <a:latin typeface="Segoe UI"/>
+                <a:latin typeface="Segoe UI" panose="020B0502040204020203"/>
               </a:rPr>
               <a:t>Le serveur joint lui-même la mention « the query result is empty » : c'est une donnée non disponible, et non une absence d'agences sur le terrain.</a:t>
             </a:r>
+            <a:endParaRPr sz="950" b="0">
+              <a:solidFill>
+                <a:srgbClr val="55544F"/>
+              </a:solidFill>
+              <a:latin typeface="Segoe UI" panose="020B0502040204020203"/>
+            </a:endParaRPr>
           </a:p>
         </p:txBody>
       </p:sp>
@@ -9192,7 +9747,7 @@
           <a:noFill/>
         </p:spPr>
         <p:txBody>
-          <a:bodyPr wrap="square" lIns="0" rIns="0" tIns="0" bIns="0">
+          <a:bodyPr wrap="square" lIns="0" tIns="0" rIns="0" bIns="0">
             <a:spAutoFit/>
           </a:bodyPr>
           <a:lstStyle/>
@@ -9207,10 +9762,16 @@
                 <a:solidFill>
                   <a:srgbClr val="12120F"/>
                 </a:solidFill>
-                <a:latin typeface="Segoe UI"/>
+                <a:latin typeface="Segoe UI" panose="020B0502040204020203"/>
               </a:rPr>
               <a:t>L'identifiant fourni est volatile</a:t>
             </a:r>
+            <a:endParaRPr sz="1100" b="1">
+              <a:solidFill>
+                <a:srgbClr val="12120F"/>
+              </a:solidFill>
+              <a:latin typeface="Segoe UI" panose="020B0502040204020203"/>
+            </a:endParaRPr>
           </a:p>
         </p:txBody>
       </p:sp>
@@ -9231,7 +9792,7 @@
           <a:noFill/>
         </p:spPr>
         <p:txBody>
-          <a:bodyPr wrap="square" lIns="0" rIns="0" tIns="0" bIns="0">
+          <a:bodyPr wrap="square" lIns="0" tIns="0" rIns="0" bIns="0">
             <a:spAutoFit/>
           </a:bodyPr>
           <a:lstStyle/>
@@ -9246,10 +9807,16 @@
                 <a:solidFill>
                   <a:srgbClr val="55544F"/>
                 </a:solidFill>
-                <a:latin typeface="Segoe UI"/>
+                <a:latin typeface="Segoe UI" panose="020B0502040204020203"/>
               </a:rPr>
               <a:t>La même agence porte un identifiant différent dans deux fichiers exportés à trois secondes d'intervalle. La déduplication repose sur le nom et les coordonnées.</a:t>
             </a:r>
+            <a:endParaRPr sz="950" b="0">
+              <a:solidFill>
+                <a:srgbClr val="55544F"/>
+              </a:solidFill>
+              <a:latin typeface="Segoe UI" panose="020B0502040204020203"/>
+            </a:endParaRPr>
           </a:p>
         </p:txBody>
       </p:sp>
@@ -9262,7 +9829,7 @@
         <p:spPr>
           <a:xfrm>
             <a:off x="6583680" y="4069080"/>
-            <a:ext cx="5029200" cy="1965960"/>
+            <a:ext cx="5029200" cy="2231390"/>
           </a:xfrm>
           <a:prstGeom prst="rect">
             <a:avLst/>
@@ -9308,7 +9875,7 @@
         <p:spPr>
           <a:xfrm>
             <a:off x="6583680" y="4069080"/>
-            <a:ext cx="32004" cy="1965960"/>
+            <a:ext cx="76200" cy="2231390"/>
           </a:xfrm>
           <a:prstGeom prst="rect">
             <a:avLst/>
@@ -9360,7 +9927,7 @@
           <a:noFill/>
         </p:spPr>
         <p:txBody>
-          <a:bodyPr wrap="square" lIns="0" rIns="0" tIns="0" bIns="0">
+          <a:bodyPr wrap="square" lIns="0" tIns="0" rIns="0" bIns="0">
             <a:spAutoFit/>
           </a:bodyPr>
           <a:lstStyle/>
@@ -9375,10 +9942,16 @@
                 <a:solidFill>
                   <a:srgbClr val="8B8A84"/>
                 </a:solidFill>
-                <a:latin typeface="Consolas"/>
+                <a:latin typeface="Consolas" panose="020B0609020204030204"/>
               </a:rPr>
               <a:t>35 CONTRÔLES ARITHMÉTIQUES, REJOUÉS À CHAQUE EXÉCUTION</a:t>
             </a:r>
+            <a:endParaRPr sz="800" b="1">
+              <a:solidFill>
+                <a:srgbClr val="8B8A84"/>
+              </a:solidFill>
+              <a:latin typeface="Consolas" panose="020B0609020204030204"/>
+            </a:endParaRPr>
           </a:p>
         </p:txBody>
       </p:sp>
@@ -9399,7 +9972,7 @@
           <a:noFill/>
         </p:spPr>
         <p:txBody>
-          <a:bodyPr wrap="square" lIns="0" rIns="0" tIns="0" bIns="0">
+          <a:bodyPr wrap="square" lIns="0" tIns="0" rIns="0" bIns="0">
             <a:spAutoFit/>
           </a:bodyPr>
           <a:lstStyle/>
@@ -9414,10 +9987,16 @@
                 <a:solidFill>
                   <a:srgbClr val="55544F"/>
                 </a:solidFill>
-                <a:latin typeface="Segoe UI"/>
+                <a:latin typeface="Segoe UI" panose="020B0502040204020203"/>
               </a:rPr>
               <a:t>La population extraite du PDF de l'INSEED somme exactement à 8 095 498 habitants aux trois niveaux — 5 régions, 39 préfectures, 117 communes — sans écart d'une unité.</a:t>
             </a:r>
+            <a:endParaRPr sz="1000" b="0">
+              <a:solidFill>
+                <a:srgbClr val="55544F"/>
+              </a:solidFill>
+              <a:latin typeface="Segoe UI" panose="020B0502040204020203"/>
+            </a:endParaRPr>
           </a:p>
           <a:p>
             <a:pPr algn="l">
@@ -9425,15 +10004,6 @@
                 <a:spcPct val="130000"/>
               </a:lnSpc>
             </a:pPr>
-            <a:r>
-              <a:rPr sz="1000" b="0">
-                <a:solidFill>
-                  <a:srgbClr val="55544F"/>
-                </a:solidFill>
-                <a:latin typeface="Segoe UI"/>
-              </a:rPr>
-              <a:t/>
-            </a:r>
           </a:p>
           <a:p>
             <a:pPr algn="l">
@@ -9446,10 +10016,16 @@
                 <a:solidFill>
                   <a:srgbClr val="55544F"/>
                 </a:solidFill>
-                <a:latin typeface="Segoe UI"/>
+                <a:latin typeface="Segoe UI" panose="020B0502040204020203"/>
               </a:rPr>
               <a:t>Ces contrôles ont servi : une jointure sur des noms accentués faisait tomber neuf préfectures à zéro point Mobile Money, et une somme régionale à 11 630 489 a révélé un double comptage du Grand Lomé.</a:t>
             </a:r>
+            <a:endParaRPr sz="1000" b="0">
+              <a:solidFill>
+                <a:srgbClr val="55544F"/>
+              </a:solidFill>
+              <a:latin typeface="Segoe UI" panose="020B0502040204020203"/>
+            </a:endParaRPr>
           </a:p>
         </p:txBody>
       </p:sp>
@@ -9462,7 +10038,7 @@
 </file>
 
 <file path=ppt/slides/slide4.xml><?xml version="1.0" encoding="utf-8"?>
-<p:sld xmlns:a="http://schemas.openxmlformats.org/drawingml/2006/main" xmlns:p="http://schemas.openxmlformats.org/presentationml/2006/main" xmlns:r="http://schemas.openxmlformats.org/officeDocument/2006/relationships">
+<p:sld xmlns:a="http://schemas.openxmlformats.org/drawingml/2006/main" xmlns:r="http://schemas.openxmlformats.org/officeDocument/2006/relationships" xmlns:p="http://schemas.openxmlformats.org/presentationml/2006/main">
   <p:cSld>
     <p:spTree>
       <p:nvGrpSpPr>
@@ -9664,7 +10240,7 @@
           <a:noFill/>
         </p:spPr>
         <p:txBody>
-          <a:bodyPr wrap="square" lIns="0" rIns="0" tIns="0" bIns="0">
+          <a:bodyPr wrap="square" lIns="0" tIns="0" rIns="0" bIns="0">
             <a:spAutoFit/>
           </a:bodyPr>
           <a:lstStyle/>
@@ -9679,10 +10255,16 @@
                 <a:solidFill>
                   <a:srgbClr val="8B8A84"/>
                 </a:solidFill>
-                <a:latin typeface="Consolas"/>
+                <a:latin typeface="Consolas" panose="020B0609020204030204"/>
               </a:rPr>
               <a:t>MÉTHODE</a:t>
             </a:r>
+            <a:endParaRPr sz="900" b="1">
+              <a:solidFill>
+                <a:srgbClr val="8B8A84"/>
+              </a:solidFill>
+              <a:latin typeface="Consolas" panose="020B0609020204030204"/>
+            </a:endParaRPr>
           </a:p>
         </p:txBody>
       </p:sp>
@@ -9703,7 +10285,7 @@
           <a:noFill/>
         </p:spPr>
         <p:txBody>
-          <a:bodyPr wrap="square" lIns="0" rIns="0" tIns="0" bIns="0">
+          <a:bodyPr wrap="square" lIns="0" tIns="0" rIns="0" bIns="0">
             <a:spAutoFit/>
           </a:bodyPr>
           <a:lstStyle/>
@@ -9718,10 +10300,16 @@
                 <a:solidFill>
                   <a:srgbClr val="12120F"/>
                 </a:solidFill>
-                <a:latin typeface="Segoe UI"/>
+                <a:latin typeface="Segoe UI" panose="020B0502040204020203"/>
               </a:rPr>
               <a:t>Méthodologie</a:t>
             </a:r>
+            <a:endParaRPr sz="2800" b="1">
+              <a:solidFill>
+                <a:srgbClr val="12120F"/>
+              </a:solidFill>
+              <a:latin typeface="Segoe UI" panose="020B0502040204020203"/>
+            </a:endParaRPr>
           </a:p>
         </p:txBody>
       </p:sp>
@@ -9830,7 +10418,7 @@
           <a:noFill/>
         </p:spPr>
         <p:txBody>
-          <a:bodyPr wrap="square" lIns="0" rIns="0" tIns="0" bIns="0">
+          <a:bodyPr wrap="square" lIns="0" tIns="0" rIns="0" bIns="0">
             <a:spAutoFit/>
           </a:bodyPr>
           <a:lstStyle/>
@@ -9845,10 +10433,16 @@
                 <a:solidFill>
                   <a:srgbClr val="0F4D3B"/>
                 </a:solidFill>
-                <a:latin typeface="Segoe UI"/>
+                <a:latin typeface="Segoe UI" panose="020B0502040204020203"/>
               </a:rPr>
               <a:t>Deux unités d'analyse, chacune utilisée là où sa validité est prouvée — et un indice dont les pondérations sont testées.</a:t>
             </a:r>
+            <a:endParaRPr sz="1350" b="1">
+              <a:solidFill>
+                <a:srgbClr val="0F4D3B"/>
+              </a:solidFill>
+              <a:latin typeface="Segoe UI" panose="020B0502040204020203"/>
+            </a:endParaRPr>
           </a:p>
         </p:txBody>
       </p:sp>
@@ -9913,7 +10507,7 @@
           <a:noFill/>
         </p:spPr>
         <p:txBody>
-          <a:bodyPr wrap="square" lIns="0" rIns="0" tIns="0" bIns="0">
+          <a:bodyPr wrap="square" lIns="0" tIns="0" rIns="0" bIns="0">
             <a:spAutoFit/>
           </a:bodyPr>
           <a:lstStyle/>
@@ -9928,10 +10522,16 @@
                 <a:solidFill>
                   <a:srgbClr val="8B8A84"/>
                 </a:solidFill>
-                <a:latin typeface="Consolas"/>
+                <a:latin typeface="Consolas" panose="020B0609020204030204"/>
               </a:rPr>
               <a:t>République togolaise · Défi Économie numérique · Données ouvertes PRISE 2021-2022, RGPH-5 2022, COD-AB 2021</a:t>
             </a:r>
+            <a:endParaRPr sz="800" b="0">
+              <a:solidFill>
+                <a:srgbClr val="8B8A84"/>
+              </a:solidFill>
+              <a:latin typeface="Consolas" panose="020B0609020204030204"/>
+            </a:endParaRPr>
           </a:p>
         </p:txBody>
       </p:sp>
@@ -9952,7 +10552,7 @@
           <a:noFill/>
         </p:spPr>
         <p:txBody>
-          <a:bodyPr wrap="square" lIns="0" rIns="0" tIns="0" bIns="0">
+          <a:bodyPr wrap="square" lIns="0" tIns="0" rIns="0" bIns="0">
             <a:spAutoFit/>
           </a:bodyPr>
           <a:lstStyle/>
@@ -9967,10 +10567,16 @@
                 <a:solidFill>
                   <a:srgbClr val="8B8A84"/>
                 </a:solidFill>
-                <a:latin typeface="Consolas"/>
+                <a:latin typeface="Consolas" panose="020B0609020204030204"/>
               </a:rPr>
               <a:t>04 / 10</a:t>
             </a:r>
+            <a:endParaRPr sz="800" b="1">
+              <a:solidFill>
+                <a:srgbClr val="8B8A84"/>
+              </a:solidFill>
+              <a:latin typeface="Consolas" panose="020B0609020204030204"/>
+            </a:endParaRPr>
           </a:p>
         </p:txBody>
       </p:sp>
@@ -9991,7 +10597,7 @@
           <a:noFill/>
         </p:spPr>
         <p:txBody>
-          <a:bodyPr wrap="square" lIns="0" rIns="0" tIns="0" bIns="0">
+          <a:bodyPr wrap="square" lIns="0" tIns="0" rIns="0" bIns="0">
             <a:spAutoFit/>
           </a:bodyPr>
           <a:lstStyle/>
@@ -10006,10 +10612,16 @@
                 <a:solidFill>
                   <a:srgbClr val="8B8A84"/>
                 </a:solidFill>
-                <a:latin typeface="Consolas"/>
+                <a:latin typeface="Consolas" panose="020B0609020204030204"/>
               </a:rPr>
               <a:t>LES DEUX UNITÉS D'ANALYSE</a:t>
             </a:r>
+            <a:endParaRPr sz="800" b="1">
+              <a:solidFill>
+                <a:srgbClr val="8B8A84"/>
+              </a:solidFill>
+              <a:latin typeface="Consolas" panose="020B0609020204030204"/>
+            </a:endParaRPr>
           </a:p>
         </p:txBody>
       </p:sp>
@@ -10047,10 +10659,16 @@
                           <a:solidFill>
                             <a:srgbClr val="FFFFFF"/>
                           </a:solidFill>
-                          <a:latin typeface="Segoe UI"/>
+                          <a:latin typeface="Segoe UI" panose="020B0502040204020203"/>
                         </a:rPr>
                         <a:t>Unité</a:t>
                       </a:r>
+                      <a:endParaRPr sz="900" b="1">
+                        <a:solidFill>
+                          <a:srgbClr val="FFFFFF"/>
+                        </a:solidFill>
+                        <a:latin typeface="Segoe UI" panose="020B0502040204020203"/>
+                      </a:endParaRPr>
                     </a:p>
                   </a:txBody>
                   <a:tcPr anchor="ctr">
@@ -10069,10 +10687,16 @@
                           <a:solidFill>
                             <a:srgbClr val="FFFFFF"/>
                           </a:solidFill>
-                          <a:latin typeface="Segoe UI"/>
+                          <a:latin typeface="Segoe UI" panose="020B0502040204020203"/>
                         </a:rPr>
                         <a:t>Rôle</a:t>
                       </a:r>
+                      <a:endParaRPr sz="900" b="1">
+                        <a:solidFill>
+                          <a:srgbClr val="FFFFFF"/>
+                        </a:solidFill>
+                        <a:latin typeface="Segoe UI" panose="020B0502040204020203"/>
+                      </a:endParaRPr>
                     </a:p>
                   </a:txBody>
                   <a:tcPr anchor="ctr">
@@ -10091,10 +10715,16 @@
                           <a:solidFill>
                             <a:srgbClr val="FFFFFF"/>
                           </a:solidFill>
-                          <a:latin typeface="Segoe UI"/>
+                          <a:latin typeface="Segoe UI" panose="020B0502040204020203"/>
                         </a:rPr>
                         <a:t>Justification</a:t>
                       </a:r>
+                      <a:endParaRPr sz="900" b="1">
+                        <a:solidFill>
+                          <a:srgbClr val="FFFFFF"/>
+                        </a:solidFill>
+                        <a:latin typeface="Segoe UI" panose="020B0502040204020203"/>
+                      </a:endParaRPr>
                     </a:p>
                   </a:txBody>
                   <a:tcPr anchor="ctr">
@@ -10115,10 +10745,16 @@
                           <a:solidFill>
                             <a:srgbClr val="12120F"/>
                           </a:solidFill>
-                          <a:latin typeface="Segoe UI"/>
+                          <a:latin typeface="Segoe UI" panose="020B0502040204020203"/>
                         </a:rPr>
                         <a:t>Préfecture (39)</a:t>
                       </a:r>
+                      <a:endParaRPr sz="900" b="1">
+                        <a:solidFill>
+                          <a:srgbClr val="12120F"/>
+                        </a:solidFill>
+                        <a:latin typeface="Segoe UI" panose="020B0502040204020203"/>
+                      </a:endParaRPr>
                     </a:p>
                   </a:txBody>
                   <a:tcPr anchor="ctr">
@@ -10137,10 +10773,16 @@
                           <a:solidFill>
                             <a:srgbClr val="55544F"/>
                           </a:solidFill>
-                          <a:latin typeface="Segoe UI"/>
+                          <a:latin typeface="Segoe UI" panose="020B0502040204020203"/>
                         </a:rPr>
                         <a:t>Cartes, superficies, densités</a:t>
                       </a:r>
+                      <a:endParaRPr sz="900" b="0">
+                        <a:solidFill>
+                          <a:srgbClr val="55544F"/>
+                        </a:solidFill>
+                        <a:latin typeface="Segoe UI" panose="020B0502040204020203"/>
+                      </a:endParaRPr>
                     </a:p>
                   </a:txBody>
                   <a:tcPr anchor="ctr">
@@ -10159,10 +10801,16 @@
                           <a:solidFill>
                             <a:srgbClr val="55544F"/>
                           </a:solidFill>
-                          <a:latin typeface="Segoe UI"/>
+                          <a:latin typeface="Segoe UI" panose="020B0502040204020203"/>
                         </a:rPr>
                         <a:t>concordance spatiale 98,4 %</a:t>
                       </a:r>
+                      <a:endParaRPr sz="900" b="0">
+                        <a:solidFill>
+                          <a:srgbClr val="55544F"/>
+                        </a:solidFill>
+                        <a:latin typeface="Segoe UI" panose="020B0502040204020203"/>
+                      </a:endParaRPr>
                     </a:p>
                   </a:txBody>
                   <a:tcPr anchor="ctr">
@@ -10183,10 +10831,16 @@
                           <a:solidFill>
                             <a:srgbClr val="12120F"/>
                           </a:solidFill>
-                          <a:latin typeface="Segoe UI"/>
+                          <a:latin typeface="Segoe UI" panose="020B0502040204020203"/>
                         </a:rPr>
                         <a:t>Commune (117)</a:t>
                       </a:r>
+                      <a:endParaRPr sz="900" b="1">
+                        <a:solidFill>
+                          <a:srgbClr val="12120F"/>
+                        </a:solidFill>
+                        <a:latin typeface="Segoe UI" panose="020B0502040204020203"/>
+                      </a:endParaRPr>
                     </a:p>
                   </a:txBody>
                   <a:tcPr anchor="ctr">
@@ -10205,10 +10859,16 @@
                           <a:solidFill>
                             <a:srgbClr val="55544F"/>
                           </a:solidFill>
-                          <a:latin typeface="Segoe UI"/>
+                          <a:latin typeface="Segoe UI" panose="020B0502040204020203"/>
                         </a:rPr>
                         <a:t>Ratios par habitant</a:t>
                       </a:r>
+                      <a:endParaRPr sz="900" b="0">
+                        <a:solidFill>
+                          <a:srgbClr val="55544F"/>
+                        </a:solidFill>
+                        <a:latin typeface="Segoe UI" panose="020B0502040204020203"/>
+                      </a:endParaRPr>
                     </a:p>
                   </a:txBody>
                   <a:tcPr anchor="ctr">
@@ -10227,10 +10887,16 @@
                           <a:solidFill>
                             <a:srgbClr val="55544F"/>
                           </a:solidFill>
-                          <a:latin typeface="Segoe UI"/>
+                          <a:latin typeface="Segoe UI" panose="020B0502040204020203"/>
                         </a:rPr>
                         <a:t>population validée à l'unité près</a:t>
                       </a:r>
+                      <a:endParaRPr sz="900" b="0">
+                        <a:solidFill>
+                          <a:srgbClr val="55544F"/>
+                        </a:solidFill>
+                        <a:latin typeface="Segoe UI" panose="020B0502040204020203"/>
+                      </a:endParaRPr>
                     </a:p>
                   </a:txBody>
                   <a:tcPr anchor="ctr">
@@ -10261,7 +10927,7 @@
           <a:noFill/>
         </p:spPr>
         <p:txBody>
-          <a:bodyPr wrap="square" lIns="0" rIns="0" tIns="0" bIns="0">
+          <a:bodyPr wrap="square" lIns="0" tIns="0" rIns="0" bIns="0">
             <a:spAutoFit/>
           </a:bodyPr>
           <a:lstStyle/>
@@ -10276,10 +10942,16 @@
                 <a:solidFill>
                   <a:srgbClr val="55544F"/>
                 </a:solidFill>
-                <a:latin typeface="Segoe UI"/>
+                <a:latin typeface="Segoe UI" panose="020B0502040204020203"/>
               </a:rPr>
               <a:t>Reconstruire les contours des 117 communes a été testé puis rejeté sur preuve : les découpages ne s'emboîtent pas — 65,6 % des points tombent dans une unité à cheval sur plusieurs communes. Publier ces contours aurait produit des densités fausses sans aucune alerte.</a:t>
             </a:r>
+            <a:endParaRPr sz="1000" b="0">
+              <a:solidFill>
+                <a:srgbClr val="55544F"/>
+              </a:solidFill>
+              <a:latin typeface="Segoe UI" panose="020B0502040204020203"/>
+            </a:endParaRPr>
           </a:p>
         </p:txBody>
       </p:sp>
@@ -10300,7 +10972,7 @@
           <a:noFill/>
         </p:spPr>
         <p:txBody>
-          <a:bodyPr wrap="square" lIns="0" rIns="0" tIns="0" bIns="0">
+          <a:bodyPr wrap="square" lIns="0" tIns="0" rIns="0" bIns="0">
             <a:spAutoFit/>
           </a:bodyPr>
           <a:lstStyle/>
@@ -10315,10 +10987,16 @@
                 <a:solidFill>
                   <a:srgbClr val="8B8A84"/>
                 </a:solidFill>
-                <a:latin typeface="Consolas"/>
+                <a:latin typeface="Consolas" panose="020B0609020204030204"/>
               </a:rPr>
               <a:t>L'INDICE DE PRIORITÉ — QUATRE COMPOSANTES</a:t>
             </a:r>
+            <a:endParaRPr sz="800" b="1">
+              <a:solidFill>
+                <a:srgbClr val="8B8A84"/>
+              </a:solidFill>
+              <a:latin typeface="Consolas" panose="020B0609020204030204"/>
+            </a:endParaRPr>
           </a:p>
         </p:txBody>
       </p:sp>
@@ -10356,10 +11034,16 @@
                           <a:solidFill>
                             <a:srgbClr val="FFFFFF"/>
                           </a:solidFill>
-                          <a:latin typeface="Segoe UI"/>
+                          <a:latin typeface="Segoe UI" panose="020B0502040204020203"/>
                         </a:rPr>
                         <a:t>Composante</a:t>
                       </a:r>
+                      <a:endParaRPr sz="900" b="1">
+                        <a:solidFill>
+                          <a:srgbClr val="FFFFFF"/>
+                        </a:solidFill>
+                        <a:latin typeface="Segoe UI" panose="020B0502040204020203"/>
+                      </a:endParaRPr>
                     </a:p>
                   </a:txBody>
                   <a:tcPr anchor="ctr">
@@ -10378,10 +11062,16 @@
                           <a:solidFill>
                             <a:srgbClr val="FFFFFF"/>
                           </a:solidFill>
-                          <a:latin typeface="Segoe UI"/>
+                          <a:latin typeface="Segoe UI" panose="020B0502040204020203"/>
                         </a:rPr>
                         <a:t>Mesure</a:t>
                       </a:r>
+                      <a:endParaRPr sz="900" b="1">
+                        <a:solidFill>
+                          <a:srgbClr val="FFFFFF"/>
+                        </a:solidFill>
+                        <a:latin typeface="Segoe UI" panose="020B0502040204020203"/>
+                      </a:endParaRPr>
                     </a:p>
                   </a:txBody>
                   <a:tcPr anchor="ctr">
@@ -10400,10 +11090,16 @@
                           <a:solidFill>
                             <a:srgbClr val="FFFFFF"/>
                           </a:solidFill>
-                          <a:latin typeface="Segoe UI"/>
+                          <a:latin typeface="Segoe UI" panose="020B0502040204020203"/>
                         </a:rPr>
                         <a:t>Poids</a:t>
                       </a:r>
+                      <a:endParaRPr sz="900" b="1">
+                        <a:solidFill>
+                          <a:srgbClr val="FFFFFF"/>
+                        </a:solidFill>
+                        <a:latin typeface="Segoe UI" panose="020B0502040204020203"/>
+                      </a:endParaRPr>
                     </a:p>
                   </a:txBody>
                   <a:tcPr anchor="ctr">
@@ -10424,10 +11120,16 @@
                           <a:solidFill>
                             <a:srgbClr val="12120F"/>
                           </a:solidFill>
-                          <a:latin typeface="Segoe UI"/>
+                          <a:latin typeface="Segoe UI" panose="020B0502040204020203"/>
                         </a:rPr>
                         <a:t>Déficit Mobile Money</a:t>
                       </a:r>
+                      <a:endParaRPr sz="900" b="1">
+                        <a:solidFill>
+                          <a:srgbClr val="12120F"/>
+                        </a:solidFill>
+                        <a:latin typeface="Segoe UI" panose="020B0502040204020203"/>
+                      </a:endParaRPr>
                     </a:p>
                   </a:txBody>
                   <a:tcPr anchor="ctr">
@@ -10446,10 +11148,16 @@
                           <a:solidFill>
                             <a:srgbClr val="55544F"/>
                           </a:solidFill>
-                          <a:latin typeface="Segoe UI"/>
+                          <a:latin typeface="Segoe UI" panose="020B0502040204020203"/>
                         </a:rPr>
                         <a:t>habitants par point</a:t>
                       </a:r>
+                      <a:endParaRPr sz="900" b="0">
+                        <a:solidFill>
+                          <a:srgbClr val="55544F"/>
+                        </a:solidFill>
+                        <a:latin typeface="Segoe UI" panose="020B0502040204020203"/>
+                      </a:endParaRPr>
                     </a:p>
                   </a:txBody>
                   <a:tcPr anchor="ctr">
@@ -10468,10 +11176,16 @@
                           <a:solidFill>
                             <a:srgbClr val="55544F"/>
                           </a:solidFill>
-                          <a:latin typeface="Segoe UI"/>
+                          <a:latin typeface="Segoe UI" panose="020B0502040204020203"/>
                         </a:rPr>
                         <a:t>30 %</a:t>
                       </a:r>
+                      <a:endParaRPr sz="900" b="0">
+                        <a:solidFill>
+                          <a:srgbClr val="55544F"/>
+                        </a:solidFill>
+                        <a:latin typeface="Segoe UI" panose="020B0502040204020203"/>
+                      </a:endParaRPr>
                     </a:p>
                   </a:txBody>
                   <a:tcPr anchor="ctr">
@@ -10492,10 +11206,16 @@
                           <a:solidFill>
                             <a:srgbClr val="12120F"/>
                           </a:solidFill>
-                          <a:latin typeface="Segoe UI"/>
+                          <a:latin typeface="Segoe UI" panose="020B0502040204020203"/>
                         </a:rPr>
                         <a:t>Déficit d'agences</a:t>
                       </a:r>
+                      <a:endParaRPr sz="900" b="1">
+                        <a:solidFill>
+                          <a:srgbClr val="12120F"/>
+                        </a:solidFill>
+                        <a:latin typeface="Segoe UI" panose="020B0502040204020203"/>
+                      </a:endParaRPr>
                     </a:p>
                   </a:txBody>
                   <a:tcPr anchor="ctr">
@@ -10514,10 +11234,16 @@
                           <a:solidFill>
                             <a:srgbClr val="55544F"/>
                           </a:solidFill>
-                          <a:latin typeface="Segoe UI"/>
+                          <a:latin typeface="Segoe UI" panose="020B0502040204020203"/>
                         </a:rPr>
                         <a:t>agences actives / 100 000 hab.</a:t>
                       </a:r>
+                      <a:endParaRPr sz="900" b="0">
+                        <a:solidFill>
+                          <a:srgbClr val="55544F"/>
+                        </a:solidFill>
+                        <a:latin typeface="Segoe UI" panose="020B0502040204020203"/>
+                      </a:endParaRPr>
                     </a:p>
                   </a:txBody>
                   <a:tcPr anchor="ctr">
@@ -10536,10 +11262,16 @@
                           <a:solidFill>
                             <a:srgbClr val="55544F"/>
                           </a:solidFill>
-                          <a:latin typeface="Segoe UI"/>
+                          <a:latin typeface="Segoe UI" panose="020B0502040204020203"/>
                         </a:rPr>
                         <a:t>25 %</a:t>
                       </a:r>
+                      <a:endParaRPr sz="900" b="0">
+                        <a:solidFill>
+                          <a:srgbClr val="55544F"/>
+                        </a:solidFill>
+                        <a:latin typeface="Segoe UI" panose="020B0502040204020203"/>
+                      </a:endParaRPr>
                     </a:p>
                   </a:txBody>
                   <a:tcPr anchor="ctr">
@@ -10560,10 +11292,16 @@
                           <a:solidFill>
                             <a:srgbClr val="12120F"/>
                           </a:solidFill>
-                          <a:latin typeface="Segoe UI"/>
+                          <a:latin typeface="Segoe UI" panose="020B0502040204020203"/>
                         </a:rPr>
                         <a:t>Éloignement</a:t>
                       </a:r>
+                      <a:endParaRPr sz="900" b="1">
+                        <a:solidFill>
+                          <a:srgbClr val="12120F"/>
+                        </a:solidFill>
+                        <a:latin typeface="Segoe UI" panose="020B0502040204020203"/>
+                      </a:endParaRPr>
                     </a:p>
                   </a:txBody>
                   <a:tcPr anchor="ctr">
@@ -10582,10 +11320,16 @@
                           <a:solidFill>
                             <a:srgbClr val="55544F"/>
                           </a:solidFill>
-                          <a:latin typeface="Segoe UI"/>
+                          <a:latin typeface="Segoe UI" panose="020B0502040204020203"/>
                         </a:rPr>
                         <a:t>distance à l'agence active</a:t>
                       </a:r>
+                      <a:endParaRPr sz="900" b="0">
+                        <a:solidFill>
+                          <a:srgbClr val="55544F"/>
+                        </a:solidFill>
+                        <a:latin typeface="Segoe UI" panose="020B0502040204020203"/>
+                      </a:endParaRPr>
                     </a:p>
                   </a:txBody>
                   <a:tcPr anchor="ctr">
@@ -10604,10 +11348,16 @@
                           <a:solidFill>
                             <a:srgbClr val="55544F"/>
                           </a:solidFill>
-                          <a:latin typeface="Segoe UI"/>
+                          <a:latin typeface="Segoe UI" panose="020B0502040204020203"/>
                         </a:rPr>
                         <a:t>25 %</a:t>
                       </a:r>
+                      <a:endParaRPr sz="900" b="0">
+                        <a:solidFill>
+                          <a:srgbClr val="55544F"/>
+                        </a:solidFill>
+                        <a:latin typeface="Segoe UI" panose="020B0502040204020203"/>
+                      </a:endParaRPr>
                     </a:p>
                   </a:txBody>
                   <a:tcPr anchor="ctr">
@@ -10628,10 +11378,16 @@
                           <a:solidFill>
                             <a:srgbClr val="12120F"/>
                           </a:solidFill>
-                          <a:latin typeface="Segoe UI"/>
+                          <a:latin typeface="Segoe UI" panose="020B0502040204020203"/>
                         </a:rPr>
                         <a:t>Enjeu démographique</a:t>
                       </a:r>
+                      <a:endParaRPr sz="900" b="1">
+                        <a:solidFill>
+                          <a:srgbClr val="12120F"/>
+                        </a:solidFill>
+                        <a:latin typeface="Segoe UI" panose="020B0502040204020203"/>
+                      </a:endParaRPr>
                     </a:p>
                   </a:txBody>
                   <a:tcPr anchor="ctr">
@@ -10650,10 +11406,16 @@
                           <a:solidFill>
                             <a:srgbClr val="55544F"/>
                           </a:solidFill>
-                          <a:latin typeface="Segoe UI"/>
+                          <a:latin typeface="Segoe UI" panose="020B0502040204020203"/>
                         </a:rPr>
                         <a:t>population concernée</a:t>
                       </a:r>
+                      <a:endParaRPr sz="900" b="0">
+                        <a:solidFill>
+                          <a:srgbClr val="55544F"/>
+                        </a:solidFill>
+                        <a:latin typeface="Segoe UI" panose="020B0502040204020203"/>
+                      </a:endParaRPr>
                     </a:p>
                   </a:txBody>
                   <a:tcPr anchor="ctr">
@@ -10672,10 +11434,16 @@
                           <a:solidFill>
                             <a:srgbClr val="55544F"/>
                           </a:solidFill>
-                          <a:latin typeface="Segoe UI"/>
+                          <a:latin typeface="Segoe UI" panose="020B0502040204020203"/>
                         </a:rPr>
                         <a:t>20 %</a:t>
                       </a:r>
+                      <a:endParaRPr sz="900" b="0">
+                        <a:solidFill>
+                          <a:srgbClr val="55544F"/>
+                        </a:solidFill>
+                        <a:latin typeface="Segoe UI" panose="020B0502040204020203"/>
+                      </a:endParaRPr>
                     </a:p>
                   </a:txBody>
                   <a:tcPr anchor="ctr">
@@ -10706,7 +11474,7 @@
           <a:noFill/>
         </p:spPr>
         <p:txBody>
-          <a:bodyPr wrap="square" lIns="0" rIns="0" tIns="0" bIns="0">
+          <a:bodyPr wrap="square" lIns="0" tIns="0" rIns="0" bIns="0">
             <a:spAutoFit/>
           </a:bodyPr>
           <a:lstStyle/>
@@ -10721,10 +11489,16 @@
                 <a:solidFill>
                   <a:srgbClr val="55544F"/>
                 </a:solidFill>
-                <a:latin typeface="Segoe UI"/>
+                <a:latin typeface="Segoe UI" panose="020B0502040204020203"/>
               </a:rPr>
               <a:t>Le déficit Mobile Money reprend la définition officielle du géoportail national — « nombre d'habitants par point mobile money ». L'indicateur central n'a pas été inventé pour ce travail.</a:t>
             </a:r>
+            <a:endParaRPr sz="1000" b="0">
+              <a:solidFill>
+                <a:srgbClr val="55544F"/>
+              </a:solidFill>
+              <a:latin typeface="Segoe UI" panose="020B0502040204020203"/>
+            </a:endParaRPr>
           </a:p>
           <a:p>
             <a:pPr algn="l">
@@ -10732,15 +11506,6 @@
                 <a:spcPct val="132000"/>
               </a:lnSpc>
             </a:pPr>
-            <a:r>
-              <a:rPr sz="1000" b="0">
-                <a:solidFill>
-                  <a:srgbClr val="55544F"/>
-                </a:solidFill>
-                <a:latin typeface="Segoe UI"/>
-              </a:rPr>
-              <a:t/>
-            </a:r>
           </a:p>
           <a:p>
             <a:pPr algn="l">
@@ -10753,10 +11518,16 @@
                 <a:solidFill>
                   <a:srgbClr val="55544F"/>
                 </a:solidFill>
-                <a:latin typeface="Segoe UI"/>
+                <a:latin typeface="Segoe UI" panose="020B0502040204020203"/>
               </a:rPr>
               <a:t>Ces pondérations sont un choix assumé. C'est exactement pourquoi 2 000 pondérations alternatives sont testées.</a:t>
             </a:r>
+            <a:endParaRPr sz="1000" b="0">
+              <a:solidFill>
+                <a:srgbClr val="55544F"/>
+              </a:solidFill>
+              <a:latin typeface="Segoe UI" panose="020B0502040204020203"/>
+            </a:endParaRPr>
           </a:p>
         </p:txBody>
       </p:sp>
@@ -10777,7 +11548,7 @@
           <a:noFill/>
         </p:spPr>
         <p:txBody>
-          <a:bodyPr wrap="square" lIns="0" rIns="0" tIns="0" bIns="0">
+          <a:bodyPr wrap="square" lIns="0" tIns="0" rIns="0" bIns="0">
             <a:spAutoFit/>
           </a:bodyPr>
           <a:lstStyle/>
@@ -10792,10 +11563,16 @@
                 <a:solidFill>
                   <a:srgbClr val="55544F"/>
                 </a:solidFill>
-                <a:latin typeface="Segoe UI"/>
+                <a:latin typeface="Segoe UI" panose="020B0502040204020203"/>
               </a:rPr>
               <a:t>Aucune valeur n'est imputée ni estimée. Toute donnée absente est déclarée absente. Aucun écrêtage n'est appliqué aux valeurs extrêmes : elles sont des faits, et leur influence est mesurée par une variante de calcul insensible aux extrêmes.</a:t>
             </a:r>
+            <a:endParaRPr sz="1000" b="0">
+              <a:solidFill>
+                <a:srgbClr val="55544F"/>
+              </a:solidFill>
+              <a:latin typeface="Segoe UI" panose="020B0502040204020203"/>
+            </a:endParaRPr>
           </a:p>
         </p:txBody>
       </p:sp>
@@ -10808,7 +11585,7 @@
 </file>
 
 <file path=ppt/slides/slide5.xml><?xml version="1.0" encoding="utf-8"?>
-<p:sld xmlns:a="http://schemas.openxmlformats.org/drawingml/2006/main" xmlns:p="http://schemas.openxmlformats.org/presentationml/2006/main" xmlns:r="http://schemas.openxmlformats.org/officeDocument/2006/relationships">
+<p:sld xmlns:a="http://schemas.openxmlformats.org/drawingml/2006/main" xmlns:r="http://schemas.openxmlformats.org/officeDocument/2006/relationships" xmlns:p="http://schemas.openxmlformats.org/presentationml/2006/main">
   <p:cSld>
     <p:spTree>
       <p:nvGrpSpPr>
@@ -11010,7 +11787,7 @@
           <a:noFill/>
         </p:spPr>
         <p:txBody>
-          <a:bodyPr wrap="square" lIns="0" rIns="0" tIns="0" bIns="0">
+          <a:bodyPr wrap="square" lIns="0" tIns="0" rIns="0" bIns="0">
             <a:spAutoFit/>
           </a:bodyPr>
           <a:lstStyle/>
@@ -11025,10 +11802,16 @@
                 <a:solidFill>
                   <a:srgbClr val="8B8A84"/>
                 </a:solidFill>
-                <a:latin typeface="Consolas"/>
+                <a:latin typeface="Consolas" panose="020B0609020204030204"/>
               </a:rPr>
               <a:t>DIAGNOSTIC</a:t>
             </a:r>
+            <a:endParaRPr sz="900" b="1">
+              <a:solidFill>
+                <a:srgbClr val="8B8A84"/>
+              </a:solidFill>
+              <a:latin typeface="Consolas" panose="020B0609020204030204"/>
+            </a:endParaRPr>
           </a:p>
         </p:txBody>
       </p:sp>
@@ -11049,7 +11832,7 @@
           <a:noFill/>
         </p:spPr>
         <p:txBody>
-          <a:bodyPr wrap="square" lIns="0" rIns="0" tIns="0" bIns="0">
+          <a:bodyPr wrap="square" lIns="0" tIns="0" rIns="0" bIns="0">
             <a:spAutoFit/>
           </a:bodyPr>
           <a:lstStyle/>
@@ -11064,10 +11847,16 @@
                 <a:solidFill>
                   <a:srgbClr val="12120F"/>
                 </a:solidFill>
-                <a:latin typeface="Segoe UI"/>
+                <a:latin typeface="Segoe UI" panose="020B0502040204020203"/>
               </a:rPr>
               <a:t>Diagnostic national</a:t>
             </a:r>
+            <a:endParaRPr sz="2800" b="1">
+              <a:solidFill>
+                <a:srgbClr val="12120F"/>
+              </a:solidFill>
+              <a:latin typeface="Segoe UI" panose="020B0502040204020203"/>
+            </a:endParaRPr>
           </a:p>
         </p:txBody>
       </p:sp>
@@ -11176,7 +11965,7 @@
           <a:noFill/>
         </p:spPr>
         <p:txBody>
-          <a:bodyPr wrap="square" lIns="0" rIns="0" tIns="0" bIns="0">
+          <a:bodyPr wrap="square" lIns="0" tIns="0" rIns="0" bIns="0">
             <a:spAutoFit/>
           </a:bodyPr>
           <a:lstStyle/>
@@ -11191,10 +11980,16 @@
                 <a:solidFill>
                   <a:srgbClr val="0F4D3B"/>
                 </a:solidFill>
-                <a:latin typeface="Segoe UI"/>
+                <a:latin typeface="Segoe UI" panose="020B0502040204020203"/>
               </a:rPr>
               <a:t>409 habitants par point de service en moyenne, mais un rapport de 1 à 12,7 entre préfectures.</a:t>
             </a:r>
+            <a:endParaRPr sz="1350" b="1">
+              <a:solidFill>
+                <a:srgbClr val="0F4D3B"/>
+              </a:solidFill>
+              <a:latin typeface="Segoe UI" panose="020B0502040204020203"/>
+            </a:endParaRPr>
           </a:p>
         </p:txBody>
       </p:sp>
@@ -11259,7 +12054,7 @@
           <a:noFill/>
         </p:spPr>
         <p:txBody>
-          <a:bodyPr wrap="square" lIns="0" rIns="0" tIns="0" bIns="0">
+          <a:bodyPr wrap="square" lIns="0" tIns="0" rIns="0" bIns="0">
             <a:spAutoFit/>
           </a:bodyPr>
           <a:lstStyle/>
@@ -11274,10 +12069,16 @@
                 <a:solidFill>
                   <a:srgbClr val="8B8A84"/>
                 </a:solidFill>
-                <a:latin typeface="Consolas"/>
+                <a:latin typeface="Consolas" panose="020B0609020204030204"/>
               </a:rPr>
               <a:t>République togolaise · Défi Économie numérique · Données ouvertes PRISE 2021-2022, RGPH-5 2022, COD-AB 2021</a:t>
             </a:r>
+            <a:endParaRPr sz="800" b="0">
+              <a:solidFill>
+                <a:srgbClr val="8B8A84"/>
+              </a:solidFill>
+              <a:latin typeface="Consolas" panose="020B0609020204030204"/>
+            </a:endParaRPr>
           </a:p>
         </p:txBody>
       </p:sp>
@@ -11298,7 +12099,7 @@
           <a:noFill/>
         </p:spPr>
         <p:txBody>
-          <a:bodyPr wrap="square" lIns="0" rIns="0" tIns="0" bIns="0">
+          <a:bodyPr wrap="square" lIns="0" tIns="0" rIns="0" bIns="0">
             <a:spAutoFit/>
           </a:bodyPr>
           <a:lstStyle/>
@@ -11313,10 +12114,16 @@
                 <a:solidFill>
                   <a:srgbClr val="8B8A84"/>
                 </a:solidFill>
-                <a:latin typeface="Consolas"/>
+                <a:latin typeface="Consolas" panose="020B0609020204030204"/>
               </a:rPr>
               <a:t>05 / 10</a:t>
             </a:r>
+            <a:endParaRPr sz="800" b="1">
+              <a:solidFill>
+                <a:srgbClr val="8B8A84"/>
+              </a:solidFill>
+              <a:latin typeface="Consolas" panose="020B0609020204030204"/>
+            </a:endParaRPr>
           </a:p>
         </p:txBody>
       </p:sp>
@@ -11329,7 +12136,7 @@
           <p:nvPr/>
         </p:nvPicPr>
         <p:blipFill>
-          <a:blip r:embed="rId2"/>
+          <a:blip r:embed="rId1"/>
           <a:stretch>
             <a:fillRect/>
           </a:stretch>
@@ -11451,7 +12258,7 @@
           <a:noFill/>
         </p:spPr>
         <p:txBody>
-          <a:bodyPr wrap="square" lIns="0" rIns="0" tIns="0" bIns="0">
+          <a:bodyPr wrap="square" lIns="0" tIns="0" rIns="0" bIns="0">
             <a:spAutoFit/>
           </a:bodyPr>
           <a:lstStyle/>
@@ -11466,10 +12273,16 @@
                 <a:solidFill>
                   <a:srgbClr val="8B8A84"/>
                 </a:solidFill>
-                <a:latin typeface="Consolas"/>
+                <a:latin typeface="Consolas" panose="020B0609020204030204"/>
               </a:rPr>
               <a:t>MOYENNE NATIONALE</a:t>
             </a:r>
+            <a:endParaRPr sz="750" b="1">
+              <a:solidFill>
+                <a:srgbClr val="8B8A84"/>
+              </a:solidFill>
+              <a:latin typeface="Consolas" panose="020B0609020204030204"/>
+            </a:endParaRPr>
           </a:p>
         </p:txBody>
       </p:sp>
@@ -11490,7 +12303,7 @@
           <a:noFill/>
         </p:spPr>
         <p:txBody>
-          <a:bodyPr wrap="square" lIns="0" rIns="0" tIns="0" bIns="0">
+          <a:bodyPr wrap="square" lIns="0" tIns="0" rIns="0" bIns="0">
             <a:spAutoFit/>
           </a:bodyPr>
           <a:lstStyle/>
@@ -11505,10 +12318,16 @@
                 <a:solidFill>
                   <a:srgbClr val="12120F"/>
                 </a:solidFill>
-                <a:latin typeface="Segoe UI"/>
+                <a:latin typeface="Segoe UI" panose="020B0502040204020203"/>
               </a:rPr>
               <a:t>409</a:t>
             </a:r>
+            <a:endParaRPr sz="2300" b="1">
+              <a:solidFill>
+                <a:srgbClr val="12120F"/>
+              </a:solidFill>
+              <a:latin typeface="Segoe UI" panose="020B0502040204020203"/>
+            </a:endParaRPr>
           </a:p>
         </p:txBody>
       </p:sp>
@@ -11529,7 +12348,7 @@
           <a:noFill/>
         </p:spPr>
         <p:txBody>
-          <a:bodyPr wrap="square" lIns="0" rIns="0" tIns="0" bIns="0">
+          <a:bodyPr wrap="square" lIns="0" tIns="0" rIns="0" bIns="0">
             <a:spAutoFit/>
           </a:bodyPr>
           <a:lstStyle/>
@@ -11544,10 +12363,16 @@
                 <a:solidFill>
                   <a:srgbClr val="55544F"/>
                 </a:solidFill>
-                <a:latin typeface="Segoe UI"/>
+                <a:latin typeface="Segoe UI" panose="020B0502040204020203"/>
               </a:rPr>
               <a:t>habitants par point Mobile Money</a:t>
             </a:r>
+            <a:endParaRPr sz="800" b="0">
+              <a:solidFill>
+                <a:srgbClr val="55544F"/>
+              </a:solidFill>
+              <a:latin typeface="Segoe UI" panose="020B0502040204020203"/>
+            </a:endParaRPr>
           </a:p>
         </p:txBody>
       </p:sp>
@@ -11658,7 +12483,7 @@
           <a:noFill/>
         </p:spPr>
         <p:txBody>
-          <a:bodyPr wrap="square" lIns="0" rIns="0" tIns="0" bIns="0">
+          <a:bodyPr wrap="square" lIns="0" tIns="0" rIns="0" bIns="0">
             <a:spAutoFit/>
           </a:bodyPr>
           <a:lstStyle/>
@@ -11673,10 +12498,16 @@
                 <a:solidFill>
                   <a:srgbClr val="8B8A84"/>
                 </a:solidFill>
-                <a:latin typeface="Consolas"/>
+                <a:latin typeface="Consolas" panose="020B0609020204030204"/>
               </a:rPr>
               <a:t>PRÉFECTURE LA MOINS DESSERVIE</a:t>
             </a:r>
+            <a:endParaRPr sz="750" b="1">
+              <a:solidFill>
+                <a:srgbClr val="8B8A84"/>
+              </a:solidFill>
+              <a:latin typeface="Consolas" panose="020B0609020204030204"/>
+            </a:endParaRPr>
           </a:p>
         </p:txBody>
       </p:sp>
@@ -11697,7 +12528,7 @@
           <a:noFill/>
         </p:spPr>
         <p:txBody>
-          <a:bodyPr wrap="square" lIns="0" rIns="0" tIns="0" bIns="0">
+          <a:bodyPr wrap="square" lIns="0" tIns="0" rIns="0" bIns="0">
             <a:spAutoFit/>
           </a:bodyPr>
           <a:lstStyle/>
@@ -11712,10 +12543,16 @@
                 <a:solidFill>
                   <a:srgbClr val="12120F"/>
                 </a:solidFill>
-                <a:latin typeface="Segoe UI"/>
+                <a:latin typeface="Segoe UI" panose="020B0502040204020203"/>
               </a:rPr>
               <a:t>2 155</a:t>
             </a:r>
+            <a:endParaRPr sz="2300" b="1">
+              <a:solidFill>
+                <a:srgbClr val="12120F"/>
+              </a:solidFill>
+              <a:latin typeface="Segoe UI" panose="020B0502040204020203"/>
+            </a:endParaRPr>
           </a:p>
         </p:txBody>
       </p:sp>
@@ -11736,7 +12573,7 @@
           <a:noFill/>
         </p:spPr>
         <p:txBody>
-          <a:bodyPr wrap="square" lIns="0" rIns="0" tIns="0" bIns="0">
+          <a:bodyPr wrap="square" lIns="0" tIns="0" rIns="0" bIns="0">
             <a:spAutoFit/>
           </a:bodyPr>
           <a:lstStyle/>
@@ -11751,10 +12588,16 @@
                 <a:solidFill>
                   <a:srgbClr val="55544F"/>
                 </a:solidFill>
-                <a:latin typeface="Segoe UI"/>
+                <a:latin typeface="Segoe UI" panose="020B0502040204020203"/>
               </a:rPr>
               <a:t>Kpendjal · 5,3 × la moyenne</a:t>
             </a:r>
+            <a:endParaRPr sz="800" b="0">
+              <a:solidFill>
+                <a:srgbClr val="55544F"/>
+              </a:solidFill>
+              <a:latin typeface="Segoe UI" panose="020B0502040204020203"/>
+            </a:endParaRPr>
           </a:p>
         </p:txBody>
       </p:sp>
@@ -11865,7 +12708,7 @@
           <a:noFill/>
         </p:spPr>
         <p:txBody>
-          <a:bodyPr wrap="square" lIns="0" rIns="0" tIns="0" bIns="0">
+          <a:bodyPr wrap="square" lIns="0" tIns="0" rIns="0" bIns="0">
             <a:spAutoFit/>
           </a:bodyPr>
           <a:lstStyle/>
@@ -11880,10 +12723,16 @@
                 <a:solidFill>
                   <a:srgbClr val="8B8A84"/>
                 </a:solidFill>
-                <a:latin typeface="Consolas"/>
+                <a:latin typeface="Consolas" panose="020B0609020204030204"/>
               </a:rPr>
               <a:t>PRÉFECTURES AU-DESSUS DE LA MOYENNE</a:t>
             </a:r>
+            <a:endParaRPr sz="750" b="1">
+              <a:solidFill>
+                <a:srgbClr val="8B8A84"/>
+              </a:solidFill>
+              <a:latin typeface="Consolas" panose="020B0609020204030204"/>
+            </a:endParaRPr>
           </a:p>
         </p:txBody>
       </p:sp>
@@ -11904,7 +12753,7 @@
           <a:noFill/>
         </p:spPr>
         <p:txBody>
-          <a:bodyPr wrap="square" lIns="0" rIns="0" tIns="0" bIns="0">
+          <a:bodyPr wrap="square" lIns="0" tIns="0" rIns="0" bIns="0">
             <a:spAutoFit/>
           </a:bodyPr>
           <a:lstStyle/>
@@ -11919,10 +12768,16 @@
                 <a:solidFill>
                   <a:srgbClr val="12120F"/>
                 </a:solidFill>
-                <a:latin typeface="Segoe UI"/>
+                <a:latin typeface="Segoe UI" panose="020B0502040204020203"/>
               </a:rPr>
               <a:t>24 / 39</a:t>
             </a:r>
+            <a:endParaRPr sz="2300" b="1">
+              <a:solidFill>
+                <a:srgbClr val="12120F"/>
+              </a:solidFill>
+              <a:latin typeface="Segoe UI" panose="020B0502040204020203"/>
+            </a:endParaRPr>
           </a:p>
         </p:txBody>
       </p:sp>
@@ -11943,7 +12798,7 @@
           <a:noFill/>
         </p:spPr>
         <p:txBody>
-          <a:bodyPr wrap="square" lIns="0" rIns="0" tIns="0" bIns="0">
+          <a:bodyPr wrap="square" lIns="0" tIns="0" rIns="0" bIns="0">
             <a:spAutoFit/>
           </a:bodyPr>
           <a:lstStyle/>
@@ -11958,10 +12813,16 @@
                 <a:solidFill>
                   <a:srgbClr val="55544F"/>
                 </a:solidFill>
-                <a:latin typeface="Segoe UI"/>
+                <a:latin typeface="Segoe UI" panose="020B0502040204020203"/>
               </a:rPr>
               <a:t>moins bien desservies que le pays</a:t>
             </a:r>
+            <a:endParaRPr sz="800" b="0">
+              <a:solidFill>
+                <a:srgbClr val="55544F"/>
+              </a:solidFill>
+              <a:latin typeface="Segoe UI" panose="020B0502040204020203"/>
+            </a:endParaRPr>
           </a:p>
         </p:txBody>
       </p:sp>
@@ -12072,7 +12933,7 @@
           <a:noFill/>
         </p:spPr>
         <p:txBody>
-          <a:bodyPr wrap="square" lIns="0" rIns="0" tIns="0" bIns="0">
+          <a:bodyPr wrap="square" lIns="0" tIns="0" rIns="0" bIns="0">
             <a:spAutoFit/>
           </a:bodyPr>
           <a:lstStyle/>
@@ -12087,10 +12948,16 @@
                 <a:solidFill>
                   <a:srgbClr val="8B8A84"/>
                 </a:solidFill>
-                <a:latin typeface="Consolas"/>
+                <a:latin typeface="Consolas" panose="020B0609020204030204"/>
               </a:rPr>
               <a:t>COMMUNES SANS AGENCE ACTIVE</a:t>
             </a:r>
+            <a:endParaRPr sz="750" b="1">
+              <a:solidFill>
+                <a:srgbClr val="8B8A84"/>
+              </a:solidFill>
+              <a:latin typeface="Consolas" panose="020B0609020204030204"/>
+            </a:endParaRPr>
           </a:p>
         </p:txBody>
       </p:sp>
@@ -12111,7 +12978,7 @@
           <a:noFill/>
         </p:spPr>
         <p:txBody>
-          <a:bodyPr wrap="square" lIns="0" rIns="0" tIns="0" bIns="0">
+          <a:bodyPr wrap="square" lIns="0" tIns="0" rIns="0" bIns="0">
             <a:spAutoFit/>
           </a:bodyPr>
           <a:lstStyle/>
@@ -12126,10 +12993,16 @@
                 <a:solidFill>
                   <a:srgbClr val="12120F"/>
                 </a:solidFill>
-                <a:latin typeface="Segoe UI"/>
+                <a:latin typeface="Segoe UI" panose="020B0502040204020203"/>
               </a:rPr>
               <a:t>75 / 117</a:t>
             </a:r>
+            <a:endParaRPr sz="2300" b="1">
+              <a:solidFill>
+                <a:srgbClr val="12120F"/>
+              </a:solidFill>
+              <a:latin typeface="Segoe UI" panose="020B0502040204020203"/>
+            </a:endParaRPr>
           </a:p>
         </p:txBody>
       </p:sp>
@@ -12150,7 +13023,7 @@
           <a:noFill/>
         </p:spPr>
         <p:txBody>
-          <a:bodyPr wrap="square" lIns="0" rIns="0" tIns="0" bIns="0">
+          <a:bodyPr wrap="square" lIns="0" tIns="0" rIns="0" bIns="0">
             <a:spAutoFit/>
           </a:bodyPr>
           <a:lstStyle/>
@@ -12165,10 +13038,16 @@
                 <a:solidFill>
                   <a:srgbClr val="55544F"/>
                 </a:solidFill>
-                <a:latin typeface="Segoe UI"/>
+                <a:latin typeface="Segoe UI" panose="020B0502040204020203"/>
               </a:rPr>
               <a:t>3 371 081 habitants</a:t>
             </a:r>
+            <a:endParaRPr sz="800" b="0">
+              <a:solidFill>
+                <a:srgbClr val="55544F"/>
+              </a:solidFill>
+              <a:latin typeface="Segoe UI" panose="020B0502040204020203"/>
+            </a:endParaRPr>
           </a:p>
         </p:txBody>
       </p:sp>
@@ -12189,7 +13068,7 @@
           <a:noFill/>
         </p:spPr>
         <p:txBody>
-          <a:bodyPr wrap="square" lIns="0" rIns="0" tIns="0" bIns="0">
+          <a:bodyPr wrap="square" lIns="0" tIns="0" rIns="0" bIns="0">
             <a:spAutoFit/>
           </a:bodyPr>
           <a:lstStyle/>
@@ -12199,15 +13078,12 @@
                 <a:spcPct val="122000"/>
               </a:lnSpc>
             </a:pPr>
-            <a:r>
-              <a:rPr sz="800" b="0">
-                <a:solidFill>
-                  <a:srgbClr val="55544F"/>
-                </a:solidFill>
-                <a:latin typeface="Segoe UI"/>
-              </a:rPr>
-              <a:t/>
-            </a:r>
+            <a:endParaRPr sz="800" b="0">
+              <a:solidFill>
+                <a:srgbClr val="55544F"/>
+              </a:solidFill>
+              <a:latin typeface="Segoe UI" panose="020B0502040204020203"/>
+            </a:endParaRPr>
           </a:p>
         </p:txBody>
       </p:sp>
@@ -12220,7 +13096,7 @@
 </file>
 
 <file path=ppt/slides/slide6.xml><?xml version="1.0" encoding="utf-8"?>
-<p:sld xmlns:a="http://schemas.openxmlformats.org/drawingml/2006/main" xmlns:p="http://schemas.openxmlformats.org/presentationml/2006/main" xmlns:r="http://schemas.openxmlformats.org/officeDocument/2006/relationships">
+<p:sld xmlns:a="http://schemas.openxmlformats.org/drawingml/2006/main" xmlns:r="http://schemas.openxmlformats.org/officeDocument/2006/relationships" xmlns:p="http://schemas.openxmlformats.org/presentationml/2006/main">
   <p:cSld>
     <p:spTree>
       <p:nvGrpSpPr>
@@ -12422,7 +13298,7 @@
           <a:noFill/>
         </p:spPr>
         <p:txBody>
-          <a:bodyPr wrap="square" lIns="0" rIns="0" tIns="0" bIns="0">
+          <a:bodyPr wrap="square" lIns="0" tIns="0" rIns="0" bIns="0">
             <a:spAutoFit/>
           </a:bodyPr>
           <a:lstStyle/>
@@ -12437,10 +13313,16 @@
                 <a:solidFill>
                   <a:srgbClr val="8B8A84"/>
                 </a:solidFill>
-                <a:latin typeface="Consolas"/>
+                <a:latin typeface="Consolas" panose="020B0609020204030204"/>
               </a:rPr>
               <a:t>GÉOSPATIAL</a:t>
             </a:r>
+            <a:endParaRPr sz="900" b="1">
+              <a:solidFill>
+                <a:srgbClr val="8B8A84"/>
+              </a:solidFill>
+              <a:latin typeface="Consolas" panose="020B0609020204030204"/>
+            </a:endParaRPr>
           </a:p>
         </p:txBody>
       </p:sp>
@@ -12461,7 +13343,7 @@
           <a:noFill/>
         </p:spPr>
         <p:txBody>
-          <a:bodyPr wrap="square" lIns="0" rIns="0" tIns="0" bIns="0">
+          <a:bodyPr wrap="square" lIns="0" tIns="0" rIns="0" bIns="0">
             <a:spAutoFit/>
           </a:bodyPr>
           <a:lstStyle/>
@@ -12476,10 +13358,16 @@
                 <a:solidFill>
                   <a:srgbClr val="12120F"/>
                 </a:solidFill>
-                <a:latin typeface="Segoe UI"/>
+                <a:latin typeface="Segoe UI" panose="020B0502040204020203"/>
               </a:rPr>
               <a:t>Analyse géospatiale et inégalités territoriales</a:t>
             </a:r>
+            <a:endParaRPr sz="2800" b="1">
+              <a:solidFill>
+                <a:srgbClr val="12120F"/>
+              </a:solidFill>
+              <a:latin typeface="Segoe UI" panose="020B0502040204020203"/>
+            </a:endParaRPr>
           </a:p>
         </p:txBody>
       </p:sp>
@@ -12588,7 +13476,7 @@
           <a:noFill/>
         </p:spPr>
         <p:txBody>
-          <a:bodyPr wrap="square" lIns="0" rIns="0" tIns="0" bIns="0">
+          <a:bodyPr wrap="square" lIns="0" tIns="0" rIns="0" bIns="0">
             <a:spAutoFit/>
           </a:bodyPr>
           <a:lstStyle/>
@@ -12603,10 +13491,16 @@
                 <a:solidFill>
                   <a:srgbClr val="0F4D3B"/>
                 </a:solidFill>
-                <a:latin typeface="Segoe UI"/>
+                <a:latin typeface="Segoe UI" panose="020B0502040204020203"/>
               </a:rPr>
               <a:t>La moitié la moins bien desservie de la population ne dispose que de 27 % des points de service.</a:t>
             </a:r>
+            <a:endParaRPr sz="1350" b="1">
+              <a:solidFill>
+                <a:srgbClr val="0F4D3B"/>
+              </a:solidFill>
+              <a:latin typeface="Segoe UI" panose="020B0502040204020203"/>
+            </a:endParaRPr>
           </a:p>
         </p:txBody>
       </p:sp>
@@ -12671,7 +13565,7 @@
           <a:noFill/>
         </p:spPr>
         <p:txBody>
-          <a:bodyPr wrap="square" lIns="0" rIns="0" tIns="0" bIns="0">
+          <a:bodyPr wrap="square" lIns="0" tIns="0" rIns="0" bIns="0">
             <a:spAutoFit/>
           </a:bodyPr>
           <a:lstStyle/>
@@ -12686,10 +13580,16 @@
                 <a:solidFill>
                   <a:srgbClr val="8B8A84"/>
                 </a:solidFill>
-                <a:latin typeface="Consolas"/>
+                <a:latin typeface="Consolas" panose="020B0609020204030204"/>
               </a:rPr>
               <a:t>République togolaise · Défi Économie numérique · Données ouvertes PRISE 2021-2022, RGPH-5 2022, COD-AB 2021</a:t>
             </a:r>
+            <a:endParaRPr sz="800" b="0">
+              <a:solidFill>
+                <a:srgbClr val="8B8A84"/>
+              </a:solidFill>
+              <a:latin typeface="Consolas" panose="020B0609020204030204"/>
+            </a:endParaRPr>
           </a:p>
         </p:txBody>
       </p:sp>
@@ -12710,7 +13610,7 @@
           <a:noFill/>
         </p:spPr>
         <p:txBody>
-          <a:bodyPr wrap="square" lIns="0" rIns="0" tIns="0" bIns="0">
+          <a:bodyPr wrap="square" lIns="0" tIns="0" rIns="0" bIns="0">
             <a:spAutoFit/>
           </a:bodyPr>
           <a:lstStyle/>
@@ -12725,16 +13625,46 @@
                 <a:solidFill>
                   <a:srgbClr val="8B8A84"/>
                 </a:solidFill>
-                <a:latin typeface="Consolas"/>
+                <a:latin typeface="Consolas" panose="020B0609020204030204"/>
               </a:rPr>
               <a:t>06 / 10</a:t>
             </a:r>
+            <a:endParaRPr sz="800" b="1">
+              <a:solidFill>
+                <a:srgbClr val="8B8A84"/>
+              </a:solidFill>
+              <a:latin typeface="Consolas" panose="020B0609020204030204"/>
+            </a:endParaRPr>
           </a:p>
         </p:txBody>
       </p:sp>
       <p:pic>
         <p:nvPicPr>
           <p:cNvPr id="14" name="Picture 13" descr="quadrant.png"/>
+          <p:cNvPicPr>
+            <a:picLocks noChangeAspect="1"/>
+          </p:cNvPicPr>
+          <p:nvPr/>
+        </p:nvPicPr>
+        <p:blipFill>
+          <a:blip r:embed="rId1"/>
+          <a:stretch>
+            <a:fillRect/>
+          </a:stretch>
+        </p:blipFill>
+        <p:spPr>
+          <a:xfrm>
+            <a:off x="502920" y="1920240"/>
+            <a:ext cx="5015010" cy="3931920"/>
+          </a:xfrm>
+          <a:prstGeom prst="rect">
+            <a:avLst/>
+          </a:prstGeom>
+        </p:spPr>
+      </p:pic>
+      <p:pic>
+        <p:nvPicPr>
+          <p:cNvPr id="15" name="Picture 14" descr="concentration.png"/>
           <p:cNvPicPr>
             <a:picLocks noChangeAspect="1"/>
           </p:cNvPicPr>
@@ -12748,30 +13678,6 @@
         </p:blipFill>
         <p:spPr>
           <a:xfrm>
-            <a:off x="502920" y="1920240"/>
-            <a:ext cx="5015010" cy="3931920"/>
-          </a:xfrm>
-          <a:prstGeom prst="rect">
-            <a:avLst/>
-          </a:prstGeom>
-        </p:spPr>
-      </p:pic>
-      <p:pic>
-        <p:nvPicPr>
-          <p:cNvPr id="15" name="Picture 14" descr="concentration.png"/>
-          <p:cNvPicPr>
-            <a:picLocks noChangeAspect="1"/>
-          </p:cNvPicPr>
-          <p:nvPr/>
-        </p:nvPicPr>
-        <p:blipFill>
-          <a:blip r:embed="rId3"/>
-          <a:stretch>
-            <a:fillRect/>
-          </a:stretch>
-        </p:blipFill>
-        <p:spPr>
-          <a:xfrm>
             <a:off x="6400800" y="1920240"/>
             <a:ext cx="4842305" cy="3931920"/>
           </a:xfrm>
@@ -12797,7 +13703,7 @@
           <a:noFill/>
         </p:spPr>
         <p:txBody>
-          <a:bodyPr wrap="square" lIns="0" rIns="0" tIns="0" bIns="0">
+          <a:bodyPr wrap="square" lIns="0" tIns="0" rIns="0" bIns="0">
             <a:spAutoFit/>
           </a:bodyPr>
           <a:lstStyle/>
@@ -12812,10 +13718,16 @@
                 <a:solidFill>
                   <a:srgbClr val="55544F"/>
                 </a:solidFill>
-                <a:latin typeface="Segoe UI"/>
+                <a:latin typeface="Segoe UI" panose="020B0502040204020203"/>
               </a:rPr>
               <a:t>12 préfectures sont à la fois plus peuplées que la médiane nationale et moins bien desservies que la moyenne : c'est là qu'un investissement touche le plus d'habitants.</a:t>
             </a:r>
+            <a:endParaRPr sz="1000" b="0">
+              <a:solidFill>
+                <a:srgbClr val="55544F"/>
+              </a:solidFill>
+              <a:latin typeface="Segoe UI" panose="020B0502040204020203"/>
+            </a:endParaRPr>
           </a:p>
         </p:txBody>
       </p:sp>
@@ -12836,7 +13748,7 @@
           <a:noFill/>
         </p:spPr>
         <p:txBody>
-          <a:bodyPr wrap="square" lIns="0" rIns="0" tIns="0" bIns="0">
+          <a:bodyPr wrap="square" lIns="0" tIns="0" rIns="0" bIns="0">
             <a:spAutoFit/>
           </a:bodyPr>
           <a:lstStyle/>
@@ -12851,10 +13763,16 @@
                 <a:solidFill>
                   <a:srgbClr val="55544F"/>
                 </a:solidFill>
-                <a:latin typeface="Segoe UI"/>
+                <a:latin typeface="Segoe UI" panose="020B0502040204020203"/>
               </a:rPr>
               <a:t>L'écart à la diagonale mesure la concentration. Les distances sont calculées après reprojection métrique — en degrés, elles seraient fausses.</a:t>
             </a:r>
+            <a:endParaRPr sz="1000" b="0">
+              <a:solidFill>
+                <a:srgbClr val="55544F"/>
+              </a:solidFill>
+              <a:latin typeface="Segoe UI" panose="020B0502040204020203"/>
+            </a:endParaRPr>
           </a:p>
         </p:txBody>
       </p:sp>
@@ -12867,7 +13785,7 @@
 </file>
 
 <file path=ppt/slides/slide7.xml><?xml version="1.0" encoding="utf-8"?>
-<p:sld xmlns:a="http://schemas.openxmlformats.org/drawingml/2006/main" xmlns:p="http://schemas.openxmlformats.org/presentationml/2006/main" xmlns:r="http://schemas.openxmlformats.org/officeDocument/2006/relationships">
+<p:sld xmlns:a="http://schemas.openxmlformats.org/drawingml/2006/main" xmlns:r="http://schemas.openxmlformats.org/officeDocument/2006/relationships" xmlns:p="http://schemas.openxmlformats.org/presentationml/2006/main">
   <p:cSld>
     <p:spTree>
       <p:nvGrpSpPr>
@@ -13069,7 +13987,7 @@
           <a:noFill/>
         </p:spPr>
         <p:txBody>
-          <a:bodyPr wrap="square" lIns="0" rIns="0" tIns="0" bIns="0">
+          <a:bodyPr wrap="square" lIns="0" tIns="0" rIns="0" bIns="0">
             <a:spAutoFit/>
           </a:bodyPr>
           <a:lstStyle/>
@@ -13084,10 +14002,16 @@
                 <a:solidFill>
                   <a:srgbClr val="8B8A84"/>
                 </a:solidFill>
-                <a:latin typeface="Consolas"/>
+                <a:latin typeface="Consolas" panose="020B0609020204030204"/>
               </a:rPr>
               <a:t>PRIORISATION</a:t>
             </a:r>
+            <a:endParaRPr sz="900" b="1">
+              <a:solidFill>
+                <a:srgbClr val="8B8A84"/>
+              </a:solidFill>
+              <a:latin typeface="Consolas" panose="020B0609020204030204"/>
+            </a:endParaRPr>
           </a:p>
         </p:txBody>
       </p:sp>
@@ -13108,7 +14032,7 @@
           <a:noFill/>
         </p:spPr>
         <p:txBody>
-          <a:bodyPr wrap="square" lIns="0" rIns="0" tIns="0" bIns="0">
+          <a:bodyPr wrap="square" lIns="0" tIns="0" rIns="0" bIns="0">
             <a:spAutoFit/>
           </a:bodyPr>
           <a:lstStyle/>
@@ -13123,10 +14047,16 @@
                 <a:solidFill>
                   <a:srgbClr val="12120F"/>
                 </a:solidFill>
-                <a:latin typeface="Segoe UI"/>
+                <a:latin typeface="Segoe UI" panose="020B0502040204020203"/>
               </a:rPr>
               <a:t>Zones prioritaires · indice DCPI</a:t>
             </a:r>
+            <a:endParaRPr sz="2800" b="1">
+              <a:solidFill>
+                <a:srgbClr val="12120F"/>
+              </a:solidFill>
+              <a:latin typeface="Segoe UI" panose="020B0502040204020203"/>
+            </a:endParaRPr>
           </a:p>
         </p:txBody>
       </p:sp>
@@ -13235,7 +14165,7 @@
           <a:noFill/>
         </p:spPr>
         <p:txBody>
-          <a:bodyPr wrap="square" lIns="0" rIns="0" tIns="0" bIns="0">
+          <a:bodyPr wrap="square" lIns="0" tIns="0" rIns="0" bIns="0">
             <a:spAutoFit/>
           </a:bodyPr>
           <a:lstStyle/>
@@ -13250,10 +14180,16 @@
                 <a:solidFill>
                   <a:srgbClr val="0F4D3B"/>
                 </a:solidFill>
-                <a:latin typeface="Segoe UI"/>
+                <a:latin typeface="Segoe UI" panose="020B0502040204020203"/>
               </a:rPr>
               <a:t>Neuf préfectures restent dans le top 10 pour au moins 90 % de 2 000 pondérations testées : leur priorité ne dépend pas de la méthode.</a:t>
             </a:r>
+            <a:endParaRPr sz="1350" b="1">
+              <a:solidFill>
+                <a:srgbClr val="0F4D3B"/>
+              </a:solidFill>
+              <a:latin typeface="Segoe UI" panose="020B0502040204020203"/>
+            </a:endParaRPr>
           </a:p>
         </p:txBody>
       </p:sp>
@@ -13318,7 +14254,7 @@
           <a:noFill/>
         </p:spPr>
         <p:txBody>
-          <a:bodyPr wrap="square" lIns="0" rIns="0" tIns="0" bIns="0">
+          <a:bodyPr wrap="square" lIns="0" tIns="0" rIns="0" bIns="0">
             <a:spAutoFit/>
           </a:bodyPr>
           <a:lstStyle/>
@@ -13333,10 +14269,16 @@
                 <a:solidFill>
                   <a:srgbClr val="8B8A84"/>
                 </a:solidFill>
-                <a:latin typeface="Consolas"/>
+                <a:latin typeface="Consolas" panose="020B0609020204030204"/>
               </a:rPr>
               <a:t>République togolaise · Défi Économie numérique · Données ouvertes PRISE 2021-2022, RGPH-5 2022, COD-AB 2021</a:t>
             </a:r>
+            <a:endParaRPr sz="800" b="0">
+              <a:solidFill>
+                <a:srgbClr val="8B8A84"/>
+              </a:solidFill>
+              <a:latin typeface="Consolas" panose="020B0609020204030204"/>
+            </a:endParaRPr>
           </a:p>
         </p:txBody>
       </p:sp>
@@ -13357,7 +14299,7 @@
           <a:noFill/>
         </p:spPr>
         <p:txBody>
-          <a:bodyPr wrap="square" lIns="0" rIns="0" tIns="0" bIns="0">
+          <a:bodyPr wrap="square" lIns="0" tIns="0" rIns="0" bIns="0">
             <a:spAutoFit/>
           </a:bodyPr>
           <a:lstStyle/>
@@ -13372,10 +14314,16 @@
                 <a:solidFill>
                   <a:srgbClr val="8B8A84"/>
                 </a:solidFill>
-                <a:latin typeface="Consolas"/>
+                <a:latin typeface="Consolas" panose="020B0609020204030204"/>
               </a:rPr>
               <a:t>07 / 10</a:t>
             </a:r>
+            <a:endParaRPr sz="800" b="1">
+              <a:solidFill>
+                <a:srgbClr val="8B8A84"/>
+              </a:solidFill>
+              <a:latin typeface="Consolas" panose="020B0609020204030204"/>
+            </a:endParaRPr>
           </a:p>
         </p:txBody>
       </p:sp>
@@ -13388,7 +14336,7 @@
           <p:nvPr/>
         </p:nvPicPr>
         <p:blipFill>
-          <a:blip r:embed="rId2"/>
+          <a:blip r:embed="rId1"/>
           <a:stretch>
             <a:fillRect/>
           </a:stretch>
@@ -13412,7 +14360,7 @@
           <p:nvPr/>
         </p:nvPicPr>
         <p:blipFill>
-          <a:blip r:embed="rId3"/>
+          <a:blip r:embed="rId2"/>
           <a:stretch>
             <a:fillRect/>
           </a:stretch>
@@ -13464,10 +14412,16 @@
                           <a:solidFill>
                             <a:srgbClr val="FFFFFF"/>
                           </a:solidFill>
-                          <a:latin typeface="Segoe UI"/>
+                          <a:latin typeface="Segoe UI" panose="020B0502040204020203"/>
                         </a:rPr>
                         <a:t>#</a:t>
                       </a:r>
+                      <a:endParaRPr sz="850" b="1">
+                        <a:solidFill>
+                          <a:srgbClr val="FFFFFF"/>
+                        </a:solidFill>
+                        <a:latin typeface="Segoe UI" panose="020B0502040204020203"/>
+                      </a:endParaRPr>
                     </a:p>
                   </a:txBody>
                   <a:tcPr anchor="ctr">
@@ -13486,10 +14440,16 @@
                           <a:solidFill>
                             <a:srgbClr val="FFFFFF"/>
                           </a:solidFill>
-                          <a:latin typeface="Segoe UI"/>
+                          <a:latin typeface="Segoe UI" panose="020B0502040204020203"/>
                         </a:rPr>
                         <a:t>Préfecture</a:t>
                       </a:r>
+                      <a:endParaRPr sz="850" b="1">
+                        <a:solidFill>
+                          <a:srgbClr val="FFFFFF"/>
+                        </a:solidFill>
+                        <a:latin typeface="Segoe UI" panose="020B0502040204020203"/>
+                      </a:endParaRPr>
                     </a:p>
                   </a:txBody>
                   <a:tcPr anchor="ctr">
@@ -13508,10 +14468,16 @@
                           <a:solidFill>
                             <a:srgbClr val="FFFFFF"/>
                           </a:solidFill>
-                          <a:latin typeface="Segoe UI"/>
+                          <a:latin typeface="Segoe UI" panose="020B0502040204020203"/>
                         </a:rPr>
                         <a:t>Hab.</a:t>
                       </a:r>
+                      <a:endParaRPr sz="850" b="1">
+                        <a:solidFill>
+                          <a:srgbClr val="FFFFFF"/>
+                        </a:solidFill>
+                        <a:latin typeface="Segoe UI" panose="020B0502040204020203"/>
+                      </a:endParaRPr>
                     </a:p>
                   </a:txBody>
                   <a:tcPr anchor="ctr">
@@ -13530,10 +14496,16 @@
                           <a:solidFill>
                             <a:srgbClr val="FFFFFF"/>
                           </a:solidFill>
-                          <a:latin typeface="Segoe UI"/>
+                          <a:latin typeface="Segoe UI" panose="020B0502040204020203"/>
                         </a:rPr>
                         <a:t>Hab./pt</a:t>
                       </a:r>
+                      <a:endParaRPr sz="850" b="1">
+                        <a:solidFill>
+                          <a:srgbClr val="FFFFFF"/>
+                        </a:solidFill>
+                        <a:latin typeface="Segoe UI" panose="020B0502040204020203"/>
+                      </a:endParaRPr>
                     </a:p>
                   </a:txBody>
                   <a:tcPr anchor="ctr">
@@ -13552,10 +14524,16 @@
                           <a:solidFill>
                             <a:srgbClr val="FFFFFF"/>
                           </a:solidFill>
-                          <a:latin typeface="Segoe UI"/>
+                          <a:latin typeface="Segoe UI" panose="020B0502040204020203"/>
                         </a:rPr>
                         <a:t>Ag.</a:t>
                       </a:r>
+                      <a:endParaRPr sz="850" b="1">
+                        <a:solidFill>
+                          <a:srgbClr val="FFFFFF"/>
+                        </a:solidFill>
+                        <a:latin typeface="Segoe UI" panose="020B0502040204020203"/>
+                      </a:endParaRPr>
                     </a:p>
                   </a:txBody>
                   <a:tcPr anchor="ctr">
@@ -13574,10 +14552,16 @@
                           <a:solidFill>
                             <a:srgbClr val="FFFFFF"/>
                           </a:solidFill>
-                          <a:latin typeface="Segoe UI"/>
+                          <a:latin typeface="Segoe UI" panose="020B0502040204020203"/>
                         </a:rPr>
                         <a:t>Dist.</a:t>
                       </a:r>
+                      <a:endParaRPr sz="850" b="1">
+                        <a:solidFill>
+                          <a:srgbClr val="FFFFFF"/>
+                        </a:solidFill>
+                        <a:latin typeface="Segoe UI" panose="020B0502040204020203"/>
+                      </a:endParaRPr>
                     </a:p>
                   </a:txBody>
                   <a:tcPr anchor="ctr">
@@ -13598,10 +14582,16 @@
                           <a:solidFill>
                             <a:srgbClr val="12120F"/>
                           </a:solidFill>
-                          <a:latin typeface="Segoe UI"/>
+                          <a:latin typeface="Segoe UI" panose="020B0502040204020203"/>
                         </a:rPr>
                         <a:t>1</a:t>
                       </a:r>
+                      <a:endParaRPr sz="850" b="1">
+                        <a:solidFill>
+                          <a:srgbClr val="12120F"/>
+                        </a:solidFill>
+                        <a:latin typeface="Segoe UI" panose="020B0502040204020203"/>
+                      </a:endParaRPr>
                     </a:p>
                   </a:txBody>
                   <a:tcPr anchor="ctr">
@@ -13620,10 +14610,16 @@
                           <a:solidFill>
                             <a:srgbClr val="55544F"/>
                           </a:solidFill>
-                          <a:latin typeface="Segoe UI"/>
+                          <a:latin typeface="Segoe UI" panose="020B0502040204020203"/>
                         </a:rPr>
                         <a:t>Kpendjal</a:t>
                       </a:r>
+                      <a:endParaRPr sz="850" b="0">
+                        <a:solidFill>
+                          <a:srgbClr val="55544F"/>
+                        </a:solidFill>
+                        <a:latin typeface="Segoe UI" panose="020B0502040204020203"/>
+                      </a:endParaRPr>
                     </a:p>
                   </a:txBody>
                   <a:tcPr anchor="ctr">
@@ -13642,10 +14638,16 @@
                           <a:solidFill>
                             <a:srgbClr val="55544F"/>
                           </a:solidFill>
-                          <a:latin typeface="Segoe UI"/>
+                          <a:latin typeface="Segoe UI" panose="020B0502040204020203"/>
                         </a:rPr>
                         <a:t>88 365</a:t>
                       </a:r>
+                      <a:endParaRPr sz="850" b="0">
+                        <a:solidFill>
+                          <a:srgbClr val="55544F"/>
+                        </a:solidFill>
+                        <a:latin typeface="Segoe UI" panose="020B0502040204020203"/>
+                      </a:endParaRPr>
                     </a:p>
                   </a:txBody>
                   <a:tcPr anchor="ctr">
@@ -13664,10 +14666,16 @@
                           <a:solidFill>
                             <a:srgbClr val="55544F"/>
                           </a:solidFill>
-                          <a:latin typeface="Segoe UI"/>
+                          <a:latin typeface="Segoe UI" panose="020B0502040204020203"/>
                         </a:rPr>
                         <a:t>2 155</a:t>
                       </a:r>
+                      <a:endParaRPr sz="850" b="0">
+                        <a:solidFill>
+                          <a:srgbClr val="55544F"/>
+                        </a:solidFill>
+                        <a:latin typeface="Segoe UI" panose="020B0502040204020203"/>
+                      </a:endParaRPr>
                     </a:p>
                   </a:txBody>
                   <a:tcPr anchor="ctr">
@@ -13686,10 +14694,16 @@
                           <a:solidFill>
                             <a:srgbClr val="55544F"/>
                           </a:solidFill>
-                          <a:latin typeface="Segoe UI"/>
+                          <a:latin typeface="Segoe UI" panose="020B0502040204020203"/>
                         </a:rPr>
                         <a:t>0</a:t>
                       </a:r>
+                      <a:endParaRPr sz="850" b="0">
+                        <a:solidFill>
+                          <a:srgbClr val="55544F"/>
+                        </a:solidFill>
+                        <a:latin typeface="Segoe UI" panose="020B0502040204020203"/>
+                      </a:endParaRPr>
                     </a:p>
                   </a:txBody>
                   <a:tcPr anchor="ctr">
@@ -13708,10 +14722,16 @@
                           <a:solidFill>
                             <a:srgbClr val="55544F"/>
                           </a:solidFill>
-                          <a:latin typeface="Segoe UI"/>
+                          <a:latin typeface="Segoe UI" panose="020B0502040204020203"/>
                         </a:rPr>
                         <a:t>47 km</a:t>
                       </a:r>
+                      <a:endParaRPr sz="850" b="0">
+                        <a:solidFill>
+                          <a:srgbClr val="55544F"/>
+                        </a:solidFill>
+                        <a:latin typeface="Segoe UI" panose="020B0502040204020203"/>
+                      </a:endParaRPr>
                     </a:p>
                   </a:txBody>
                   <a:tcPr anchor="ctr">
@@ -13732,10 +14752,16 @@
                           <a:solidFill>
                             <a:srgbClr val="12120F"/>
                           </a:solidFill>
-                          <a:latin typeface="Segoe UI"/>
+                          <a:latin typeface="Segoe UI" panose="020B0502040204020203"/>
                         </a:rPr>
                         <a:t>2</a:t>
                       </a:r>
+                      <a:endParaRPr sz="850" b="1">
+                        <a:solidFill>
+                          <a:srgbClr val="12120F"/>
+                        </a:solidFill>
+                        <a:latin typeface="Segoe UI" panose="020B0502040204020203"/>
+                      </a:endParaRPr>
                     </a:p>
                   </a:txBody>
                   <a:tcPr anchor="ctr">
@@ -13754,10 +14780,16 @@
                           <a:solidFill>
                             <a:srgbClr val="55544F"/>
                           </a:solidFill>
-                          <a:latin typeface="Segoe UI"/>
+                          <a:latin typeface="Segoe UI" panose="020B0502040204020203"/>
                         </a:rPr>
                         <a:t>Mô</a:t>
                       </a:r>
+                      <a:endParaRPr sz="850" b="0">
+                        <a:solidFill>
+                          <a:srgbClr val="55544F"/>
+                        </a:solidFill>
+                        <a:latin typeface="Segoe UI" panose="020B0502040204020203"/>
+                      </a:endParaRPr>
                     </a:p>
                   </a:txBody>
                   <a:tcPr anchor="ctr">
@@ -13776,10 +14808,16 @@
                           <a:solidFill>
                             <a:srgbClr val="55544F"/>
                           </a:solidFill>
-                          <a:latin typeface="Segoe UI"/>
+                          <a:latin typeface="Segoe UI" panose="020B0502040204020203"/>
                         </a:rPr>
                         <a:t>52 448</a:t>
                       </a:r>
+                      <a:endParaRPr sz="850" b="0">
+                        <a:solidFill>
+                          <a:srgbClr val="55544F"/>
+                        </a:solidFill>
+                        <a:latin typeface="Segoe UI" panose="020B0502040204020203"/>
+                      </a:endParaRPr>
                     </a:p>
                   </a:txBody>
                   <a:tcPr anchor="ctr">
@@ -13798,10 +14836,16 @@
                           <a:solidFill>
                             <a:srgbClr val="55544F"/>
                           </a:solidFill>
-                          <a:latin typeface="Segoe UI"/>
+                          <a:latin typeface="Segoe UI" panose="020B0502040204020203"/>
                         </a:rPr>
                         <a:t>1 639</a:t>
                       </a:r>
+                      <a:endParaRPr sz="850" b="0">
+                        <a:solidFill>
+                          <a:srgbClr val="55544F"/>
+                        </a:solidFill>
+                        <a:latin typeface="Segoe UI" panose="020B0502040204020203"/>
+                      </a:endParaRPr>
                     </a:p>
                   </a:txBody>
                   <a:tcPr anchor="ctr">
@@ -13820,10 +14864,16 @@
                           <a:solidFill>
                             <a:srgbClr val="55544F"/>
                           </a:solidFill>
-                          <a:latin typeface="Segoe UI"/>
+                          <a:latin typeface="Segoe UI" panose="020B0502040204020203"/>
                         </a:rPr>
                         <a:t>0</a:t>
                       </a:r>
+                      <a:endParaRPr sz="850" b="0">
+                        <a:solidFill>
+                          <a:srgbClr val="55544F"/>
+                        </a:solidFill>
+                        <a:latin typeface="Segoe UI" panose="020B0502040204020203"/>
+                      </a:endParaRPr>
                     </a:p>
                   </a:txBody>
                   <a:tcPr anchor="ctr">
@@ -13842,10 +14892,16 @@
                           <a:solidFill>
                             <a:srgbClr val="55544F"/>
                           </a:solidFill>
-                          <a:latin typeface="Segoe UI"/>
+                          <a:latin typeface="Segoe UI" panose="020B0502040204020203"/>
                         </a:rPr>
                         <a:t>45 km</a:t>
                       </a:r>
+                      <a:endParaRPr sz="850" b="0">
+                        <a:solidFill>
+                          <a:srgbClr val="55544F"/>
+                        </a:solidFill>
+                        <a:latin typeface="Segoe UI" panose="020B0502040204020203"/>
+                      </a:endParaRPr>
                     </a:p>
                   </a:txBody>
                   <a:tcPr anchor="ctr">
@@ -13866,10 +14922,16 @@
                           <a:solidFill>
                             <a:srgbClr val="12120F"/>
                           </a:solidFill>
-                          <a:latin typeface="Segoe UI"/>
+                          <a:latin typeface="Segoe UI" panose="020B0502040204020203"/>
                         </a:rPr>
                         <a:t>3</a:t>
                       </a:r>
+                      <a:endParaRPr sz="850" b="1">
+                        <a:solidFill>
+                          <a:srgbClr val="12120F"/>
+                        </a:solidFill>
+                        <a:latin typeface="Segoe UI" panose="020B0502040204020203"/>
+                      </a:endParaRPr>
                     </a:p>
                   </a:txBody>
                   <a:tcPr anchor="ctr">
@@ -13888,10 +14950,16 @@
                           <a:solidFill>
                             <a:srgbClr val="55544F"/>
                           </a:solidFill>
-                          <a:latin typeface="Segoe UI"/>
+                          <a:latin typeface="Segoe UI" panose="020B0502040204020203"/>
                         </a:rPr>
                         <a:t>Est-Mono</a:t>
                       </a:r>
+                      <a:endParaRPr sz="850" b="0">
+                        <a:solidFill>
+                          <a:srgbClr val="55544F"/>
+                        </a:solidFill>
+                        <a:latin typeface="Segoe UI" panose="020B0502040204020203"/>
+                      </a:endParaRPr>
                     </a:p>
                   </a:txBody>
                   <a:tcPr anchor="ctr">
@@ -13910,10 +14978,16 @@
                           <a:solidFill>
                             <a:srgbClr val="55544F"/>
                           </a:solidFill>
-                          <a:latin typeface="Segoe UI"/>
+                          <a:latin typeface="Segoe UI" panose="020B0502040204020203"/>
                         </a:rPr>
                         <a:t>164 460</a:t>
                       </a:r>
+                      <a:endParaRPr sz="850" b="0">
+                        <a:solidFill>
+                          <a:srgbClr val="55544F"/>
+                        </a:solidFill>
+                        <a:latin typeface="Segoe UI" panose="020B0502040204020203"/>
+                      </a:endParaRPr>
                     </a:p>
                   </a:txBody>
                   <a:tcPr anchor="ctr">
@@ -13932,10 +15006,16 @@
                           <a:solidFill>
                             <a:srgbClr val="55544F"/>
                           </a:solidFill>
-                          <a:latin typeface="Segoe UI"/>
+                          <a:latin typeface="Segoe UI" panose="020B0502040204020203"/>
                         </a:rPr>
                         <a:t>787</a:t>
                       </a:r>
+                      <a:endParaRPr sz="850" b="0">
+                        <a:solidFill>
+                          <a:srgbClr val="55544F"/>
+                        </a:solidFill>
+                        <a:latin typeface="Segoe UI" panose="020B0502040204020203"/>
+                      </a:endParaRPr>
                     </a:p>
                   </a:txBody>
                   <a:tcPr anchor="ctr">
@@ -13954,10 +15034,16 @@
                           <a:solidFill>
                             <a:srgbClr val="55544F"/>
                           </a:solidFill>
-                          <a:latin typeface="Segoe UI"/>
+                          <a:latin typeface="Segoe UI" panose="020B0502040204020203"/>
                         </a:rPr>
                         <a:t>0</a:t>
                       </a:r>
+                      <a:endParaRPr sz="850" b="0">
+                        <a:solidFill>
+                          <a:srgbClr val="55544F"/>
+                        </a:solidFill>
+                        <a:latin typeface="Segoe UI" panose="020B0502040204020203"/>
+                      </a:endParaRPr>
                     </a:p>
                   </a:txBody>
                   <a:tcPr anchor="ctr">
@@ -13976,10 +15062,16 @@
                           <a:solidFill>
                             <a:srgbClr val="55544F"/>
                           </a:solidFill>
-                          <a:latin typeface="Segoe UI"/>
+                          <a:latin typeface="Segoe UI" panose="020B0502040204020203"/>
                         </a:rPr>
                         <a:t>46 km</a:t>
                       </a:r>
+                      <a:endParaRPr sz="850" b="0">
+                        <a:solidFill>
+                          <a:srgbClr val="55544F"/>
+                        </a:solidFill>
+                        <a:latin typeface="Segoe UI" panose="020B0502040204020203"/>
+                      </a:endParaRPr>
                     </a:p>
                   </a:txBody>
                   <a:tcPr anchor="ctr">
@@ -14000,10 +15092,16 @@
                           <a:solidFill>
                             <a:srgbClr val="12120F"/>
                           </a:solidFill>
-                          <a:latin typeface="Segoe UI"/>
+                          <a:latin typeface="Segoe UI" panose="020B0502040204020203"/>
                         </a:rPr>
                         <a:t>4</a:t>
                       </a:r>
+                      <a:endParaRPr sz="850" b="1">
+                        <a:solidFill>
+                          <a:srgbClr val="12120F"/>
+                        </a:solidFill>
+                        <a:latin typeface="Segoe UI" panose="020B0502040204020203"/>
+                      </a:endParaRPr>
                     </a:p>
                   </a:txBody>
                   <a:tcPr anchor="ctr">
@@ -14022,10 +15120,16 @@
                           <a:solidFill>
                             <a:srgbClr val="55544F"/>
                           </a:solidFill>
-                          <a:latin typeface="Segoe UI"/>
+                          <a:latin typeface="Segoe UI" panose="020B0502040204020203"/>
                         </a:rPr>
                         <a:t>Akébou</a:t>
                       </a:r>
+                      <a:endParaRPr sz="850" b="0">
+                        <a:solidFill>
+                          <a:srgbClr val="55544F"/>
+                        </a:solidFill>
+                        <a:latin typeface="Segoe UI" panose="020B0502040204020203"/>
+                      </a:endParaRPr>
                     </a:p>
                   </a:txBody>
                   <a:tcPr anchor="ctr">
@@ -14044,10 +15148,16 @@
                           <a:solidFill>
                             <a:srgbClr val="55544F"/>
                           </a:solidFill>
-                          <a:latin typeface="Segoe UI"/>
+                          <a:latin typeface="Segoe UI" panose="020B0502040204020203"/>
                         </a:rPr>
                         <a:t>73 830</a:t>
                       </a:r>
+                      <a:endParaRPr sz="850" b="0">
+                        <a:solidFill>
+                          <a:srgbClr val="55544F"/>
+                        </a:solidFill>
+                        <a:latin typeface="Segoe UI" panose="020B0502040204020203"/>
+                      </a:endParaRPr>
                     </a:p>
                   </a:txBody>
                   <a:tcPr anchor="ctr">
@@ -14066,10 +15176,16 @@
                           <a:solidFill>
                             <a:srgbClr val="55544F"/>
                           </a:solidFill>
-                          <a:latin typeface="Segoe UI"/>
+                          <a:latin typeface="Segoe UI" panose="020B0502040204020203"/>
                         </a:rPr>
                         <a:t>849</a:t>
                       </a:r>
+                      <a:endParaRPr sz="850" b="0">
+                        <a:solidFill>
+                          <a:srgbClr val="55544F"/>
+                        </a:solidFill>
+                        <a:latin typeface="Segoe UI" panose="020B0502040204020203"/>
+                      </a:endParaRPr>
                     </a:p>
                   </a:txBody>
                   <a:tcPr anchor="ctr">
@@ -14088,10 +15204,16 @@
                           <a:solidFill>
                             <a:srgbClr val="55544F"/>
                           </a:solidFill>
-                          <a:latin typeface="Segoe UI"/>
+                          <a:latin typeface="Segoe UI" panose="020B0502040204020203"/>
                         </a:rPr>
                         <a:t>0</a:t>
                       </a:r>
+                      <a:endParaRPr sz="850" b="0">
+                        <a:solidFill>
+                          <a:srgbClr val="55544F"/>
+                        </a:solidFill>
+                        <a:latin typeface="Segoe UI" panose="020B0502040204020203"/>
+                      </a:endParaRPr>
                     </a:p>
                   </a:txBody>
                   <a:tcPr anchor="ctr">
@@ -14110,10 +15232,16 @@
                           <a:solidFill>
                             <a:srgbClr val="55544F"/>
                           </a:solidFill>
-                          <a:latin typeface="Segoe UI"/>
+                          <a:latin typeface="Segoe UI" panose="020B0502040204020203"/>
                         </a:rPr>
                         <a:t>43 km</a:t>
                       </a:r>
+                      <a:endParaRPr sz="850" b="0">
+                        <a:solidFill>
+                          <a:srgbClr val="55544F"/>
+                        </a:solidFill>
+                        <a:latin typeface="Segoe UI" panose="020B0502040204020203"/>
+                      </a:endParaRPr>
                     </a:p>
                   </a:txBody>
                   <a:tcPr anchor="ctr">
@@ -14134,10 +15262,16 @@
                           <a:solidFill>
                             <a:srgbClr val="12120F"/>
                           </a:solidFill>
-                          <a:latin typeface="Segoe UI"/>
+                          <a:latin typeface="Segoe UI" panose="020B0502040204020203"/>
                         </a:rPr>
                         <a:t>5</a:t>
                       </a:r>
+                      <a:endParaRPr sz="850" b="1">
+                        <a:solidFill>
+                          <a:srgbClr val="12120F"/>
+                        </a:solidFill>
+                        <a:latin typeface="Segoe UI" panose="020B0502040204020203"/>
+                      </a:endParaRPr>
                     </a:p>
                   </a:txBody>
                   <a:tcPr anchor="ctr">
@@ -14156,10 +15290,16 @@
                           <a:solidFill>
                             <a:srgbClr val="55544F"/>
                           </a:solidFill>
-                          <a:latin typeface="Segoe UI"/>
+                          <a:latin typeface="Segoe UI" panose="020B0502040204020203"/>
                         </a:rPr>
                         <a:t>Blitta</a:t>
                       </a:r>
+                      <a:endParaRPr sz="850" b="0">
+                        <a:solidFill>
+                          <a:srgbClr val="55544F"/>
+                        </a:solidFill>
+                        <a:latin typeface="Segoe UI" panose="020B0502040204020203"/>
+                      </a:endParaRPr>
                     </a:p>
                   </a:txBody>
                   <a:tcPr anchor="ctr">
@@ -14178,10 +15318,16 @@
                           <a:solidFill>
                             <a:srgbClr val="55544F"/>
                           </a:solidFill>
-                          <a:latin typeface="Segoe UI"/>
+                          <a:latin typeface="Segoe UI" panose="020B0502040204020203"/>
                         </a:rPr>
                         <a:t>163 272</a:t>
                       </a:r>
+                      <a:endParaRPr sz="850" b="0">
+                        <a:solidFill>
+                          <a:srgbClr val="55544F"/>
+                        </a:solidFill>
+                        <a:latin typeface="Segoe UI" panose="020B0502040204020203"/>
+                      </a:endParaRPr>
                     </a:p>
                   </a:txBody>
                   <a:tcPr anchor="ctr">
@@ -14200,10 +15346,16 @@
                           <a:solidFill>
                             <a:srgbClr val="55544F"/>
                           </a:solidFill>
-                          <a:latin typeface="Segoe UI"/>
+                          <a:latin typeface="Segoe UI" panose="020B0502040204020203"/>
                         </a:rPr>
                         <a:t>1 814</a:t>
                       </a:r>
+                      <a:endParaRPr sz="850" b="0">
+                        <a:solidFill>
+                          <a:srgbClr val="55544F"/>
+                        </a:solidFill>
+                        <a:latin typeface="Segoe UI" panose="020B0502040204020203"/>
+                      </a:endParaRPr>
                     </a:p>
                   </a:txBody>
                   <a:tcPr anchor="ctr">
@@ -14222,10 +15374,16 @@
                           <a:solidFill>
                             <a:srgbClr val="55544F"/>
                           </a:solidFill>
-                          <a:latin typeface="Segoe UI"/>
+                          <a:latin typeface="Segoe UI" panose="020B0502040204020203"/>
                         </a:rPr>
                         <a:t>2</a:t>
                       </a:r>
+                      <a:endParaRPr sz="850" b="0">
+                        <a:solidFill>
+                          <a:srgbClr val="55544F"/>
+                        </a:solidFill>
+                        <a:latin typeface="Segoe UI" panose="020B0502040204020203"/>
+                      </a:endParaRPr>
                     </a:p>
                   </a:txBody>
                   <a:tcPr anchor="ctr">
@@ -14244,10 +15402,16 @@
                           <a:solidFill>
                             <a:srgbClr val="55544F"/>
                           </a:solidFill>
-                          <a:latin typeface="Segoe UI"/>
+                          <a:latin typeface="Segoe UI" panose="020B0502040204020203"/>
                         </a:rPr>
                         <a:t>28 km</a:t>
                       </a:r>
+                      <a:endParaRPr sz="850" b="0">
+                        <a:solidFill>
+                          <a:srgbClr val="55544F"/>
+                        </a:solidFill>
+                        <a:latin typeface="Segoe UI" panose="020B0502040204020203"/>
+                      </a:endParaRPr>
                     </a:p>
                   </a:txBody>
                   <a:tcPr anchor="ctr">
@@ -14268,10 +15432,16 @@
                           <a:solidFill>
                             <a:srgbClr val="12120F"/>
                           </a:solidFill>
-                          <a:latin typeface="Segoe UI"/>
+                          <a:latin typeface="Segoe UI" panose="020B0502040204020203"/>
                         </a:rPr>
                         <a:t>6</a:t>
                       </a:r>
+                      <a:endParaRPr sz="850" b="1">
+                        <a:solidFill>
+                          <a:srgbClr val="12120F"/>
+                        </a:solidFill>
+                        <a:latin typeface="Segoe UI" panose="020B0502040204020203"/>
+                      </a:endParaRPr>
                     </a:p>
                   </a:txBody>
                   <a:tcPr anchor="ctr">
@@ -14290,10 +15460,16 @@
                           <a:solidFill>
                             <a:srgbClr val="55544F"/>
                           </a:solidFill>
-                          <a:latin typeface="Segoe UI"/>
+                          <a:latin typeface="Segoe UI" panose="020B0502040204020203"/>
                         </a:rPr>
                         <a:t>Wawa</a:t>
                       </a:r>
+                      <a:endParaRPr sz="850" b="0">
+                        <a:solidFill>
+                          <a:srgbClr val="55544F"/>
+                        </a:solidFill>
+                        <a:latin typeface="Segoe UI" panose="020B0502040204020203"/>
+                      </a:endParaRPr>
                     </a:p>
                   </a:txBody>
                   <a:tcPr anchor="ctr">
@@ -14312,10 +15488,16 @@
                           <a:solidFill>
                             <a:srgbClr val="55544F"/>
                           </a:solidFill>
-                          <a:latin typeface="Segoe UI"/>
+                          <a:latin typeface="Segoe UI" panose="020B0502040204020203"/>
                         </a:rPr>
                         <a:t>101 300</a:t>
                       </a:r>
+                      <a:endParaRPr sz="850" b="0">
+                        <a:solidFill>
+                          <a:srgbClr val="55544F"/>
+                        </a:solidFill>
+                        <a:latin typeface="Segoe UI" panose="020B0502040204020203"/>
+                      </a:endParaRPr>
                     </a:p>
                   </a:txBody>
                   <a:tcPr anchor="ctr">
@@ -14334,10 +15516,16 @@
                           <a:solidFill>
                             <a:srgbClr val="55544F"/>
                           </a:solidFill>
-                          <a:latin typeface="Segoe UI"/>
+                          <a:latin typeface="Segoe UI" panose="020B0502040204020203"/>
                         </a:rPr>
                         <a:t>415</a:t>
                       </a:r>
+                      <a:endParaRPr sz="850" b="0">
+                        <a:solidFill>
+                          <a:srgbClr val="55544F"/>
+                        </a:solidFill>
+                        <a:latin typeface="Segoe UI" panose="020B0502040204020203"/>
+                      </a:endParaRPr>
                     </a:p>
                   </a:txBody>
                   <a:tcPr anchor="ctr">
@@ -14356,10 +15544,16 @@
                           <a:solidFill>
                             <a:srgbClr val="55544F"/>
                           </a:solidFill>
-                          <a:latin typeface="Segoe UI"/>
+                          <a:latin typeface="Segoe UI" panose="020B0502040204020203"/>
                         </a:rPr>
                         <a:t>0</a:t>
                       </a:r>
+                      <a:endParaRPr sz="850" b="0">
+                        <a:solidFill>
+                          <a:srgbClr val="55544F"/>
+                        </a:solidFill>
+                        <a:latin typeface="Segoe UI" panose="020B0502040204020203"/>
+                      </a:endParaRPr>
                     </a:p>
                   </a:txBody>
                   <a:tcPr anchor="ctr">
@@ -14378,10 +15572,16 @@
                           <a:solidFill>
                             <a:srgbClr val="55544F"/>
                           </a:solidFill>
-                          <a:latin typeface="Segoe UI"/>
+                          <a:latin typeface="Segoe UI" panose="020B0502040204020203"/>
                         </a:rPr>
                         <a:t>44 km</a:t>
                       </a:r>
+                      <a:endParaRPr sz="850" b="0">
+                        <a:solidFill>
+                          <a:srgbClr val="55544F"/>
+                        </a:solidFill>
+                        <a:latin typeface="Segoe UI" panose="020B0502040204020203"/>
+                      </a:endParaRPr>
                     </a:p>
                   </a:txBody>
                   <a:tcPr anchor="ctr">
@@ -14412,7 +15612,7 @@
           <a:noFill/>
         </p:spPr>
         <p:txBody>
-          <a:bodyPr wrap="square" lIns="0" rIns="0" tIns="0" bIns="0">
+          <a:bodyPr wrap="square" lIns="0" tIns="0" rIns="0" bIns="0">
             <a:spAutoFit/>
           </a:bodyPr>
           <a:lstStyle/>
@@ -14427,10 +15627,16 @@
                 <a:solidFill>
                   <a:srgbClr val="55544F"/>
                 </a:solidFill>
-                <a:latin typeface="Segoe UI"/>
+                <a:latin typeface="Segoe UI" panose="020B0502040204020203"/>
               </a:rPr>
               <a:t>Corrélation de Spearman moyenne avec le classement de référence : 0,971 sur 2 000 pondérations aléatoires, plus huit variantes structurelles (retrait de chaque composante, poids égaux, normalisation par rang).</a:t>
             </a:r>
+            <a:endParaRPr sz="1000" b="0">
+              <a:solidFill>
+                <a:srgbClr val="55544F"/>
+              </a:solidFill>
+              <a:latin typeface="Segoe UI" panose="020B0502040204020203"/>
+            </a:endParaRPr>
           </a:p>
           <a:p>
             <a:pPr algn="l">
@@ -14438,15 +15644,6 @@
                 <a:spcPct val="132000"/>
               </a:lnSpc>
             </a:pPr>
-            <a:r>
-              <a:rPr sz="1000" b="0">
-                <a:solidFill>
-                  <a:srgbClr val="55544F"/>
-                </a:solidFill>
-                <a:latin typeface="Segoe UI"/>
-              </a:rPr>
-              <a:t/>
-            </a:r>
           </a:p>
           <a:p>
             <a:pPr algn="l">
@@ -14459,10 +15656,16 @@
                 <a:solidFill>
                   <a:srgbClr val="55544F"/>
                 </a:solidFill>
-                <a:latin typeface="Segoe UI"/>
+                <a:latin typeface="Segoe UI" panose="020B0502040204020203"/>
               </a:rPr>
               <a:t>Les territoires dont le rang dépend des pondérations ne sont pas présentés comme prioritaires.</a:t>
             </a:r>
+            <a:endParaRPr sz="1000" b="0">
+              <a:solidFill>
+                <a:srgbClr val="55544F"/>
+              </a:solidFill>
+              <a:latin typeface="Segoe UI" panose="020B0502040204020203"/>
+            </a:endParaRPr>
           </a:p>
         </p:txBody>
       </p:sp>
@@ -14475,7 +15678,7 @@
 </file>
 
 <file path=ppt/slides/slide8.xml><?xml version="1.0" encoding="utf-8"?>
-<p:sld xmlns:a="http://schemas.openxmlformats.org/drawingml/2006/main" xmlns:p="http://schemas.openxmlformats.org/presentationml/2006/main" xmlns:r="http://schemas.openxmlformats.org/officeDocument/2006/relationships">
+<p:sld xmlns:a="http://schemas.openxmlformats.org/drawingml/2006/main" xmlns:r="http://schemas.openxmlformats.org/officeDocument/2006/relationships" xmlns:p="http://schemas.openxmlformats.org/presentationml/2006/main">
   <p:cSld>
     <p:spTree>
       <p:nvGrpSpPr>
@@ -14677,7 +15880,7 @@
           <a:noFill/>
         </p:spPr>
         <p:txBody>
-          <a:bodyPr wrap="square" lIns="0" rIns="0" tIns="0" bIns="0">
+          <a:bodyPr wrap="square" lIns="0" tIns="0" rIns="0" bIns="0">
             <a:spAutoFit/>
           </a:bodyPr>
           <a:lstStyle/>
@@ -14692,10 +15895,16 @@
                 <a:solidFill>
                   <a:srgbClr val="8B8A84"/>
                 </a:solidFill>
-                <a:latin typeface="Consolas"/>
+                <a:latin typeface="Consolas" panose="020B0609020204030204"/>
               </a:rPr>
               <a:t>DÉCISION</a:t>
             </a:r>
+            <a:endParaRPr sz="900" b="1">
+              <a:solidFill>
+                <a:srgbClr val="8B8A84"/>
+              </a:solidFill>
+              <a:latin typeface="Consolas" panose="020B0609020204030204"/>
+            </a:endParaRPr>
           </a:p>
         </p:txBody>
       </p:sp>
@@ -14716,7 +15925,7 @@
           <a:noFill/>
         </p:spPr>
         <p:txBody>
-          <a:bodyPr wrap="square" lIns="0" rIns="0" tIns="0" bIns="0">
+          <a:bodyPr wrap="square" lIns="0" tIns="0" rIns="0" bIns="0">
             <a:spAutoFit/>
           </a:bodyPr>
           <a:lstStyle/>
@@ -14731,10 +15940,16 @@
                 <a:solidFill>
                   <a:srgbClr val="12120F"/>
                 </a:solidFill>
-                <a:latin typeface="Segoe UI"/>
+                <a:latin typeface="Segoe UI" panose="020B0502040204020203"/>
               </a:rPr>
               <a:t>Recommandations stratégiques</a:t>
             </a:r>
+            <a:endParaRPr sz="2800" b="1">
+              <a:solidFill>
+                <a:srgbClr val="12120F"/>
+              </a:solidFill>
+              <a:latin typeface="Segoe UI" panose="020B0502040204020203"/>
+            </a:endParaRPr>
           </a:p>
         </p:txBody>
       </p:sp>
@@ -14843,7 +16058,7 @@
           <a:noFill/>
         </p:spPr>
         <p:txBody>
-          <a:bodyPr wrap="square" lIns="0" rIns="0" tIns="0" bIns="0">
+          <a:bodyPr wrap="square" lIns="0" tIns="0" rIns="0" bIns="0">
             <a:spAutoFit/>
           </a:bodyPr>
           <a:lstStyle/>
@@ -14858,10 +16073,16 @@
                 <a:solidFill>
                   <a:srgbClr val="0F4D3B"/>
                 </a:solidFill>
-                <a:latin typeface="Segoe UI"/>
+                <a:latin typeface="Segoe UI" panose="020B0502040204020203"/>
               </a:rPr>
               <a:t>Cinq leviers, chacun déclenché par un seuil mesuré — aucune recommandation sans le chiffre qui la justifie.</a:t>
             </a:r>
+            <a:endParaRPr sz="1350" b="1">
+              <a:solidFill>
+                <a:srgbClr val="0F4D3B"/>
+              </a:solidFill>
+              <a:latin typeface="Segoe UI" panose="020B0502040204020203"/>
+            </a:endParaRPr>
           </a:p>
         </p:txBody>
       </p:sp>
@@ -14926,7 +16147,7 @@
           <a:noFill/>
         </p:spPr>
         <p:txBody>
-          <a:bodyPr wrap="square" lIns="0" rIns="0" tIns="0" bIns="0">
+          <a:bodyPr wrap="square" lIns="0" tIns="0" rIns="0" bIns="0">
             <a:spAutoFit/>
           </a:bodyPr>
           <a:lstStyle/>
@@ -14941,10 +16162,16 @@
                 <a:solidFill>
                   <a:srgbClr val="8B8A84"/>
                 </a:solidFill>
-                <a:latin typeface="Consolas"/>
+                <a:latin typeface="Consolas" panose="020B0609020204030204"/>
               </a:rPr>
               <a:t>République togolaise · Défi Économie numérique · Données ouvertes PRISE 2021-2022, RGPH-5 2022, COD-AB 2021</a:t>
             </a:r>
+            <a:endParaRPr sz="800" b="0">
+              <a:solidFill>
+                <a:srgbClr val="8B8A84"/>
+              </a:solidFill>
+              <a:latin typeface="Consolas" panose="020B0609020204030204"/>
+            </a:endParaRPr>
           </a:p>
         </p:txBody>
       </p:sp>
@@ -14965,7 +16192,7 @@
           <a:noFill/>
         </p:spPr>
         <p:txBody>
-          <a:bodyPr wrap="square" lIns="0" rIns="0" tIns="0" bIns="0">
+          <a:bodyPr wrap="square" lIns="0" tIns="0" rIns="0" bIns="0">
             <a:spAutoFit/>
           </a:bodyPr>
           <a:lstStyle/>
@@ -14980,10 +16207,16 @@
                 <a:solidFill>
                   <a:srgbClr val="8B8A84"/>
                 </a:solidFill>
-                <a:latin typeface="Consolas"/>
+                <a:latin typeface="Consolas" panose="020B0609020204030204"/>
               </a:rPr>
               <a:t>08 / 10</a:t>
             </a:r>
+            <a:endParaRPr sz="800" b="1">
+              <a:solidFill>
+                <a:srgbClr val="8B8A84"/>
+              </a:solidFill>
+              <a:latin typeface="Consolas" panose="020B0609020204030204"/>
+            </a:endParaRPr>
           </a:p>
         </p:txBody>
       </p:sp>
@@ -14996,7 +16229,7 @@
           <p:nvPr/>
         </p:nvPicPr>
         <p:blipFill>
-          <a:blip r:embed="rId2"/>
+          <a:blip r:embed="rId1"/>
           <a:stretch>
             <a:fillRect/>
           </a:stretch>
@@ -15072,7 +16305,7 @@
           <a:noFill/>
         </p:spPr>
         <p:txBody>
-          <a:bodyPr wrap="square" lIns="0" rIns="0" tIns="0" bIns="0">
+          <a:bodyPr wrap="square" lIns="0" tIns="0" rIns="0" bIns="0">
             <a:spAutoFit/>
           </a:bodyPr>
           <a:lstStyle/>
@@ -15087,10 +16320,16 @@
                 <a:solidFill>
                   <a:srgbClr val="12120F"/>
                 </a:solidFill>
-                <a:latin typeface="Segoe UI"/>
+                <a:latin typeface="Segoe UI" panose="020B0502040204020203"/>
               </a:rPr>
               <a:t>Densifier le réseau d'agents Mobile Money — levier rapide</a:t>
             </a:r>
+            <a:endParaRPr sz="1100" b="1">
+              <a:solidFill>
+                <a:srgbClr val="12120F"/>
+              </a:solidFill>
+              <a:latin typeface="Segoe UI" panose="020B0502040204020203"/>
+            </a:endParaRPr>
           </a:p>
         </p:txBody>
       </p:sp>
@@ -15111,7 +16350,7 @@
           <a:noFill/>
         </p:spPr>
         <p:txBody>
-          <a:bodyPr wrap="square" lIns="0" rIns="0" tIns="0" bIns="0">
+          <a:bodyPr wrap="square" lIns="0" tIns="0" rIns="0" bIns="0">
             <a:spAutoFit/>
           </a:bodyPr>
           <a:lstStyle/>
@@ -15126,10 +16365,16 @@
                 <a:solidFill>
                   <a:srgbClr val="55544F"/>
                 </a:solidFill>
-                <a:latin typeface="Segoe UI"/>
+                <a:latin typeface="Segoe UI" panose="020B0502040204020203"/>
               </a:rPr>
               <a:t>Déclencheur : plus de 800 habitants par point. S'appuie sur des commerces existants, sans construction.</a:t>
             </a:r>
+            <a:endParaRPr sz="950" b="0">
+              <a:solidFill>
+                <a:srgbClr val="55544F"/>
+              </a:solidFill>
+              <a:latin typeface="Segoe UI" panose="020B0502040204020203"/>
+            </a:endParaRPr>
           </a:p>
         </p:txBody>
       </p:sp>
@@ -15194,7 +16439,7 @@
           <a:noFill/>
         </p:spPr>
         <p:txBody>
-          <a:bodyPr wrap="square" lIns="0" rIns="0" tIns="0" bIns="0">
+          <a:bodyPr wrap="square" lIns="0" tIns="0" rIns="0" bIns="0">
             <a:spAutoFit/>
           </a:bodyPr>
           <a:lstStyle/>
@@ -15209,10 +16454,16 @@
                 <a:solidFill>
                   <a:srgbClr val="12120F"/>
                 </a:solidFill>
-                <a:latin typeface="Segoe UI"/>
+                <a:latin typeface="Segoe UI" panose="020B0502040204020203"/>
               </a:rPr>
               <a:t>Implanter un point de présence opérateur — levier structurel</a:t>
             </a:r>
+            <a:endParaRPr sz="1100" b="1">
+              <a:solidFill>
+                <a:srgbClr val="12120F"/>
+              </a:solidFill>
+              <a:latin typeface="Segoe UI" panose="020B0502040204020203"/>
+            </a:endParaRPr>
           </a:p>
         </p:txBody>
       </p:sp>
@@ -15233,7 +16484,7 @@
           <a:noFill/>
         </p:spPr>
         <p:txBody>
-          <a:bodyPr wrap="square" lIns="0" rIns="0" tIns="0" bIns="0">
+          <a:bodyPr wrap="square" lIns="0" tIns="0" rIns="0" bIns="0">
             <a:spAutoFit/>
           </a:bodyPr>
           <a:lstStyle/>
@@ -15248,10 +16499,16 @@
                 <a:solidFill>
                   <a:srgbClr val="55544F"/>
                 </a:solidFill>
-                <a:latin typeface="Segoe UI"/>
+                <a:latin typeface="Segoe UI" panose="020B0502040204020203"/>
               </a:rPr>
               <a:t>Déclencheur : aucune agence active. Seul levier créant un guichet là où il n'en existe aucun.</a:t>
             </a:r>
+            <a:endParaRPr sz="950" b="0">
+              <a:solidFill>
+                <a:srgbClr val="55544F"/>
+              </a:solidFill>
+              <a:latin typeface="Segoe UI" panose="020B0502040204020203"/>
+            </a:endParaRPr>
           </a:p>
         </p:txBody>
       </p:sp>
@@ -15316,7 +16573,7 @@
           <a:noFill/>
         </p:spPr>
         <p:txBody>
-          <a:bodyPr wrap="square" lIns="0" rIns="0" tIns="0" bIns="0">
+          <a:bodyPr wrap="square" lIns="0" tIns="0" rIns="0" bIns="0">
             <a:spAutoFit/>
           </a:bodyPr>
           <a:lstStyle/>
@@ -15331,10 +16588,16 @@
                 <a:solidFill>
                   <a:srgbClr val="12120F"/>
                 </a:solidFill>
-                <a:latin typeface="Segoe UI"/>
+                <a:latin typeface="Segoe UI" panose="020B0502040204020203"/>
               </a:rPr>
               <a:t>Répartir le maillage plutôt qu'un point unique</a:t>
             </a:r>
+            <a:endParaRPr sz="1100" b="1">
+              <a:solidFill>
+                <a:srgbClr val="12120F"/>
+              </a:solidFill>
+              <a:latin typeface="Segoe UI" panose="020B0502040204020203"/>
+            </a:endParaRPr>
           </a:p>
         </p:txBody>
       </p:sp>
@@ -15355,7 +16618,7 @@
           <a:noFill/>
         </p:spPr>
         <p:txBody>
-          <a:bodyPr wrap="square" lIns="0" rIns="0" tIns="0" bIns="0">
+          <a:bodyPr wrap="square" lIns="0" tIns="0" rIns="0" bIns="0">
             <a:spAutoFit/>
           </a:bodyPr>
           <a:lstStyle/>
@@ -15370,10 +16633,16 @@
                 <a:solidFill>
                   <a:srgbClr val="55544F"/>
                 </a:solidFill>
-                <a:latin typeface="Segoe UI"/>
+                <a:latin typeface="Segoe UI" panose="020B0502040204020203"/>
               </a:rPr>
               <a:t>Déclencheur : 25 km ou plus jusqu'à une agence active. Quand l'éloignement domine, un guichet au chef-lieu ne règle rien.</a:t>
             </a:r>
+            <a:endParaRPr sz="950" b="0">
+              <a:solidFill>
+                <a:srgbClr val="55544F"/>
+              </a:solidFill>
+              <a:latin typeface="Segoe UI" panose="020B0502040204020203"/>
+            </a:endParaRPr>
           </a:p>
         </p:txBody>
       </p:sp>
@@ -15438,7 +16707,7 @@
           <a:noFill/>
         </p:spPr>
         <p:txBody>
-          <a:bodyPr wrap="square" lIns="0" rIns="0" tIns="0" bIns="0">
+          <a:bodyPr wrap="square" lIns="0" tIns="0" rIns="0" bIns="0">
             <a:spAutoFit/>
           </a:bodyPr>
           <a:lstStyle/>
@@ -15453,10 +16722,16 @@
                 <a:solidFill>
                   <a:srgbClr val="12120F"/>
                 </a:solidFill>
-                <a:latin typeface="Segoe UI"/>
+                <a:latin typeface="Segoe UI" panose="020B0502040204020203"/>
               </a:rPr>
               <a:t>Ouvrir la concurrence entre opérateurs</a:t>
             </a:r>
+            <a:endParaRPr sz="1100" b="1">
+              <a:solidFill>
+                <a:srgbClr val="12120F"/>
+              </a:solidFill>
+              <a:latin typeface="Segoe UI" panose="020B0502040204020203"/>
+            </a:endParaRPr>
           </a:p>
         </p:txBody>
       </p:sp>
@@ -15477,7 +16752,7 @@
           <a:noFill/>
         </p:spPr>
         <p:txBody>
-          <a:bodyPr wrap="square" lIns="0" rIns="0" tIns="0" bIns="0">
+          <a:bodyPr wrap="square" lIns="0" tIns="0" rIns="0" bIns="0">
             <a:spAutoFit/>
           </a:bodyPr>
           <a:lstStyle/>
@@ -15492,10 +16767,16 @@
                 <a:solidFill>
                   <a:srgbClr val="55544F"/>
                 </a:solidFill>
-                <a:latin typeface="Segoe UI"/>
+                <a:latin typeface="Segoe UI" panose="020B0502040204020203"/>
               </a:rPr>
               <a:t>Déclencheur : un seul opérateur présent. 4 773 points ne servent que Togocom contre 1 018 pour Moov seul.</a:t>
             </a:r>
+            <a:endParaRPr sz="950" b="0">
+              <a:solidFill>
+                <a:srgbClr val="55544F"/>
+              </a:solidFill>
+              <a:latin typeface="Segoe UI" panose="020B0502040204020203"/>
+            </a:endParaRPr>
           </a:p>
         </p:txBody>
       </p:sp>
@@ -15606,7 +16887,7 @@
           <a:noFill/>
         </p:spPr>
         <p:txBody>
-          <a:bodyPr wrap="square" lIns="0" rIns="0" tIns="0" bIns="0">
+          <a:bodyPr wrap="square" lIns="0" tIns="0" rIns="0" bIns="0">
             <a:spAutoFit/>
           </a:bodyPr>
           <a:lstStyle/>
@@ -15621,10 +16902,16 @@
                 <a:solidFill>
                   <a:srgbClr val="55544F"/>
                 </a:solidFill>
-                <a:latin typeface="Segoe UI"/>
+                <a:latin typeface="Segoe UI" panose="020B0502040204020203"/>
               </a:rPr>
               <a:t>Les 9 territoires prioritaires représentent 1 080 723 habitants, soit 13 % de la population nationale. Les porter à 409 hab./point demanderait 1 497 points Mobile Money supplémentaires.</a:t>
             </a:r>
+            <a:endParaRPr sz="1000" b="0">
+              <a:solidFill>
+                <a:srgbClr val="55544F"/>
+              </a:solidFill>
+              <a:latin typeface="Segoe UI" panose="020B0502040204020203"/>
+            </a:endParaRPr>
           </a:p>
           <a:p>
             <a:pPr algn="l">
@@ -15637,10 +16924,16 @@
                 <a:solidFill>
                   <a:srgbClr val="55544F"/>
                 </a:solidFill>
-                <a:latin typeface="Segoe UI"/>
+                <a:latin typeface="Segoe UI" panose="020B0502040204020203"/>
               </a:rPr>
               <a:t>Un même territoire peut relever de plusieurs leviers : les populations ne s'additionnent pas d'un levier à l'autre.</a:t>
             </a:r>
+            <a:endParaRPr sz="1000" b="0">
+              <a:solidFill>
+                <a:srgbClr val="55544F"/>
+              </a:solidFill>
+              <a:latin typeface="Segoe UI" panose="020B0502040204020203"/>
+            </a:endParaRPr>
           </a:p>
         </p:txBody>
       </p:sp>
@@ -15653,7 +16946,7 @@
 </file>
 
 <file path=ppt/slides/slide9.xml><?xml version="1.0" encoding="utf-8"?>
-<p:sld xmlns:a="http://schemas.openxmlformats.org/drawingml/2006/main" xmlns:p="http://schemas.openxmlformats.org/presentationml/2006/main" xmlns:r="http://schemas.openxmlformats.org/officeDocument/2006/relationships">
+<p:sld xmlns:a="http://schemas.openxmlformats.org/drawingml/2006/main" xmlns:r="http://schemas.openxmlformats.org/officeDocument/2006/relationships" xmlns:p="http://schemas.openxmlformats.org/presentationml/2006/main">
   <p:cSld>
     <p:spTree>
       <p:nvGrpSpPr>
@@ -15855,7 +17148,7 @@
           <a:noFill/>
         </p:spPr>
         <p:txBody>
-          <a:bodyPr wrap="square" lIns="0" rIns="0" tIns="0" bIns="0">
+          <a:bodyPr wrap="square" lIns="0" tIns="0" rIns="0" bIns="0">
             <a:spAutoFit/>
           </a:bodyPr>
           <a:lstStyle/>
@@ -15870,10 +17163,16 @@
                 <a:solidFill>
                   <a:srgbClr val="8B8A84"/>
                 </a:solidFill>
-                <a:latin typeface="Consolas"/>
+                <a:latin typeface="Consolas" panose="020B0609020204030204"/>
               </a:rPr>
               <a:t>PRÉCAUTIONS</a:t>
             </a:r>
+            <a:endParaRPr sz="900" b="1">
+              <a:solidFill>
+                <a:srgbClr val="8B8A84"/>
+              </a:solidFill>
+              <a:latin typeface="Consolas" panose="020B0609020204030204"/>
+            </a:endParaRPr>
           </a:p>
         </p:txBody>
       </p:sp>
@@ -15894,7 +17193,7 @@
           <a:noFill/>
         </p:spPr>
         <p:txBody>
-          <a:bodyPr wrap="square" lIns="0" rIns="0" tIns="0" bIns="0">
+          <a:bodyPr wrap="square" lIns="0" tIns="0" rIns="0" bIns="0">
             <a:spAutoFit/>
           </a:bodyPr>
           <a:lstStyle/>
@@ -15909,10 +17208,16 @@
                 <a:solidFill>
                   <a:srgbClr val="12120F"/>
                 </a:solidFill>
-                <a:latin typeface="Segoe UI"/>
+                <a:latin typeface="Segoe UI" panose="020B0502040204020203"/>
               </a:rPr>
               <a:t>Limites et précautions d'interprétation</a:t>
             </a:r>
+            <a:endParaRPr sz="2800" b="1">
+              <a:solidFill>
+                <a:srgbClr val="12120F"/>
+              </a:solidFill>
+              <a:latin typeface="Segoe UI" panose="020B0502040204020203"/>
+            </a:endParaRPr>
           </a:p>
         </p:txBody>
       </p:sp>
@@ -16021,7 +17326,7 @@
           <a:noFill/>
         </p:spPr>
         <p:txBody>
-          <a:bodyPr wrap="square" lIns="0" rIns="0" tIns="0" bIns="0">
+          <a:bodyPr wrap="square" lIns="0" tIns="0" rIns="0" bIns="0">
             <a:spAutoFit/>
           </a:bodyPr>
           <a:lstStyle/>
@@ -16036,10 +17341,16 @@
                 <a:solidFill>
                   <a:srgbClr val="0F4D3B"/>
                 </a:solidFill>
-                <a:latin typeface="Segoe UI"/>
+                <a:latin typeface="Segoe UI" panose="020B0502040204020203"/>
               </a:rPr>
               <a:t>Ce diagnostic mesure un déficit d'accès aux services — pas une absence de réseau mobile. La distinction est décisive.</a:t>
             </a:r>
+            <a:endParaRPr sz="1350" b="1">
+              <a:solidFill>
+                <a:srgbClr val="0F4D3B"/>
+              </a:solidFill>
+              <a:latin typeface="Segoe UI" panose="020B0502040204020203"/>
+            </a:endParaRPr>
           </a:p>
         </p:txBody>
       </p:sp>
@@ -16104,7 +17415,7 @@
           <a:noFill/>
         </p:spPr>
         <p:txBody>
-          <a:bodyPr wrap="square" lIns="0" rIns="0" tIns="0" bIns="0">
+          <a:bodyPr wrap="square" lIns="0" tIns="0" rIns="0" bIns="0">
             <a:spAutoFit/>
           </a:bodyPr>
           <a:lstStyle/>
@@ -16119,10 +17430,16 @@
                 <a:solidFill>
                   <a:srgbClr val="8B8A84"/>
                 </a:solidFill>
-                <a:latin typeface="Consolas"/>
+                <a:latin typeface="Consolas" panose="020B0609020204030204"/>
               </a:rPr>
               <a:t>République togolaise · Défi Économie numérique · Données ouvertes PRISE 2021-2022, RGPH-5 2022, COD-AB 2021</a:t>
             </a:r>
+            <a:endParaRPr sz="800" b="0">
+              <a:solidFill>
+                <a:srgbClr val="8B8A84"/>
+              </a:solidFill>
+              <a:latin typeface="Consolas" panose="020B0609020204030204"/>
+            </a:endParaRPr>
           </a:p>
         </p:txBody>
       </p:sp>
@@ -16143,7 +17460,7 @@
           <a:noFill/>
         </p:spPr>
         <p:txBody>
-          <a:bodyPr wrap="square" lIns="0" rIns="0" tIns="0" bIns="0">
+          <a:bodyPr wrap="square" lIns="0" tIns="0" rIns="0" bIns="0">
             <a:spAutoFit/>
           </a:bodyPr>
           <a:lstStyle/>
@@ -16158,10 +17475,16 @@
                 <a:solidFill>
                   <a:srgbClr val="8B8A84"/>
                 </a:solidFill>
-                <a:latin typeface="Consolas"/>
+                <a:latin typeface="Consolas" panose="020B0609020204030204"/>
               </a:rPr>
               <a:t>09 / 10</a:t>
             </a:r>
+            <a:endParaRPr sz="800" b="1">
+              <a:solidFill>
+                <a:srgbClr val="8B8A84"/>
+              </a:solidFill>
+              <a:latin typeface="Consolas" panose="020B0609020204030204"/>
+            </a:endParaRPr>
           </a:p>
         </p:txBody>
       </p:sp>
@@ -16226,7 +17549,7 @@
           <a:noFill/>
         </p:spPr>
         <p:txBody>
-          <a:bodyPr wrap="square" lIns="0" rIns="0" tIns="0" bIns="0">
+          <a:bodyPr wrap="square" lIns="0" tIns="0" rIns="0" bIns="0">
             <a:spAutoFit/>
           </a:bodyPr>
           <a:lstStyle/>
@@ -16241,10 +17564,16 @@
                 <a:solidFill>
                   <a:srgbClr val="12120F"/>
                 </a:solidFill>
-                <a:latin typeface="Segoe UI"/>
+                <a:latin typeface="Segoe UI" panose="020B0502040204020203"/>
               </a:rPr>
               <a:t>La couverture réseau n'est pas mesurée</a:t>
             </a:r>
+            <a:endParaRPr sz="1100" b="1">
+              <a:solidFill>
+                <a:srgbClr val="12120F"/>
+              </a:solidFill>
+              <a:latin typeface="Segoe UI" panose="020B0502040204020203"/>
+            </a:endParaRPr>
           </a:p>
         </p:txBody>
       </p:sp>
@@ -16265,7 +17594,7 @@
           <a:noFill/>
         </p:spPr>
         <p:txBody>
-          <a:bodyPr wrap="square" lIns="0" rIns="0" tIns="0" bIns="0">
+          <a:bodyPr wrap="square" lIns="0" tIns="0" rIns="0" bIns="0">
             <a:spAutoFit/>
           </a:bodyPr>
           <a:lstStyle/>
@@ -16280,10 +17609,16 @@
                 <a:solidFill>
                   <a:srgbClr val="55544F"/>
                 </a:solidFill>
-                <a:latin typeface="Segoe UI"/>
+                <a:latin typeface="Segoe UI" panose="020B0502040204020203"/>
               </a:rPr>
               <a:t>Une zone sans agence ni agent Mobile Money n'est pas nécessairement une zone sans réseau mobile. Les 41 cantons signalés par le proxy sont à vérifier, pas des zones blanches avérées.</a:t>
             </a:r>
+            <a:endParaRPr sz="950" b="0">
+              <a:solidFill>
+                <a:srgbClr val="55544F"/>
+              </a:solidFill>
+              <a:latin typeface="Segoe UI" panose="020B0502040204020203"/>
+            </a:endParaRPr>
           </a:p>
         </p:txBody>
       </p:sp>
@@ -16348,7 +17683,7 @@
           <a:noFill/>
         </p:spPr>
         <p:txBody>
-          <a:bodyPr wrap="square" lIns="0" rIns="0" tIns="0" bIns="0">
+          <a:bodyPr wrap="square" lIns="0" tIns="0" rIns="0" bIns="0">
             <a:spAutoFit/>
           </a:bodyPr>
           <a:lstStyle/>
@@ -16363,10 +17698,16 @@
                 <a:solidFill>
                   <a:srgbClr val="12120F"/>
                 </a:solidFill>
-                <a:latin typeface="Segoe UI"/>
+                <a:latin typeface="Segoe UI" panose="020B0502040204020203"/>
               </a:rPr>
               <a:t>Les agences CANAL+ sont absentes</a:t>
             </a:r>
+            <a:endParaRPr sz="1100" b="1">
+              <a:solidFill>
+                <a:srgbClr val="12120F"/>
+              </a:solidFill>
+              <a:latin typeface="Segoe UI" panose="020B0502040204020203"/>
+            </a:endParaRPr>
           </a:p>
         </p:txBody>
       </p:sp>
@@ -16387,7 +17728,7 @@
           <a:noFill/>
         </p:spPr>
         <p:txBody>
-          <a:bodyPr wrap="square" lIns="0" rIns="0" tIns="0" bIns="0">
+          <a:bodyPr wrap="square" lIns="0" tIns="0" rIns="0" bIns="0">
             <a:spAutoFit/>
           </a:bodyPr>
           <a:lstStyle/>
@@ -16402,10 +17743,16 @@
                 <a:solidFill>
                   <a:srgbClr val="55544F"/>
                 </a:solidFill>
-                <a:latin typeface="Segoe UI"/>
+                <a:latin typeface="Segoe UI" panose="020B0502040204020203"/>
               </a:rPr>
               <a:t>Fichier source vide. Le déficit porte sur les 88 agences actives Moov et Togocom (2 fermées exclues sur 90 recensées).</a:t>
             </a:r>
+            <a:endParaRPr sz="950" b="0">
+              <a:solidFill>
+                <a:srgbClr val="55544F"/>
+              </a:solidFill>
+              <a:latin typeface="Segoe UI" panose="020B0502040204020203"/>
+            </a:endParaRPr>
           </a:p>
         </p:txBody>
       </p:sp>
@@ -16470,7 +17817,7 @@
           <a:noFill/>
         </p:spPr>
         <p:txBody>
-          <a:bodyPr wrap="square" lIns="0" rIns="0" tIns="0" bIns="0">
+          <a:bodyPr wrap="square" lIns="0" tIns="0" rIns="0" bIns="0">
             <a:spAutoFit/>
           </a:bodyPr>
           <a:lstStyle/>
@@ -16485,10 +17832,16 @@
                 <a:solidFill>
                   <a:srgbClr val="12120F"/>
                 </a:solidFill>
-                <a:latin typeface="Segoe UI"/>
+                <a:latin typeface="Segoe UI" panose="020B0502040204020203"/>
               </a:rPr>
               <a:t>Le diagnostic décrit 2021-2022</a:t>
             </a:r>
+            <a:endParaRPr sz="1100" b="1">
+              <a:solidFill>
+                <a:srgbClr val="12120F"/>
+              </a:solidFill>
+              <a:latin typeface="Segoe UI" panose="020B0502040204020203"/>
+            </a:endParaRPr>
           </a:p>
         </p:txBody>
       </p:sp>
@@ -16509,7 +17862,7 @@
           <a:noFill/>
         </p:spPr>
         <p:txBody>
-          <a:bodyPr wrap="square" lIns="0" rIns="0" tIns="0" bIns="0">
+          <a:bodyPr wrap="square" lIns="0" tIns="0" rIns="0" bIns="0">
             <a:spAutoFit/>
           </a:bodyPr>
           <a:lstStyle/>
@@ -16524,10 +17877,16 @@
                 <a:solidFill>
                   <a:srgbClr val="55544F"/>
                 </a:solidFill>
-                <a:latin typeface="Segoe UI"/>
+                <a:latin typeface="Segoe UI" panose="020B0502040204020203"/>
               </a:rPr>
               <a:t>Tout déploiement postérieur est invisible. La hiérarchie des besoins reste valable tant que les écarts ne sont pas comblés.</a:t>
             </a:r>
+            <a:endParaRPr sz="950" b="0">
+              <a:solidFill>
+                <a:srgbClr val="55544F"/>
+              </a:solidFill>
+              <a:latin typeface="Segoe UI" panose="020B0502040204020203"/>
+            </a:endParaRPr>
           </a:p>
         </p:txBody>
       </p:sp>
@@ -16592,7 +17951,7 @@
           <a:noFill/>
         </p:spPr>
         <p:txBody>
-          <a:bodyPr wrap="square" lIns="0" rIns="0" tIns="0" bIns="0">
+          <a:bodyPr wrap="square" lIns="0" tIns="0" rIns="0" bIns="0">
             <a:spAutoFit/>
           </a:bodyPr>
           <a:lstStyle/>
@@ -16607,10 +17966,16 @@
                 <a:solidFill>
                   <a:srgbClr val="12120F"/>
                 </a:solidFill>
-                <a:latin typeface="Segoe UI"/>
+                <a:latin typeface="Segoe UI" panose="020B0502040204020203"/>
               </a:rPr>
               <a:t>Les scores communaux et préfectoraux ne sont pas comparables</a:t>
             </a:r>
+            <a:endParaRPr sz="1100" b="1">
+              <a:solidFill>
+                <a:srgbClr val="12120F"/>
+              </a:solidFill>
+              <a:latin typeface="Segoe UI" panose="020B0502040204020203"/>
+            </a:endParaRPr>
           </a:p>
         </p:txBody>
       </p:sp>
@@ -16631,7 +17996,7 @@
           <a:noFill/>
         </p:spPr>
         <p:txBody>
-          <a:bodyPr wrap="square" lIns="0" rIns="0" tIns="0" bIns="0">
+          <a:bodyPr wrap="square" lIns="0" tIns="0" rIns="0" bIns="0">
             <a:spAutoFit/>
           </a:bodyPr>
           <a:lstStyle/>
@@ -16646,10 +18011,16 @@
                 <a:solidFill>
                   <a:srgbClr val="55544F"/>
                 </a:solidFill>
-                <a:latin typeface="Segoe UI"/>
+                <a:latin typeface="Segoe UI" panose="020B0502040204020203"/>
               </a:rPr>
               <a:t>La composante d'éloignement ne repose pas sur la même mesure aux deux niveaux. Les rangs se lisent à l'intérieur de chaque niveau.</a:t>
             </a:r>
+            <a:endParaRPr sz="950" b="0">
+              <a:solidFill>
+                <a:srgbClr val="55544F"/>
+              </a:solidFill>
+              <a:latin typeface="Segoe UI" panose="020B0502040204020203"/>
+            </a:endParaRPr>
           </a:p>
         </p:txBody>
       </p:sp>
@@ -16714,7 +18085,7 @@
           <a:noFill/>
         </p:spPr>
         <p:txBody>
-          <a:bodyPr wrap="square" lIns="0" rIns="0" tIns="0" bIns="0">
+          <a:bodyPr wrap="square" lIns="0" tIns="0" rIns="0" bIns="0">
             <a:spAutoFit/>
           </a:bodyPr>
           <a:lstStyle/>
@@ -16729,10 +18100,16 @@
                 <a:solidFill>
                   <a:srgbClr val="12120F"/>
                 </a:solidFill>
-                <a:latin typeface="Segoe UI"/>
+                <a:latin typeface="Segoe UI" panose="020B0502040204020203"/>
               </a:rPr>
               <a:t>Un score élevé signale un besoin, pas une solution</a:t>
             </a:r>
+            <a:endParaRPr sz="1100" b="1">
+              <a:solidFill>
+                <a:srgbClr val="12120F"/>
+              </a:solidFill>
+              <a:latin typeface="Segoe UI" panose="020B0502040204020203"/>
+            </a:endParaRPr>
           </a:p>
         </p:txBody>
       </p:sp>
@@ -16753,7 +18130,7 @@
           <a:noFill/>
         </p:spPr>
         <p:txBody>
-          <a:bodyPr wrap="square" lIns="0" rIns="0" tIns="0" bIns="0">
+          <a:bodyPr wrap="square" lIns="0" tIns="0" rIns="0" bIns="0">
             <a:spAutoFit/>
           </a:bodyPr>
           <a:lstStyle/>
@@ -16768,10 +18145,16 @@
                 <a:solidFill>
                   <a:srgbClr val="55544F"/>
                 </a:solidFill>
-                <a:latin typeface="Segoe UI"/>
+                <a:latin typeface="Segoe UI" panose="020B0502040204020203"/>
               </a:rPr>
               <a:t>L'indice ne dit rien du coût, de la faisabilité ni de la rentabilité d'une intervention. Il hiérarchise des besoins mesurés — préalable à un arbitrage, jamais son substitut.</a:t>
             </a:r>
+            <a:endParaRPr sz="950" b="0">
+              <a:solidFill>
+                <a:srgbClr val="55544F"/>
+              </a:solidFill>
+              <a:latin typeface="Segoe UI" panose="020B0502040204020203"/>
+            </a:endParaRPr>
           </a:p>
         </p:txBody>
       </p:sp>
@@ -16836,7 +18219,7 @@
           <a:noFill/>
         </p:spPr>
         <p:txBody>
-          <a:bodyPr wrap="square" lIns="0" rIns="0" tIns="0" bIns="0">
+          <a:bodyPr wrap="square" lIns="0" tIns="0" rIns="0" bIns="0">
             <a:spAutoFit/>
           </a:bodyPr>
           <a:lstStyle/>
@@ -16851,10 +18234,16 @@
                 <a:solidFill>
                   <a:srgbClr val="12120F"/>
                 </a:solidFill>
-                <a:latin typeface="Segoe UI"/>
+                <a:latin typeface="Segoe UI" panose="020B0502040204020203"/>
               </a:rPr>
               <a:t>La structure par âge n'est pas prise en compte</a:t>
             </a:r>
+            <a:endParaRPr sz="1100" b="1">
+              <a:solidFill>
+                <a:srgbClr val="12120F"/>
+              </a:solidFill>
+              <a:latin typeface="Segoe UI" panose="020B0502040204020203"/>
+            </a:endParaRPr>
           </a:p>
         </p:txBody>
       </p:sp>
@@ -16875,7 +18264,7 @@
           <a:noFill/>
         </p:spPr>
         <p:txBody>
-          <a:bodyPr wrap="square" lIns="0" rIns="0" tIns="0" bIns="0">
+          <a:bodyPr wrap="square" lIns="0" tIns="0" rIns="0" bIns="0">
             <a:spAutoFit/>
           </a:bodyPr>
           <a:lstStyle/>
@@ -16890,10 +18279,16 @@
                 <a:solidFill>
                   <a:srgbClr val="55544F"/>
                 </a:solidFill>
-                <a:latin typeface="Segoe UI"/>
+                <a:latin typeface="Segoe UI" panose="020B0502040204020203"/>
               </a:rPr>
               <a:t>Un dénominateur « 15 ans et plus » serait plus juste. Les tableaux d'âges n'ont pas pu être extraits avec une garantie arithmétique suffisante : ils ont été écartés plutôt que repris sans contrôle.</a:t>
             </a:r>
+            <a:endParaRPr sz="950" b="0">
+              <a:solidFill>
+                <a:srgbClr val="55544F"/>
+              </a:solidFill>
+              <a:latin typeface="Segoe UI" panose="020B0502040204020203"/>
+            </a:endParaRPr>
           </a:p>
         </p:txBody>
       </p:sp>
@@ -17221,6 +18616,10 @@
       </a:style>
     </a:lnDef>
   </a:objectDefaults>
-  <a:extraClrSchemeLst/>
+  <a:extLst>
+    <a:ext uri="{05A4C25C-085E-4340-85A3-A5531E510DB2}">
+      <thm15:themeFamily xmlns:thm15="http://schemas.microsoft.com/office/thememl/2012/main" name="Office Theme" id="{62F939B6-93AF-4DB8-9C6B-D6C7DFDC589F}" vid="{4A3C46E8-61CC-4603-A589-7422A47A8E4A}"/>
+    </a:ext>
+  </a:extLst>
 </a:theme>
 </file>